--- a/slides/session1/01-session1-fundamentals.pptx
+++ b/slides/session1/01-session1-fundamentals.pptx
@@ -10415,7 +10415,7 @@
                   <a:srgbClr val="212121"/>
                 </a:solidFill>
               </a:rPr>
-              <a:t>KLEE found 56 bugs in GNU coreutils — code tested for 15 years</a:t>
+              <a:t>KLEE found 56 serious bugs in coreutils, busybox and Minix — including three in coreutils that had survived 15 years of testing</a:t>
             </a:r>
           </a:p>
           <a:p>
@@ -10430,7 +10430,7 @@
                   <a:srgbClr val="212121"/>
                 </a:solidFill>
               </a:rPr>
-              <a:t>Microsoft SAGE fuzzed Windows file parsers with symbolic execution; credited with finding 1/3 of all Win7 file-parsing bugs</a:t>
+              <a:t>Microsoft SAGE fuzzed Windows file parsers with symbolic execution; it found ~1/3 of all bugs caught by file fuzzing during Windows 7 development — running last, after every other tool</a:t>
             </a:r>
           </a:p>
           <a:p>
@@ -10549,7 +10549,7 @@
                   <a:srgbClr val="212121"/>
                 </a:solidFill>
               </a:rPr>
-              <a:t>Astrée (abstract interpretation) proved absence of runtime errors in Airbus A380 fly-by-wire control code</a:t>
+              <a:t>Astrée (abstract interpretation) proved absence of runtime errors in the Airbus A340 fly-by-wire code — 132,000 lines of C — and was then applied to the A380</a:t>
             </a:r>
           </a:p>
           <a:p>
@@ -10579,7 +10579,7 @@
                   <a:srgbClr val="212121"/>
                 </a:solidFill>
               </a:rPr>
-              <a:t>CompCert — a C compiler with a proof that compilation preserves semantics; fuzzers find zero wrong-code bugs in it</a:t>
+              <a:t>CompCert — a C compiler with a proof that compilation preserves semantics; six CPU-years of fuzzing found no wrong-code bugs in its verified core, while every other compiler tested failed</a:t>
             </a:r>
           </a:p>
         </p:txBody>
@@ -10832,7 +10832,7 @@
                   <a:srgbClr val="212121"/>
                 </a:solidFill>
               </a:rPr>
-              <a:t>4. Which technique proved the A380 flight-control code free of runtime errors?</a:t>
+              <a:t>4. Which technique proved the A340 flight-control code free of runtime errors?</a:t>
             </a:r>
           </a:p>
           <a:p>

--- a/slides/session1/01-session1-fundamentals.pptx
+++ b/slides/session1/01-session1-fundamentals.pptx
@@ -3572,6 +3572,7 @@
                 <a:solidFill>
                   <a:srgbClr val="212121"/>
                 </a:solidFill>
+                <a:hlinkClick r:id="rId2"/>
               </a:rPr>
               <a:t>Built on the COMP63342 Software Security course (University of Manchester)</a:t>
             </a:r>

--- a/slides/session1/01-session1-fundamentals.pptx
+++ b/slides/session1/01-session1-fundamentals.pptx
@@ -10095,7 +10095,7 @@
                   <a:srgbClr val="5A0A7A"/>
                 </a:solidFill>
               </a:rPr>
-              <a:t>When software fails: two classics</a:t>
+              <a:t>When software fails: two classics and a fresh one</a:t>
             </a:r>
           </a:p>
         </p:txBody>
@@ -10133,7 +10133,7 @@
                   <a:srgbClr val="212121"/>
                 </a:solidFill>
               </a:rPr>
-              <a:t>Ariane 5, 1996 — a 64-bit float squeezed into a 16-bit integer. The conversion overflowed; the rocket self-destructed 40 seconds after lift-off.</a:t>
+              <a:t>Ariane 5, 1996: a 64-bit float squeezed into a 16-bit integer. The conversion overflowed; the rocket self-destructed 40 seconds after lift-off.</a:t>
             </a:r>
           </a:p>
           <a:p>
@@ -10163,7 +10163,7 @@
                   <a:srgbClr val="212121"/>
                 </a:solidFill>
               </a:rPr>
-              <a:t>Therac-25, 1985–87 — a race condition between operator keystrokes and the radiation beam controller. Six massive overdoses, several fatal.</a:t>
+              <a:t>Therac-25, 1985–87: a race condition between operator keystrokes and the radiation beam controller. Six massive overdoses, several fatal.</a:t>
             </a:r>
           </a:p>
           <a:p>
@@ -10193,6 +10193,36 @@
                   <a:srgbClr val="212121"/>
                 </a:solidFill>
               </a:rPr>
+              <a:t>CrowdStrike, 2024: a security update supplied 21 input fields to sensor code expecting 20. The out-of-bounds read blue-screened 8.5 million Windows machines; the bad file was live for just 78 minutes.</a:t>
+            </a:r>
+          </a:p>
+          <a:p>
+            <a:pPr lvl="1">
+              <a:spcAft>
+                <a:spcPts val="800"/>
+              </a:spcAft>
+            </a:pPr>
+            <a:r>
+              <a:rPr sz="2000">
+                <a:solidFill>
+                  <a:srgbClr val="212121"/>
+                </a:solidFill>
+              </a:rPr>
+              <a:t>It passed the release tooling: the content validator itself had a bug, and no test ever read the 21st field.</a:t>
+            </a:r>
+          </a:p>
+          <a:p>
+            <a:pPr>
+              <a:spcAft>
+                <a:spcPts val="800"/>
+              </a:spcAft>
+            </a:pPr>
+            <a:r>
+              <a:rPr sz="2200">
+                <a:solidFill>
+                  <a:srgbClr val="212121"/>
+                </a:solidFill>
+              </a:rPr>
               <a:t/>
             </a:r>
           </a:p>
@@ -10208,7 +10238,7 @@
                   <a:srgbClr val="212121"/>
                 </a:solidFill>
               </a:rPr>
-              <a:t>An integer overflow and a race condition. Hold that thought — you will hunt both bug classes yourself in Session 2.</a:t>
+              <a:t>An integer overflow, a race condition, and an out-of-bounds read. Hold that thought — you will hunt all three bug classes yourself in Session 2.</a:t>
             </a:r>
           </a:p>
         </p:txBody>

--- a/slides/session1/01-session1-fundamentals.pptx
+++ b/slides/session1/01-session1-fundamentals.pptx
@@ -50,6 +50,7 @@
     <p:sldId id="298" r:id="rId49"/>
     <p:sldId id="299" r:id="rId50"/>
     <p:sldId id="300" r:id="rId51"/>
+    <p:sldId id="301" r:id="rId52"/>
   </p:sldIdLst>
   <p:sldSz cx="12191695" cy="6858000" type="screen4x3"/>
   <p:notesSz cx="6858000" cy="9144000"/>
@@ -3625,6 +3626,155 @@
                   <a:srgbClr val="5A0A7A"/>
                 </a:solidFill>
               </a:rPr>
+              <a:t>Memory safety: the bug class that won't die</a:t>
+            </a:r>
+          </a:p>
+        </p:txBody>
+      </p:sp>
+      <p:sp>
+        <p:nvSpPr>
+          <p:cNvPr id="3" name="TextBox 2"/>
+          <p:cNvSpPr txBox="1"/>
+          <p:nvPr/>
+        </p:nvSpPr>
+        <p:spPr>
+          <a:xfrm>
+            <a:off x="731520" y="1645920"/>
+            <a:ext cx="10789920" cy="4937760"/>
+          </a:xfrm>
+          <a:prstGeom prst="rect">
+            <a:avLst/>
+          </a:prstGeom>
+          <a:noFill/>
+        </p:spPr>
+        <p:txBody>
+          <a:bodyPr wrap="square">
+            <a:spAutoFit/>
+          </a:bodyPr>
+          <a:lstStyle/>
+          <a:p>
+            <a:pPr>
+              <a:spcAft>
+                <a:spcPts val="800"/>
+              </a:spcAft>
+            </a:pPr>
+            <a:r>
+              <a:rPr sz="2400">
+                <a:solidFill>
+                  <a:srgbClr val="212121"/>
+                </a:solidFill>
+              </a:rPr>
+              <a:t>C trusts you completely: every array index, every pointer dereference, every free() is your problem.</a:t>
+            </a:r>
+          </a:p>
+          <a:p>
+            <a:pPr>
+              <a:spcAft>
+                <a:spcPts val="800"/>
+              </a:spcAft>
+            </a:pPr>
+            <a:r>
+              <a:rPr sz="2400">
+                <a:solidFill>
+                  <a:srgbClr val="212121"/>
+                </a:solidFill>
+              </a:rPr>
+              <a:t>Get it wrong and the result is undefined behaviour — the program may crash, corrupt data, or look perfectly fine until it ships.</a:t>
+            </a:r>
+          </a:p>
+          <a:p>
+            <a:pPr>
+              <a:spcAft>
+                <a:spcPts val="800"/>
+              </a:spcAft>
+            </a:pPr>
+            <a:r>
+              <a:rPr sz="2400">
+                <a:solidFill>
+                  <a:srgbClr val="212121"/>
+                </a:solidFill>
+              </a:rPr>
+              <a:t>“Looks fine in testing” is exactly what undefined behaviour does best.</a:t>
+            </a:r>
+          </a:p>
+          <a:p>
+            <a:pPr>
+              <a:spcAft>
+                <a:spcPts val="800"/>
+              </a:spcAft>
+            </a:pPr>
+            <a:r>
+              <a:rPr sz="2400">
+                <a:solidFill>
+                  <a:srgbClr val="212121"/>
+                </a:solidFill>
+              </a:rPr>
+              <a:t/>
+            </a:r>
+          </a:p>
+          <a:p>
+            <a:pPr>
+              <a:spcAft>
+                <a:spcPts val="800"/>
+              </a:spcAft>
+            </a:pPr>
+            <a:r>
+              <a:rPr sz="2400">
+                <a:solidFill>
+                  <a:srgbClr val="212121"/>
+                </a:solidFill>
+              </a:rPr>
+              <a:t>How big is the problem? Let's look at the data.</a:t>
+            </a:r>
+          </a:p>
+        </p:txBody>
+      </p:sp>
+    </p:spTree>
+  </p:cSld>
+  <p:clrMapOvr>
+    <a:masterClrMapping/>
+  </p:clrMapOvr>
+</p:sld>
+</file>
+
+<file path=ppt/slides/slide11.xml><?xml version="1.0" encoding="utf-8"?>
+<p:sld xmlns:a="http://schemas.openxmlformats.org/drawingml/2006/main" xmlns:p="http://schemas.openxmlformats.org/presentationml/2006/main" xmlns:r="http://schemas.openxmlformats.org/officeDocument/2006/relationships">
+  <p:cSld>
+    <p:spTree>
+      <p:nvGrpSpPr>
+        <p:cNvPr id="1" name=""/>
+        <p:cNvGrpSpPr/>
+        <p:nvPr/>
+      </p:nvGrpSpPr>
+      <p:grpSpPr/>
+      <p:sp>
+        <p:nvSpPr>
+          <p:cNvPr id="2" name="TextBox 1"/>
+          <p:cNvSpPr txBox="1"/>
+          <p:nvPr/>
+        </p:nvSpPr>
+        <p:spPr>
+          <a:xfrm>
+            <a:off x="548640" y="365760"/>
+            <a:ext cx="11064240" cy="1005840"/>
+          </a:xfrm>
+          <a:prstGeom prst="rect">
+            <a:avLst/>
+          </a:prstGeom>
+          <a:noFill/>
+        </p:spPr>
+        <p:txBody>
+          <a:bodyPr wrap="square">
+            <a:spAutoFit/>
+          </a:bodyPr>
+          <a:lstStyle/>
+          <a:p>
+            <a:r>
+              <a:rPr sz="3600" b="1">
+                <a:solidFill>
+                  <a:srgbClr val="5A0A7A"/>
+                </a:solidFill>
+              </a:rPr>
               <a:t>Vulnerabilities keep climbing</a:t>
             </a:r>
           </a:p>
@@ -3694,7 +3844,7 @@
 </p:sld>
 </file>
 
-<file path=ppt/slides/slide11.xml><?xml version="1.0" encoding="utf-8"?>
+<file path=ppt/slides/slide12.xml><?xml version="1.0" encoding="utf-8"?>
 <p:sld xmlns:a="http://schemas.openxmlformats.org/drawingml/2006/main" xmlns:p="http://schemas.openxmlformats.org/presentationml/2006/main" xmlns:r="http://schemas.openxmlformats.org/officeDocument/2006/relationships">
   <p:cSld>
     <p:spTree>
@@ -3801,7 +3951,7 @@
 </p:sld>
 </file>
 
-<file path=ppt/slides/slide12.xml><?xml version="1.0" encoding="utf-8"?>
+<file path=ppt/slides/slide13.xml><?xml version="1.0" encoding="utf-8"?>
 <p:sld xmlns:a="http://schemas.openxmlformats.org/drawingml/2006/main" xmlns:p="http://schemas.openxmlformats.org/presentationml/2006/main" xmlns:r="http://schemas.openxmlformats.org/officeDocument/2006/relationships">
   <p:cSld>
     <p:spTree>
@@ -3953,237 +4103,6 @@
                 </a:solidFill>
               </a:rPr>
               <a:t>proving the C/C++ we already run correct — formal verification. Tonight is about this one.</a:t>
-            </a:r>
-          </a:p>
-        </p:txBody>
-      </p:sp>
-    </p:spTree>
-  </p:cSld>
-  <p:clrMapOvr>
-    <a:masterClrMapping/>
-  </p:clrMapOvr>
-</p:sld>
-</file>
-
-<file path=ppt/slides/slide13.xml><?xml version="1.0" encoding="utf-8"?>
-<p:sld xmlns:a="http://schemas.openxmlformats.org/drawingml/2006/main" xmlns:p="http://schemas.openxmlformats.org/presentationml/2006/main" xmlns:r="http://schemas.openxmlformats.org/officeDocument/2006/relationships">
-  <p:cSld>
-    <p:spTree>
-      <p:nvGrpSpPr>
-        <p:cNvPr id="1" name=""/>
-        <p:cNvGrpSpPr/>
-        <p:nvPr/>
-      </p:nvGrpSpPr>
-      <p:grpSpPr/>
-      <p:sp>
-        <p:nvSpPr>
-          <p:cNvPr id="2" name="TextBox 1"/>
-          <p:cNvSpPr txBox="1"/>
-          <p:nvPr/>
-        </p:nvSpPr>
-        <p:spPr>
-          <a:xfrm>
-            <a:off x="548640" y="365760"/>
-            <a:ext cx="11064240" cy="1005840"/>
-          </a:xfrm>
-          <a:prstGeom prst="rect">
-            <a:avLst/>
-          </a:prstGeom>
-          <a:noFill/>
-        </p:spPr>
-        <p:txBody>
-          <a:bodyPr wrap="square">
-            <a:spAutoFit/>
-          </a:bodyPr>
-          <a:lstStyle/>
-          <a:p>
-            <a:r>
-              <a:rPr sz="3600" b="1">
-                <a:solidFill>
-                  <a:srgbClr val="5A0A7A"/>
-                </a:solidFill>
-              </a:rPr>
-              <a:t>Exercise 1 — Spot the Bug (15 min)</a:t>
-            </a:r>
-          </a:p>
-        </p:txBody>
-      </p:sp>
-      <p:sp>
-        <p:nvSpPr>
-          <p:cNvPr id="3" name="TextBox 2"/>
-          <p:cNvSpPr txBox="1"/>
-          <p:nvPr/>
-        </p:nvSpPr>
-        <p:spPr>
-          <a:xfrm>
-            <a:off x="731520" y="1463040"/>
-            <a:ext cx="10789920" cy="5120640"/>
-          </a:xfrm>
-          <a:prstGeom prst="rect">
-            <a:avLst/>
-          </a:prstGeom>
-          <a:noFill/>
-        </p:spPr>
-        <p:txBody>
-          <a:bodyPr wrap="square">
-            <a:spAutoFit/>
-          </a:bodyPr>
-          <a:lstStyle/>
-          <a:p>
-            <a:pPr>
-              <a:spcAft>
-                <a:spcPts val="800"/>
-              </a:spcAft>
-            </a:pPr>
-            <a:r>
-              <a:rPr sz="2200">
-                <a:solidFill>
-                  <a:srgbClr val="212121"/>
-                </a:solidFill>
-              </a:rPr>
-              <a:t>In pairs, 7 minutes, on the handout:</a:t>
-            </a:r>
-          </a:p>
-          <a:p>
-            <a:pPr>
-              <a:spcAft>
-                <a:spcPts val="0"/>
-              </a:spcAft>
-            </a:pPr>
-            <a:r>
-              <a:rPr sz="1800">
-                <a:solidFill>
-                  <a:srgbClr val="212121"/>
-                </a:solidFill>
-                <a:latin typeface="Courier New"/>
-              </a:rPr>
-              <a:t>int *zPtr;</a:t>
-            </a:r>
-          </a:p>
-          <a:p>
-            <a:pPr>
-              <a:spcAft>
-                <a:spcPts val="0"/>
-              </a:spcAft>
-            </a:pPr>
-            <a:r>
-              <a:rPr sz="1800">
-                <a:solidFill>
-                  <a:srgbClr val="212121"/>
-                </a:solidFill>
-                <a:latin typeface="Courier New"/>
-              </a:rPr>
-              <a:t>int *aPtr = NULL;</a:t>
-            </a:r>
-          </a:p>
-          <a:p>
-            <a:pPr>
-              <a:spcAft>
-                <a:spcPts val="0"/>
-              </a:spcAft>
-            </a:pPr>
-            <a:r>
-              <a:rPr sz="1800">
-                <a:solidFill>
-                  <a:srgbClr val="212121"/>
-                </a:solidFill>
-                <a:latin typeface="Courier New"/>
-              </a:rPr>
-              <a:t>void *sPtr = NULL;</a:t>
-            </a:r>
-          </a:p>
-          <a:p>
-            <a:pPr>
-              <a:spcAft>
-                <a:spcPts val="0"/>
-              </a:spcAft>
-            </a:pPr>
-            <a:r>
-              <a:rPr sz="1800">
-                <a:solidFill>
-                  <a:srgbClr val="212121"/>
-                </a:solidFill>
-                <a:latin typeface="Courier New"/>
-              </a:rPr>
-              <a:t>int number, i;</a:t>
-            </a:r>
-          </a:p>
-          <a:p>
-            <a:pPr>
-              <a:spcAft>
-                <a:spcPts val="0"/>
-              </a:spcAft>
-            </a:pPr>
-            <a:r>
-              <a:rPr sz="1800">
-                <a:solidFill>
-                  <a:srgbClr val="212121"/>
-                </a:solidFill>
-                <a:latin typeface="Courier New"/>
-              </a:rPr>
-              <a:t>int z[5] = {1, 2, 3, 4, 5};</a:t>
-            </a:r>
-          </a:p>
-          <a:p>
-            <a:pPr>
-              <a:spcAft>
-                <a:spcPts val="0"/>
-              </a:spcAft>
-            </a:pPr>
-            <a:r>
-              <a:rPr sz="1800">
-                <a:solidFill>
-                  <a:srgbClr val="212121"/>
-                </a:solidFill>
-                <a:latin typeface="Courier New"/>
-              </a:rPr>
-              <a:t>sPtr = z;   ++zPtr;   number = zPtr;</a:t>
-            </a:r>
-          </a:p>
-          <a:p>
-            <a:pPr>
-              <a:spcAft>
-                <a:spcPts val="0"/>
-              </a:spcAft>
-            </a:pPr>
-            <a:r>
-              <a:rPr sz="1800">
-                <a:solidFill>
-                  <a:srgbClr val="212121"/>
-                </a:solidFill>
-                <a:latin typeface="Courier New"/>
-              </a:rPr>
-              <a:t>number = *zPtr[2];   number = *sPtr;   ++z;</a:t>
-            </a:r>
-          </a:p>
-          <a:p>
-            <a:pPr>
-              <a:spcAft>
-                <a:spcPts val="800"/>
-              </a:spcAft>
-            </a:pPr>
-            <a:r>
-              <a:rPr sz="2200">
-                <a:solidFill>
-                  <a:srgbClr val="212121"/>
-                </a:solidFill>
-              </a:rPr>
-              <a:t>For each bug: WHAT is wrong, and what could happen at runtime?</a:t>
-            </a:r>
-          </a:p>
-          <a:p>
-            <a:pPr>
-              <a:spcAft>
-                <a:spcPts val="800"/>
-              </a:spcAft>
-            </a:pPr>
-            <a:r>
-              <a:rPr sz="2200">
-                <a:solidFill>
-                  <a:srgbClr val="212121"/>
-                </a:solidFill>
-              </a:rPr>
-              <a:t>There are at least six. Debrief: one bug per pair.</a:t>
             </a:r>
           </a:p>
         </p:txBody>
@@ -4234,7 +4153,7 @@
                   <a:srgbClr val="5A0A7A"/>
                 </a:solidFill>
               </a:rPr>
-              <a:t>Verification vs. validation</a:t>
+              <a:t>Exercise 1 — Spot the Bug (15 min)</a:t>
             </a:r>
           </a:p>
         </p:txBody>
@@ -4247,8 +4166,8 @@
         </p:nvSpPr>
         <p:spPr>
           <a:xfrm>
-            <a:off x="731520" y="1828800"/>
-            <a:ext cx="10789920" cy="4754880"/>
+            <a:off x="731520" y="1463040"/>
+            <a:ext cx="10789920" cy="5120640"/>
           </a:xfrm>
           <a:prstGeom prst="rect">
             <a:avLst/>
@@ -4267,57 +4186,154 @@
               </a:spcAft>
             </a:pPr>
             <a:r>
-              <a:rPr sz="2600">
-                <a:solidFill>
-                  <a:srgbClr val="212121"/>
-                </a:solidFill>
-              </a:rPr>
-              <a:t>Validation — are we building the right thing? (ask the users)</a:t>
-            </a:r>
-          </a:p>
-          <a:p>
-            <a:pPr>
-              <a:spcAft>
-                <a:spcPts val="800"/>
-              </a:spcAft>
-            </a:pPr>
-            <a:r>
-              <a:rPr sz="2600">
-                <a:solidFill>
-                  <a:srgbClr val="212121"/>
-                </a:solidFill>
-              </a:rPr>
-              <a:t>Verification — are we building the thing right? (ask the specification)</a:t>
-            </a:r>
-          </a:p>
-          <a:p>
-            <a:pPr>
-              <a:spcAft>
-                <a:spcPts val="800"/>
-              </a:spcAft>
-            </a:pPr>
-            <a:r>
-              <a:rPr sz="2600">
-                <a:solidFill>
-                  <a:srgbClr val="212121"/>
-                </a:solidFill>
-              </a:rPr>
-              <a:t/>
-            </a:r>
-          </a:p>
-          <a:p>
-            <a:pPr>
-              <a:spcAft>
-                <a:spcPts val="800"/>
-              </a:spcAft>
-            </a:pPr>
-            <a:r>
-              <a:rPr sz="2600">
-                <a:solidFill>
-                  <a:srgbClr val="212121"/>
-                </a:solidFill>
-              </a:rPr>
-              <a:t>Tonight is verification: given a program and a property, does every execution satisfy the property?</a:t>
+              <a:rPr sz="2200">
+                <a:solidFill>
+                  <a:srgbClr val="212121"/>
+                </a:solidFill>
+              </a:rPr>
+              <a:t>In pairs, 7 minutes, on the handout:</a:t>
+            </a:r>
+          </a:p>
+          <a:p>
+            <a:pPr>
+              <a:spcAft>
+                <a:spcPts val="0"/>
+              </a:spcAft>
+            </a:pPr>
+            <a:r>
+              <a:rPr sz="1800">
+                <a:solidFill>
+                  <a:srgbClr val="212121"/>
+                </a:solidFill>
+                <a:latin typeface="Courier New"/>
+              </a:rPr>
+              <a:t>int *zPtr;</a:t>
+            </a:r>
+          </a:p>
+          <a:p>
+            <a:pPr>
+              <a:spcAft>
+                <a:spcPts val="0"/>
+              </a:spcAft>
+            </a:pPr>
+            <a:r>
+              <a:rPr sz="1800">
+                <a:solidFill>
+                  <a:srgbClr val="212121"/>
+                </a:solidFill>
+                <a:latin typeface="Courier New"/>
+              </a:rPr>
+              <a:t>int *aPtr = NULL;</a:t>
+            </a:r>
+          </a:p>
+          <a:p>
+            <a:pPr>
+              <a:spcAft>
+                <a:spcPts val="0"/>
+              </a:spcAft>
+            </a:pPr>
+            <a:r>
+              <a:rPr sz="1800">
+                <a:solidFill>
+                  <a:srgbClr val="212121"/>
+                </a:solidFill>
+                <a:latin typeface="Courier New"/>
+              </a:rPr>
+              <a:t>void *sPtr = NULL;</a:t>
+            </a:r>
+          </a:p>
+          <a:p>
+            <a:pPr>
+              <a:spcAft>
+                <a:spcPts val="0"/>
+              </a:spcAft>
+            </a:pPr>
+            <a:r>
+              <a:rPr sz="1800">
+                <a:solidFill>
+                  <a:srgbClr val="212121"/>
+                </a:solidFill>
+                <a:latin typeface="Courier New"/>
+              </a:rPr>
+              <a:t>int number, i;</a:t>
+            </a:r>
+          </a:p>
+          <a:p>
+            <a:pPr>
+              <a:spcAft>
+                <a:spcPts val="0"/>
+              </a:spcAft>
+            </a:pPr>
+            <a:r>
+              <a:rPr sz="1800">
+                <a:solidFill>
+                  <a:srgbClr val="212121"/>
+                </a:solidFill>
+                <a:latin typeface="Courier New"/>
+              </a:rPr>
+              <a:t>int z[5] = {1, 2, 3, 4, 5};</a:t>
+            </a:r>
+          </a:p>
+          <a:p>
+            <a:pPr>
+              <a:spcAft>
+                <a:spcPts val="0"/>
+              </a:spcAft>
+            </a:pPr>
+            <a:r>
+              <a:rPr sz="1800">
+                <a:solidFill>
+                  <a:srgbClr val="212121"/>
+                </a:solidFill>
+                <a:latin typeface="Courier New"/>
+              </a:rPr>
+              <a:t>sPtr = z;   ++zPtr;   number = zPtr;</a:t>
+            </a:r>
+          </a:p>
+          <a:p>
+            <a:pPr>
+              <a:spcAft>
+                <a:spcPts val="0"/>
+              </a:spcAft>
+            </a:pPr>
+            <a:r>
+              <a:rPr sz="1800">
+                <a:solidFill>
+                  <a:srgbClr val="212121"/>
+                </a:solidFill>
+                <a:latin typeface="Courier New"/>
+              </a:rPr>
+              <a:t>number = *zPtr[2];   number = *sPtr;   ++z;</a:t>
+            </a:r>
+          </a:p>
+          <a:p>
+            <a:pPr>
+              <a:spcAft>
+                <a:spcPts val="800"/>
+              </a:spcAft>
+            </a:pPr>
+            <a:r>
+              <a:rPr sz="2200">
+                <a:solidFill>
+                  <a:srgbClr val="212121"/>
+                </a:solidFill>
+              </a:rPr>
+              <a:t>For each bug: WHAT is wrong, and what could happen at runtime?</a:t>
+            </a:r>
+          </a:p>
+          <a:p>
+            <a:pPr>
+              <a:spcAft>
+                <a:spcPts val="800"/>
+              </a:spcAft>
+            </a:pPr>
+            <a:r>
+              <a:rPr sz="2200">
+                <a:solidFill>
+                  <a:srgbClr val="212121"/>
+                </a:solidFill>
+              </a:rPr>
+              <a:t>There are at least six. Debrief: one bug per pair.</a:t>
             </a:r>
           </a:p>
         </p:txBody>
@@ -4368,7 +4384,7 @@
                   <a:srgbClr val="5A0A7A"/>
                 </a:solidFill>
               </a:rPr>
-              <a:t>Why testing cannot prove absence</a:t>
+              <a:t>Verification vs. validation</a:t>
             </a:r>
           </a:p>
         </p:txBody>
@@ -4381,8 +4397,8 @@
         </p:nvSpPr>
         <p:spPr>
           <a:xfrm>
-            <a:off x="731520" y="1554480"/>
-            <a:ext cx="10789920" cy="5029200"/>
+            <a:off x="731520" y="1828800"/>
+            <a:ext cx="10789920" cy="4754880"/>
           </a:xfrm>
           <a:prstGeom prst="rect">
             <a:avLst/>
@@ -4401,52 +4417,37 @@
               </a:spcAft>
             </a:pPr>
             <a:r>
-              <a:rPr sz="2400">
-                <a:solidFill>
-                  <a:srgbClr val="212121"/>
-                </a:solidFill>
-              </a:rPr>
-              <a:t>One int input = 2³² cases. At a billion tests per second: about 4 seconds. Fine.</a:t>
-            </a:r>
-          </a:p>
-          <a:p>
-            <a:pPr>
-              <a:spcAft>
-                <a:spcPts val="800"/>
-              </a:spcAft>
-            </a:pPr>
-            <a:r>
-              <a:rPr sz="2400">
-                <a:solidFill>
-                  <a:srgbClr val="212121"/>
-                </a:solidFill>
-              </a:rPr>
-              <a:t>Two int inputs = 2⁶⁴ cases. Same machine: about 585 years.</a:t>
-            </a:r>
-          </a:p>
-          <a:p>
-            <a:pPr>
-              <a:spcAft>
-                <a:spcPts val="800"/>
-              </a:spcAft>
-            </a:pPr>
-            <a:r>
-              <a:rPr sz="2400">
-                <a:solidFill>
-                  <a:srgbClr val="212121"/>
-                </a:solidFill>
-              </a:rPr>
-              <a:t>getPassword's input isn't even bounded — there is no test suite to write.</a:t>
-            </a:r>
-          </a:p>
-          <a:p>
-            <a:pPr>
-              <a:spcAft>
-                <a:spcPts val="800"/>
-              </a:spcAft>
-            </a:pPr>
-            <a:r>
-              <a:rPr sz="2400">
+              <a:rPr sz="2600">
+                <a:solidFill>
+                  <a:srgbClr val="212121"/>
+                </a:solidFill>
+              </a:rPr>
+              <a:t>Validation — are we building the right thing? (ask the users)</a:t>
+            </a:r>
+          </a:p>
+          <a:p>
+            <a:pPr>
+              <a:spcAft>
+                <a:spcPts val="800"/>
+              </a:spcAft>
+            </a:pPr>
+            <a:r>
+              <a:rPr sz="2600">
+                <a:solidFill>
+                  <a:srgbClr val="212121"/>
+                </a:solidFill>
+              </a:rPr>
+              <a:t>Verification — are we building the thing right? (ask the specification)</a:t>
+            </a:r>
+          </a:p>
+          <a:p>
+            <a:pPr>
+              <a:spcAft>
+                <a:spcPts val="800"/>
+              </a:spcAft>
+            </a:pPr>
+            <a:r>
+              <a:rPr sz="2600">
                 <a:solidFill>
                   <a:srgbClr val="212121"/>
                 </a:solidFill>
@@ -4461,42 +4462,12 @@
               </a:spcAft>
             </a:pPr>
             <a:r>
-              <a:rPr sz="2400">
-                <a:solidFill>
-                  <a:srgbClr val="212121"/>
-                </a:solidFill>
-              </a:rPr>
-              <a:t>“Program testing can be used to show the presence of bugs, but never to show their absence.” — E. W. Dijkstra, 1970</a:t>
-            </a:r>
-          </a:p>
-          <a:p>
-            <a:pPr>
-              <a:spcAft>
-                <a:spcPts val="800"/>
-              </a:spcAft>
-            </a:pPr>
-            <a:r>
-              <a:rPr sz="2400">
-                <a:solidFill>
-                  <a:srgbClr val="212121"/>
-                </a:solidFill>
-              </a:rPr>
-              <a:t/>
-            </a:r>
-          </a:p>
-          <a:p>
-            <a:pPr>
-              <a:spcAft>
-                <a:spcPts val="800"/>
-              </a:spcAft>
-            </a:pPr>
-            <a:r>
-              <a:rPr sz="2400">
-                <a:solidFill>
-                  <a:srgbClr val="212121"/>
-                </a:solidFill>
-              </a:rPr>
-              <a:t>A green test suite means: no bug in the cases we tried.</a:t>
+              <a:rPr sz="2600">
+                <a:solidFill>
+                  <a:srgbClr val="212121"/>
+                </a:solidFill>
+              </a:rPr>
+              <a:t>Tonight is verification: given a program and a property, does every execution satisfy the property?</a:t>
             </a:r>
           </a:p>
         </p:txBody>
@@ -4547,7 +4518,7 @@
                   <a:srgbClr val="5A0A7A"/>
                 </a:solidFill>
               </a:rPr>
-              <a:t>The idea of verification</a:t>
+              <a:t>Why testing cannot prove absence</a:t>
             </a:r>
           </a:p>
         </p:txBody>
@@ -4560,8 +4531,8 @@
         </p:nvSpPr>
         <p:spPr>
           <a:xfrm>
-            <a:off x="731520" y="1645920"/>
-            <a:ext cx="10789920" cy="4937760"/>
+            <a:off x="731520" y="1554480"/>
+            <a:ext cx="10789920" cy="5029200"/>
           </a:xfrm>
           <a:prstGeom prst="rect">
             <a:avLst/>
@@ -4580,22 +4551,52 @@
               </a:spcAft>
             </a:pPr>
             <a:r>
-              <a:rPr sz="2600">
-                <a:solidFill>
-                  <a:srgbClr val="212121"/>
-                </a:solidFill>
-              </a:rPr>
-              <a:t>Turn the program and the property into mathematics, and ask one question:</a:t>
-            </a:r>
-          </a:p>
-          <a:p>
-            <a:pPr>
-              <a:spcAft>
-                <a:spcPts val="800"/>
-              </a:spcAft>
-            </a:pPr>
-            <a:r>
-              <a:rPr sz="2600">
+              <a:rPr sz="2400">
+                <a:solidFill>
+                  <a:srgbClr val="212121"/>
+                </a:solidFill>
+              </a:rPr>
+              <a:t>One int input = 2³² cases. At a billion tests per second: about 4 seconds. Fine.</a:t>
+            </a:r>
+          </a:p>
+          <a:p>
+            <a:pPr>
+              <a:spcAft>
+                <a:spcPts val="800"/>
+              </a:spcAft>
+            </a:pPr>
+            <a:r>
+              <a:rPr sz="2400">
+                <a:solidFill>
+                  <a:srgbClr val="212121"/>
+                </a:solidFill>
+              </a:rPr>
+              <a:t>Two int inputs = 2⁶⁴ cases. Same machine: about 585 years.</a:t>
+            </a:r>
+          </a:p>
+          <a:p>
+            <a:pPr>
+              <a:spcAft>
+                <a:spcPts val="800"/>
+              </a:spcAft>
+            </a:pPr>
+            <a:r>
+              <a:rPr sz="2400">
+                <a:solidFill>
+                  <a:srgbClr val="212121"/>
+                </a:solidFill>
+              </a:rPr>
+              <a:t>getPassword's input isn't even bounded — there is no test suite to write.</a:t>
+            </a:r>
+          </a:p>
+          <a:p>
+            <a:pPr>
+              <a:spcAft>
+                <a:spcPts val="800"/>
+              </a:spcAft>
+            </a:pPr>
+            <a:r>
+              <a:rPr sz="2400">
                 <a:solidFill>
                   <a:srgbClr val="212121"/>
                 </a:solidFill>
@@ -4610,22 +4611,22 @@
               </a:spcAft>
             </a:pPr>
             <a:r>
-              <a:rPr sz="2600">
-                <a:solidFill>
-                  <a:srgbClr val="212121"/>
-                </a:solidFill>
-              </a:rPr>
-              <a:t>Can the program reach a state where the property fails?</a:t>
-            </a:r>
-          </a:p>
-          <a:p>
-            <a:pPr>
-              <a:spcAft>
-                <a:spcPts val="800"/>
-              </a:spcAft>
-            </a:pPr>
-            <a:r>
-              <a:rPr sz="2600">
+              <a:rPr sz="2400">
+                <a:solidFill>
+                  <a:srgbClr val="212121"/>
+                </a:solidFill>
+              </a:rPr>
+              <a:t>“Program testing can be used to show the presence of bugs, but never to show their absence.” — E. W. Dijkstra, 1970</a:t>
+            </a:r>
+          </a:p>
+          <a:p>
+            <a:pPr>
+              <a:spcAft>
+                <a:spcPts val="800"/>
+              </a:spcAft>
+            </a:pPr>
+            <a:r>
+              <a:rPr sz="2400">
                 <a:solidFill>
                   <a:srgbClr val="212121"/>
                 </a:solidFill>
@@ -4634,7 +4635,7 @@
             </a:r>
           </a:p>
           <a:p>
-            <a:pPr lvl="1">
+            <a:pPr>
               <a:spcAft>
                 <a:spcPts val="800"/>
               </a:spcAft>
@@ -4645,52 +4646,7 @@
                   <a:srgbClr val="212121"/>
                 </a:solidFill>
               </a:rPr>
-              <a:t>NO — for all inputs, all paths:  a proof.</a:t>
-            </a:r>
-          </a:p>
-          <a:p>
-            <a:pPr lvl="1">
-              <a:spcAft>
-                <a:spcPts val="800"/>
-              </a:spcAft>
-            </a:pPr>
-            <a:r>
-              <a:rPr sz="2400">
-                <a:solidFill>
-                  <a:srgbClr val="212121"/>
-                </a:solidFill>
-              </a:rPr>
-              <a:t>YES — and here is the exact input:  a counterexample.</a:t>
-            </a:r>
-          </a:p>
-          <a:p>
-            <a:pPr>
-              <a:spcAft>
-                <a:spcPts val="800"/>
-              </a:spcAft>
-            </a:pPr>
-            <a:r>
-              <a:rPr sz="2600">
-                <a:solidFill>
-                  <a:srgbClr val="212121"/>
-                </a:solidFill>
-              </a:rPr>
-              <a:t/>
-            </a:r>
-          </a:p>
-          <a:p>
-            <a:pPr>
-              <a:spcAft>
-                <a:spcPts val="800"/>
-              </a:spcAft>
-            </a:pPr>
-            <a:r>
-              <a:rPr sz="2600">
-                <a:solidFill>
-                  <a:srgbClr val="212121"/>
-                </a:solidFill>
-              </a:rPr>
-              <a:t>Both answers are useful. The second one is a free bug report.</a:t>
+              <a:t>A green test suite means: no bug in the cases we tried.</a:t>
             </a:r>
           </a:p>
         </p:txBody>
@@ -4741,7 +4697,7 @@
                   <a:srgbClr val="5A0A7A"/>
                 </a:solidFill>
               </a:rPr>
-              <a:t>Soundness and completeness</a:t>
+              <a:t>The idea of verification</a:t>
             </a:r>
           </a:p>
         </p:txBody>
@@ -4774,12 +4730,72 @@
               </a:spcAft>
             </a:pPr>
             <a:r>
+              <a:rPr sz="2600">
+                <a:solidFill>
+                  <a:srgbClr val="212121"/>
+                </a:solidFill>
+              </a:rPr>
+              <a:t>Turn the program and the property into mathematics, and ask one question:</a:t>
+            </a:r>
+          </a:p>
+          <a:p>
+            <a:pPr>
+              <a:spcAft>
+                <a:spcPts val="800"/>
+              </a:spcAft>
+            </a:pPr>
+            <a:r>
+              <a:rPr sz="2600">
+                <a:solidFill>
+                  <a:srgbClr val="212121"/>
+                </a:solidFill>
+              </a:rPr>
+              <a:t/>
+            </a:r>
+          </a:p>
+          <a:p>
+            <a:pPr>
+              <a:spcAft>
+                <a:spcPts val="800"/>
+              </a:spcAft>
+            </a:pPr>
+            <a:r>
+              <a:rPr sz="2600">
+                <a:solidFill>
+                  <a:srgbClr val="212121"/>
+                </a:solidFill>
+              </a:rPr>
+              <a:t>Can the program reach a state where the property fails?</a:t>
+            </a:r>
+          </a:p>
+          <a:p>
+            <a:pPr>
+              <a:spcAft>
+                <a:spcPts val="800"/>
+              </a:spcAft>
+            </a:pPr>
+            <a:r>
+              <a:rPr sz="2600">
+                <a:solidFill>
+                  <a:srgbClr val="212121"/>
+                </a:solidFill>
+              </a:rPr>
+              <a:t/>
+            </a:r>
+          </a:p>
+          <a:p>
+            <a:pPr lvl="1">
+              <a:spcAft>
+                <a:spcPts val="800"/>
+              </a:spcAft>
+            </a:pPr>
+            <a:r>
               <a:rPr sz="2400">
                 <a:solidFill>
                   <a:srgbClr val="212121"/>
                 </a:solidFill>
               </a:rPr>
-              <a:t>Sound — the tool never misses a bug.</a:t>
+              <a:t>NO — for all inputs, all paths:  a proof.</a:t>
             </a:r>
           </a:p>
           <a:p>
@@ -4789,52 +4805,22 @@
               </a:spcAft>
             </a:pPr>
             <a:r>
-              <a:rPr sz="2200">
-                <a:solidFill>
-                  <a:srgbClr val="212121"/>
-                </a:solidFill>
-              </a:rPr>
-              <a:t>If a sound tool says SAFE, it is safe.</a:t>
-            </a:r>
-          </a:p>
-          <a:p>
-            <a:pPr>
-              <a:spcAft>
-                <a:spcPts val="800"/>
-              </a:spcAft>
-            </a:pPr>
-            <a:r>
               <a:rPr sz="2400">
                 <a:solidFill>
                   <a:srgbClr val="212121"/>
                 </a:solidFill>
               </a:rPr>
-              <a:t>Complete — the tool never raises a false alarm.</a:t>
-            </a:r>
-          </a:p>
-          <a:p>
-            <a:pPr lvl="1">
-              <a:spcAft>
-                <a:spcPts val="800"/>
-              </a:spcAft>
-            </a:pPr>
-            <a:r>
-              <a:rPr sz="2200">
-                <a:solidFill>
-                  <a:srgbClr val="212121"/>
-                </a:solidFill>
-              </a:rPr>
-              <a:t>If a complete tool says BUG, it is a real bug.</a:t>
-            </a:r>
-          </a:p>
-          <a:p>
-            <a:pPr>
-              <a:spcAft>
-                <a:spcPts val="800"/>
-              </a:spcAft>
-            </a:pPr>
-            <a:r>
-              <a:rPr sz="2400">
+              <a:t>YES — and here is the exact input:  a counterexample.</a:t>
+            </a:r>
+          </a:p>
+          <a:p>
+            <a:pPr>
+              <a:spcAft>
+                <a:spcPts val="800"/>
+              </a:spcAft>
+            </a:pPr>
+            <a:r>
+              <a:rPr sz="2600">
                 <a:solidFill>
                   <a:srgbClr val="212121"/>
                 </a:solidFill>
@@ -4849,27 +4835,12 @@
               </a:spcAft>
             </a:pPr>
             <a:r>
-              <a:rPr sz="2400">
-                <a:solidFill>
-                  <a:srgbClr val="212121"/>
-                </a:solidFill>
-              </a:rPr>
-              <a:t>Testing is complete but not sound (every failure is real; absence proves nothing).</a:t>
-            </a:r>
-          </a:p>
-          <a:p>
-            <a:pPr>
-              <a:spcAft>
-                <a:spcPts val="800"/>
-              </a:spcAft>
-            </a:pPr>
-            <a:r>
-              <a:rPr sz="2400">
-                <a:solidFill>
-                  <a:srgbClr val="212121"/>
-                </a:solidFill>
-              </a:rPr>
-              <a:t>Most static analysers are sound but not complete (no missed bugs, but false alarms).</a:t>
+              <a:rPr sz="2600">
+                <a:solidFill>
+                  <a:srgbClr val="212121"/>
+                </a:solidFill>
+              </a:rPr>
+              <a:t>Both answers are useful. The second one is a free bug report.</a:t>
             </a:r>
           </a:p>
         </p:txBody>
@@ -4883,6 +4854,185 @@
 </file>
 
 <file path=ppt/slides/slide18.xml><?xml version="1.0" encoding="utf-8"?>
+<p:sld xmlns:a="http://schemas.openxmlformats.org/drawingml/2006/main" xmlns:p="http://schemas.openxmlformats.org/presentationml/2006/main" xmlns:r="http://schemas.openxmlformats.org/officeDocument/2006/relationships">
+  <p:cSld>
+    <p:spTree>
+      <p:nvGrpSpPr>
+        <p:cNvPr id="1" name=""/>
+        <p:cNvGrpSpPr/>
+        <p:nvPr/>
+      </p:nvGrpSpPr>
+      <p:grpSpPr/>
+      <p:sp>
+        <p:nvSpPr>
+          <p:cNvPr id="2" name="TextBox 1"/>
+          <p:cNvSpPr txBox="1"/>
+          <p:nvPr/>
+        </p:nvSpPr>
+        <p:spPr>
+          <a:xfrm>
+            <a:off x="548640" y="365760"/>
+            <a:ext cx="11064240" cy="1005840"/>
+          </a:xfrm>
+          <a:prstGeom prst="rect">
+            <a:avLst/>
+          </a:prstGeom>
+          <a:noFill/>
+        </p:spPr>
+        <p:txBody>
+          <a:bodyPr wrap="square">
+            <a:spAutoFit/>
+          </a:bodyPr>
+          <a:lstStyle/>
+          <a:p>
+            <a:r>
+              <a:rPr sz="3600" b="1">
+                <a:solidFill>
+                  <a:srgbClr val="5A0A7A"/>
+                </a:solidFill>
+              </a:rPr>
+              <a:t>Soundness and completeness</a:t>
+            </a:r>
+          </a:p>
+        </p:txBody>
+      </p:sp>
+      <p:sp>
+        <p:nvSpPr>
+          <p:cNvPr id="3" name="TextBox 2"/>
+          <p:cNvSpPr txBox="1"/>
+          <p:nvPr/>
+        </p:nvSpPr>
+        <p:spPr>
+          <a:xfrm>
+            <a:off x="731520" y="1645920"/>
+            <a:ext cx="10789920" cy="4937760"/>
+          </a:xfrm>
+          <a:prstGeom prst="rect">
+            <a:avLst/>
+          </a:prstGeom>
+          <a:noFill/>
+        </p:spPr>
+        <p:txBody>
+          <a:bodyPr wrap="square">
+            <a:spAutoFit/>
+          </a:bodyPr>
+          <a:lstStyle/>
+          <a:p>
+            <a:pPr>
+              <a:spcAft>
+                <a:spcPts val="800"/>
+              </a:spcAft>
+            </a:pPr>
+            <a:r>
+              <a:rPr sz="2400">
+                <a:solidFill>
+                  <a:srgbClr val="212121"/>
+                </a:solidFill>
+              </a:rPr>
+              <a:t>Sound — the tool never misses a bug.</a:t>
+            </a:r>
+          </a:p>
+          <a:p>
+            <a:pPr lvl="1">
+              <a:spcAft>
+                <a:spcPts val="800"/>
+              </a:spcAft>
+            </a:pPr>
+            <a:r>
+              <a:rPr sz="2200">
+                <a:solidFill>
+                  <a:srgbClr val="212121"/>
+                </a:solidFill>
+              </a:rPr>
+              <a:t>If a sound tool says SAFE, it is safe.</a:t>
+            </a:r>
+          </a:p>
+          <a:p>
+            <a:pPr>
+              <a:spcAft>
+                <a:spcPts val="800"/>
+              </a:spcAft>
+            </a:pPr>
+            <a:r>
+              <a:rPr sz="2400">
+                <a:solidFill>
+                  <a:srgbClr val="212121"/>
+                </a:solidFill>
+              </a:rPr>
+              <a:t>Complete — the tool never raises a false alarm.</a:t>
+            </a:r>
+          </a:p>
+          <a:p>
+            <a:pPr lvl="1">
+              <a:spcAft>
+                <a:spcPts val="800"/>
+              </a:spcAft>
+            </a:pPr>
+            <a:r>
+              <a:rPr sz="2200">
+                <a:solidFill>
+                  <a:srgbClr val="212121"/>
+                </a:solidFill>
+              </a:rPr>
+              <a:t>If a complete tool says BUG, it is a real bug.</a:t>
+            </a:r>
+          </a:p>
+          <a:p>
+            <a:pPr>
+              <a:spcAft>
+                <a:spcPts val="800"/>
+              </a:spcAft>
+            </a:pPr>
+            <a:r>
+              <a:rPr sz="2400">
+                <a:solidFill>
+                  <a:srgbClr val="212121"/>
+                </a:solidFill>
+              </a:rPr>
+              <a:t/>
+            </a:r>
+          </a:p>
+          <a:p>
+            <a:pPr>
+              <a:spcAft>
+                <a:spcPts val="800"/>
+              </a:spcAft>
+            </a:pPr>
+            <a:r>
+              <a:rPr sz="2400">
+                <a:solidFill>
+                  <a:srgbClr val="212121"/>
+                </a:solidFill>
+              </a:rPr>
+              <a:t>Testing is complete but not sound (every failure is real; absence proves nothing).</a:t>
+            </a:r>
+          </a:p>
+          <a:p>
+            <a:pPr>
+              <a:spcAft>
+                <a:spcPts val="800"/>
+              </a:spcAft>
+            </a:pPr>
+            <a:r>
+              <a:rPr sz="2400">
+                <a:solidFill>
+                  <a:srgbClr val="212121"/>
+                </a:solidFill>
+              </a:rPr>
+              <a:t>Most static analysers are sound but not complete (no missed bugs, but false alarms).</a:t>
+            </a:r>
+          </a:p>
+        </p:txBody>
+      </p:sp>
+    </p:spTree>
+  </p:cSld>
+  <p:clrMapOvr>
+    <a:masterClrMapping/>
+  </p:clrMapOvr>
+</p:sld>
+</file>
+
+<file path=ppt/slides/slide19.xml><?xml version="1.0" encoding="utf-8"?>
 <p:sld xmlns:a="http://schemas.openxmlformats.org/drawingml/2006/main" xmlns:p="http://schemas.openxmlformats.org/presentationml/2006/main" xmlns:r="http://schemas.openxmlformats.org/officeDocument/2006/relationships">
   <p:cSld>
     <p:spTree>
@@ -5119,368 +5269,6 @@
                 </a:solidFill>
               </a:rPr>
               <a:t>Think–pair–share (5 min): place testing, code review, compiler warnings, and “prove it with maths” on this grid. Defend your placement.</a:t>
-            </a:r>
-          </a:p>
-        </p:txBody>
-      </p:sp>
-    </p:spTree>
-  </p:cSld>
-  <p:clrMapOvr>
-    <a:masterClrMapping/>
-  </p:clrMapOvr>
-</p:sld>
-</file>
-
-<file path=ppt/slides/slide19.xml><?xml version="1.0" encoding="utf-8"?>
-<p:sld xmlns:a="http://schemas.openxmlformats.org/drawingml/2006/main" xmlns:p="http://schemas.openxmlformats.org/presentationml/2006/main" xmlns:r="http://schemas.openxmlformats.org/officeDocument/2006/relationships">
-  <p:cSld>
-    <p:spTree>
-      <p:nvGrpSpPr>
-        <p:cNvPr id="1" name=""/>
-        <p:cNvGrpSpPr/>
-        <p:nvPr/>
-      </p:nvGrpSpPr>
-      <p:grpSpPr/>
-      <p:sp>
-        <p:nvSpPr>
-          <p:cNvPr id="2" name="TextBox 1"/>
-          <p:cNvSpPr txBox="1"/>
-          <p:nvPr/>
-        </p:nvSpPr>
-        <p:spPr>
-          <a:xfrm>
-            <a:off x="548640" y="365760"/>
-            <a:ext cx="11064240" cy="1005840"/>
-          </a:xfrm>
-          <a:prstGeom prst="rect">
-            <a:avLst/>
-          </a:prstGeom>
-          <a:noFill/>
-        </p:spPr>
-        <p:txBody>
-          <a:bodyPr wrap="square">
-            <a:spAutoFit/>
-          </a:bodyPr>
-          <a:lstStyle/>
-          <a:p>
-            <a:r>
-              <a:rPr sz="3600" b="1">
-                <a:solidFill>
-                  <a:srgbClr val="5A0A7A"/>
-                </a:solidFill>
-              </a:rPr>
-              <a:t>The technique landscape</a:t>
-            </a:r>
-          </a:p>
-        </p:txBody>
-      </p:sp>
-      <p:graphicFrame>
-        <p:nvGraphicFramePr>
-          <p:cNvPr id="3" name="Table 2"/>
-          <p:cNvGraphicFramePr>
-            <a:graphicFrameLocks noGrp="1"/>
-          </p:cNvGraphicFramePr>
-          <p:nvPr/>
-        </p:nvGraphicFramePr>
-        <p:xfrm>
-          <a:off x="731520" y="1463040"/>
-          <a:ext cx="10698480" cy="2194560"/>
-        </p:xfrm>
-        <a:graphic>
-          <a:graphicData uri="http://schemas.openxmlformats.org/drawingml/2006/table">
-            <a:tbl>
-              <a:tblPr firstRow="1" bandRow="1">
-                <a:tableStyleId>{5C22544A-7EE6-4342-B048-85BDC9FD1C3A}</a:tableStyleId>
-              </a:tblPr>
-              <a:tblGrid>
-                <a:gridCol w="3474720"/>
-                <a:gridCol w="4023360"/>
-                <a:gridCol w="3200400"/>
-              </a:tblGrid>
-              <a:tr h="365760">
-                <a:tc>
-                  <a:txBody>
-                    <a:bodyPr/>
-                    <a:lstStyle/>
-                    <a:p>
-                      <a:r>
-                        <a:rPr sz="1800" b="1"/>
-                        <a:t>Technique</a:t>
-                      </a:r>
-                    </a:p>
-                  </a:txBody>
-                  <a:tcPr/>
-                </a:tc>
-                <a:tc>
-                  <a:txBody>
-                    <a:bodyPr/>
-                    <a:lstStyle/>
-                    <a:p>
-                      <a:r>
-                        <a:rPr sz="1800" b="1"/>
-                        <a:t>What you get</a:t>
-                      </a:r>
-                    </a:p>
-                  </a:txBody>
-                  <a:tcPr/>
-                </a:tc>
-                <a:tc>
-                  <a:txBody>
-                    <a:bodyPr/>
-                    <a:lstStyle/>
-                    <a:p>
-                      <a:r>
-                        <a:rPr sz="1800" b="1"/>
-                        <a:t>What it costs</a:t>
-                      </a:r>
-                    </a:p>
-                  </a:txBody>
-                  <a:tcPr/>
-                </a:tc>
-              </a:tr>
-              <a:tr h="365760">
-                <a:tc>
-                  <a:txBody>
-                    <a:bodyPr/>
-                    <a:lstStyle/>
-                    <a:p>
-                      <a:r>
-                        <a:rPr sz="1800"/>
-                        <a:t>Testing</a:t>
-                      </a:r>
-                    </a:p>
-                  </a:txBody>
-                  <a:tcPr/>
-                </a:tc>
-                <a:tc>
-                  <a:txBody>
-                    <a:bodyPr/>
-                    <a:lstStyle/>
-                    <a:p>
-                      <a:r>
-                        <a:rPr sz="1800"/>
-                        <a:t>real failures, fast</a:t>
-                      </a:r>
-                    </a:p>
-                  </a:txBody>
-                  <a:tcPr/>
-                </a:tc>
-                <a:tc>
-                  <a:txBody>
-                    <a:bodyPr/>
-                    <a:lstStyle/>
-                    <a:p>
-                      <a:r>
-                        <a:rPr sz="1800"/>
-                        <a:t>proves nothing about absence</a:t>
-                      </a:r>
-                    </a:p>
-                  </a:txBody>
-                  <a:tcPr/>
-                </a:tc>
-              </a:tr>
-              <a:tr h="365760">
-                <a:tc>
-                  <a:txBody>
-                    <a:bodyPr/>
-                    <a:lstStyle/>
-                    <a:p>
-                      <a:r>
-                        <a:rPr sz="1800"/>
-                        <a:t>Static analysis / abstract interp.</a:t>
-                      </a:r>
-                    </a:p>
-                  </a:txBody>
-                  <a:tcPr/>
-                </a:tc>
-                <a:tc>
-                  <a:txBody>
-                    <a:bodyPr/>
-                    <a:lstStyle/>
-                    <a:p>
-                      <a:r>
-                        <a:rPr sz="1800"/>
-                        <a:t>sound warnings, scales</a:t>
-                      </a:r>
-                    </a:p>
-                  </a:txBody>
-                  <a:tcPr/>
-                </a:tc>
-                <a:tc>
-                  <a:txBody>
-                    <a:bodyPr/>
-                    <a:lstStyle/>
-                    <a:p>
-                      <a:r>
-                        <a:rPr sz="1800"/>
-                        <a:t>false alarms</a:t>
-                      </a:r>
-                    </a:p>
-                  </a:txBody>
-                  <a:tcPr/>
-                </a:tc>
-              </a:tr>
-              <a:tr h="365760">
-                <a:tc>
-                  <a:txBody>
-                    <a:bodyPr/>
-                    <a:lstStyle/>
-                    <a:p>
-                      <a:r>
-                        <a:rPr sz="1800"/>
-                        <a:t>Symbolic execution</a:t>
-                      </a:r>
-                    </a:p>
-                  </a:txBody>
-                  <a:tcPr/>
-                </a:tc>
-                <a:tc>
-                  <a:txBody>
-                    <a:bodyPr/>
-                    <a:lstStyle/>
-                    <a:p>
-                      <a:r>
-                        <a:rPr sz="1800"/>
-                        <a:t>real bugs + the triggering input</a:t>
-                      </a:r>
-                    </a:p>
-                  </a:txBody>
-                  <a:tcPr/>
-                </a:tc>
-                <a:tc>
-                  <a:txBody>
-                    <a:bodyPr/>
-                    <a:lstStyle/>
-                    <a:p>
-                      <a:r>
-                        <a:rPr sz="1800"/>
-                        <a:t>path explosion</a:t>
-                      </a:r>
-                    </a:p>
-                  </a:txBody>
-                  <a:tcPr/>
-                </a:tc>
-              </a:tr>
-              <a:tr h="365760">
-                <a:tc>
-                  <a:txBody>
-                    <a:bodyPr/>
-                    <a:lstStyle/>
-                    <a:p>
-                      <a:r>
-                        <a:rPr sz="1800"/>
-                        <a:t>Bounded model checking</a:t>
-                      </a:r>
-                    </a:p>
-                  </a:txBody>
-                  <a:tcPr/>
-                </a:tc>
-                <a:tc>
-                  <a:txBody>
-                    <a:bodyPr/>
-                    <a:lstStyle/>
-                    <a:p>
-                      <a:r>
-                        <a:rPr sz="1800"/>
-                        <a:t>counterexample, or proof up to a bound</a:t>
-                      </a:r>
-                    </a:p>
-                  </a:txBody>
-                  <a:tcPr/>
-                </a:tc>
-                <a:tc>
-                  <a:txBody>
-                    <a:bodyPr/>
-                    <a:lstStyle/>
-                    <a:p>
-                      <a:r>
-                        <a:rPr sz="1800"/>
-                        <a:t>the bound</a:t>
-                      </a:r>
-                    </a:p>
-                  </a:txBody>
-                  <a:tcPr/>
-                </a:tc>
-              </a:tr>
-              <a:tr h="365760">
-                <a:tc>
-                  <a:txBody>
-                    <a:bodyPr/>
-                    <a:lstStyle/>
-                    <a:p>
-                      <a:r>
-                        <a:rPr sz="1800"/>
-                        <a:t>Interactive proof (Coq, Isabelle)</a:t>
-                      </a:r>
-                    </a:p>
-                  </a:txBody>
-                  <a:tcPr/>
-                </a:tc>
-                <a:tc>
-                  <a:txBody>
-                    <a:bodyPr/>
-                    <a:lstStyle/>
-                    <a:p>
-                      <a:r>
-                        <a:rPr sz="1800"/>
-                        <a:t>full functional correctness</a:t>
-                      </a:r>
-                    </a:p>
-                  </a:txBody>
-                  <a:tcPr/>
-                </a:tc>
-                <a:tc>
-                  <a:txBody>
-                    <a:bodyPr/>
-                    <a:lstStyle/>
-                    <a:p>
-                      <a:r>
-                        <a:rPr sz="1800"/>
-                        <a:t>person-years of effort</a:t>
-                      </a:r>
-                    </a:p>
-                  </a:txBody>
-                  <a:tcPr/>
-                </a:tc>
-              </a:tr>
-            </a:tbl>
-          </a:graphicData>
-        </a:graphic>
-      </p:graphicFrame>
-      <p:sp>
-        <p:nvSpPr>
-          <p:cNvPr id="4" name="TextBox 3"/>
-          <p:cNvSpPr txBox="1"/>
-          <p:nvPr/>
-        </p:nvSpPr>
-        <p:spPr>
-          <a:xfrm>
-            <a:off x="731520" y="4937760"/>
-            <a:ext cx="10789920" cy="1645919"/>
-          </a:xfrm>
-          <a:prstGeom prst="rect">
-            <a:avLst/>
-          </a:prstGeom>
-          <a:noFill/>
-        </p:spPr>
-        <p:txBody>
-          <a:bodyPr wrap="square">
-            <a:spAutoFit/>
-          </a:bodyPr>
-          <a:lstStyle/>
-          <a:p>
-            <a:pPr>
-              <a:spcAft>
-                <a:spcPts val="800"/>
-              </a:spcAft>
-            </a:pPr>
-            <a:r>
-              <a:rPr sz="2000">
-                <a:solidFill>
-                  <a:srgbClr val="212121"/>
-                </a:solidFill>
-              </a:rPr>
-              <a:t>Tonight: bounded model checking. At 20:30 we tour who uses the rest.</a:t>
             </a:r>
           </a:p>
         </p:txBody>
@@ -5888,21 +5676,294 @@
                   <a:srgbClr val="5A0A7A"/>
                 </a:solidFill>
               </a:rPr>
-              <a:t>The one trick to remember</a:t>
-            </a:r>
-          </a:p>
-        </p:txBody>
-      </p:sp>
-      <p:sp>
-        <p:nvSpPr>
-          <p:cNvPr id="3" name="TextBox 2"/>
+              <a:t>The technique landscape</a:t>
+            </a:r>
+          </a:p>
+        </p:txBody>
+      </p:sp>
+      <p:graphicFrame>
+        <p:nvGraphicFramePr>
+          <p:cNvPr id="3" name="Table 2"/>
+          <p:cNvGraphicFramePr>
+            <a:graphicFrameLocks noGrp="1"/>
+          </p:cNvGraphicFramePr>
+          <p:nvPr/>
+        </p:nvGraphicFramePr>
+        <p:xfrm>
+          <a:off x="731520" y="1463040"/>
+          <a:ext cx="10698480" cy="2194560"/>
+        </p:xfrm>
+        <a:graphic>
+          <a:graphicData uri="http://schemas.openxmlformats.org/drawingml/2006/table">
+            <a:tbl>
+              <a:tblPr firstRow="1" bandRow="1">
+                <a:tableStyleId>{5C22544A-7EE6-4342-B048-85BDC9FD1C3A}</a:tableStyleId>
+              </a:tblPr>
+              <a:tblGrid>
+                <a:gridCol w="3474720"/>
+                <a:gridCol w="4023360"/>
+                <a:gridCol w="3200400"/>
+              </a:tblGrid>
+              <a:tr h="365760">
+                <a:tc>
+                  <a:txBody>
+                    <a:bodyPr/>
+                    <a:lstStyle/>
+                    <a:p>
+                      <a:r>
+                        <a:rPr sz="1800" b="1"/>
+                        <a:t>Technique</a:t>
+                      </a:r>
+                    </a:p>
+                  </a:txBody>
+                  <a:tcPr/>
+                </a:tc>
+                <a:tc>
+                  <a:txBody>
+                    <a:bodyPr/>
+                    <a:lstStyle/>
+                    <a:p>
+                      <a:r>
+                        <a:rPr sz="1800" b="1"/>
+                        <a:t>What you get</a:t>
+                      </a:r>
+                    </a:p>
+                  </a:txBody>
+                  <a:tcPr/>
+                </a:tc>
+                <a:tc>
+                  <a:txBody>
+                    <a:bodyPr/>
+                    <a:lstStyle/>
+                    <a:p>
+                      <a:r>
+                        <a:rPr sz="1800" b="1"/>
+                        <a:t>What it costs</a:t>
+                      </a:r>
+                    </a:p>
+                  </a:txBody>
+                  <a:tcPr/>
+                </a:tc>
+              </a:tr>
+              <a:tr h="365760">
+                <a:tc>
+                  <a:txBody>
+                    <a:bodyPr/>
+                    <a:lstStyle/>
+                    <a:p>
+                      <a:r>
+                        <a:rPr sz="1800"/>
+                        <a:t>Testing</a:t>
+                      </a:r>
+                    </a:p>
+                  </a:txBody>
+                  <a:tcPr/>
+                </a:tc>
+                <a:tc>
+                  <a:txBody>
+                    <a:bodyPr/>
+                    <a:lstStyle/>
+                    <a:p>
+                      <a:r>
+                        <a:rPr sz="1800"/>
+                        <a:t>real failures, fast</a:t>
+                      </a:r>
+                    </a:p>
+                  </a:txBody>
+                  <a:tcPr/>
+                </a:tc>
+                <a:tc>
+                  <a:txBody>
+                    <a:bodyPr/>
+                    <a:lstStyle/>
+                    <a:p>
+                      <a:r>
+                        <a:rPr sz="1800"/>
+                        <a:t>proves nothing about absence</a:t>
+                      </a:r>
+                    </a:p>
+                  </a:txBody>
+                  <a:tcPr/>
+                </a:tc>
+              </a:tr>
+              <a:tr h="365760">
+                <a:tc>
+                  <a:txBody>
+                    <a:bodyPr/>
+                    <a:lstStyle/>
+                    <a:p>
+                      <a:r>
+                        <a:rPr sz="1800"/>
+                        <a:t>Static analysis / abstract interp.</a:t>
+                      </a:r>
+                    </a:p>
+                  </a:txBody>
+                  <a:tcPr/>
+                </a:tc>
+                <a:tc>
+                  <a:txBody>
+                    <a:bodyPr/>
+                    <a:lstStyle/>
+                    <a:p>
+                      <a:r>
+                        <a:rPr sz="1800"/>
+                        <a:t>sound warnings, scales</a:t>
+                      </a:r>
+                    </a:p>
+                  </a:txBody>
+                  <a:tcPr/>
+                </a:tc>
+                <a:tc>
+                  <a:txBody>
+                    <a:bodyPr/>
+                    <a:lstStyle/>
+                    <a:p>
+                      <a:r>
+                        <a:rPr sz="1800"/>
+                        <a:t>false alarms</a:t>
+                      </a:r>
+                    </a:p>
+                  </a:txBody>
+                  <a:tcPr/>
+                </a:tc>
+              </a:tr>
+              <a:tr h="365760">
+                <a:tc>
+                  <a:txBody>
+                    <a:bodyPr/>
+                    <a:lstStyle/>
+                    <a:p>
+                      <a:r>
+                        <a:rPr sz="1800"/>
+                        <a:t>Symbolic execution</a:t>
+                      </a:r>
+                    </a:p>
+                  </a:txBody>
+                  <a:tcPr/>
+                </a:tc>
+                <a:tc>
+                  <a:txBody>
+                    <a:bodyPr/>
+                    <a:lstStyle/>
+                    <a:p>
+                      <a:r>
+                        <a:rPr sz="1800"/>
+                        <a:t>real bugs + the triggering input</a:t>
+                      </a:r>
+                    </a:p>
+                  </a:txBody>
+                  <a:tcPr/>
+                </a:tc>
+                <a:tc>
+                  <a:txBody>
+                    <a:bodyPr/>
+                    <a:lstStyle/>
+                    <a:p>
+                      <a:r>
+                        <a:rPr sz="1800"/>
+                        <a:t>path explosion</a:t>
+                      </a:r>
+                    </a:p>
+                  </a:txBody>
+                  <a:tcPr/>
+                </a:tc>
+              </a:tr>
+              <a:tr h="365760">
+                <a:tc>
+                  <a:txBody>
+                    <a:bodyPr/>
+                    <a:lstStyle/>
+                    <a:p>
+                      <a:r>
+                        <a:rPr sz="1800"/>
+                        <a:t>Bounded model checking</a:t>
+                      </a:r>
+                    </a:p>
+                  </a:txBody>
+                  <a:tcPr/>
+                </a:tc>
+                <a:tc>
+                  <a:txBody>
+                    <a:bodyPr/>
+                    <a:lstStyle/>
+                    <a:p>
+                      <a:r>
+                        <a:rPr sz="1800"/>
+                        <a:t>counterexample, or proof up to a bound</a:t>
+                      </a:r>
+                    </a:p>
+                  </a:txBody>
+                  <a:tcPr/>
+                </a:tc>
+                <a:tc>
+                  <a:txBody>
+                    <a:bodyPr/>
+                    <a:lstStyle/>
+                    <a:p>
+                      <a:r>
+                        <a:rPr sz="1800"/>
+                        <a:t>the bound</a:t>
+                      </a:r>
+                    </a:p>
+                  </a:txBody>
+                  <a:tcPr/>
+                </a:tc>
+              </a:tr>
+              <a:tr h="365760">
+                <a:tc>
+                  <a:txBody>
+                    <a:bodyPr/>
+                    <a:lstStyle/>
+                    <a:p>
+                      <a:r>
+                        <a:rPr sz="1800"/>
+                        <a:t>Interactive proof (Coq, Isabelle)</a:t>
+                      </a:r>
+                    </a:p>
+                  </a:txBody>
+                  <a:tcPr/>
+                </a:tc>
+                <a:tc>
+                  <a:txBody>
+                    <a:bodyPr/>
+                    <a:lstStyle/>
+                    <a:p>
+                      <a:r>
+                        <a:rPr sz="1800"/>
+                        <a:t>full functional correctness</a:t>
+                      </a:r>
+                    </a:p>
+                  </a:txBody>
+                  <a:tcPr/>
+                </a:tc>
+                <a:tc>
+                  <a:txBody>
+                    <a:bodyPr/>
+                    <a:lstStyle/>
+                    <a:p>
+                      <a:r>
+                        <a:rPr sz="1800"/>
+                        <a:t>person-years of effort</a:t>
+                      </a:r>
+                    </a:p>
+                  </a:txBody>
+                  <a:tcPr/>
+                </a:tc>
+              </a:tr>
+            </a:tbl>
+          </a:graphicData>
+        </a:graphic>
+      </p:graphicFrame>
+      <p:sp>
+        <p:nvSpPr>
+          <p:cNvPr id="4" name="TextBox 3"/>
           <p:cNvSpPr txBox="1"/>
           <p:nvPr/>
         </p:nvSpPr>
         <p:spPr>
           <a:xfrm>
-            <a:off x="731520" y="1737360"/>
-            <a:ext cx="10789920" cy="4846320"/>
+            <a:off x="731520" y="4937760"/>
+            <a:ext cx="10789920" cy="1645919"/>
           </a:xfrm>
           <a:prstGeom prst="rect">
             <a:avLst/>
@@ -5921,102 +5982,12 @@
               </a:spcAft>
             </a:pPr>
             <a:r>
-              <a:rPr sz="2600">
-                <a:solidFill>
-                  <a:srgbClr val="212121"/>
-                </a:solidFill>
-              </a:rPr>
-              <a:t>To prove a property P, ask whether ¬P is satisfiable.</a:t>
-            </a:r>
-          </a:p>
-          <a:p>
-            <a:pPr lvl="1">
-              <a:spcAft>
-                <a:spcPts val="800"/>
-              </a:spcAft>
-            </a:pPr>
-            <a:r>
-              <a:rPr sz="2400">
-                <a:solidFill>
-                  <a:srgbClr val="212121"/>
-                </a:solidFill>
-              </a:rPr>
-              <a:t>unsat  ⇒  no way to violate P exists — a proof</a:t>
-            </a:r>
-          </a:p>
-          <a:p>
-            <a:pPr lvl="1">
-              <a:spcAft>
-                <a:spcPts val="800"/>
-              </a:spcAft>
-            </a:pPr>
-            <a:r>
-              <a:rPr sz="2400">
-                <a:solidFill>
-                  <a:srgbClr val="212121"/>
-                </a:solidFill>
-              </a:rPr>
-              <a:t>satisfiable, with a model  ⇒  a concrete counterexample to P</a:t>
-            </a:r>
-          </a:p>
-          <a:p>
-            <a:pPr>
-              <a:spcAft>
-                <a:spcPts val="800"/>
-              </a:spcAft>
-            </a:pPr>
-            <a:r>
-              <a:rPr sz="2600">
-                <a:solidFill>
-                  <a:srgbClr val="212121"/>
-                </a:solidFill>
-              </a:rPr>
-              <a:t/>
-            </a:r>
-          </a:p>
-          <a:p>
-            <a:pPr>
-              <a:spcAft>
-                <a:spcPts val="800"/>
-              </a:spcAft>
-            </a:pPr>
-            <a:r>
-              <a:rPr sz="2600">
-                <a:solidFill>
-                  <a:srgbClr val="212121"/>
-                </a:solidFill>
-              </a:rPr>
-              <a:t>Every tool tonight, and every lab in Session 2, is this one move in different costumes.</a:t>
-            </a:r>
-          </a:p>
-          <a:p>
-            <a:pPr>
-              <a:spcAft>
-                <a:spcPts val="800"/>
-              </a:spcAft>
-            </a:pPr>
-            <a:r>
-              <a:rPr sz="2600">
-                <a:solidFill>
-                  <a:srgbClr val="212121"/>
-                </a:solidFill>
-              </a:rPr>
-              <a:t/>
-            </a:r>
-          </a:p>
-          <a:p>
-            <a:pPr>
-              <a:spcAft>
-                <a:spcPts val="800"/>
-              </a:spcAft>
-            </a:pPr>
-            <a:r>
-              <a:rPr sz="2600">
-                <a:solidFill>
-                  <a:srgbClr val="212121"/>
-                </a:solidFill>
-              </a:rPr>
-              <a:t>So we need an oracle for “is this formula satisfiable?” — it exists, it is free, and it is absurdly good. After the break.</a:t>
+              <a:rPr sz="2000">
+                <a:solidFill>
+                  <a:srgbClr val="212121"/>
+                </a:solidFill>
+              </a:rPr>
+              <a:t>Tonight: bounded model checking. At 20:30 we tour who uses the rest.</a:t>
             </a:r>
           </a:p>
         </p:txBody>
@@ -6047,7 +6018,7 @@
         </p:nvSpPr>
         <p:spPr>
           <a:xfrm>
-            <a:off x="548640" y="2377440"/>
+            <a:off x="548640" y="365760"/>
             <a:ext cx="11064240" cy="1005840"/>
           </a:xfrm>
           <a:prstGeom prst="rect">
@@ -6062,12 +6033,140 @@
           <a:lstStyle/>
           <a:p>
             <a:r>
-              <a:rPr sz="4400" b="1">
+              <a:rPr sz="3600" b="1">
                 <a:solidFill>
                   <a:srgbClr val="5A0A7A"/>
                 </a:solidFill>
               </a:rPr>
-              <a:t>Break — back at 19:25</a:t>
+              <a:t>The one trick to remember</a:t>
+            </a:r>
+          </a:p>
+        </p:txBody>
+      </p:sp>
+      <p:sp>
+        <p:nvSpPr>
+          <p:cNvPr id="3" name="TextBox 2"/>
+          <p:cNvSpPr txBox="1"/>
+          <p:nvPr/>
+        </p:nvSpPr>
+        <p:spPr>
+          <a:xfrm>
+            <a:off x="731520" y="1737360"/>
+            <a:ext cx="10789920" cy="4846320"/>
+          </a:xfrm>
+          <a:prstGeom prst="rect">
+            <a:avLst/>
+          </a:prstGeom>
+          <a:noFill/>
+        </p:spPr>
+        <p:txBody>
+          <a:bodyPr wrap="square">
+            <a:spAutoFit/>
+          </a:bodyPr>
+          <a:lstStyle/>
+          <a:p>
+            <a:pPr>
+              <a:spcAft>
+                <a:spcPts val="800"/>
+              </a:spcAft>
+            </a:pPr>
+            <a:r>
+              <a:rPr sz="2600">
+                <a:solidFill>
+                  <a:srgbClr val="212121"/>
+                </a:solidFill>
+              </a:rPr>
+              <a:t>To prove a property P, ask whether ¬P is satisfiable.</a:t>
+            </a:r>
+          </a:p>
+          <a:p>
+            <a:pPr lvl="1">
+              <a:spcAft>
+                <a:spcPts val="800"/>
+              </a:spcAft>
+            </a:pPr>
+            <a:r>
+              <a:rPr sz="2400">
+                <a:solidFill>
+                  <a:srgbClr val="212121"/>
+                </a:solidFill>
+              </a:rPr>
+              <a:t>unsat  ⇒  no way to violate P exists — a proof</a:t>
+            </a:r>
+          </a:p>
+          <a:p>
+            <a:pPr lvl="1">
+              <a:spcAft>
+                <a:spcPts val="800"/>
+              </a:spcAft>
+            </a:pPr>
+            <a:r>
+              <a:rPr sz="2400">
+                <a:solidFill>
+                  <a:srgbClr val="212121"/>
+                </a:solidFill>
+              </a:rPr>
+              <a:t>satisfiable, with a model  ⇒  a concrete counterexample to P</a:t>
+            </a:r>
+          </a:p>
+          <a:p>
+            <a:pPr>
+              <a:spcAft>
+                <a:spcPts val="800"/>
+              </a:spcAft>
+            </a:pPr>
+            <a:r>
+              <a:rPr sz="2600">
+                <a:solidFill>
+                  <a:srgbClr val="212121"/>
+                </a:solidFill>
+              </a:rPr>
+              <a:t/>
+            </a:r>
+          </a:p>
+          <a:p>
+            <a:pPr>
+              <a:spcAft>
+                <a:spcPts val="800"/>
+              </a:spcAft>
+            </a:pPr>
+            <a:r>
+              <a:rPr sz="2600">
+                <a:solidFill>
+                  <a:srgbClr val="212121"/>
+                </a:solidFill>
+              </a:rPr>
+              <a:t>Every tool tonight, and every lab in Session 2, is this one move in different costumes.</a:t>
+            </a:r>
+          </a:p>
+          <a:p>
+            <a:pPr>
+              <a:spcAft>
+                <a:spcPts val="800"/>
+              </a:spcAft>
+            </a:pPr>
+            <a:r>
+              <a:rPr sz="2600">
+                <a:solidFill>
+                  <a:srgbClr val="212121"/>
+                </a:solidFill>
+              </a:rPr>
+              <a:t/>
+            </a:r>
+          </a:p>
+          <a:p>
+            <a:pPr>
+              <a:spcAft>
+                <a:spcPts val="800"/>
+              </a:spcAft>
+            </a:pPr>
+            <a:r>
+              <a:rPr sz="2600">
+                <a:solidFill>
+                  <a:srgbClr val="212121"/>
+                </a:solidFill>
+              </a:rPr>
+              <a:t>So we need an oracle for “is this formula satisfiable?” — it exists, it is free, and it is absurdly good. After the break.</a:t>
             </a:r>
           </a:p>
         </p:txBody>
@@ -6098,7 +6197,7 @@
         </p:nvSpPr>
         <p:spPr>
           <a:xfrm>
-            <a:off x="548640" y="365760"/>
+            <a:off x="548640" y="2377440"/>
             <a:ext cx="11064240" cy="1005840"/>
           </a:xfrm>
           <a:prstGeom prst="rect">
@@ -6113,126 +6212,12 @@
           <a:lstStyle/>
           <a:p>
             <a:r>
-              <a:rPr sz="3600" b="1">
+              <a:rPr sz="4400" b="1">
                 <a:solidFill>
                   <a:srgbClr val="5A0A7A"/>
                 </a:solidFill>
               </a:rPr>
-              <a:t>SAT: the original hard problem</a:t>
-            </a:r>
-          </a:p>
-        </p:txBody>
-      </p:sp>
-      <p:sp>
-        <p:nvSpPr>
-          <p:cNvPr id="3" name="TextBox 2"/>
-          <p:cNvSpPr txBox="1"/>
-          <p:nvPr/>
-        </p:nvSpPr>
-        <p:spPr>
-          <a:xfrm>
-            <a:off x="731520" y="1554480"/>
-            <a:ext cx="10789920" cy="5029200"/>
-          </a:xfrm>
-          <a:prstGeom prst="rect">
-            <a:avLst/>
-          </a:prstGeom>
-          <a:noFill/>
-        </p:spPr>
-        <p:txBody>
-          <a:bodyPr wrap="square">
-            <a:spAutoFit/>
-          </a:bodyPr>
-          <a:lstStyle/>
-          <a:p>
-            <a:pPr>
-              <a:spcAft>
-                <a:spcPts val="0"/>
-              </a:spcAft>
-            </a:pPr>
-            <a:r>
-              <a:rPr sz="2000">
-                <a:solidFill>
-                  <a:srgbClr val="212121"/>
-                </a:solidFill>
-                <a:latin typeface="Courier New"/>
-              </a:rPr>
-              <a:t>(a ∨ ¬b) ∧ (b ∨ c) ∧ (¬a ∨ ¬c)</a:t>
-            </a:r>
-          </a:p>
-          <a:p>
-            <a:pPr>
-              <a:spcAft>
-                <a:spcPts val="800"/>
-              </a:spcAft>
-            </a:pPr>
-            <a:r>
-              <a:rPr sz="2400">
-                <a:solidFill>
-                  <a:srgbClr val="212121"/>
-                </a:solidFill>
-              </a:rPr>
-              <a:t/>
-            </a:r>
-          </a:p>
-          <a:p>
-            <a:pPr>
-              <a:spcAft>
-                <a:spcPts val="800"/>
-              </a:spcAft>
-            </a:pPr>
-            <a:r>
-              <a:rPr sz="2400">
-                <a:solidFill>
-                  <a:srgbClr val="212121"/>
-                </a:solidFill>
-              </a:rPr>
-              <a:t>Is there a true/false assignment that makes the whole formula true?</a:t>
-            </a:r>
-          </a:p>
-          <a:p>
-            <a:pPr>
-              <a:spcAft>
-                <a:spcPts val="800"/>
-              </a:spcAft>
-            </a:pPr>
-            <a:r>
-              <a:rPr sz="2400">
-                <a:solidFill>
-                  <a:srgbClr val="212121"/>
-                </a:solidFill>
-              </a:rPr>
-              <a:t/>
-            </a:r>
-          </a:p>
-          <a:p>
-            <a:pPr>
-              <a:spcAft>
-                <a:spcPts val="800"/>
-              </a:spcAft>
-            </a:pPr>
-            <a:r>
-              <a:rPr sz="2400">
-                <a:solidFill>
-                  <a:srgbClr val="212121"/>
-                </a:solidFill>
-              </a:rPr>
-              <a:t>The first problem ever proved NP-complete (Cook, 1971) — in theory, hopeless.</a:t>
-            </a:r>
-          </a:p>
-          <a:p>
-            <a:pPr>
-              <a:spcAft>
-                <a:spcPts val="800"/>
-              </a:spcAft>
-            </a:pPr>
-            <a:r>
-              <a:rPr sz="2400">
-                <a:solidFill>
-                  <a:srgbClr val="212121"/>
-                </a:solidFill>
-              </a:rPr>
-              <a:t>In practice: modern solvers eat formulas with millions of clauses for breakfast. Industrial SAT solving is the closest thing CS has to a superpower.</a:t>
+              <a:t>Break — back at 19:25</a:t>
             </a:r>
           </a:p>
         </p:txBody>
@@ -6283,6 +6268,171 @@
                   <a:srgbClr val="5A0A7A"/>
                 </a:solidFill>
               </a:rPr>
+              <a:t>SAT: the original hard problem</a:t>
+            </a:r>
+          </a:p>
+        </p:txBody>
+      </p:sp>
+      <p:sp>
+        <p:nvSpPr>
+          <p:cNvPr id="3" name="TextBox 2"/>
+          <p:cNvSpPr txBox="1"/>
+          <p:nvPr/>
+        </p:nvSpPr>
+        <p:spPr>
+          <a:xfrm>
+            <a:off x="731520" y="1554480"/>
+            <a:ext cx="10789920" cy="5029200"/>
+          </a:xfrm>
+          <a:prstGeom prst="rect">
+            <a:avLst/>
+          </a:prstGeom>
+          <a:noFill/>
+        </p:spPr>
+        <p:txBody>
+          <a:bodyPr wrap="square">
+            <a:spAutoFit/>
+          </a:bodyPr>
+          <a:lstStyle/>
+          <a:p>
+            <a:pPr>
+              <a:spcAft>
+                <a:spcPts val="0"/>
+              </a:spcAft>
+            </a:pPr>
+            <a:r>
+              <a:rPr sz="2000">
+                <a:solidFill>
+                  <a:srgbClr val="212121"/>
+                </a:solidFill>
+                <a:latin typeface="Courier New"/>
+              </a:rPr>
+              <a:t>(a ∨ ¬b) ∧ (b ∨ c) ∧ (¬a ∨ ¬c)</a:t>
+            </a:r>
+          </a:p>
+          <a:p>
+            <a:pPr>
+              <a:spcAft>
+                <a:spcPts val="800"/>
+              </a:spcAft>
+            </a:pPr>
+            <a:r>
+              <a:rPr sz="2400">
+                <a:solidFill>
+                  <a:srgbClr val="212121"/>
+                </a:solidFill>
+              </a:rPr>
+              <a:t/>
+            </a:r>
+          </a:p>
+          <a:p>
+            <a:pPr>
+              <a:spcAft>
+                <a:spcPts val="800"/>
+              </a:spcAft>
+            </a:pPr>
+            <a:r>
+              <a:rPr sz="2400">
+                <a:solidFill>
+                  <a:srgbClr val="212121"/>
+                </a:solidFill>
+              </a:rPr>
+              <a:t>Is there a true/false assignment that makes the whole formula true?</a:t>
+            </a:r>
+          </a:p>
+          <a:p>
+            <a:pPr>
+              <a:spcAft>
+                <a:spcPts val="800"/>
+              </a:spcAft>
+            </a:pPr>
+            <a:r>
+              <a:rPr sz="2400">
+                <a:solidFill>
+                  <a:srgbClr val="212121"/>
+                </a:solidFill>
+              </a:rPr>
+              <a:t/>
+            </a:r>
+          </a:p>
+          <a:p>
+            <a:pPr>
+              <a:spcAft>
+                <a:spcPts val="800"/>
+              </a:spcAft>
+            </a:pPr>
+            <a:r>
+              <a:rPr sz="2400">
+                <a:solidFill>
+                  <a:srgbClr val="212121"/>
+                </a:solidFill>
+              </a:rPr>
+              <a:t>The first problem ever proved NP-complete (Cook, 1971) — in theory, hopeless.</a:t>
+            </a:r>
+          </a:p>
+          <a:p>
+            <a:pPr>
+              <a:spcAft>
+                <a:spcPts val="800"/>
+              </a:spcAft>
+            </a:pPr>
+            <a:r>
+              <a:rPr sz="2400">
+                <a:solidFill>
+                  <a:srgbClr val="212121"/>
+                </a:solidFill>
+              </a:rPr>
+              <a:t>In practice: modern solvers eat formulas with millions of clauses for breakfast. Industrial SAT solving is the closest thing CS has to a superpower.</a:t>
+            </a:r>
+          </a:p>
+        </p:txBody>
+      </p:sp>
+    </p:spTree>
+  </p:cSld>
+  <p:clrMapOvr>
+    <a:masterClrMapping/>
+  </p:clrMapOvr>
+</p:sld>
+</file>
+
+<file path=ppt/slides/slide24.xml><?xml version="1.0" encoding="utf-8"?>
+<p:sld xmlns:a="http://schemas.openxmlformats.org/drawingml/2006/main" xmlns:p="http://schemas.openxmlformats.org/presentationml/2006/main" xmlns:r="http://schemas.openxmlformats.org/officeDocument/2006/relationships">
+  <p:cSld>
+    <p:spTree>
+      <p:nvGrpSpPr>
+        <p:cNvPr id="1" name=""/>
+        <p:cNvGrpSpPr/>
+        <p:nvPr/>
+      </p:nvGrpSpPr>
+      <p:grpSpPr/>
+      <p:sp>
+        <p:nvSpPr>
+          <p:cNvPr id="2" name="TextBox 1"/>
+          <p:cNvSpPr txBox="1"/>
+          <p:nvPr/>
+        </p:nvSpPr>
+        <p:spPr>
+          <a:xfrm>
+            <a:off x="548640" y="365760"/>
+            <a:ext cx="11064240" cy="1005840"/>
+          </a:xfrm>
+          <a:prstGeom prst="rect">
+            <a:avLst/>
+          </a:prstGeom>
+          <a:noFill/>
+        </p:spPr>
+        <p:txBody>
+          <a:bodyPr wrap="square">
+            <a:spAutoFit/>
+          </a:bodyPr>
+          <a:lstStyle/>
+          <a:p>
+            <a:r>
+              <a:rPr sz="3600" b="1">
+                <a:solidFill>
+                  <a:srgbClr val="5A0A7A"/>
+                </a:solidFill>
+              </a:rPr>
               <a:t>The two answers a solver can give</a:t>
             </a:r>
           </a:p>
@@ -6439,7 +6589,7 @@
 </p:sld>
 </file>
 
-<file path=ppt/slides/slide24.xml><?xml version="1.0" encoding="utf-8"?>
+<file path=ppt/slides/slide25.xml><?xml version="1.0" encoding="utf-8"?>
 <p:sld xmlns:a="http://schemas.openxmlformats.org/drawingml/2006/main" xmlns:p="http://schemas.openxmlformats.org/presentationml/2006/main" xmlns:r="http://schemas.openxmlformats.org/officeDocument/2006/relationships">
   <p:cSld>
     <p:spTree>
@@ -6694,7 +6844,7 @@
 </p:sld>
 </file>
 
-<file path=ppt/slides/slide25.xml><?xml version="1.0" encoding="utf-8"?>
+<file path=ppt/slides/slide26.xml><?xml version="1.0" encoding="utf-8"?>
 <p:sld xmlns:a="http://schemas.openxmlformats.org/drawingml/2006/main" xmlns:p="http://schemas.openxmlformats.org/presentationml/2006/main" xmlns:r="http://schemas.openxmlformats.org/officeDocument/2006/relationships">
   <p:cSld>
     <p:spTree>
@@ -6863,222 +7013,6 @@
                 </a:solidFill>
               </a:rPr>
               <a:t>unsat  →  the access is safe on every path</a:t>
-            </a:r>
-          </a:p>
-        </p:txBody>
-      </p:sp>
-    </p:spTree>
-  </p:cSld>
-  <p:clrMapOvr>
-    <a:masterClrMapping/>
-  </p:clrMapOvr>
-</p:sld>
-</file>
-
-<file path=ppt/slides/slide26.xml><?xml version="1.0" encoding="utf-8"?>
-<p:sld xmlns:a="http://schemas.openxmlformats.org/drawingml/2006/main" xmlns:p="http://schemas.openxmlformats.org/presentationml/2006/main" xmlns:r="http://schemas.openxmlformats.org/officeDocument/2006/relationships">
-  <p:cSld>
-    <p:spTree>
-      <p:nvGrpSpPr>
-        <p:cNvPr id="1" name=""/>
-        <p:cNvGrpSpPr/>
-        <p:nvPr/>
-      </p:nvGrpSpPr>
-      <p:grpSpPr/>
-      <p:sp>
-        <p:nvSpPr>
-          <p:cNvPr id="2" name="TextBox 1"/>
-          <p:cNvSpPr txBox="1"/>
-          <p:nvPr/>
-        </p:nvSpPr>
-        <p:spPr>
-          <a:xfrm>
-            <a:off x="548640" y="365760"/>
-            <a:ext cx="11064240" cy="1005840"/>
-          </a:xfrm>
-          <a:prstGeom prst="rect">
-            <a:avLst/>
-          </a:prstGeom>
-          <a:noFill/>
-        </p:spPr>
-        <p:txBody>
-          <a:bodyPr wrap="square">
-            <a:spAutoFit/>
-          </a:bodyPr>
-          <a:lstStyle/>
-          <a:p>
-            <a:r>
-              <a:rPr sz="3600" b="1">
-                <a:solidFill>
-                  <a:srgbClr val="5A0A7A"/>
-                </a:solidFill>
-              </a:rPr>
-              <a:t>Live: a solver in two queries</a:t>
-            </a:r>
-          </a:p>
-        </p:txBody>
-      </p:sp>
-      <p:sp>
-        <p:nvSpPr>
-          <p:cNvPr id="3" name="TextBox 2"/>
-          <p:cNvSpPr txBox="1"/>
-          <p:nvPr/>
-        </p:nvSpPr>
-        <p:spPr>
-          <a:xfrm>
-            <a:off x="731520" y="1463040"/>
-            <a:ext cx="10789920" cy="5120640"/>
-          </a:xfrm>
-          <a:prstGeom prst="rect">
-            <a:avLst/>
-          </a:prstGeom>
-          <a:noFill/>
-        </p:spPr>
-        <p:txBody>
-          <a:bodyPr wrap="square">
-            <a:spAutoFit/>
-          </a:bodyPr>
-          <a:lstStyle/>
-          <a:p>
-            <a:pPr>
-              <a:spcAft>
-                <a:spcPts val="0"/>
-              </a:spcAft>
-            </a:pPr>
-            <a:r>
-              <a:rPr sz="1800">
-                <a:solidFill>
-                  <a:srgbClr val="212121"/>
-                </a:solidFill>
-                <a:latin typeface="Courier New"/>
-              </a:rPr>
-              <a:t>$ python3 z3_demo.py</a:t>
-            </a:r>
-          </a:p>
-          <a:p>
-            <a:pPr>
-              <a:spcAft>
-                <a:spcPts val="0"/>
-              </a:spcAft>
-            </a:pPr>
-            <a:r>
-              <a:rPr sz="1800">
-                <a:solidFill>
-                  <a:srgbClr val="212121"/>
-                </a:solidFill>
-                <a:latin typeface="Courier New"/>
-              </a:rPr>
-              <a:t/>
-            </a:r>
-          </a:p>
-          <a:p>
-            <a:pPr>
-              <a:spcAft>
-                <a:spcPts val="0"/>
-              </a:spcAft>
-            </a:pPr>
-            <a:r>
-              <a:rPr sz="1800">
-                <a:solidFill>
-                  <a:srgbClr val="212121"/>
-                </a:solidFill>
-                <a:latin typeface="Courier New"/>
-              </a:rPr>
-              <a:t>Query 1: x + y == 42 and x &gt; 100</a:t>
-            </a:r>
-          </a:p>
-          <a:p>
-            <a:pPr>
-              <a:spcAft>
-                <a:spcPts val="0"/>
-              </a:spcAft>
-            </a:pPr>
-            <a:r>
-              <a:rPr sz="1800">
-                <a:solidFill>
-                  <a:srgbClr val="212121"/>
-                </a:solidFill>
-                <a:latin typeface="Courier New"/>
-              </a:rPr>
-              <a:t>[y = -59, x = 101]            ← a model, in milliseconds</a:t>
-            </a:r>
-          </a:p>
-          <a:p>
-            <a:pPr>
-              <a:spcAft>
-                <a:spcPts val="0"/>
-              </a:spcAft>
-            </a:pPr>
-            <a:r>
-              <a:rPr sz="1800">
-                <a:solidFill>
-                  <a:srgbClr val="212121"/>
-                </a:solidFill>
-                <a:latin typeface="Courier New"/>
-              </a:rPr>
-              <a:t/>
-            </a:r>
-          </a:p>
-          <a:p>
-            <a:pPr>
-              <a:spcAft>
-                <a:spcPts val="0"/>
-              </a:spcAft>
-            </a:pPr>
-            <a:r>
-              <a:rPr sz="1800">
-                <a:solidFill>
-                  <a:srgbClr val="212121"/>
-                </a:solidFill>
-                <a:latin typeface="Courier New"/>
-              </a:rPr>
-              <a:t>Query 2: x*x == 2*y*y, x &gt; 0, y &gt; 0 (no overflow)</a:t>
-            </a:r>
-          </a:p>
-          <a:p>
-            <a:pPr>
-              <a:spcAft>
-                <a:spcPts val="0"/>
-              </a:spcAft>
-            </a:pPr>
-            <a:r>
-              <a:rPr sz="1800">
-                <a:solidFill>
-                  <a:srgbClr val="212121"/>
-                </a:solidFill>
-                <a:latin typeface="Courier New"/>
-              </a:rPr>
-              <a:t>unsat                          ← a proof</a:t>
-            </a:r>
-          </a:p>
-          <a:p>
-            <a:pPr>
-              <a:spcAft>
-                <a:spcPts val="800"/>
-              </a:spcAft>
-            </a:pPr>
-            <a:r>
-              <a:rPr sz="2200">
-                <a:solidFill>
-                  <a:srgbClr val="212121"/>
-                </a:solidFill>
-              </a:rPr>
-              <a:t/>
-            </a:r>
-          </a:p>
-          <a:p>
-            <a:pPr>
-              <a:spcAft>
-                <a:spcPts val="800"/>
-              </a:spcAft>
-            </a:pPr>
-            <a:r>
-              <a:rPr sz="2200">
-                <a:solidFill>
-                  <a:srgbClr val="212121"/>
-                </a:solidFill>
-              </a:rPr>
-              <a:t>Query 2 just proved that √2 is irrational — 32-bit bit-vector edition. unsat is a theorem, not a shrug.</a:t>
             </a:r>
           </a:p>
         </p:txBody>
@@ -7129,7 +7063,7 @@
                   <a:srgbClr val="5A0A7A"/>
                 </a:solidFill>
               </a:rPr>
-              <a:t>Machine arithmetic is not mathematics</a:t>
+              <a:t>Live: a solver in two queries</a:t>
             </a:r>
           </a:p>
         </p:txBody>
@@ -7168,7 +7102,7 @@
                 </a:solidFill>
                 <a:latin typeface="Courier New"/>
               </a:rPr>
-              <a:t>INT_MAX     =  2147483647</a:t>
+              <a:t>$ python3 z3_demo.py</a:t>
             </a:r>
           </a:p>
           <a:p>
@@ -7184,7 +7118,7 @@
                 </a:solidFill>
                 <a:latin typeface="Courier New"/>
               </a:rPr>
-              <a:t>INT_MAX + 1 =  ?            /* C: undefined behaviour */</a:t>
+              <a:t/>
             </a:r>
           </a:p>
           <a:p>
@@ -7200,7 +7134,71 @@
                 </a:solidFill>
                 <a:latin typeface="Courier New"/>
               </a:rPr>
-              <a:t>                            /* bit-vectors: wraps negative */</a:t>
+              <a:t>Query 1: x + y == 42 and x &gt; 100</a:t>
+            </a:r>
+          </a:p>
+          <a:p>
+            <a:pPr>
+              <a:spcAft>
+                <a:spcPts val="0"/>
+              </a:spcAft>
+            </a:pPr>
+            <a:r>
+              <a:rPr sz="1800">
+                <a:solidFill>
+                  <a:srgbClr val="212121"/>
+                </a:solidFill>
+                <a:latin typeface="Courier New"/>
+              </a:rPr>
+              <a:t>[y = -59, x = 101]            ← a model, in milliseconds</a:t>
+            </a:r>
+          </a:p>
+          <a:p>
+            <a:pPr>
+              <a:spcAft>
+                <a:spcPts val="0"/>
+              </a:spcAft>
+            </a:pPr>
+            <a:r>
+              <a:rPr sz="1800">
+                <a:solidFill>
+                  <a:srgbClr val="212121"/>
+                </a:solidFill>
+                <a:latin typeface="Courier New"/>
+              </a:rPr>
+              <a:t/>
+            </a:r>
+          </a:p>
+          <a:p>
+            <a:pPr>
+              <a:spcAft>
+                <a:spcPts val="0"/>
+              </a:spcAft>
+            </a:pPr>
+            <a:r>
+              <a:rPr sz="1800">
+                <a:solidFill>
+                  <a:srgbClr val="212121"/>
+                </a:solidFill>
+                <a:latin typeface="Courier New"/>
+              </a:rPr>
+              <a:t>Query 2: x*x == 2*y*y, x &gt; 0, y &gt; 0 (no overflow)</a:t>
+            </a:r>
+          </a:p>
+          <a:p>
+            <a:pPr>
+              <a:spcAft>
+                <a:spcPts val="0"/>
+              </a:spcAft>
+            </a:pPr>
+            <a:r>
+              <a:rPr sz="1800">
+                <a:solidFill>
+                  <a:srgbClr val="212121"/>
+                </a:solidFill>
+                <a:latin typeface="Courier New"/>
+              </a:rPr>
+              <a:t>unsat                          ← a proof</a:t>
             </a:r>
           </a:p>
           <a:p>
@@ -7221,54 +7219,6 @@
           <a:p>
             <a:pPr>
               <a:spcAft>
-                <a:spcPts val="0"/>
-              </a:spcAft>
-            </a:pPr>
-            <a:r>
-              <a:rPr sz="1800">
-                <a:solidFill>
-                  <a:srgbClr val="212121"/>
-                </a:solidFill>
-                <a:latin typeface="Courier New"/>
-              </a:rPr>
-              <a:t>int y = x + 1;</a:t>
-            </a:r>
-          </a:p>
-          <a:p>
-            <a:pPr>
-              <a:spcAft>
-                <a:spcPts val="0"/>
-              </a:spcAft>
-            </a:pPr>
-            <a:r>
-              <a:rPr sz="1800">
-                <a:solidFill>
-                  <a:srgbClr val="212121"/>
-                </a:solidFill>
-                <a:latin typeface="Courier New"/>
-              </a:rPr>
-              <a:t>int z = y * 2;</a:t>
-            </a:r>
-          </a:p>
-          <a:p>
-            <a:pPr>
-              <a:spcAft>
-                <a:spcPts val="0"/>
-              </a:spcAft>
-            </a:pPr>
-            <a:r>
-              <a:rPr sz="1800">
-                <a:solidFill>
-                  <a:srgbClr val="212121"/>
-                </a:solidFill>
-                <a:latin typeface="Courier New"/>
-              </a:rPr>
-              <a:t>assert(z &gt;= 2);   /* surely true for x &gt;= 0 … ? */</a:t>
-            </a:r>
-          </a:p>
-          <a:p>
-            <a:pPr>
-              <a:spcAft>
                 <a:spcPts val="800"/>
               </a:spcAft>
             </a:pPr>
@@ -7278,22 +7228,7 @@
                   <a:srgbClr val="212121"/>
                 </a:solidFill>
               </a:rPr>
-              <a:t/>
-            </a:r>
-          </a:p>
-          <a:p>
-            <a:pPr>
-              <a:spcAft>
-                <a:spcPts val="800"/>
-              </a:spcAft>
-            </a:pPr>
-            <a:r>
-              <a:rPr sz="2200">
-                <a:solidFill>
-                  <a:srgbClr val="212121"/>
-                </a:solidFill>
-              </a:rPr>
-              <a:t>A solver finds the x that breaks this in milliseconds. In Lab 1 you will encode these three lines yourself and watch it happen.</a:t>
+              <a:t>Query 2 just proved that √2 is irrational — 32-bit bit-vector edition. unsat is a theorem, not a shrug.</a:t>
             </a:r>
           </a:p>
         </p:txBody>
@@ -7344,7 +7279,7 @@
                   <a:srgbClr val="5A0A7A"/>
                 </a:solidFill>
               </a:rPr>
-              <a:t>Solvers as search engines: SEND + MORE = MONEY</a:t>
+              <a:t>Machine arithmetic is not mathematics</a:t>
             </a:r>
           </a:p>
         </p:txBody>
@@ -7383,7 +7318,7 @@
                 </a:solidFill>
                 <a:latin typeface="Courier New"/>
               </a:rPr>
-              <a:t>  S E N D</a:t>
+              <a:t>INT_MAX     =  2147483647</a:t>
             </a:r>
           </a:p>
           <a:p>
@@ -7399,7 +7334,7 @@
                 </a:solidFill>
                 <a:latin typeface="Courier New"/>
               </a:rPr>
-              <a:t>+ M O R E</a:t>
+              <a:t>INT_MAX + 1 =  ?            /* C: undefined behaviour */</a:t>
             </a:r>
           </a:p>
           <a:p>
@@ -7415,7 +7350,22 @@
                 </a:solidFill>
                 <a:latin typeface="Courier New"/>
               </a:rPr>
-              <a:t>---------</a:t>
+              <a:t>                            /* bit-vectors: wraps negative */</a:t>
+            </a:r>
+          </a:p>
+          <a:p>
+            <a:pPr>
+              <a:spcAft>
+                <a:spcPts val="800"/>
+              </a:spcAft>
+            </a:pPr>
+            <a:r>
+              <a:rPr sz="2200">
+                <a:solidFill>
+                  <a:srgbClr val="212121"/>
+                </a:solidFill>
+              </a:rPr>
+              <a:t/>
             </a:r>
           </a:p>
           <a:p>
@@ -7431,7 +7381,39 @@
                 </a:solidFill>
                 <a:latin typeface="Courier New"/>
               </a:rPr>
-              <a:t>M O N E Y</a:t>
+              <a:t>int y = x + 1;</a:t>
+            </a:r>
+          </a:p>
+          <a:p>
+            <a:pPr>
+              <a:spcAft>
+                <a:spcPts val="0"/>
+              </a:spcAft>
+            </a:pPr>
+            <a:r>
+              <a:rPr sz="1800">
+                <a:solidFill>
+                  <a:srgbClr val="212121"/>
+                </a:solidFill>
+                <a:latin typeface="Courier New"/>
+              </a:rPr>
+              <a:t>int z = y * 2;</a:t>
+            </a:r>
+          </a:p>
+          <a:p>
+            <a:pPr>
+              <a:spcAft>
+                <a:spcPts val="0"/>
+              </a:spcAft>
+            </a:pPr>
+            <a:r>
+              <a:rPr sz="1800">
+                <a:solidFill>
+                  <a:srgbClr val="212121"/>
+                </a:solidFill>
+                <a:latin typeface="Courier New"/>
+              </a:rPr>
+              <a:t>assert(z &gt;= 2);   /* surely true for x &gt;= 0 … ? */</a:t>
             </a:r>
           </a:p>
           <a:p>
@@ -7461,52 +7443,7 @@
                   <a:srgbClr val="212121"/>
                 </a:solidFill>
               </a:rPr>
-              <a:t>Eight letters, all different digits, S ≠ 0, M ≠ 0 — about 10⁸ candidate assignments.</a:t>
-            </a:r>
-          </a:p>
-          <a:p>
-            <a:pPr>
-              <a:spcAft>
-                <a:spcPts val="800"/>
-              </a:spcAft>
-            </a:pPr>
-            <a:r>
-              <a:rPr sz="2200">
-                <a:solidFill>
-                  <a:srgbClr val="212121"/>
-                </a:solidFill>
-              </a:rPr>
-              <a:t>Z3 finds the unique solution in well under a second.</a:t>
-            </a:r>
-          </a:p>
-          <a:p>
-            <a:pPr>
-              <a:spcAft>
-                <a:spcPts val="800"/>
-              </a:spcAft>
-            </a:pPr>
-            <a:r>
-              <a:rPr sz="2200">
-                <a:solidFill>
-                  <a:srgbClr val="212121"/>
-                </a:solidFill>
-              </a:rPr>
-              <a:t>The same engine that solves puzzles finds your bugs: a counterexample is just a solution to “break my program”.</a:t>
-            </a:r>
-          </a:p>
-          <a:p>
-            <a:pPr>
-              <a:spcAft>
-                <a:spcPts val="800"/>
-              </a:spcAft>
-            </a:pPr>
-            <a:r>
-              <a:rPr sz="2200">
-                <a:solidFill>
-                  <a:srgbClr val="212121"/>
-                </a:solidFill>
-              </a:rPr>
-              <a:t>Lab 1, Stage 2: you run this yourself.</a:t>
+              <a:t>A solver finds the x that breaks this in milliseconds. In Lab 1 you will encode these three lines yourself and watch it happen.</a:t>
             </a:r>
           </a:p>
         </p:txBody>
@@ -7520,6 +7457,323 @@
 </file>
 
 <file path=ppt/slides/slide29.xml><?xml version="1.0" encoding="utf-8"?>
+<p:sld xmlns:a="http://schemas.openxmlformats.org/drawingml/2006/main" xmlns:p="http://schemas.openxmlformats.org/presentationml/2006/main" xmlns:r="http://schemas.openxmlformats.org/officeDocument/2006/relationships">
+  <p:cSld>
+    <p:spTree>
+      <p:nvGrpSpPr>
+        <p:cNvPr id="1" name=""/>
+        <p:cNvGrpSpPr/>
+        <p:nvPr/>
+      </p:nvGrpSpPr>
+      <p:grpSpPr/>
+      <p:sp>
+        <p:nvSpPr>
+          <p:cNvPr id="2" name="TextBox 1"/>
+          <p:cNvSpPr txBox="1"/>
+          <p:nvPr/>
+        </p:nvSpPr>
+        <p:spPr>
+          <a:xfrm>
+            <a:off x="548640" y="365760"/>
+            <a:ext cx="11064240" cy="1005840"/>
+          </a:xfrm>
+          <a:prstGeom prst="rect">
+            <a:avLst/>
+          </a:prstGeom>
+          <a:noFill/>
+        </p:spPr>
+        <p:txBody>
+          <a:bodyPr wrap="square">
+            <a:spAutoFit/>
+          </a:bodyPr>
+          <a:lstStyle/>
+          <a:p>
+            <a:r>
+              <a:rPr sz="3600" b="1">
+                <a:solidFill>
+                  <a:srgbClr val="5A0A7A"/>
+                </a:solidFill>
+              </a:rPr>
+              <a:t>Solvers as search engines: SEND + MORE = MONEY</a:t>
+            </a:r>
+          </a:p>
+        </p:txBody>
+      </p:sp>
+      <p:sp>
+        <p:nvSpPr>
+          <p:cNvPr id="3" name="TextBox 2"/>
+          <p:cNvSpPr txBox="1"/>
+          <p:nvPr/>
+        </p:nvSpPr>
+        <p:spPr>
+          <a:xfrm>
+            <a:off x="731520" y="1463040"/>
+            <a:ext cx="10789920" cy="5120640"/>
+          </a:xfrm>
+          <a:prstGeom prst="rect">
+            <a:avLst/>
+          </a:prstGeom>
+          <a:noFill/>
+        </p:spPr>
+        <p:txBody>
+          <a:bodyPr wrap="square">
+            <a:spAutoFit/>
+          </a:bodyPr>
+          <a:lstStyle/>
+          <a:p>
+            <a:pPr>
+              <a:spcAft>
+                <a:spcPts val="0"/>
+              </a:spcAft>
+            </a:pPr>
+            <a:r>
+              <a:rPr sz="1800">
+                <a:solidFill>
+                  <a:srgbClr val="212121"/>
+                </a:solidFill>
+                <a:latin typeface="Courier New"/>
+              </a:rPr>
+              <a:t>  S E N D</a:t>
+            </a:r>
+          </a:p>
+          <a:p>
+            <a:pPr>
+              <a:spcAft>
+                <a:spcPts val="0"/>
+              </a:spcAft>
+            </a:pPr>
+            <a:r>
+              <a:rPr sz="1800">
+                <a:solidFill>
+                  <a:srgbClr val="212121"/>
+                </a:solidFill>
+                <a:latin typeface="Courier New"/>
+              </a:rPr>
+              <a:t>+ M O R E</a:t>
+            </a:r>
+          </a:p>
+          <a:p>
+            <a:pPr>
+              <a:spcAft>
+                <a:spcPts val="0"/>
+              </a:spcAft>
+            </a:pPr>
+            <a:r>
+              <a:rPr sz="1800">
+                <a:solidFill>
+                  <a:srgbClr val="212121"/>
+                </a:solidFill>
+                <a:latin typeface="Courier New"/>
+              </a:rPr>
+              <a:t>---------</a:t>
+            </a:r>
+          </a:p>
+          <a:p>
+            <a:pPr>
+              <a:spcAft>
+                <a:spcPts val="0"/>
+              </a:spcAft>
+            </a:pPr>
+            <a:r>
+              <a:rPr sz="1800">
+                <a:solidFill>
+                  <a:srgbClr val="212121"/>
+                </a:solidFill>
+                <a:latin typeface="Courier New"/>
+              </a:rPr>
+              <a:t>M O N E Y</a:t>
+            </a:r>
+          </a:p>
+          <a:p>
+            <a:pPr>
+              <a:spcAft>
+                <a:spcPts val="800"/>
+              </a:spcAft>
+            </a:pPr>
+            <a:r>
+              <a:rPr sz="2200">
+                <a:solidFill>
+                  <a:srgbClr val="212121"/>
+                </a:solidFill>
+              </a:rPr>
+              <a:t/>
+            </a:r>
+          </a:p>
+          <a:p>
+            <a:pPr>
+              <a:spcAft>
+                <a:spcPts val="800"/>
+              </a:spcAft>
+            </a:pPr>
+            <a:r>
+              <a:rPr sz="2200">
+                <a:solidFill>
+                  <a:srgbClr val="212121"/>
+                </a:solidFill>
+              </a:rPr>
+              <a:t>Eight letters, all different digits, S ≠ 0, M ≠ 0 — about 10⁸ candidate assignments.</a:t>
+            </a:r>
+          </a:p>
+          <a:p>
+            <a:pPr>
+              <a:spcAft>
+                <a:spcPts val="800"/>
+              </a:spcAft>
+            </a:pPr>
+            <a:r>
+              <a:rPr sz="2200">
+                <a:solidFill>
+                  <a:srgbClr val="212121"/>
+                </a:solidFill>
+              </a:rPr>
+              <a:t>Z3 finds the unique solution in well under a second.</a:t>
+            </a:r>
+          </a:p>
+          <a:p>
+            <a:pPr>
+              <a:spcAft>
+                <a:spcPts val="800"/>
+              </a:spcAft>
+            </a:pPr>
+            <a:r>
+              <a:rPr sz="2200">
+                <a:solidFill>
+                  <a:srgbClr val="212121"/>
+                </a:solidFill>
+              </a:rPr>
+              <a:t>The same engine that solves puzzles finds your bugs: a counterexample is just a solution to “break my program”.</a:t>
+            </a:r>
+          </a:p>
+          <a:p>
+            <a:pPr>
+              <a:spcAft>
+                <a:spcPts val="800"/>
+              </a:spcAft>
+            </a:pPr>
+            <a:r>
+              <a:rPr sz="2200">
+                <a:solidFill>
+                  <a:srgbClr val="212121"/>
+                </a:solidFill>
+              </a:rPr>
+              <a:t>Lab 1, Stage 2: you run this yourself.</a:t>
+            </a:r>
+          </a:p>
+        </p:txBody>
+      </p:sp>
+    </p:spTree>
+  </p:cSld>
+  <p:clrMapOvr>
+    <a:masterClrMapping/>
+  </p:clrMapOvr>
+</p:sld>
+</file>
+
+<file path=ppt/slides/slide3.xml><?xml version="1.0" encoding="utf-8"?>
+<p:sld xmlns:a="http://schemas.openxmlformats.org/drawingml/2006/main" xmlns:p="http://schemas.openxmlformats.org/presentationml/2006/main" xmlns:r="http://schemas.openxmlformats.org/officeDocument/2006/relationships">
+  <p:cSld>
+    <p:spTree>
+      <p:nvGrpSpPr>
+        <p:cNvPr id="1" name=""/>
+        <p:cNvGrpSpPr/>
+        <p:nvPr/>
+      </p:nvGrpSpPr>
+      <p:grpSpPr/>
+      <p:sp>
+        <p:nvSpPr>
+          <p:cNvPr id="2" name="TextBox 1"/>
+          <p:cNvSpPr txBox="1"/>
+          <p:nvPr/>
+        </p:nvSpPr>
+        <p:spPr>
+          <a:xfrm>
+            <a:off x="548640" y="365760"/>
+            <a:ext cx="11064240" cy="1005840"/>
+          </a:xfrm>
+          <a:prstGeom prst="rect">
+            <a:avLst/>
+          </a:prstGeom>
+          <a:noFill/>
+        </p:spPr>
+        <p:txBody>
+          <a:bodyPr wrap="square">
+            <a:spAutoFit/>
+          </a:bodyPr>
+          <a:lstStyle/>
+          <a:p>
+            <a:r>
+              <a:rPr sz="3600" b="1">
+                <a:solidFill>
+                  <a:srgbClr val="5A0A7A"/>
+                </a:solidFill>
+              </a:rPr>
+              <a:t>Icebreaker</a:t>
+            </a:r>
+          </a:p>
+        </p:txBody>
+      </p:sp>
+      <p:sp>
+        <p:nvSpPr>
+          <p:cNvPr id="3" name="TextBox 2"/>
+          <p:cNvSpPr txBox="1"/>
+          <p:nvPr/>
+        </p:nvSpPr>
+        <p:spPr>
+          <a:xfrm>
+            <a:off x="731520" y="2377440"/>
+            <a:ext cx="10789920" cy="4206240"/>
+          </a:xfrm>
+          <a:prstGeom prst="rect">
+            <a:avLst/>
+          </a:prstGeom>
+          <a:noFill/>
+        </p:spPr>
+        <p:txBody>
+          <a:bodyPr wrap="square">
+            <a:spAutoFit/>
+          </a:bodyPr>
+          <a:lstStyle/>
+          <a:p>
+            <a:pPr>
+              <a:spcAft>
+                <a:spcPts val="800"/>
+              </a:spcAft>
+            </a:pPr>
+            <a:r>
+              <a:rPr sz="3000">
+                <a:solidFill>
+                  <a:srgbClr val="212121"/>
+                </a:solidFill>
+              </a:rPr>
+              <a:t>Name a software failure that made the news.</a:t>
+            </a:r>
+          </a:p>
+          <a:p>
+            <a:pPr>
+              <a:spcAft>
+                <a:spcPts val="800"/>
+              </a:spcAft>
+            </a:pPr>
+            <a:r>
+              <a:rPr sz="3000">
+                <a:solidFill>
+                  <a:srgbClr val="212121"/>
+                </a:solidFill>
+              </a:rPr>
+              <a:t>Any failure. Any decade. Shout it out / drop it in the poll.</a:t>
+            </a:r>
+          </a:p>
+        </p:txBody>
+      </p:sp>
+    </p:spTree>
+  </p:cSld>
+  <p:clrMapOvr>
+    <a:masterClrMapping/>
+  </p:clrMapOvr>
+</p:sld>
+</file>
+
+<file path=ppt/slides/slide30.xml><?xml version="1.0" encoding="utf-8"?>
 <p:sld xmlns:a="http://schemas.openxmlformats.org/drawingml/2006/main" xmlns:p="http://schemas.openxmlformats.org/presentationml/2006/main" xmlns:r="http://schemas.openxmlformats.org/officeDocument/2006/relationships">
   <p:cSld>
     <p:spTree>
@@ -8091,7 +8345,7 @@
 </p:sld>
 </file>
 
-<file path=ppt/slides/slide3.xml><?xml version="1.0" encoding="utf-8"?>
+<file path=ppt/slides/slide31.xml><?xml version="1.0" encoding="utf-8"?>
 <p:sld xmlns:a="http://schemas.openxmlformats.org/drawingml/2006/main" xmlns:p="http://schemas.openxmlformats.org/presentationml/2006/main" xmlns:r="http://schemas.openxmlformats.org/officeDocument/2006/relationships">
   <p:cSld>
     <p:spTree>
@@ -8129,110 +8383,6 @@
                   <a:srgbClr val="5A0A7A"/>
                 </a:solidFill>
               </a:rPr>
-              <a:t>Icebreaker</a:t>
-            </a:r>
-          </a:p>
-        </p:txBody>
-      </p:sp>
-      <p:sp>
-        <p:nvSpPr>
-          <p:cNvPr id="3" name="TextBox 2"/>
-          <p:cNvSpPr txBox="1"/>
-          <p:nvPr/>
-        </p:nvSpPr>
-        <p:spPr>
-          <a:xfrm>
-            <a:off x="731520" y="2377440"/>
-            <a:ext cx="10789920" cy="4206240"/>
-          </a:xfrm>
-          <a:prstGeom prst="rect">
-            <a:avLst/>
-          </a:prstGeom>
-          <a:noFill/>
-        </p:spPr>
-        <p:txBody>
-          <a:bodyPr wrap="square">
-            <a:spAutoFit/>
-          </a:bodyPr>
-          <a:lstStyle/>
-          <a:p>
-            <a:pPr>
-              <a:spcAft>
-                <a:spcPts val="800"/>
-              </a:spcAft>
-            </a:pPr>
-            <a:r>
-              <a:rPr sz="3000">
-                <a:solidFill>
-                  <a:srgbClr val="212121"/>
-                </a:solidFill>
-              </a:rPr>
-              <a:t>Name a software failure that made the news.</a:t>
-            </a:r>
-          </a:p>
-          <a:p>
-            <a:pPr>
-              <a:spcAft>
-                <a:spcPts val="800"/>
-              </a:spcAft>
-            </a:pPr>
-            <a:r>
-              <a:rPr sz="3000">
-                <a:solidFill>
-                  <a:srgbClr val="212121"/>
-                </a:solidFill>
-              </a:rPr>
-              <a:t>Any failure. Any decade. Shout it out / drop it in the poll.</a:t>
-            </a:r>
-          </a:p>
-        </p:txBody>
-      </p:sp>
-    </p:spTree>
-  </p:cSld>
-  <p:clrMapOvr>
-    <a:masterClrMapping/>
-  </p:clrMapOvr>
-</p:sld>
-</file>
-
-<file path=ppt/slides/slide30.xml><?xml version="1.0" encoding="utf-8"?>
-<p:sld xmlns:a="http://schemas.openxmlformats.org/drawingml/2006/main" xmlns:p="http://schemas.openxmlformats.org/presentationml/2006/main" xmlns:r="http://schemas.openxmlformats.org/officeDocument/2006/relationships">
-  <p:cSld>
-    <p:spTree>
-      <p:nvGrpSpPr>
-        <p:cNvPr id="1" name=""/>
-        <p:cNvGrpSpPr/>
-        <p:nvPr/>
-      </p:nvGrpSpPr>
-      <p:grpSpPr/>
-      <p:sp>
-        <p:nvSpPr>
-          <p:cNvPr id="2" name="TextBox 1"/>
-          <p:cNvSpPr txBox="1"/>
-          <p:nvPr/>
-        </p:nvSpPr>
-        <p:spPr>
-          <a:xfrm>
-            <a:off x="548640" y="365760"/>
-            <a:ext cx="11064240" cy="1005840"/>
-          </a:xfrm>
-          <a:prstGeom prst="rect">
-            <a:avLst/>
-          </a:prstGeom>
-          <a:noFill/>
-        </p:spPr>
-        <p:txBody>
-          <a:bodyPr wrap="square">
-            <a:spAutoFit/>
-          </a:bodyPr>
-          <a:lstStyle/>
-          <a:p>
-            <a:r>
-              <a:rPr sz="3600" b="1">
-                <a:solidFill>
-                  <a:srgbClr val="5A0A7A"/>
-                </a:solidFill>
-              </a:rPr>
               <a:t>Step 1 — unwind the loops</a:t>
             </a:r>
           </a:p>
@@ -8375,7 +8525,7 @@
 </p:sld>
 </file>
 
-<file path=ppt/slides/slide31.xml><?xml version="1.0" encoding="utf-8"?>
+<file path=ppt/slides/slide32.xml><?xml version="1.0" encoding="utf-8"?>
 <p:sld xmlns:a="http://schemas.openxmlformats.org/drawingml/2006/main" xmlns:p="http://schemas.openxmlformats.org/presentationml/2006/main" xmlns:r="http://schemas.openxmlformats.org/officeDocument/2006/relationships">
   <p:cSld>
     <p:spTree>
@@ -8617,7 +8767,7 @@
 </p:sld>
 </file>
 
-<file path=ppt/slides/slide32.xml><?xml version="1.0" encoding="utf-8"?>
+<file path=ppt/slides/slide33.xml><?xml version="1.0" encoding="utf-8"?>
 <p:sld xmlns:a="http://schemas.openxmlformats.org/drawingml/2006/main" xmlns:p="http://schemas.openxmlformats.org/presentationml/2006/main" xmlns:r="http://schemas.openxmlformats.org/officeDocument/2006/relationships">
   <p:cSld>
     <p:spTree>
@@ -8772,171 +8922,6 @@
                 </a:solidFill>
               </a:rPr>
               <a:t>Recognise the three lines? In Lab 1, Stage 3 you translate exactly this function by hand and hand it to Z3. You will be doing ESBMC's job yourself.</a:t>
-            </a:r>
-          </a:p>
-        </p:txBody>
-      </p:sp>
-    </p:spTree>
-  </p:cSld>
-  <p:clrMapOvr>
-    <a:masterClrMapping/>
-  </p:clrMapOvr>
-</p:sld>
-</file>
-
-<file path=ppt/slides/slide33.xml><?xml version="1.0" encoding="utf-8"?>
-<p:sld xmlns:a="http://schemas.openxmlformats.org/drawingml/2006/main" xmlns:p="http://schemas.openxmlformats.org/presentationml/2006/main" xmlns:r="http://schemas.openxmlformats.org/officeDocument/2006/relationships">
-  <p:cSld>
-    <p:spTree>
-      <p:nvGrpSpPr>
-        <p:cNvPr id="1" name=""/>
-        <p:cNvGrpSpPr/>
-        <p:nvPr/>
-      </p:nvGrpSpPr>
-      <p:grpSpPr/>
-      <p:sp>
-        <p:nvSpPr>
-          <p:cNvPr id="2" name="TextBox 1"/>
-          <p:cNvSpPr txBox="1"/>
-          <p:nvPr/>
-        </p:nvSpPr>
-        <p:spPr>
-          <a:xfrm>
-            <a:off x="548640" y="365760"/>
-            <a:ext cx="11064240" cy="1005840"/>
-          </a:xfrm>
-          <a:prstGeom prst="rect">
-            <a:avLst/>
-          </a:prstGeom>
-          <a:noFill/>
-        </p:spPr>
-        <p:txBody>
-          <a:bodyPr wrap="square">
-            <a:spAutoFit/>
-          </a:bodyPr>
-          <a:lstStyle/>
-          <a:p>
-            <a:r>
-              <a:rPr sz="3600" b="1">
-                <a:solidFill>
-                  <a:srgbClr val="5A0A7A"/>
-                </a:solidFill>
-              </a:rPr>
-              <a:t>Putting it together</a:t>
-            </a:r>
-          </a:p>
-        </p:txBody>
-      </p:sp>
-      <p:sp>
-        <p:nvSpPr>
-          <p:cNvPr id="3" name="TextBox 2"/>
-          <p:cNvSpPr txBox="1"/>
-          <p:nvPr/>
-        </p:nvSpPr>
-        <p:spPr>
-          <a:xfrm>
-            <a:off x="731520" y="1737360"/>
-            <a:ext cx="10789920" cy="4846320"/>
-          </a:xfrm>
-          <a:prstGeom prst="rect">
-            <a:avLst/>
-          </a:prstGeom>
-          <a:noFill/>
-        </p:spPr>
-        <p:txBody>
-          <a:bodyPr wrap="square">
-            <a:spAutoFit/>
-          </a:bodyPr>
-          <a:lstStyle/>
-          <a:p>
-            <a:pPr>
-              <a:spcAft>
-                <a:spcPts val="0"/>
-              </a:spcAft>
-            </a:pPr>
-            <a:r>
-              <a:rPr sz="2200">
-                <a:solidFill>
-                  <a:srgbClr val="212121"/>
-                </a:solidFill>
-                <a:latin typeface="Courier New"/>
-              </a:rPr>
-              <a:t>⟦program⟧  ∧  ¬P      →  SMT solver</a:t>
-            </a:r>
-          </a:p>
-          <a:p>
-            <a:pPr>
-              <a:spcAft>
-                <a:spcPts val="800"/>
-              </a:spcAft>
-            </a:pPr>
-            <a:r>
-              <a:rPr sz="2600">
-                <a:solidFill>
-                  <a:srgbClr val="212121"/>
-                </a:solidFill>
-              </a:rPr>
-              <a:t/>
-            </a:r>
-          </a:p>
-          <a:p>
-            <a:pPr>
-              <a:spcAft>
-                <a:spcPts val="800"/>
-              </a:spcAft>
-            </a:pPr>
-            <a:r>
-              <a:rPr sz="2600">
-                <a:solidFill>
-                  <a:srgbClr val="212121"/>
-                </a:solidFill>
-              </a:rPr>
-              <a:t>sat — the model assigns every input and every choice: replayed in program order, that is the counterexample trace.</a:t>
-            </a:r>
-          </a:p>
-          <a:p>
-            <a:pPr>
-              <a:spcAft>
-                <a:spcPts val="800"/>
-              </a:spcAft>
-            </a:pPr>
-            <a:r>
-              <a:rPr sz="2600">
-                <a:solidFill>
-                  <a:srgbClr val="212121"/>
-                </a:solidFill>
-              </a:rPr>
-              <a:t>unsat — no execution within the bound violates P.</a:t>
-            </a:r>
-          </a:p>
-          <a:p>
-            <a:pPr>
-              <a:spcAft>
-                <a:spcPts val="800"/>
-              </a:spcAft>
-            </a:pPr>
-            <a:r>
-              <a:rPr sz="2600">
-                <a:solidFill>
-                  <a:srgbClr val="212121"/>
-                </a:solidFill>
-              </a:rPr>
-              <a:t/>
-            </a:r>
-          </a:p>
-          <a:p>
-            <a:pPr>
-              <a:spcAft>
-                <a:spcPts val="800"/>
-              </a:spcAft>
-            </a:pPr>
-            <a:r>
-              <a:rPr sz="2600">
-                <a:solidFill>
-                  <a:srgbClr val="212121"/>
-                </a:solidFill>
-              </a:rPr>
-              <a:t>One formula, every path at once. That is why nobody has to enumerate 2⁶⁴ test cases.</a:t>
             </a:r>
           </a:p>
         </p:txBody>
@@ -8987,7 +8972,7 @@
                   <a:srgbClr val="5A0A7A"/>
                 </a:solidFill>
               </a:rPr>
-              <a:t>Anatomy of a counterexample</a:t>
+              <a:t>Putting it together</a:t>
             </a:r>
           </a:p>
         </p:txBody>
@@ -9000,8 +8985,8 @@
         </p:nvSpPr>
         <p:spPr>
           <a:xfrm>
-            <a:off x="731520" y="1463040"/>
-            <a:ext cx="10789920" cy="5120640"/>
+            <a:off x="731520" y="1737360"/>
+            <a:ext cx="10789920" cy="4846320"/>
           </a:xfrm>
           <a:prstGeom prst="rect">
             <a:avLst/>
@@ -9020,103 +9005,23 @@
               </a:spcAft>
             </a:pPr>
             <a:r>
-              <a:rPr sz="1800">
+              <a:rPr sz="2200">
                 <a:solidFill>
                   <a:srgbClr val="212121"/>
                 </a:solidFill>
                 <a:latin typeface="Courier New"/>
               </a:rPr>
-              <a:t>State 3  file offbyone.c  line 15</a:t>
-            </a:r>
-          </a:p>
-          <a:p>
-            <a:pPr>
-              <a:spcAft>
-                <a:spcPts val="0"/>
-              </a:spcAft>
-            </a:pPr>
-            <a:r>
-              <a:rPr sz="1800">
-                <a:solidFill>
-                  <a:srgbClr val="212121"/>
-                </a:solidFill>
-                <a:latin typeface="Courier New"/>
-              </a:rPr>
-              <a:t>  i = 5 (00000000 ... 101)      ← the value the solver chose</a:t>
-            </a:r>
-          </a:p>
-          <a:p>
-            <a:pPr>
-              <a:spcAft>
-                <a:spcPts val="0"/>
-              </a:spcAft>
-            </a:pPr>
-            <a:r>
-              <a:rPr sz="1800">
-                <a:solidFill>
-                  <a:srgbClr val="212121"/>
-                </a:solidFill>
-                <a:latin typeface="Courier New"/>
-              </a:rPr>
-              <a:t>...</a:t>
-            </a:r>
-          </a:p>
-          <a:p>
-            <a:pPr>
-              <a:spcAft>
-                <a:spcPts val="0"/>
-              </a:spcAft>
-            </a:pPr>
-            <a:r>
-              <a:rPr sz="1800">
-                <a:solidFill>
-                  <a:srgbClr val="212121"/>
-                </a:solidFill>
-                <a:latin typeface="Courier New"/>
-              </a:rPr>
-              <a:t>Violated property:</a:t>
-            </a:r>
-          </a:p>
-          <a:p>
-            <a:pPr>
-              <a:spcAft>
-                <a:spcPts val="0"/>
-              </a:spcAft>
-            </a:pPr>
-            <a:r>
-              <a:rPr sz="1800">
-                <a:solidFill>
-                  <a:srgbClr val="212121"/>
-                </a:solidFill>
-                <a:latin typeface="Courier New"/>
-              </a:rPr>
-              <a:t>  array bounds violated: a[i]   ← what broke</a:t>
-            </a:r>
-          </a:p>
-          <a:p>
-            <a:pPr>
-              <a:spcAft>
-                <a:spcPts val="0"/>
-              </a:spcAft>
-            </a:pPr>
-            <a:r>
-              <a:rPr sz="1800">
-                <a:solidFill>
-                  <a:srgbClr val="212121"/>
-                </a:solidFill>
-                <a:latin typeface="Courier New"/>
-              </a:rPr>
-              <a:t>  CWE: CWE-787                   ← the vulnerability class</a:t>
-            </a:r>
-          </a:p>
-          <a:p>
-            <a:pPr>
-              <a:spcAft>
-                <a:spcPts val="800"/>
-              </a:spcAft>
-            </a:pPr>
-            <a:r>
-              <a:rPr sz="2200">
+              <a:t>⟦program⟧  ∧  ¬P      →  SMT solver</a:t>
+            </a:r>
+          </a:p>
+          <a:p>
+            <a:pPr>
+              <a:spcAft>
+                <a:spcPts val="800"/>
+              </a:spcAft>
+            </a:pPr>
+            <a:r>
+              <a:rPr sz="2600">
                 <a:solidFill>
                   <a:srgbClr val="212121"/>
                 </a:solidFill>
@@ -9131,27 +9036,57 @@
               </a:spcAft>
             </a:pPr>
             <a:r>
-              <a:rPr sz="2200">
-                <a:solidFill>
-                  <a:srgbClr val="212121"/>
-                </a:solidFill>
-              </a:rPr>
-              <a:t>Read it bottom-up: first what was violated, then scroll up for the values that caused it.</a:t>
-            </a:r>
-          </a:p>
-          <a:p>
-            <a:pPr>
-              <a:spcAft>
-                <a:spcPts val="800"/>
-              </a:spcAft>
-            </a:pPr>
-            <a:r>
-              <a:rPr sz="2200">
-                <a:solidFill>
-                  <a:srgbClr val="212121"/>
-                </a:solidFill>
-              </a:rPr>
-              <a:t>Those values are a ready-made failing test case — keep them.</a:t>
+              <a:rPr sz="2600">
+                <a:solidFill>
+                  <a:srgbClr val="212121"/>
+                </a:solidFill>
+              </a:rPr>
+              <a:t>sat — the model assigns every input and every choice: replayed in program order, that is the counterexample trace.</a:t>
+            </a:r>
+          </a:p>
+          <a:p>
+            <a:pPr>
+              <a:spcAft>
+                <a:spcPts val="800"/>
+              </a:spcAft>
+            </a:pPr>
+            <a:r>
+              <a:rPr sz="2600">
+                <a:solidFill>
+                  <a:srgbClr val="212121"/>
+                </a:solidFill>
+              </a:rPr>
+              <a:t>unsat — no execution within the bound violates P.</a:t>
+            </a:r>
+          </a:p>
+          <a:p>
+            <a:pPr>
+              <a:spcAft>
+                <a:spcPts val="800"/>
+              </a:spcAft>
+            </a:pPr>
+            <a:r>
+              <a:rPr sz="2600">
+                <a:solidFill>
+                  <a:srgbClr val="212121"/>
+                </a:solidFill>
+              </a:rPr>
+              <a:t/>
+            </a:r>
+          </a:p>
+          <a:p>
+            <a:pPr>
+              <a:spcAft>
+                <a:spcPts val="800"/>
+              </a:spcAft>
+            </a:pPr>
+            <a:r>
+              <a:rPr sz="2600">
+                <a:solidFill>
+                  <a:srgbClr val="212121"/>
+                </a:solidFill>
+              </a:rPr>
+              <a:t>One formula, every path at once. That is why nobody has to enumerate 2⁶⁴ test cases.</a:t>
             </a:r>
           </a:p>
         </p:txBody>
@@ -9202,7 +9137,7 @@
                   <a:srgbClr val="5A0A7A"/>
                 </a:solidFill>
               </a:rPr>
-              <a:t>Live: the whole pipeline on five lines</a:t>
+              <a:t>Anatomy of a counterexample</a:t>
             </a:r>
           </a:p>
         </p:txBody>
@@ -9241,7 +9176,7 @@
                 </a:solidFill>
                 <a:latin typeface="Courier New"/>
               </a:rPr>
-              <a:t>int main(void)</a:t>
+              <a:t>State 3  file offbyone.c  line 15</a:t>
             </a:r>
           </a:p>
           <a:p>
@@ -9257,7 +9192,7 @@
                 </a:solidFill>
                 <a:latin typeface="Courier New"/>
               </a:rPr>
-              <a:t>{</a:t>
+              <a:t>  i = 5 (00000000 ... 101)      ← the value the solver chose</a:t>
             </a:r>
           </a:p>
           <a:p>
@@ -9273,7 +9208,7 @@
                 </a:solidFill>
                 <a:latin typeface="Courier New"/>
               </a:rPr>
-              <a:t>  int a[5];</a:t>
+              <a:t>...</a:t>
             </a:r>
           </a:p>
           <a:p>
@@ -9289,7 +9224,7 @@
                 </a:solidFill>
                 <a:latin typeface="Courier New"/>
               </a:rPr>
-              <a:t>  for (int i = 0; i &lt;= 5; i++)</a:t>
+              <a:t>Violated property:</a:t>
             </a:r>
           </a:p>
           <a:p>
@@ -9305,7 +9240,7 @@
                 </a:solidFill>
                 <a:latin typeface="Courier New"/>
               </a:rPr>
-              <a:t>    a[i] = i;</a:t>
+              <a:t>  array bounds violated: a[i]   ← what broke</a:t>
             </a:r>
           </a:p>
           <a:p>
@@ -9321,21 +9256,20 @@
                 </a:solidFill>
                 <a:latin typeface="Courier New"/>
               </a:rPr>
-              <a:t>}</a:t>
-            </a:r>
-          </a:p>
-          <a:p>
-            <a:pPr>
-              <a:spcAft>
-                <a:spcPts val="0"/>
-              </a:spcAft>
-            </a:pPr>
-            <a:r>
-              <a:rPr sz="1800">
-                <a:solidFill>
-                  <a:srgbClr val="212121"/>
-                </a:solidFill>
-                <a:latin typeface="Courier New"/>
+              <a:t>  CWE: CWE-787                   ← the vulnerability class</a:t>
+            </a:r>
+          </a:p>
+          <a:p>
+            <a:pPr>
+              <a:spcAft>
+                <a:spcPts val="800"/>
+              </a:spcAft>
+            </a:pPr>
+            <a:r>
+              <a:rPr sz="2200">
+                <a:solidFill>
+                  <a:srgbClr val="212121"/>
+                </a:solidFill>
               </a:rPr>
               <a:t/>
             </a:r>
@@ -9343,22 +9277,6 @@
           <a:p>
             <a:pPr>
               <a:spcAft>
-                <a:spcPts val="0"/>
-              </a:spcAft>
-            </a:pPr>
-            <a:r>
-              <a:rPr sz="1800">
-                <a:solidFill>
-                  <a:srgbClr val="212121"/>
-                </a:solidFill>
-                <a:latin typeface="Courier New"/>
-              </a:rPr>
-              <a:t>$ esbmc offbyone.c --unwind 7</a:t>
-            </a:r>
-          </a:p>
-          <a:p>
-            <a:pPr>
-              <a:spcAft>
                 <a:spcPts val="800"/>
               </a:spcAft>
             </a:pPr>
@@ -9368,7 +9286,7 @@
                   <a:srgbClr val="212121"/>
                 </a:solidFill>
               </a:rPr>
-              <a:t/>
+              <a:t>Read it bottom-up: first what was violated, then scroll up for the values that caused it.</a:t>
             </a:r>
           </a:p>
           <a:p>
@@ -9383,22 +9301,7 @@
                   <a:srgbClr val="212121"/>
                 </a:solidFill>
               </a:rPr>
-              <a:t>Predict first: FAILED or SUCCESSFUL? If FAILED — at which i?</a:t>
-            </a:r>
-          </a:p>
-          <a:p>
-            <a:pPr>
-              <a:spcAft>
-                <a:spcPts val="800"/>
-              </a:spcAft>
-            </a:pPr>
-            <a:r>
-              <a:rPr sz="2200">
-                <a:solidFill>
-                  <a:srgbClr val="212121"/>
-                </a:solidFill>
-              </a:rPr>
-              <a:t>Then we read the trace together, bottom-up.</a:t>
+              <a:t>Those values are a ready-made failing test case — keep them.</a:t>
             </a:r>
           </a:p>
         </p:txBody>
@@ -9449,7 +9352,7 @@
                   <a:srgbClr val="5A0A7A"/>
                 </a:solidFill>
               </a:rPr>
-              <a:t>Modelling the environment: a preview</a:t>
+              <a:t>Live: the whole pipeline on five lines</a:t>
             </a:r>
           </a:p>
         </p:txBody>
@@ -9488,7 +9391,7 @@
                 </a:solidFill>
                 <a:latin typeface="Courier New"/>
               </a:rPr>
-              <a:t>int x = nondet_int();              /* every value at once */</a:t>
+              <a:t>int main(void)</a:t>
             </a:r>
           </a:p>
           <a:p>
@@ -9504,7 +9407,7 @@
                 </a:solidFill>
                 <a:latin typeface="Courier New"/>
               </a:rPr>
-              <a:t>__ESBMC_assume(x &gt; 0 &amp;&amp; x &lt; 100);  /* now: every value in 1..99 */</a:t>
+              <a:t>{</a:t>
             </a:r>
           </a:p>
           <a:p>
@@ -9520,7 +9423,87 @@
                 </a:solidFill>
                 <a:latin typeface="Courier New"/>
               </a:rPr>
-              <a:t>assert(property(x));               /* must hold for ALL of them */</a:t>
+              <a:t>  int a[5];</a:t>
+            </a:r>
+          </a:p>
+          <a:p>
+            <a:pPr>
+              <a:spcAft>
+                <a:spcPts val="0"/>
+              </a:spcAft>
+            </a:pPr>
+            <a:r>
+              <a:rPr sz="1800">
+                <a:solidFill>
+                  <a:srgbClr val="212121"/>
+                </a:solidFill>
+                <a:latin typeface="Courier New"/>
+              </a:rPr>
+              <a:t>  for (int i = 0; i &lt;= 5; i++)</a:t>
+            </a:r>
+          </a:p>
+          <a:p>
+            <a:pPr>
+              <a:spcAft>
+                <a:spcPts val="0"/>
+              </a:spcAft>
+            </a:pPr>
+            <a:r>
+              <a:rPr sz="1800">
+                <a:solidFill>
+                  <a:srgbClr val="212121"/>
+                </a:solidFill>
+                <a:latin typeface="Courier New"/>
+              </a:rPr>
+              <a:t>    a[i] = i;</a:t>
+            </a:r>
+          </a:p>
+          <a:p>
+            <a:pPr>
+              <a:spcAft>
+                <a:spcPts val="0"/>
+              </a:spcAft>
+            </a:pPr>
+            <a:r>
+              <a:rPr sz="1800">
+                <a:solidFill>
+                  <a:srgbClr val="212121"/>
+                </a:solidFill>
+                <a:latin typeface="Courier New"/>
+              </a:rPr>
+              <a:t>}</a:t>
+            </a:r>
+          </a:p>
+          <a:p>
+            <a:pPr>
+              <a:spcAft>
+                <a:spcPts val="0"/>
+              </a:spcAft>
+            </a:pPr>
+            <a:r>
+              <a:rPr sz="1800">
+                <a:solidFill>
+                  <a:srgbClr val="212121"/>
+                </a:solidFill>
+                <a:latin typeface="Courier New"/>
+              </a:rPr>
+              <a:t/>
+            </a:r>
+          </a:p>
+          <a:p>
+            <a:pPr>
+              <a:spcAft>
+                <a:spcPts val="0"/>
+              </a:spcAft>
+            </a:pPr>
+            <a:r>
+              <a:rPr sz="1800">
+                <a:solidFill>
+                  <a:srgbClr val="212121"/>
+                </a:solidFill>
+                <a:latin typeface="Courier New"/>
+              </a:rPr>
+              <a:t>$ esbmc offbyone.c --unwind 7</a:t>
             </a:r>
           </a:p>
           <a:p>
@@ -9550,7 +9533,7 @@
                   <a:srgbClr val="212121"/>
                 </a:solidFill>
               </a:rPr>
-              <a:t>One nondeterministic input = all tests of that input at once.</a:t>
+              <a:t>Predict first: FAILED or SUCCESSFUL? If FAILED — at which i?</a:t>
             </a:r>
           </a:p>
           <a:p>
@@ -9565,7 +9548,7 @@
                   <a:srgbClr val="212121"/>
                 </a:solidFill>
               </a:rPr>
-              <a:t>In Session 2 you will use these three lines to expose a bug in a program that verifies green as shipped — the tool only checks what you specify.</a:t>
+              <a:t>Then we read the trace together, bottom-up.</a:t>
             </a:r>
           </a:p>
         </p:txBody>
@@ -9616,7 +9599,7 @@
                   <a:srgbClr val="5A0A7A"/>
                 </a:solidFill>
               </a:rPr>
-              <a:t>Beyond one thread</a:t>
+              <a:t>Modelling the environment: a preview</a:t>
             </a:r>
           </a:p>
         </p:txBody>
@@ -9629,8 +9612,8 @@
         </p:nvSpPr>
         <p:spPr>
           <a:xfrm>
-            <a:off x="731520" y="1645920"/>
-            <a:ext cx="10789920" cy="4937760"/>
+            <a:off x="731520" y="1463040"/>
+            <a:ext cx="10789920" cy="5120640"/>
           </a:xfrm>
           <a:prstGeom prst="rect">
             <a:avLst/>
@@ -9645,56 +9628,59 @@
           <a:p>
             <a:pPr>
               <a:spcAft>
-                <a:spcPts val="800"/>
-              </a:spcAft>
-            </a:pPr>
-            <a:r>
-              <a:rPr sz="2400">
-                <a:solidFill>
-                  <a:srgbClr val="212121"/>
-                </a:solidFill>
-              </a:rPr>
-              <a:t>Two threads of two and one statements already have three interleavings. Real code has billions.</a:t>
-            </a:r>
-          </a:p>
-          <a:p>
-            <a:pPr>
-              <a:spcAft>
-                <a:spcPts val="800"/>
-              </a:spcAft>
-            </a:pPr>
-            <a:r>
-              <a:rPr sz="2400">
-                <a:solidFill>
-                  <a:srgbClr val="212121"/>
-                </a:solidFill>
-              </a:rPr>
-              <a:t>Run the program a million times and the bad interleaving may never show up — Therac-25's bug hid exactly this way.</a:t>
-            </a:r>
-          </a:p>
-          <a:p>
-            <a:pPr>
-              <a:spcAft>
-                <a:spcPts val="800"/>
-              </a:spcAft>
-            </a:pPr>
-            <a:r>
-              <a:rPr sz="2400">
-                <a:solidFill>
-                  <a:srgbClr val="212121"/>
-                </a:solidFill>
-              </a:rPr>
-              <a:t>A model checker enumerates every interleaving up to a bound, including the one that kills your assertion.</a:t>
-            </a:r>
-          </a:p>
-          <a:p>
-            <a:pPr>
-              <a:spcAft>
-                <a:spcPts val="800"/>
-              </a:spcAft>
-            </a:pPr>
-            <a:r>
-              <a:rPr sz="2400">
+                <a:spcPts val="0"/>
+              </a:spcAft>
+            </a:pPr>
+            <a:r>
+              <a:rPr sz="1800">
+                <a:solidFill>
+                  <a:srgbClr val="212121"/>
+                </a:solidFill>
+                <a:latin typeface="Courier New"/>
+              </a:rPr>
+              <a:t>int x = nondet_int();              /* every value at once */</a:t>
+            </a:r>
+          </a:p>
+          <a:p>
+            <a:pPr>
+              <a:spcAft>
+                <a:spcPts val="0"/>
+              </a:spcAft>
+            </a:pPr>
+            <a:r>
+              <a:rPr sz="1800">
+                <a:solidFill>
+                  <a:srgbClr val="212121"/>
+                </a:solidFill>
+                <a:latin typeface="Courier New"/>
+              </a:rPr>
+              <a:t>__ESBMC_assume(x &gt; 0 &amp;&amp; x &lt; 100);  /* now: every value in 1..99 */</a:t>
+            </a:r>
+          </a:p>
+          <a:p>
+            <a:pPr>
+              <a:spcAft>
+                <a:spcPts val="0"/>
+              </a:spcAft>
+            </a:pPr>
+            <a:r>
+              <a:rPr sz="1800">
+                <a:solidFill>
+                  <a:srgbClr val="212121"/>
+                </a:solidFill>
+                <a:latin typeface="Courier New"/>
+              </a:rPr>
+              <a:t>assert(property(x));               /* must hold for ALL of them */</a:t>
+            </a:r>
+          </a:p>
+          <a:p>
+            <a:pPr>
+              <a:spcAft>
+                <a:spcPts val="800"/>
+              </a:spcAft>
+            </a:pPr>
+            <a:r>
+              <a:rPr sz="2200">
                 <a:solidFill>
                   <a:srgbClr val="212121"/>
                 </a:solidFill>
@@ -9709,12 +9695,27 @@
               </a:spcAft>
             </a:pPr>
             <a:r>
-              <a:rPr sz="2400">
-                <a:solidFill>
-                  <a:srgbClr val="212121"/>
-                </a:solidFill>
-              </a:rPr>
-              <a:t>Session 2, Lab 4: you write down the killer interleaving before the tool finds it.</a:t>
+              <a:rPr sz="2200">
+                <a:solidFill>
+                  <a:srgbClr val="212121"/>
+                </a:solidFill>
+              </a:rPr>
+              <a:t>One nondeterministic input = all tests of that input at once.</a:t>
+            </a:r>
+          </a:p>
+          <a:p>
+            <a:pPr>
+              <a:spcAft>
+                <a:spcPts val="800"/>
+              </a:spcAft>
+            </a:pPr>
+            <a:r>
+              <a:rPr sz="2200">
+                <a:solidFill>
+                  <a:srgbClr val="212121"/>
+                </a:solidFill>
+              </a:rPr>
+              <a:t>In Session 2 you will use these three lines to expose a bug in a program that verifies green as shipped — the tool only checks what you specify.</a:t>
             </a:r>
           </a:p>
         </p:txBody>
@@ -9765,7 +9766,7 @@
                   <a:srgbClr val="5A0A7A"/>
                 </a:solidFill>
               </a:rPr>
-              <a:t>Homework for your intuition</a:t>
+              <a:t>Beyond one thread</a:t>
             </a:r>
           </a:p>
         </p:txBody>
@@ -9778,8 +9779,8 @@
         </p:nvSpPr>
         <p:spPr>
           <a:xfrm>
-            <a:off x="731520" y="1828800"/>
-            <a:ext cx="10789920" cy="4754880"/>
+            <a:off x="731520" y="1645920"/>
+            <a:ext cx="10789920" cy="4937760"/>
           </a:xfrm>
           <a:prstGeom prst="rect">
             <a:avLst/>
@@ -9794,43 +9795,56 @@
           <a:p>
             <a:pPr>
               <a:spcAft>
-                <a:spcPts val="0"/>
-              </a:spcAft>
-            </a:pPr>
-            <a:r>
-              <a:rPr sz="2200">
-                <a:solidFill>
-                  <a:srgbClr val="212121"/>
-                </a:solidFill>
-                <a:latin typeface="Courier New"/>
-              </a:rPr>
-              <a:t>double w = 0.1 + 0.2;</a:t>
-            </a:r>
-          </a:p>
-          <a:p>
-            <a:pPr>
-              <a:spcAft>
-                <a:spcPts val="0"/>
-              </a:spcAft>
-            </a:pPr>
-            <a:r>
-              <a:rPr sz="2200">
-                <a:solidFill>
-                  <a:srgbClr val="212121"/>
-                </a:solidFill>
-                <a:latin typeface="Courier New"/>
-              </a:rPr>
-              <a:t>assert(w == 0.3);</a:t>
-            </a:r>
-          </a:p>
-          <a:p>
-            <a:pPr>
-              <a:spcAft>
-                <a:spcPts val="800"/>
-              </a:spcAft>
-            </a:pPr>
-            <a:r>
-              <a:rPr sz="2600">
+                <a:spcPts val="800"/>
+              </a:spcAft>
+            </a:pPr>
+            <a:r>
+              <a:rPr sz="2400">
+                <a:solidFill>
+                  <a:srgbClr val="212121"/>
+                </a:solidFill>
+              </a:rPr>
+              <a:t>Two threads of two and one statements already have three interleavings. Real code has billions.</a:t>
+            </a:r>
+          </a:p>
+          <a:p>
+            <a:pPr>
+              <a:spcAft>
+                <a:spcPts val="800"/>
+              </a:spcAft>
+            </a:pPr>
+            <a:r>
+              <a:rPr sz="2400">
+                <a:solidFill>
+                  <a:srgbClr val="212121"/>
+                </a:solidFill>
+              </a:rPr>
+              <a:t>Run the program a million times and the bad interleaving may never show up — Therac-25's bug hid exactly this way.</a:t>
+            </a:r>
+          </a:p>
+          <a:p>
+            <a:pPr>
+              <a:spcAft>
+                <a:spcPts val="800"/>
+              </a:spcAft>
+            </a:pPr>
+            <a:r>
+              <a:rPr sz="2400">
+                <a:solidFill>
+                  <a:srgbClr val="212121"/>
+                </a:solidFill>
+              </a:rPr>
+              <a:t>A model checker enumerates every interleaving up to a bound, including the one that kills your assertion.</a:t>
+            </a:r>
+          </a:p>
+          <a:p>
+            <a:pPr>
+              <a:spcAft>
+                <a:spcPts val="800"/>
+              </a:spcAft>
+            </a:pPr>
+            <a:r>
+              <a:rPr sz="2400">
                 <a:solidFill>
                   <a:srgbClr val="212121"/>
                 </a:solidFill>
@@ -9845,57 +9859,12 @@
               </a:spcAft>
             </a:pPr>
             <a:r>
-              <a:rPr sz="2600">
-                <a:solidFill>
-                  <a:srgbClr val="212121"/>
-                </a:solidFill>
-              </a:rPr>
-              <a:t>FAILED or SUCCESSFUL?</a:t>
-            </a:r>
-          </a:p>
-          <a:p>
-            <a:pPr>
-              <a:spcAft>
-                <a:spcPts val="800"/>
-              </a:spcAft>
-            </a:pPr>
-            <a:r>
-              <a:rPr sz="2600">
-                <a:solidFill>
-                  <a:srgbClr val="212121"/>
-                </a:solidFill>
-              </a:rPr>
-              <a:t/>
-            </a:r>
-          </a:p>
-          <a:p>
-            <a:pPr>
-              <a:spcAft>
-                <a:spcPts val="800"/>
-              </a:spcAft>
-            </a:pPr>
-            <a:r>
-              <a:rPr sz="2600">
-                <a:solidFill>
-                  <a:srgbClr val="212121"/>
-                </a:solidFill>
-              </a:rPr>
-              <a:t>Bring your answer to Session 2 — Lab 4 settles it with a solver that does exact IEEE-754 arithmetic.</a:t>
-            </a:r>
-          </a:p>
-          <a:p>
-            <a:pPr lvl="1">
-              <a:spcAft>
-                <a:spcPts val="800"/>
-              </a:spcAft>
-            </a:pPr>
-            <a:r>
               <a:rPr sz="2400">
                 <a:solidFill>
                   <a:srgbClr val="212121"/>
                 </a:solidFill>
               </a:rPr>
-              <a:t>Hint: 0.1 in binary is like 1/3 in decimal.</a:t>
+              <a:t>Session 2, Lab 4: you write down the killer interleaving before the tool finds it.</a:t>
             </a:r>
           </a:p>
         </p:txBody>
@@ -9946,7 +9915,7 @@
                   <a:srgbClr val="5A0A7A"/>
                 </a:solidFill>
               </a:rPr>
-              <a:t>Exercise 2 — Predict the Verdict (15 min)</a:t>
+              <a:t>Homework for your intuition</a:t>
             </a:r>
           </a:p>
         </p:txBody>
@@ -9959,8 +9928,8 @@
         </p:nvSpPr>
         <p:spPr>
           <a:xfrm>
-            <a:off x="731520" y="1463040"/>
-            <a:ext cx="10789920" cy="5120640"/>
+            <a:off x="731520" y="1828800"/>
+            <a:ext cx="10789920" cy="4754880"/>
           </a:xfrm>
           <a:prstGeom prst="rect">
             <a:avLst/>
@@ -9975,7 +9944,7 @@
           <a:p>
             <a:pPr>
               <a:spcAft>
-                <a:spcPts val="800"/>
+                <a:spcPts val="0"/>
               </a:spcAft>
             </a:pPr>
             <a:r>
@@ -9983,14 +9952,15 @@
                 <a:solidFill>
                   <a:srgbClr val="212121"/>
                 </a:solidFill>
-              </a:rPr>
-              <a:t>Groups of 3–4. Three short C programs on the handout (predict1.c, predict2.c, predict3.c).</a:t>
-            </a:r>
-          </a:p>
-          <a:p>
-            <a:pPr>
-              <a:spcAft>
-                <a:spcPts val="800"/>
+                <a:latin typeface="Courier New"/>
+              </a:rPr>
+              <a:t>double w = 0.1 + 0.2;</a:t>
+            </a:r>
+          </a:p>
+          <a:p>
+            <a:pPr>
+              <a:spcAft>
+                <a:spcPts val="0"/>
               </a:spcAft>
             </a:pPr>
             <a:r>
@@ -9998,8 +9968,69 @@
                 <a:solidFill>
                   <a:srgbClr val="212121"/>
                 </a:solidFill>
-              </a:rPr>
-              <a:t>For each program, write down BEFORE we run anything:</a:t>
+                <a:latin typeface="Courier New"/>
+              </a:rPr>
+              <a:t>assert(w == 0.3);</a:t>
+            </a:r>
+          </a:p>
+          <a:p>
+            <a:pPr>
+              <a:spcAft>
+                <a:spcPts val="800"/>
+              </a:spcAft>
+            </a:pPr>
+            <a:r>
+              <a:rPr sz="2600">
+                <a:solidFill>
+                  <a:srgbClr val="212121"/>
+                </a:solidFill>
+              </a:rPr>
+              <a:t/>
+            </a:r>
+          </a:p>
+          <a:p>
+            <a:pPr>
+              <a:spcAft>
+                <a:spcPts val="800"/>
+              </a:spcAft>
+            </a:pPr>
+            <a:r>
+              <a:rPr sz="2600">
+                <a:solidFill>
+                  <a:srgbClr val="212121"/>
+                </a:solidFill>
+              </a:rPr>
+              <a:t>FAILED or SUCCESSFUL?</a:t>
+            </a:r>
+          </a:p>
+          <a:p>
+            <a:pPr>
+              <a:spcAft>
+                <a:spcPts val="800"/>
+              </a:spcAft>
+            </a:pPr>
+            <a:r>
+              <a:rPr sz="2600">
+                <a:solidFill>
+                  <a:srgbClr val="212121"/>
+                </a:solidFill>
+              </a:rPr>
+              <a:t/>
+            </a:r>
+          </a:p>
+          <a:p>
+            <a:pPr>
+              <a:spcAft>
+                <a:spcPts val="800"/>
+              </a:spcAft>
+            </a:pPr>
+            <a:r>
+              <a:rPr sz="2600">
+                <a:solidFill>
+                  <a:srgbClr val="212121"/>
+                </a:solidFill>
+              </a:rPr>
+              <a:t>Bring your answer to Session 2 — Lab 4 settles it with a solver that does exact IEEE-754 arithmetic.</a:t>
             </a:r>
           </a:p>
           <a:p>
@@ -10009,42 +10040,12 @@
               </a:spcAft>
             </a:pPr>
             <a:r>
-              <a:rPr sz="2000">
-                <a:solidFill>
-                  <a:srgbClr val="212121"/>
-                </a:solidFill>
-              </a:rPr>
-              <a:t>Will the model checker say VERIFICATION FAILED or SUCCESSFUL?</a:t>
-            </a:r>
-          </a:p>
-          <a:p>
-            <a:pPr lvl="1">
-              <a:spcAft>
-                <a:spcPts val="800"/>
-              </a:spcAft>
-            </a:pPr>
-            <a:r>
-              <a:rPr sz="2000">
-                <a:solidFill>
-                  <a:srgbClr val="212121"/>
-                </a:solidFill>
-              </a:rPr>
-              <a:t>If FAILED — which line is the culprit?</a:t>
-            </a:r>
-          </a:p>
-          <a:p>
-            <a:pPr>
-              <a:spcAft>
-                <a:spcPts val="800"/>
-              </a:spcAft>
-            </a:pPr>
-            <a:r>
-              <a:rPr sz="2200">
-                <a:solidFill>
-                  <a:srgbClr val="212121"/>
-                </a:solidFill>
-              </a:rPr>
-              <a:t>Then we run ESBMC live and settle every bet.</a:t>
+              <a:rPr sz="2400">
+                <a:solidFill>
+                  <a:srgbClr val="212121"/>
+                </a:solidFill>
+              </a:rPr>
+              <a:t>Hint: 0.1 in binary is like 1/3 in decimal.</a:t>
             </a:r>
           </a:p>
         </p:txBody>
@@ -10289,7 +10290,7 @@
                   <a:srgbClr val="5A0A7A"/>
                 </a:solidFill>
               </a:rPr>
-              <a:t>Who uses this? — Model checking</a:t>
+              <a:t>Exercise 2 — Predict the Verdict (15 min)</a:t>
             </a:r>
           </a:p>
         </p:txBody>
@@ -10327,7 +10328,7 @@
                   <a:srgbClr val="212121"/>
                 </a:solidFill>
               </a:rPr>
-              <a:t>Amazon Web Services — CBMC proves memory safety of the TLS library s2n; bounded proofs run in CI on every commit</a:t>
+              <a:t>Groups of 3–4. Three short C programs on the handout (predict1.c, predict2.c, predict3.c).</a:t>
             </a:r>
           </a:p>
           <a:p>
@@ -10342,7 +10343,37 @@
                   <a:srgbClr val="212121"/>
                 </a:solidFill>
               </a:rPr>
-              <a:t>ESBMC / CBMC — the tools from tonight's demos; compete yearly in SV-COMP on tens of thousands of benchmarks</a:t>
+              <a:t>For each program, write down BEFORE we run anything:</a:t>
+            </a:r>
+          </a:p>
+          <a:p>
+            <a:pPr lvl="1">
+              <a:spcAft>
+                <a:spcPts val="800"/>
+              </a:spcAft>
+            </a:pPr>
+            <a:r>
+              <a:rPr sz="2000">
+                <a:solidFill>
+                  <a:srgbClr val="212121"/>
+                </a:solidFill>
+              </a:rPr>
+              <a:t>Will the model checker say VERIFICATION FAILED or SUCCESSFUL?</a:t>
+            </a:r>
+          </a:p>
+          <a:p>
+            <a:pPr lvl="1">
+              <a:spcAft>
+                <a:spcPts val="800"/>
+              </a:spcAft>
+            </a:pPr>
+            <a:r>
+              <a:rPr sz="2000">
+                <a:solidFill>
+                  <a:srgbClr val="212121"/>
+                </a:solidFill>
+              </a:rPr>
+              <a:t>If FAILED — which line is the culprit?</a:t>
             </a:r>
           </a:p>
           <a:p>
@@ -10357,7 +10388,7 @@
                   <a:srgbClr val="212121"/>
                 </a:solidFill>
               </a:rPr>
-              <a:t>The counterexample you saw for getpassword.c is the same artefact AWS engineers read when a proof fails</a:t>
+              <a:t>Then we run ESBMC live and settle every bet.</a:t>
             </a:r>
           </a:p>
         </p:txBody>
@@ -10408,7 +10439,7 @@
                   <a:srgbClr val="5A0A7A"/>
                 </a:solidFill>
               </a:rPr>
-              <a:t>Who uses this? — Symbolic execution &amp; fuzzing</a:t>
+              <a:t>Who uses this? — Model checking</a:t>
             </a:r>
           </a:p>
         </p:txBody>
@@ -10446,7 +10477,7 @@
                   <a:srgbClr val="212121"/>
                 </a:solidFill>
               </a:rPr>
-              <a:t>KLEE found 56 serious bugs in coreutils, busybox and Minix — including three in coreutils that had survived 15 years of testing</a:t>
+              <a:t>Amazon Web Services — CBMC proves memory safety of the TLS library s2n; bounded proofs run in CI on every commit</a:t>
             </a:r>
           </a:p>
           <a:p>
@@ -10461,7 +10492,7 @@
                   <a:srgbClr val="212121"/>
                 </a:solidFill>
               </a:rPr>
-              <a:t>Microsoft SAGE fuzzed Windows file parsers with symbolic execution; it found ~1/3 of all bugs caught by file fuzzing during Windows 7 development — running last, after every other tool</a:t>
+              <a:t>ESBMC / CBMC — the tools from tonight's demos; compete yearly in SV-COMP on tens of thousands of benchmarks</a:t>
             </a:r>
           </a:p>
           <a:p>
@@ -10476,22 +10507,7 @@
                   <a:srgbClr val="212121"/>
                 </a:solidFill>
               </a:rPr>
-              <a:t>AFL / OSS-Fuzz — Google fuzzes ~1,000 open-source projects continuously; tens of thousands of bugs found</a:t>
-            </a:r>
-          </a:p>
-          <a:p>
-            <a:pPr>
-              <a:spcAft>
-                <a:spcPts val="800"/>
-              </a:spcAft>
-            </a:pPr>
-            <a:r>
-              <a:rPr sz="2200">
-                <a:solidFill>
-                  <a:srgbClr val="212121"/>
-                </a:solidFill>
-              </a:rPr>
-              <a:t>The pragmatic cousin of verification: no proofs, ruthless effectiveness</a:t>
+              <a:t>The counterexample you saw for getpassword.c is the same artefact AWS engineers read when a proof fails</a:t>
             </a:r>
           </a:p>
         </p:txBody>
@@ -10542,7 +10558,7 @@
                   <a:srgbClr val="5A0A7A"/>
                 </a:solidFill>
               </a:rPr>
-              <a:t>Who uses this? — Proofs all the way up</a:t>
+              <a:t>Who uses this? — Symbolic execution &amp; fuzzing</a:t>
             </a:r>
           </a:p>
         </p:txBody>
@@ -10580,7 +10596,7 @@
                   <a:srgbClr val="212121"/>
                 </a:solidFill>
               </a:rPr>
-              <a:t>Astrée (abstract interpretation) proved absence of runtime errors in the Airbus A340 fly-by-wire code — 132,000 lines of C — and was then applied to the A380</a:t>
+              <a:t>KLEE found 56 serious bugs in coreutils, busybox and Minix — including three in coreutils that had survived 15 years of testing</a:t>
             </a:r>
           </a:p>
           <a:p>
@@ -10595,7 +10611,7 @@
                   <a:srgbClr val="212121"/>
                 </a:solidFill>
               </a:rPr>
-              <a:t>seL4 — an OS microkernel with a machine-checked proof of functional correctness</a:t>
+              <a:t>Microsoft SAGE fuzzed Windows file parsers with symbolic execution; it found ~1/3 of all bugs caught by file fuzzing during Windows 7 development — running last, after every other tool</a:t>
             </a:r>
           </a:p>
           <a:p>
@@ -10610,7 +10626,22 @@
                   <a:srgbClr val="212121"/>
                 </a:solidFill>
               </a:rPr>
-              <a:t>CompCert — a C compiler with a proof that compilation preserves semantics; six CPU-years of fuzzing found no wrong-code bugs in its verified core, while every other compiler tested failed</a:t>
+              <a:t>AFL / OSS-Fuzz — Google fuzzes ~1,000 open-source projects continuously; tens of thousands of bugs found</a:t>
+            </a:r>
+          </a:p>
+          <a:p>
+            <a:pPr>
+              <a:spcAft>
+                <a:spcPts val="800"/>
+              </a:spcAft>
+            </a:pPr>
+            <a:r>
+              <a:rPr sz="2200">
+                <a:solidFill>
+                  <a:srgbClr val="212121"/>
+                </a:solidFill>
+              </a:rPr>
+              <a:t>The pragmatic cousin of verification: no proofs, ruthless effectiveness</a:t>
             </a:r>
           </a:p>
         </p:txBody>
@@ -10661,7 +10692,7 @@
                   <a:srgbClr val="5A0A7A"/>
                 </a:solidFill>
               </a:rPr>
-              <a:t>Discussion</a:t>
+              <a:t>Who uses this? — Proofs all the way up</a:t>
             </a:r>
           </a:p>
         </p:txBody>
@@ -10674,8 +10705,8 @@
         </p:nvSpPr>
         <p:spPr>
           <a:xfrm>
-            <a:off x="731520" y="2194560"/>
-            <a:ext cx="10789920" cy="4389120"/>
+            <a:off x="731520" y="1463040"/>
+            <a:ext cx="10789920" cy="5120640"/>
           </a:xfrm>
           <a:prstGeom prst="rect">
             <a:avLst/>
@@ -10694,42 +10725,42 @@
               </a:spcAft>
             </a:pPr>
             <a:r>
-              <a:rPr sz="2800">
-                <a:solidFill>
-                  <a:srgbClr val="212121"/>
-                </a:solidFill>
-              </a:rPr>
-              <a:t>If verification can prove the absence of bugs…</a:t>
-            </a:r>
-          </a:p>
-          <a:p>
-            <a:pPr>
-              <a:spcAft>
-                <a:spcPts val="800"/>
-              </a:spcAft>
-            </a:pPr>
-            <a:r>
-              <a:rPr sz="2800">
-                <a:solidFill>
-                  <a:srgbClr val="212121"/>
-                </a:solidFill>
-              </a:rPr>
-              <a:t>why isn't all software verified?</a:t>
-            </a:r>
-          </a:p>
-          <a:p>
-            <a:pPr>
-              <a:spcAft>
-                <a:spcPts val="800"/>
-              </a:spcAft>
-            </a:pPr>
-            <a:r>
-              <a:rPr sz="2800">
-                <a:solidFill>
-                  <a:srgbClr val="212121"/>
-                </a:solidFill>
-              </a:rPr>
-              <a:t>(Let's collect reasons — then I'll tell you which ones the industry actually cites.)</a:t>
+              <a:rPr sz="2200">
+                <a:solidFill>
+                  <a:srgbClr val="212121"/>
+                </a:solidFill>
+              </a:rPr>
+              <a:t>Astrée (abstract interpretation) proved absence of runtime errors in the Airbus A340 fly-by-wire code — 132,000 lines of C — and was then applied to the A380</a:t>
+            </a:r>
+          </a:p>
+          <a:p>
+            <a:pPr>
+              <a:spcAft>
+                <a:spcPts val="800"/>
+              </a:spcAft>
+            </a:pPr>
+            <a:r>
+              <a:rPr sz="2200">
+                <a:solidFill>
+                  <a:srgbClr val="212121"/>
+                </a:solidFill>
+              </a:rPr>
+              <a:t>seL4 — an OS microkernel with a machine-checked proof of functional correctness</a:t>
+            </a:r>
+          </a:p>
+          <a:p>
+            <a:pPr>
+              <a:spcAft>
+                <a:spcPts val="800"/>
+              </a:spcAft>
+            </a:pPr>
+            <a:r>
+              <a:rPr sz="2200">
+                <a:solidFill>
+                  <a:srgbClr val="212121"/>
+                </a:solidFill>
+              </a:rPr>
+              <a:t>CompCert — a C compiler with a proof that compilation preserves semantics; six CPU-years of fuzzing found no wrong-code bugs in its verified core, while every other compiler tested failed</a:t>
             </a:r>
           </a:p>
         </p:txBody>
@@ -10780,6 +10811,125 @@
                   <a:srgbClr val="5A0A7A"/>
                 </a:solidFill>
               </a:rPr>
+              <a:t>Discussion</a:t>
+            </a:r>
+          </a:p>
+        </p:txBody>
+      </p:sp>
+      <p:sp>
+        <p:nvSpPr>
+          <p:cNvPr id="3" name="TextBox 2"/>
+          <p:cNvSpPr txBox="1"/>
+          <p:nvPr/>
+        </p:nvSpPr>
+        <p:spPr>
+          <a:xfrm>
+            <a:off x="731520" y="2194560"/>
+            <a:ext cx="10789920" cy="4389120"/>
+          </a:xfrm>
+          <a:prstGeom prst="rect">
+            <a:avLst/>
+          </a:prstGeom>
+          <a:noFill/>
+        </p:spPr>
+        <p:txBody>
+          <a:bodyPr wrap="square">
+            <a:spAutoFit/>
+          </a:bodyPr>
+          <a:lstStyle/>
+          <a:p>
+            <a:pPr>
+              <a:spcAft>
+                <a:spcPts val="800"/>
+              </a:spcAft>
+            </a:pPr>
+            <a:r>
+              <a:rPr sz="2800">
+                <a:solidFill>
+                  <a:srgbClr val="212121"/>
+                </a:solidFill>
+              </a:rPr>
+              <a:t>If verification can prove the absence of bugs…</a:t>
+            </a:r>
+          </a:p>
+          <a:p>
+            <a:pPr>
+              <a:spcAft>
+                <a:spcPts val="800"/>
+              </a:spcAft>
+            </a:pPr>
+            <a:r>
+              <a:rPr sz="2800">
+                <a:solidFill>
+                  <a:srgbClr val="212121"/>
+                </a:solidFill>
+              </a:rPr>
+              <a:t>why isn't all software verified?</a:t>
+            </a:r>
+          </a:p>
+          <a:p>
+            <a:pPr>
+              <a:spcAft>
+                <a:spcPts val="800"/>
+              </a:spcAft>
+            </a:pPr>
+            <a:r>
+              <a:rPr sz="2800">
+                <a:solidFill>
+                  <a:srgbClr val="212121"/>
+                </a:solidFill>
+              </a:rPr>
+              <a:t>(Let's collect reasons — then I'll tell you which ones the industry actually cites.)</a:t>
+            </a:r>
+          </a:p>
+        </p:txBody>
+      </p:sp>
+    </p:spTree>
+  </p:cSld>
+  <p:clrMapOvr>
+    <a:masterClrMapping/>
+  </p:clrMapOvr>
+</p:sld>
+</file>
+
+<file path=ppt/slides/slide45.xml><?xml version="1.0" encoding="utf-8"?>
+<p:sld xmlns:a="http://schemas.openxmlformats.org/drawingml/2006/main" xmlns:p="http://schemas.openxmlformats.org/presentationml/2006/main" xmlns:r="http://schemas.openxmlformats.org/officeDocument/2006/relationships">
+  <p:cSld>
+    <p:spTree>
+      <p:nvGrpSpPr>
+        <p:cNvPr id="1" name=""/>
+        <p:cNvGrpSpPr/>
+        <p:nvPr/>
+      </p:nvGrpSpPr>
+      <p:grpSpPr/>
+      <p:sp>
+        <p:nvSpPr>
+          <p:cNvPr id="2" name="TextBox 1"/>
+          <p:cNvSpPr txBox="1"/>
+          <p:nvPr/>
+        </p:nvSpPr>
+        <p:spPr>
+          <a:xfrm>
+            <a:off x="548640" y="365760"/>
+            <a:ext cx="11064240" cy="1005840"/>
+          </a:xfrm>
+          <a:prstGeom prst="rect">
+            <a:avLst/>
+          </a:prstGeom>
+          <a:noFill/>
+        </p:spPr>
+        <p:txBody>
+          <a:bodyPr wrap="square">
+            <a:spAutoFit/>
+          </a:bodyPr>
+          <a:lstStyle/>
+          <a:p>
+            <a:r>
+              <a:rPr sz="3600" b="1">
+                <a:solidFill>
+                  <a:srgbClr val="5A0A7A"/>
+                </a:solidFill>
+              </a:rPr>
               <a:t>Closing quiz</a:t>
             </a:r>
           </a:p>
@@ -10891,7 +11041,7 @@
 </p:sld>
 </file>
 
-<file path=ppt/slides/slide45.xml><?xml version="1.0" encoding="utf-8"?>
+<file path=ppt/slides/slide46.xml><?xml version="1.0" encoding="utf-8"?>
 <p:sld xmlns:a="http://schemas.openxmlformats.org/drawingml/2006/main" xmlns:p="http://schemas.openxmlformats.org/presentationml/2006/main" xmlns:r="http://schemas.openxmlformats.org/officeDocument/2006/relationships">
   <p:cSld>
     <p:spTree>
@@ -11824,6 +11974,340 @@
 </file>
 
 <file path=ppt/slides/slide8.xml><?xml version="1.0" encoding="utf-8"?>
+<p:sld xmlns:a="http://schemas.openxmlformats.org/drawingml/2006/main" xmlns:p="http://schemas.openxmlformats.org/presentationml/2006/main" xmlns:r="http://schemas.openxmlformats.org/officeDocument/2006/relationships">
+  <p:cSld>
+    <p:spTree>
+      <p:nvGrpSpPr>
+        <p:cNvPr id="1" name=""/>
+        <p:cNvGrpSpPr/>
+        <p:nvPr/>
+      </p:nvGrpSpPr>
+      <p:grpSpPr/>
+      <p:sp>
+        <p:nvSpPr>
+          <p:cNvPr id="2" name="TextBox 1"/>
+          <p:cNvSpPr txBox="1"/>
+          <p:nvPr/>
+        </p:nvSpPr>
+        <p:spPr>
+          <a:xfrm>
+            <a:off x="548640" y="365760"/>
+            <a:ext cx="11064240" cy="1005840"/>
+          </a:xfrm>
+          <a:prstGeom prst="rect">
+            <a:avLst/>
+          </a:prstGeom>
+          <a:noFill/>
+        </p:spPr>
+        <p:txBody>
+          <a:bodyPr wrap="square">
+            <a:spAutoFit/>
+          </a:bodyPr>
+          <a:lstStyle/>
+          <a:p>
+            <a:r>
+              <a:rPr sz="3600" b="1">
+                <a:solidFill>
+                  <a:srgbClr val="5A0A7A"/>
+                </a:solidFill>
+              </a:rPr>
+              <a:t>From counterexample to a runnable test</a:t>
+            </a:r>
+          </a:p>
+        </p:txBody>
+      </p:sp>
+      <p:sp>
+        <p:nvSpPr>
+          <p:cNvPr id="3" name="TextBox 2"/>
+          <p:cNvSpPr txBox="1"/>
+          <p:nvPr/>
+        </p:nvSpPr>
+        <p:spPr>
+          <a:xfrm>
+            <a:off x="731520" y="1463040"/>
+            <a:ext cx="10789920" cy="5120640"/>
+          </a:xfrm>
+          <a:prstGeom prst="rect">
+            <a:avLst/>
+          </a:prstGeom>
+          <a:noFill/>
+        </p:spPr>
+        <p:txBody>
+          <a:bodyPr wrap="square">
+            <a:spAutoFit/>
+          </a:bodyPr>
+          <a:lstStyle/>
+          <a:p>
+            <a:pPr>
+              <a:spcAft>
+                <a:spcPts val="800"/>
+              </a:spcAft>
+            </a:pPr>
+            <a:r>
+              <a:rPr sz="2000">
+                <a:solidFill>
+                  <a:srgbClr val="212121"/>
+                </a:solidFill>
+              </a:rPr>
+              <a:t>Ask the same tool the opposite question — "can anyone ever be let in?" — and it hands back the exact password, as a test you can run.</a:t>
+            </a:r>
+          </a:p>
+          <a:p>
+            <a:pPr>
+              <a:spcAft>
+                <a:spcPts val="0"/>
+              </a:spcAft>
+            </a:pPr>
+            <a:r>
+              <a:rPr sz="1600">
+                <a:solidFill>
+                  <a:srgbClr val="212121"/>
+                </a:solidFill>
+                <a:latin typeface="Courier New"/>
+              </a:rPr>
+              <a:t>  char buf[4];</a:t>
+            </a:r>
+          </a:p>
+          <a:p>
+            <a:pPr>
+              <a:spcAft>
+                <a:spcPts val="0"/>
+              </a:spcAft>
+            </a:pPr>
+            <a:r>
+              <a:rPr sz="1600">
+                <a:solidFill>
+                  <a:srgbClr val="212121"/>
+                </a:solidFill>
+                <a:latin typeface="Courier New"/>
+              </a:rPr>
+              <a:t>  for (int i = 0; i &lt; 4; i++) buf[i] = nondet_char();</a:t>
+            </a:r>
+          </a:p>
+          <a:p>
+            <a:pPr>
+              <a:spcAft>
+                <a:spcPts val="0"/>
+              </a:spcAft>
+            </a:pPr>
+            <a:r>
+              <a:rPr sz="1600">
+                <a:solidFill>
+                  <a:srgbClr val="212121"/>
+                </a:solidFill>
+                <a:latin typeface="Courier New"/>
+              </a:rPr>
+              <a:t>  assert(strcmp(buf, "SMT") != 0);  /* claim: never granted */</a:t>
+            </a:r>
+          </a:p>
+          <a:p>
+            <a:pPr>
+              <a:spcAft>
+                <a:spcPts val="0"/>
+              </a:spcAft>
+            </a:pPr>
+            <a:r>
+              <a:rPr sz="1600">
+                <a:solidFill>
+                  <a:srgbClr val="212121"/>
+                </a:solidFill>
+                <a:latin typeface="Courier New"/>
+              </a:rPr>
+              <a:t/>
+            </a:r>
+          </a:p>
+          <a:p>
+            <a:pPr>
+              <a:spcAft>
+                <a:spcPts val="0"/>
+              </a:spcAft>
+            </a:pPr>
+            <a:r>
+              <a:rPr sz="1600">
+                <a:solidFill>
+                  <a:srgbClr val="212121"/>
+                </a:solidFill>
+                <a:latin typeface="Courier New"/>
+              </a:rPr>
+              <a:t>$ esbmc getpassword.c --unwind 8 --generate-ctest-testcase</a:t>
+            </a:r>
+          </a:p>
+          <a:p>
+            <a:pPr>
+              <a:spcAft>
+                <a:spcPts val="0"/>
+              </a:spcAft>
+            </a:pPr>
+            <a:r>
+              <a:rPr sz="1600">
+                <a:solidFill>
+                  <a:srgbClr val="212121"/>
+                </a:solidFill>
+                <a:latin typeface="Courier New"/>
+              </a:rPr>
+              <a:t>  → Generated CTest test case: test_case.c</a:t>
+            </a:r>
+          </a:p>
+          <a:p>
+            <a:pPr>
+              <a:spcAft>
+                <a:spcPts val="0"/>
+              </a:spcAft>
+            </a:pPr>
+            <a:r>
+              <a:rPr sz="1600">
+                <a:solidFill>
+                  <a:srgbClr val="212121"/>
+                </a:solidFill>
+                <a:latin typeface="Courier New"/>
+              </a:rPr>
+              <a:t/>
+            </a:r>
+          </a:p>
+          <a:p>
+            <a:pPr>
+              <a:spcAft>
+                <a:spcPts val="0"/>
+              </a:spcAft>
+            </a:pPr>
+            <a:r>
+              <a:rPr sz="1600">
+                <a:solidFill>
+                  <a:srgbClr val="212121"/>
+                </a:solidFill>
+                <a:latin typeface="Courier New"/>
+              </a:rPr>
+              <a:t>char nondet_char(void) {            /* test_case.c */</a:t>
+            </a:r>
+          </a:p>
+          <a:p>
+            <a:pPr>
+              <a:spcAft>
+                <a:spcPts val="0"/>
+              </a:spcAft>
+            </a:pPr>
+            <a:r>
+              <a:rPr sz="1600">
+                <a:solidFill>
+                  <a:srgbClr val="212121"/>
+                </a:solidFill>
+                <a:latin typeface="Courier New"/>
+              </a:rPr>
+              <a:t>  static const char v[] = { 83, 77, 84, 0 };  /* "SMT" */</a:t>
+            </a:r>
+          </a:p>
+          <a:p>
+            <a:pPr>
+              <a:spcAft>
+                <a:spcPts val="0"/>
+              </a:spcAft>
+            </a:pPr>
+            <a:r>
+              <a:rPr sz="1600">
+                <a:solidFill>
+                  <a:srgbClr val="212121"/>
+                </a:solidFill>
+                <a:latin typeface="Courier New"/>
+              </a:rPr>
+              <a:t>  static int i = 0; return v[i++];</a:t>
+            </a:r>
+          </a:p>
+          <a:p>
+            <a:pPr>
+              <a:spcAft>
+                <a:spcPts val="0"/>
+              </a:spcAft>
+            </a:pPr>
+            <a:r>
+              <a:rPr sz="1600">
+                <a:solidFill>
+                  <a:srgbClr val="212121"/>
+                </a:solidFill>
+                <a:latin typeface="Courier New"/>
+              </a:rPr>
+              <a:t>}</a:t>
+            </a:r>
+          </a:p>
+          <a:p>
+            <a:pPr>
+              <a:spcAft>
+                <a:spcPts val="800"/>
+              </a:spcAft>
+            </a:pPr>
+            <a:r>
+              <a:rPr sz="2000">
+                <a:solidFill>
+                  <a:srgbClr val="212121"/>
+                </a:solidFill>
+              </a:rPr>
+              <a:t/>
+            </a:r>
+          </a:p>
+          <a:p>
+            <a:pPr>
+              <a:spcAft>
+                <a:spcPts val="800"/>
+              </a:spcAft>
+            </a:pPr>
+            <a:r>
+              <a:rPr sz="2000">
+                <a:solidFill>
+                  <a:srgbClr val="212121"/>
+                </a:solidFill>
+              </a:rPr>
+              <a:t>ESBMC derived the password from the program's own logic. The test compiles, runs, and prints "Access Granted" — no one had to guess the right input.</a:t>
+            </a:r>
+          </a:p>
+        </p:txBody>
+      </p:sp>
+      <p:sp>
+        <p:nvSpPr>
+          <p:cNvPr id="4" name="TextBox 3"/>
+          <p:cNvSpPr txBox="1"/>
+          <p:nvPr/>
+        </p:nvSpPr>
+        <p:spPr>
+          <a:xfrm>
+            <a:off x="731520" y="6400800"/>
+            <a:ext cx="10789920" cy="182880"/>
+          </a:xfrm>
+          <a:prstGeom prst="rect">
+            <a:avLst/>
+          </a:prstGeom>
+          <a:noFill/>
+        </p:spPr>
+        <p:txBody>
+          <a:bodyPr wrap="square">
+            <a:spAutoFit/>
+          </a:bodyPr>
+          <a:lstStyle/>
+          <a:p>
+            <a:pPr>
+              <a:spcAft>
+                <a:spcPts val="800"/>
+              </a:spcAft>
+            </a:pPr>
+            <a:r>
+              <a:rPr sz="1400">
+                <a:solidFill>
+                  <a:srgbClr val="212121"/>
+                </a:solidFill>
+                <a:hlinkClick r:id="rId2"/>
+              </a:rPr>
+              <a:t>Docs: esbmc.github.io/docs/c-cpp/ctest-gen</a:t>
+            </a:r>
+          </a:p>
+        </p:txBody>
+      </p:sp>
+    </p:spTree>
+  </p:cSld>
+  <p:clrMapOvr>
+    <a:masterClrMapping/>
+  </p:clrMapOvr>
+</p:sld>
+</file>
+
+<file path=ppt/slides/slide9.xml><?xml version="1.0" encoding="utf-8"?>
 <p:sld xmlns:a="http://schemas.openxmlformats.org/drawingml/2006/main" xmlns:p="http://schemas.openxmlformats.org/presentationml/2006/main" xmlns:r="http://schemas.openxmlformats.org/officeDocument/2006/relationships">
   <p:cSld>
     <p:spTree>
@@ -12125,155 +12609,6 @@
           </a:graphicData>
         </a:graphic>
       </p:graphicFrame>
-    </p:spTree>
-  </p:cSld>
-  <p:clrMapOvr>
-    <a:masterClrMapping/>
-  </p:clrMapOvr>
-</p:sld>
-</file>
-
-<file path=ppt/slides/slide9.xml><?xml version="1.0" encoding="utf-8"?>
-<p:sld xmlns:a="http://schemas.openxmlformats.org/drawingml/2006/main" xmlns:p="http://schemas.openxmlformats.org/presentationml/2006/main" xmlns:r="http://schemas.openxmlformats.org/officeDocument/2006/relationships">
-  <p:cSld>
-    <p:spTree>
-      <p:nvGrpSpPr>
-        <p:cNvPr id="1" name=""/>
-        <p:cNvGrpSpPr/>
-        <p:nvPr/>
-      </p:nvGrpSpPr>
-      <p:grpSpPr/>
-      <p:sp>
-        <p:nvSpPr>
-          <p:cNvPr id="2" name="TextBox 1"/>
-          <p:cNvSpPr txBox="1"/>
-          <p:nvPr/>
-        </p:nvSpPr>
-        <p:spPr>
-          <a:xfrm>
-            <a:off x="548640" y="365760"/>
-            <a:ext cx="11064240" cy="1005840"/>
-          </a:xfrm>
-          <a:prstGeom prst="rect">
-            <a:avLst/>
-          </a:prstGeom>
-          <a:noFill/>
-        </p:spPr>
-        <p:txBody>
-          <a:bodyPr wrap="square">
-            <a:spAutoFit/>
-          </a:bodyPr>
-          <a:lstStyle/>
-          <a:p>
-            <a:r>
-              <a:rPr sz="3600" b="1">
-                <a:solidFill>
-                  <a:srgbClr val="5A0A7A"/>
-                </a:solidFill>
-              </a:rPr>
-              <a:t>Memory safety: the bug class that won't die</a:t>
-            </a:r>
-          </a:p>
-        </p:txBody>
-      </p:sp>
-      <p:sp>
-        <p:nvSpPr>
-          <p:cNvPr id="3" name="TextBox 2"/>
-          <p:cNvSpPr txBox="1"/>
-          <p:nvPr/>
-        </p:nvSpPr>
-        <p:spPr>
-          <a:xfrm>
-            <a:off x="731520" y="1645920"/>
-            <a:ext cx="10789920" cy="4937760"/>
-          </a:xfrm>
-          <a:prstGeom prst="rect">
-            <a:avLst/>
-          </a:prstGeom>
-          <a:noFill/>
-        </p:spPr>
-        <p:txBody>
-          <a:bodyPr wrap="square">
-            <a:spAutoFit/>
-          </a:bodyPr>
-          <a:lstStyle/>
-          <a:p>
-            <a:pPr>
-              <a:spcAft>
-                <a:spcPts val="800"/>
-              </a:spcAft>
-            </a:pPr>
-            <a:r>
-              <a:rPr sz="2400">
-                <a:solidFill>
-                  <a:srgbClr val="212121"/>
-                </a:solidFill>
-              </a:rPr>
-              <a:t>C trusts you completely: every array index, every pointer dereference, every free() is your problem.</a:t>
-            </a:r>
-          </a:p>
-          <a:p>
-            <a:pPr>
-              <a:spcAft>
-                <a:spcPts val="800"/>
-              </a:spcAft>
-            </a:pPr>
-            <a:r>
-              <a:rPr sz="2400">
-                <a:solidFill>
-                  <a:srgbClr val="212121"/>
-                </a:solidFill>
-              </a:rPr>
-              <a:t>Get it wrong and the result is undefined behaviour — the program may crash, corrupt data, or look perfectly fine until it ships.</a:t>
-            </a:r>
-          </a:p>
-          <a:p>
-            <a:pPr>
-              <a:spcAft>
-                <a:spcPts val="800"/>
-              </a:spcAft>
-            </a:pPr>
-            <a:r>
-              <a:rPr sz="2400">
-                <a:solidFill>
-                  <a:srgbClr val="212121"/>
-                </a:solidFill>
-              </a:rPr>
-              <a:t>“Looks fine in testing” is exactly what undefined behaviour does best.</a:t>
-            </a:r>
-          </a:p>
-          <a:p>
-            <a:pPr>
-              <a:spcAft>
-                <a:spcPts val="800"/>
-              </a:spcAft>
-            </a:pPr>
-            <a:r>
-              <a:rPr sz="2400">
-                <a:solidFill>
-                  <a:srgbClr val="212121"/>
-                </a:solidFill>
-              </a:rPr>
-              <a:t/>
-            </a:r>
-          </a:p>
-          <a:p>
-            <a:pPr>
-              <a:spcAft>
-                <a:spcPts val="800"/>
-              </a:spcAft>
-            </a:pPr>
-            <a:r>
-              <a:rPr sz="2400">
-                <a:solidFill>
-                  <a:srgbClr val="212121"/>
-                </a:solidFill>
-              </a:rPr>
-              <a:t>How big is the problem? Let's look at the data.</a:t>
-            </a:r>
-          </a:p>
-        </p:txBody>
-      </p:sp>
     </p:spTree>
   </p:cSld>
   <p:clrMapOvr>

--- a/slides/session1/01-session1-fundamentals.pptx
+++ b/slides/session1/01-session1-fundamentals.pptx
@@ -12049,7 +12049,7 @@
                   <a:srgbClr val="212121"/>
                 </a:solidFill>
               </a:rPr>
-              <a:t>Ask the same tool the opposite question — "can anyone ever be let in?" — and it hands back the exact password, as a test you can run.</a:t>
+              <a:t>Ask the same tool the opposite question — "can any input get past the check?" — and it hands back one that does, as a test you can run.</a:t>
             </a:r>
           </a:p>
           <a:p>
@@ -12065,7 +12065,7 @@
                 </a:solidFill>
                 <a:latin typeface="Courier New"/>
               </a:rPr>
-              <a:t>  char buf[4];</a:t>
+              <a:t>  char buf[4];                          /* input ESBMC chooses */</a:t>
             </a:r>
           </a:p>
           <a:p>
@@ -12081,7 +12081,7 @@
                 </a:solidFill>
                 <a:latin typeface="Courier New"/>
               </a:rPr>
-              <a:t>  for (int i = 0; i &lt; 4; i++) buf[i] = nondet_char();</a:t>
+              <a:t>  for (int i = 0; i &lt; 3; i++) buf[i] = nondet_char();</a:t>
             </a:r>
           </a:p>
           <a:p>
@@ -12097,7 +12097,7 @@
                 </a:solidFill>
                 <a:latin typeface="Courier New"/>
               </a:rPr>
-              <a:t>  assert(strcmp(buf, "SMT") != 0);  /* claim: never granted */</a:t>
+              <a:t>  buf[3] = '\0';</a:t>
             </a:r>
           </a:p>
           <a:p>
@@ -12113,6 +12113,38 @@
                 </a:solidFill>
                 <a:latin typeface="Courier New"/>
               </a:rPr>
+              <a:t>  if (strcmp(buf, "SMT") == 0)</a:t>
+            </a:r>
+          </a:p>
+          <a:p>
+            <a:pPr>
+              <a:spcAft>
+                <a:spcPts val="0"/>
+              </a:spcAft>
+            </a:pPr>
+            <a:r>
+              <a:rPr sz="1600">
+                <a:solidFill>
+                  <a:srgbClr val="212121"/>
+                </a:solidFill>
+                <a:latin typeface="Courier New"/>
+              </a:rPr>
+              <a:t>    assert(0);             /* claim: this is unreachable */</a:t>
+            </a:r>
+          </a:p>
+          <a:p>
+            <a:pPr>
+              <a:spcAft>
+                <a:spcPts val="0"/>
+              </a:spcAft>
+            </a:pPr>
+            <a:r>
+              <a:rPr sz="1600">
+                <a:solidFill>
+                  <a:srgbClr val="212121"/>
+                </a:solidFill>
+                <a:latin typeface="Courier New"/>
+              </a:rPr>
               <a:t/>
             </a:r>
           </a:p>
@@ -12193,7 +12225,7 @@
                 </a:solidFill>
                 <a:latin typeface="Courier New"/>
               </a:rPr>
-              <a:t>  static const char v[] = { 83, 77, 84, 0 };  /* "SMT" */</a:t>
+              <a:t>  static const char v[] = { 83, 77, 84 };  /* "SMT" */</a:t>
             </a:r>
           </a:p>
           <a:p>
@@ -12255,7 +12287,7 @@
                   <a:srgbClr val="212121"/>
                 </a:solidFill>
               </a:rPr>
-              <a:t>ESBMC derived the password from the program's own logic. The test compiles, runs, and prints "Access Granted" — no one had to guess the right input.</a:t>
+              <a:t>ESBMC found the input that reaches the protected branch. The test compiles, runs, and prints "Access Granted with input SMT" — no one had to guess it.</a:t>
             </a:r>
           </a:p>
         </p:txBody>

--- a/slides/session1/01-session1-fundamentals.pptx
+++ b/slides/session1/01-session1-fundamentals.pptx
@@ -51,6 +51,7 @@
     <p:sldId id="299" r:id="rId50"/>
     <p:sldId id="300" r:id="rId51"/>
     <p:sldId id="301" r:id="rId52"/>
+    <p:sldId id="302" r:id="rId53"/>
   </p:sldIdLst>
   <p:sldSz cx="12191695" cy="6858000" type="screen4x3"/>
   <p:notesSz cx="6858000" cy="9144000"/>
@@ -3626,7 +3627,7 @@
                   <a:srgbClr val="5A0A7A"/>
                 </a:solidFill>
               </a:rPr>
-              <a:t>Memory safety: the bug class that won't die</a:t>
+              <a:t>Safety and security: two sides of one coin</a:t>
             </a:r>
           </a:p>
         </p:txBody>
@@ -3639,8 +3640,8 @@
         </p:nvSpPr>
         <p:spPr>
           <a:xfrm>
-            <a:off x="731520" y="1645920"/>
-            <a:ext cx="10789920" cy="4937760"/>
+            <a:off x="731520" y="1371600"/>
+            <a:ext cx="10789920" cy="5212080"/>
           </a:xfrm>
           <a:prstGeom prst="rect">
             <a:avLst/>
@@ -3664,7 +3665,7 @@
                   <a:srgbClr val="212121"/>
                 </a:solidFill>
               </a:rPr>
-              <a:t>C trusts you completely: every array index, every pointer dereference, every free() is your problem.</a:t>
+              <a:t>Safety — the system must not harm the world (Therac-25, Ariane 5).</a:t>
             </a:r>
           </a:p>
           <a:p>
@@ -3679,7 +3680,7 @@
                   <a:srgbClr val="212121"/>
                 </a:solidFill>
               </a:rPr>
-              <a:t>Get it wrong and the result is undefined behaviour — the program may crash, corrupt data, or look perfectly fine until it ships.</a:t>
+              <a:t>Security — the world must not harm the system (getPassword).</a:t>
             </a:r>
           </a:p>
           <a:p>
@@ -3694,41 +3695,202 @@
                   <a:srgbClr val="212121"/>
                 </a:solidFill>
               </a:rPr>
-              <a:t>“Looks fine in testing” is exactly what undefined behaviour does best.</a:t>
-            </a:r>
-          </a:p>
-          <a:p>
-            <a:pPr>
-              <a:spcAft>
-                <a:spcPts val="800"/>
-              </a:spcAft>
-            </a:pPr>
-            <a:r>
-              <a:rPr sz="2400">
-                <a:solidFill>
-                  <a:srgbClr val="212121"/>
-                </a:solidFill>
-              </a:rPr>
-              <a:t/>
-            </a:r>
-          </a:p>
-          <a:p>
-            <a:pPr>
-              <a:spcAft>
-                <a:spcPts val="800"/>
-              </a:spcAft>
-            </a:pPr>
-            <a:r>
-              <a:rPr sz="2400">
-                <a:solidFill>
-                  <a:srgbClr val="212121"/>
-                </a:solidFill>
-              </a:rPr>
-              <a:t>How big is the problem? Let's look at the data.</a:t>
-            </a:r>
-          </a:p>
-        </p:txBody>
-      </p:sp>
+              <a:t>Same root cause tonight: the program reaches a state it was never meant to reach.</a:t>
+            </a:r>
+          </a:p>
+        </p:txBody>
+      </p:sp>
+      <p:graphicFrame>
+        <p:nvGraphicFramePr>
+          <p:cNvPr id="4" name="Table 3"/>
+          <p:cNvGraphicFramePr>
+            <a:graphicFrameLocks noGrp="1"/>
+          </p:cNvGraphicFramePr>
+          <p:nvPr/>
+        </p:nvGraphicFramePr>
+        <p:xfrm>
+          <a:off x="731520" y="3657600"/>
+          <a:ext cx="10698480" cy="1463040"/>
+        </p:xfrm>
+        <a:graphic>
+          <a:graphicData uri="http://schemas.openxmlformats.org/drawingml/2006/table">
+            <a:tbl>
+              <a:tblPr firstRow="1" bandRow="1">
+                <a:tableStyleId>{5C22544A-7EE6-4342-B048-85BDC9FD1C3A}</a:tableStyleId>
+              </a:tblPr>
+              <a:tblGrid>
+                <a:gridCol w="2560320"/>
+                <a:gridCol w="3840480"/>
+                <a:gridCol w="4297680"/>
+              </a:tblGrid>
+              <a:tr h="365760">
+                <a:tc>
+                  <a:txBody>
+                    <a:bodyPr/>
+                    <a:lstStyle/>
+                    <a:p>
+                      <a:r>
+                        <a:rPr sz="1800" b="1"/>
+                        <a:t>Security goal</a:t>
+                      </a:r>
+                    </a:p>
+                  </a:txBody>
+                  <a:tcPr/>
+                </a:tc>
+                <a:tc>
+                  <a:txBody>
+                    <a:bodyPr/>
+                    <a:lstStyle/>
+                    <a:p>
+                      <a:r>
+                        <a:rPr sz="1800" b="1"/>
+                        <a:t>Meaning</a:t>
+                      </a:r>
+                    </a:p>
+                  </a:txBody>
+                  <a:tcPr/>
+                </a:tc>
+                <a:tc>
+                  <a:txBody>
+                    <a:bodyPr/>
+                    <a:lstStyle/>
+                    <a:p>
+                      <a:r>
+                        <a:rPr sz="1800" b="1"/>
+                        <a:t>getPassword breaks it?</a:t>
+                      </a:r>
+                    </a:p>
+                  </a:txBody>
+                  <a:tcPr/>
+                </a:tc>
+              </a:tr>
+              <a:tr h="365760">
+                <a:tc>
+                  <a:txBody>
+                    <a:bodyPr/>
+                    <a:lstStyle/>
+                    <a:p>
+                      <a:r>
+                        <a:rPr sz="1800"/>
+                        <a:t>Confidentiality</a:t>
+                      </a:r>
+                    </a:p>
+                  </a:txBody>
+                  <a:tcPr/>
+                </a:tc>
+                <a:tc>
+                  <a:txBody>
+                    <a:bodyPr/>
+                    <a:lstStyle/>
+                    <a:p>
+                      <a:r>
+                        <a:rPr sz="1800"/>
+                        <a:t>no unauthorised reading</a:t>
+                      </a:r>
+                    </a:p>
+                  </a:txBody>
+                  <a:tcPr/>
+                </a:tc>
+                <a:tc>
+                  <a:txBody>
+                    <a:bodyPr/>
+                    <a:lstStyle/>
+                    <a:p>
+                      <a:r>
+                        <a:rPr sz="1800"/>
+                        <a:t>yes — secrets behind the check</a:t>
+                      </a:r>
+                    </a:p>
+                  </a:txBody>
+                  <a:tcPr/>
+                </a:tc>
+              </a:tr>
+              <a:tr h="365760">
+                <a:tc>
+                  <a:txBody>
+                    <a:bodyPr/>
+                    <a:lstStyle/>
+                    <a:p>
+                      <a:r>
+                        <a:rPr sz="1800"/>
+                        <a:t>Integrity</a:t>
+                      </a:r>
+                    </a:p>
+                  </a:txBody>
+                  <a:tcPr/>
+                </a:tc>
+                <a:tc>
+                  <a:txBody>
+                    <a:bodyPr/>
+                    <a:lstStyle/>
+                    <a:p>
+                      <a:r>
+                        <a:rPr sz="1800"/>
+                        <a:t>no unauthorised writing</a:t>
+                      </a:r>
+                    </a:p>
+                  </a:txBody>
+                  <a:tcPr/>
+                </a:tc>
+                <a:tc>
+                  <a:txBody>
+                    <a:bodyPr/>
+                    <a:lstStyle/>
+                    <a:p>
+                      <a:r>
+                        <a:rPr sz="1800"/>
+                        <a:t>yes — the stack itself</a:t>
+                      </a:r>
+                    </a:p>
+                  </a:txBody>
+                  <a:tcPr/>
+                </a:tc>
+              </a:tr>
+              <a:tr h="365760">
+                <a:tc>
+                  <a:txBody>
+                    <a:bodyPr/>
+                    <a:lstStyle/>
+                    <a:p>
+                      <a:r>
+                        <a:rPr sz="1800"/>
+                        <a:t>Availability</a:t>
+                      </a:r>
+                    </a:p>
+                  </a:txBody>
+                  <a:tcPr/>
+                </a:tc>
+                <a:tc>
+                  <a:txBody>
+                    <a:bodyPr/>
+                    <a:lstStyle/>
+                    <a:p>
+                      <a:r>
+                        <a:rPr sz="1800"/>
+                        <a:t>service stays up</a:t>
+                      </a:r>
+                    </a:p>
+                  </a:txBody>
+                  <a:tcPr/>
+                </a:tc>
+                <a:tc>
+                  <a:txBody>
+                    <a:bodyPr/>
+                    <a:lstStyle/>
+                    <a:p>
+                      <a:r>
+                        <a:rPr sz="1800"/>
+                        <a:t>crash = denial of service</a:t>
+                      </a:r>
+                    </a:p>
+                  </a:txBody>
+                  <a:tcPr/>
+                </a:tc>
+              </a:tr>
+            </a:tbl>
+          </a:graphicData>
+        </a:graphic>
+      </p:graphicFrame>
     </p:spTree>
   </p:cSld>
   <p:clrMapOvr>
@@ -3775,6 +3937,155 @@
                   <a:srgbClr val="5A0A7A"/>
                 </a:solidFill>
               </a:rPr>
+              <a:t>Memory safety: the bug class that won't die</a:t>
+            </a:r>
+          </a:p>
+        </p:txBody>
+      </p:sp>
+      <p:sp>
+        <p:nvSpPr>
+          <p:cNvPr id="3" name="TextBox 2"/>
+          <p:cNvSpPr txBox="1"/>
+          <p:nvPr/>
+        </p:nvSpPr>
+        <p:spPr>
+          <a:xfrm>
+            <a:off x="731520" y="1645920"/>
+            <a:ext cx="10789920" cy="4937760"/>
+          </a:xfrm>
+          <a:prstGeom prst="rect">
+            <a:avLst/>
+          </a:prstGeom>
+          <a:noFill/>
+        </p:spPr>
+        <p:txBody>
+          <a:bodyPr wrap="square">
+            <a:spAutoFit/>
+          </a:bodyPr>
+          <a:lstStyle/>
+          <a:p>
+            <a:pPr>
+              <a:spcAft>
+                <a:spcPts val="800"/>
+              </a:spcAft>
+            </a:pPr>
+            <a:r>
+              <a:rPr sz="2400">
+                <a:solidFill>
+                  <a:srgbClr val="212121"/>
+                </a:solidFill>
+              </a:rPr>
+              <a:t>C trusts you completely: every array index, every pointer dereference, every free() is your problem.</a:t>
+            </a:r>
+          </a:p>
+          <a:p>
+            <a:pPr>
+              <a:spcAft>
+                <a:spcPts val="800"/>
+              </a:spcAft>
+            </a:pPr>
+            <a:r>
+              <a:rPr sz="2400">
+                <a:solidFill>
+                  <a:srgbClr val="212121"/>
+                </a:solidFill>
+              </a:rPr>
+              <a:t>Get it wrong and the result is undefined behaviour — the program may crash, corrupt data, or look perfectly fine until it ships.</a:t>
+            </a:r>
+          </a:p>
+          <a:p>
+            <a:pPr>
+              <a:spcAft>
+                <a:spcPts val="800"/>
+              </a:spcAft>
+            </a:pPr>
+            <a:r>
+              <a:rPr sz="2400">
+                <a:solidFill>
+                  <a:srgbClr val="212121"/>
+                </a:solidFill>
+              </a:rPr>
+              <a:t>“Looks fine in testing” is exactly what undefined behaviour does best.</a:t>
+            </a:r>
+          </a:p>
+          <a:p>
+            <a:pPr>
+              <a:spcAft>
+                <a:spcPts val="800"/>
+              </a:spcAft>
+            </a:pPr>
+            <a:r>
+              <a:rPr sz="2400">
+                <a:solidFill>
+                  <a:srgbClr val="212121"/>
+                </a:solidFill>
+              </a:rPr>
+              <a:t/>
+            </a:r>
+          </a:p>
+          <a:p>
+            <a:pPr>
+              <a:spcAft>
+                <a:spcPts val="800"/>
+              </a:spcAft>
+            </a:pPr>
+            <a:r>
+              <a:rPr sz="2400">
+                <a:solidFill>
+                  <a:srgbClr val="212121"/>
+                </a:solidFill>
+              </a:rPr>
+              <a:t>How big is the problem? Let's look at the data.</a:t>
+            </a:r>
+          </a:p>
+        </p:txBody>
+      </p:sp>
+    </p:spTree>
+  </p:cSld>
+  <p:clrMapOvr>
+    <a:masterClrMapping/>
+  </p:clrMapOvr>
+</p:sld>
+</file>
+
+<file path=ppt/slides/slide12.xml><?xml version="1.0" encoding="utf-8"?>
+<p:sld xmlns:a="http://schemas.openxmlformats.org/drawingml/2006/main" xmlns:p="http://schemas.openxmlformats.org/presentationml/2006/main" xmlns:r="http://schemas.openxmlformats.org/officeDocument/2006/relationships">
+  <p:cSld>
+    <p:spTree>
+      <p:nvGrpSpPr>
+        <p:cNvPr id="1" name=""/>
+        <p:cNvGrpSpPr/>
+        <p:nvPr/>
+      </p:nvGrpSpPr>
+      <p:grpSpPr/>
+      <p:sp>
+        <p:nvSpPr>
+          <p:cNvPr id="2" name="TextBox 1"/>
+          <p:cNvSpPr txBox="1"/>
+          <p:nvPr/>
+        </p:nvSpPr>
+        <p:spPr>
+          <a:xfrm>
+            <a:off x="548640" y="365760"/>
+            <a:ext cx="11064240" cy="1005840"/>
+          </a:xfrm>
+          <a:prstGeom prst="rect">
+            <a:avLst/>
+          </a:prstGeom>
+          <a:noFill/>
+        </p:spPr>
+        <p:txBody>
+          <a:bodyPr wrap="square">
+            <a:spAutoFit/>
+          </a:bodyPr>
+          <a:lstStyle/>
+          <a:p>
+            <a:r>
+              <a:rPr sz="3600" b="1">
+                <a:solidFill>
+                  <a:srgbClr val="5A0A7A"/>
+                </a:solidFill>
+              </a:rPr>
               <a:t>Vulnerabilities keep climbing</a:t>
             </a:r>
           </a:p>
@@ -3844,7 +4155,7 @@
 </p:sld>
 </file>
 
-<file path=ppt/slides/slide12.xml><?xml version="1.0" encoding="utf-8"?>
+<file path=ppt/slides/slide13.xml><?xml version="1.0" encoding="utf-8"?>
 <p:sld xmlns:a="http://schemas.openxmlformats.org/drawingml/2006/main" xmlns:p="http://schemas.openxmlformats.org/presentationml/2006/main" xmlns:r="http://schemas.openxmlformats.org/officeDocument/2006/relationships">
   <p:cSld>
     <p:spTree>
@@ -3951,7 +4262,7 @@
 </p:sld>
 </file>
 
-<file path=ppt/slides/slide13.xml><?xml version="1.0" encoding="utf-8"?>
+<file path=ppt/slides/slide14.xml><?xml version="1.0" encoding="utf-8"?>
 <p:sld xmlns:a="http://schemas.openxmlformats.org/drawingml/2006/main" xmlns:p="http://schemas.openxmlformats.org/presentationml/2006/main" xmlns:r="http://schemas.openxmlformats.org/officeDocument/2006/relationships">
   <p:cSld>
     <p:spTree>
@@ -4103,237 +4414,6 @@
                 </a:solidFill>
               </a:rPr>
               <a:t>proving the C/C++ we already run correct — formal verification. Tonight is about this one.</a:t>
-            </a:r>
-          </a:p>
-        </p:txBody>
-      </p:sp>
-    </p:spTree>
-  </p:cSld>
-  <p:clrMapOvr>
-    <a:masterClrMapping/>
-  </p:clrMapOvr>
-</p:sld>
-</file>
-
-<file path=ppt/slides/slide14.xml><?xml version="1.0" encoding="utf-8"?>
-<p:sld xmlns:a="http://schemas.openxmlformats.org/drawingml/2006/main" xmlns:p="http://schemas.openxmlformats.org/presentationml/2006/main" xmlns:r="http://schemas.openxmlformats.org/officeDocument/2006/relationships">
-  <p:cSld>
-    <p:spTree>
-      <p:nvGrpSpPr>
-        <p:cNvPr id="1" name=""/>
-        <p:cNvGrpSpPr/>
-        <p:nvPr/>
-      </p:nvGrpSpPr>
-      <p:grpSpPr/>
-      <p:sp>
-        <p:nvSpPr>
-          <p:cNvPr id="2" name="TextBox 1"/>
-          <p:cNvSpPr txBox="1"/>
-          <p:nvPr/>
-        </p:nvSpPr>
-        <p:spPr>
-          <a:xfrm>
-            <a:off x="548640" y="365760"/>
-            <a:ext cx="11064240" cy="1005840"/>
-          </a:xfrm>
-          <a:prstGeom prst="rect">
-            <a:avLst/>
-          </a:prstGeom>
-          <a:noFill/>
-        </p:spPr>
-        <p:txBody>
-          <a:bodyPr wrap="square">
-            <a:spAutoFit/>
-          </a:bodyPr>
-          <a:lstStyle/>
-          <a:p>
-            <a:r>
-              <a:rPr sz="3600" b="1">
-                <a:solidFill>
-                  <a:srgbClr val="5A0A7A"/>
-                </a:solidFill>
-              </a:rPr>
-              <a:t>Exercise 1 — Spot the Bug (15 min)</a:t>
-            </a:r>
-          </a:p>
-        </p:txBody>
-      </p:sp>
-      <p:sp>
-        <p:nvSpPr>
-          <p:cNvPr id="3" name="TextBox 2"/>
-          <p:cNvSpPr txBox="1"/>
-          <p:nvPr/>
-        </p:nvSpPr>
-        <p:spPr>
-          <a:xfrm>
-            <a:off x="731520" y="1463040"/>
-            <a:ext cx="10789920" cy="5120640"/>
-          </a:xfrm>
-          <a:prstGeom prst="rect">
-            <a:avLst/>
-          </a:prstGeom>
-          <a:noFill/>
-        </p:spPr>
-        <p:txBody>
-          <a:bodyPr wrap="square">
-            <a:spAutoFit/>
-          </a:bodyPr>
-          <a:lstStyle/>
-          <a:p>
-            <a:pPr>
-              <a:spcAft>
-                <a:spcPts val="800"/>
-              </a:spcAft>
-            </a:pPr>
-            <a:r>
-              <a:rPr sz="2200">
-                <a:solidFill>
-                  <a:srgbClr val="212121"/>
-                </a:solidFill>
-              </a:rPr>
-              <a:t>In pairs, 7 minutes, on the handout:</a:t>
-            </a:r>
-          </a:p>
-          <a:p>
-            <a:pPr>
-              <a:spcAft>
-                <a:spcPts val="0"/>
-              </a:spcAft>
-            </a:pPr>
-            <a:r>
-              <a:rPr sz="1800">
-                <a:solidFill>
-                  <a:srgbClr val="212121"/>
-                </a:solidFill>
-                <a:latin typeface="Courier New"/>
-              </a:rPr>
-              <a:t>int *zPtr;</a:t>
-            </a:r>
-          </a:p>
-          <a:p>
-            <a:pPr>
-              <a:spcAft>
-                <a:spcPts val="0"/>
-              </a:spcAft>
-            </a:pPr>
-            <a:r>
-              <a:rPr sz="1800">
-                <a:solidFill>
-                  <a:srgbClr val="212121"/>
-                </a:solidFill>
-                <a:latin typeface="Courier New"/>
-              </a:rPr>
-              <a:t>int *aPtr = NULL;</a:t>
-            </a:r>
-          </a:p>
-          <a:p>
-            <a:pPr>
-              <a:spcAft>
-                <a:spcPts val="0"/>
-              </a:spcAft>
-            </a:pPr>
-            <a:r>
-              <a:rPr sz="1800">
-                <a:solidFill>
-                  <a:srgbClr val="212121"/>
-                </a:solidFill>
-                <a:latin typeface="Courier New"/>
-              </a:rPr>
-              <a:t>void *sPtr = NULL;</a:t>
-            </a:r>
-          </a:p>
-          <a:p>
-            <a:pPr>
-              <a:spcAft>
-                <a:spcPts val="0"/>
-              </a:spcAft>
-            </a:pPr>
-            <a:r>
-              <a:rPr sz="1800">
-                <a:solidFill>
-                  <a:srgbClr val="212121"/>
-                </a:solidFill>
-                <a:latin typeface="Courier New"/>
-              </a:rPr>
-              <a:t>int number, i;</a:t>
-            </a:r>
-          </a:p>
-          <a:p>
-            <a:pPr>
-              <a:spcAft>
-                <a:spcPts val="0"/>
-              </a:spcAft>
-            </a:pPr>
-            <a:r>
-              <a:rPr sz="1800">
-                <a:solidFill>
-                  <a:srgbClr val="212121"/>
-                </a:solidFill>
-                <a:latin typeface="Courier New"/>
-              </a:rPr>
-              <a:t>int z[5] = {1, 2, 3, 4, 5};</a:t>
-            </a:r>
-          </a:p>
-          <a:p>
-            <a:pPr>
-              <a:spcAft>
-                <a:spcPts val="0"/>
-              </a:spcAft>
-            </a:pPr>
-            <a:r>
-              <a:rPr sz="1800">
-                <a:solidFill>
-                  <a:srgbClr val="212121"/>
-                </a:solidFill>
-                <a:latin typeface="Courier New"/>
-              </a:rPr>
-              <a:t>sPtr = z;   ++zPtr;   number = zPtr;</a:t>
-            </a:r>
-          </a:p>
-          <a:p>
-            <a:pPr>
-              <a:spcAft>
-                <a:spcPts val="0"/>
-              </a:spcAft>
-            </a:pPr>
-            <a:r>
-              <a:rPr sz="1800">
-                <a:solidFill>
-                  <a:srgbClr val="212121"/>
-                </a:solidFill>
-                <a:latin typeface="Courier New"/>
-              </a:rPr>
-              <a:t>number = *zPtr[2];   number = *sPtr;   ++z;</a:t>
-            </a:r>
-          </a:p>
-          <a:p>
-            <a:pPr>
-              <a:spcAft>
-                <a:spcPts val="800"/>
-              </a:spcAft>
-            </a:pPr>
-            <a:r>
-              <a:rPr sz="2200">
-                <a:solidFill>
-                  <a:srgbClr val="212121"/>
-                </a:solidFill>
-              </a:rPr>
-              <a:t>For each bug: WHAT is wrong, and what could happen at runtime?</a:t>
-            </a:r>
-          </a:p>
-          <a:p>
-            <a:pPr>
-              <a:spcAft>
-                <a:spcPts val="800"/>
-              </a:spcAft>
-            </a:pPr>
-            <a:r>
-              <a:rPr sz="2200">
-                <a:solidFill>
-                  <a:srgbClr val="212121"/>
-                </a:solidFill>
-              </a:rPr>
-              <a:t>There are at least six. Debrief: one bug per pair.</a:t>
             </a:r>
           </a:p>
         </p:txBody>
@@ -4384,7 +4464,7 @@
                   <a:srgbClr val="5A0A7A"/>
                 </a:solidFill>
               </a:rPr>
-              <a:t>Verification vs. validation</a:t>
+              <a:t>Exercise 1 — Spot the Bug (15 min)</a:t>
             </a:r>
           </a:p>
         </p:txBody>
@@ -4397,8 +4477,8 @@
         </p:nvSpPr>
         <p:spPr>
           <a:xfrm>
-            <a:off x="731520" y="1828800"/>
-            <a:ext cx="10789920" cy="4754880"/>
+            <a:off x="731520" y="1463040"/>
+            <a:ext cx="10789920" cy="5120640"/>
           </a:xfrm>
           <a:prstGeom prst="rect">
             <a:avLst/>
@@ -4417,57 +4497,154 @@
               </a:spcAft>
             </a:pPr>
             <a:r>
-              <a:rPr sz="2600">
-                <a:solidFill>
-                  <a:srgbClr val="212121"/>
-                </a:solidFill>
-              </a:rPr>
-              <a:t>Validation — are we building the right thing? (ask the users)</a:t>
-            </a:r>
-          </a:p>
-          <a:p>
-            <a:pPr>
-              <a:spcAft>
-                <a:spcPts val="800"/>
-              </a:spcAft>
-            </a:pPr>
-            <a:r>
-              <a:rPr sz="2600">
-                <a:solidFill>
-                  <a:srgbClr val="212121"/>
-                </a:solidFill>
-              </a:rPr>
-              <a:t>Verification — are we building the thing right? (ask the specification)</a:t>
-            </a:r>
-          </a:p>
-          <a:p>
-            <a:pPr>
-              <a:spcAft>
-                <a:spcPts val="800"/>
-              </a:spcAft>
-            </a:pPr>
-            <a:r>
-              <a:rPr sz="2600">
-                <a:solidFill>
-                  <a:srgbClr val="212121"/>
-                </a:solidFill>
-              </a:rPr>
-              <a:t/>
-            </a:r>
-          </a:p>
-          <a:p>
-            <a:pPr>
-              <a:spcAft>
-                <a:spcPts val="800"/>
-              </a:spcAft>
-            </a:pPr>
-            <a:r>
-              <a:rPr sz="2600">
-                <a:solidFill>
-                  <a:srgbClr val="212121"/>
-                </a:solidFill>
-              </a:rPr>
-              <a:t>Tonight is verification: given a program and a property, does every execution satisfy the property?</a:t>
+              <a:rPr sz="2200">
+                <a:solidFill>
+                  <a:srgbClr val="212121"/>
+                </a:solidFill>
+              </a:rPr>
+              <a:t>In pairs, 7 minutes, on the handout:</a:t>
+            </a:r>
+          </a:p>
+          <a:p>
+            <a:pPr>
+              <a:spcAft>
+                <a:spcPts val="0"/>
+              </a:spcAft>
+            </a:pPr>
+            <a:r>
+              <a:rPr sz="1800">
+                <a:solidFill>
+                  <a:srgbClr val="212121"/>
+                </a:solidFill>
+                <a:latin typeface="Courier New"/>
+              </a:rPr>
+              <a:t>int *zPtr;</a:t>
+            </a:r>
+          </a:p>
+          <a:p>
+            <a:pPr>
+              <a:spcAft>
+                <a:spcPts val="0"/>
+              </a:spcAft>
+            </a:pPr>
+            <a:r>
+              <a:rPr sz="1800">
+                <a:solidFill>
+                  <a:srgbClr val="212121"/>
+                </a:solidFill>
+                <a:latin typeface="Courier New"/>
+              </a:rPr>
+              <a:t>int *aPtr = NULL;</a:t>
+            </a:r>
+          </a:p>
+          <a:p>
+            <a:pPr>
+              <a:spcAft>
+                <a:spcPts val="0"/>
+              </a:spcAft>
+            </a:pPr>
+            <a:r>
+              <a:rPr sz="1800">
+                <a:solidFill>
+                  <a:srgbClr val="212121"/>
+                </a:solidFill>
+                <a:latin typeface="Courier New"/>
+              </a:rPr>
+              <a:t>void *sPtr = NULL;</a:t>
+            </a:r>
+          </a:p>
+          <a:p>
+            <a:pPr>
+              <a:spcAft>
+                <a:spcPts val="0"/>
+              </a:spcAft>
+            </a:pPr>
+            <a:r>
+              <a:rPr sz="1800">
+                <a:solidFill>
+                  <a:srgbClr val="212121"/>
+                </a:solidFill>
+                <a:latin typeface="Courier New"/>
+              </a:rPr>
+              <a:t>int number, i;</a:t>
+            </a:r>
+          </a:p>
+          <a:p>
+            <a:pPr>
+              <a:spcAft>
+                <a:spcPts val="0"/>
+              </a:spcAft>
+            </a:pPr>
+            <a:r>
+              <a:rPr sz="1800">
+                <a:solidFill>
+                  <a:srgbClr val="212121"/>
+                </a:solidFill>
+                <a:latin typeface="Courier New"/>
+              </a:rPr>
+              <a:t>int z[5] = {1, 2, 3, 4, 5};</a:t>
+            </a:r>
+          </a:p>
+          <a:p>
+            <a:pPr>
+              <a:spcAft>
+                <a:spcPts val="0"/>
+              </a:spcAft>
+            </a:pPr>
+            <a:r>
+              <a:rPr sz="1800">
+                <a:solidFill>
+                  <a:srgbClr val="212121"/>
+                </a:solidFill>
+                <a:latin typeface="Courier New"/>
+              </a:rPr>
+              <a:t>sPtr = z;   ++zPtr;   number = zPtr;</a:t>
+            </a:r>
+          </a:p>
+          <a:p>
+            <a:pPr>
+              <a:spcAft>
+                <a:spcPts val="0"/>
+              </a:spcAft>
+            </a:pPr>
+            <a:r>
+              <a:rPr sz="1800">
+                <a:solidFill>
+                  <a:srgbClr val="212121"/>
+                </a:solidFill>
+                <a:latin typeface="Courier New"/>
+              </a:rPr>
+              <a:t>number = *zPtr[2];   number = *sPtr;   ++z;</a:t>
+            </a:r>
+          </a:p>
+          <a:p>
+            <a:pPr>
+              <a:spcAft>
+                <a:spcPts val="800"/>
+              </a:spcAft>
+            </a:pPr>
+            <a:r>
+              <a:rPr sz="2200">
+                <a:solidFill>
+                  <a:srgbClr val="212121"/>
+                </a:solidFill>
+              </a:rPr>
+              <a:t>For each bug: WHAT is wrong, and what could happen at runtime?</a:t>
+            </a:r>
+          </a:p>
+          <a:p>
+            <a:pPr>
+              <a:spcAft>
+                <a:spcPts val="800"/>
+              </a:spcAft>
+            </a:pPr>
+            <a:r>
+              <a:rPr sz="2200">
+                <a:solidFill>
+                  <a:srgbClr val="212121"/>
+                </a:solidFill>
+              </a:rPr>
+              <a:t>There are at least six. Debrief: one bug per pair.</a:t>
             </a:r>
           </a:p>
         </p:txBody>
@@ -4518,7 +4695,7 @@
                   <a:srgbClr val="5A0A7A"/>
                 </a:solidFill>
               </a:rPr>
-              <a:t>Why testing cannot prove absence</a:t>
+              <a:t>Verification vs. validation</a:t>
             </a:r>
           </a:p>
         </p:txBody>
@@ -4531,8 +4708,8 @@
         </p:nvSpPr>
         <p:spPr>
           <a:xfrm>
-            <a:off x="731520" y="1554480"/>
-            <a:ext cx="10789920" cy="5029200"/>
+            <a:off x="731520" y="1828800"/>
+            <a:ext cx="10789920" cy="4754880"/>
           </a:xfrm>
           <a:prstGeom prst="rect">
             <a:avLst/>
@@ -4551,52 +4728,37 @@
               </a:spcAft>
             </a:pPr>
             <a:r>
-              <a:rPr sz="2400">
-                <a:solidFill>
-                  <a:srgbClr val="212121"/>
-                </a:solidFill>
-              </a:rPr>
-              <a:t>One int input = 2³² cases. At a billion tests per second: about 4 seconds. Fine.</a:t>
-            </a:r>
-          </a:p>
-          <a:p>
-            <a:pPr>
-              <a:spcAft>
-                <a:spcPts val="800"/>
-              </a:spcAft>
-            </a:pPr>
-            <a:r>
-              <a:rPr sz="2400">
-                <a:solidFill>
-                  <a:srgbClr val="212121"/>
-                </a:solidFill>
-              </a:rPr>
-              <a:t>Two int inputs = 2⁶⁴ cases. Same machine: about 585 years.</a:t>
-            </a:r>
-          </a:p>
-          <a:p>
-            <a:pPr>
-              <a:spcAft>
-                <a:spcPts val="800"/>
-              </a:spcAft>
-            </a:pPr>
-            <a:r>
-              <a:rPr sz="2400">
-                <a:solidFill>
-                  <a:srgbClr val="212121"/>
-                </a:solidFill>
-              </a:rPr>
-              <a:t>getPassword's input isn't even bounded — there is no test suite to write.</a:t>
-            </a:r>
-          </a:p>
-          <a:p>
-            <a:pPr>
-              <a:spcAft>
-                <a:spcPts val="800"/>
-              </a:spcAft>
-            </a:pPr>
-            <a:r>
-              <a:rPr sz="2400">
+              <a:rPr sz="2600">
+                <a:solidFill>
+                  <a:srgbClr val="212121"/>
+                </a:solidFill>
+              </a:rPr>
+              <a:t>Validation — are we building the right thing? (ask the users)</a:t>
+            </a:r>
+          </a:p>
+          <a:p>
+            <a:pPr>
+              <a:spcAft>
+                <a:spcPts val="800"/>
+              </a:spcAft>
+            </a:pPr>
+            <a:r>
+              <a:rPr sz="2600">
+                <a:solidFill>
+                  <a:srgbClr val="212121"/>
+                </a:solidFill>
+              </a:rPr>
+              <a:t>Verification — are we building the thing right? (ask the specification)</a:t>
+            </a:r>
+          </a:p>
+          <a:p>
+            <a:pPr>
+              <a:spcAft>
+                <a:spcPts val="800"/>
+              </a:spcAft>
+            </a:pPr>
+            <a:r>
+              <a:rPr sz="2600">
                 <a:solidFill>
                   <a:srgbClr val="212121"/>
                 </a:solidFill>
@@ -4611,42 +4773,12 @@
               </a:spcAft>
             </a:pPr>
             <a:r>
-              <a:rPr sz="2400">
-                <a:solidFill>
-                  <a:srgbClr val="212121"/>
-                </a:solidFill>
-              </a:rPr>
-              <a:t>“Program testing can be used to show the presence of bugs, but never to show their absence.” — E. W. Dijkstra, 1970</a:t>
-            </a:r>
-          </a:p>
-          <a:p>
-            <a:pPr>
-              <a:spcAft>
-                <a:spcPts val="800"/>
-              </a:spcAft>
-            </a:pPr>
-            <a:r>
-              <a:rPr sz="2400">
-                <a:solidFill>
-                  <a:srgbClr val="212121"/>
-                </a:solidFill>
-              </a:rPr>
-              <a:t/>
-            </a:r>
-          </a:p>
-          <a:p>
-            <a:pPr>
-              <a:spcAft>
-                <a:spcPts val="800"/>
-              </a:spcAft>
-            </a:pPr>
-            <a:r>
-              <a:rPr sz="2400">
-                <a:solidFill>
-                  <a:srgbClr val="212121"/>
-                </a:solidFill>
-              </a:rPr>
-              <a:t>A green test suite means: no bug in the cases we tried.</a:t>
+              <a:rPr sz="2600">
+                <a:solidFill>
+                  <a:srgbClr val="212121"/>
+                </a:solidFill>
+              </a:rPr>
+              <a:t>Tonight is verification: given a program and a property, does every execution satisfy the property?</a:t>
             </a:r>
           </a:p>
         </p:txBody>
@@ -4697,7 +4829,7 @@
                   <a:srgbClr val="5A0A7A"/>
                 </a:solidFill>
               </a:rPr>
-              <a:t>The idea of verification</a:t>
+              <a:t>Why testing cannot prove absence</a:t>
             </a:r>
           </a:p>
         </p:txBody>
@@ -4710,8 +4842,8 @@
         </p:nvSpPr>
         <p:spPr>
           <a:xfrm>
-            <a:off x="731520" y="1645920"/>
-            <a:ext cx="10789920" cy="4937760"/>
+            <a:off x="731520" y="1554480"/>
+            <a:ext cx="10789920" cy="5029200"/>
           </a:xfrm>
           <a:prstGeom prst="rect">
             <a:avLst/>
@@ -4730,22 +4862,52 @@
               </a:spcAft>
             </a:pPr>
             <a:r>
-              <a:rPr sz="2600">
-                <a:solidFill>
-                  <a:srgbClr val="212121"/>
-                </a:solidFill>
-              </a:rPr>
-              <a:t>Turn the program and the property into mathematics, and ask one question:</a:t>
-            </a:r>
-          </a:p>
-          <a:p>
-            <a:pPr>
-              <a:spcAft>
-                <a:spcPts val="800"/>
-              </a:spcAft>
-            </a:pPr>
-            <a:r>
-              <a:rPr sz="2600">
+              <a:rPr sz="2400">
+                <a:solidFill>
+                  <a:srgbClr val="212121"/>
+                </a:solidFill>
+              </a:rPr>
+              <a:t>One int input = 2³² cases. At a billion tests per second: about 4 seconds. Fine.</a:t>
+            </a:r>
+          </a:p>
+          <a:p>
+            <a:pPr>
+              <a:spcAft>
+                <a:spcPts val="800"/>
+              </a:spcAft>
+            </a:pPr>
+            <a:r>
+              <a:rPr sz="2400">
+                <a:solidFill>
+                  <a:srgbClr val="212121"/>
+                </a:solidFill>
+              </a:rPr>
+              <a:t>Two int inputs = 2⁶⁴ cases. Same machine: about 585 years.</a:t>
+            </a:r>
+          </a:p>
+          <a:p>
+            <a:pPr>
+              <a:spcAft>
+                <a:spcPts val="800"/>
+              </a:spcAft>
+            </a:pPr>
+            <a:r>
+              <a:rPr sz="2400">
+                <a:solidFill>
+                  <a:srgbClr val="212121"/>
+                </a:solidFill>
+              </a:rPr>
+              <a:t>getPassword's input isn't even bounded — there is no test suite to write.</a:t>
+            </a:r>
+          </a:p>
+          <a:p>
+            <a:pPr>
+              <a:spcAft>
+                <a:spcPts val="800"/>
+              </a:spcAft>
+            </a:pPr>
+            <a:r>
+              <a:rPr sz="2400">
                 <a:solidFill>
                   <a:srgbClr val="212121"/>
                 </a:solidFill>
@@ -4760,22 +4922,22 @@
               </a:spcAft>
             </a:pPr>
             <a:r>
-              <a:rPr sz="2600">
-                <a:solidFill>
-                  <a:srgbClr val="212121"/>
-                </a:solidFill>
-              </a:rPr>
-              <a:t>Can the program reach a state where the property fails?</a:t>
-            </a:r>
-          </a:p>
-          <a:p>
-            <a:pPr>
-              <a:spcAft>
-                <a:spcPts val="800"/>
-              </a:spcAft>
-            </a:pPr>
-            <a:r>
-              <a:rPr sz="2600">
+              <a:rPr sz="2400">
+                <a:solidFill>
+                  <a:srgbClr val="212121"/>
+                </a:solidFill>
+              </a:rPr>
+              <a:t>“Program testing can be used to show the presence of bugs, but never to show their absence.” — E. W. Dijkstra, 1970</a:t>
+            </a:r>
+          </a:p>
+          <a:p>
+            <a:pPr>
+              <a:spcAft>
+                <a:spcPts val="800"/>
+              </a:spcAft>
+            </a:pPr>
+            <a:r>
+              <a:rPr sz="2400">
                 <a:solidFill>
                   <a:srgbClr val="212121"/>
                 </a:solidFill>
@@ -4784,7 +4946,7 @@
             </a:r>
           </a:p>
           <a:p>
-            <a:pPr lvl="1">
+            <a:pPr>
               <a:spcAft>
                 <a:spcPts val="800"/>
               </a:spcAft>
@@ -4795,52 +4957,7 @@
                   <a:srgbClr val="212121"/>
                 </a:solidFill>
               </a:rPr>
-              <a:t>NO — for all inputs, all paths:  a proof.</a:t>
-            </a:r>
-          </a:p>
-          <a:p>
-            <a:pPr lvl="1">
-              <a:spcAft>
-                <a:spcPts val="800"/>
-              </a:spcAft>
-            </a:pPr>
-            <a:r>
-              <a:rPr sz="2400">
-                <a:solidFill>
-                  <a:srgbClr val="212121"/>
-                </a:solidFill>
-              </a:rPr>
-              <a:t>YES — and here is the exact input:  a counterexample.</a:t>
-            </a:r>
-          </a:p>
-          <a:p>
-            <a:pPr>
-              <a:spcAft>
-                <a:spcPts val="800"/>
-              </a:spcAft>
-            </a:pPr>
-            <a:r>
-              <a:rPr sz="2600">
-                <a:solidFill>
-                  <a:srgbClr val="212121"/>
-                </a:solidFill>
-              </a:rPr>
-              <a:t/>
-            </a:r>
-          </a:p>
-          <a:p>
-            <a:pPr>
-              <a:spcAft>
-                <a:spcPts val="800"/>
-              </a:spcAft>
-            </a:pPr>
-            <a:r>
-              <a:rPr sz="2600">
-                <a:solidFill>
-                  <a:srgbClr val="212121"/>
-                </a:solidFill>
-              </a:rPr>
-              <a:t>Both answers are useful. The second one is a free bug report.</a:t>
+              <a:t>A green test suite means: no bug in the cases we tried.</a:t>
             </a:r>
           </a:p>
         </p:txBody>
@@ -4891,7 +5008,7 @@
                   <a:srgbClr val="5A0A7A"/>
                 </a:solidFill>
               </a:rPr>
-              <a:t>Soundness and completeness</a:t>
+              <a:t>The idea of verification</a:t>
             </a:r>
           </a:p>
         </p:txBody>
@@ -4924,12 +5041,72 @@
               </a:spcAft>
             </a:pPr>
             <a:r>
+              <a:rPr sz="2600">
+                <a:solidFill>
+                  <a:srgbClr val="212121"/>
+                </a:solidFill>
+              </a:rPr>
+              <a:t>Turn the program and the property into mathematics, and ask one question:</a:t>
+            </a:r>
+          </a:p>
+          <a:p>
+            <a:pPr>
+              <a:spcAft>
+                <a:spcPts val="800"/>
+              </a:spcAft>
+            </a:pPr>
+            <a:r>
+              <a:rPr sz="2600">
+                <a:solidFill>
+                  <a:srgbClr val="212121"/>
+                </a:solidFill>
+              </a:rPr>
+              <a:t/>
+            </a:r>
+          </a:p>
+          <a:p>
+            <a:pPr>
+              <a:spcAft>
+                <a:spcPts val="800"/>
+              </a:spcAft>
+            </a:pPr>
+            <a:r>
+              <a:rPr sz="2600">
+                <a:solidFill>
+                  <a:srgbClr val="212121"/>
+                </a:solidFill>
+              </a:rPr>
+              <a:t>Can the program reach a state where the property fails?</a:t>
+            </a:r>
+          </a:p>
+          <a:p>
+            <a:pPr>
+              <a:spcAft>
+                <a:spcPts val="800"/>
+              </a:spcAft>
+            </a:pPr>
+            <a:r>
+              <a:rPr sz="2600">
+                <a:solidFill>
+                  <a:srgbClr val="212121"/>
+                </a:solidFill>
+              </a:rPr>
+              <a:t/>
+            </a:r>
+          </a:p>
+          <a:p>
+            <a:pPr lvl="1">
+              <a:spcAft>
+                <a:spcPts val="800"/>
+              </a:spcAft>
+            </a:pPr>
+            <a:r>
               <a:rPr sz="2400">
                 <a:solidFill>
                   <a:srgbClr val="212121"/>
                 </a:solidFill>
               </a:rPr>
-              <a:t>Sound — the tool never misses a bug.</a:t>
+              <a:t>NO — for all inputs, all paths:  a proof.</a:t>
             </a:r>
           </a:p>
           <a:p>
@@ -4939,52 +5116,22 @@
               </a:spcAft>
             </a:pPr>
             <a:r>
-              <a:rPr sz="2200">
-                <a:solidFill>
-                  <a:srgbClr val="212121"/>
-                </a:solidFill>
-              </a:rPr>
-              <a:t>If a sound tool says SAFE, it is safe.</a:t>
-            </a:r>
-          </a:p>
-          <a:p>
-            <a:pPr>
-              <a:spcAft>
-                <a:spcPts val="800"/>
-              </a:spcAft>
-            </a:pPr>
-            <a:r>
               <a:rPr sz="2400">
                 <a:solidFill>
                   <a:srgbClr val="212121"/>
                 </a:solidFill>
               </a:rPr>
-              <a:t>Complete — the tool never raises a false alarm.</a:t>
-            </a:r>
-          </a:p>
-          <a:p>
-            <a:pPr lvl="1">
-              <a:spcAft>
-                <a:spcPts val="800"/>
-              </a:spcAft>
-            </a:pPr>
-            <a:r>
-              <a:rPr sz="2200">
-                <a:solidFill>
-                  <a:srgbClr val="212121"/>
-                </a:solidFill>
-              </a:rPr>
-              <a:t>If a complete tool says BUG, it is a real bug.</a:t>
-            </a:r>
-          </a:p>
-          <a:p>
-            <a:pPr>
-              <a:spcAft>
-                <a:spcPts val="800"/>
-              </a:spcAft>
-            </a:pPr>
-            <a:r>
-              <a:rPr sz="2400">
+              <a:t>YES — and here is the exact input:  a counterexample.</a:t>
+            </a:r>
+          </a:p>
+          <a:p>
+            <a:pPr>
+              <a:spcAft>
+                <a:spcPts val="800"/>
+              </a:spcAft>
+            </a:pPr>
+            <a:r>
+              <a:rPr sz="2600">
                 <a:solidFill>
                   <a:srgbClr val="212121"/>
                 </a:solidFill>
@@ -4999,27 +5146,12 @@
               </a:spcAft>
             </a:pPr>
             <a:r>
-              <a:rPr sz="2400">
-                <a:solidFill>
-                  <a:srgbClr val="212121"/>
-                </a:solidFill>
-              </a:rPr>
-              <a:t>Testing is complete but not sound (every failure is real; absence proves nothing).</a:t>
-            </a:r>
-          </a:p>
-          <a:p>
-            <a:pPr>
-              <a:spcAft>
-                <a:spcPts val="800"/>
-              </a:spcAft>
-            </a:pPr>
-            <a:r>
-              <a:rPr sz="2400">
-                <a:solidFill>
-                  <a:srgbClr val="212121"/>
-                </a:solidFill>
-              </a:rPr>
-              <a:t>Most static analysers are sound but not complete (no missed bugs, but false alarms).</a:t>
+              <a:rPr sz="2600">
+                <a:solidFill>
+                  <a:srgbClr val="212121"/>
+                </a:solidFill>
+              </a:rPr>
+              <a:t>Both answers are useful. The second one is a free bug report.</a:t>
             </a:r>
           </a:p>
         </p:txBody>
@@ -5070,166 +5202,21 @@
                   <a:srgbClr val="5A0A7A"/>
                 </a:solidFill>
               </a:rPr>
-              <a:t>Where does your technique sit?</a:t>
-            </a:r>
-          </a:p>
-        </p:txBody>
-      </p:sp>
-      <p:graphicFrame>
-        <p:nvGraphicFramePr>
-          <p:cNvPr id="3" name="Table 2"/>
-          <p:cNvGraphicFramePr>
-            <a:graphicFrameLocks noGrp="1"/>
-          </p:cNvGraphicFramePr>
-          <p:nvPr/>
-        </p:nvGraphicFramePr>
-        <p:xfrm>
-          <a:off x="731520" y="1554480"/>
-          <a:ext cx="10698480" cy="1097280"/>
-        </p:xfrm>
-        <a:graphic>
-          <a:graphicData uri="http://schemas.openxmlformats.org/drawingml/2006/table">
-            <a:tbl>
-              <a:tblPr firstRow="1" bandRow="1">
-                <a:tableStyleId>{5C22544A-7EE6-4342-B048-85BDC9FD1C3A}</a:tableStyleId>
-              </a:tblPr>
-              <a:tblGrid>
-                <a:gridCol w="3108960"/>
-                <a:gridCol w="4023360"/>
-                <a:gridCol w="3566160"/>
-              </a:tblGrid>
-              <a:tr h="365760">
-                <a:tc>
-                  <a:txBody>
-                    <a:bodyPr/>
-                    <a:lstStyle/>
-                    <a:p/>
-                  </a:txBody>
-                  <a:tcPr/>
-                </a:tc>
-                <a:tc>
-                  <a:txBody>
-                    <a:bodyPr/>
-                    <a:lstStyle/>
-                    <a:p>
-                      <a:r>
-                        <a:rPr sz="2000" b="1"/>
-                        <a:t>Complete (no false alarms)</a:t>
-                      </a:r>
-                    </a:p>
-                  </a:txBody>
-                  <a:tcPr/>
-                </a:tc>
-                <a:tc>
-                  <a:txBody>
-                    <a:bodyPr/>
-                    <a:lstStyle/>
-                    <a:p>
-                      <a:r>
-                        <a:rPr sz="2000" b="1"/>
-                        <a:t>Incomplete</a:t>
-                      </a:r>
-                    </a:p>
-                  </a:txBody>
-                  <a:tcPr/>
-                </a:tc>
-              </a:tr>
-              <a:tr h="365760">
-                <a:tc>
-                  <a:txBody>
-                    <a:bodyPr/>
-                    <a:lstStyle/>
-                    <a:p>
-                      <a:r>
-                        <a:rPr sz="2000"/>
-                        <a:t>Sound (no missed bugs)</a:t>
-                      </a:r>
-                    </a:p>
-                  </a:txBody>
-                  <a:tcPr/>
-                </a:tc>
-                <a:tc>
-                  <a:txBody>
-                    <a:bodyPr/>
-                    <a:lstStyle/>
-                    <a:p>
-                      <a:r>
-                        <a:rPr sz="2000"/>
-                        <a:t>the dream</a:t>
-                      </a:r>
-                    </a:p>
-                  </a:txBody>
-                  <a:tcPr/>
-                </a:tc>
-                <a:tc>
-                  <a:txBody>
-                    <a:bodyPr/>
-                    <a:lstStyle/>
-                    <a:p>
-                      <a:r>
-                        <a:rPr sz="2000"/>
-                        <a:t>abstract interpretation</a:t>
-                      </a:r>
-                    </a:p>
-                  </a:txBody>
-                  <a:tcPr/>
-                </a:tc>
-              </a:tr>
-              <a:tr h="365760">
-                <a:tc>
-                  <a:txBody>
-                    <a:bodyPr/>
-                    <a:lstStyle/>
-                    <a:p>
-                      <a:r>
-                        <a:rPr sz="2000"/>
-                        <a:t>Unsound</a:t>
-                      </a:r>
-                    </a:p>
-                  </a:txBody>
-                  <a:tcPr/>
-                </a:tc>
-                <a:tc>
-                  <a:txBody>
-                    <a:bodyPr/>
-                    <a:lstStyle/>
-                    <a:p>
-                      <a:r>
-                        <a:rPr sz="2000"/>
-                        <a:t>bounded model checking*</a:t>
-                      </a:r>
-                    </a:p>
-                  </a:txBody>
-                  <a:tcPr/>
-                </a:tc>
-                <a:tc>
-                  <a:txBody>
-                    <a:bodyPr/>
-                    <a:lstStyle/>
-                    <a:p>
-                      <a:r>
-                        <a:rPr sz="2000"/>
-                        <a:t>testing, code review</a:t>
-                      </a:r>
-                    </a:p>
-                  </a:txBody>
-                  <a:tcPr/>
-                </a:tc>
-              </a:tr>
-            </a:tbl>
-          </a:graphicData>
-        </a:graphic>
-      </p:graphicFrame>
-      <p:sp>
-        <p:nvSpPr>
-          <p:cNvPr id="4" name="TextBox 3"/>
+              <a:t>Soundness and completeness</a:t>
+            </a:r>
+          </a:p>
+        </p:txBody>
+      </p:sp>
+      <p:sp>
+        <p:nvSpPr>
+          <p:cNvPr id="3" name="TextBox 2"/>
           <p:cNvSpPr txBox="1"/>
           <p:nvPr/>
         </p:nvSpPr>
         <p:spPr>
           <a:xfrm>
-            <a:off x="731520" y="3749039"/>
-            <a:ext cx="10789920" cy="2834640"/>
+            <a:off x="731520" y="1645920"/>
+            <a:ext cx="10789920" cy="4937760"/>
           </a:xfrm>
           <a:prstGeom prst="rect">
             <a:avLst/>
@@ -5248,16 +5235,46 @@
               </a:spcAft>
             </a:pPr>
             <a:r>
+              <a:rPr sz="2400">
+                <a:solidFill>
+                  <a:srgbClr val="212121"/>
+                </a:solidFill>
+              </a:rPr>
+              <a:t>Sound — the tool never misses a bug.</a:t>
+            </a:r>
+          </a:p>
+          <a:p>
+            <a:pPr lvl="1">
+              <a:spcAft>
+                <a:spcPts val="800"/>
+              </a:spcAft>
+            </a:pPr>
+            <a:r>
               <a:rPr sz="2200">
                 <a:solidFill>
                   <a:srgbClr val="212121"/>
                 </a:solidFill>
               </a:rPr>
-              <a:t>* sound up to its bound — tonight's central fine print</a:t>
-            </a:r>
-          </a:p>
-          <a:p>
-            <a:pPr>
+              <a:t>If a sound tool says SAFE, it is safe.</a:t>
+            </a:r>
+          </a:p>
+          <a:p>
+            <a:pPr>
+              <a:spcAft>
+                <a:spcPts val="800"/>
+              </a:spcAft>
+            </a:pPr>
+            <a:r>
+              <a:rPr sz="2400">
+                <a:solidFill>
+                  <a:srgbClr val="212121"/>
+                </a:solidFill>
+              </a:rPr>
+              <a:t>Complete — the tool never raises a false alarm.</a:t>
+            </a:r>
+          </a:p>
+          <a:p>
+            <a:pPr lvl="1">
               <a:spcAft>
                 <a:spcPts val="800"/>
               </a:spcAft>
@@ -5268,7 +5285,52 @@
                   <a:srgbClr val="212121"/>
                 </a:solidFill>
               </a:rPr>
-              <a:t>Think–pair–share (5 min): place testing, code review, compiler warnings, and “prove it with maths” on this grid. Defend your placement.</a:t>
+              <a:t>If a complete tool says BUG, it is a real bug.</a:t>
+            </a:r>
+          </a:p>
+          <a:p>
+            <a:pPr>
+              <a:spcAft>
+                <a:spcPts val="800"/>
+              </a:spcAft>
+            </a:pPr>
+            <a:r>
+              <a:rPr sz="2400">
+                <a:solidFill>
+                  <a:srgbClr val="212121"/>
+                </a:solidFill>
+              </a:rPr>
+              <a:t/>
+            </a:r>
+          </a:p>
+          <a:p>
+            <a:pPr>
+              <a:spcAft>
+                <a:spcPts val="800"/>
+              </a:spcAft>
+            </a:pPr>
+            <a:r>
+              <a:rPr sz="2400">
+                <a:solidFill>
+                  <a:srgbClr val="212121"/>
+                </a:solidFill>
+              </a:rPr>
+              <a:t>Testing is complete but not sound (every failure is real; absence proves nothing).</a:t>
+            </a:r>
+          </a:p>
+          <a:p>
+            <a:pPr>
+              <a:spcAft>
+                <a:spcPts val="800"/>
+              </a:spcAft>
+            </a:pPr>
+            <a:r>
+              <a:rPr sz="2400">
+                <a:solidFill>
+                  <a:srgbClr val="212121"/>
+                </a:solidFill>
+              </a:rPr>
+              <a:t>Most static analysers are sound but not complete (no missed bugs, but false alarms).</a:t>
             </a:r>
           </a:p>
         </p:txBody>
@@ -5676,6 +5738,255 @@
                   <a:srgbClr val="5A0A7A"/>
                 </a:solidFill>
               </a:rPr>
+              <a:t>Where does your technique sit?</a:t>
+            </a:r>
+          </a:p>
+        </p:txBody>
+      </p:sp>
+      <p:graphicFrame>
+        <p:nvGraphicFramePr>
+          <p:cNvPr id="3" name="Table 2"/>
+          <p:cNvGraphicFramePr>
+            <a:graphicFrameLocks noGrp="1"/>
+          </p:cNvGraphicFramePr>
+          <p:nvPr/>
+        </p:nvGraphicFramePr>
+        <p:xfrm>
+          <a:off x="731520" y="1554480"/>
+          <a:ext cx="10698480" cy="1097280"/>
+        </p:xfrm>
+        <a:graphic>
+          <a:graphicData uri="http://schemas.openxmlformats.org/drawingml/2006/table">
+            <a:tbl>
+              <a:tblPr firstRow="1" bandRow="1">
+                <a:tableStyleId>{5C22544A-7EE6-4342-B048-85BDC9FD1C3A}</a:tableStyleId>
+              </a:tblPr>
+              <a:tblGrid>
+                <a:gridCol w="3108960"/>
+                <a:gridCol w="4023360"/>
+                <a:gridCol w="3566160"/>
+              </a:tblGrid>
+              <a:tr h="365760">
+                <a:tc>
+                  <a:txBody>
+                    <a:bodyPr/>
+                    <a:lstStyle/>
+                    <a:p/>
+                  </a:txBody>
+                  <a:tcPr/>
+                </a:tc>
+                <a:tc>
+                  <a:txBody>
+                    <a:bodyPr/>
+                    <a:lstStyle/>
+                    <a:p>
+                      <a:r>
+                        <a:rPr sz="2000" b="1"/>
+                        <a:t>Complete (no false alarms)</a:t>
+                      </a:r>
+                    </a:p>
+                  </a:txBody>
+                  <a:tcPr/>
+                </a:tc>
+                <a:tc>
+                  <a:txBody>
+                    <a:bodyPr/>
+                    <a:lstStyle/>
+                    <a:p>
+                      <a:r>
+                        <a:rPr sz="2000" b="1"/>
+                        <a:t>Incomplete</a:t>
+                      </a:r>
+                    </a:p>
+                  </a:txBody>
+                  <a:tcPr/>
+                </a:tc>
+              </a:tr>
+              <a:tr h="365760">
+                <a:tc>
+                  <a:txBody>
+                    <a:bodyPr/>
+                    <a:lstStyle/>
+                    <a:p>
+                      <a:r>
+                        <a:rPr sz="2000"/>
+                        <a:t>Sound (no missed bugs)</a:t>
+                      </a:r>
+                    </a:p>
+                  </a:txBody>
+                  <a:tcPr/>
+                </a:tc>
+                <a:tc>
+                  <a:txBody>
+                    <a:bodyPr/>
+                    <a:lstStyle/>
+                    <a:p>
+                      <a:r>
+                        <a:rPr sz="2000"/>
+                        <a:t>the dream</a:t>
+                      </a:r>
+                    </a:p>
+                  </a:txBody>
+                  <a:tcPr/>
+                </a:tc>
+                <a:tc>
+                  <a:txBody>
+                    <a:bodyPr/>
+                    <a:lstStyle/>
+                    <a:p>
+                      <a:r>
+                        <a:rPr sz="2000"/>
+                        <a:t>abstract interpretation</a:t>
+                      </a:r>
+                    </a:p>
+                  </a:txBody>
+                  <a:tcPr/>
+                </a:tc>
+              </a:tr>
+              <a:tr h="365760">
+                <a:tc>
+                  <a:txBody>
+                    <a:bodyPr/>
+                    <a:lstStyle/>
+                    <a:p>
+                      <a:r>
+                        <a:rPr sz="2000"/>
+                        <a:t>Unsound</a:t>
+                      </a:r>
+                    </a:p>
+                  </a:txBody>
+                  <a:tcPr/>
+                </a:tc>
+                <a:tc>
+                  <a:txBody>
+                    <a:bodyPr/>
+                    <a:lstStyle/>
+                    <a:p>
+                      <a:r>
+                        <a:rPr sz="2000"/>
+                        <a:t>bounded model checking*</a:t>
+                      </a:r>
+                    </a:p>
+                  </a:txBody>
+                  <a:tcPr/>
+                </a:tc>
+                <a:tc>
+                  <a:txBody>
+                    <a:bodyPr/>
+                    <a:lstStyle/>
+                    <a:p>
+                      <a:r>
+                        <a:rPr sz="2000"/>
+                        <a:t>testing, code review</a:t>
+                      </a:r>
+                    </a:p>
+                  </a:txBody>
+                  <a:tcPr/>
+                </a:tc>
+              </a:tr>
+            </a:tbl>
+          </a:graphicData>
+        </a:graphic>
+      </p:graphicFrame>
+      <p:sp>
+        <p:nvSpPr>
+          <p:cNvPr id="4" name="TextBox 3"/>
+          <p:cNvSpPr txBox="1"/>
+          <p:nvPr/>
+        </p:nvSpPr>
+        <p:spPr>
+          <a:xfrm>
+            <a:off x="731520" y="3749039"/>
+            <a:ext cx="10789920" cy="2834640"/>
+          </a:xfrm>
+          <a:prstGeom prst="rect">
+            <a:avLst/>
+          </a:prstGeom>
+          <a:noFill/>
+        </p:spPr>
+        <p:txBody>
+          <a:bodyPr wrap="square">
+            <a:spAutoFit/>
+          </a:bodyPr>
+          <a:lstStyle/>
+          <a:p>
+            <a:pPr>
+              <a:spcAft>
+                <a:spcPts val="800"/>
+              </a:spcAft>
+            </a:pPr>
+            <a:r>
+              <a:rPr sz="2200">
+                <a:solidFill>
+                  <a:srgbClr val="212121"/>
+                </a:solidFill>
+              </a:rPr>
+              <a:t>* sound up to its bound — tonight's central fine print</a:t>
+            </a:r>
+          </a:p>
+          <a:p>
+            <a:pPr>
+              <a:spcAft>
+                <a:spcPts val="800"/>
+              </a:spcAft>
+            </a:pPr>
+            <a:r>
+              <a:rPr sz="2200">
+                <a:solidFill>
+                  <a:srgbClr val="212121"/>
+                </a:solidFill>
+              </a:rPr>
+              <a:t>Think–pair–share (5 min): place testing, code review, compiler warnings, and “prove it with maths” on this grid. Defend your placement.</a:t>
+            </a:r>
+          </a:p>
+        </p:txBody>
+      </p:sp>
+    </p:spTree>
+  </p:cSld>
+  <p:clrMapOvr>
+    <a:masterClrMapping/>
+  </p:clrMapOvr>
+</p:sld>
+</file>
+
+<file path=ppt/slides/slide21.xml><?xml version="1.0" encoding="utf-8"?>
+<p:sld xmlns:a="http://schemas.openxmlformats.org/drawingml/2006/main" xmlns:p="http://schemas.openxmlformats.org/presentationml/2006/main" xmlns:r="http://schemas.openxmlformats.org/officeDocument/2006/relationships">
+  <p:cSld>
+    <p:spTree>
+      <p:nvGrpSpPr>
+        <p:cNvPr id="1" name=""/>
+        <p:cNvGrpSpPr/>
+        <p:nvPr/>
+      </p:nvGrpSpPr>
+      <p:grpSpPr/>
+      <p:sp>
+        <p:nvSpPr>
+          <p:cNvPr id="2" name="TextBox 1"/>
+          <p:cNvSpPr txBox="1"/>
+          <p:nvPr/>
+        </p:nvSpPr>
+        <p:spPr>
+          <a:xfrm>
+            <a:off x="548640" y="365760"/>
+            <a:ext cx="11064240" cy="1005840"/>
+          </a:xfrm>
+          <a:prstGeom prst="rect">
+            <a:avLst/>
+          </a:prstGeom>
+          <a:noFill/>
+        </p:spPr>
+        <p:txBody>
+          <a:bodyPr wrap="square">
+            <a:spAutoFit/>
+          </a:bodyPr>
+          <a:lstStyle/>
+          <a:p>
+            <a:r>
+              <a:rPr sz="3600" b="1">
+                <a:solidFill>
+                  <a:srgbClr val="5A0A7A"/>
+                </a:solidFill>
+              </a:rPr>
               <a:t>The technique landscape</a:t>
             </a:r>
           </a:p>
@@ -6000,7 +6311,7 @@
 </p:sld>
 </file>
 
-<file path=ppt/slides/slide21.xml><?xml version="1.0" encoding="utf-8"?>
+<file path=ppt/slides/slide22.xml><?xml version="1.0" encoding="utf-8"?>
 <p:sld xmlns:a="http://schemas.openxmlformats.org/drawingml/2006/main" xmlns:p="http://schemas.openxmlformats.org/presentationml/2006/main" xmlns:r="http://schemas.openxmlformats.org/officeDocument/2006/relationships">
   <p:cSld>
     <p:spTree>
@@ -6167,57 +6478,6 @@
                 </a:solidFill>
               </a:rPr>
               <a:t>So we need an oracle for “is this formula satisfiable?” — it exists, it is free, and it is absurdly good. After the break.</a:t>
-            </a:r>
-          </a:p>
-        </p:txBody>
-      </p:sp>
-    </p:spTree>
-  </p:cSld>
-  <p:clrMapOvr>
-    <a:masterClrMapping/>
-  </p:clrMapOvr>
-</p:sld>
-</file>
-
-<file path=ppt/slides/slide22.xml><?xml version="1.0" encoding="utf-8"?>
-<p:sld xmlns:a="http://schemas.openxmlformats.org/drawingml/2006/main" xmlns:p="http://schemas.openxmlformats.org/presentationml/2006/main" xmlns:r="http://schemas.openxmlformats.org/officeDocument/2006/relationships">
-  <p:cSld>
-    <p:spTree>
-      <p:nvGrpSpPr>
-        <p:cNvPr id="1" name=""/>
-        <p:cNvGrpSpPr/>
-        <p:nvPr/>
-      </p:nvGrpSpPr>
-      <p:grpSpPr/>
-      <p:sp>
-        <p:nvSpPr>
-          <p:cNvPr id="2" name="TextBox 1"/>
-          <p:cNvSpPr txBox="1"/>
-          <p:nvPr/>
-        </p:nvSpPr>
-        <p:spPr>
-          <a:xfrm>
-            <a:off x="548640" y="2377440"/>
-            <a:ext cx="11064240" cy="1005840"/>
-          </a:xfrm>
-          <a:prstGeom prst="rect">
-            <a:avLst/>
-          </a:prstGeom>
-          <a:noFill/>
-        </p:spPr>
-        <p:txBody>
-          <a:bodyPr wrap="square">
-            <a:spAutoFit/>
-          </a:bodyPr>
-          <a:lstStyle/>
-          <a:p>
-            <a:r>
-              <a:rPr sz="4400" b="1">
-                <a:solidFill>
-                  <a:srgbClr val="5A0A7A"/>
-                </a:solidFill>
-              </a:rPr>
-              <a:t>Break — back at 19:25</a:t>
             </a:r>
           </a:p>
         </p:txBody>
@@ -6248,7 +6508,7 @@
         </p:nvSpPr>
         <p:spPr>
           <a:xfrm>
-            <a:off x="548640" y="365760"/>
+            <a:off x="548640" y="2377440"/>
             <a:ext cx="11064240" cy="1005840"/>
           </a:xfrm>
           <a:prstGeom prst="rect">
@@ -6263,126 +6523,12 @@
           <a:lstStyle/>
           <a:p>
             <a:r>
-              <a:rPr sz="3600" b="1">
+              <a:rPr sz="4400" b="1">
                 <a:solidFill>
                   <a:srgbClr val="5A0A7A"/>
                 </a:solidFill>
               </a:rPr>
-              <a:t>SAT: the original hard problem</a:t>
-            </a:r>
-          </a:p>
-        </p:txBody>
-      </p:sp>
-      <p:sp>
-        <p:nvSpPr>
-          <p:cNvPr id="3" name="TextBox 2"/>
-          <p:cNvSpPr txBox="1"/>
-          <p:nvPr/>
-        </p:nvSpPr>
-        <p:spPr>
-          <a:xfrm>
-            <a:off x="731520" y="1554480"/>
-            <a:ext cx="10789920" cy="5029200"/>
-          </a:xfrm>
-          <a:prstGeom prst="rect">
-            <a:avLst/>
-          </a:prstGeom>
-          <a:noFill/>
-        </p:spPr>
-        <p:txBody>
-          <a:bodyPr wrap="square">
-            <a:spAutoFit/>
-          </a:bodyPr>
-          <a:lstStyle/>
-          <a:p>
-            <a:pPr>
-              <a:spcAft>
-                <a:spcPts val="0"/>
-              </a:spcAft>
-            </a:pPr>
-            <a:r>
-              <a:rPr sz="2000">
-                <a:solidFill>
-                  <a:srgbClr val="212121"/>
-                </a:solidFill>
-                <a:latin typeface="Courier New"/>
-              </a:rPr>
-              <a:t>(a ∨ ¬b) ∧ (b ∨ c) ∧ (¬a ∨ ¬c)</a:t>
-            </a:r>
-          </a:p>
-          <a:p>
-            <a:pPr>
-              <a:spcAft>
-                <a:spcPts val="800"/>
-              </a:spcAft>
-            </a:pPr>
-            <a:r>
-              <a:rPr sz="2400">
-                <a:solidFill>
-                  <a:srgbClr val="212121"/>
-                </a:solidFill>
-              </a:rPr>
-              <a:t/>
-            </a:r>
-          </a:p>
-          <a:p>
-            <a:pPr>
-              <a:spcAft>
-                <a:spcPts val="800"/>
-              </a:spcAft>
-            </a:pPr>
-            <a:r>
-              <a:rPr sz="2400">
-                <a:solidFill>
-                  <a:srgbClr val="212121"/>
-                </a:solidFill>
-              </a:rPr>
-              <a:t>Is there a true/false assignment that makes the whole formula true?</a:t>
-            </a:r>
-          </a:p>
-          <a:p>
-            <a:pPr>
-              <a:spcAft>
-                <a:spcPts val="800"/>
-              </a:spcAft>
-            </a:pPr>
-            <a:r>
-              <a:rPr sz="2400">
-                <a:solidFill>
-                  <a:srgbClr val="212121"/>
-                </a:solidFill>
-              </a:rPr>
-              <a:t/>
-            </a:r>
-          </a:p>
-          <a:p>
-            <a:pPr>
-              <a:spcAft>
-                <a:spcPts val="800"/>
-              </a:spcAft>
-            </a:pPr>
-            <a:r>
-              <a:rPr sz="2400">
-                <a:solidFill>
-                  <a:srgbClr val="212121"/>
-                </a:solidFill>
-              </a:rPr>
-              <a:t>The first problem ever proved NP-complete (Cook, 1971) — in theory, hopeless.</a:t>
-            </a:r>
-          </a:p>
-          <a:p>
-            <a:pPr>
-              <a:spcAft>
-                <a:spcPts val="800"/>
-              </a:spcAft>
-            </a:pPr>
-            <a:r>
-              <a:rPr sz="2400">
-                <a:solidFill>
-                  <a:srgbClr val="212121"/>
-                </a:solidFill>
-              </a:rPr>
-              <a:t>In practice: modern solvers eat formulas with millions of clauses for breakfast. Industrial SAT solving is the closest thing CS has to a superpower.</a:t>
+              <a:t>Break — back at 19:25</a:t>
             </a:r>
           </a:p>
         </p:txBody>
@@ -6433,6 +6579,171 @@
                   <a:srgbClr val="5A0A7A"/>
                 </a:solidFill>
               </a:rPr>
+              <a:t>SAT: the original hard problem</a:t>
+            </a:r>
+          </a:p>
+        </p:txBody>
+      </p:sp>
+      <p:sp>
+        <p:nvSpPr>
+          <p:cNvPr id="3" name="TextBox 2"/>
+          <p:cNvSpPr txBox="1"/>
+          <p:nvPr/>
+        </p:nvSpPr>
+        <p:spPr>
+          <a:xfrm>
+            <a:off x="731520" y="1554480"/>
+            <a:ext cx="10789920" cy="5029200"/>
+          </a:xfrm>
+          <a:prstGeom prst="rect">
+            <a:avLst/>
+          </a:prstGeom>
+          <a:noFill/>
+        </p:spPr>
+        <p:txBody>
+          <a:bodyPr wrap="square">
+            <a:spAutoFit/>
+          </a:bodyPr>
+          <a:lstStyle/>
+          <a:p>
+            <a:pPr>
+              <a:spcAft>
+                <a:spcPts val="0"/>
+              </a:spcAft>
+            </a:pPr>
+            <a:r>
+              <a:rPr sz="2000">
+                <a:solidFill>
+                  <a:srgbClr val="212121"/>
+                </a:solidFill>
+                <a:latin typeface="Courier New"/>
+              </a:rPr>
+              <a:t>(a ∨ ¬b) ∧ (b ∨ c) ∧ (¬a ∨ ¬c)</a:t>
+            </a:r>
+          </a:p>
+          <a:p>
+            <a:pPr>
+              <a:spcAft>
+                <a:spcPts val="800"/>
+              </a:spcAft>
+            </a:pPr>
+            <a:r>
+              <a:rPr sz="2400">
+                <a:solidFill>
+                  <a:srgbClr val="212121"/>
+                </a:solidFill>
+              </a:rPr>
+              <a:t/>
+            </a:r>
+          </a:p>
+          <a:p>
+            <a:pPr>
+              <a:spcAft>
+                <a:spcPts val="800"/>
+              </a:spcAft>
+            </a:pPr>
+            <a:r>
+              <a:rPr sz="2400">
+                <a:solidFill>
+                  <a:srgbClr val="212121"/>
+                </a:solidFill>
+              </a:rPr>
+              <a:t>Is there a true/false assignment that makes the whole formula true?</a:t>
+            </a:r>
+          </a:p>
+          <a:p>
+            <a:pPr>
+              <a:spcAft>
+                <a:spcPts val="800"/>
+              </a:spcAft>
+            </a:pPr>
+            <a:r>
+              <a:rPr sz="2400">
+                <a:solidFill>
+                  <a:srgbClr val="212121"/>
+                </a:solidFill>
+              </a:rPr>
+              <a:t/>
+            </a:r>
+          </a:p>
+          <a:p>
+            <a:pPr>
+              <a:spcAft>
+                <a:spcPts val="800"/>
+              </a:spcAft>
+            </a:pPr>
+            <a:r>
+              <a:rPr sz="2400">
+                <a:solidFill>
+                  <a:srgbClr val="212121"/>
+                </a:solidFill>
+              </a:rPr>
+              <a:t>The first problem ever proved NP-complete (Cook, 1971) — in theory, hopeless.</a:t>
+            </a:r>
+          </a:p>
+          <a:p>
+            <a:pPr>
+              <a:spcAft>
+                <a:spcPts val="800"/>
+              </a:spcAft>
+            </a:pPr>
+            <a:r>
+              <a:rPr sz="2400">
+                <a:solidFill>
+                  <a:srgbClr val="212121"/>
+                </a:solidFill>
+              </a:rPr>
+              <a:t>In practice: modern solvers eat formulas with millions of clauses for breakfast. Industrial SAT solving is the closest thing CS has to a superpower.</a:t>
+            </a:r>
+          </a:p>
+        </p:txBody>
+      </p:sp>
+    </p:spTree>
+  </p:cSld>
+  <p:clrMapOvr>
+    <a:masterClrMapping/>
+  </p:clrMapOvr>
+</p:sld>
+</file>
+
+<file path=ppt/slides/slide25.xml><?xml version="1.0" encoding="utf-8"?>
+<p:sld xmlns:a="http://schemas.openxmlformats.org/drawingml/2006/main" xmlns:p="http://schemas.openxmlformats.org/presentationml/2006/main" xmlns:r="http://schemas.openxmlformats.org/officeDocument/2006/relationships">
+  <p:cSld>
+    <p:spTree>
+      <p:nvGrpSpPr>
+        <p:cNvPr id="1" name=""/>
+        <p:cNvGrpSpPr/>
+        <p:nvPr/>
+      </p:nvGrpSpPr>
+      <p:grpSpPr/>
+      <p:sp>
+        <p:nvSpPr>
+          <p:cNvPr id="2" name="TextBox 1"/>
+          <p:cNvSpPr txBox="1"/>
+          <p:nvPr/>
+        </p:nvSpPr>
+        <p:spPr>
+          <a:xfrm>
+            <a:off x="548640" y="365760"/>
+            <a:ext cx="11064240" cy="1005840"/>
+          </a:xfrm>
+          <a:prstGeom prst="rect">
+            <a:avLst/>
+          </a:prstGeom>
+          <a:noFill/>
+        </p:spPr>
+        <p:txBody>
+          <a:bodyPr wrap="square">
+            <a:spAutoFit/>
+          </a:bodyPr>
+          <a:lstStyle/>
+          <a:p>
+            <a:r>
+              <a:rPr sz="3600" b="1">
+                <a:solidFill>
+                  <a:srgbClr val="5A0A7A"/>
+                </a:solidFill>
+              </a:rPr>
               <a:t>The two answers a solver can give</a:t>
             </a:r>
           </a:p>
@@ -6589,7 +6900,7 @@
 </p:sld>
 </file>
 
-<file path=ppt/slides/slide25.xml><?xml version="1.0" encoding="utf-8"?>
+<file path=ppt/slides/slide26.xml><?xml version="1.0" encoding="utf-8"?>
 <p:sld xmlns:a="http://schemas.openxmlformats.org/drawingml/2006/main" xmlns:p="http://schemas.openxmlformats.org/presentationml/2006/main" xmlns:r="http://schemas.openxmlformats.org/officeDocument/2006/relationships">
   <p:cSld>
     <p:spTree>
@@ -6844,7 +7155,7 @@
 </p:sld>
 </file>
 
-<file path=ppt/slides/slide26.xml><?xml version="1.0" encoding="utf-8"?>
+<file path=ppt/slides/slide27.xml><?xml version="1.0" encoding="utf-8"?>
 <p:sld xmlns:a="http://schemas.openxmlformats.org/drawingml/2006/main" xmlns:p="http://schemas.openxmlformats.org/presentationml/2006/main" xmlns:r="http://schemas.openxmlformats.org/officeDocument/2006/relationships">
   <p:cSld>
     <p:spTree>
@@ -7013,222 +7324,6 @@
                 </a:solidFill>
               </a:rPr>
               <a:t>unsat  →  the access is safe on every path</a:t>
-            </a:r>
-          </a:p>
-        </p:txBody>
-      </p:sp>
-    </p:spTree>
-  </p:cSld>
-  <p:clrMapOvr>
-    <a:masterClrMapping/>
-  </p:clrMapOvr>
-</p:sld>
-</file>
-
-<file path=ppt/slides/slide27.xml><?xml version="1.0" encoding="utf-8"?>
-<p:sld xmlns:a="http://schemas.openxmlformats.org/drawingml/2006/main" xmlns:p="http://schemas.openxmlformats.org/presentationml/2006/main" xmlns:r="http://schemas.openxmlformats.org/officeDocument/2006/relationships">
-  <p:cSld>
-    <p:spTree>
-      <p:nvGrpSpPr>
-        <p:cNvPr id="1" name=""/>
-        <p:cNvGrpSpPr/>
-        <p:nvPr/>
-      </p:nvGrpSpPr>
-      <p:grpSpPr/>
-      <p:sp>
-        <p:nvSpPr>
-          <p:cNvPr id="2" name="TextBox 1"/>
-          <p:cNvSpPr txBox="1"/>
-          <p:nvPr/>
-        </p:nvSpPr>
-        <p:spPr>
-          <a:xfrm>
-            <a:off x="548640" y="365760"/>
-            <a:ext cx="11064240" cy="1005840"/>
-          </a:xfrm>
-          <a:prstGeom prst="rect">
-            <a:avLst/>
-          </a:prstGeom>
-          <a:noFill/>
-        </p:spPr>
-        <p:txBody>
-          <a:bodyPr wrap="square">
-            <a:spAutoFit/>
-          </a:bodyPr>
-          <a:lstStyle/>
-          <a:p>
-            <a:r>
-              <a:rPr sz="3600" b="1">
-                <a:solidFill>
-                  <a:srgbClr val="5A0A7A"/>
-                </a:solidFill>
-              </a:rPr>
-              <a:t>Live: a solver in two queries</a:t>
-            </a:r>
-          </a:p>
-        </p:txBody>
-      </p:sp>
-      <p:sp>
-        <p:nvSpPr>
-          <p:cNvPr id="3" name="TextBox 2"/>
-          <p:cNvSpPr txBox="1"/>
-          <p:nvPr/>
-        </p:nvSpPr>
-        <p:spPr>
-          <a:xfrm>
-            <a:off x="731520" y="1463040"/>
-            <a:ext cx="10789920" cy="5120640"/>
-          </a:xfrm>
-          <a:prstGeom prst="rect">
-            <a:avLst/>
-          </a:prstGeom>
-          <a:noFill/>
-        </p:spPr>
-        <p:txBody>
-          <a:bodyPr wrap="square">
-            <a:spAutoFit/>
-          </a:bodyPr>
-          <a:lstStyle/>
-          <a:p>
-            <a:pPr>
-              <a:spcAft>
-                <a:spcPts val="0"/>
-              </a:spcAft>
-            </a:pPr>
-            <a:r>
-              <a:rPr sz="1800">
-                <a:solidFill>
-                  <a:srgbClr val="212121"/>
-                </a:solidFill>
-                <a:latin typeface="Courier New"/>
-              </a:rPr>
-              <a:t>$ python3 z3_demo.py</a:t>
-            </a:r>
-          </a:p>
-          <a:p>
-            <a:pPr>
-              <a:spcAft>
-                <a:spcPts val="0"/>
-              </a:spcAft>
-            </a:pPr>
-            <a:r>
-              <a:rPr sz="1800">
-                <a:solidFill>
-                  <a:srgbClr val="212121"/>
-                </a:solidFill>
-                <a:latin typeface="Courier New"/>
-              </a:rPr>
-              <a:t/>
-            </a:r>
-          </a:p>
-          <a:p>
-            <a:pPr>
-              <a:spcAft>
-                <a:spcPts val="0"/>
-              </a:spcAft>
-            </a:pPr>
-            <a:r>
-              <a:rPr sz="1800">
-                <a:solidFill>
-                  <a:srgbClr val="212121"/>
-                </a:solidFill>
-                <a:latin typeface="Courier New"/>
-              </a:rPr>
-              <a:t>Query 1: x + y == 42 and x &gt; 100</a:t>
-            </a:r>
-          </a:p>
-          <a:p>
-            <a:pPr>
-              <a:spcAft>
-                <a:spcPts val="0"/>
-              </a:spcAft>
-            </a:pPr>
-            <a:r>
-              <a:rPr sz="1800">
-                <a:solidFill>
-                  <a:srgbClr val="212121"/>
-                </a:solidFill>
-                <a:latin typeface="Courier New"/>
-              </a:rPr>
-              <a:t>[y = -59, x = 101]            ← a model, in milliseconds</a:t>
-            </a:r>
-          </a:p>
-          <a:p>
-            <a:pPr>
-              <a:spcAft>
-                <a:spcPts val="0"/>
-              </a:spcAft>
-            </a:pPr>
-            <a:r>
-              <a:rPr sz="1800">
-                <a:solidFill>
-                  <a:srgbClr val="212121"/>
-                </a:solidFill>
-                <a:latin typeface="Courier New"/>
-              </a:rPr>
-              <a:t/>
-            </a:r>
-          </a:p>
-          <a:p>
-            <a:pPr>
-              <a:spcAft>
-                <a:spcPts val="0"/>
-              </a:spcAft>
-            </a:pPr>
-            <a:r>
-              <a:rPr sz="1800">
-                <a:solidFill>
-                  <a:srgbClr val="212121"/>
-                </a:solidFill>
-                <a:latin typeface="Courier New"/>
-              </a:rPr>
-              <a:t>Query 2: x*x == 2*y*y, x &gt; 0, y &gt; 0 (no overflow)</a:t>
-            </a:r>
-          </a:p>
-          <a:p>
-            <a:pPr>
-              <a:spcAft>
-                <a:spcPts val="0"/>
-              </a:spcAft>
-            </a:pPr>
-            <a:r>
-              <a:rPr sz="1800">
-                <a:solidFill>
-                  <a:srgbClr val="212121"/>
-                </a:solidFill>
-                <a:latin typeface="Courier New"/>
-              </a:rPr>
-              <a:t>unsat                          ← a proof</a:t>
-            </a:r>
-          </a:p>
-          <a:p>
-            <a:pPr>
-              <a:spcAft>
-                <a:spcPts val="800"/>
-              </a:spcAft>
-            </a:pPr>
-            <a:r>
-              <a:rPr sz="2200">
-                <a:solidFill>
-                  <a:srgbClr val="212121"/>
-                </a:solidFill>
-              </a:rPr>
-              <a:t/>
-            </a:r>
-          </a:p>
-          <a:p>
-            <a:pPr>
-              <a:spcAft>
-                <a:spcPts val="800"/>
-              </a:spcAft>
-            </a:pPr>
-            <a:r>
-              <a:rPr sz="2200">
-                <a:solidFill>
-                  <a:srgbClr val="212121"/>
-                </a:solidFill>
-              </a:rPr>
-              <a:t>Query 2 just proved that √2 is irrational — 32-bit bit-vector edition. unsat is a theorem, not a shrug.</a:t>
             </a:r>
           </a:p>
         </p:txBody>
@@ -7279,7 +7374,7 @@
                   <a:srgbClr val="5A0A7A"/>
                 </a:solidFill>
               </a:rPr>
-              <a:t>Machine arithmetic is not mathematics</a:t>
+              <a:t>Live: a solver in two queries</a:t>
             </a:r>
           </a:p>
         </p:txBody>
@@ -7318,7 +7413,7 @@
                 </a:solidFill>
                 <a:latin typeface="Courier New"/>
               </a:rPr>
-              <a:t>INT_MAX     =  2147483647</a:t>
+              <a:t>$ python3 z3_demo.py</a:t>
             </a:r>
           </a:p>
           <a:p>
@@ -7334,7 +7429,7 @@
                 </a:solidFill>
                 <a:latin typeface="Courier New"/>
               </a:rPr>
-              <a:t>INT_MAX + 1 =  ?            /* C: undefined behaviour */</a:t>
+              <a:t/>
             </a:r>
           </a:p>
           <a:p>
@@ -7350,7 +7445,71 @@
                 </a:solidFill>
                 <a:latin typeface="Courier New"/>
               </a:rPr>
-              <a:t>                            /* bit-vectors: wraps negative */</a:t>
+              <a:t>Query 1: x + y == 42 and x &gt; 100</a:t>
+            </a:r>
+          </a:p>
+          <a:p>
+            <a:pPr>
+              <a:spcAft>
+                <a:spcPts val="0"/>
+              </a:spcAft>
+            </a:pPr>
+            <a:r>
+              <a:rPr sz="1800">
+                <a:solidFill>
+                  <a:srgbClr val="212121"/>
+                </a:solidFill>
+                <a:latin typeface="Courier New"/>
+              </a:rPr>
+              <a:t>[y = -59, x = 101]            ← a model, in milliseconds</a:t>
+            </a:r>
+          </a:p>
+          <a:p>
+            <a:pPr>
+              <a:spcAft>
+                <a:spcPts val="0"/>
+              </a:spcAft>
+            </a:pPr>
+            <a:r>
+              <a:rPr sz="1800">
+                <a:solidFill>
+                  <a:srgbClr val="212121"/>
+                </a:solidFill>
+                <a:latin typeface="Courier New"/>
+              </a:rPr>
+              <a:t/>
+            </a:r>
+          </a:p>
+          <a:p>
+            <a:pPr>
+              <a:spcAft>
+                <a:spcPts val="0"/>
+              </a:spcAft>
+            </a:pPr>
+            <a:r>
+              <a:rPr sz="1800">
+                <a:solidFill>
+                  <a:srgbClr val="212121"/>
+                </a:solidFill>
+                <a:latin typeface="Courier New"/>
+              </a:rPr>
+              <a:t>Query 2: x*x == 2*y*y, x &gt; 0, y &gt; 0 (no overflow)</a:t>
+            </a:r>
+          </a:p>
+          <a:p>
+            <a:pPr>
+              <a:spcAft>
+                <a:spcPts val="0"/>
+              </a:spcAft>
+            </a:pPr>
+            <a:r>
+              <a:rPr sz="1800">
+                <a:solidFill>
+                  <a:srgbClr val="212121"/>
+                </a:solidFill>
+                <a:latin typeface="Courier New"/>
+              </a:rPr>
+              <a:t>unsat                          ← a proof</a:t>
             </a:r>
           </a:p>
           <a:p>
@@ -7371,54 +7530,6 @@
           <a:p>
             <a:pPr>
               <a:spcAft>
-                <a:spcPts val="0"/>
-              </a:spcAft>
-            </a:pPr>
-            <a:r>
-              <a:rPr sz="1800">
-                <a:solidFill>
-                  <a:srgbClr val="212121"/>
-                </a:solidFill>
-                <a:latin typeface="Courier New"/>
-              </a:rPr>
-              <a:t>int y = x + 1;</a:t>
-            </a:r>
-          </a:p>
-          <a:p>
-            <a:pPr>
-              <a:spcAft>
-                <a:spcPts val="0"/>
-              </a:spcAft>
-            </a:pPr>
-            <a:r>
-              <a:rPr sz="1800">
-                <a:solidFill>
-                  <a:srgbClr val="212121"/>
-                </a:solidFill>
-                <a:latin typeface="Courier New"/>
-              </a:rPr>
-              <a:t>int z = y * 2;</a:t>
-            </a:r>
-          </a:p>
-          <a:p>
-            <a:pPr>
-              <a:spcAft>
-                <a:spcPts val="0"/>
-              </a:spcAft>
-            </a:pPr>
-            <a:r>
-              <a:rPr sz="1800">
-                <a:solidFill>
-                  <a:srgbClr val="212121"/>
-                </a:solidFill>
-                <a:latin typeface="Courier New"/>
-              </a:rPr>
-              <a:t>assert(z &gt;= 2);   /* surely true for x &gt;= 0 … ? */</a:t>
-            </a:r>
-          </a:p>
-          <a:p>
-            <a:pPr>
-              <a:spcAft>
                 <a:spcPts val="800"/>
               </a:spcAft>
             </a:pPr>
@@ -7428,22 +7539,7 @@
                   <a:srgbClr val="212121"/>
                 </a:solidFill>
               </a:rPr>
-              <a:t/>
-            </a:r>
-          </a:p>
-          <a:p>
-            <a:pPr>
-              <a:spcAft>
-                <a:spcPts val="800"/>
-              </a:spcAft>
-            </a:pPr>
-            <a:r>
-              <a:rPr sz="2200">
-                <a:solidFill>
-                  <a:srgbClr val="212121"/>
-                </a:solidFill>
-              </a:rPr>
-              <a:t>A solver finds the x that breaks this in milliseconds. In Lab 1 you will encode these three lines yourself and watch it happen.</a:t>
+              <a:t>Query 2 just proved that √2 is irrational — 32-bit bit-vector edition. unsat is a theorem, not a shrug.</a:t>
             </a:r>
           </a:p>
         </p:txBody>
@@ -7494,7 +7590,7 @@
                   <a:srgbClr val="5A0A7A"/>
                 </a:solidFill>
               </a:rPr>
-              <a:t>Solvers as search engines: SEND + MORE = MONEY</a:t>
+              <a:t>Machine arithmetic is not mathematics</a:t>
             </a:r>
           </a:p>
         </p:txBody>
@@ -7533,7 +7629,7 @@
                 </a:solidFill>
                 <a:latin typeface="Courier New"/>
               </a:rPr>
-              <a:t>  S E N D</a:t>
+              <a:t>INT_MAX     =  2147483647</a:t>
             </a:r>
           </a:p>
           <a:p>
@@ -7549,7 +7645,7 @@
                 </a:solidFill>
                 <a:latin typeface="Courier New"/>
               </a:rPr>
-              <a:t>+ M O R E</a:t>
+              <a:t>INT_MAX + 1 =  ?            /* C: undefined behaviour */</a:t>
             </a:r>
           </a:p>
           <a:p>
@@ -7565,7 +7661,22 @@
                 </a:solidFill>
                 <a:latin typeface="Courier New"/>
               </a:rPr>
-              <a:t>---------</a:t>
+              <a:t>                            /* bit-vectors: wraps negative */</a:t>
+            </a:r>
+          </a:p>
+          <a:p>
+            <a:pPr>
+              <a:spcAft>
+                <a:spcPts val="800"/>
+              </a:spcAft>
+            </a:pPr>
+            <a:r>
+              <a:rPr sz="2200">
+                <a:solidFill>
+                  <a:srgbClr val="212121"/>
+                </a:solidFill>
+              </a:rPr>
+              <a:t/>
             </a:r>
           </a:p>
           <a:p>
@@ -7581,7 +7692,39 @@
                 </a:solidFill>
                 <a:latin typeface="Courier New"/>
               </a:rPr>
-              <a:t>M O N E Y</a:t>
+              <a:t>int y = x + 1;</a:t>
+            </a:r>
+          </a:p>
+          <a:p>
+            <a:pPr>
+              <a:spcAft>
+                <a:spcPts val="0"/>
+              </a:spcAft>
+            </a:pPr>
+            <a:r>
+              <a:rPr sz="1800">
+                <a:solidFill>
+                  <a:srgbClr val="212121"/>
+                </a:solidFill>
+                <a:latin typeface="Courier New"/>
+              </a:rPr>
+              <a:t>int z = y * 2;</a:t>
+            </a:r>
+          </a:p>
+          <a:p>
+            <a:pPr>
+              <a:spcAft>
+                <a:spcPts val="0"/>
+              </a:spcAft>
+            </a:pPr>
+            <a:r>
+              <a:rPr sz="1800">
+                <a:solidFill>
+                  <a:srgbClr val="212121"/>
+                </a:solidFill>
+                <a:latin typeface="Courier New"/>
+              </a:rPr>
+              <a:t>assert(z &gt;= 2);   /* surely true for x &gt;= 0 … ? */</a:t>
             </a:r>
           </a:p>
           <a:p>
@@ -7611,52 +7754,7 @@
                   <a:srgbClr val="212121"/>
                 </a:solidFill>
               </a:rPr>
-              <a:t>Eight letters, all different digits, S ≠ 0, M ≠ 0 — about 10⁸ candidate assignments.</a:t>
-            </a:r>
-          </a:p>
-          <a:p>
-            <a:pPr>
-              <a:spcAft>
-                <a:spcPts val="800"/>
-              </a:spcAft>
-            </a:pPr>
-            <a:r>
-              <a:rPr sz="2200">
-                <a:solidFill>
-                  <a:srgbClr val="212121"/>
-                </a:solidFill>
-              </a:rPr>
-              <a:t>Z3 finds the unique solution in well under a second.</a:t>
-            </a:r>
-          </a:p>
-          <a:p>
-            <a:pPr>
-              <a:spcAft>
-                <a:spcPts val="800"/>
-              </a:spcAft>
-            </a:pPr>
-            <a:r>
-              <a:rPr sz="2200">
-                <a:solidFill>
-                  <a:srgbClr val="212121"/>
-                </a:solidFill>
-              </a:rPr>
-              <a:t>The same engine that solves puzzles finds your bugs: a counterexample is just a solution to “break my program”.</a:t>
-            </a:r>
-          </a:p>
-          <a:p>
-            <a:pPr>
-              <a:spcAft>
-                <a:spcPts val="800"/>
-              </a:spcAft>
-            </a:pPr>
-            <a:r>
-              <a:rPr sz="2200">
-                <a:solidFill>
-                  <a:srgbClr val="212121"/>
-                </a:solidFill>
-              </a:rPr>
-              <a:t>Lab 1, Stage 2: you run this yourself.</a:t>
+              <a:t>A solver finds the x that breaks this in milliseconds. In Lab 1 you will encode these three lines yourself and watch it happen.</a:t>
             </a:r>
           </a:p>
         </p:txBody>
@@ -7774,6 +7872,219 @@
 </file>
 
 <file path=ppt/slides/slide30.xml><?xml version="1.0" encoding="utf-8"?>
+<p:sld xmlns:a="http://schemas.openxmlformats.org/drawingml/2006/main" xmlns:p="http://schemas.openxmlformats.org/presentationml/2006/main" xmlns:r="http://schemas.openxmlformats.org/officeDocument/2006/relationships">
+  <p:cSld>
+    <p:spTree>
+      <p:nvGrpSpPr>
+        <p:cNvPr id="1" name=""/>
+        <p:cNvGrpSpPr/>
+        <p:nvPr/>
+      </p:nvGrpSpPr>
+      <p:grpSpPr/>
+      <p:sp>
+        <p:nvSpPr>
+          <p:cNvPr id="2" name="TextBox 1"/>
+          <p:cNvSpPr txBox="1"/>
+          <p:nvPr/>
+        </p:nvSpPr>
+        <p:spPr>
+          <a:xfrm>
+            <a:off x="548640" y="365760"/>
+            <a:ext cx="11064240" cy="1005840"/>
+          </a:xfrm>
+          <a:prstGeom prst="rect">
+            <a:avLst/>
+          </a:prstGeom>
+          <a:noFill/>
+        </p:spPr>
+        <p:txBody>
+          <a:bodyPr wrap="square">
+            <a:spAutoFit/>
+          </a:bodyPr>
+          <a:lstStyle/>
+          <a:p>
+            <a:r>
+              <a:rPr sz="3600" b="1">
+                <a:solidFill>
+                  <a:srgbClr val="5A0A7A"/>
+                </a:solidFill>
+              </a:rPr>
+              <a:t>Solvers as search engines: SEND + MORE = MONEY</a:t>
+            </a:r>
+          </a:p>
+        </p:txBody>
+      </p:sp>
+      <p:sp>
+        <p:nvSpPr>
+          <p:cNvPr id="3" name="TextBox 2"/>
+          <p:cNvSpPr txBox="1"/>
+          <p:nvPr/>
+        </p:nvSpPr>
+        <p:spPr>
+          <a:xfrm>
+            <a:off x="731520" y="1463040"/>
+            <a:ext cx="10789920" cy="5120640"/>
+          </a:xfrm>
+          <a:prstGeom prst="rect">
+            <a:avLst/>
+          </a:prstGeom>
+          <a:noFill/>
+        </p:spPr>
+        <p:txBody>
+          <a:bodyPr wrap="square">
+            <a:spAutoFit/>
+          </a:bodyPr>
+          <a:lstStyle/>
+          <a:p>
+            <a:pPr>
+              <a:spcAft>
+                <a:spcPts val="0"/>
+              </a:spcAft>
+            </a:pPr>
+            <a:r>
+              <a:rPr sz="1800">
+                <a:solidFill>
+                  <a:srgbClr val="212121"/>
+                </a:solidFill>
+                <a:latin typeface="Courier New"/>
+              </a:rPr>
+              <a:t>  S E N D</a:t>
+            </a:r>
+          </a:p>
+          <a:p>
+            <a:pPr>
+              <a:spcAft>
+                <a:spcPts val="0"/>
+              </a:spcAft>
+            </a:pPr>
+            <a:r>
+              <a:rPr sz="1800">
+                <a:solidFill>
+                  <a:srgbClr val="212121"/>
+                </a:solidFill>
+                <a:latin typeface="Courier New"/>
+              </a:rPr>
+              <a:t>+ M O R E</a:t>
+            </a:r>
+          </a:p>
+          <a:p>
+            <a:pPr>
+              <a:spcAft>
+                <a:spcPts val="0"/>
+              </a:spcAft>
+            </a:pPr>
+            <a:r>
+              <a:rPr sz="1800">
+                <a:solidFill>
+                  <a:srgbClr val="212121"/>
+                </a:solidFill>
+                <a:latin typeface="Courier New"/>
+              </a:rPr>
+              <a:t>---------</a:t>
+            </a:r>
+          </a:p>
+          <a:p>
+            <a:pPr>
+              <a:spcAft>
+                <a:spcPts val="0"/>
+              </a:spcAft>
+            </a:pPr>
+            <a:r>
+              <a:rPr sz="1800">
+                <a:solidFill>
+                  <a:srgbClr val="212121"/>
+                </a:solidFill>
+                <a:latin typeface="Courier New"/>
+              </a:rPr>
+              <a:t>M O N E Y</a:t>
+            </a:r>
+          </a:p>
+          <a:p>
+            <a:pPr>
+              <a:spcAft>
+                <a:spcPts val="800"/>
+              </a:spcAft>
+            </a:pPr>
+            <a:r>
+              <a:rPr sz="2200">
+                <a:solidFill>
+                  <a:srgbClr val="212121"/>
+                </a:solidFill>
+              </a:rPr>
+              <a:t/>
+            </a:r>
+          </a:p>
+          <a:p>
+            <a:pPr>
+              <a:spcAft>
+                <a:spcPts val="800"/>
+              </a:spcAft>
+            </a:pPr>
+            <a:r>
+              <a:rPr sz="2200">
+                <a:solidFill>
+                  <a:srgbClr val="212121"/>
+                </a:solidFill>
+              </a:rPr>
+              <a:t>Eight letters, all different digits, S ≠ 0, M ≠ 0 — about 10⁸ candidate assignments.</a:t>
+            </a:r>
+          </a:p>
+          <a:p>
+            <a:pPr>
+              <a:spcAft>
+                <a:spcPts val="800"/>
+              </a:spcAft>
+            </a:pPr>
+            <a:r>
+              <a:rPr sz="2200">
+                <a:solidFill>
+                  <a:srgbClr val="212121"/>
+                </a:solidFill>
+              </a:rPr>
+              <a:t>Z3 finds the unique solution in well under a second.</a:t>
+            </a:r>
+          </a:p>
+          <a:p>
+            <a:pPr>
+              <a:spcAft>
+                <a:spcPts val="800"/>
+              </a:spcAft>
+            </a:pPr>
+            <a:r>
+              <a:rPr sz="2200">
+                <a:solidFill>
+                  <a:srgbClr val="212121"/>
+                </a:solidFill>
+              </a:rPr>
+              <a:t>The same engine that solves puzzles finds your bugs: a counterexample is just a solution to “break my program”.</a:t>
+            </a:r>
+          </a:p>
+          <a:p>
+            <a:pPr>
+              <a:spcAft>
+                <a:spcPts val="800"/>
+              </a:spcAft>
+            </a:pPr>
+            <a:r>
+              <a:rPr sz="2200">
+                <a:solidFill>
+                  <a:srgbClr val="212121"/>
+                </a:solidFill>
+              </a:rPr>
+              <a:t>Lab 1, Stage 2: you run this yourself.</a:t>
+            </a:r>
+          </a:p>
+        </p:txBody>
+      </p:sp>
+    </p:spTree>
+  </p:cSld>
+  <p:clrMapOvr>
+    <a:masterClrMapping/>
+  </p:clrMapOvr>
+</p:sld>
+</file>
+
+<file path=ppt/slides/slide31.xml><?xml version="1.0" encoding="utf-8"?>
 <p:sld xmlns:a="http://schemas.openxmlformats.org/drawingml/2006/main" xmlns:p="http://schemas.openxmlformats.org/presentationml/2006/main" xmlns:r="http://schemas.openxmlformats.org/officeDocument/2006/relationships">
   <p:cSld>
     <p:spTree>
@@ -8345,7 +8656,7 @@
 </p:sld>
 </file>
 
-<file path=ppt/slides/slide31.xml><?xml version="1.0" encoding="utf-8"?>
+<file path=ppt/slides/slide32.xml><?xml version="1.0" encoding="utf-8"?>
 <p:sld xmlns:a="http://schemas.openxmlformats.org/drawingml/2006/main" xmlns:p="http://schemas.openxmlformats.org/presentationml/2006/main" xmlns:r="http://schemas.openxmlformats.org/officeDocument/2006/relationships">
   <p:cSld>
     <p:spTree>
@@ -8525,7 +8836,7 @@
 </p:sld>
 </file>
 
-<file path=ppt/slides/slide32.xml><?xml version="1.0" encoding="utf-8"?>
+<file path=ppt/slides/slide33.xml><?xml version="1.0" encoding="utf-8"?>
 <p:sld xmlns:a="http://schemas.openxmlformats.org/drawingml/2006/main" xmlns:p="http://schemas.openxmlformats.org/presentationml/2006/main" xmlns:r="http://schemas.openxmlformats.org/officeDocument/2006/relationships">
   <p:cSld>
     <p:spTree>
@@ -8767,7 +9078,7 @@
 </p:sld>
 </file>
 
-<file path=ppt/slides/slide33.xml><?xml version="1.0" encoding="utf-8"?>
+<file path=ppt/slides/slide34.xml><?xml version="1.0" encoding="utf-8"?>
 <p:sld xmlns:a="http://schemas.openxmlformats.org/drawingml/2006/main" xmlns:p="http://schemas.openxmlformats.org/presentationml/2006/main" xmlns:r="http://schemas.openxmlformats.org/officeDocument/2006/relationships">
   <p:cSld>
     <p:spTree>
@@ -8922,171 +9233,6 @@
                 </a:solidFill>
               </a:rPr>
               <a:t>Recognise the three lines? In Lab 1, Stage 3 you translate exactly this function by hand and hand it to Z3. You will be doing ESBMC's job yourself.</a:t>
-            </a:r>
-          </a:p>
-        </p:txBody>
-      </p:sp>
-    </p:spTree>
-  </p:cSld>
-  <p:clrMapOvr>
-    <a:masterClrMapping/>
-  </p:clrMapOvr>
-</p:sld>
-</file>
-
-<file path=ppt/slides/slide34.xml><?xml version="1.0" encoding="utf-8"?>
-<p:sld xmlns:a="http://schemas.openxmlformats.org/drawingml/2006/main" xmlns:p="http://schemas.openxmlformats.org/presentationml/2006/main" xmlns:r="http://schemas.openxmlformats.org/officeDocument/2006/relationships">
-  <p:cSld>
-    <p:spTree>
-      <p:nvGrpSpPr>
-        <p:cNvPr id="1" name=""/>
-        <p:cNvGrpSpPr/>
-        <p:nvPr/>
-      </p:nvGrpSpPr>
-      <p:grpSpPr/>
-      <p:sp>
-        <p:nvSpPr>
-          <p:cNvPr id="2" name="TextBox 1"/>
-          <p:cNvSpPr txBox="1"/>
-          <p:nvPr/>
-        </p:nvSpPr>
-        <p:spPr>
-          <a:xfrm>
-            <a:off x="548640" y="365760"/>
-            <a:ext cx="11064240" cy="1005840"/>
-          </a:xfrm>
-          <a:prstGeom prst="rect">
-            <a:avLst/>
-          </a:prstGeom>
-          <a:noFill/>
-        </p:spPr>
-        <p:txBody>
-          <a:bodyPr wrap="square">
-            <a:spAutoFit/>
-          </a:bodyPr>
-          <a:lstStyle/>
-          <a:p>
-            <a:r>
-              <a:rPr sz="3600" b="1">
-                <a:solidFill>
-                  <a:srgbClr val="5A0A7A"/>
-                </a:solidFill>
-              </a:rPr>
-              <a:t>Putting it together</a:t>
-            </a:r>
-          </a:p>
-        </p:txBody>
-      </p:sp>
-      <p:sp>
-        <p:nvSpPr>
-          <p:cNvPr id="3" name="TextBox 2"/>
-          <p:cNvSpPr txBox="1"/>
-          <p:nvPr/>
-        </p:nvSpPr>
-        <p:spPr>
-          <a:xfrm>
-            <a:off x="731520" y="1737360"/>
-            <a:ext cx="10789920" cy="4846320"/>
-          </a:xfrm>
-          <a:prstGeom prst="rect">
-            <a:avLst/>
-          </a:prstGeom>
-          <a:noFill/>
-        </p:spPr>
-        <p:txBody>
-          <a:bodyPr wrap="square">
-            <a:spAutoFit/>
-          </a:bodyPr>
-          <a:lstStyle/>
-          <a:p>
-            <a:pPr>
-              <a:spcAft>
-                <a:spcPts val="0"/>
-              </a:spcAft>
-            </a:pPr>
-            <a:r>
-              <a:rPr sz="2200">
-                <a:solidFill>
-                  <a:srgbClr val="212121"/>
-                </a:solidFill>
-                <a:latin typeface="Courier New"/>
-              </a:rPr>
-              <a:t>⟦program⟧  ∧  ¬P      →  SMT solver</a:t>
-            </a:r>
-          </a:p>
-          <a:p>
-            <a:pPr>
-              <a:spcAft>
-                <a:spcPts val="800"/>
-              </a:spcAft>
-            </a:pPr>
-            <a:r>
-              <a:rPr sz="2600">
-                <a:solidFill>
-                  <a:srgbClr val="212121"/>
-                </a:solidFill>
-              </a:rPr>
-              <a:t/>
-            </a:r>
-          </a:p>
-          <a:p>
-            <a:pPr>
-              <a:spcAft>
-                <a:spcPts val="800"/>
-              </a:spcAft>
-            </a:pPr>
-            <a:r>
-              <a:rPr sz="2600">
-                <a:solidFill>
-                  <a:srgbClr val="212121"/>
-                </a:solidFill>
-              </a:rPr>
-              <a:t>sat — the model assigns every input and every choice: replayed in program order, that is the counterexample trace.</a:t>
-            </a:r>
-          </a:p>
-          <a:p>
-            <a:pPr>
-              <a:spcAft>
-                <a:spcPts val="800"/>
-              </a:spcAft>
-            </a:pPr>
-            <a:r>
-              <a:rPr sz="2600">
-                <a:solidFill>
-                  <a:srgbClr val="212121"/>
-                </a:solidFill>
-              </a:rPr>
-              <a:t>unsat — no execution within the bound violates P.</a:t>
-            </a:r>
-          </a:p>
-          <a:p>
-            <a:pPr>
-              <a:spcAft>
-                <a:spcPts val="800"/>
-              </a:spcAft>
-            </a:pPr>
-            <a:r>
-              <a:rPr sz="2600">
-                <a:solidFill>
-                  <a:srgbClr val="212121"/>
-                </a:solidFill>
-              </a:rPr>
-              <a:t/>
-            </a:r>
-          </a:p>
-          <a:p>
-            <a:pPr>
-              <a:spcAft>
-                <a:spcPts val="800"/>
-              </a:spcAft>
-            </a:pPr>
-            <a:r>
-              <a:rPr sz="2600">
-                <a:solidFill>
-                  <a:srgbClr val="212121"/>
-                </a:solidFill>
-              </a:rPr>
-              <a:t>One formula, every path at once. That is why nobody has to enumerate 2⁶⁴ test cases.</a:t>
             </a:r>
           </a:p>
         </p:txBody>
@@ -9137,7 +9283,7 @@
                   <a:srgbClr val="5A0A7A"/>
                 </a:solidFill>
               </a:rPr>
-              <a:t>Anatomy of a counterexample</a:t>
+              <a:t>Putting it together</a:t>
             </a:r>
           </a:p>
         </p:txBody>
@@ -9150,8 +9296,8 @@
         </p:nvSpPr>
         <p:spPr>
           <a:xfrm>
-            <a:off x="731520" y="1463040"/>
-            <a:ext cx="10789920" cy="5120640"/>
+            <a:off x="731520" y="1737360"/>
+            <a:ext cx="10789920" cy="4846320"/>
           </a:xfrm>
           <a:prstGeom prst="rect">
             <a:avLst/>
@@ -9170,103 +9316,23 @@
               </a:spcAft>
             </a:pPr>
             <a:r>
-              <a:rPr sz="1800">
+              <a:rPr sz="2200">
                 <a:solidFill>
                   <a:srgbClr val="212121"/>
                 </a:solidFill>
                 <a:latin typeface="Courier New"/>
               </a:rPr>
-              <a:t>State 3  file offbyone.c  line 15</a:t>
-            </a:r>
-          </a:p>
-          <a:p>
-            <a:pPr>
-              <a:spcAft>
-                <a:spcPts val="0"/>
-              </a:spcAft>
-            </a:pPr>
-            <a:r>
-              <a:rPr sz="1800">
-                <a:solidFill>
-                  <a:srgbClr val="212121"/>
-                </a:solidFill>
-                <a:latin typeface="Courier New"/>
-              </a:rPr>
-              <a:t>  i = 5 (00000000 ... 101)      ← the value the solver chose</a:t>
-            </a:r>
-          </a:p>
-          <a:p>
-            <a:pPr>
-              <a:spcAft>
-                <a:spcPts val="0"/>
-              </a:spcAft>
-            </a:pPr>
-            <a:r>
-              <a:rPr sz="1800">
-                <a:solidFill>
-                  <a:srgbClr val="212121"/>
-                </a:solidFill>
-                <a:latin typeface="Courier New"/>
-              </a:rPr>
-              <a:t>...</a:t>
-            </a:r>
-          </a:p>
-          <a:p>
-            <a:pPr>
-              <a:spcAft>
-                <a:spcPts val="0"/>
-              </a:spcAft>
-            </a:pPr>
-            <a:r>
-              <a:rPr sz="1800">
-                <a:solidFill>
-                  <a:srgbClr val="212121"/>
-                </a:solidFill>
-                <a:latin typeface="Courier New"/>
-              </a:rPr>
-              <a:t>Violated property:</a:t>
-            </a:r>
-          </a:p>
-          <a:p>
-            <a:pPr>
-              <a:spcAft>
-                <a:spcPts val="0"/>
-              </a:spcAft>
-            </a:pPr>
-            <a:r>
-              <a:rPr sz="1800">
-                <a:solidFill>
-                  <a:srgbClr val="212121"/>
-                </a:solidFill>
-                <a:latin typeface="Courier New"/>
-              </a:rPr>
-              <a:t>  array bounds violated: a[i]   ← what broke</a:t>
-            </a:r>
-          </a:p>
-          <a:p>
-            <a:pPr>
-              <a:spcAft>
-                <a:spcPts val="0"/>
-              </a:spcAft>
-            </a:pPr>
-            <a:r>
-              <a:rPr sz="1800">
-                <a:solidFill>
-                  <a:srgbClr val="212121"/>
-                </a:solidFill>
-                <a:latin typeface="Courier New"/>
-              </a:rPr>
-              <a:t>  CWE: CWE-787                   ← the vulnerability class</a:t>
-            </a:r>
-          </a:p>
-          <a:p>
-            <a:pPr>
-              <a:spcAft>
-                <a:spcPts val="800"/>
-              </a:spcAft>
-            </a:pPr>
-            <a:r>
-              <a:rPr sz="2200">
+              <a:t>⟦program⟧  ∧  ¬P      →  SMT solver</a:t>
+            </a:r>
+          </a:p>
+          <a:p>
+            <a:pPr>
+              <a:spcAft>
+                <a:spcPts val="800"/>
+              </a:spcAft>
+            </a:pPr>
+            <a:r>
+              <a:rPr sz="2600">
                 <a:solidFill>
                   <a:srgbClr val="212121"/>
                 </a:solidFill>
@@ -9281,27 +9347,57 @@
               </a:spcAft>
             </a:pPr>
             <a:r>
-              <a:rPr sz="2200">
-                <a:solidFill>
-                  <a:srgbClr val="212121"/>
-                </a:solidFill>
-              </a:rPr>
-              <a:t>Read it bottom-up: first what was violated, then scroll up for the values that caused it.</a:t>
-            </a:r>
-          </a:p>
-          <a:p>
-            <a:pPr>
-              <a:spcAft>
-                <a:spcPts val="800"/>
-              </a:spcAft>
-            </a:pPr>
-            <a:r>
-              <a:rPr sz="2200">
-                <a:solidFill>
-                  <a:srgbClr val="212121"/>
-                </a:solidFill>
-              </a:rPr>
-              <a:t>Those values are a ready-made failing test case — keep them.</a:t>
+              <a:rPr sz="2600">
+                <a:solidFill>
+                  <a:srgbClr val="212121"/>
+                </a:solidFill>
+              </a:rPr>
+              <a:t>sat — the model assigns every input and every choice: replayed in program order, that is the counterexample trace.</a:t>
+            </a:r>
+          </a:p>
+          <a:p>
+            <a:pPr>
+              <a:spcAft>
+                <a:spcPts val="800"/>
+              </a:spcAft>
+            </a:pPr>
+            <a:r>
+              <a:rPr sz="2600">
+                <a:solidFill>
+                  <a:srgbClr val="212121"/>
+                </a:solidFill>
+              </a:rPr>
+              <a:t>unsat — no execution within the bound violates P.</a:t>
+            </a:r>
+          </a:p>
+          <a:p>
+            <a:pPr>
+              <a:spcAft>
+                <a:spcPts val="800"/>
+              </a:spcAft>
+            </a:pPr>
+            <a:r>
+              <a:rPr sz="2600">
+                <a:solidFill>
+                  <a:srgbClr val="212121"/>
+                </a:solidFill>
+              </a:rPr>
+              <a:t/>
+            </a:r>
+          </a:p>
+          <a:p>
+            <a:pPr>
+              <a:spcAft>
+                <a:spcPts val="800"/>
+              </a:spcAft>
+            </a:pPr>
+            <a:r>
+              <a:rPr sz="2600">
+                <a:solidFill>
+                  <a:srgbClr val="212121"/>
+                </a:solidFill>
+              </a:rPr>
+              <a:t>One formula, every path at once. That is why nobody has to enumerate 2⁶⁴ test cases.</a:t>
             </a:r>
           </a:p>
         </p:txBody>
@@ -9352,7 +9448,7 @@
                   <a:srgbClr val="5A0A7A"/>
                 </a:solidFill>
               </a:rPr>
-              <a:t>Live: the whole pipeline on five lines</a:t>
+              <a:t>Anatomy of a counterexample</a:t>
             </a:r>
           </a:p>
         </p:txBody>
@@ -9391,7 +9487,7 @@
                 </a:solidFill>
                 <a:latin typeface="Courier New"/>
               </a:rPr>
-              <a:t>int main(void)</a:t>
+              <a:t>State 3  file offbyone.c  line 15</a:t>
             </a:r>
           </a:p>
           <a:p>
@@ -9407,7 +9503,7 @@
                 </a:solidFill>
                 <a:latin typeface="Courier New"/>
               </a:rPr>
-              <a:t>{</a:t>
+              <a:t>  i = 5 (00000000 ... 101)      ← the value the solver chose</a:t>
             </a:r>
           </a:p>
           <a:p>
@@ -9423,7 +9519,7 @@
                 </a:solidFill>
                 <a:latin typeface="Courier New"/>
               </a:rPr>
-              <a:t>  int a[5];</a:t>
+              <a:t>...</a:t>
             </a:r>
           </a:p>
           <a:p>
@@ -9439,7 +9535,7 @@
                 </a:solidFill>
                 <a:latin typeface="Courier New"/>
               </a:rPr>
-              <a:t>  for (int i = 0; i &lt;= 5; i++)</a:t>
+              <a:t>Violated property:</a:t>
             </a:r>
           </a:p>
           <a:p>
@@ -9455,7 +9551,7 @@
                 </a:solidFill>
                 <a:latin typeface="Courier New"/>
               </a:rPr>
-              <a:t>    a[i] = i;</a:t>
+              <a:t>  array bounds violated: a[i]   ← what broke</a:t>
             </a:r>
           </a:p>
           <a:p>
@@ -9471,21 +9567,20 @@
                 </a:solidFill>
                 <a:latin typeface="Courier New"/>
               </a:rPr>
-              <a:t>}</a:t>
-            </a:r>
-          </a:p>
-          <a:p>
-            <a:pPr>
-              <a:spcAft>
-                <a:spcPts val="0"/>
-              </a:spcAft>
-            </a:pPr>
-            <a:r>
-              <a:rPr sz="1800">
-                <a:solidFill>
-                  <a:srgbClr val="212121"/>
-                </a:solidFill>
-                <a:latin typeface="Courier New"/>
+              <a:t>  CWE: CWE-787                   ← the vulnerability class</a:t>
+            </a:r>
+          </a:p>
+          <a:p>
+            <a:pPr>
+              <a:spcAft>
+                <a:spcPts val="800"/>
+              </a:spcAft>
+            </a:pPr>
+            <a:r>
+              <a:rPr sz="2200">
+                <a:solidFill>
+                  <a:srgbClr val="212121"/>
+                </a:solidFill>
               </a:rPr>
               <a:t/>
             </a:r>
@@ -9493,22 +9588,6 @@
           <a:p>
             <a:pPr>
               <a:spcAft>
-                <a:spcPts val="0"/>
-              </a:spcAft>
-            </a:pPr>
-            <a:r>
-              <a:rPr sz="1800">
-                <a:solidFill>
-                  <a:srgbClr val="212121"/>
-                </a:solidFill>
-                <a:latin typeface="Courier New"/>
-              </a:rPr>
-              <a:t>$ esbmc offbyone.c --unwind 7</a:t>
-            </a:r>
-          </a:p>
-          <a:p>
-            <a:pPr>
-              <a:spcAft>
                 <a:spcPts val="800"/>
               </a:spcAft>
             </a:pPr>
@@ -9518,7 +9597,7 @@
                   <a:srgbClr val="212121"/>
                 </a:solidFill>
               </a:rPr>
-              <a:t/>
+              <a:t>Read it bottom-up: first what was violated, then scroll up for the values that caused it.</a:t>
             </a:r>
           </a:p>
           <a:p>
@@ -9533,22 +9612,7 @@
                   <a:srgbClr val="212121"/>
                 </a:solidFill>
               </a:rPr>
-              <a:t>Predict first: FAILED or SUCCESSFUL? If FAILED — at which i?</a:t>
-            </a:r>
-          </a:p>
-          <a:p>
-            <a:pPr>
-              <a:spcAft>
-                <a:spcPts val="800"/>
-              </a:spcAft>
-            </a:pPr>
-            <a:r>
-              <a:rPr sz="2200">
-                <a:solidFill>
-                  <a:srgbClr val="212121"/>
-                </a:solidFill>
-              </a:rPr>
-              <a:t>Then we read the trace together, bottom-up.</a:t>
+              <a:t>Those values are a ready-made failing test case — keep them.</a:t>
             </a:r>
           </a:p>
         </p:txBody>
@@ -9599,7 +9663,7 @@
                   <a:srgbClr val="5A0A7A"/>
                 </a:solidFill>
               </a:rPr>
-              <a:t>Modelling the environment: a preview</a:t>
+              <a:t>Live: the whole pipeline on five lines</a:t>
             </a:r>
           </a:p>
         </p:txBody>
@@ -9638,7 +9702,7 @@
                 </a:solidFill>
                 <a:latin typeface="Courier New"/>
               </a:rPr>
-              <a:t>int x = nondet_int();              /* every value at once */</a:t>
+              <a:t>int main(void)</a:t>
             </a:r>
           </a:p>
           <a:p>
@@ -9654,7 +9718,7 @@
                 </a:solidFill>
                 <a:latin typeface="Courier New"/>
               </a:rPr>
-              <a:t>__ESBMC_assume(x &gt; 0 &amp;&amp; x &lt; 100);  /* now: every value in 1..99 */</a:t>
+              <a:t>{</a:t>
             </a:r>
           </a:p>
           <a:p>
@@ -9670,7 +9734,87 @@
                 </a:solidFill>
                 <a:latin typeface="Courier New"/>
               </a:rPr>
-              <a:t>assert(property(x));               /* must hold for ALL of them */</a:t>
+              <a:t>  int a[5];</a:t>
+            </a:r>
+          </a:p>
+          <a:p>
+            <a:pPr>
+              <a:spcAft>
+                <a:spcPts val="0"/>
+              </a:spcAft>
+            </a:pPr>
+            <a:r>
+              <a:rPr sz="1800">
+                <a:solidFill>
+                  <a:srgbClr val="212121"/>
+                </a:solidFill>
+                <a:latin typeface="Courier New"/>
+              </a:rPr>
+              <a:t>  for (int i = 0; i &lt;= 5; i++)</a:t>
+            </a:r>
+          </a:p>
+          <a:p>
+            <a:pPr>
+              <a:spcAft>
+                <a:spcPts val="0"/>
+              </a:spcAft>
+            </a:pPr>
+            <a:r>
+              <a:rPr sz="1800">
+                <a:solidFill>
+                  <a:srgbClr val="212121"/>
+                </a:solidFill>
+                <a:latin typeface="Courier New"/>
+              </a:rPr>
+              <a:t>    a[i] = i;</a:t>
+            </a:r>
+          </a:p>
+          <a:p>
+            <a:pPr>
+              <a:spcAft>
+                <a:spcPts val="0"/>
+              </a:spcAft>
+            </a:pPr>
+            <a:r>
+              <a:rPr sz="1800">
+                <a:solidFill>
+                  <a:srgbClr val="212121"/>
+                </a:solidFill>
+                <a:latin typeface="Courier New"/>
+              </a:rPr>
+              <a:t>}</a:t>
+            </a:r>
+          </a:p>
+          <a:p>
+            <a:pPr>
+              <a:spcAft>
+                <a:spcPts val="0"/>
+              </a:spcAft>
+            </a:pPr>
+            <a:r>
+              <a:rPr sz="1800">
+                <a:solidFill>
+                  <a:srgbClr val="212121"/>
+                </a:solidFill>
+                <a:latin typeface="Courier New"/>
+              </a:rPr>
+              <a:t/>
+            </a:r>
+          </a:p>
+          <a:p>
+            <a:pPr>
+              <a:spcAft>
+                <a:spcPts val="0"/>
+              </a:spcAft>
+            </a:pPr>
+            <a:r>
+              <a:rPr sz="1800">
+                <a:solidFill>
+                  <a:srgbClr val="212121"/>
+                </a:solidFill>
+                <a:latin typeface="Courier New"/>
+              </a:rPr>
+              <a:t>$ esbmc offbyone.c --unwind 7</a:t>
             </a:r>
           </a:p>
           <a:p>
@@ -9700,7 +9844,7 @@
                   <a:srgbClr val="212121"/>
                 </a:solidFill>
               </a:rPr>
-              <a:t>One nondeterministic input = all tests of that input at once.</a:t>
+              <a:t>Predict first: FAILED or SUCCESSFUL? If FAILED — at which i?</a:t>
             </a:r>
           </a:p>
           <a:p>
@@ -9715,7 +9859,7 @@
                   <a:srgbClr val="212121"/>
                 </a:solidFill>
               </a:rPr>
-              <a:t>In Session 2 you will use these three lines to expose a bug in a program that verifies green as shipped — the tool only checks what you specify.</a:t>
+              <a:t>Then we read the trace together, bottom-up.</a:t>
             </a:r>
           </a:p>
         </p:txBody>
@@ -9766,7 +9910,7 @@
                   <a:srgbClr val="5A0A7A"/>
                 </a:solidFill>
               </a:rPr>
-              <a:t>Beyond one thread</a:t>
+              <a:t>Modelling the environment: a preview</a:t>
             </a:r>
           </a:p>
         </p:txBody>
@@ -9779,8 +9923,8 @@
         </p:nvSpPr>
         <p:spPr>
           <a:xfrm>
-            <a:off x="731520" y="1645920"/>
-            <a:ext cx="10789920" cy="4937760"/>
+            <a:off x="731520" y="1463040"/>
+            <a:ext cx="10789920" cy="5120640"/>
           </a:xfrm>
           <a:prstGeom prst="rect">
             <a:avLst/>
@@ -9795,56 +9939,59 @@
           <a:p>
             <a:pPr>
               <a:spcAft>
-                <a:spcPts val="800"/>
-              </a:spcAft>
-            </a:pPr>
-            <a:r>
-              <a:rPr sz="2400">
-                <a:solidFill>
-                  <a:srgbClr val="212121"/>
-                </a:solidFill>
-              </a:rPr>
-              <a:t>Two threads of two and one statements already have three interleavings. Real code has billions.</a:t>
-            </a:r>
-          </a:p>
-          <a:p>
-            <a:pPr>
-              <a:spcAft>
-                <a:spcPts val="800"/>
-              </a:spcAft>
-            </a:pPr>
-            <a:r>
-              <a:rPr sz="2400">
-                <a:solidFill>
-                  <a:srgbClr val="212121"/>
-                </a:solidFill>
-              </a:rPr>
-              <a:t>Run the program a million times and the bad interleaving may never show up — Therac-25's bug hid exactly this way.</a:t>
-            </a:r>
-          </a:p>
-          <a:p>
-            <a:pPr>
-              <a:spcAft>
-                <a:spcPts val="800"/>
-              </a:spcAft>
-            </a:pPr>
-            <a:r>
-              <a:rPr sz="2400">
-                <a:solidFill>
-                  <a:srgbClr val="212121"/>
-                </a:solidFill>
-              </a:rPr>
-              <a:t>A model checker enumerates every interleaving up to a bound, including the one that kills your assertion.</a:t>
-            </a:r>
-          </a:p>
-          <a:p>
-            <a:pPr>
-              <a:spcAft>
-                <a:spcPts val="800"/>
-              </a:spcAft>
-            </a:pPr>
-            <a:r>
-              <a:rPr sz="2400">
+                <a:spcPts val="0"/>
+              </a:spcAft>
+            </a:pPr>
+            <a:r>
+              <a:rPr sz="1800">
+                <a:solidFill>
+                  <a:srgbClr val="212121"/>
+                </a:solidFill>
+                <a:latin typeface="Courier New"/>
+              </a:rPr>
+              <a:t>int x = nondet_int();              /* every value at once */</a:t>
+            </a:r>
+          </a:p>
+          <a:p>
+            <a:pPr>
+              <a:spcAft>
+                <a:spcPts val="0"/>
+              </a:spcAft>
+            </a:pPr>
+            <a:r>
+              <a:rPr sz="1800">
+                <a:solidFill>
+                  <a:srgbClr val="212121"/>
+                </a:solidFill>
+                <a:latin typeface="Courier New"/>
+              </a:rPr>
+              <a:t>__ESBMC_assume(x &gt; 0 &amp;&amp; x &lt; 100);  /* now: every value in 1..99 */</a:t>
+            </a:r>
+          </a:p>
+          <a:p>
+            <a:pPr>
+              <a:spcAft>
+                <a:spcPts val="0"/>
+              </a:spcAft>
+            </a:pPr>
+            <a:r>
+              <a:rPr sz="1800">
+                <a:solidFill>
+                  <a:srgbClr val="212121"/>
+                </a:solidFill>
+                <a:latin typeface="Courier New"/>
+              </a:rPr>
+              <a:t>assert(property(x));               /* must hold for ALL of them */</a:t>
+            </a:r>
+          </a:p>
+          <a:p>
+            <a:pPr>
+              <a:spcAft>
+                <a:spcPts val="800"/>
+              </a:spcAft>
+            </a:pPr>
+            <a:r>
+              <a:rPr sz="2200">
                 <a:solidFill>
                   <a:srgbClr val="212121"/>
                 </a:solidFill>
@@ -9859,12 +10006,27 @@
               </a:spcAft>
             </a:pPr>
             <a:r>
-              <a:rPr sz="2400">
-                <a:solidFill>
-                  <a:srgbClr val="212121"/>
-                </a:solidFill>
-              </a:rPr>
-              <a:t>Session 2, Lab 4: you write down the killer interleaving before the tool finds it.</a:t>
+              <a:rPr sz="2200">
+                <a:solidFill>
+                  <a:srgbClr val="212121"/>
+                </a:solidFill>
+              </a:rPr>
+              <a:t>One nondeterministic input = all tests of that input at once.</a:t>
+            </a:r>
+          </a:p>
+          <a:p>
+            <a:pPr>
+              <a:spcAft>
+                <a:spcPts val="800"/>
+              </a:spcAft>
+            </a:pPr>
+            <a:r>
+              <a:rPr sz="2200">
+                <a:solidFill>
+                  <a:srgbClr val="212121"/>
+                </a:solidFill>
+              </a:rPr>
+              <a:t>In Session 2 you will use these three lines to expose a bug in a program that verifies green as shipped — the tool only checks what you specify.</a:t>
             </a:r>
           </a:p>
         </p:txBody>
@@ -9915,7 +10077,7 @@
                   <a:srgbClr val="5A0A7A"/>
                 </a:solidFill>
               </a:rPr>
-              <a:t>Homework for your intuition</a:t>
+              <a:t>Beyond one thread</a:t>
             </a:r>
           </a:p>
         </p:txBody>
@@ -9928,8 +10090,8 @@
         </p:nvSpPr>
         <p:spPr>
           <a:xfrm>
-            <a:off x="731520" y="1828800"/>
-            <a:ext cx="10789920" cy="4754880"/>
+            <a:off x="731520" y="1645920"/>
+            <a:ext cx="10789920" cy="4937760"/>
           </a:xfrm>
           <a:prstGeom prst="rect">
             <a:avLst/>
@@ -9944,43 +10106,56 @@
           <a:p>
             <a:pPr>
               <a:spcAft>
-                <a:spcPts val="0"/>
-              </a:spcAft>
-            </a:pPr>
-            <a:r>
-              <a:rPr sz="2200">
-                <a:solidFill>
-                  <a:srgbClr val="212121"/>
-                </a:solidFill>
-                <a:latin typeface="Courier New"/>
-              </a:rPr>
-              <a:t>double w = 0.1 + 0.2;</a:t>
-            </a:r>
-          </a:p>
-          <a:p>
-            <a:pPr>
-              <a:spcAft>
-                <a:spcPts val="0"/>
-              </a:spcAft>
-            </a:pPr>
-            <a:r>
-              <a:rPr sz="2200">
-                <a:solidFill>
-                  <a:srgbClr val="212121"/>
-                </a:solidFill>
-                <a:latin typeface="Courier New"/>
-              </a:rPr>
-              <a:t>assert(w == 0.3);</a:t>
-            </a:r>
-          </a:p>
-          <a:p>
-            <a:pPr>
-              <a:spcAft>
-                <a:spcPts val="800"/>
-              </a:spcAft>
-            </a:pPr>
-            <a:r>
-              <a:rPr sz="2600">
+                <a:spcPts val="800"/>
+              </a:spcAft>
+            </a:pPr>
+            <a:r>
+              <a:rPr sz="2400">
+                <a:solidFill>
+                  <a:srgbClr val="212121"/>
+                </a:solidFill>
+              </a:rPr>
+              <a:t>Two threads of two and one statements already have three interleavings. Real code has billions.</a:t>
+            </a:r>
+          </a:p>
+          <a:p>
+            <a:pPr>
+              <a:spcAft>
+                <a:spcPts val="800"/>
+              </a:spcAft>
+            </a:pPr>
+            <a:r>
+              <a:rPr sz="2400">
+                <a:solidFill>
+                  <a:srgbClr val="212121"/>
+                </a:solidFill>
+              </a:rPr>
+              <a:t>Run the program a million times and the bad interleaving may never show up — Therac-25's bug hid exactly this way.</a:t>
+            </a:r>
+          </a:p>
+          <a:p>
+            <a:pPr>
+              <a:spcAft>
+                <a:spcPts val="800"/>
+              </a:spcAft>
+            </a:pPr>
+            <a:r>
+              <a:rPr sz="2400">
+                <a:solidFill>
+                  <a:srgbClr val="212121"/>
+                </a:solidFill>
+              </a:rPr>
+              <a:t>A model checker enumerates every interleaving up to a bound, including the one that kills your assertion.</a:t>
+            </a:r>
+          </a:p>
+          <a:p>
+            <a:pPr>
+              <a:spcAft>
+                <a:spcPts val="800"/>
+              </a:spcAft>
+            </a:pPr>
+            <a:r>
+              <a:rPr sz="2400">
                 <a:solidFill>
                   <a:srgbClr val="212121"/>
                 </a:solidFill>
@@ -9995,57 +10170,12 @@
               </a:spcAft>
             </a:pPr>
             <a:r>
-              <a:rPr sz="2600">
-                <a:solidFill>
-                  <a:srgbClr val="212121"/>
-                </a:solidFill>
-              </a:rPr>
-              <a:t>FAILED or SUCCESSFUL?</a:t>
-            </a:r>
-          </a:p>
-          <a:p>
-            <a:pPr>
-              <a:spcAft>
-                <a:spcPts val="800"/>
-              </a:spcAft>
-            </a:pPr>
-            <a:r>
-              <a:rPr sz="2600">
-                <a:solidFill>
-                  <a:srgbClr val="212121"/>
-                </a:solidFill>
-              </a:rPr>
-              <a:t/>
-            </a:r>
-          </a:p>
-          <a:p>
-            <a:pPr>
-              <a:spcAft>
-                <a:spcPts val="800"/>
-              </a:spcAft>
-            </a:pPr>
-            <a:r>
-              <a:rPr sz="2600">
-                <a:solidFill>
-                  <a:srgbClr val="212121"/>
-                </a:solidFill>
-              </a:rPr>
-              <a:t>Bring your answer to Session 2 — Lab 4 settles it with a solver that does exact IEEE-754 arithmetic.</a:t>
-            </a:r>
-          </a:p>
-          <a:p>
-            <a:pPr lvl="1">
-              <a:spcAft>
-                <a:spcPts val="800"/>
-              </a:spcAft>
-            </a:pPr>
-            <a:r>
               <a:rPr sz="2400">
                 <a:solidFill>
                   <a:srgbClr val="212121"/>
                 </a:solidFill>
               </a:rPr>
-              <a:t>Hint: 0.1 in binary is like 1/3 in decimal.</a:t>
+              <a:t>Session 2, Lab 4: you write down the killer interleaving before the tool finds it.</a:t>
             </a:r>
           </a:p>
         </p:txBody>
@@ -10290,7 +10420,7 @@
                   <a:srgbClr val="5A0A7A"/>
                 </a:solidFill>
               </a:rPr>
-              <a:t>Exercise 2 — Predict the Verdict (15 min)</a:t>
+              <a:t>Homework for your intuition</a:t>
             </a:r>
           </a:p>
         </p:txBody>
@@ -10303,8 +10433,8 @@
         </p:nvSpPr>
         <p:spPr>
           <a:xfrm>
-            <a:off x="731520" y="1463040"/>
-            <a:ext cx="10789920" cy="5120640"/>
+            <a:off x="731520" y="1828800"/>
+            <a:ext cx="10789920" cy="4754880"/>
           </a:xfrm>
           <a:prstGeom prst="rect">
             <a:avLst/>
@@ -10319,7 +10449,7 @@
           <a:p>
             <a:pPr>
               <a:spcAft>
-                <a:spcPts val="800"/>
+                <a:spcPts val="0"/>
               </a:spcAft>
             </a:pPr>
             <a:r>
@@ -10327,14 +10457,15 @@
                 <a:solidFill>
                   <a:srgbClr val="212121"/>
                 </a:solidFill>
-              </a:rPr>
-              <a:t>Groups of 3–4. Three short C programs on the handout (predict1.c, predict2.c, predict3.c).</a:t>
-            </a:r>
-          </a:p>
-          <a:p>
-            <a:pPr>
-              <a:spcAft>
-                <a:spcPts val="800"/>
+                <a:latin typeface="Courier New"/>
+              </a:rPr>
+              <a:t>double w = 0.1 + 0.2;</a:t>
+            </a:r>
+          </a:p>
+          <a:p>
+            <a:pPr>
+              <a:spcAft>
+                <a:spcPts val="0"/>
               </a:spcAft>
             </a:pPr>
             <a:r>
@@ -10342,8 +10473,69 @@
                 <a:solidFill>
                   <a:srgbClr val="212121"/>
                 </a:solidFill>
-              </a:rPr>
-              <a:t>For each program, write down BEFORE we run anything:</a:t>
+                <a:latin typeface="Courier New"/>
+              </a:rPr>
+              <a:t>assert(w == 0.3);</a:t>
+            </a:r>
+          </a:p>
+          <a:p>
+            <a:pPr>
+              <a:spcAft>
+                <a:spcPts val="800"/>
+              </a:spcAft>
+            </a:pPr>
+            <a:r>
+              <a:rPr sz="2600">
+                <a:solidFill>
+                  <a:srgbClr val="212121"/>
+                </a:solidFill>
+              </a:rPr>
+              <a:t/>
+            </a:r>
+          </a:p>
+          <a:p>
+            <a:pPr>
+              <a:spcAft>
+                <a:spcPts val="800"/>
+              </a:spcAft>
+            </a:pPr>
+            <a:r>
+              <a:rPr sz="2600">
+                <a:solidFill>
+                  <a:srgbClr val="212121"/>
+                </a:solidFill>
+              </a:rPr>
+              <a:t>FAILED or SUCCESSFUL?</a:t>
+            </a:r>
+          </a:p>
+          <a:p>
+            <a:pPr>
+              <a:spcAft>
+                <a:spcPts val="800"/>
+              </a:spcAft>
+            </a:pPr>
+            <a:r>
+              <a:rPr sz="2600">
+                <a:solidFill>
+                  <a:srgbClr val="212121"/>
+                </a:solidFill>
+              </a:rPr>
+              <a:t/>
+            </a:r>
+          </a:p>
+          <a:p>
+            <a:pPr>
+              <a:spcAft>
+                <a:spcPts val="800"/>
+              </a:spcAft>
+            </a:pPr>
+            <a:r>
+              <a:rPr sz="2600">
+                <a:solidFill>
+                  <a:srgbClr val="212121"/>
+                </a:solidFill>
+              </a:rPr>
+              <a:t>Bring your answer to Session 2 — Lab 4 settles it with a solver that does exact IEEE-754 arithmetic.</a:t>
             </a:r>
           </a:p>
           <a:p>
@@ -10353,42 +10545,12 @@
               </a:spcAft>
             </a:pPr>
             <a:r>
-              <a:rPr sz="2000">
-                <a:solidFill>
-                  <a:srgbClr val="212121"/>
-                </a:solidFill>
-              </a:rPr>
-              <a:t>Will the model checker say VERIFICATION FAILED or SUCCESSFUL?</a:t>
-            </a:r>
-          </a:p>
-          <a:p>
-            <a:pPr lvl="1">
-              <a:spcAft>
-                <a:spcPts val="800"/>
-              </a:spcAft>
-            </a:pPr>
-            <a:r>
-              <a:rPr sz="2000">
-                <a:solidFill>
-                  <a:srgbClr val="212121"/>
-                </a:solidFill>
-              </a:rPr>
-              <a:t>If FAILED — which line is the culprit?</a:t>
-            </a:r>
-          </a:p>
-          <a:p>
-            <a:pPr>
-              <a:spcAft>
-                <a:spcPts val="800"/>
-              </a:spcAft>
-            </a:pPr>
-            <a:r>
-              <a:rPr sz="2200">
-                <a:solidFill>
-                  <a:srgbClr val="212121"/>
-                </a:solidFill>
-              </a:rPr>
-              <a:t>Then we run ESBMC live and settle every bet.</a:t>
+              <a:rPr sz="2400">
+                <a:solidFill>
+                  <a:srgbClr val="212121"/>
+                </a:solidFill>
+              </a:rPr>
+              <a:t>Hint: 0.1 in binary is like 1/3 in decimal.</a:t>
             </a:r>
           </a:p>
         </p:txBody>
@@ -10439,7 +10601,7 @@
                   <a:srgbClr val="5A0A7A"/>
                 </a:solidFill>
               </a:rPr>
-              <a:t>Who uses this? — Model checking</a:t>
+              <a:t>Exercise 2 — Predict the Verdict (15 min)</a:t>
             </a:r>
           </a:p>
         </p:txBody>
@@ -10477,7 +10639,7 @@
                   <a:srgbClr val="212121"/>
                 </a:solidFill>
               </a:rPr>
-              <a:t>Amazon Web Services — CBMC proves memory safety of the TLS library s2n; bounded proofs run in CI on every commit</a:t>
+              <a:t>Groups of 3–4. Three short C programs on the handout (predict1.c, predict2.c, predict3.c).</a:t>
             </a:r>
           </a:p>
           <a:p>
@@ -10492,7 +10654,37 @@
                   <a:srgbClr val="212121"/>
                 </a:solidFill>
               </a:rPr>
-              <a:t>ESBMC / CBMC — the tools from tonight's demos; compete yearly in SV-COMP on tens of thousands of benchmarks</a:t>
+              <a:t>For each program, write down BEFORE we run anything:</a:t>
+            </a:r>
+          </a:p>
+          <a:p>
+            <a:pPr lvl="1">
+              <a:spcAft>
+                <a:spcPts val="800"/>
+              </a:spcAft>
+            </a:pPr>
+            <a:r>
+              <a:rPr sz="2000">
+                <a:solidFill>
+                  <a:srgbClr val="212121"/>
+                </a:solidFill>
+              </a:rPr>
+              <a:t>Will the model checker say VERIFICATION FAILED or SUCCESSFUL?</a:t>
+            </a:r>
+          </a:p>
+          <a:p>
+            <a:pPr lvl="1">
+              <a:spcAft>
+                <a:spcPts val="800"/>
+              </a:spcAft>
+            </a:pPr>
+            <a:r>
+              <a:rPr sz="2000">
+                <a:solidFill>
+                  <a:srgbClr val="212121"/>
+                </a:solidFill>
+              </a:rPr>
+              <a:t>If FAILED — which line is the culprit?</a:t>
             </a:r>
           </a:p>
           <a:p>
@@ -10507,7 +10699,7 @@
                   <a:srgbClr val="212121"/>
                 </a:solidFill>
               </a:rPr>
-              <a:t>The counterexample you saw for getpassword.c is the same artefact AWS engineers read when a proof fails</a:t>
+              <a:t>Then we run ESBMC live and settle every bet.</a:t>
             </a:r>
           </a:p>
         </p:txBody>
@@ -10558,7 +10750,7 @@
                   <a:srgbClr val="5A0A7A"/>
                 </a:solidFill>
               </a:rPr>
-              <a:t>Who uses this? — Symbolic execution &amp; fuzzing</a:t>
+              <a:t>Who uses this? — Model checking</a:t>
             </a:r>
           </a:p>
         </p:txBody>
@@ -10596,7 +10788,7 @@
                   <a:srgbClr val="212121"/>
                 </a:solidFill>
               </a:rPr>
-              <a:t>KLEE found 56 serious bugs in coreutils, busybox and Minix — including three in coreutils that had survived 15 years of testing</a:t>
+              <a:t>Amazon Web Services — CBMC proves memory safety of the TLS library s2n; bounded proofs run in CI on every commit</a:t>
             </a:r>
           </a:p>
           <a:p>
@@ -10611,7 +10803,7 @@
                   <a:srgbClr val="212121"/>
                 </a:solidFill>
               </a:rPr>
-              <a:t>Microsoft SAGE fuzzed Windows file parsers with symbolic execution; it found ~1/3 of all bugs caught by file fuzzing during Windows 7 development — running last, after every other tool</a:t>
+              <a:t>ESBMC / CBMC — the tools from tonight's demos; compete yearly in SV-COMP on tens of thousands of benchmarks</a:t>
             </a:r>
           </a:p>
           <a:p>
@@ -10626,22 +10818,7 @@
                   <a:srgbClr val="212121"/>
                 </a:solidFill>
               </a:rPr>
-              <a:t>AFL / OSS-Fuzz — Google fuzzes ~1,000 open-source projects continuously; tens of thousands of bugs found</a:t>
-            </a:r>
-          </a:p>
-          <a:p>
-            <a:pPr>
-              <a:spcAft>
-                <a:spcPts val="800"/>
-              </a:spcAft>
-            </a:pPr>
-            <a:r>
-              <a:rPr sz="2200">
-                <a:solidFill>
-                  <a:srgbClr val="212121"/>
-                </a:solidFill>
-              </a:rPr>
-              <a:t>The pragmatic cousin of verification: no proofs, ruthless effectiveness</a:t>
+              <a:t>The counterexample you saw for getpassword.c is the same artefact AWS engineers read when a proof fails</a:t>
             </a:r>
           </a:p>
         </p:txBody>
@@ -10692,7 +10869,7 @@
                   <a:srgbClr val="5A0A7A"/>
                 </a:solidFill>
               </a:rPr>
-              <a:t>Who uses this? — Proofs all the way up</a:t>
+              <a:t>Who uses this? — Symbolic execution &amp; fuzzing</a:t>
             </a:r>
           </a:p>
         </p:txBody>
@@ -10730,7 +10907,7 @@
                   <a:srgbClr val="212121"/>
                 </a:solidFill>
               </a:rPr>
-              <a:t>Astrée (abstract interpretation) proved absence of runtime errors in the Airbus A340 fly-by-wire code — 132,000 lines of C — and was then applied to the A380</a:t>
+              <a:t>KLEE found 56 serious bugs in coreutils, busybox and Minix — including three in coreutils that had survived 15 years of testing</a:t>
             </a:r>
           </a:p>
           <a:p>
@@ -10745,7 +10922,7 @@
                   <a:srgbClr val="212121"/>
                 </a:solidFill>
               </a:rPr>
-              <a:t>seL4 — an OS microkernel with a machine-checked proof of functional correctness</a:t>
+              <a:t>Microsoft SAGE fuzzed Windows file parsers with symbolic execution; it found ~1/3 of all bugs caught by file fuzzing during Windows 7 development — running last, after every other tool</a:t>
             </a:r>
           </a:p>
           <a:p>
@@ -10760,7 +10937,22 @@
                   <a:srgbClr val="212121"/>
                 </a:solidFill>
               </a:rPr>
-              <a:t>CompCert — a C compiler with a proof that compilation preserves semantics; six CPU-years of fuzzing found no wrong-code bugs in its verified core, while every other compiler tested failed</a:t>
+              <a:t>AFL / OSS-Fuzz — Google fuzzes ~1,000 open-source projects continuously; tens of thousands of bugs found</a:t>
+            </a:r>
+          </a:p>
+          <a:p>
+            <a:pPr>
+              <a:spcAft>
+                <a:spcPts val="800"/>
+              </a:spcAft>
+            </a:pPr>
+            <a:r>
+              <a:rPr sz="2200">
+                <a:solidFill>
+                  <a:srgbClr val="212121"/>
+                </a:solidFill>
+              </a:rPr>
+              <a:t>The pragmatic cousin of verification: no proofs, ruthless effectiveness</a:t>
             </a:r>
           </a:p>
         </p:txBody>
@@ -10811,7 +11003,7 @@
                   <a:srgbClr val="5A0A7A"/>
                 </a:solidFill>
               </a:rPr>
-              <a:t>Discussion</a:t>
+              <a:t>Who uses this? — Proofs all the way up</a:t>
             </a:r>
           </a:p>
         </p:txBody>
@@ -10824,8 +11016,8 @@
         </p:nvSpPr>
         <p:spPr>
           <a:xfrm>
-            <a:off x="731520" y="2194560"/>
-            <a:ext cx="10789920" cy="4389120"/>
+            <a:off x="731520" y="1463040"/>
+            <a:ext cx="10789920" cy="5120640"/>
           </a:xfrm>
           <a:prstGeom prst="rect">
             <a:avLst/>
@@ -10844,42 +11036,42 @@
               </a:spcAft>
             </a:pPr>
             <a:r>
-              <a:rPr sz="2800">
-                <a:solidFill>
-                  <a:srgbClr val="212121"/>
-                </a:solidFill>
-              </a:rPr>
-              <a:t>If verification can prove the absence of bugs…</a:t>
-            </a:r>
-          </a:p>
-          <a:p>
-            <a:pPr>
-              <a:spcAft>
-                <a:spcPts val="800"/>
-              </a:spcAft>
-            </a:pPr>
-            <a:r>
-              <a:rPr sz="2800">
-                <a:solidFill>
-                  <a:srgbClr val="212121"/>
-                </a:solidFill>
-              </a:rPr>
-              <a:t>why isn't all software verified?</a:t>
-            </a:r>
-          </a:p>
-          <a:p>
-            <a:pPr>
-              <a:spcAft>
-                <a:spcPts val="800"/>
-              </a:spcAft>
-            </a:pPr>
-            <a:r>
-              <a:rPr sz="2800">
-                <a:solidFill>
-                  <a:srgbClr val="212121"/>
-                </a:solidFill>
-              </a:rPr>
-              <a:t>(Let's collect reasons — then I'll tell you which ones the industry actually cites.)</a:t>
+              <a:rPr sz="2200">
+                <a:solidFill>
+                  <a:srgbClr val="212121"/>
+                </a:solidFill>
+              </a:rPr>
+              <a:t>Astrée (abstract interpretation) proved absence of runtime errors in the Airbus A340 fly-by-wire code — 132,000 lines of C — and was then applied to the A380</a:t>
+            </a:r>
+          </a:p>
+          <a:p>
+            <a:pPr>
+              <a:spcAft>
+                <a:spcPts val="800"/>
+              </a:spcAft>
+            </a:pPr>
+            <a:r>
+              <a:rPr sz="2200">
+                <a:solidFill>
+                  <a:srgbClr val="212121"/>
+                </a:solidFill>
+              </a:rPr>
+              <a:t>seL4 — an OS microkernel with a machine-checked proof of functional correctness</a:t>
+            </a:r>
+          </a:p>
+          <a:p>
+            <a:pPr>
+              <a:spcAft>
+                <a:spcPts val="800"/>
+              </a:spcAft>
+            </a:pPr>
+            <a:r>
+              <a:rPr sz="2200">
+                <a:solidFill>
+                  <a:srgbClr val="212121"/>
+                </a:solidFill>
+              </a:rPr>
+              <a:t>CompCert — a C compiler with a proof that compilation preserves semantics; six CPU-years of fuzzing found no wrong-code bugs in its verified core, while every other compiler tested failed</a:t>
             </a:r>
           </a:p>
         </p:txBody>
@@ -10930,6 +11122,125 @@
                   <a:srgbClr val="5A0A7A"/>
                 </a:solidFill>
               </a:rPr>
+              <a:t>Discussion</a:t>
+            </a:r>
+          </a:p>
+        </p:txBody>
+      </p:sp>
+      <p:sp>
+        <p:nvSpPr>
+          <p:cNvPr id="3" name="TextBox 2"/>
+          <p:cNvSpPr txBox="1"/>
+          <p:nvPr/>
+        </p:nvSpPr>
+        <p:spPr>
+          <a:xfrm>
+            <a:off x="731520" y="2194560"/>
+            <a:ext cx="10789920" cy="4389120"/>
+          </a:xfrm>
+          <a:prstGeom prst="rect">
+            <a:avLst/>
+          </a:prstGeom>
+          <a:noFill/>
+        </p:spPr>
+        <p:txBody>
+          <a:bodyPr wrap="square">
+            <a:spAutoFit/>
+          </a:bodyPr>
+          <a:lstStyle/>
+          <a:p>
+            <a:pPr>
+              <a:spcAft>
+                <a:spcPts val="800"/>
+              </a:spcAft>
+            </a:pPr>
+            <a:r>
+              <a:rPr sz="2800">
+                <a:solidFill>
+                  <a:srgbClr val="212121"/>
+                </a:solidFill>
+              </a:rPr>
+              <a:t>If verification can prove the absence of bugs…</a:t>
+            </a:r>
+          </a:p>
+          <a:p>
+            <a:pPr>
+              <a:spcAft>
+                <a:spcPts val="800"/>
+              </a:spcAft>
+            </a:pPr>
+            <a:r>
+              <a:rPr sz="2800">
+                <a:solidFill>
+                  <a:srgbClr val="212121"/>
+                </a:solidFill>
+              </a:rPr>
+              <a:t>why isn't all software verified?</a:t>
+            </a:r>
+          </a:p>
+          <a:p>
+            <a:pPr>
+              <a:spcAft>
+                <a:spcPts val="800"/>
+              </a:spcAft>
+            </a:pPr>
+            <a:r>
+              <a:rPr sz="2800">
+                <a:solidFill>
+                  <a:srgbClr val="212121"/>
+                </a:solidFill>
+              </a:rPr>
+              <a:t>(Let's collect reasons — then I'll tell you which ones the industry actually cites.)</a:t>
+            </a:r>
+          </a:p>
+        </p:txBody>
+      </p:sp>
+    </p:spTree>
+  </p:cSld>
+  <p:clrMapOvr>
+    <a:masterClrMapping/>
+  </p:clrMapOvr>
+</p:sld>
+</file>
+
+<file path=ppt/slides/slide46.xml><?xml version="1.0" encoding="utf-8"?>
+<p:sld xmlns:a="http://schemas.openxmlformats.org/drawingml/2006/main" xmlns:p="http://schemas.openxmlformats.org/presentationml/2006/main" xmlns:r="http://schemas.openxmlformats.org/officeDocument/2006/relationships">
+  <p:cSld>
+    <p:spTree>
+      <p:nvGrpSpPr>
+        <p:cNvPr id="1" name=""/>
+        <p:cNvGrpSpPr/>
+        <p:nvPr/>
+      </p:nvGrpSpPr>
+      <p:grpSpPr/>
+      <p:sp>
+        <p:nvSpPr>
+          <p:cNvPr id="2" name="TextBox 1"/>
+          <p:cNvSpPr txBox="1"/>
+          <p:nvPr/>
+        </p:nvSpPr>
+        <p:spPr>
+          <a:xfrm>
+            <a:off x="548640" y="365760"/>
+            <a:ext cx="11064240" cy="1005840"/>
+          </a:xfrm>
+          <a:prstGeom prst="rect">
+            <a:avLst/>
+          </a:prstGeom>
+          <a:noFill/>
+        </p:spPr>
+        <p:txBody>
+          <a:bodyPr wrap="square">
+            <a:spAutoFit/>
+          </a:bodyPr>
+          <a:lstStyle/>
+          <a:p>
+            <a:r>
+              <a:rPr sz="3600" b="1">
+                <a:solidFill>
+                  <a:srgbClr val="5A0A7A"/>
+                </a:solidFill>
+              </a:rPr>
               <a:t>Closing quiz</a:t>
             </a:r>
           </a:p>
@@ -11041,7 +11352,7 @@
 </p:sld>
 </file>
 
-<file path=ppt/slides/slide46.xml><?xml version="1.0" encoding="utf-8"?>
+<file path=ppt/slides/slide47.xml><?xml version="1.0" encoding="utf-8"?>
 <p:sld xmlns:a="http://schemas.openxmlformats.org/drawingml/2006/main" xmlns:p="http://schemas.openxmlformats.org/presentationml/2006/main" xmlns:r="http://schemas.openxmlformats.org/officeDocument/2006/relationships">
   <p:cSld>
     <p:spTree>
@@ -12377,7 +12688,7 @@
                   <a:srgbClr val="5A0A7A"/>
                 </a:solidFill>
               </a:rPr>
-              <a:t>Safety and security: two sides of one coin</a:t>
+              <a:t>When the check itself is wrong</a:t>
             </a:r>
           </a:p>
         </p:txBody>
@@ -12390,8 +12701,8 @@
         </p:nvSpPr>
         <p:spPr>
           <a:xfrm>
-            <a:off x="731520" y="1371600"/>
-            <a:ext cx="10789920" cy="5212080"/>
+            <a:off x="731520" y="1463040"/>
+            <a:ext cx="10789920" cy="5120640"/>
           </a:xfrm>
           <a:prstGeom prst="rect">
             <a:avLst/>
@@ -12410,237 +12721,244 @@
               </a:spcAft>
             </a:pPr>
             <a:r>
-              <a:rPr sz="2400">
-                <a:solidFill>
-                  <a:srgbClr val="212121"/>
-                </a:solidFill>
-              </a:rPr>
-              <a:t>Safety — the system must not harm the world (Therac-25, Ariane 5).</a:t>
-            </a:r>
-          </a:p>
-          <a:p>
-            <a:pPr>
-              <a:spcAft>
-                <a:spcPts val="800"/>
-              </a:spcAft>
-            </a:pPr>
-            <a:r>
-              <a:rPr sz="2400">
-                <a:solidFill>
-                  <a:srgbClr val="212121"/>
-                </a:solidFill>
-              </a:rPr>
-              <a:t>Security — the world must not harm the system (getPassword).</a:t>
-            </a:r>
-          </a:p>
-          <a:p>
-            <a:pPr>
-              <a:spcAft>
-                <a:spcPts val="800"/>
-              </a:spcAft>
-            </a:pPr>
-            <a:r>
-              <a:rPr sz="2400">
-                <a:solidFill>
-                  <a:srgbClr val="212121"/>
-                </a:solidFill>
-              </a:rPr>
-              <a:t>Same root cause tonight: the program reaches a state it was never meant to reach.</a:t>
-            </a:r>
-          </a:p>
-        </p:txBody>
-      </p:sp>
-      <p:graphicFrame>
-        <p:nvGraphicFramePr>
-          <p:cNvPr id="4" name="Table 3"/>
-          <p:cNvGraphicFramePr>
-            <a:graphicFrameLocks noGrp="1"/>
-          </p:cNvGraphicFramePr>
+              <a:rPr sz="2000">
+                <a:solidFill>
+                  <a:srgbClr val="212121"/>
+                </a:solidFill>
+              </a:rPr>
+              <a:t>No overflow, no guessed secret — this time the access check has a one-character bug, and ESBMC walks straight through it.</a:t>
+            </a:r>
+          </a:p>
+          <a:p>
+            <a:pPr>
+              <a:spcAft>
+                <a:spcPts val="0"/>
+              </a:spcAft>
+            </a:pPr>
+            <a:r>
+              <a:rPr sz="1600">
+                <a:solidFill>
+                  <a:srgbClr val="212121"/>
+                </a:solidFill>
+                <a:latin typeface="Courier New"/>
+              </a:rPr>
+              <a:t>  int access_granted(const char *buf) {</a:t>
+            </a:r>
+          </a:p>
+          <a:p>
+            <a:pPr>
+              <a:spcAft>
+                <a:spcPts val="0"/>
+              </a:spcAft>
+            </a:pPr>
+            <a:r>
+              <a:rPr sz="1600">
+                <a:solidFill>
+                  <a:srgbClr val="212121"/>
+                </a:solidFill>
+                <a:latin typeface="Courier New"/>
+              </a:rPr>
+              <a:t>    return strncmp(buf, "SMT", strlen(buf)) == 0;</a:t>
+            </a:r>
+          </a:p>
+          <a:p>
+            <a:pPr>
+              <a:spcAft>
+                <a:spcPts val="0"/>
+              </a:spcAft>
+            </a:pPr>
+            <a:r>
+              <a:rPr sz="1600">
+                <a:solidFill>
+                  <a:srgbClr val="212121"/>
+                </a:solidFill>
+                <a:latin typeface="Courier New"/>
+              </a:rPr>
+              <a:t>  }   /* compares only strlen(buf) chars → any prefix passes */</a:t>
+            </a:r>
+          </a:p>
+          <a:p>
+            <a:pPr>
+              <a:spcAft>
+                <a:spcPts val="0"/>
+              </a:spcAft>
+            </a:pPr>
+            <a:r>
+              <a:rPr sz="1600">
+                <a:solidFill>
+                  <a:srgbClr val="212121"/>
+                </a:solidFill>
+                <a:latin typeface="Courier New"/>
+              </a:rPr>
+              <a:t/>
+            </a:r>
+          </a:p>
+          <a:p>
+            <a:pPr>
+              <a:spcAft>
+                <a:spcPts val="0"/>
+              </a:spcAft>
+            </a:pPr>
+            <a:r>
+              <a:rPr sz="1600">
+                <a:solidFill>
+                  <a:srgbClr val="212121"/>
+                </a:solidFill>
+                <a:latin typeface="Courier New"/>
+              </a:rPr>
+              <a:t>  if (access_granted(buf) &amp;&amp; strcmp(buf, "SMT") != 0)</a:t>
+            </a:r>
+          </a:p>
+          <a:p>
+            <a:pPr>
+              <a:spcAft>
+                <a:spcPts val="0"/>
+              </a:spcAft>
+            </a:pPr>
+            <a:r>
+              <a:rPr sz="1600">
+                <a:solidFill>
+                  <a:srgbClr val="212121"/>
+                </a:solidFill>
+                <a:latin typeface="Courier New"/>
+              </a:rPr>
+              <a:t>    assert(0);     /* got in WITHOUT the password */</a:t>
+            </a:r>
+          </a:p>
+          <a:p>
+            <a:pPr>
+              <a:spcAft>
+                <a:spcPts val="0"/>
+              </a:spcAft>
+            </a:pPr>
+            <a:r>
+              <a:rPr sz="1600">
+                <a:solidFill>
+                  <a:srgbClr val="212121"/>
+                </a:solidFill>
+                <a:latin typeface="Courier New"/>
+              </a:rPr>
+              <a:t/>
+            </a:r>
+          </a:p>
+          <a:p>
+            <a:pPr>
+              <a:spcAft>
+                <a:spcPts val="0"/>
+              </a:spcAft>
+            </a:pPr>
+            <a:r>
+              <a:rPr sz="1600">
+                <a:solidFill>
+                  <a:srgbClr val="212121"/>
+                </a:solidFill>
+                <a:latin typeface="Courier New"/>
+              </a:rPr>
+              <a:t>$ esbmc getpassword.c --unwind 8 --generate-ctest-testcase</a:t>
+            </a:r>
+          </a:p>
+          <a:p>
+            <a:pPr>
+              <a:spcAft>
+                <a:spcPts val="0"/>
+              </a:spcAft>
+            </a:pPr>
+            <a:r>
+              <a:rPr sz="1600">
+                <a:solidFill>
+                  <a:srgbClr val="212121"/>
+                </a:solidFill>
+                <a:latin typeface="Courier New"/>
+              </a:rPr>
+              <a:t>  buf = { 0, 0, 0 }            → the empty string ""</a:t>
+            </a:r>
+          </a:p>
+          <a:p>
+            <a:pPr>
+              <a:spcAft>
+                <a:spcPts val="0"/>
+              </a:spcAft>
+            </a:pPr>
+            <a:r>
+              <a:rPr sz="1600">
+                <a:solidFill>
+                  <a:srgbClr val="212121"/>
+                </a:solidFill>
+                <a:latin typeface="Courier New"/>
+              </a:rPr>
+              <a:t>VERIFICATION FAILED</a:t>
+            </a:r>
+          </a:p>
+          <a:p>
+            <a:pPr>
+              <a:spcAft>
+                <a:spcPts val="800"/>
+              </a:spcAft>
+            </a:pPr>
+            <a:r>
+              <a:rPr sz="2000">
+                <a:solidFill>
+                  <a:srgbClr val="212121"/>
+                </a:solidFill>
+              </a:rPr>
+              <a:t/>
+            </a:r>
+          </a:p>
+          <a:p>
+            <a:pPr>
+              <a:spcAft>
+                <a:spcPts val="800"/>
+              </a:spcAft>
+            </a:pPr>
+            <a:r>
+              <a:rPr sz="2000">
+                <a:solidFill>
+                  <a:srgbClr val="212121"/>
+                </a:solidFill>
+              </a:rPr>
+              <a:t>ESBMC grants itself access by typing nothing: "" is a prefix of "SMT", so strncmp compares zero characters and returns 0. The fix is strcmp — compare the whole password.</a:t>
+            </a:r>
+          </a:p>
+        </p:txBody>
+      </p:sp>
+      <p:sp>
+        <p:nvSpPr>
+          <p:cNvPr id="4" name="TextBox 3"/>
+          <p:cNvSpPr txBox="1"/>
           <p:nvPr/>
-        </p:nvGraphicFramePr>
-        <p:xfrm>
-          <a:off x="731520" y="3657600"/>
-          <a:ext cx="10698480" cy="1463040"/>
-        </p:xfrm>
-        <a:graphic>
-          <a:graphicData uri="http://schemas.openxmlformats.org/drawingml/2006/table">
-            <a:tbl>
-              <a:tblPr firstRow="1" bandRow="1">
-                <a:tableStyleId>{5C22544A-7EE6-4342-B048-85BDC9FD1C3A}</a:tableStyleId>
-              </a:tblPr>
-              <a:tblGrid>
-                <a:gridCol w="2560320"/>
-                <a:gridCol w="3840480"/>
-                <a:gridCol w="4297680"/>
-              </a:tblGrid>
-              <a:tr h="365760">
-                <a:tc>
-                  <a:txBody>
-                    <a:bodyPr/>
-                    <a:lstStyle/>
-                    <a:p>
-                      <a:r>
-                        <a:rPr sz="1800" b="1"/>
-                        <a:t>Security goal</a:t>
-                      </a:r>
-                    </a:p>
-                  </a:txBody>
-                  <a:tcPr/>
-                </a:tc>
-                <a:tc>
-                  <a:txBody>
-                    <a:bodyPr/>
-                    <a:lstStyle/>
-                    <a:p>
-                      <a:r>
-                        <a:rPr sz="1800" b="1"/>
-                        <a:t>Meaning</a:t>
-                      </a:r>
-                    </a:p>
-                  </a:txBody>
-                  <a:tcPr/>
-                </a:tc>
-                <a:tc>
-                  <a:txBody>
-                    <a:bodyPr/>
-                    <a:lstStyle/>
-                    <a:p>
-                      <a:r>
-                        <a:rPr sz="1800" b="1"/>
-                        <a:t>getPassword breaks it?</a:t>
-                      </a:r>
-                    </a:p>
-                  </a:txBody>
-                  <a:tcPr/>
-                </a:tc>
-              </a:tr>
-              <a:tr h="365760">
-                <a:tc>
-                  <a:txBody>
-                    <a:bodyPr/>
-                    <a:lstStyle/>
-                    <a:p>
-                      <a:r>
-                        <a:rPr sz="1800"/>
-                        <a:t>Confidentiality</a:t>
-                      </a:r>
-                    </a:p>
-                  </a:txBody>
-                  <a:tcPr/>
-                </a:tc>
-                <a:tc>
-                  <a:txBody>
-                    <a:bodyPr/>
-                    <a:lstStyle/>
-                    <a:p>
-                      <a:r>
-                        <a:rPr sz="1800"/>
-                        <a:t>no unauthorised reading</a:t>
-                      </a:r>
-                    </a:p>
-                  </a:txBody>
-                  <a:tcPr/>
-                </a:tc>
-                <a:tc>
-                  <a:txBody>
-                    <a:bodyPr/>
-                    <a:lstStyle/>
-                    <a:p>
-                      <a:r>
-                        <a:rPr sz="1800"/>
-                        <a:t>yes — secrets behind the check</a:t>
-                      </a:r>
-                    </a:p>
-                  </a:txBody>
-                  <a:tcPr/>
-                </a:tc>
-              </a:tr>
-              <a:tr h="365760">
-                <a:tc>
-                  <a:txBody>
-                    <a:bodyPr/>
-                    <a:lstStyle/>
-                    <a:p>
-                      <a:r>
-                        <a:rPr sz="1800"/>
-                        <a:t>Integrity</a:t>
-                      </a:r>
-                    </a:p>
-                  </a:txBody>
-                  <a:tcPr/>
-                </a:tc>
-                <a:tc>
-                  <a:txBody>
-                    <a:bodyPr/>
-                    <a:lstStyle/>
-                    <a:p>
-                      <a:r>
-                        <a:rPr sz="1800"/>
-                        <a:t>no unauthorised writing</a:t>
-                      </a:r>
-                    </a:p>
-                  </a:txBody>
-                  <a:tcPr/>
-                </a:tc>
-                <a:tc>
-                  <a:txBody>
-                    <a:bodyPr/>
-                    <a:lstStyle/>
-                    <a:p>
-                      <a:r>
-                        <a:rPr sz="1800"/>
-                        <a:t>yes — the stack itself</a:t>
-                      </a:r>
-                    </a:p>
-                  </a:txBody>
-                  <a:tcPr/>
-                </a:tc>
-              </a:tr>
-              <a:tr h="365760">
-                <a:tc>
-                  <a:txBody>
-                    <a:bodyPr/>
-                    <a:lstStyle/>
-                    <a:p>
-                      <a:r>
-                        <a:rPr sz="1800"/>
-                        <a:t>Availability</a:t>
-                      </a:r>
-                    </a:p>
-                  </a:txBody>
-                  <a:tcPr/>
-                </a:tc>
-                <a:tc>
-                  <a:txBody>
-                    <a:bodyPr/>
-                    <a:lstStyle/>
-                    <a:p>
-                      <a:r>
-                        <a:rPr sz="1800"/>
-                        <a:t>service stays up</a:t>
-                      </a:r>
-                    </a:p>
-                  </a:txBody>
-                  <a:tcPr/>
-                </a:tc>
-                <a:tc>
-                  <a:txBody>
-                    <a:bodyPr/>
-                    <a:lstStyle/>
-                    <a:p>
-                      <a:r>
-                        <a:rPr sz="1800"/>
-                        <a:t>crash = denial of service</a:t>
-                      </a:r>
-                    </a:p>
-                  </a:txBody>
-                  <a:tcPr/>
-                </a:tc>
-              </a:tr>
-            </a:tbl>
-          </a:graphicData>
-        </a:graphic>
-      </p:graphicFrame>
+        </p:nvSpPr>
+        <p:spPr>
+          <a:xfrm>
+            <a:off x="731520" y="6400800"/>
+            <a:ext cx="10789920" cy="182880"/>
+          </a:xfrm>
+          <a:prstGeom prst="rect">
+            <a:avLst/>
+          </a:prstGeom>
+          <a:noFill/>
+        </p:spPr>
+        <p:txBody>
+          <a:bodyPr wrap="square">
+            <a:spAutoFit/>
+          </a:bodyPr>
+          <a:lstStyle/>
+          <a:p>
+            <a:pPr>
+              <a:spcAft>
+                <a:spcPts val="800"/>
+              </a:spcAft>
+            </a:pPr>
+            <a:r>
+              <a:rPr sz="1400">
+                <a:solidFill>
+                  <a:srgbClr val="212121"/>
+                </a:solidFill>
+              </a:rPr>
+              <a:t>session1-demos/strncmp-bypass/</a:t>
+            </a:r>
+          </a:p>
+        </p:txBody>
+      </p:sp>
     </p:spTree>
   </p:cSld>
   <p:clrMapOvr>

--- a/slides/session1/01-session1-fundamentals.pptx
+++ b/slides/session1/01-session1-fundamentals.pptx
@@ -12024,6 +12024,21 @@
                 </a:solidFill>
               </a:rPr>
               <a:t>Could a test suite find this? Only if someone thinks to type the right garbage.</a:t>
+            </a:r>
+          </a:p>
+          <a:p>
+            <a:pPr>
+              <a:spcAft>
+                <a:spcPts val="800"/>
+              </a:spcAft>
+            </a:pPr>
+            <a:r>
+              <a:rPr sz="2200">
+                <a:solidFill>
+                  <a:srgbClr val="212121"/>
+                </a:solidFill>
+              </a:rPr>
+              <a:t>ESBMC finds the overflow itself (CWE-787) — the door. The check is otherwise sound: no input but "SMT" passes it (provable). A non-password input that still gets in is the strncmp logic-flaw demo.</a:t>
             </a:r>
           </a:p>
         </p:txBody>

--- a/slides/session1/01-session1-fundamentals.pptx
+++ b/slides/session1/01-session1-fundamentals.pptx
@@ -5330,7 +5330,22 @@
                   <a:srgbClr val="212121"/>
                 </a:solidFill>
               </a:rPr>
-              <a:t>Most static analysers are sound but not complete (no missed bugs, but false alarms).</a:t>
+              <a:t>Sound static analysers — e.g. abstract interpretation — are sound but not complete by design (no missed bugs, but false alarms).</a:t>
+            </a:r>
+          </a:p>
+          <a:p>
+            <a:pPr>
+              <a:spcAft>
+                <a:spcPts val="800"/>
+              </a:spcAft>
+            </a:pPr>
+            <a:r>
+              <a:rPr sz="2400">
+                <a:solidFill>
+                  <a:srgbClr val="212121"/>
+                </a:solidFill>
+              </a:rPr>
+              <a:t>Most everyday bug-finders, by contrast, are unsound: they miss bugs to keep false alarms low.</a:t>
             </a:r>
           </a:p>
         </p:txBody>

--- a/slides/session1/01-session1-fundamentals.pptx
+++ b/slides/session1/01-session1-fundamentals.pptx
@@ -5345,7 +5345,7 @@
                   <a:srgbClr val="212121"/>
                 </a:solidFill>
               </a:rPr>
-              <a:t>Most everyday bug-finders, by contrast, are unsound: they miss bugs to keep false alarms low.</a:t>
+              <a:t>Most everyday bug-finders, by contrast, are unsound: they accept missed bugs to scale to real code and keep false alarms manageable.</a:t>
             </a:r>
           </a:p>
         </p:txBody>

--- a/slides/session1/01-session1-fundamentals.pptx
+++ b/slides/session1/01-session1-fundamentals.pptx
@@ -52,6 +52,7 @@
     <p:sldId id="300" r:id="rId51"/>
     <p:sldId id="301" r:id="rId52"/>
     <p:sldId id="302" r:id="rId53"/>
+    <p:sldId id="303" r:id="rId54"/>
   </p:sldIdLst>
   <p:sldSz cx="12191695" cy="6858000" type="screen4x3"/>
   <p:notesSz cx="6858000" cy="9144000"/>
@@ -5753,6 +5754,409 @@
                   <a:srgbClr val="5A0A7A"/>
                 </a:solidFill>
               </a:rPr>
+              <a:t>The techniques as real tools</a:t>
+            </a:r>
+          </a:p>
+        </p:txBody>
+      </p:sp>
+      <p:graphicFrame>
+        <p:nvGraphicFramePr>
+          <p:cNvPr id="3" name="Table 2"/>
+          <p:cNvGraphicFramePr>
+            <a:graphicFrameLocks noGrp="1"/>
+          </p:cNvGraphicFramePr>
+          <p:nvPr/>
+        </p:nvGraphicFramePr>
+        <p:xfrm>
+          <a:off x="731520" y="1280160"/>
+          <a:ext cx="10698480" cy="2560320"/>
+        </p:xfrm>
+        <a:graphic>
+          <a:graphicData uri="http://schemas.openxmlformats.org/drawingml/2006/table">
+            <a:tbl>
+              <a:tblPr firstRow="1" bandRow="1">
+                <a:tableStyleId>{5C22544A-7EE6-4342-B048-85BDC9FD1C3A}</a:tableStyleId>
+              </a:tblPr>
+              <a:tblGrid>
+                <a:gridCol w="2468880"/>
+                <a:gridCol w="4206240"/>
+                <a:gridCol w="4023360"/>
+              </a:tblGrid>
+              <a:tr h="365760">
+                <a:tc>
+                  <a:txBody>
+                    <a:bodyPr/>
+                    <a:lstStyle/>
+                    <a:p>
+                      <a:r>
+                        <a:rPr sz="1500" b="1"/>
+                        <a:t>Technique</a:t>
+                      </a:r>
+                    </a:p>
+                  </a:txBody>
+                  <a:tcPr/>
+                </a:tc>
+                <a:tc>
+                  <a:txBody>
+                    <a:bodyPr/>
+                    <a:lstStyle/>
+                    <a:p>
+                      <a:r>
+                        <a:rPr sz="1500" b="1"/>
+                        <a:t>In one line</a:t>
+                      </a:r>
+                    </a:p>
+                  </a:txBody>
+                  <a:tcPr/>
+                </a:tc>
+                <a:tc>
+                  <a:txBody>
+                    <a:bodyPr/>
+                    <a:lstStyle/>
+                    <a:p>
+                      <a:r>
+                        <a:rPr sz="1500" b="1"/>
+                        <a:t>Example tools</a:t>
+                      </a:r>
+                    </a:p>
+                  </a:txBody>
+                  <a:tcPr/>
+                </a:tc>
+              </a:tr>
+              <a:tr h="365760">
+                <a:tc>
+                  <a:txBody>
+                    <a:bodyPr/>
+                    <a:lstStyle/>
+                    <a:p>
+                      <a:r>
+                        <a:rPr sz="1500"/>
+                        <a:t>Testing &amp; fuzzing</a:t>
+                      </a:r>
+                    </a:p>
+                  </a:txBody>
+                  <a:tcPr/>
+                </a:tc>
+                <a:tc>
+                  <a:txBody>
+                    <a:bodyPr/>
+                    <a:lstStyle/>
+                    <a:p>
+                      <a:r>
+                        <a:rPr sz="1500"/>
+                        <a:t>run the code on many inputs</a:t>
+                      </a:r>
+                    </a:p>
+                  </a:txBody>
+                  <a:tcPr/>
+                </a:tc>
+                <a:tc>
+                  <a:txBody>
+                    <a:bodyPr/>
+                    <a:lstStyle/>
+                    <a:p>
+                      <a:r>
+                        <a:rPr sz="1500"/>
+                        <a:t>AFL++, libFuzzer, OSS-Fuzz</a:t>
+                      </a:r>
+                    </a:p>
+                  </a:txBody>
+                  <a:tcPr/>
+                </a:tc>
+              </a:tr>
+              <a:tr h="365760">
+                <a:tc>
+                  <a:txBody>
+                    <a:bodyPr/>
+                    <a:lstStyle/>
+                    <a:p>
+                      <a:r>
+                        <a:rPr sz="1500"/>
+                        <a:t>Symbolic execution</a:t>
+                      </a:r>
+                    </a:p>
+                  </a:txBody>
+                  <a:tcPr/>
+                </a:tc>
+                <a:tc>
+                  <a:txBody>
+                    <a:bodyPr/>
+                    <a:lstStyle/>
+                    <a:p>
+                      <a:r>
+                        <a:rPr sz="1500"/>
+                        <a:t>explore paths with a solver; each bug comes with an input</a:t>
+                      </a:r>
+                    </a:p>
+                  </a:txBody>
+                  <a:tcPr/>
+                </a:tc>
+                <a:tc>
+                  <a:txBody>
+                    <a:bodyPr/>
+                    <a:lstStyle/>
+                    <a:p>
+                      <a:r>
+                        <a:rPr sz="1500"/>
+                        <a:t>KLEE, SAGE, angr</a:t>
+                      </a:r>
+                    </a:p>
+                  </a:txBody>
+                  <a:tcPr/>
+                </a:tc>
+              </a:tr>
+              <a:tr h="365760">
+                <a:tc>
+                  <a:txBody>
+                    <a:bodyPr/>
+                    <a:lstStyle/>
+                    <a:p>
+                      <a:r>
+                        <a:rPr sz="1500"/>
+                        <a:t>Bug-finding static analysis</a:t>
+                      </a:r>
+                    </a:p>
+                  </a:txBody>
+                  <a:tcPr/>
+                </a:tc>
+                <a:tc>
+                  <a:txBody>
+                    <a:bodyPr/>
+                    <a:lstStyle/>
+                    <a:p>
+                      <a:r>
+                        <a:rPr sz="1500"/>
+                        <a:t>scan for suspicious patterns (unsound — misses bugs)</a:t>
+                      </a:r>
+                    </a:p>
+                  </a:txBody>
+                  <a:tcPr/>
+                </a:tc>
+                <a:tc>
+                  <a:txBody>
+                    <a:bodyPr/>
+                    <a:lstStyle/>
+                    <a:p>
+                      <a:r>
+                        <a:rPr sz="1500"/>
+                        <a:t>Coverity, Clang Static Analyzer, CodeQL, Cppcheck</a:t>
+                      </a:r>
+                    </a:p>
+                  </a:txBody>
+                  <a:tcPr/>
+                </a:tc>
+              </a:tr>
+              <a:tr h="365760">
+                <a:tc>
+                  <a:txBody>
+                    <a:bodyPr/>
+                    <a:lstStyle/>
+                    <a:p>
+                      <a:r>
+                        <a:rPr sz="1500"/>
+                        <a:t>Abstract interpretation</a:t>
+                      </a:r>
+                    </a:p>
+                  </a:txBody>
+                  <a:tcPr/>
+                </a:tc>
+                <a:tc>
+                  <a:txBody>
+                    <a:bodyPr/>
+                    <a:lstStyle/>
+                    <a:p>
+                      <a:r>
+                        <a:rPr sz="1500"/>
+                        <a:t>over-approximate every run (sound — but false alarms)</a:t>
+                      </a:r>
+                    </a:p>
+                  </a:txBody>
+                  <a:tcPr/>
+                </a:tc>
+                <a:tc>
+                  <a:txBody>
+                    <a:bodyPr/>
+                    <a:lstStyle/>
+                    <a:p>
+                      <a:r>
+                        <a:rPr sz="1500"/>
+                        <a:t>Astrée, Polyspace, Frama-C (Eva)</a:t>
+                      </a:r>
+                    </a:p>
+                  </a:txBody>
+                  <a:tcPr/>
+                </a:tc>
+              </a:tr>
+              <a:tr h="365760">
+                <a:tc>
+                  <a:txBody>
+                    <a:bodyPr/>
+                    <a:lstStyle/>
+                    <a:p>
+                      <a:r>
+                        <a:rPr sz="1500"/>
+                        <a:t>Bounded model checking</a:t>
+                      </a:r>
+                    </a:p>
+                  </a:txBody>
+                  <a:tcPr/>
+                </a:tc>
+                <a:tc>
+                  <a:txBody>
+                    <a:bodyPr/>
+                    <a:lstStyle/>
+                    <a:p>
+                      <a:r>
+                        <a:rPr sz="1500"/>
+                        <a:t>prove properties up to a depth bound</a:t>
+                      </a:r>
+                    </a:p>
+                  </a:txBody>
+                  <a:tcPr/>
+                </a:tc>
+                <a:tc>
+                  <a:txBody>
+                    <a:bodyPr/>
+                    <a:lstStyle/>
+                    <a:p>
+                      <a:r>
+                        <a:rPr sz="1500"/>
+                        <a:t>CBMC, ESBMC</a:t>
+                      </a:r>
+                    </a:p>
+                  </a:txBody>
+                  <a:tcPr/>
+                </a:tc>
+              </a:tr>
+              <a:tr h="365760">
+                <a:tc>
+                  <a:txBody>
+                    <a:bodyPr/>
+                    <a:lstStyle/>
+                    <a:p>
+                      <a:r>
+                        <a:rPr sz="1500"/>
+                        <a:t>Deductive verification</a:t>
+                      </a:r>
+                    </a:p>
+                  </a:txBody>
+                  <a:tcPr/>
+                </a:tc>
+                <a:tc>
+                  <a:txBody>
+                    <a:bodyPr/>
+                    <a:lstStyle/>
+                    <a:p>
+                      <a:r>
+                        <a:rPr sz="1500"/>
+                        <a:t>prove code against a spec (needs effort)</a:t>
+                      </a:r>
+                    </a:p>
+                  </a:txBody>
+                  <a:tcPr/>
+                </a:tc>
+                <a:tc>
+                  <a:txBody>
+                    <a:bodyPr/>
+                    <a:lstStyle/>
+                    <a:p>
+                      <a:r>
+                        <a:rPr sz="1500"/>
+                        <a:t>Dafny, SPARK (GNATprove), Frama-C (WP)</a:t>
+                      </a:r>
+                    </a:p>
+                  </a:txBody>
+                  <a:tcPr/>
+                </a:tc>
+              </a:tr>
+            </a:tbl>
+          </a:graphicData>
+        </a:graphic>
+      </p:graphicFrame>
+      <p:sp>
+        <p:nvSpPr>
+          <p:cNvPr id="4" name="TextBox 3"/>
+          <p:cNvSpPr txBox="1"/>
+          <p:nvPr/>
+        </p:nvSpPr>
+        <p:spPr>
+          <a:xfrm>
+            <a:off x="731520" y="6126480"/>
+            <a:ext cx="10789920" cy="457199"/>
+          </a:xfrm>
+          <a:prstGeom prst="rect">
+            <a:avLst/>
+          </a:prstGeom>
+          <a:noFill/>
+        </p:spPr>
+        <p:txBody>
+          <a:bodyPr wrap="square">
+            <a:spAutoFit/>
+          </a:bodyPr>
+          <a:lstStyle/>
+          <a:p>
+            <a:pPr>
+              <a:spcAft>
+                <a:spcPts val="800"/>
+              </a:spcAft>
+            </a:pPr>
+            <a:r>
+              <a:rPr sz="1600">
+                <a:solidFill>
+                  <a:srgbClr val="212121"/>
+                </a:solidFill>
+              </a:rPr>
+              <a:t>Tonight's tool, ESBMC, is bounded model checking — and BMC and deductive verifiers both run on the SAT/SMT solvers we meet after the break.</a:t>
+            </a:r>
+          </a:p>
+        </p:txBody>
+      </p:sp>
+    </p:spTree>
+  </p:cSld>
+  <p:clrMapOvr>
+    <a:masterClrMapping/>
+  </p:clrMapOvr>
+</p:sld>
+</file>
+
+<file path=ppt/slides/slide21.xml><?xml version="1.0" encoding="utf-8"?>
+<p:sld xmlns:a="http://schemas.openxmlformats.org/drawingml/2006/main" xmlns:p="http://schemas.openxmlformats.org/presentationml/2006/main" xmlns:r="http://schemas.openxmlformats.org/officeDocument/2006/relationships">
+  <p:cSld>
+    <p:spTree>
+      <p:nvGrpSpPr>
+        <p:cNvPr id="1" name=""/>
+        <p:cNvGrpSpPr/>
+        <p:nvPr/>
+      </p:nvGrpSpPr>
+      <p:grpSpPr/>
+      <p:sp>
+        <p:nvSpPr>
+          <p:cNvPr id="2" name="TextBox 1"/>
+          <p:cNvSpPr txBox="1"/>
+          <p:nvPr/>
+        </p:nvSpPr>
+        <p:spPr>
+          <a:xfrm>
+            <a:off x="548640" y="365760"/>
+            <a:ext cx="11064240" cy="1005840"/>
+          </a:xfrm>
+          <a:prstGeom prst="rect">
+            <a:avLst/>
+          </a:prstGeom>
+          <a:noFill/>
+        </p:spPr>
+        <p:txBody>
+          <a:bodyPr wrap="square">
+            <a:spAutoFit/>
+          </a:bodyPr>
+          <a:lstStyle/>
+          <a:p>
+            <a:r>
+              <a:rPr sz="3600" b="1">
+                <a:solidFill>
+                  <a:srgbClr val="5A0A7A"/>
+                </a:solidFill>
+              </a:rPr>
               <a:t>Where does your technique sit?</a:t>
             </a:r>
           </a:p>
@@ -5964,7 +6368,7 @@
 </p:sld>
 </file>
 
-<file path=ppt/slides/slide21.xml><?xml version="1.0" encoding="utf-8"?>
+<file path=ppt/slides/slide22.xml><?xml version="1.0" encoding="utf-8"?>
 <p:sld xmlns:a="http://schemas.openxmlformats.org/drawingml/2006/main" xmlns:p="http://schemas.openxmlformats.org/presentationml/2006/main" xmlns:r="http://schemas.openxmlformats.org/officeDocument/2006/relationships">
   <p:cSld>
     <p:spTree>
@@ -6326,7 +6730,7 @@
 </p:sld>
 </file>
 
-<file path=ppt/slides/slide22.xml><?xml version="1.0" encoding="utf-8"?>
+<file path=ppt/slides/slide23.xml><?xml version="1.0" encoding="utf-8"?>
 <p:sld xmlns:a="http://schemas.openxmlformats.org/drawingml/2006/main" xmlns:p="http://schemas.openxmlformats.org/presentationml/2006/main" xmlns:r="http://schemas.openxmlformats.org/officeDocument/2006/relationships">
   <p:cSld>
     <p:spTree>
@@ -6493,57 +6897,6 @@
                 </a:solidFill>
               </a:rPr>
               <a:t>So we need an oracle for “is this formula satisfiable?” — it exists, it is free, and it is absurdly good. After the break.</a:t>
-            </a:r>
-          </a:p>
-        </p:txBody>
-      </p:sp>
-    </p:spTree>
-  </p:cSld>
-  <p:clrMapOvr>
-    <a:masterClrMapping/>
-  </p:clrMapOvr>
-</p:sld>
-</file>
-
-<file path=ppt/slides/slide23.xml><?xml version="1.0" encoding="utf-8"?>
-<p:sld xmlns:a="http://schemas.openxmlformats.org/drawingml/2006/main" xmlns:p="http://schemas.openxmlformats.org/presentationml/2006/main" xmlns:r="http://schemas.openxmlformats.org/officeDocument/2006/relationships">
-  <p:cSld>
-    <p:spTree>
-      <p:nvGrpSpPr>
-        <p:cNvPr id="1" name=""/>
-        <p:cNvGrpSpPr/>
-        <p:nvPr/>
-      </p:nvGrpSpPr>
-      <p:grpSpPr/>
-      <p:sp>
-        <p:nvSpPr>
-          <p:cNvPr id="2" name="TextBox 1"/>
-          <p:cNvSpPr txBox="1"/>
-          <p:nvPr/>
-        </p:nvSpPr>
-        <p:spPr>
-          <a:xfrm>
-            <a:off x="548640" y="2377440"/>
-            <a:ext cx="11064240" cy="1005840"/>
-          </a:xfrm>
-          <a:prstGeom prst="rect">
-            <a:avLst/>
-          </a:prstGeom>
-          <a:noFill/>
-        </p:spPr>
-        <p:txBody>
-          <a:bodyPr wrap="square">
-            <a:spAutoFit/>
-          </a:bodyPr>
-          <a:lstStyle/>
-          <a:p>
-            <a:r>
-              <a:rPr sz="4400" b="1">
-                <a:solidFill>
-                  <a:srgbClr val="5A0A7A"/>
-                </a:solidFill>
-              </a:rPr>
-              <a:t>Break — back at 19:25</a:t>
             </a:r>
           </a:p>
         </p:txBody>
@@ -6574,7 +6927,7 @@
         </p:nvSpPr>
         <p:spPr>
           <a:xfrm>
-            <a:off x="548640" y="365760"/>
+            <a:off x="548640" y="2377440"/>
             <a:ext cx="11064240" cy="1005840"/>
           </a:xfrm>
           <a:prstGeom prst="rect">
@@ -6589,126 +6942,12 @@
           <a:lstStyle/>
           <a:p>
             <a:r>
-              <a:rPr sz="3600" b="1">
+              <a:rPr sz="4400" b="1">
                 <a:solidFill>
                   <a:srgbClr val="5A0A7A"/>
                 </a:solidFill>
               </a:rPr>
-              <a:t>SAT: the original hard problem</a:t>
-            </a:r>
-          </a:p>
-        </p:txBody>
-      </p:sp>
-      <p:sp>
-        <p:nvSpPr>
-          <p:cNvPr id="3" name="TextBox 2"/>
-          <p:cNvSpPr txBox="1"/>
-          <p:nvPr/>
-        </p:nvSpPr>
-        <p:spPr>
-          <a:xfrm>
-            <a:off x="731520" y="1554480"/>
-            <a:ext cx="10789920" cy="5029200"/>
-          </a:xfrm>
-          <a:prstGeom prst="rect">
-            <a:avLst/>
-          </a:prstGeom>
-          <a:noFill/>
-        </p:spPr>
-        <p:txBody>
-          <a:bodyPr wrap="square">
-            <a:spAutoFit/>
-          </a:bodyPr>
-          <a:lstStyle/>
-          <a:p>
-            <a:pPr>
-              <a:spcAft>
-                <a:spcPts val="0"/>
-              </a:spcAft>
-            </a:pPr>
-            <a:r>
-              <a:rPr sz="2000">
-                <a:solidFill>
-                  <a:srgbClr val="212121"/>
-                </a:solidFill>
-                <a:latin typeface="Courier New"/>
-              </a:rPr>
-              <a:t>(a ∨ ¬b) ∧ (b ∨ c) ∧ (¬a ∨ ¬c)</a:t>
-            </a:r>
-          </a:p>
-          <a:p>
-            <a:pPr>
-              <a:spcAft>
-                <a:spcPts val="800"/>
-              </a:spcAft>
-            </a:pPr>
-            <a:r>
-              <a:rPr sz="2400">
-                <a:solidFill>
-                  <a:srgbClr val="212121"/>
-                </a:solidFill>
-              </a:rPr>
-              <a:t/>
-            </a:r>
-          </a:p>
-          <a:p>
-            <a:pPr>
-              <a:spcAft>
-                <a:spcPts val="800"/>
-              </a:spcAft>
-            </a:pPr>
-            <a:r>
-              <a:rPr sz="2400">
-                <a:solidFill>
-                  <a:srgbClr val="212121"/>
-                </a:solidFill>
-              </a:rPr>
-              <a:t>Is there a true/false assignment that makes the whole formula true?</a:t>
-            </a:r>
-          </a:p>
-          <a:p>
-            <a:pPr>
-              <a:spcAft>
-                <a:spcPts val="800"/>
-              </a:spcAft>
-            </a:pPr>
-            <a:r>
-              <a:rPr sz="2400">
-                <a:solidFill>
-                  <a:srgbClr val="212121"/>
-                </a:solidFill>
-              </a:rPr>
-              <a:t/>
-            </a:r>
-          </a:p>
-          <a:p>
-            <a:pPr>
-              <a:spcAft>
-                <a:spcPts val="800"/>
-              </a:spcAft>
-            </a:pPr>
-            <a:r>
-              <a:rPr sz="2400">
-                <a:solidFill>
-                  <a:srgbClr val="212121"/>
-                </a:solidFill>
-              </a:rPr>
-              <a:t>The first problem ever proved NP-complete (Cook, 1971) — in theory, hopeless.</a:t>
-            </a:r>
-          </a:p>
-          <a:p>
-            <a:pPr>
-              <a:spcAft>
-                <a:spcPts val="800"/>
-              </a:spcAft>
-            </a:pPr>
-            <a:r>
-              <a:rPr sz="2400">
-                <a:solidFill>
-                  <a:srgbClr val="212121"/>
-                </a:solidFill>
-              </a:rPr>
-              <a:t>In practice: modern solvers eat formulas with millions of clauses for breakfast. Industrial SAT solving is the closest thing CS has to a superpower.</a:t>
+              <a:t>Break — back at 19:25</a:t>
             </a:r>
           </a:p>
         </p:txBody>
@@ -6759,6 +6998,171 @@
                   <a:srgbClr val="5A0A7A"/>
                 </a:solidFill>
               </a:rPr>
+              <a:t>SAT: the original hard problem</a:t>
+            </a:r>
+          </a:p>
+        </p:txBody>
+      </p:sp>
+      <p:sp>
+        <p:nvSpPr>
+          <p:cNvPr id="3" name="TextBox 2"/>
+          <p:cNvSpPr txBox="1"/>
+          <p:nvPr/>
+        </p:nvSpPr>
+        <p:spPr>
+          <a:xfrm>
+            <a:off x="731520" y="1554480"/>
+            <a:ext cx="10789920" cy="5029200"/>
+          </a:xfrm>
+          <a:prstGeom prst="rect">
+            <a:avLst/>
+          </a:prstGeom>
+          <a:noFill/>
+        </p:spPr>
+        <p:txBody>
+          <a:bodyPr wrap="square">
+            <a:spAutoFit/>
+          </a:bodyPr>
+          <a:lstStyle/>
+          <a:p>
+            <a:pPr>
+              <a:spcAft>
+                <a:spcPts val="0"/>
+              </a:spcAft>
+            </a:pPr>
+            <a:r>
+              <a:rPr sz="2000">
+                <a:solidFill>
+                  <a:srgbClr val="212121"/>
+                </a:solidFill>
+                <a:latin typeface="Courier New"/>
+              </a:rPr>
+              <a:t>(a ∨ ¬b) ∧ (b ∨ c) ∧ (¬a ∨ ¬c)</a:t>
+            </a:r>
+          </a:p>
+          <a:p>
+            <a:pPr>
+              <a:spcAft>
+                <a:spcPts val="800"/>
+              </a:spcAft>
+            </a:pPr>
+            <a:r>
+              <a:rPr sz="2400">
+                <a:solidFill>
+                  <a:srgbClr val="212121"/>
+                </a:solidFill>
+              </a:rPr>
+              <a:t/>
+            </a:r>
+          </a:p>
+          <a:p>
+            <a:pPr>
+              <a:spcAft>
+                <a:spcPts val="800"/>
+              </a:spcAft>
+            </a:pPr>
+            <a:r>
+              <a:rPr sz="2400">
+                <a:solidFill>
+                  <a:srgbClr val="212121"/>
+                </a:solidFill>
+              </a:rPr>
+              <a:t>Is there a true/false assignment that makes the whole formula true?</a:t>
+            </a:r>
+          </a:p>
+          <a:p>
+            <a:pPr>
+              <a:spcAft>
+                <a:spcPts val="800"/>
+              </a:spcAft>
+            </a:pPr>
+            <a:r>
+              <a:rPr sz="2400">
+                <a:solidFill>
+                  <a:srgbClr val="212121"/>
+                </a:solidFill>
+              </a:rPr>
+              <a:t/>
+            </a:r>
+          </a:p>
+          <a:p>
+            <a:pPr>
+              <a:spcAft>
+                <a:spcPts val="800"/>
+              </a:spcAft>
+            </a:pPr>
+            <a:r>
+              <a:rPr sz="2400">
+                <a:solidFill>
+                  <a:srgbClr val="212121"/>
+                </a:solidFill>
+              </a:rPr>
+              <a:t>The first problem ever proved NP-complete (Cook, 1971) — in theory, hopeless.</a:t>
+            </a:r>
+          </a:p>
+          <a:p>
+            <a:pPr>
+              <a:spcAft>
+                <a:spcPts val="800"/>
+              </a:spcAft>
+            </a:pPr>
+            <a:r>
+              <a:rPr sz="2400">
+                <a:solidFill>
+                  <a:srgbClr val="212121"/>
+                </a:solidFill>
+              </a:rPr>
+              <a:t>In practice: modern solvers eat formulas with millions of clauses for breakfast. Industrial SAT solving is the closest thing CS has to a superpower.</a:t>
+            </a:r>
+          </a:p>
+        </p:txBody>
+      </p:sp>
+    </p:spTree>
+  </p:cSld>
+  <p:clrMapOvr>
+    <a:masterClrMapping/>
+  </p:clrMapOvr>
+</p:sld>
+</file>
+
+<file path=ppt/slides/slide26.xml><?xml version="1.0" encoding="utf-8"?>
+<p:sld xmlns:a="http://schemas.openxmlformats.org/drawingml/2006/main" xmlns:p="http://schemas.openxmlformats.org/presentationml/2006/main" xmlns:r="http://schemas.openxmlformats.org/officeDocument/2006/relationships">
+  <p:cSld>
+    <p:spTree>
+      <p:nvGrpSpPr>
+        <p:cNvPr id="1" name=""/>
+        <p:cNvGrpSpPr/>
+        <p:nvPr/>
+      </p:nvGrpSpPr>
+      <p:grpSpPr/>
+      <p:sp>
+        <p:nvSpPr>
+          <p:cNvPr id="2" name="TextBox 1"/>
+          <p:cNvSpPr txBox="1"/>
+          <p:nvPr/>
+        </p:nvSpPr>
+        <p:spPr>
+          <a:xfrm>
+            <a:off x="548640" y="365760"/>
+            <a:ext cx="11064240" cy="1005840"/>
+          </a:xfrm>
+          <a:prstGeom prst="rect">
+            <a:avLst/>
+          </a:prstGeom>
+          <a:noFill/>
+        </p:spPr>
+        <p:txBody>
+          <a:bodyPr wrap="square">
+            <a:spAutoFit/>
+          </a:bodyPr>
+          <a:lstStyle/>
+          <a:p>
+            <a:r>
+              <a:rPr sz="3600" b="1">
+                <a:solidFill>
+                  <a:srgbClr val="5A0A7A"/>
+                </a:solidFill>
+              </a:rPr>
               <a:t>The two answers a solver can give</a:t>
             </a:r>
           </a:p>
@@ -6915,7 +7319,7 @@
 </p:sld>
 </file>
 
-<file path=ppt/slides/slide26.xml><?xml version="1.0" encoding="utf-8"?>
+<file path=ppt/slides/slide27.xml><?xml version="1.0" encoding="utf-8"?>
 <p:sld xmlns:a="http://schemas.openxmlformats.org/drawingml/2006/main" xmlns:p="http://schemas.openxmlformats.org/presentationml/2006/main" xmlns:r="http://schemas.openxmlformats.org/officeDocument/2006/relationships">
   <p:cSld>
     <p:spTree>
@@ -7170,7 +7574,7 @@
 </p:sld>
 </file>
 
-<file path=ppt/slides/slide27.xml><?xml version="1.0" encoding="utf-8"?>
+<file path=ppt/slides/slide28.xml><?xml version="1.0" encoding="utf-8"?>
 <p:sld xmlns:a="http://schemas.openxmlformats.org/drawingml/2006/main" xmlns:p="http://schemas.openxmlformats.org/presentationml/2006/main" xmlns:r="http://schemas.openxmlformats.org/officeDocument/2006/relationships">
   <p:cSld>
     <p:spTree>
@@ -7339,222 +7743,6 @@
                 </a:solidFill>
               </a:rPr>
               <a:t>unsat  →  the access is safe on every path</a:t>
-            </a:r>
-          </a:p>
-        </p:txBody>
-      </p:sp>
-    </p:spTree>
-  </p:cSld>
-  <p:clrMapOvr>
-    <a:masterClrMapping/>
-  </p:clrMapOvr>
-</p:sld>
-</file>
-
-<file path=ppt/slides/slide28.xml><?xml version="1.0" encoding="utf-8"?>
-<p:sld xmlns:a="http://schemas.openxmlformats.org/drawingml/2006/main" xmlns:p="http://schemas.openxmlformats.org/presentationml/2006/main" xmlns:r="http://schemas.openxmlformats.org/officeDocument/2006/relationships">
-  <p:cSld>
-    <p:spTree>
-      <p:nvGrpSpPr>
-        <p:cNvPr id="1" name=""/>
-        <p:cNvGrpSpPr/>
-        <p:nvPr/>
-      </p:nvGrpSpPr>
-      <p:grpSpPr/>
-      <p:sp>
-        <p:nvSpPr>
-          <p:cNvPr id="2" name="TextBox 1"/>
-          <p:cNvSpPr txBox="1"/>
-          <p:nvPr/>
-        </p:nvSpPr>
-        <p:spPr>
-          <a:xfrm>
-            <a:off x="548640" y="365760"/>
-            <a:ext cx="11064240" cy="1005840"/>
-          </a:xfrm>
-          <a:prstGeom prst="rect">
-            <a:avLst/>
-          </a:prstGeom>
-          <a:noFill/>
-        </p:spPr>
-        <p:txBody>
-          <a:bodyPr wrap="square">
-            <a:spAutoFit/>
-          </a:bodyPr>
-          <a:lstStyle/>
-          <a:p>
-            <a:r>
-              <a:rPr sz="3600" b="1">
-                <a:solidFill>
-                  <a:srgbClr val="5A0A7A"/>
-                </a:solidFill>
-              </a:rPr>
-              <a:t>Live: a solver in two queries</a:t>
-            </a:r>
-          </a:p>
-        </p:txBody>
-      </p:sp>
-      <p:sp>
-        <p:nvSpPr>
-          <p:cNvPr id="3" name="TextBox 2"/>
-          <p:cNvSpPr txBox="1"/>
-          <p:nvPr/>
-        </p:nvSpPr>
-        <p:spPr>
-          <a:xfrm>
-            <a:off x="731520" y="1463040"/>
-            <a:ext cx="10789920" cy="5120640"/>
-          </a:xfrm>
-          <a:prstGeom prst="rect">
-            <a:avLst/>
-          </a:prstGeom>
-          <a:noFill/>
-        </p:spPr>
-        <p:txBody>
-          <a:bodyPr wrap="square">
-            <a:spAutoFit/>
-          </a:bodyPr>
-          <a:lstStyle/>
-          <a:p>
-            <a:pPr>
-              <a:spcAft>
-                <a:spcPts val="0"/>
-              </a:spcAft>
-            </a:pPr>
-            <a:r>
-              <a:rPr sz="1800">
-                <a:solidFill>
-                  <a:srgbClr val="212121"/>
-                </a:solidFill>
-                <a:latin typeface="Courier New"/>
-              </a:rPr>
-              <a:t>$ python3 z3_demo.py</a:t>
-            </a:r>
-          </a:p>
-          <a:p>
-            <a:pPr>
-              <a:spcAft>
-                <a:spcPts val="0"/>
-              </a:spcAft>
-            </a:pPr>
-            <a:r>
-              <a:rPr sz="1800">
-                <a:solidFill>
-                  <a:srgbClr val="212121"/>
-                </a:solidFill>
-                <a:latin typeface="Courier New"/>
-              </a:rPr>
-              <a:t/>
-            </a:r>
-          </a:p>
-          <a:p>
-            <a:pPr>
-              <a:spcAft>
-                <a:spcPts val="0"/>
-              </a:spcAft>
-            </a:pPr>
-            <a:r>
-              <a:rPr sz="1800">
-                <a:solidFill>
-                  <a:srgbClr val="212121"/>
-                </a:solidFill>
-                <a:latin typeface="Courier New"/>
-              </a:rPr>
-              <a:t>Query 1: x + y == 42 and x &gt; 100</a:t>
-            </a:r>
-          </a:p>
-          <a:p>
-            <a:pPr>
-              <a:spcAft>
-                <a:spcPts val="0"/>
-              </a:spcAft>
-            </a:pPr>
-            <a:r>
-              <a:rPr sz="1800">
-                <a:solidFill>
-                  <a:srgbClr val="212121"/>
-                </a:solidFill>
-                <a:latin typeface="Courier New"/>
-              </a:rPr>
-              <a:t>[y = -59, x = 101]            ← a model, in milliseconds</a:t>
-            </a:r>
-          </a:p>
-          <a:p>
-            <a:pPr>
-              <a:spcAft>
-                <a:spcPts val="0"/>
-              </a:spcAft>
-            </a:pPr>
-            <a:r>
-              <a:rPr sz="1800">
-                <a:solidFill>
-                  <a:srgbClr val="212121"/>
-                </a:solidFill>
-                <a:latin typeface="Courier New"/>
-              </a:rPr>
-              <a:t/>
-            </a:r>
-          </a:p>
-          <a:p>
-            <a:pPr>
-              <a:spcAft>
-                <a:spcPts val="0"/>
-              </a:spcAft>
-            </a:pPr>
-            <a:r>
-              <a:rPr sz="1800">
-                <a:solidFill>
-                  <a:srgbClr val="212121"/>
-                </a:solidFill>
-                <a:latin typeface="Courier New"/>
-              </a:rPr>
-              <a:t>Query 2: x*x == 2*y*y, x &gt; 0, y &gt; 0 (no overflow)</a:t>
-            </a:r>
-          </a:p>
-          <a:p>
-            <a:pPr>
-              <a:spcAft>
-                <a:spcPts val="0"/>
-              </a:spcAft>
-            </a:pPr>
-            <a:r>
-              <a:rPr sz="1800">
-                <a:solidFill>
-                  <a:srgbClr val="212121"/>
-                </a:solidFill>
-                <a:latin typeface="Courier New"/>
-              </a:rPr>
-              <a:t>unsat                          ← a proof</a:t>
-            </a:r>
-          </a:p>
-          <a:p>
-            <a:pPr>
-              <a:spcAft>
-                <a:spcPts val="800"/>
-              </a:spcAft>
-            </a:pPr>
-            <a:r>
-              <a:rPr sz="2200">
-                <a:solidFill>
-                  <a:srgbClr val="212121"/>
-                </a:solidFill>
-              </a:rPr>
-              <a:t/>
-            </a:r>
-          </a:p>
-          <a:p>
-            <a:pPr>
-              <a:spcAft>
-                <a:spcPts val="800"/>
-              </a:spcAft>
-            </a:pPr>
-            <a:r>
-              <a:rPr sz="2200">
-                <a:solidFill>
-                  <a:srgbClr val="212121"/>
-                </a:solidFill>
-              </a:rPr>
-              <a:t>Query 2 just proved that √2 is irrational — 32-bit bit-vector edition. unsat is a theorem, not a shrug.</a:t>
             </a:r>
           </a:p>
         </p:txBody>
@@ -7605,7 +7793,7 @@
                   <a:srgbClr val="5A0A7A"/>
                 </a:solidFill>
               </a:rPr>
-              <a:t>Machine arithmetic is not mathematics</a:t>
+              <a:t>Live: a solver in two queries</a:t>
             </a:r>
           </a:p>
         </p:txBody>
@@ -7644,7 +7832,7 @@
                 </a:solidFill>
                 <a:latin typeface="Courier New"/>
               </a:rPr>
-              <a:t>INT_MAX     =  2147483647</a:t>
+              <a:t>$ python3 z3_demo.py</a:t>
             </a:r>
           </a:p>
           <a:p>
@@ -7660,7 +7848,7 @@
                 </a:solidFill>
                 <a:latin typeface="Courier New"/>
               </a:rPr>
-              <a:t>INT_MAX + 1 =  ?            /* C: undefined behaviour */</a:t>
+              <a:t/>
             </a:r>
           </a:p>
           <a:p>
@@ -7676,7 +7864,71 @@
                 </a:solidFill>
                 <a:latin typeface="Courier New"/>
               </a:rPr>
-              <a:t>                            /* bit-vectors: wraps negative */</a:t>
+              <a:t>Query 1: x + y == 42 and x &gt; 100</a:t>
+            </a:r>
+          </a:p>
+          <a:p>
+            <a:pPr>
+              <a:spcAft>
+                <a:spcPts val="0"/>
+              </a:spcAft>
+            </a:pPr>
+            <a:r>
+              <a:rPr sz="1800">
+                <a:solidFill>
+                  <a:srgbClr val="212121"/>
+                </a:solidFill>
+                <a:latin typeface="Courier New"/>
+              </a:rPr>
+              <a:t>[y = -59, x = 101]            ← a model, in milliseconds</a:t>
+            </a:r>
+          </a:p>
+          <a:p>
+            <a:pPr>
+              <a:spcAft>
+                <a:spcPts val="0"/>
+              </a:spcAft>
+            </a:pPr>
+            <a:r>
+              <a:rPr sz="1800">
+                <a:solidFill>
+                  <a:srgbClr val="212121"/>
+                </a:solidFill>
+                <a:latin typeface="Courier New"/>
+              </a:rPr>
+              <a:t/>
+            </a:r>
+          </a:p>
+          <a:p>
+            <a:pPr>
+              <a:spcAft>
+                <a:spcPts val="0"/>
+              </a:spcAft>
+            </a:pPr>
+            <a:r>
+              <a:rPr sz="1800">
+                <a:solidFill>
+                  <a:srgbClr val="212121"/>
+                </a:solidFill>
+                <a:latin typeface="Courier New"/>
+              </a:rPr>
+              <a:t>Query 2: x*x == 2*y*y, x &gt; 0, y &gt; 0 (no overflow)</a:t>
+            </a:r>
+          </a:p>
+          <a:p>
+            <a:pPr>
+              <a:spcAft>
+                <a:spcPts val="0"/>
+              </a:spcAft>
+            </a:pPr>
+            <a:r>
+              <a:rPr sz="1800">
+                <a:solidFill>
+                  <a:srgbClr val="212121"/>
+                </a:solidFill>
+                <a:latin typeface="Courier New"/>
+              </a:rPr>
+              <a:t>unsat                          ← a proof</a:t>
             </a:r>
           </a:p>
           <a:p>
@@ -7697,54 +7949,6 @@
           <a:p>
             <a:pPr>
               <a:spcAft>
-                <a:spcPts val="0"/>
-              </a:spcAft>
-            </a:pPr>
-            <a:r>
-              <a:rPr sz="1800">
-                <a:solidFill>
-                  <a:srgbClr val="212121"/>
-                </a:solidFill>
-                <a:latin typeface="Courier New"/>
-              </a:rPr>
-              <a:t>int y = x + 1;</a:t>
-            </a:r>
-          </a:p>
-          <a:p>
-            <a:pPr>
-              <a:spcAft>
-                <a:spcPts val="0"/>
-              </a:spcAft>
-            </a:pPr>
-            <a:r>
-              <a:rPr sz="1800">
-                <a:solidFill>
-                  <a:srgbClr val="212121"/>
-                </a:solidFill>
-                <a:latin typeface="Courier New"/>
-              </a:rPr>
-              <a:t>int z = y * 2;</a:t>
-            </a:r>
-          </a:p>
-          <a:p>
-            <a:pPr>
-              <a:spcAft>
-                <a:spcPts val="0"/>
-              </a:spcAft>
-            </a:pPr>
-            <a:r>
-              <a:rPr sz="1800">
-                <a:solidFill>
-                  <a:srgbClr val="212121"/>
-                </a:solidFill>
-                <a:latin typeface="Courier New"/>
-              </a:rPr>
-              <a:t>assert(z &gt;= 2);   /* surely true for x &gt;= 0 … ? */</a:t>
-            </a:r>
-          </a:p>
-          <a:p>
-            <a:pPr>
-              <a:spcAft>
                 <a:spcPts val="800"/>
               </a:spcAft>
             </a:pPr>
@@ -7754,22 +7958,7 @@
                   <a:srgbClr val="212121"/>
                 </a:solidFill>
               </a:rPr>
-              <a:t/>
-            </a:r>
-          </a:p>
-          <a:p>
-            <a:pPr>
-              <a:spcAft>
-                <a:spcPts val="800"/>
-              </a:spcAft>
-            </a:pPr>
-            <a:r>
-              <a:rPr sz="2200">
-                <a:solidFill>
-                  <a:srgbClr val="212121"/>
-                </a:solidFill>
-              </a:rPr>
-              <a:t>A solver finds the x that breaks this in milliseconds. In Lab 1 you will encode these three lines yourself and watch it happen.</a:t>
+              <a:t>Query 2 just proved that √2 is irrational — 32-bit bit-vector edition. unsat is a theorem, not a shrug.</a:t>
             </a:r>
           </a:p>
         </p:txBody>
@@ -7924,7 +8113,7 @@
                   <a:srgbClr val="5A0A7A"/>
                 </a:solidFill>
               </a:rPr>
-              <a:t>Solvers as search engines: SEND + MORE = MONEY</a:t>
+              <a:t>Machine arithmetic is not mathematics</a:t>
             </a:r>
           </a:p>
         </p:txBody>
@@ -7963,7 +8152,7 @@
                 </a:solidFill>
                 <a:latin typeface="Courier New"/>
               </a:rPr>
-              <a:t>  S E N D</a:t>
+              <a:t>INT_MAX     =  2147483647</a:t>
             </a:r>
           </a:p>
           <a:p>
@@ -7979,7 +8168,7 @@
                 </a:solidFill>
                 <a:latin typeface="Courier New"/>
               </a:rPr>
-              <a:t>+ M O R E</a:t>
+              <a:t>INT_MAX + 1 =  ?            /* C: undefined behaviour */</a:t>
             </a:r>
           </a:p>
           <a:p>
@@ -7995,7 +8184,22 @@
                 </a:solidFill>
                 <a:latin typeface="Courier New"/>
               </a:rPr>
-              <a:t>---------</a:t>
+              <a:t>                            /* bit-vectors: wraps negative */</a:t>
+            </a:r>
+          </a:p>
+          <a:p>
+            <a:pPr>
+              <a:spcAft>
+                <a:spcPts val="800"/>
+              </a:spcAft>
+            </a:pPr>
+            <a:r>
+              <a:rPr sz="2200">
+                <a:solidFill>
+                  <a:srgbClr val="212121"/>
+                </a:solidFill>
+              </a:rPr>
+              <a:t/>
             </a:r>
           </a:p>
           <a:p>
@@ -8011,7 +8215,39 @@
                 </a:solidFill>
                 <a:latin typeface="Courier New"/>
               </a:rPr>
-              <a:t>M O N E Y</a:t>
+              <a:t>int y = x + 1;</a:t>
+            </a:r>
+          </a:p>
+          <a:p>
+            <a:pPr>
+              <a:spcAft>
+                <a:spcPts val="0"/>
+              </a:spcAft>
+            </a:pPr>
+            <a:r>
+              <a:rPr sz="1800">
+                <a:solidFill>
+                  <a:srgbClr val="212121"/>
+                </a:solidFill>
+                <a:latin typeface="Courier New"/>
+              </a:rPr>
+              <a:t>int z = y * 2;</a:t>
+            </a:r>
+          </a:p>
+          <a:p>
+            <a:pPr>
+              <a:spcAft>
+                <a:spcPts val="0"/>
+              </a:spcAft>
+            </a:pPr>
+            <a:r>
+              <a:rPr sz="1800">
+                <a:solidFill>
+                  <a:srgbClr val="212121"/>
+                </a:solidFill>
+                <a:latin typeface="Courier New"/>
+              </a:rPr>
+              <a:t>assert(z &gt;= 2);   /* surely true for x &gt;= 0 … ? */</a:t>
             </a:r>
           </a:p>
           <a:p>
@@ -8041,52 +8277,7 @@
                   <a:srgbClr val="212121"/>
                 </a:solidFill>
               </a:rPr>
-              <a:t>Eight letters, all different digits, S ≠ 0, M ≠ 0 — about 10⁸ candidate assignments.</a:t>
-            </a:r>
-          </a:p>
-          <a:p>
-            <a:pPr>
-              <a:spcAft>
-                <a:spcPts val="800"/>
-              </a:spcAft>
-            </a:pPr>
-            <a:r>
-              <a:rPr sz="2200">
-                <a:solidFill>
-                  <a:srgbClr val="212121"/>
-                </a:solidFill>
-              </a:rPr>
-              <a:t>Z3 finds the unique solution in well under a second.</a:t>
-            </a:r>
-          </a:p>
-          <a:p>
-            <a:pPr>
-              <a:spcAft>
-                <a:spcPts val="800"/>
-              </a:spcAft>
-            </a:pPr>
-            <a:r>
-              <a:rPr sz="2200">
-                <a:solidFill>
-                  <a:srgbClr val="212121"/>
-                </a:solidFill>
-              </a:rPr>
-              <a:t>The same engine that solves puzzles finds your bugs: a counterexample is just a solution to “break my program”.</a:t>
-            </a:r>
-          </a:p>
-          <a:p>
-            <a:pPr>
-              <a:spcAft>
-                <a:spcPts val="800"/>
-              </a:spcAft>
-            </a:pPr>
-            <a:r>
-              <a:rPr sz="2200">
-                <a:solidFill>
-                  <a:srgbClr val="212121"/>
-                </a:solidFill>
-              </a:rPr>
-              <a:t>Lab 1, Stage 2: you run this yourself.</a:t>
+              <a:t>A solver finds the x that breaks this in milliseconds. In Lab 1 you will encode these three lines yourself and watch it happen.</a:t>
             </a:r>
           </a:p>
         </p:txBody>
@@ -8100,6 +8291,219 @@
 </file>
 
 <file path=ppt/slides/slide31.xml><?xml version="1.0" encoding="utf-8"?>
+<p:sld xmlns:a="http://schemas.openxmlformats.org/drawingml/2006/main" xmlns:p="http://schemas.openxmlformats.org/presentationml/2006/main" xmlns:r="http://schemas.openxmlformats.org/officeDocument/2006/relationships">
+  <p:cSld>
+    <p:spTree>
+      <p:nvGrpSpPr>
+        <p:cNvPr id="1" name=""/>
+        <p:cNvGrpSpPr/>
+        <p:nvPr/>
+      </p:nvGrpSpPr>
+      <p:grpSpPr/>
+      <p:sp>
+        <p:nvSpPr>
+          <p:cNvPr id="2" name="TextBox 1"/>
+          <p:cNvSpPr txBox="1"/>
+          <p:nvPr/>
+        </p:nvSpPr>
+        <p:spPr>
+          <a:xfrm>
+            <a:off x="548640" y="365760"/>
+            <a:ext cx="11064240" cy="1005840"/>
+          </a:xfrm>
+          <a:prstGeom prst="rect">
+            <a:avLst/>
+          </a:prstGeom>
+          <a:noFill/>
+        </p:spPr>
+        <p:txBody>
+          <a:bodyPr wrap="square">
+            <a:spAutoFit/>
+          </a:bodyPr>
+          <a:lstStyle/>
+          <a:p>
+            <a:r>
+              <a:rPr sz="3600" b="1">
+                <a:solidFill>
+                  <a:srgbClr val="5A0A7A"/>
+                </a:solidFill>
+              </a:rPr>
+              <a:t>Solvers as search engines: SEND + MORE = MONEY</a:t>
+            </a:r>
+          </a:p>
+        </p:txBody>
+      </p:sp>
+      <p:sp>
+        <p:nvSpPr>
+          <p:cNvPr id="3" name="TextBox 2"/>
+          <p:cNvSpPr txBox="1"/>
+          <p:nvPr/>
+        </p:nvSpPr>
+        <p:spPr>
+          <a:xfrm>
+            <a:off x="731520" y="1463040"/>
+            <a:ext cx="10789920" cy="5120640"/>
+          </a:xfrm>
+          <a:prstGeom prst="rect">
+            <a:avLst/>
+          </a:prstGeom>
+          <a:noFill/>
+        </p:spPr>
+        <p:txBody>
+          <a:bodyPr wrap="square">
+            <a:spAutoFit/>
+          </a:bodyPr>
+          <a:lstStyle/>
+          <a:p>
+            <a:pPr>
+              <a:spcAft>
+                <a:spcPts val="0"/>
+              </a:spcAft>
+            </a:pPr>
+            <a:r>
+              <a:rPr sz="1800">
+                <a:solidFill>
+                  <a:srgbClr val="212121"/>
+                </a:solidFill>
+                <a:latin typeface="Courier New"/>
+              </a:rPr>
+              <a:t>  S E N D</a:t>
+            </a:r>
+          </a:p>
+          <a:p>
+            <a:pPr>
+              <a:spcAft>
+                <a:spcPts val="0"/>
+              </a:spcAft>
+            </a:pPr>
+            <a:r>
+              <a:rPr sz="1800">
+                <a:solidFill>
+                  <a:srgbClr val="212121"/>
+                </a:solidFill>
+                <a:latin typeface="Courier New"/>
+              </a:rPr>
+              <a:t>+ M O R E</a:t>
+            </a:r>
+          </a:p>
+          <a:p>
+            <a:pPr>
+              <a:spcAft>
+                <a:spcPts val="0"/>
+              </a:spcAft>
+            </a:pPr>
+            <a:r>
+              <a:rPr sz="1800">
+                <a:solidFill>
+                  <a:srgbClr val="212121"/>
+                </a:solidFill>
+                <a:latin typeface="Courier New"/>
+              </a:rPr>
+              <a:t>---------</a:t>
+            </a:r>
+          </a:p>
+          <a:p>
+            <a:pPr>
+              <a:spcAft>
+                <a:spcPts val="0"/>
+              </a:spcAft>
+            </a:pPr>
+            <a:r>
+              <a:rPr sz="1800">
+                <a:solidFill>
+                  <a:srgbClr val="212121"/>
+                </a:solidFill>
+                <a:latin typeface="Courier New"/>
+              </a:rPr>
+              <a:t>M O N E Y</a:t>
+            </a:r>
+          </a:p>
+          <a:p>
+            <a:pPr>
+              <a:spcAft>
+                <a:spcPts val="800"/>
+              </a:spcAft>
+            </a:pPr>
+            <a:r>
+              <a:rPr sz="2200">
+                <a:solidFill>
+                  <a:srgbClr val="212121"/>
+                </a:solidFill>
+              </a:rPr>
+              <a:t/>
+            </a:r>
+          </a:p>
+          <a:p>
+            <a:pPr>
+              <a:spcAft>
+                <a:spcPts val="800"/>
+              </a:spcAft>
+            </a:pPr>
+            <a:r>
+              <a:rPr sz="2200">
+                <a:solidFill>
+                  <a:srgbClr val="212121"/>
+                </a:solidFill>
+              </a:rPr>
+              <a:t>Eight letters, all different digits, S ≠ 0, M ≠ 0 — about 10⁸ candidate assignments.</a:t>
+            </a:r>
+          </a:p>
+          <a:p>
+            <a:pPr>
+              <a:spcAft>
+                <a:spcPts val="800"/>
+              </a:spcAft>
+            </a:pPr>
+            <a:r>
+              <a:rPr sz="2200">
+                <a:solidFill>
+                  <a:srgbClr val="212121"/>
+                </a:solidFill>
+              </a:rPr>
+              <a:t>Z3 finds the unique solution in well under a second.</a:t>
+            </a:r>
+          </a:p>
+          <a:p>
+            <a:pPr>
+              <a:spcAft>
+                <a:spcPts val="800"/>
+              </a:spcAft>
+            </a:pPr>
+            <a:r>
+              <a:rPr sz="2200">
+                <a:solidFill>
+                  <a:srgbClr val="212121"/>
+                </a:solidFill>
+              </a:rPr>
+              <a:t>The same engine that solves puzzles finds your bugs: a counterexample is just a solution to “break my program”.</a:t>
+            </a:r>
+          </a:p>
+          <a:p>
+            <a:pPr>
+              <a:spcAft>
+                <a:spcPts val="800"/>
+              </a:spcAft>
+            </a:pPr>
+            <a:r>
+              <a:rPr sz="2200">
+                <a:solidFill>
+                  <a:srgbClr val="212121"/>
+                </a:solidFill>
+              </a:rPr>
+              <a:t>Lab 1, Stage 2: you run this yourself.</a:t>
+            </a:r>
+          </a:p>
+        </p:txBody>
+      </p:sp>
+    </p:spTree>
+  </p:cSld>
+  <p:clrMapOvr>
+    <a:masterClrMapping/>
+  </p:clrMapOvr>
+</p:sld>
+</file>
+
+<file path=ppt/slides/slide32.xml><?xml version="1.0" encoding="utf-8"?>
 <p:sld xmlns:a="http://schemas.openxmlformats.org/drawingml/2006/main" xmlns:p="http://schemas.openxmlformats.org/presentationml/2006/main" xmlns:r="http://schemas.openxmlformats.org/officeDocument/2006/relationships">
   <p:cSld>
     <p:spTree>
@@ -8671,7 +9075,7 @@
 </p:sld>
 </file>
 
-<file path=ppt/slides/slide32.xml><?xml version="1.0" encoding="utf-8"?>
+<file path=ppt/slides/slide33.xml><?xml version="1.0" encoding="utf-8"?>
 <p:sld xmlns:a="http://schemas.openxmlformats.org/drawingml/2006/main" xmlns:p="http://schemas.openxmlformats.org/presentationml/2006/main" xmlns:r="http://schemas.openxmlformats.org/officeDocument/2006/relationships">
   <p:cSld>
     <p:spTree>
@@ -8851,7 +9255,7 @@
 </p:sld>
 </file>
 
-<file path=ppt/slides/slide33.xml><?xml version="1.0" encoding="utf-8"?>
+<file path=ppt/slides/slide34.xml><?xml version="1.0" encoding="utf-8"?>
 <p:sld xmlns:a="http://schemas.openxmlformats.org/drawingml/2006/main" xmlns:p="http://schemas.openxmlformats.org/presentationml/2006/main" xmlns:r="http://schemas.openxmlformats.org/officeDocument/2006/relationships">
   <p:cSld>
     <p:spTree>
@@ -9093,7 +9497,7 @@
 </p:sld>
 </file>
 
-<file path=ppt/slides/slide34.xml><?xml version="1.0" encoding="utf-8"?>
+<file path=ppt/slides/slide35.xml><?xml version="1.0" encoding="utf-8"?>
 <p:sld xmlns:a="http://schemas.openxmlformats.org/drawingml/2006/main" xmlns:p="http://schemas.openxmlformats.org/presentationml/2006/main" xmlns:r="http://schemas.openxmlformats.org/officeDocument/2006/relationships">
   <p:cSld>
     <p:spTree>
@@ -9248,171 +9652,6 @@
                 </a:solidFill>
               </a:rPr>
               <a:t>Recognise the three lines? In Lab 1, Stage 3 you translate exactly this function by hand and hand it to Z3. You will be doing ESBMC's job yourself.</a:t>
-            </a:r>
-          </a:p>
-        </p:txBody>
-      </p:sp>
-    </p:spTree>
-  </p:cSld>
-  <p:clrMapOvr>
-    <a:masterClrMapping/>
-  </p:clrMapOvr>
-</p:sld>
-</file>
-
-<file path=ppt/slides/slide35.xml><?xml version="1.0" encoding="utf-8"?>
-<p:sld xmlns:a="http://schemas.openxmlformats.org/drawingml/2006/main" xmlns:p="http://schemas.openxmlformats.org/presentationml/2006/main" xmlns:r="http://schemas.openxmlformats.org/officeDocument/2006/relationships">
-  <p:cSld>
-    <p:spTree>
-      <p:nvGrpSpPr>
-        <p:cNvPr id="1" name=""/>
-        <p:cNvGrpSpPr/>
-        <p:nvPr/>
-      </p:nvGrpSpPr>
-      <p:grpSpPr/>
-      <p:sp>
-        <p:nvSpPr>
-          <p:cNvPr id="2" name="TextBox 1"/>
-          <p:cNvSpPr txBox="1"/>
-          <p:nvPr/>
-        </p:nvSpPr>
-        <p:spPr>
-          <a:xfrm>
-            <a:off x="548640" y="365760"/>
-            <a:ext cx="11064240" cy="1005840"/>
-          </a:xfrm>
-          <a:prstGeom prst="rect">
-            <a:avLst/>
-          </a:prstGeom>
-          <a:noFill/>
-        </p:spPr>
-        <p:txBody>
-          <a:bodyPr wrap="square">
-            <a:spAutoFit/>
-          </a:bodyPr>
-          <a:lstStyle/>
-          <a:p>
-            <a:r>
-              <a:rPr sz="3600" b="1">
-                <a:solidFill>
-                  <a:srgbClr val="5A0A7A"/>
-                </a:solidFill>
-              </a:rPr>
-              <a:t>Putting it together</a:t>
-            </a:r>
-          </a:p>
-        </p:txBody>
-      </p:sp>
-      <p:sp>
-        <p:nvSpPr>
-          <p:cNvPr id="3" name="TextBox 2"/>
-          <p:cNvSpPr txBox="1"/>
-          <p:nvPr/>
-        </p:nvSpPr>
-        <p:spPr>
-          <a:xfrm>
-            <a:off x="731520" y="1737360"/>
-            <a:ext cx="10789920" cy="4846320"/>
-          </a:xfrm>
-          <a:prstGeom prst="rect">
-            <a:avLst/>
-          </a:prstGeom>
-          <a:noFill/>
-        </p:spPr>
-        <p:txBody>
-          <a:bodyPr wrap="square">
-            <a:spAutoFit/>
-          </a:bodyPr>
-          <a:lstStyle/>
-          <a:p>
-            <a:pPr>
-              <a:spcAft>
-                <a:spcPts val="0"/>
-              </a:spcAft>
-            </a:pPr>
-            <a:r>
-              <a:rPr sz="2200">
-                <a:solidFill>
-                  <a:srgbClr val="212121"/>
-                </a:solidFill>
-                <a:latin typeface="Courier New"/>
-              </a:rPr>
-              <a:t>⟦program⟧  ∧  ¬P      →  SMT solver</a:t>
-            </a:r>
-          </a:p>
-          <a:p>
-            <a:pPr>
-              <a:spcAft>
-                <a:spcPts val="800"/>
-              </a:spcAft>
-            </a:pPr>
-            <a:r>
-              <a:rPr sz="2600">
-                <a:solidFill>
-                  <a:srgbClr val="212121"/>
-                </a:solidFill>
-              </a:rPr>
-              <a:t/>
-            </a:r>
-          </a:p>
-          <a:p>
-            <a:pPr>
-              <a:spcAft>
-                <a:spcPts val="800"/>
-              </a:spcAft>
-            </a:pPr>
-            <a:r>
-              <a:rPr sz="2600">
-                <a:solidFill>
-                  <a:srgbClr val="212121"/>
-                </a:solidFill>
-              </a:rPr>
-              <a:t>sat — the model assigns every input and every choice: replayed in program order, that is the counterexample trace.</a:t>
-            </a:r>
-          </a:p>
-          <a:p>
-            <a:pPr>
-              <a:spcAft>
-                <a:spcPts val="800"/>
-              </a:spcAft>
-            </a:pPr>
-            <a:r>
-              <a:rPr sz="2600">
-                <a:solidFill>
-                  <a:srgbClr val="212121"/>
-                </a:solidFill>
-              </a:rPr>
-              <a:t>unsat — no execution within the bound violates P.</a:t>
-            </a:r>
-          </a:p>
-          <a:p>
-            <a:pPr>
-              <a:spcAft>
-                <a:spcPts val="800"/>
-              </a:spcAft>
-            </a:pPr>
-            <a:r>
-              <a:rPr sz="2600">
-                <a:solidFill>
-                  <a:srgbClr val="212121"/>
-                </a:solidFill>
-              </a:rPr>
-              <a:t/>
-            </a:r>
-          </a:p>
-          <a:p>
-            <a:pPr>
-              <a:spcAft>
-                <a:spcPts val="800"/>
-              </a:spcAft>
-            </a:pPr>
-            <a:r>
-              <a:rPr sz="2600">
-                <a:solidFill>
-                  <a:srgbClr val="212121"/>
-                </a:solidFill>
-              </a:rPr>
-              <a:t>One formula, every path at once. That is why nobody has to enumerate 2⁶⁴ test cases.</a:t>
             </a:r>
           </a:p>
         </p:txBody>
@@ -9463,7 +9702,7 @@
                   <a:srgbClr val="5A0A7A"/>
                 </a:solidFill>
               </a:rPr>
-              <a:t>Anatomy of a counterexample</a:t>
+              <a:t>Putting it together</a:t>
             </a:r>
           </a:p>
         </p:txBody>
@@ -9476,8 +9715,8 @@
         </p:nvSpPr>
         <p:spPr>
           <a:xfrm>
-            <a:off x="731520" y="1463040"/>
-            <a:ext cx="10789920" cy="5120640"/>
+            <a:off x="731520" y="1737360"/>
+            <a:ext cx="10789920" cy="4846320"/>
           </a:xfrm>
           <a:prstGeom prst="rect">
             <a:avLst/>
@@ -9496,103 +9735,23 @@
               </a:spcAft>
             </a:pPr>
             <a:r>
-              <a:rPr sz="1800">
+              <a:rPr sz="2200">
                 <a:solidFill>
                   <a:srgbClr val="212121"/>
                 </a:solidFill>
                 <a:latin typeface="Courier New"/>
               </a:rPr>
-              <a:t>State 3  file offbyone.c  line 15</a:t>
-            </a:r>
-          </a:p>
-          <a:p>
-            <a:pPr>
-              <a:spcAft>
-                <a:spcPts val="0"/>
-              </a:spcAft>
-            </a:pPr>
-            <a:r>
-              <a:rPr sz="1800">
-                <a:solidFill>
-                  <a:srgbClr val="212121"/>
-                </a:solidFill>
-                <a:latin typeface="Courier New"/>
-              </a:rPr>
-              <a:t>  i = 5 (00000000 ... 101)      ← the value the solver chose</a:t>
-            </a:r>
-          </a:p>
-          <a:p>
-            <a:pPr>
-              <a:spcAft>
-                <a:spcPts val="0"/>
-              </a:spcAft>
-            </a:pPr>
-            <a:r>
-              <a:rPr sz="1800">
-                <a:solidFill>
-                  <a:srgbClr val="212121"/>
-                </a:solidFill>
-                <a:latin typeface="Courier New"/>
-              </a:rPr>
-              <a:t>...</a:t>
-            </a:r>
-          </a:p>
-          <a:p>
-            <a:pPr>
-              <a:spcAft>
-                <a:spcPts val="0"/>
-              </a:spcAft>
-            </a:pPr>
-            <a:r>
-              <a:rPr sz="1800">
-                <a:solidFill>
-                  <a:srgbClr val="212121"/>
-                </a:solidFill>
-                <a:latin typeface="Courier New"/>
-              </a:rPr>
-              <a:t>Violated property:</a:t>
-            </a:r>
-          </a:p>
-          <a:p>
-            <a:pPr>
-              <a:spcAft>
-                <a:spcPts val="0"/>
-              </a:spcAft>
-            </a:pPr>
-            <a:r>
-              <a:rPr sz="1800">
-                <a:solidFill>
-                  <a:srgbClr val="212121"/>
-                </a:solidFill>
-                <a:latin typeface="Courier New"/>
-              </a:rPr>
-              <a:t>  array bounds violated: a[i]   ← what broke</a:t>
-            </a:r>
-          </a:p>
-          <a:p>
-            <a:pPr>
-              <a:spcAft>
-                <a:spcPts val="0"/>
-              </a:spcAft>
-            </a:pPr>
-            <a:r>
-              <a:rPr sz="1800">
-                <a:solidFill>
-                  <a:srgbClr val="212121"/>
-                </a:solidFill>
-                <a:latin typeface="Courier New"/>
-              </a:rPr>
-              <a:t>  CWE: CWE-787                   ← the vulnerability class</a:t>
-            </a:r>
-          </a:p>
-          <a:p>
-            <a:pPr>
-              <a:spcAft>
-                <a:spcPts val="800"/>
-              </a:spcAft>
-            </a:pPr>
-            <a:r>
-              <a:rPr sz="2200">
+              <a:t>⟦program⟧  ∧  ¬P      →  SMT solver</a:t>
+            </a:r>
+          </a:p>
+          <a:p>
+            <a:pPr>
+              <a:spcAft>
+                <a:spcPts val="800"/>
+              </a:spcAft>
+            </a:pPr>
+            <a:r>
+              <a:rPr sz="2600">
                 <a:solidFill>
                   <a:srgbClr val="212121"/>
                 </a:solidFill>
@@ -9607,27 +9766,57 @@
               </a:spcAft>
             </a:pPr>
             <a:r>
-              <a:rPr sz="2200">
-                <a:solidFill>
-                  <a:srgbClr val="212121"/>
-                </a:solidFill>
-              </a:rPr>
-              <a:t>Read it bottom-up: first what was violated, then scroll up for the values that caused it.</a:t>
-            </a:r>
-          </a:p>
-          <a:p>
-            <a:pPr>
-              <a:spcAft>
-                <a:spcPts val="800"/>
-              </a:spcAft>
-            </a:pPr>
-            <a:r>
-              <a:rPr sz="2200">
-                <a:solidFill>
-                  <a:srgbClr val="212121"/>
-                </a:solidFill>
-              </a:rPr>
-              <a:t>Those values are a ready-made failing test case — keep them.</a:t>
+              <a:rPr sz="2600">
+                <a:solidFill>
+                  <a:srgbClr val="212121"/>
+                </a:solidFill>
+              </a:rPr>
+              <a:t>sat — the model assigns every input and every choice: replayed in program order, that is the counterexample trace.</a:t>
+            </a:r>
+          </a:p>
+          <a:p>
+            <a:pPr>
+              <a:spcAft>
+                <a:spcPts val="800"/>
+              </a:spcAft>
+            </a:pPr>
+            <a:r>
+              <a:rPr sz="2600">
+                <a:solidFill>
+                  <a:srgbClr val="212121"/>
+                </a:solidFill>
+              </a:rPr>
+              <a:t>unsat — no execution within the bound violates P.</a:t>
+            </a:r>
+          </a:p>
+          <a:p>
+            <a:pPr>
+              <a:spcAft>
+                <a:spcPts val="800"/>
+              </a:spcAft>
+            </a:pPr>
+            <a:r>
+              <a:rPr sz="2600">
+                <a:solidFill>
+                  <a:srgbClr val="212121"/>
+                </a:solidFill>
+              </a:rPr>
+              <a:t/>
+            </a:r>
+          </a:p>
+          <a:p>
+            <a:pPr>
+              <a:spcAft>
+                <a:spcPts val="800"/>
+              </a:spcAft>
+            </a:pPr>
+            <a:r>
+              <a:rPr sz="2600">
+                <a:solidFill>
+                  <a:srgbClr val="212121"/>
+                </a:solidFill>
+              </a:rPr>
+              <a:t>One formula, every path at once. That is why nobody has to enumerate 2⁶⁴ test cases.</a:t>
             </a:r>
           </a:p>
         </p:txBody>
@@ -9678,7 +9867,7 @@
                   <a:srgbClr val="5A0A7A"/>
                 </a:solidFill>
               </a:rPr>
-              <a:t>Live: the whole pipeline on five lines</a:t>
+              <a:t>Anatomy of a counterexample</a:t>
             </a:r>
           </a:p>
         </p:txBody>
@@ -9717,7 +9906,7 @@
                 </a:solidFill>
                 <a:latin typeface="Courier New"/>
               </a:rPr>
-              <a:t>int main(void)</a:t>
+              <a:t>State 3  file offbyone.c  line 15</a:t>
             </a:r>
           </a:p>
           <a:p>
@@ -9733,7 +9922,7 @@
                 </a:solidFill>
                 <a:latin typeface="Courier New"/>
               </a:rPr>
-              <a:t>{</a:t>
+              <a:t>  i = 5 (00000000 ... 101)      ← the value the solver chose</a:t>
             </a:r>
           </a:p>
           <a:p>
@@ -9749,7 +9938,7 @@
                 </a:solidFill>
                 <a:latin typeface="Courier New"/>
               </a:rPr>
-              <a:t>  int a[5];</a:t>
+              <a:t>...</a:t>
             </a:r>
           </a:p>
           <a:p>
@@ -9765,7 +9954,7 @@
                 </a:solidFill>
                 <a:latin typeface="Courier New"/>
               </a:rPr>
-              <a:t>  for (int i = 0; i &lt;= 5; i++)</a:t>
+              <a:t>Violated property:</a:t>
             </a:r>
           </a:p>
           <a:p>
@@ -9781,7 +9970,7 @@
                 </a:solidFill>
                 <a:latin typeface="Courier New"/>
               </a:rPr>
-              <a:t>    a[i] = i;</a:t>
+              <a:t>  array bounds violated: a[i]   ← what broke</a:t>
             </a:r>
           </a:p>
           <a:p>
@@ -9797,21 +9986,20 @@
                 </a:solidFill>
                 <a:latin typeface="Courier New"/>
               </a:rPr>
-              <a:t>}</a:t>
-            </a:r>
-          </a:p>
-          <a:p>
-            <a:pPr>
-              <a:spcAft>
-                <a:spcPts val="0"/>
-              </a:spcAft>
-            </a:pPr>
-            <a:r>
-              <a:rPr sz="1800">
-                <a:solidFill>
-                  <a:srgbClr val="212121"/>
-                </a:solidFill>
-                <a:latin typeface="Courier New"/>
+              <a:t>  CWE: CWE-787                   ← the vulnerability class</a:t>
+            </a:r>
+          </a:p>
+          <a:p>
+            <a:pPr>
+              <a:spcAft>
+                <a:spcPts val="800"/>
+              </a:spcAft>
+            </a:pPr>
+            <a:r>
+              <a:rPr sz="2200">
+                <a:solidFill>
+                  <a:srgbClr val="212121"/>
+                </a:solidFill>
               </a:rPr>
               <a:t/>
             </a:r>
@@ -9819,22 +10007,6 @@
           <a:p>
             <a:pPr>
               <a:spcAft>
-                <a:spcPts val="0"/>
-              </a:spcAft>
-            </a:pPr>
-            <a:r>
-              <a:rPr sz="1800">
-                <a:solidFill>
-                  <a:srgbClr val="212121"/>
-                </a:solidFill>
-                <a:latin typeface="Courier New"/>
-              </a:rPr>
-              <a:t>$ esbmc offbyone.c --unwind 7</a:t>
-            </a:r>
-          </a:p>
-          <a:p>
-            <a:pPr>
-              <a:spcAft>
                 <a:spcPts val="800"/>
               </a:spcAft>
             </a:pPr>
@@ -9844,7 +10016,7 @@
                   <a:srgbClr val="212121"/>
                 </a:solidFill>
               </a:rPr>
-              <a:t/>
+              <a:t>Read it bottom-up: first what was violated, then scroll up for the values that caused it.</a:t>
             </a:r>
           </a:p>
           <a:p>
@@ -9859,22 +10031,7 @@
                   <a:srgbClr val="212121"/>
                 </a:solidFill>
               </a:rPr>
-              <a:t>Predict first: FAILED or SUCCESSFUL? If FAILED — at which i?</a:t>
-            </a:r>
-          </a:p>
-          <a:p>
-            <a:pPr>
-              <a:spcAft>
-                <a:spcPts val="800"/>
-              </a:spcAft>
-            </a:pPr>
-            <a:r>
-              <a:rPr sz="2200">
-                <a:solidFill>
-                  <a:srgbClr val="212121"/>
-                </a:solidFill>
-              </a:rPr>
-              <a:t>Then we read the trace together, bottom-up.</a:t>
+              <a:t>Those values are a ready-made failing test case — keep them.</a:t>
             </a:r>
           </a:p>
         </p:txBody>
@@ -9925,7 +10082,7 @@
                   <a:srgbClr val="5A0A7A"/>
                 </a:solidFill>
               </a:rPr>
-              <a:t>Modelling the environment: a preview</a:t>
+              <a:t>Live: the whole pipeline on five lines</a:t>
             </a:r>
           </a:p>
         </p:txBody>
@@ -9964,7 +10121,7 @@
                 </a:solidFill>
                 <a:latin typeface="Courier New"/>
               </a:rPr>
-              <a:t>int x = nondet_int();              /* every value at once */</a:t>
+              <a:t>int main(void)</a:t>
             </a:r>
           </a:p>
           <a:p>
@@ -9980,7 +10137,7 @@
                 </a:solidFill>
                 <a:latin typeface="Courier New"/>
               </a:rPr>
-              <a:t>__ESBMC_assume(x &gt; 0 &amp;&amp; x &lt; 100);  /* now: every value in 1..99 */</a:t>
+              <a:t>{</a:t>
             </a:r>
           </a:p>
           <a:p>
@@ -9996,7 +10153,87 @@
                 </a:solidFill>
                 <a:latin typeface="Courier New"/>
               </a:rPr>
-              <a:t>assert(property(x));               /* must hold for ALL of them */</a:t>
+              <a:t>  int a[5];</a:t>
+            </a:r>
+          </a:p>
+          <a:p>
+            <a:pPr>
+              <a:spcAft>
+                <a:spcPts val="0"/>
+              </a:spcAft>
+            </a:pPr>
+            <a:r>
+              <a:rPr sz="1800">
+                <a:solidFill>
+                  <a:srgbClr val="212121"/>
+                </a:solidFill>
+                <a:latin typeface="Courier New"/>
+              </a:rPr>
+              <a:t>  for (int i = 0; i &lt;= 5; i++)</a:t>
+            </a:r>
+          </a:p>
+          <a:p>
+            <a:pPr>
+              <a:spcAft>
+                <a:spcPts val="0"/>
+              </a:spcAft>
+            </a:pPr>
+            <a:r>
+              <a:rPr sz="1800">
+                <a:solidFill>
+                  <a:srgbClr val="212121"/>
+                </a:solidFill>
+                <a:latin typeface="Courier New"/>
+              </a:rPr>
+              <a:t>    a[i] = i;</a:t>
+            </a:r>
+          </a:p>
+          <a:p>
+            <a:pPr>
+              <a:spcAft>
+                <a:spcPts val="0"/>
+              </a:spcAft>
+            </a:pPr>
+            <a:r>
+              <a:rPr sz="1800">
+                <a:solidFill>
+                  <a:srgbClr val="212121"/>
+                </a:solidFill>
+                <a:latin typeface="Courier New"/>
+              </a:rPr>
+              <a:t>}</a:t>
+            </a:r>
+          </a:p>
+          <a:p>
+            <a:pPr>
+              <a:spcAft>
+                <a:spcPts val="0"/>
+              </a:spcAft>
+            </a:pPr>
+            <a:r>
+              <a:rPr sz="1800">
+                <a:solidFill>
+                  <a:srgbClr val="212121"/>
+                </a:solidFill>
+                <a:latin typeface="Courier New"/>
+              </a:rPr>
+              <a:t/>
+            </a:r>
+          </a:p>
+          <a:p>
+            <a:pPr>
+              <a:spcAft>
+                <a:spcPts val="0"/>
+              </a:spcAft>
+            </a:pPr>
+            <a:r>
+              <a:rPr sz="1800">
+                <a:solidFill>
+                  <a:srgbClr val="212121"/>
+                </a:solidFill>
+                <a:latin typeface="Courier New"/>
+              </a:rPr>
+              <a:t>$ esbmc offbyone.c --unwind 7</a:t>
             </a:r>
           </a:p>
           <a:p>
@@ -10026,7 +10263,7 @@
                   <a:srgbClr val="212121"/>
                 </a:solidFill>
               </a:rPr>
-              <a:t>One nondeterministic input = all tests of that input at once.</a:t>
+              <a:t>Predict first: FAILED or SUCCESSFUL? If FAILED — at which i?</a:t>
             </a:r>
           </a:p>
           <a:p>
@@ -10041,7 +10278,7 @@
                   <a:srgbClr val="212121"/>
                 </a:solidFill>
               </a:rPr>
-              <a:t>In Session 2 you will use these three lines to expose a bug in a program that verifies green as shipped — the tool only checks what you specify.</a:t>
+              <a:t>Then we read the trace together, bottom-up.</a:t>
             </a:r>
           </a:p>
         </p:txBody>
@@ -10092,7 +10329,7 @@
                   <a:srgbClr val="5A0A7A"/>
                 </a:solidFill>
               </a:rPr>
-              <a:t>Beyond one thread</a:t>
+              <a:t>Modelling the environment: a preview</a:t>
             </a:r>
           </a:p>
         </p:txBody>
@@ -10105,8 +10342,8 @@
         </p:nvSpPr>
         <p:spPr>
           <a:xfrm>
-            <a:off x="731520" y="1645920"/>
-            <a:ext cx="10789920" cy="4937760"/>
+            <a:off x="731520" y="1463040"/>
+            <a:ext cx="10789920" cy="5120640"/>
           </a:xfrm>
           <a:prstGeom prst="rect">
             <a:avLst/>
@@ -10121,56 +10358,59 @@
           <a:p>
             <a:pPr>
               <a:spcAft>
-                <a:spcPts val="800"/>
-              </a:spcAft>
-            </a:pPr>
-            <a:r>
-              <a:rPr sz="2400">
-                <a:solidFill>
-                  <a:srgbClr val="212121"/>
-                </a:solidFill>
-              </a:rPr>
-              <a:t>Two threads of two and one statements already have three interleavings. Real code has billions.</a:t>
-            </a:r>
-          </a:p>
-          <a:p>
-            <a:pPr>
-              <a:spcAft>
-                <a:spcPts val="800"/>
-              </a:spcAft>
-            </a:pPr>
-            <a:r>
-              <a:rPr sz="2400">
-                <a:solidFill>
-                  <a:srgbClr val="212121"/>
-                </a:solidFill>
-              </a:rPr>
-              <a:t>Run the program a million times and the bad interleaving may never show up — Therac-25's bug hid exactly this way.</a:t>
-            </a:r>
-          </a:p>
-          <a:p>
-            <a:pPr>
-              <a:spcAft>
-                <a:spcPts val="800"/>
-              </a:spcAft>
-            </a:pPr>
-            <a:r>
-              <a:rPr sz="2400">
-                <a:solidFill>
-                  <a:srgbClr val="212121"/>
-                </a:solidFill>
-              </a:rPr>
-              <a:t>A model checker enumerates every interleaving up to a bound, including the one that kills your assertion.</a:t>
-            </a:r>
-          </a:p>
-          <a:p>
-            <a:pPr>
-              <a:spcAft>
-                <a:spcPts val="800"/>
-              </a:spcAft>
-            </a:pPr>
-            <a:r>
-              <a:rPr sz="2400">
+                <a:spcPts val="0"/>
+              </a:spcAft>
+            </a:pPr>
+            <a:r>
+              <a:rPr sz="1800">
+                <a:solidFill>
+                  <a:srgbClr val="212121"/>
+                </a:solidFill>
+                <a:latin typeface="Courier New"/>
+              </a:rPr>
+              <a:t>int x = nondet_int();              /* every value at once */</a:t>
+            </a:r>
+          </a:p>
+          <a:p>
+            <a:pPr>
+              <a:spcAft>
+                <a:spcPts val="0"/>
+              </a:spcAft>
+            </a:pPr>
+            <a:r>
+              <a:rPr sz="1800">
+                <a:solidFill>
+                  <a:srgbClr val="212121"/>
+                </a:solidFill>
+                <a:latin typeface="Courier New"/>
+              </a:rPr>
+              <a:t>__ESBMC_assume(x &gt; 0 &amp;&amp; x &lt; 100);  /* now: every value in 1..99 */</a:t>
+            </a:r>
+          </a:p>
+          <a:p>
+            <a:pPr>
+              <a:spcAft>
+                <a:spcPts val="0"/>
+              </a:spcAft>
+            </a:pPr>
+            <a:r>
+              <a:rPr sz="1800">
+                <a:solidFill>
+                  <a:srgbClr val="212121"/>
+                </a:solidFill>
+                <a:latin typeface="Courier New"/>
+              </a:rPr>
+              <a:t>assert(property(x));               /* must hold for ALL of them */</a:t>
+            </a:r>
+          </a:p>
+          <a:p>
+            <a:pPr>
+              <a:spcAft>
+                <a:spcPts val="800"/>
+              </a:spcAft>
+            </a:pPr>
+            <a:r>
+              <a:rPr sz="2200">
                 <a:solidFill>
                   <a:srgbClr val="212121"/>
                 </a:solidFill>
@@ -10185,12 +10425,27 @@
               </a:spcAft>
             </a:pPr>
             <a:r>
-              <a:rPr sz="2400">
-                <a:solidFill>
-                  <a:srgbClr val="212121"/>
-                </a:solidFill>
-              </a:rPr>
-              <a:t>Session 2, Lab 4: you write down the killer interleaving before the tool finds it.</a:t>
+              <a:rPr sz="2200">
+                <a:solidFill>
+                  <a:srgbClr val="212121"/>
+                </a:solidFill>
+              </a:rPr>
+              <a:t>One nondeterministic input = all tests of that input at once.</a:t>
+            </a:r>
+          </a:p>
+          <a:p>
+            <a:pPr>
+              <a:spcAft>
+                <a:spcPts val="800"/>
+              </a:spcAft>
+            </a:pPr>
+            <a:r>
+              <a:rPr sz="2200">
+                <a:solidFill>
+                  <a:srgbClr val="212121"/>
+                </a:solidFill>
+              </a:rPr>
+              <a:t>In Session 2 you will use these three lines to expose a bug in a program that verifies green as shipped — the tool only checks what you specify.</a:t>
             </a:r>
           </a:p>
         </p:txBody>
@@ -10435,7 +10690,7 @@
                   <a:srgbClr val="5A0A7A"/>
                 </a:solidFill>
               </a:rPr>
-              <a:t>Homework for your intuition</a:t>
+              <a:t>Beyond one thread</a:t>
             </a:r>
           </a:p>
         </p:txBody>
@@ -10448,8 +10703,8 @@
         </p:nvSpPr>
         <p:spPr>
           <a:xfrm>
-            <a:off x="731520" y="1828800"/>
-            <a:ext cx="10789920" cy="4754880"/>
+            <a:off x="731520" y="1645920"/>
+            <a:ext cx="10789920" cy="4937760"/>
           </a:xfrm>
           <a:prstGeom prst="rect">
             <a:avLst/>
@@ -10464,43 +10719,56 @@
           <a:p>
             <a:pPr>
               <a:spcAft>
-                <a:spcPts val="0"/>
-              </a:spcAft>
-            </a:pPr>
-            <a:r>
-              <a:rPr sz="2200">
-                <a:solidFill>
-                  <a:srgbClr val="212121"/>
-                </a:solidFill>
-                <a:latin typeface="Courier New"/>
-              </a:rPr>
-              <a:t>double w = 0.1 + 0.2;</a:t>
-            </a:r>
-          </a:p>
-          <a:p>
-            <a:pPr>
-              <a:spcAft>
-                <a:spcPts val="0"/>
-              </a:spcAft>
-            </a:pPr>
-            <a:r>
-              <a:rPr sz="2200">
-                <a:solidFill>
-                  <a:srgbClr val="212121"/>
-                </a:solidFill>
-                <a:latin typeface="Courier New"/>
-              </a:rPr>
-              <a:t>assert(w == 0.3);</a:t>
-            </a:r>
-          </a:p>
-          <a:p>
-            <a:pPr>
-              <a:spcAft>
-                <a:spcPts val="800"/>
-              </a:spcAft>
-            </a:pPr>
-            <a:r>
-              <a:rPr sz="2600">
+                <a:spcPts val="800"/>
+              </a:spcAft>
+            </a:pPr>
+            <a:r>
+              <a:rPr sz="2400">
+                <a:solidFill>
+                  <a:srgbClr val="212121"/>
+                </a:solidFill>
+              </a:rPr>
+              <a:t>Two threads of two and one statements already have three interleavings. Real code has billions.</a:t>
+            </a:r>
+          </a:p>
+          <a:p>
+            <a:pPr>
+              <a:spcAft>
+                <a:spcPts val="800"/>
+              </a:spcAft>
+            </a:pPr>
+            <a:r>
+              <a:rPr sz="2400">
+                <a:solidFill>
+                  <a:srgbClr val="212121"/>
+                </a:solidFill>
+              </a:rPr>
+              <a:t>Run the program a million times and the bad interleaving may never show up — Therac-25's bug hid exactly this way.</a:t>
+            </a:r>
+          </a:p>
+          <a:p>
+            <a:pPr>
+              <a:spcAft>
+                <a:spcPts val="800"/>
+              </a:spcAft>
+            </a:pPr>
+            <a:r>
+              <a:rPr sz="2400">
+                <a:solidFill>
+                  <a:srgbClr val="212121"/>
+                </a:solidFill>
+              </a:rPr>
+              <a:t>A model checker enumerates every interleaving up to a bound, including the one that kills your assertion.</a:t>
+            </a:r>
+          </a:p>
+          <a:p>
+            <a:pPr>
+              <a:spcAft>
+                <a:spcPts val="800"/>
+              </a:spcAft>
+            </a:pPr>
+            <a:r>
+              <a:rPr sz="2400">
                 <a:solidFill>
                   <a:srgbClr val="212121"/>
                 </a:solidFill>
@@ -10515,57 +10783,12 @@
               </a:spcAft>
             </a:pPr>
             <a:r>
-              <a:rPr sz="2600">
-                <a:solidFill>
-                  <a:srgbClr val="212121"/>
-                </a:solidFill>
-              </a:rPr>
-              <a:t>FAILED or SUCCESSFUL?</a:t>
-            </a:r>
-          </a:p>
-          <a:p>
-            <a:pPr>
-              <a:spcAft>
-                <a:spcPts val="800"/>
-              </a:spcAft>
-            </a:pPr>
-            <a:r>
-              <a:rPr sz="2600">
-                <a:solidFill>
-                  <a:srgbClr val="212121"/>
-                </a:solidFill>
-              </a:rPr>
-              <a:t/>
-            </a:r>
-          </a:p>
-          <a:p>
-            <a:pPr>
-              <a:spcAft>
-                <a:spcPts val="800"/>
-              </a:spcAft>
-            </a:pPr>
-            <a:r>
-              <a:rPr sz="2600">
-                <a:solidFill>
-                  <a:srgbClr val="212121"/>
-                </a:solidFill>
-              </a:rPr>
-              <a:t>Bring your answer to Session 2 — Lab 4 settles it with a solver that does exact IEEE-754 arithmetic.</a:t>
-            </a:r>
-          </a:p>
-          <a:p>
-            <a:pPr lvl="1">
-              <a:spcAft>
-                <a:spcPts val="800"/>
-              </a:spcAft>
-            </a:pPr>
-            <a:r>
               <a:rPr sz="2400">
                 <a:solidFill>
                   <a:srgbClr val="212121"/>
                 </a:solidFill>
               </a:rPr>
-              <a:t>Hint: 0.1 in binary is like 1/3 in decimal.</a:t>
+              <a:t>Session 2, Lab 4: you write down the killer interleaving before the tool finds it.</a:t>
             </a:r>
           </a:p>
         </p:txBody>
@@ -10616,7 +10839,7 @@
                   <a:srgbClr val="5A0A7A"/>
                 </a:solidFill>
               </a:rPr>
-              <a:t>Exercise 2 — Predict the Verdict (15 min)</a:t>
+              <a:t>Homework for your intuition</a:t>
             </a:r>
           </a:p>
         </p:txBody>
@@ -10629,8 +10852,8 @@
         </p:nvSpPr>
         <p:spPr>
           <a:xfrm>
-            <a:off x="731520" y="1463040"/>
-            <a:ext cx="10789920" cy="5120640"/>
+            <a:off x="731520" y="1828800"/>
+            <a:ext cx="10789920" cy="4754880"/>
           </a:xfrm>
           <a:prstGeom prst="rect">
             <a:avLst/>
@@ -10645,7 +10868,7 @@
           <a:p>
             <a:pPr>
               <a:spcAft>
-                <a:spcPts val="800"/>
+                <a:spcPts val="0"/>
               </a:spcAft>
             </a:pPr>
             <a:r>
@@ -10653,14 +10876,15 @@
                 <a:solidFill>
                   <a:srgbClr val="212121"/>
                 </a:solidFill>
-              </a:rPr>
-              <a:t>Groups of 3–4. Three short C programs on the handout (predict1.c, predict2.c, predict3.c).</a:t>
-            </a:r>
-          </a:p>
-          <a:p>
-            <a:pPr>
-              <a:spcAft>
-                <a:spcPts val="800"/>
+                <a:latin typeface="Courier New"/>
+              </a:rPr>
+              <a:t>double w = 0.1 + 0.2;</a:t>
+            </a:r>
+          </a:p>
+          <a:p>
+            <a:pPr>
+              <a:spcAft>
+                <a:spcPts val="0"/>
               </a:spcAft>
             </a:pPr>
             <a:r>
@@ -10668,8 +10892,69 @@
                 <a:solidFill>
                   <a:srgbClr val="212121"/>
                 </a:solidFill>
-              </a:rPr>
-              <a:t>For each program, write down BEFORE we run anything:</a:t>
+                <a:latin typeface="Courier New"/>
+              </a:rPr>
+              <a:t>assert(w == 0.3);</a:t>
+            </a:r>
+          </a:p>
+          <a:p>
+            <a:pPr>
+              <a:spcAft>
+                <a:spcPts val="800"/>
+              </a:spcAft>
+            </a:pPr>
+            <a:r>
+              <a:rPr sz="2600">
+                <a:solidFill>
+                  <a:srgbClr val="212121"/>
+                </a:solidFill>
+              </a:rPr>
+              <a:t/>
+            </a:r>
+          </a:p>
+          <a:p>
+            <a:pPr>
+              <a:spcAft>
+                <a:spcPts val="800"/>
+              </a:spcAft>
+            </a:pPr>
+            <a:r>
+              <a:rPr sz="2600">
+                <a:solidFill>
+                  <a:srgbClr val="212121"/>
+                </a:solidFill>
+              </a:rPr>
+              <a:t>FAILED or SUCCESSFUL?</a:t>
+            </a:r>
+          </a:p>
+          <a:p>
+            <a:pPr>
+              <a:spcAft>
+                <a:spcPts val="800"/>
+              </a:spcAft>
+            </a:pPr>
+            <a:r>
+              <a:rPr sz="2600">
+                <a:solidFill>
+                  <a:srgbClr val="212121"/>
+                </a:solidFill>
+              </a:rPr>
+              <a:t/>
+            </a:r>
+          </a:p>
+          <a:p>
+            <a:pPr>
+              <a:spcAft>
+                <a:spcPts val="800"/>
+              </a:spcAft>
+            </a:pPr>
+            <a:r>
+              <a:rPr sz="2600">
+                <a:solidFill>
+                  <a:srgbClr val="212121"/>
+                </a:solidFill>
+              </a:rPr>
+              <a:t>Bring your answer to Session 2 — Lab 4 settles it with a solver that does exact IEEE-754 arithmetic.</a:t>
             </a:r>
           </a:p>
           <a:p>
@@ -10679,42 +10964,12 @@
               </a:spcAft>
             </a:pPr>
             <a:r>
-              <a:rPr sz="2000">
-                <a:solidFill>
-                  <a:srgbClr val="212121"/>
-                </a:solidFill>
-              </a:rPr>
-              <a:t>Will the model checker say VERIFICATION FAILED or SUCCESSFUL?</a:t>
-            </a:r>
-          </a:p>
-          <a:p>
-            <a:pPr lvl="1">
-              <a:spcAft>
-                <a:spcPts val="800"/>
-              </a:spcAft>
-            </a:pPr>
-            <a:r>
-              <a:rPr sz="2000">
-                <a:solidFill>
-                  <a:srgbClr val="212121"/>
-                </a:solidFill>
-              </a:rPr>
-              <a:t>If FAILED — which line is the culprit?</a:t>
-            </a:r>
-          </a:p>
-          <a:p>
-            <a:pPr>
-              <a:spcAft>
-                <a:spcPts val="800"/>
-              </a:spcAft>
-            </a:pPr>
-            <a:r>
-              <a:rPr sz="2200">
-                <a:solidFill>
-                  <a:srgbClr val="212121"/>
-                </a:solidFill>
-              </a:rPr>
-              <a:t>Then we run ESBMC live and settle every bet.</a:t>
+              <a:rPr sz="2400">
+                <a:solidFill>
+                  <a:srgbClr val="212121"/>
+                </a:solidFill>
+              </a:rPr>
+              <a:t>Hint: 0.1 in binary is like 1/3 in decimal.</a:t>
             </a:r>
           </a:p>
         </p:txBody>
@@ -10765,7 +11020,7 @@
                   <a:srgbClr val="5A0A7A"/>
                 </a:solidFill>
               </a:rPr>
-              <a:t>Who uses this? — Model checking</a:t>
+              <a:t>Exercise 2 — Predict the Verdict (15 min)</a:t>
             </a:r>
           </a:p>
         </p:txBody>
@@ -10803,7 +11058,7 @@
                   <a:srgbClr val="212121"/>
                 </a:solidFill>
               </a:rPr>
-              <a:t>Amazon Web Services — CBMC proves memory safety of the TLS library s2n; bounded proofs run in CI on every commit</a:t>
+              <a:t>Groups of 3–4. Three short C programs on the handout (predict1.c, predict2.c, predict3.c).</a:t>
             </a:r>
           </a:p>
           <a:p>
@@ -10818,7 +11073,37 @@
                   <a:srgbClr val="212121"/>
                 </a:solidFill>
               </a:rPr>
-              <a:t>ESBMC / CBMC — the tools from tonight's demos; compete yearly in SV-COMP on tens of thousands of benchmarks</a:t>
+              <a:t>For each program, write down BEFORE we run anything:</a:t>
+            </a:r>
+          </a:p>
+          <a:p>
+            <a:pPr lvl="1">
+              <a:spcAft>
+                <a:spcPts val="800"/>
+              </a:spcAft>
+            </a:pPr>
+            <a:r>
+              <a:rPr sz="2000">
+                <a:solidFill>
+                  <a:srgbClr val="212121"/>
+                </a:solidFill>
+              </a:rPr>
+              <a:t>Will the model checker say VERIFICATION FAILED or SUCCESSFUL?</a:t>
+            </a:r>
+          </a:p>
+          <a:p>
+            <a:pPr lvl="1">
+              <a:spcAft>
+                <a:spcPts val="800"/>
+              </a:spcAft>
+            </a:pPr>
+            <a:r>
+              <a:rPr sz="2000">
+                <a:solidFill>
+                  <a:srgbClr val="212121"/>
+                </a:solidFill>
+              </a:rPr>
+              <a:t>If FAILED — which line is the culprit?</a:t>
             </a:r>
           </a:p>
           <a:p>
@@ -10833,7 +11118,7 @@
                   <a:srgbClr val="212121"/>
                 </a:solidFill>
               </a:rPr>
-              <a:t>The counterexample you saw for getpassword.c is the same artefact AWS engineers read when a proof fails</a:t>
+              <a:t>Then we run ESBMC live and settle every bet.</a:t>
             </a:r>
           </a:p>
         </p:txBody>
@@ -10884,7 +11169,7 @@
                   <a:srgbClr val="5A0A7A"/>
                 </a:solidFill>
               </a:rPr>
-              <a:t>Who uses this? — Symbolic execution &amp; fuzzing</a:t>
+              <a:t>Who uses this? — Model checking</a:t>
             </a:r>
           </a:p>
         </p:txBody>
@@ -10922,7 +11207,7 @@
                   <a:srgbClr val="212121"/>
                 </a:solidFill>
               </a:rPr>
-              <a:t>KLEE found 56 serious bugs in coreutils, busybox and Minix — including three in coreutils that had survived 15 years of testing</a:t>
+              <a:t>Amazon Web Services — CBMC proves memory safety of the TLS library s2n; bounded proofs run in CI on every commit</a:t>
             </a:r>
           </a:p>
           <a:p>
@@ -10937,7 +11222,7 @@
                   <a:srgbClr val="212121"/>
                 </a:solidFill>
               </a:rPr>
-              <a:t>Microsoft SAGE fuzzed Windows file parsers with symbolic execution; it found ~1/3 of all bugs caught by file fuzzing during Windows 7 development — running last, after every other tool</a:t>
+              <a:t>ESBMC / CBMC — the tools from tonight's demos; compete yearly in SV-COMP on tens of thousands of benchmarks</a:t>
             </a:r>
           </a:p>
           <a:p>
@@ -10952,22 +11237,7 @@
                   <a:srgbClr val="212121"/>
                 </a:solidFill>
               </a:rPr>
-              <a:t>AFL / OSS-Fuzz — Google fuzzes ~1,000 open-source projects continuously; tens of thousands of bugs found</a:t>
-            </a:r>
-          </a:p>
-          <a:p>
-            <a:pPr>
-              <a:spcAft>
-                <a:spcPts val="800"/>
-              </a:spcAft>
-            </a:pPr>
-            <a:r>
-              <a:rPr sz="2200">
-                <a:solidFill>
-                  <a:srgbClr val="212121"/>
-                </a:solidFill>
-              </a:rPr>
-              <a:t>The pragmatic cousin of verification: no proofs, ruthless effectiveness</a:t>
+              <a:t>The counterexample you saw for getpassword.c is the same artefact AWS engineers read when a proof fails</a:t>
             </a:r>
           </a:p>
         </p:txBody>
@@ -11018,7 +11288,7 @@
                   <a:srgbClr val="5A0A7A"/>
                 </a:solidFill>
               </a:rPr>
-              <a:t>Who uses this? — Proofs all the way up</a:t>
+              <a:t>Who uses this? — Symbolic execution &amp; fuzzing</a:t>
             </a:r>
           </a:p>
         </p:txBody>
@@ -11056,7 +11326,7 @@
                   <a:srgbClr val="212121"/>
                 </a:solidFill>
               </a:rPr>
-              <a:t>Astrée (abstract interpretation) proved absence of runtime errors in the Airbus A340 fly-by-wire code — 132,000 lines of C — and was then applied to the A380</a:t>
+              <a:t>KLEE found 56 serious bugs in coreutils, busybox and Minix — including three in coreutils that had survived 15 years of testing</a:t>
             </a:r>
           </a:p>
           <a:p>
@@ -11071,7 +11341,7 @@
                   <a:srgbClr val="212121"/>
                 </a:solidFill>
               </a:rPr>
-              <a:t>seL4 — an OS microkernel with a machine-checked proof of functional correctness</a:t>
+              <a:t>Microsoft SAGE fuzzed Windows file parsers with symbolic execution; it found ~1/3 of all bugs caught by file fuzzing during Windows 7 development — running last, after every other tool</a:t>
             </a:r>
           </a:p>
           <a:p>
@@ -11086,7 +11356,22 @@
                   <a:srgbClr val="212121"/>
                 </a:solidFill>
               </a:rPr>
-              <a:t>CompCert — a C compiler with a proof that compilation preserves semantics; six CPU-years of fuzzing found no wrong-code bugs in its verified core, while every other compiler tested failed</a:t>
+              <a:t>AFL / OSS-Fuzz — Google fuzzes ~1,000 open-source projects continuously; tens of thousands of bugs found</a:t>
+            </a:r>
+          </a:p>
+          <a:p>
+            <a:pPr>
+              <a:spcAft>
+                <a:spcPts val="800"/>
+              </a:spcAft>
+            </a:pPr>
+            <a:r>
+              <a:rPr sz="2200">
+                <a:solidFill>
+                  <a:srgbClr val="212121"/>
+                </a:solidFill>
+              </a:rPr>
+              <a:t>The pragmatic cousin of verification: no proofs, ruthless effectiveness</a:t>
             </a:r>
           </a:p>
         </p:txBody>
@@ -11137,7 +11422,7 @@
                   <a:srgbClr val="5A0A7A"/>
                 </a:solidFill>
               </a:rPr>
-              <a:t>Discussion</a:t>
+              <a:t>Who uses this? — Proofs all the way up</a:t>
             </a:r>
           </a:p>
         </p:txBody>
@@ -11150,8 +11435,8 @@
         </p:nvSpPr>
         <p:spPr>
           <a:xfrm>
-            <a:off x="731520" y="2194560"/>
-            <a:ext cx="10789920" cy="4389120"/>
+            <a:off x="731520" y="1463040"/>
+            <a:ext cx="10789920" cy="5120640"/>
           </a:xfrm>
           <a:prstGeom prst="rect">
             <a:avLst/>
@@ -11170,42 +11455,42 @@
               </a:spcAft>
             </a:pPr>
             <a:r>
-              <a:rPr sz="2800">
-                <a:solidFill>
-                  <a:srgbClr val="212121"/>
-                </a:solidFill>
-              </a:rPr>
-              <a:t>If verification can prove the absence of bugs…</a:t>
-            </a:r>
-          </a:p>
-          <a:p>
-            <a:pPr>
-              <a:spcAft>
-                <a:spcPts val="800"/>
-              </a:spcAft>
-            </a:pPr>
-            <a:r>
-              <a:rPr sz="2800">
-                <a:solidFill>
-                  <a:srgbClr val="212121"/>
-                </a:solidFill>
-              </a:rPr>
-              <a:t>why isn't all software verified?</a:t>
-            </a:r>
-          </a:p>
-          <a:p>
-            <a:pPr>
-              <a:spcAft>
-                <a:spcPts val="800"/>
-              </a:spcAft>
-            </a:pPr>
-            <a:r>
-              <a:rPr sz="2800">
-                <a:solidFill>
-                  <a:srgbClr val="212121"/>
-                </a:solidFill>
-              </a:rPr>
-              <a:t>(Let's collect reasons — then I'll tell you which ones the industry actually cites.)</a:t>
+              <a:rPr sz="2200">
+                <a:solidFill>
+                  <a:srgbClr val="212121"/>
+                </a:solidFill>
+              </a:rPr>
+              <a:t>Astrée (abstract interpretation) proved absence of runtime errors in the Airbus A340 fly-by-wire code — 132,000 lines of C — and was then applied to the A380</a:t>
+            </a:r>
+          </a:p>
+          <a:p>
+            <a:pPr>
+              <a:spcAft>
+                <a:spcPts val="800"/>
+              </a:spcAft>
+            </a:pPr>
+            <a:r>
+              <a:rPr sz="2200">
+                <a:solidFill>
+                  <a:srgbClr val="212121"/>
+                </a:solidFill>
+              </a:rPr>
+              <a:t>seL4 — an OS microkernel with a machine-checked proof of functional correctness</a:t>
+            </a:r>
+          </a:p>
+          <a:p>
+            <a:pPr>
+              <a:spcAft>
+                <a:spcPts val="800"/>
+              </a:spcAft>
+            </a:pPr>
+            <a:r>
+              <a:rPr sz="2200">
+                <a:solidFill>
+                  <a:srgbClr val="212121"/>
+                </a:solidFill>
+              </a:rPr>
+              <a:t>CompCert — a C compiler with a proof that compilation preserves semantics; six CPU-years of fuzzing found no wrong-code bugs in its verified core, while every other compiler tested failed</a:t>
             </a:r>
           </a:p>
         </p:txBody>
@@ -11256,6 +11541,125 @@
                   <a:srgbClr val="5A0A7A"/>
                 </a:solidFill>
               </a:rPr>
+              <a:t>Discussion</a:t>
+            </a:r>
+          </a:p>
+        </p:txBody>
+      </p:sp>
+      <p:sp>
+        <p:nvSpPr>
+          <p:cNvPr id="3" name="TextBox 2"/>
+          <p:cNvSpPr txBox="1"/>
+          <p:nvPr/>
+        </p:nvSpPr>
+        <p:spPr>
+          <a:xfrm>
+            <a:off x="731520" y="2194560"/>
+            <a:ext cx="10789920" cy="4389120"/>
+          </a:xfrm>
+          <a:prstGeom prst="rect">
+            <a:avLst/>
+          </a:prstGeom>
+          <a:noFill/>
+        </p:spPr>
+        <p:txBody>
+          <a:bodyPr wrap="square">
+            <a:spAutoFit/>
+          </a:bodyPr>
+          <a:lstStyle/>
+          <a:p>
+            <a:pPr>
+              <a:spcAft>
+                <a:spcPts val="800"/>
+              </a:spcAft>
+            </a:pPr>
+            <a:r>
+              <a:rPr sz="2800">
+                <a:solidFill>
+                  <a:srgbClr val="212121"/>
+                </a:solidFill>
+              </a:rPr>
+              <a:t>If verification can prove the absence of bugs…</a:t>
+            </a:r>
+          </a:p>
+          <a:p>
+            <a:pPr>
+              <a:spcAft>
+                <a:spcPts val="800"/>
+              </a:spcAft>
+            </a:pPr>
+            <a:r>
+              <a:rPr sz="2800">
+                <a:solidFill>
+                  <a:srgbClr val="212121"/>
+                </a:solidFill>
+              </a:rPr>
+              <a:t>why isn't all software verified?</a:t>
+            </a:r>
+          </a:p>
+          <a:p>
+            <a:pPr>
+              <a:spcAft>
+                <a:spcPts val="800"/>
+              </a:spcAft>
+            </a:pPr>
+            <a:r>
+              <a:rPr sz="2800">
+                <a:solidFill>
+                  <a:srgbClr val="212121"/>
+                </a:solidFill>
+              </a:rPr>
+              <a:t>(Let's collect reasons — then I'll tell you which ones the industry actually cites.)</a:t>
+            </a:r>
+          </a:p>
+        </p:txBody>
+      </p:sp>
+    </p:spTree>
+  </p:cSld>
+  <p:clrMapOvr>
+    <a:masterClrMapping/>
+  </p:clrMapOvr>
+</p:sld>
+</file>
+
+<file path=ppt/slides/slide47.xml><?xml version="1.0" encoding="utf-8"?>
+<p:sld xmlns:a="http://schemas.openxmlformats.org/drawingml/2006/main" xmlns:p="http://schemas.openxmlformats.org/presentationml/2006/main" xmlns:r="http://schemas.openxmlformats.org/officeDocument/2006/relationships">
+  <p:cSld>
+    <p:spTree>
+      <p:nvGrpSpPr>
+        <p:cNvPr id="1" name=""/>
+        <p:cNvGrpSpPr/>
+        <p:nvPr/>
+      </p:nvGrpSpPr>
+      <p:grpSpPr/>
+      <p:sp>
+        <p:nvSpPr>
+          <p:cNvPr id="2" name="TextBox 1"/>
+          <p:cNvSpPr txBox="1"/>
+          <p:nvPr/>
+        </p:nvSpPr>
+        <p:spPr>
+          <a:xfrm>
+            <a:off x="548640" y="365760"/>
+            <a:ext cx="11064240" cy="1005840"/>
+          </a:xfrm>
+          <a:prstGeom prst="rect">
+            <a:avLst/>
+          </a:prstGeom>
+          <a:noFill/>
+        </p:spPr>
+        <p:txBody>
+          <a:bodyPr wrap="square">
+            <a:spAutoFit/>
+          </a:bodyPr>
+          <a:lstStyle/>
+          <a:p>
+            <a:r>
+              <a:rPr sz="3600" b="1">
+                <a:solidFill>
+                  <a:srgbClr val="5A0A7A"/>
+                </a:solidFill>
+              </a:rPr>
               <a:t>Closing quiz</a:t>
             </a:r>
           </a:p>
@@ -11367,7 +11771,7 @@
 </p:sld>
 </file>
 
-<file path=ppt/slides/slide47.xml><?xml version="1.0" encoding="utf-8"?>
+<file path=ppt/slides/slide48.xml><?xml version="1.0" encoding="utf-8"?>
 <p:sld xmlns:a="http://schemas.openxmlformats.org/drawingml/2006/main" xmlns:p="http://schemas.openxmlformats.org/presentationml/2006/main" xmlns:r="http://schemas.openxmlformats.org/officeDocument/2006/relationships">
   <p:cSld>
     <p:spTree>

--- a/slides/session1/01-session1-fundamentals.pptx
+++ b/slides/session1/01-session1-fundamentals.pptx
@@ -6283,7 +6283,7 @@
                     <a:p>
                       <a:r>
                         <a:rPr sz="2000"/>
-                        <a:t>bounded model checking*</a:t>
+                        <a:t>bounded model checking*, testing</a:t>
                       </a:r>
                     </a:p>
                   </a:txBody>
@@ -6296,7 +6296,7 @@
                     <a:p>
                       <a:r>
                         <a:rPr sz="2000"/>
-                        <a:t>testing, code review</a:t>
+                        <a:t>code review</a:t>
                       </a:r>
                     </a:p>
                   </a:txBody>
@@ -6335,22 +6335,22 @@
               </a:spcAft>
             </a:pPr>
             <a:r>
-              <a:rPr sz="2200">
-                <a:solidFill>
-                  <a:srgbClr val="212121"/>
-                </a:solidFill>
-              </a:rPr>
-              <a:t>* sound up to its bound — tonight's central fine print</a:t>
-            </a:r>
-          </a:p>
-          <a:p>
-            <a:pPr>
-              <a:spcAft>
-                <a:spcPts val="800"/>
-              </a:spcAft>
-            </a:pPr>
-            <a:r>
-              <a:rPr sz="2200">
+              <a:rPr sz="2000">
+                <a:solidFill>
+                  <a:srgbClr val="212121"/>
+                </a:solidFill>
+              </a:rPr>
+              <a:t>* sound only up to its bound. k-induction removes it: prove the inductive step — not just unwind to depth k — and BMC climbs into the Sound row (an unbounded proof when the induction converges; Session 2).</a:t>
+            </a:r>
+          </a:p>
+          <a:p>
+            <a:pPr>
+              <a:spcAft>
+                <a:spcPts val="800"/>
+              </a:spcAft>
+            </a:pPr>
+            <a:r>
+              <a:rPr sz="2000">
                 <a:solidFill>
                   <a:srgbClr val="212121"/>
                 </a:solidFill>

--- a/slides/session1/01-session1-fundamentals.pptx
+++ b/slides/session1/01-session1-fundamentals.pptx
@@ -53,6 +53,7 @@
     <p:sldId id="301" r:id="rId52"/>
     <p:sldId id="302" r:id="rId53"/>
     <p:sldId id="303" r:id="rId54"/>
+    <p:sldId id="304" r:id="rId55"/>
   </p:sldIdLst>
   <p:sldSz cx="12191695" cy="6858000" type="screen4x3"/>
   <p:notesSz cx="6858000" cy="9144000"/>
@@ -6768,7 +6769,7 @@
                   <a:srgbClr val="5A0A7A"/>
                 </a:solidFill>
               </a:rPr>
-              <a:t>The one trick to remember</a:t>
+              <a:t>LLMs find bugs too — but who checks the LLM?</a:t>
             </a:r>
           </a:p>
         </p:txBody>
@@ -6781,8 +6782,8 @@
         </p:nvSpPr>
         <p:spPr>
           <a:xfrm>
-            <a:off x="731520" y="1737360"/>
-            <a:ext cx="10789920" cy="4846320"/>
+            <a:off x="731520" y="1463040"/>
+            <a:ext cx="10789920" cy="5120640"/>
           </a:xfrm>
           <a:prstGeom prst="rect">
             <a:avLst/>
@@ -6801,12 +6802,42 @@
               </a:spcAft>
             </a:pPr>
             <a:r>
-              <a:rPr sz="2600">
-                <a:solidFill>
-                  <a:srgbClr val="212121"/>
-                </a:solidFill>
-              </a:rPr>
-              <a:t>To prove a property P, ask whether ¬P is satisfiable.</a:t>
+              <a:rPr sz="2000">
+                <a:solidFill>
+                  <a:srgbClr val="212121"/>
+                </a:solidFill>
+              </a:rPr>
+              <a:t>LLMs (Copilot, Claude, Cursor) read code and flag bugs — fast, broad, cheap. They even find real zero-days: Google's Big Sleep found an exploitable buffer underflow in SQLite (2024).</a:t>
+            </a:r>
+          </a:p>
+          <a:p>
+            <a:pPr>
+              <a:spcAft>
+                <a:spcPts val="800"/>
+              </a:spcAft>
+            </a:pPr>
+            <a:r>
+              <a:rPr sz="2000">
+                <a:solidFill>
+                  <a:srgbClr val="212121"/>
+                </a:solidFill>
+              </a:rPr>
+              <a:t>But an LLM is unsound and incomplete: it misses real bugs and hallucinates ones that aren't there — no guarantees. Same corner of the grid as code review.</a:t>
+            </a:r>
+          </a:p>
+          <a:p>
+            <a:pPr>
+              <a:spcAft>
+                <a:spcPts val="800"/>
+              </a:spcAft>
+            </a:pPr>
+            <a:r>
+              <a:rPr sz="2000">
+                <a:solidFill>
+                  <a:srgbClr val="212121"/>
+                </a:solidFill>
+              </a:rPr>
+              <a:t>The win is pairing them — the LLM proposes, a sound checker disposes:</a:t>
             </a:r>
           </a:p>
           <a:p>
@@ -6816,12 +6847,12 @@
               </a:spcAft>
             </a:pPr>
             <a:r>
-              <a:rPr sz="2400">
-                <a:solidFill>
-                  <a:srgbClr val="212121"/>
-                </a:solidFill>
-              </a:rPr>
-              <a:t>unsat  ⇒  no way to violate P exists — a proof</a:t>
+              <a:rPr sz="1800">
+                <a:solidFill>
+                  <a:srgbClr val="212121"/>
+                </a:solidFill>
+              </a:rPr>
+              <a:t>the LLM suggests bugs, fixes, specs, or inductive invariants;</a:t>
             </a:r>
           </a:p>
           <a:p>
@@ -6831,72 +6862,65 @@
               </a:spcAft>
             </a:pPr>
             <a:r>
-              <a:rPr sz="2400">
-                <a:solidFill>
-                  <a:srgbClr val="212121"/>
-                </a:solidFill>
-              </a:rPr>
-              <a:t>satisfiable, with a model  ⇒  a concrete counterexample to P</a:t>
-            </a:r>
-          </a:p>
-          <a:p>
-            <a:pPr>
-              <a:spcAft>
-                <a:spcPts val="800"/>
-              </a:spcAft>
-            </a:pPr>
-            <a:r>
-              <a:rPr sz="2600">
-                <a:solidFill>
-                  <a:srgbClr val="212121"/>
-                </a:solidFill>
-              </a:rPr>
-              <a:t/>
-            </a:r>
-          </a:p>
-          <a:p>
-            <a:pPr>
-              <a:spcAft>
-                <a:spcPts val="800"/>
-              </a:spcAft>
-            </a:pPr>
-            <a:r>
-              <a:rPr sz="2600">
-                <a:solidFill>
-                  <a:srgbClr val="212121"/>
-                </a:solidFill>
-              </a:rPr>
-              <a:t>Every tool tonight, and every lab in Session 2, is this one move in different costumes.</a:t>
-            </a:r>
-          </a:p>
-          <a:p>
-            <a:pPr>
-              <a:spcAft>
-                <a:spcPts val="800"/>
-              </a:spcAft>
-            </a:pPr>
-            <a:r>
-              <a:rPr sz="2600">
-                <a:solidFill>
-                  <a:srgbClr val="212121"/>
-                </a:solidFill>
-              </a:rPr>
-              <a:t/>
-            </a:r>
-          </a:p>
-          <a:p>
-            <a:pPr>
-              <a:spcAft>
-                <a:spcPts val="800"/>
-              </a:spcAft>
-            </a:pPr>
-            <a:r>
-              <a:rPr sz="2600">
-                <a:solidFill>
-                  <a:srgbClr val="212121"/>
-                </a:solidFill>
-              </a:rPr>
-              <a:t>So we need an oracle for “is this formula satisfiable?” — it exists, it is free, and it is absurdly good. After the break.</a:t>
+              <a:rPr sz="1800">
+                <a:solidFill>
+                  <a:srgbClr val="212121"/>
+                </a:solidFill>
+              </a:rPr>
+              <a:t>the verifier returns a concrete counterexample or a proof — and catches the hallucinations.</a:t>
+            </a:r>
+          </a:p>
+          <a:p>
+            <a:pPr>
+              <a:spcAft>
+                <a:spcPts val="800"/>
+              </a:spcAft>
+            </a:pPr>
+            <a:r>
+              <a:rPr sz="2000">
+                <a:solidFill>
+                  <a:srgbClr val="212121"/>
+                </a:solidFill>
+              </a:rPr>
+              <a:t>ESBMC-AI does exactly this: ESBMC verifies → counterexample + code → LLM proposes a fix → re-verify, loop until proven.</a:t>
+            </a:r>
+          </a:p>
+        </p:txBody>
+      </p:sp>
+      <p:sp>
+        <p:nvSpPr>
+          <p:cNvPr id="4" name="TextBox 3"/>
+          <p:cNvSpPr txBox="1"/>
+          <p:nvPr/>
+        </p:nvSpPr>
+        <p:spPr>
+          <a:xfrm>
+            <a:off x="731520" y="6400800"/>
+            <a:ext cx="10789920" cy="182880"/>
+          </a:xfrm>
+          <a:prstGeom prst="rect">
+            <a:avLst/>
+          </a:prstGeom>
+          <a:noFill/>
+        </p:spPr>
+        <p:txBody>
+          <a:bodyPr wrap="square">
+            <a:spAutoFit/>
+          </a:bodyPr>
+          <a:lstStyle/>
+          <a:p>
+            <a:pPr>
+              <a:spcAft>
+                <a:spcPts val="800"/>
+              </a:spcAft>
+            </a:pPr>
+            <a:r>
+              <a:rPr sz="1400">
+                <a:solidFill>
+                  <a:srgbClr val="212121"/>
+                </a:solidFill>
+              </a:rPr>
+              <a:t>Sources: Google Big Sleep (Project Zero × DeepMind, 2024) · ESBMC-AI — esbmc.github.io/esbmc-ai</a:t>
             </a:r>
           </a:p>
         </p:txBody>
@@ -6927,7 +6951,7 @@
         </p:nvSpPr>
         <p:spPr>
           <a:xfrm>
-            <a:off x="548640" y="2377440"/>
+            <a:off x="548640" y="365760"/>
             <a:ext cx="11064240" cy="1005840"/>
           </a:xfrm>
           <a:prstGeom prst="rect">
@@ -6942,12 +6966,140 @@
           <a:lstStyle/>
           <a:p>
             <a:r>
-              <a:rPr sz="4400" b="1">
+              <a:rPr sz="3600" b="1">
                 <a:solidFill>
                   <a:srgbClr val="5A0A7A"/>
                 </a:solidFill>
               </a:rPr>
-              <a:t>Break — back at 19:25</a:t>
+              <a:t>The one trick to remember</a:t>
+            </a:r>
+          </a:p>
+        </p:txBody>
+      </p:sp>
+      <p:sp>
+        <p:nvSpPr>
+          <p:cNvPr id="3" name="TextBox 2"/>
+          <p:cNvSpPr txBox="1"/>
+          <p:nvPr/>
+        </p:nvSpPr>
+        <p:spPr>
+          <a:xfrm>
+            <a:off x="731520" y="1737360"/>
+            <a:ext cx="10789920" cy="4846320"/>
+          </a:xfrm>
+          <a:prstGeom prst="rect">
+            <a:avLst/>
+          </a:prstGeom>
+          <a:noFill/>
+        </p:spPr>
+        <p:txBody>
+          <a:bodyPr wrap="square">
+            <a:spAutoFit/>
+          </a:bodyPr>
+          <a:lstStyle/>
+          <a:p>
+            <a:pPr>
+              <a:spcAft>
+                <a:spcPts val="800"/>
+              </a:spcAft>
+            </a:pPr>
+            <a:r>
+              <a:rPr sz="2600">
+                <a:solidFill>
+                  <a:srgbClr val="212121"/>
+                </a:solidFill>
+              </a:rPr>
+              <a:t>To prove a property P, ask whether ¬P is satisfiable.</a:t>
+            </a:r>
+          </a:p>
+          <a:p>
+            <a:pPr lvl="1">
+              <a:spcAft>
+                <a:spcPts val="800"/>
+              </a:spcAft>
+            </a:pPr>
+            <a:r>
+              <a:rPr sz="2400">
+                <a:solidFill>
+                  <a:srgbClr val="212121"/>
+                </a:solidFill>
+              </a:rPr>
+              <a:t>unsat  ⇒  no way to violate P exists — a proof</a:t>
+            </a:r>
+          </a:p>
+          <a:p>
+            <a:pPr lvl="1">
+              <a:spcAft>
+                <a:spcPts val="800"/>
+              </a:spcAft>
+            </a:pPr>
+            <a:r>
+              <a:rPr sz="2400">
+                <a:solidFill>
+                  <a:srgbClr val="212121"/>
+                </a:solidFill>
+              </a:rPr>
+              <a:t>satisfiable, with a model  ⇒  a concrete counterexample to P</a:t>
+            </a:r>
+          </a:p>
+          <a:p>
+            <a:pPr>
+              <a:spcAft>
+                <a:spcPts val="800"/>
+              </a:spcAft>
+            </a:pPr>
+            <a:r>
+              <a:rPr sz="2600">
+                <a:solidFill>
+                  <a:srgbClr val="212121"/>
+                </a:solidFill>
+              </a:rPr>
+              <a:t/>
+            </a:r>
+          </a:p>
+          <a:p>
+            <a:pPr>
+              <a:spcAft>
+                <a:spcPts val="800"/>
+              </a:spcAft>
+            </a:pPr>
+            <a:r>
+              <a:rPr sz="2600">
+                <a:solidFill>
+                  <a:srgbClr val="212121"/>
+                </a:solidFill>
+              </a:rPr>
+              <a:t>Every tool tonight, and every lab in Session 2, is this one move in different costumes.</a:t>
+            </a:r>
+          </a:p>
+          <a:p>
+            <a:pPr>
+              <a:spcAft>
+                <a:spcPts val="800"/>
+              </a:spcAft>
+            </a:pPr>
+            <a:r>
+              <a:rPr sz="2600">
+                <a:solidFill>
+                  <a:srgbClr val="212121"/>
+                </a:solidFill>
+              </a:rPr>
+              <a:t/>
+            </a:r>
+          </a:p>
+          <a:p>
+            <a:pPr>
+              <a:spcAft>
+                <a:spcPts val="800"/>
+              </a:spcAft>
+            </a:pPr>
+            <a:r>
+              <a:rPr sz="2600">
+                <a:solidFill>
+                  <a:srgbClr val="212121"/>
+                </a:solidFill>
+              </a:rPr>
+              <a:t>So we need an oracle for “is this formula satisfiable?” — it exists, it is free, and it is absurdly good. After the break.</a:t>
             </a:r>
           </a:p>
         </p:txBody>
@@ -6978,7 +7130,7 @@
         </p:nvSpPr>
         <p:spPr>
           <a:xfrm>
-            <a:off x="548640" y="365760"/>
+            <a:off x="548640" y="2377440"/>
             <a:ext cx="11064240" cy="1005840"/>
           </a:xfrm>
           <a:prstGeom prst="rect">
@@ -6993,126 +7145,12 @@
           <a:lstStyle/>
           <a:p>
             <a:r>
-              <a:rPr sz="3600" b="1">
+              <a:rPr sz="4400" b="1">
                 <a:solidFill>
                   <a:srgbClr val="5A0A7A"/>
                 </a:solidFill>
               </a:rPr>
-              <a:t>SAT: the original hard problem</a:t>
-            </a:r>
-          </a:p>
-        </p:txBody>
-      </p:sp>
-      <p:sp>
-        <p:nvSpPr>
-          <p:cNvPr id="3" name="TextBox 2"/>
-          <p:cNvSpPr txBox="1"/>
-          <p:nvPr/>
-        </p:nvSpPr>
-        <p:spPr>
-          <a:xfrm>
-            <a:off x="731520" y="1554480"/>
-            <a:ext cx="10789920" cy="5029200"/>
-          </a:xfrm>
-          <a:prstGeom prst="rect">
-            <a:avLst/>
-          </a:prstGeom>
-          <a:noFill/>
-        </p:spPr>
-        <p:txBody>
-          <a:bodyPr wrap="square">
-            <a:spAutoFit/>
-          </a:bodyPr>
-          <a:lstStyle/>
-          <a:p>
-            <a:pPr>
-              <a:spcAft>
-                <a:spcPts val="0"/>
-              </a:spcAft>
-            </a:pPr>
-            <a:r>
-              <a:rPr sz="2000">
-                <a:solidFill>
-                  <a:srgbClr val="212121"/>
-                </a:solidFill>
-                <a:latin typeface="Courier New"/>
-              </a:rPr>
-              <a:t>(a ∨ ¬b) ∧ (b ∨ c) ∧ (¬a ∨ ¬c)</a:t>
-            </a:r>
-          </a:p>
-          <a:p>
-            <a:pPr>
-              <a:spcAft>
-                <a:spcPts val="800"/>
-              </a:spcAft>
-            </a:pPr>
-            <a:r>
-              <a:rPr sz="2400">
-                <a:solidFill>
-                  <a:srgbClr val="212121"/>
-                </a:solidFill>
-              </a:rPr>
-              <a:t/>
-            </a:r>
-          </a:p>
-          <a:p>
-            <a:pPr>
-              <a:spcAft>
-                <a:spcPts val="800"/>
-              </a:spcAft>
-            </a:pPr>
-            <a:r>
-              <a:rPr sz="2400">
-                <a:solidFill>
-                  <a:srgbClr val="212121"/>
-                </a:solidFill>
-              </a:rPr>
-              <a:t>Is there a true/false assignment that makes the whole formula true?</a:t>
-            </a:r>
-          </a:p>
-          <a:p>
-            <a:pPr>
-              <a:spcAft>
-                <a:spcPts val="800"/>
-              </a:spcAft>
-            </a:pPr>
-            <a:r>
-              <a:rPr sz="2400">
-                <a:solidFill>
-                  <a:srgbClr val="212121"/>
-                </a:solidFill>
-              </a:rPr>
-              <a:t/>
-            </a:r>
-          </a:p>
-          <a:p>
-            <a:pPr>
-              <a:spcAft>
-                <a:spcPts val="800"/>
-              </a:spcAft>
-            </a:pPr>
-            <a:r>
-              <a:rPr sz="2400">
-                <a:solidFill>
-                  <a:srgbClr val="212121"/>
-                </a:solidFill>
-              </a:rPr>
-              <a:t>The first problem ever proved NP-complete (Cook, 1971) — in theory, hopeless.</a:t>
-            </a:r>
-          </a:p>
-          <a:p>
-            <a:pPr>
-              <a:spcAft>
-                <a:spcPts val="800"/>
-              </a:spcAft>
-            </a:pPr>
-            <a:r>
-              <a:rPr sz="2400">
-                <a:solidFill>
-                  <a:srgbClr val="212121"/>
-                </a:solidFill>
-              </a:rPr>
-              <a:t>In practice: modern solvers eat formulas with millions of clauses for breakfast. Industrial SAT solving is the closest thing CS has to a superpower.</a:t>
+              <a:t>Break — back at 19:25</a:t>
             </a:r>
           </a:p>
         </p:txBody>
@@ -7163,6 +7201,171 @@
                   <a:srgbClr val="5A0A7A"/>
                 </a:solidFill>
               </a:rPr>
+              <a:t>SAT: the original hard problem</a:t>
+            </a:r>
+          </a:p>
+        </p:txBody>
+      </p:sp>
+      <p:sp>
+        <p:nvSpPr>
+          <p:cNvPr id="3" name="TextBox 2"/>
+          <p:cNvSpPr txBox="1"/>
+          <p:nvPr/>
+        </p:nvSpPr>
+        <p:spPr>
+          <a:xfrm>
+            <a:off x="731520" y="1554480"/>
+            <a:ext cx="10789920" cy="5029200"/>
+          </a:xfrm>
+          <a:prstGeom prst="rect">
+            <a:avLst/>
+          </a:prstGeom>
+          <a:noFill/>
+        </p:spPr>
+        <p:txBody>
+          <a:bodyPr wrap="square">
+            <a:spAutoFit/>
+          </a:bodyPr>
+          <a:lstStyle/>
+          <a:p>
+            <a:pPr>
+              <a:spcAft>
+                <a:spcPts val="0"/>
+              </a:spcAft>
+            </a:pPr>
+            <a:r>
+              <a:rPr sz="2000">
+                <a:solidFill>
+                  <a:srgbClr val="212121"/>
+                </a:solidFill>
+                <a:latin typeface="Courier New"/>
+              </a:rPr>
+              <a:t>(a ∨ ¬b) ∧ (b ∨ c) ∧ (¬a ∨ ¬c)</a:t>
+            </a:r>
+          </a:p>
+          <a:p>
+            <a:pPr>
+              <a:spcAft>
+                <a:spcPts val="800"/>
+              </a:spcAft>
+            </a:pPr>
+            <a:r>
+              <a:rPr sz="2400">
+                <a:solidFill>
+                  <a:srgbClr val="212121"/>
+                </a:solidFill>
+              </a:rPr>
+              <a:t/>
+            </a:r>
+          </a:p>
+          <a:p>
+            <a:pPr>
+              <a:spcAft>
+                <a:spcPts val="800"/>
+              </a:spcAft>
+            </a:pPr>
+            <a:r>
+              <a:rPr sz="2400">
+                <a:solidFill>
+                  <a:srgbClr val="212121"/>
+                </a:solidFill>
+              </a:rPr>
+              <a:t>Is there a true/false assignment that makes the whole formula true?</a:t>
+            </a:r>
+          </a:p>
+          <a:p>
+            <a:pPr>
+              <a:spcAft>
+                <a:spcPts val="800"/>
+              </a:spcAft>
+            </a:pPr>
+            <a:r>
+              <a:rPr sz="2400">
+                <a:solidFill>
+                  <a:srgbClr val="212121"/>
+                </a:solidFill>
+              </a:rPr>
+              <a:t/>
+            </a:r>
+          </a:p>
+          <a:p>
+            <a:pPr>
+              <a:spcAft>
+                <a:spcPts val="800"/>
+              </a:spcAft>
+            </a:pPr>
+            <a:r>
+              <a:rPr sz="2400">
+                <a:solidFill>
+                  <a:srgbClr val="212121"/>
+                </a:solidFill>
+              </a:rPr>
+              <a:t>The first problem ever proved NP-complete (Cook, 1971) — in theory, hopeless.</a:t>
+            </a:r>
+          </a:p>
+          <a:p>
+            <a:pPr>
+              <a:spcAft>
+                <a:spcPts val="800"/>
+              </a:spcAft>
+            </a:pPr>
+            <a:r>
+              <a:rPr sz="2400">
+                <a:solidFill>
+                  <a:srgbClr val="212121"/>
+                </a:solidFill>
+              </a:rPr>
+              <a:t>In practice: modern solvers eat formulas with millions of clauses for breakfast. Industrial SAT solving is the closest thing CS has to a superpower.</a:t>
+            </a:r>
+          </a:p>
+        </p:txBody>
+      </p:sp>
+    </p:spTree>
+  </p:cSld>
+  <p:clrMapOvr>
+    <a:masterClrMapping/>
+  </p:clrMapOvr>
+</p:sld>
+</file>
+
+<file path=ppt/slides/slide27.xml><?xml version="1.0" encoding="utf-8"?>
+<p:sld xmlns:a="http://schemas.openxmlformats.org/drawingml/2006/main" xmlns:p="http://schemas.openxmlformats.org/presentationml/2006/main" xmlns:r="http://schemas.openxmlformats.org/officeDocument/2006/relationships">
+  <p:cSld>
+    <p:spTree>
+      <p:nvGrpSpPr>
+        <p:cNvPr id="1" name=""/>
+        <p:cNvGrpSpPr/>
+        <p:nvPr/>
+      </p:nvGrpSpPr>
+      <p:grpSpPr/>
+      <p:sp>
+        <p:nvSpPr>
+          <p:cNvPr id="2" name="TextBox 1"/>
+          <p:cNvSpPr txBox="1"/>
+          <p:nvPr/>
+        </p:nvSpPr>
+        <p:spPr>
+          <a:xfrm>
+            <a:off x="548640" y="365760"/>
+            <a:ext cx="11064240" cy="1005840"/>
+          </a:xfrm>
+          <a:prstGeom prst="rect">
+            <a:avLst/>
+          </a:prstGeom>
+          <a:noFill/>
+        </p:spPr>
+        <p:txBody>
+          <a:bodyPr wrap="square">
+            <a:spAutoFit/>
+          </a:bodyPr>
+          <a:lstStyle/>
+          <a:p>
+            <a:r>
+              <a:rPr sz="3600" b="1">
+                <a:solidFill>
+                  <a:srgbClr val="5A0A7A"/>
+                </a:solidFill>
+              </a:rPr>
               <a:t>The two answers a solver can give</a:t>
             </a:r>
           </a:p>
@@ -7319,7 +7522,7 @@
 </p:sld>
 </file>
 
-<file path=ppt/slides/slide27.xml><?xml version="1.0" encoding="utf-8"?>
+<file path=ppt/slides/slide28.xml><?xml version="1.0" encoding="utf-8"?>
 <p:sld xmlns:a="http://schemas.openxmlformats.org/drawingml/2006/main" xmlns:p="http://schemas.openxmlformats.org/presentationml/2006/main" xmlns:r="http://schemas.openxmlformats.org/officeDocument/2006/relationships">
   <p:cSld>
     <p:spTree>
@@ -7574,7 +7777,7 @@
 </p:sld>
 </file>
 
-<file path=ppt/slides/slide28.xml><?xml version="1.0" encoding="utf-8"?>
+<file path=ppt/slides/slide29.xml><?xml version="1.0" encoding="utf-8"?>
 <p:sld xmlns:a="http://schemas.openxmlformats.org/drawingml/2006/main" xmlns:p="http://schemas.openxmlformats.org/presentationml/2006/main" xmlns:r="http://schemas.openxmlformats.org/officeDocument/2006/relationships">
   <p:cSld>
     <p:spTree>
@@ -7743,222 +7946,6 @@
                 </a:solidFill>
               </a:rPr>
               <a:t>unsat  →  the access is safe on every path</a:t>
-            </a:r>
-          </a:p>
-        </p:txBody>
-      </p:sp>
-    </p:spTree>
-  </p:cSld>
-  <p:clrMapOvr>
-    <a:masterClrMapping/>
-  </p:clrMapOvr>
-</p:sld>
-</file>
-
-<file path=ppt/slides/slide29.xml><?xml version="1.0" encoding="utf-8"?>
-<p:sld xmlns:a="http://schemas.openxmlformats.org/drawingml/2006/main" xmlns:p="http://schemas.openxmlformats.org/presentationml/2006/main" xmlns:r="http://schemas.openxmlformats.org/officeDocument/2006/relationships">
-  <p:cSld>
-    <p:spTree>
-      <p:nvGrpSpPr>
-        <p:cNvPr id="1" name=""/>
-        <p:cNvGrpSpPr/>
-        <p:nvPr/>
-      </p:nvGrpSpPr>
-      <p:grpSpPr/>
-      <p:sp>
-        <p:nvSpPr>
-          <p:cNvPr id="2" name="TextBox 1"/>
-          <p:cNvSpPr txBox="1"/>
-          <p:nvPr/>
-        </p:nvSpPr>
-        <p:spPr>
-          <a:xfrm>
-            <a:off x="548640" y="365760"/>
-            <a:ext cx="11064240" cy="1005840"/>
-          </a:xfrm>
-          <a:prstGeom prst="rect">
-            <a:avLst/>
-          </a:prstGeom>
-          <a:noFill/>
-        </p:spPr>
-        <p:txBody>
-          <a:bodyPr wrap="square">
-            <a:spAutoFit/>
-          </a:bodyPr>
-          <a:lstStyle/>
-          <a:p>
-            <a:r>
-              <a:rPr sz="3600" b="1">
-                <a:solidFill>
-                  <a:srgbClr val="5A0A7A"/>
-                </a:solidFill>
-              </a:rPr>
-              <a:t>Live: a solver in two queries</a:t>
-            </a:r>
-          </a:p>
-        </p:txBody>
-      </p:sp>
-      <p:sp>
-        <p:nvSpPr>
-          <p:cNvPr id="3" name="TextBox 2"/>
-          <p:cNvSpPr txBox="1"/>
-          <p:nvPr/>
-        </p:nvSpPr>
-        <p:spPr>
-          <a:xfrm>
-            <a:off x="731520" y="1463040"/>
-            <a:ext cx="10789920" cy="5120640"/>
-          </a:xfrm>
-          <a:prstGeom prst="rect">
-            <a:avLst/>
-          </a:prstGeom>
-          <a:noFill/>
-        </p:spPr>
-        <p:txBody>
-          <a:bodyPr wrap="square">
-            <a:spAutoFit/>
-          </a:bodyPr>
-          <a:lstStyle/>
-          <a:p>
-            <a:pPr>
-              <a:spcAft>
-                <a:spcPts val="0"/>
-              </a:spcAft>
-            </a:pPr>
-            <a:r>
-              <a:rPr sz="1800">
-                <a:solidFill>
-                  <a:srgbClr val="212121"/>
-                </a:solidFill>
-                <a:latin typeface="Courier New"/>
-              </a:rPr>
-              <a:t>$ python3 z3_demo.py</a:t>
-            </a:r>
-          </a:p>
-          <a:p>
-            <a:pPr>
-              <a:spcAft>
-                <a:spcPts val="0"/>
-              </a:spcAft>
-            </a:pPr>
-            <a:r>
-              <a:rPr sz="1800">
-                <a:solidFill>
-                  <a:srgbClr val="212121"/>
-                </a:solidFill>
-                <a:latin typeface="Courier New"/>
-              </a:rPr>
-              <a:t/>
-            </a:r>
-          </a:p>
-          <a:p>
-            <a:pPr>
-              <a:spcAft>
-                <a:spcPts val="0"/>
-              </a:spcAft>
-            </a:pPr>
-            <a:r>
-              <a:rPr sz="1800">
-                <a:solidFill>
-                  <a:srgbClr val="212121"/>
-                </a:solidFill>
-                <a:latin typeface="Courier New"/>
-              </a:rPr>
-              <a:t>Query 1: x + y == 42 and x &gt; 100</a:t>
-            </a:r>
-          </a:p>
-          <a:p>
-            <a:pPr>
-              <a:spcAft>
-                <a:spcPts val="0"/>
-              </a:spcAft>
-            </a:pPr>
-            <a:r>
-              <a:rPr sz="1800">
-                <a:solidFill>
-                  <a:srgbClr val="212121"/>
-                </a:solidFill>
-                <a:latin typeface="Courier New"/>
-              </a:rPr>
-              <a:t>[y = -59, x = 101]            ← a model, in milliseconds</a:t>
-            </a:r>
-          </a:p>
-          <a:p>
-            <a:pPr>
-              <a:spcAft>
-                <a:spcPts val="0"/>
-              </a:spcAft>
-            </a:pPr>
-            <a:r>
-              <a:rPr sz="1800">
-                <a:solidFill>
-                  <a:srgbClr val="212121"/>
-                </a:solidFill>
-                <a:latin typeface="Courier New"/>
-              </a:rPr>
-              <a:t/>
-            </a:r>
-          </a:p>
-          <a:p>
-            <a:pPr>
-              <a:spcAft>
-                <a:spcPts val="0"/>
-              </a:spcAft>
-            </a:pPr>
-            <a:r>
-              <a:rPr sz="1800">
-                <a:solidFill>
-                  <a:srgbClr val="212121"/>
-                </a:solidFill>
-                <a:latin typeface="Courier New"/>
-              </a:rPr>
-              <a:t>Query 2: x*x == 2*y*y, x &gt; 0, y &gt; 0 (no overflow)</a:t>
-            </a:r>
-          </a:p>
-          <a:p>
-            <a:pPr>
-              <a:spcAft>
-                <a:spcPts val="0"/>
-              </a:spcAft>
-            </a:pPr>
-            <a:r>
-              <a:rPr sz="1800">
-                <a:solidFill>
-                  <a:srgbClr val="212121"/>
-                </a:solidFill>
-                <a:latin typeface="Courier New"/>
-              </a:rPr>
-              <a:t>unsat                          ← a proof</a:t>
-            </a:r>
-          </a:p>
-          <a:p>
-            <a:pPr>
-              <a:spcAft>
-                <a:spcPts val="800"/>
-              </a:spcAft>
-            </a:pPr>
-            <a:r>
-              <a:rPr sz="2200">
-                <a:solidFill>
-                  <a:srgbClr val="212121"/>
-                </a:solidFill>
-              </a:rPr>
-              <a:t/>
-            </a:r>
-          </a:p>
-          <a:p>
-            <a:pPr>
-              <a:spcAft>
-                <a:spcPts val="800"/>
-              </a:spcAft>
-            </a:pPr>
-            <a:r>
-              <a:rPr sz="2200">
-                <a:solidFill>
-                  <a:srgbClr val="212121"/>
-                </a:solidFill>
-              </a:rPr>
-              <a:t>Query 2 just proved that √2 is irrational — 32-bit bit-vector edition. unsat is a theorem, not a shrug.</a:t>
             </a:r>
           </a:p>
         </p:txBody>
@@ -8113,7 +8100,7 @@
                   <a:srgbClr val="5A0A7A"/>
                 </a:solidFill>
               </a:rPr>
-              <a:t>Machine arithmetic is not mathematics</a:t>
+              <a:t>Live: a solver in two queries</a:t>
             </a:r>
           </a:p>
         </p:txBody>
@@ -8152,7 +8139,7 @@
                 </a:solidFill>
                 <a:latin typeface="Courier New"/>
               </a:rPr>
-              <a:t>INT_MAX     =  2147483647</a:t>
+              <a:t>$ python3 z3_demo.py</a:t>
             </a:r>
           </a:p>
           <a:p>
@@ -8168,7 +8155,7 @@
                 </a:solidFill>
                 <a:latin typeface="Courier New"/>
               </a:rPr>
-              <a:t>INT_MAX + 1 =  ?            /* C: undefined behaviour */</a:t>
+              <a:t/>
             </a:r>
           </a:p>
           <a:p>
@@ -8184,7 +8171,71 @@
                 </a:solidFill>
                 <a:latin typeface="Courier New"/>
               </a:rPr>
-              <a:t>                            /* bit-vectors: wraps negative */</a:t>
+              <a:t>Query 1: x + y == 42 and x &gt; 100</a:t>
+            </a:r>
+          </a:p>
+          <a:p>
+            <a:pPr>
+              <a:spcAft>
+                <a:spcPts val="0"/>
+              </a:spcAft>
+            </a:pPr>
+            <a:r>
+              <a:rPr sz="1800">
+                <a:solidFill>
+                  <a:srgbClr val="212121"/>
+                </a:solidFill>
+                <a:latin typeface="Courier New"/>
+              </a:rPr>
+              <a:t>[y = -59, x = 101]            ← a model, in milliseconds</a:t>
+            </a:r>
+          </a:p>
+          <a:p>
+            <a:pPr>
+              <a:spcAft>
+                <a:spcPts val="0"/>
+              </a:spcAft>
+            </a:pPr>
+            <a:r>
+              <a:rPr sz="1800">
+                <a:solidFill>
+                  <a:srgbClr val="212121"/>
+                </a:solidFill>
+                <a:latin typeface="Courier New"/>
+              </a:rPr>
+              <a:t/>
+            </a:r>
+          </a:p>
+          <a:p>
+            <a:pPr>
+              <a:spcAft>
+                <a:spcPts val="0"/>
+              </a:spcAft>
+            </a:pPr>
+            <a:r>
+              <a:rPr sz="1800">
+                <a:solidFill>
+                  <a:srgbClr val="212121"/>
+                </a:solidFill>
+                <a:latin typeface="Courier New"/>
+              </a:rPr>
+              <a:t>Query 2: x*x == 2*y*y, x &gt; 0, y &gt; 0 (no overflow)</a:t>
+            </a:r>
+          </a:p>
+          <a:p>
+            <a:pPr>
+              <a:spcAft>
+                <a:spcPts val="0"/>
+              </a:spcAft>
+            </a:pPr>
+            <a:r>
+              <a:rPr sz="1800">
+                <a:solidFill>
+                  <a:srgbClr val="212121"/>
+                </a:solidFill>
+                <a:latin typeface="Courier New"/>
+              </a:rPr>
+              <a:t>unsat                          ← a proof</a:t>
             </a:r>
           </a:p>
           <a:p>
@@ -8205,54 +8256,6 @@
           <a:p>
             <a:pPr>
               <a:spcAft>
-                <a:spcPts val="0"/>
-              </a:spcAft>
-            </a:pPr>
-            <a:r>
-              <a:rPr sz="1800">
-                <a:solidFill>
-                  <a:srgbClr val="212121"/>
-                </a:solidFill>
-                <a:latin typeface="Courier New"/>
-              </a:rPr>
-              <a:t>int y = x + 1;</a:t>
-            </a:r>
-          </a:p>
-          <a:p>
-            <a:pPr>
-              <a:spcAft>
-                <a:spcPts val="0"/>
-              </a:spcAft>
-            </a:pPr>
-            <a:r>
-              <a:rPr sz="1800">
-                <a:solidFill>
-                  <a:srgbClr val="212121"/>
-                </a:solidFill>
-                <a:latin typeface="Courier New"/>
-              </a:rPr>
-              <a:t>int z = y * 2;</a:t>
-            </a:r>
-          </a:p>
-          <a:p>
-            <a:pPr>
-              <a:spcAft>
-                <a:spcPts val="0"/>
-              </a:spcAft>
-            </a:pPr>
-            <a:r>
-              <a:rPr sz="1800">
-                <a:solidFill>
-                  <a:srgbClr val="212121"/>
-                </a:solidFill>
-                <a:latin typeface="Courier New"/>
-              </a:rPr>
-              <a:t>assert(z &gt;= 2);   /* surely true for x &gt;= 0 … ? */</a:t>
-            </a:r>
-          </a:p>
-          <a:p>
-            <a:pPr>
-              <a:spcAft>
                 <a:spcPts val="800"/>
               </a:spcAft>
             </a:pPr>
@@ -8262,22 +8265,7 @@
                   <a:srgbClr val="212121"/>
                 </a:solidFill>
               </a:rPr>
-              <a:t/>
-            </a:r>
-          </a:p>
-          <a:p>
-            <a:pPr>
-              <a:spcAft>
-                <a:spcPts val="800"/>
-              </a:spcAft>
-            </a:pPr>
-            <a:r>
-              <a:rPr sz="2200">
-                <a:solidFill>
-                  <a:srgbClr val="212121"/>
-                </a:solidFill>
-              </a:rPr>
-              <a:t>A solver finds the x that breaks this in milliseconds. In Lab 1 you will encode these three lines yourself and watch it happen.</a:t>
+              <a:t>Query 2 just proved that √2 is irrational — 32-bit bit-vector edition. unsat is a theorem, not a shrug.</a:t>
             </a:r>
           </a:p>
         </p:txBody>
@@ -8328,7 +8316,7 @@
                   <a:srgbClr val="5A0A7A"/>
                 </a:solidFill>
               </a:rPr>
-              <a:t>Solvers as search engines: SEND + MORE = MONEY</a:t>
+              <a:t>Machine arithmetic is not mathematics</a:t>
             </a:r>
           </a:p>
         </p:txBody>
@@ -8367,7 +8355,7 @@
                 </a:solidFill>
                 <a:latin typeface="Courier New"/>
               </a:rPr>
-              <a:t>  S E N D</a:t>
+              <a:t>INT_MAX     =  2147483647</a:t>
             </a:r>
           </a:p>
           <a:p>
@@ -8383,7 +8371,7 @@
                 </a:solidFill>
                 <a:latin typeface="Courier New"/>
               </a:rPr>
-              <a:t>+ M O R E</a:t>
+              <a:t>INT_MAX + 1 =  ?            /* C: undefined behaviour */</a:t>
             </a:r>
           </a:p>
           <a:p>
@@ -8399,7 +8387,22 @@
                 </a:solidFill>
                 <a:latin typeface="Courier New"/>
               </a:rPr>
-              <a:t>---------</a:t>
+              <a:t>                            /* bit-vectors: wraps negative */</a:t>
+            </a:r>
+          </a:p>
+          <a:p>
+            <a:pPr>
+              <a:spcAft>
+                <a:spcPts val="800"/>
+              </a:spcAft>
+            </a:pPr>
+            <a:r>
+              <a:rPr sz="2200">
+                <a:solidFill>
+                  <a:srgbClr val="212121"/>
+                </a:solidFill>
+              </a:rPr>
+              <a:t/>
             </a:r>
           </a:p>
           <a:p>
@@ -8415,7 +8418,39 @@
                 </a:solidFill>
                 <a:latin typeface="Courier New"/>
               </a:rPr>
-              <a:t>M O N E Y</a:t>
+              <a:t>int y = x + 1;</a:t>
+            </a:r>
+          </a:p>
+          <a:p>
+            <a:pPr>
+              <a:spcAft>
+                <a:spcPts val="0"/>
+              </a:spcAft>
+            </a:pPr>
+            <a:r>
+              <a:rPr sz="1800">
+                <a:solidFill>
+                  <a:srgbClr val="212121"/>
+                </a:solidFill>
+                <a:latin typeface="Courier New"/>
+              </a:rPr>
+              <a:t>int z = y * 2;</a:t>
+            </a:r>
+          </a:p>
+          <a:p>
+            <a:pPr>
+              <a:spcAft>
+                <a:spcPts val="0"/>
+              </a:spcAft>
+            </a:pPr>
+            <a:r>
+              <a:rPr sz="1800">
+                <a:solidFill>
+                  <a:srgbClr val="212121"/>
+                </a:solidFill>
+                <a:latin typeface="Courier New"/>
+              </a:rPr>
+              <a:t>assert(z &gt;= 2);   /* surely true for x &gt;= 0 … ? */</a:t>
             </a:r>
           </a:p>
           <a:p>
@@ -8445,52 +8480,7 @@
                   <a:srgbClr val="212121"/>
                 </a:solidFill>
               </a:rPr>
-              <a:t>Eight letters, all different digits, S ≠ 0, M ≠ 0 — about 10⁸ candidate assignments.</a:t>
-            </a:r>
-          </a:p>
-          <a:p>
-            <a:pPr>
-              <a:spcAft>
-                <a:spcPts val="800"/>
-              </a:spcAft>
-            </a:pPr>
-            <a:r>
-              <a:rPr sz="2200">
-                <a:solidFill>
-                  <a:srgbClr val="212121"/>
-                </a:solidFill>
-              </a:rPr>
-              <a:t>Z3 finds the unique solution in well under a second.</a:t>
-            </a:r>
-          </a:p>
-          <a:p>
-            <a:pPr>
-              <a:spcAft>
-                <a:spcPts val="800"/>
-              </a:spcAft>
-            </a:pPr>
-            <a:r>
-              <a:rPr sz="2200">
-                <a:solidFill>
-                  <a:srgbClr val="212121"/>
-                </a:solidFill>
-              </a:rPr>
-              <a:t>The same engine that solves puzzles finds your bugs: a counterexample is just a solution to “break my program”.</a:t>
-            </a:r>
-          </a:p>
-          <a:p>
-            <a:pPr>
-              <a:spcAft>
-                <a:spcPts val="800"/>
-              </a:spcAft>
-            </a:pPr>
-            <a:r>
-              <a:rPr sz="2200">
-                <a:solidFill>
-                  <a:srgbClr val="212121"/>
-                </a:solidFill>
-              </a:rPr>
-              <a:t>Lab 1, Stage 2: you run this yourself.</a:t>
+              <a:t>A solver finds the x that breaks this in milliseconds. In Lab 1 you will encode these three lines yourself and watch it happen.</a:t>
             </a:r>
           </a:p>
         </p:txBody>
@@ -8504,6 +8494,219 @@
 </file>
 
 <file path=ppt/slides/slide32.xml><?xml version="1.0" encoding="utf-8"?>
+<p:sld xmlns:a="http://schemas.openxmlformats.org/drawingml/2006/main" xmlns:p="http://schemas.openxmlformats.org/presentationml/2006/main" xmlns:r="http://schemas.openxmlformats.org/officeDocument/2006/relationships">
+  <p:cSld>
+    <p:spTree>
+      <p:nvGrpSpPr>
+        <p:cNvPr id="1" name=""/>
+        <p:cNvGrpSpPr/>
+        <p:nvPr/>
+      </p:nvGrpSpPr>
+      <p:grpSpPr/>
+      <p:sp>
+        <p:nvSpPr>
+          <p:cNvPr id="2" name="TextBox 1"/>
+          <p:cNvSpPr txBox="1"/>
+          <p:nvPr/>
+        </p:nvSpPr>
+        <p:spPr>
+          <a:xfrm>
+            <a:off x="548640" y="365760"/>
+            <a:ext cx="11064240" cy="1005840"/>
+          </a:xfrm>
+          <a:prstGeom prst="rect">
+            <a:avLst/>
+          </a:prstGeom>
+          <a:noFill/>
+        </p:spPr>
+        <p:txBody>
+          <a:bodyPr wrap="square">
+            <a:spAutoFit/>
+          </a:bodyPr>
+          <a:lstStyle/>
+          <a:p>
+            <a:r>
+              <a:rPr sz="3600" b="1">
+                <a:solidFill>
+                  <a:srgbClr val="5A0A7A"/>
+                </a:solidFill>
+              </a:rPr>
+              <a:t>Solvers as search engines: SEND + MORE = MONEY</a:t>
+            </a:r>
+          </a:p>
+        </p:txBody>
+      </p:sp>
+      <p:sp>
+        <p:nvSpPr>
+          <p:cNvPr id="3" name="TextBox 2"/>
+          <p:cNvSpPr txBox="1"/>
+          <p:nvPr/>
+        </p:nvSpPr>
+        <p:spPr>
+          <a:xfrm>
+            <a:off x="731520" y="1463040"/>
+            <a:ext cx="10789920" cy="5120640"/>
+          </a:xfrm>
+          <a:prstGeom prst="rect">
+            <a:avLst/>
+          </a:prstGeom>
+          <a:noFill/>
+        </p:spPr>
+        <p:txBody>
+          <a:bodyPr wrap="square">
+            <a:spAutoFit/>
+          </a:bodyPr>
+          <a:lstStyle/>
+          <a:p>
+            <a:pPr>
+              <a:spcAft>
+                <a:spcPts val="0"/>
+              </a:spcAft>
+            </a:pPr>
+            <a:r>
+              <a:rPr sz="1800">
+                <a:solidFill>
+                  <a:srgbClr val="212121"/>
+                </a:solidFill>
+                <a:latin typeface="Courier New"/>
+              </a:rPr>
+              <a:t>  S E N D</a:t>
+            </a:r>
+          </a:p>
+          <a:p>
+            <a:pPr>
+              <a:spcAft>
+                <a:spcPts val="0"/>
+              </a:spcAft>
+            </a:pPr>
+            <a:r>
+              <a:rPr sz="1800">
+                <a:solidFill>
+                  <a:srgbClr val="212121"/>
+                </a:solidFill>
+                <a:latin typeface="Courier New"/>
+              </a:rPr>
+              <a:t>+ M O R E</a:t>
+            </a:r>
+          </a:p>
+          <a:p>
+            <a:pPr>
+              <a:spcAft>
+                <a:spcPts val="0"/>
+              </a:spcAft>
+            </a:pPr>
+            <a:r>
+              <a:rPr sz="1800">
+                <a:solidFill>
+                  <a:srgbClr val="212121"/>
+                </a:solidFill>
+                <a:latin typeface="Courier New"/>
+              </a:rPr>
+              <a:t>---------</a:t>
+            </a:r>
+          </a:p>
+          <a:p>
+            <a:pPr>
+              <a:spcAft>
+                <a:spcPts val="0"/>
+              </a:spcAft>
+            </a:pPr>
+            <a:r>
+              <a:rPr sz="1800">
+                <a:solidFill>
+                  <a:srgbClr val="212121"/>
+                </a:solidFill>
+                <a:latin typeface="Courier New"/>
+              </a:rPr>
+              <a:t>M O N E Y</a:t>
+            </a:r>
+          </a:p>
+          <a:p>
+            <a:pPr>
+              <a:spcAft>
+                <a:spcPts val="800"/>
+              </a:spcAft>
+            </a:pPr>
+            <a:r>
+              <a:rPr sz="2200">
+                <a:solidFill>
+                  <a:srgbClr val="212121"/>
+                </a:solidFill>
+              </a:rPr>
+              <a:t/>
+            </a:r>
+          </a:p>
+          <a:p>
+            <a:pPr>
+              <a:spcAft>
+                <a:spcPts val="800"/>
+              </a:spcAft>
+            </a:pPr>
+            <a:r>
+              <a:rPr sz="2200">
+                <a:solidFill>
+                  <a:srgbClr val="212121"/>
+                </a:solidFill>
+              </a:rPr>
+              <a:t>Eight letters, all different digits, S ≠ 0, M ≠ 0 — about 10⁸ candidate assignments.</a:t>
+            </a:r>
+          </a:p>
+          <a:p>
+            <a:pPr>
+              <a:spcAft>
+                <a:spcPts val="800"/>
+              </a:spcAft>
+            </a:pPr>
+            <a:r>
+              <a:rPr sz="2200">
+                <a:solidFill>
+                  <a:srgbClr val="212121"/>
+                </a:solidFill>
+              </a:rPr>
+              <a:t>Z3 finds the unique solution in well under a second.</a:t>
+            </a:r>
+          </a:p>
+          <a:p>
+            <a:pPr>
+              <a:spcAft>
+                <a:spcPts val="800"/>
+              </a:spcAft>
+            </a:pPr>
+            <a:r>
+              <a:rPr sz="2200">
+                <a:solidFill>
+                  <a:srgbClr val="212121"/>
+                </a:solidFill>
+              </a:rPr>
+              <a:t>The same engine that solves puzzles finds your bugs: a counterexample is just a solution to “break my program”.</a:t>
+            </a:r>
+          </a:p>
+          <a:p>
+            <a:pPr>
+              <a:spcAft>
+                <a:spcPts val="800"/>
+              </a:spcAft>
+            </a:pPr>
+            <a:r>
+              <a:rPr sz="2200">
+                <a:solidFill>
+                  <a:srgbClr val="212121"/>
+                </a:solidFill>
+              </a:rPr>
+              <a:t>Lab 1, Stage 2: you run this yourself.</a:t>
+            </a:r>
+          </a:p>
+        </p:txBody>
+      </p:sp>
+    </p:spTree>
+  </p:cSld>
+  <p:clrMapOvr>
+    <a:masterClrMapping/>
+  </p:clrMapOvr>
+</p:sld>
+</file>
+
+<file path=ppt/slides/slide33.xml><?xml version="1.0" encoding="utf-8"?>
 <p:sld xmlns:a="http://schemas.openxmlformats.org/drawingml/2006/main" xmlns:p="http://schemas.openxmlformats.org/presentationml/2006/main" xmlns:r="http://schemas.openxmlformats.org/officeDocument/2006/relationships">
   <p:cSld>
     <p:spTree>
@@ -9075,7 +9278,7 @@
 </p:sld>
 </file>
 
-<file path=ppt/slides/slide33.xml><?xml version="1.0" encoding="utf-8"?>
+<file path=ppt/slides/slide34.xml><?xml version="1.0" encoding="utf-8"?>
 <p:sld xmlns:a="http://schemas.openxmlformats.org/drawingml/2006/main" xmlns:p="http://schemas.openxmlformats.org/presentationml/2006/main" xmlns:r="http://schemas.openxmlformats.org/officeDocument/2006/relationships">
   <p:cSld>
     <p:spTree>
@@ -9255,7 +9458,7 @@
 </p:sld>
 </file>
 
-<file path=ppt/slides/slide34.xml><?xml version="1.0" encoding="utf-8"?>
+<file path=ppt/slides/slide35.xml><?xml version="1.0" encoding="utf-8"?>
 <p:sld xmlns:a="http://schemas.openxmlformats.org/drawingml/2006/main" xmlns:p="http://schemas.openxmlformats.org/presentationml/2006/main" xmlns:r="http://schemas.openxmlformats.org/officeDocument/2006/relationships">
   <p:cSld>
     <p:spTree>
@@ -9497,7 +9700,7 @@
 </p:sld>
 </file>
 
-<file path=ppt/slides/slide35.xml><?xml version="1.0" encoding="utf-8"?>
+<file path=ppt/slides/slide36.xml><?xml version="1.0" encoding="utf-8"?>
 <p:sld xmlns:a="http://schemas.openxmlformats.org/drawingml/2006/main" xmlns:p="http://schemas.openxmlformats.org/presentationml/2006/main" xmlns:r="http://schemas.openxmlformats.org/officeDocument/2006/relationships">
   <p:cSld>
     <p:spTree>
@@ -9652,171 +9855,6 @@
                 </a:solidFill>
               </a:rPr>
               <a:t>Recognise the three lines? In Lab 1, Stage 3 you translate exactly this function by hand and hand it to Z3. You will be doing ESBMC's job yourself.</a:t>
-            </a:r>
-          </a:p>
-        </p:txBody>
-      </p:sp>
-    </p:spTree>
-  </p:cSld>
-  <p:clrMapOvr>
-    <a:masterClrMapping/>
-  </p:clrMapOvr>
-</p:sld>
-</file>
-
-<file path=ppt/slides/slide36.xml><?xml version="1.0" encoding="utf-8"?>
-<p:sld xmlns:a="http://schemas.openxmlformats.org/drawingml/2006/main" xmlns:p="http://schemas.openxmlformats.org/presentationml/2006/main" xmlns:r="http://schemas.openxmlformats.org/officeDocument/2006/relationships">
-  <p:cSld>
-    <p:spTree>
-      <p:nvGrpSpPr>
-        <p:cNvPr id="1" name=""/>
-        <p:cNvGrpSpPr/>
-        <p:nvPr/>
-      </p:nvGrpSpPr>
-      <p:grpSpPr/>
-      <p:sp>
-        <p:nvSpPr>
-          <p:cNvPr id="2" name="TextBox 1"/>
-          <p:cNvSpPr txBox="1"/>
-          <p:nvPr/>
-        </p:nvSpPr>
-        <p:spPr>
-          <a:xfrm>
-            <a:off x="548640" y="365760"/>
-            <a:ext cx="11064240" cy="1005840"/>
-          </a:xfrm>
-          <a:prstGeom prst="rect">
-            <a:avLst/>
-          </a:prstGeom>
-          <a:noFill/>
-        </p:spPr>
-        <p:txBody>
-          <a:bodyPr wrap="square">
-            <a:spAutoFit/>
-          </a:bodyPr>
-          <a:lstStyle/>
-          <a:p>
-            <a:r>
-              <a:rPr sz="3600" b="1">
-                <a:solidFill>
-                  <a:srgbClr val="5A0A7A"/>
-                </a:solidFill>
-              </a:rPr>
-              <a:t>Putting it together</a:t>
-            </a:r>
-          </a:p>
-        </p:txBody>
-      </p:sp>
-      <p:sp>
-        <p:nvSpPr>
-          <p:cNvPr id="3" name="TextBox 2"/>
-          <p:cNvSpPr txBox="1"/>
-          <p:nvPr/>
-        </p:nvSpPr>
-        <p:spPr>
-          <a:xfrm>
-            <a:off x="731520" y="1737360"/>
-            <a:ext cx="10789920" cy="4846320"/>
-          </a:xfrm>
-          <a:prstGeom prst="rect">
-            <a:avLst/>
-          </a:prstGeom>
-          <a:noFill/>
-        </p:spPr>
-        <p:txBody>
-          <a:bodyPr wrap="square">
-            <a:spAutoFit/>
-          </a:bodyPr>
-          <a:lstStyle/>
-          <a:p>
-            <a:pPr>
-              <a:spcAft>
-                <a:spcPts val="0"/>
-              </a:spcAft>
-            </a:pPr>
-            <a:r>
-              <a:rPr sz="2200">
-                <a:solidFill>
-                  <a:srgbClr val="212121"/>
-                </a:solidFill>
-                <a:latin typeface="Courier New"/>
-              </a:rPr>
-              <a:t>⟦program⟧  ∧  ¬P      →  SMT solver</a:t>
-            </a:r>
-          </a:p>
-          <a:p>
-            <a:pPr>
-              <a:spcAft>
-                <a:spcPts val="800"/>
-              </a:spcAft>
-            </a:pPr>
-            <a:r>
-              <a:rPr sz="2600">
-                <a:solidFill>
-                  <a:srgbClr val="212121"/>
-                </a:solidFill>
-              </a:rPr>
-              <a:t/>
-            </a:r>
-          </a:p>
-          <a:p>
-            <a:pPr>
-              <a:spcAft>
-                <a:spcPts val="800"/>
-              </a:spcAft>
-            </a:pPr>
-            <a:r>
-              <a:rPr sz="2600">
-                <a:solidFill>
-                  <a:srgbClr val="212121"/>
-                </a:solidFill>
-              </a:rPr>
-              <a:t>sat — the model assigns every input and every choice: replayed in program order, that is the counterexample trace.</a:t>
-            </a:r>
-          </a:p>
-          <a:p>
-            <a:pPr>
-              <a:spcAft>
-                <a:spcPts val="800"/>
-              </a:spcAft>
-            </a:pPr>
-            <a:r>
-              <a:rPr sz="2600">
-                <a:solidFill>
-                  <a:srgbClr val="212121"/>
-                </a:solidFill>
-              </a:rPr>
-              <a:t>unsat — no execution within the bound violates P.</a:t>
-            </a:r>
-          </a:p>
-          <a:p>
-            <a:pPr>
-              <a:spcAft>
-                <a:spcPts val="800"/>
-              </a:spcAft>
-            </a:pPr>
-            <a:r>
-              <a:rPr sz="2600">
-                <a:solidFill>
-                  <a:srgbClr val="212121"/>
-                </a:solidFill>
-              </a:rPr>
-              <a:t/>
-            </a:r>
-          </a:p>
-          <a:p>
-            <a:pPr>
-              <a:spcAft>
-                <a:spcPts val="800"/>
-              </a:spcAft>
-            </a:pPr>
-            <a:r>
-              <a:rPr sz="2600">
-                <a:solidFill>
-                  <a:srgbClr val="212121"/>
-                </a:solidFill>
-              </a:rPr>
-              <a:t>One formula, every path at once. That is why nobody has to enumerate 2⁶⁴ test cases.</a:t>
             </a:r>
           </a:p>
         </p:txBody>
@@ -9867,7 +9905,7 @@
                   <a:srgbClr val="5A0A7A"/>
                 </a:solidFill>
               </a:rPr>
-              <a:t>Anatomy of a counterexample</a:t>
+              <a:t>Putting it together</a:t>
             </a:r>
           </a:p>
         </p:txBody>
@@ -9880,8 +9918,8 @@
         </p:nvSpPr>
         <p:spPr>
           <a:xfrm>
-            <a:off x="731520" y="1463040"/>
-            <a:ext cx="10789920" cy="5120640"/>
+            <a:off x="731520" y="1737360"/>
+            <a:ext cx="10789920" cy="4846320"/>
           </a:xfrm>
           <a:prstGeom prst="rect">
             <a:avLst/>
@@ -9900,103 +9938,23 @@
               </a:spcAft>
             </a:pPr>
             <a:r>
-              <a:rPr sz="1800">
+              <a:rPr sz="2200">
                 <a:solidFill>
                   <a:srgbClr val="212121"/>
                 </a:solidFill>
                 <a:latin typeface="Courier New"/>
               </a:rPr>
-              <a:t>State 3  file offbyone.c  line 15</a:t>
-            </a:r>
-          </a:p>
-          <a:p>
-            <a:pPr>
-              <a:spcAft>
-                <a:spcPts val="0"/>
-              </a:spcAft>
-            </a:pPr>
-            <a:r>
-              <a:rPr sz="1800">
-                <a:solidFill>
-                  <a:srgbClr val="212121"/>
-                </a:solidFill>
-                <a:latin typeface="Courier New"/>
-              </a:rPr>
-              <a:t>  i = 5 (00000000 ... 101)      ← the value the solver chose</a:t>
-            </a:r>
-          </a:p>
-          <a:p>
-            <a:pPr>
-              <a:spcAft>
-                <a:spcPts val="0"/>
-              </a:spcAft>
-            </a:pPr>
-            <a:r>
-              <a:rPr sz="1800">
-                <a:solidFill>
-                  <a:srgbClr val="212121"/>
-                </a:solidFill>
-                <a:latin typeface="Courier New"/>
-              </a:rPr>
-              <a:t>...</a:t>
-            </a:r>
-          </a:p>
-          <a:p>
-            <a:pPr>
-              <a:spcAft>
-                <a:spcPts val="0"/>
-              </a:spcAft>
-            </a:pPr>
-            <a:r>
-              <a:rPr sz="1800">
-                <a:solidFill>
-                  <a:srgbClr val="212121"/>
-                </a:solidFill>
-                <a:latin typeface="Courier New"/>
-              </a:rPr>
-              <a:t>Violated property:</a:t>
-            </a:r>
-          </a:p>
-          <a:p>
-            <a:pPr>
-              <a:spcAft>
-                <a:spcPts val="0"/>
-              </a:spcAft>
-            </a:pPr>
-            <a:r>
-              <a:rPr sz="1800">
-                <a:solidFill>
-                  <a:srgbClr val="212121"/>
-                </a:solidFill>
-                <a:latin typeface="Courier New"/>
-              </a:rPr>
-              <a:t>  array bounds violated: a[i]   ← what broke</a:t>
-            </a:r>
-          </a:p>
-          <a:p>
-            <a:pPr>
-              <a:spcAft>
-                <a:spcPts val="0"/>
-              </a:spcAft>
-            </a:pPr>
-            <a:r>
-              <a:rPr sz="1800">
-                <a:solidFill>
-                  <a:srgbClr val="212121"/>
-                </a:solidFill>
-                <a:latin typeface="Courier New"/>
-              </a:rPr>
-              <a:t>  CWE: CWE-787                   ← the vulnerability class</a:t>
-            </a:r>
-          </a:p>
-          <a:p>
-            <a:pPr>
-              <a:spcAft>
-                <a:spcPts val="800"/>
-              </a:spcAft>
-            </a:pPr>
-            <a:r>
-              <a:rPr sz="2200">
+              <a:t>⟦program⟧  ∧  ¬P      →  SMT solver</a:t>
+            </a:r>
+          </a:p>
+          <a:p>
+            <a:pPr>
+              <a:spcAft>
+                <a:spcPts val="800"/>
+              </a:spcAft>
+            </a:pPr>
+            <a:r>
+              <a:rPr sz="2600">
                 <a:solidFill>
                   <a:srgbClr val="212121"/>
                 </a:solidFill>
@@ -10011,27 +9969,57 @@
               </a:spcAft>
             </a:pPr>
             <a:r>
-              <a:rPr sz="2200">
-                <a:solidFill>
-                  <a:srgbClr val="212121"/>
-                </a:solidFill>
-              </a:rPr>
-              <a:t>Read it bottom-up: first what was violated, then scroll up for the values that caused it.</a:t>
-            </a:r>
-          </a:p>
-          <a:p>
-            <a:pPr>
-              <a:spcAft>
-                <a:spcPts val="800"/>
-              </a:spcAft>
-            </a:pPr>
-            <a:r>
-              <a:rPr sz="2200">
-                <a:solidFill>
-                  <a:srgbClr val="212121"/>
-                </a:solidFill>
-              </a:rPr>
-              <a:t>Those values are a ready-made failing test case — keep them.</a:t>
+              <a:rPr sz="2600">
+                <a:solidFill>
+                  <a:srgbClr val="212121"/>
+                </a:solidFill>
+              </a:rPr>
+              <a:t>sat — the model assigns every input and every choice: replayed in program order, that is the counterexample trace.</a:t>
+            </a:r>
+          </a:p>
+          <a:p>
+            <a:pPr>
+              <a:spcAft>
+                <a:spcPts val="800"/>
+              </a:spcAft>
+            </a:pPr>
+            <a:r>
+              <a:rPr sz="2600">
+                <a:solidFill>
+                  <a:srgbClr val="212121"/>
+                </a:solidFill>
+              </a:rPr>
+              <a:t>unsat — no execution within the bound violates P.</a:t>
+            </a:r>
+          </a:p>
+          <a:p>
+            <a:pPr>
+              <a:spcAft>
+                <a:spcPts val="800"/>
+              </a:spcAft>
+            </a:pPr>
+            <a:r>
+              <a:rPr sz="2600">
+                <a:solidFill>
+                  <a:srgbClr val="212121"/>
+                </a:solidFill>
+              </a:rPr>
+              <a:t/>
+            </a:r>
+          </a:p>
+          <a:p>
+            <a:pPr>
+              <a:spcAft>
+                <a:spcPts val="800"/>
+              </a:spcAft>
+            </a:pPr>
+            <a:r>
+              <a:rPr sz="2600">
+                <a:solidFill>
+                  <a:srgbClr val="212121"/>
+                </a:solidFill>
+              </a:rPr>
+              <a:t>One formula, every path at once. That is why nobody has to enumerate 2⁶⁴ test cases.</a:t>
             </a:r>
           </a:p>
         </p:txBody>
@@ -10082,7 +10070,7 @@
                   <a:srgbClr val="5A0A7A"/>
                 </a:solidFill>
               </a:rPr>
-              <a:t>Live: the whole pipeline on five lines</a:t>
+              <a:t>Anatomy of a counterexample</a:t>
             </a:r>
           </a:p>
         </p:txBody>
@@ -10121,7 +10109,7 @@
                 </a:solidFill>
                 <a:latin typeface="Courier New"/>
               </a:rPr>
-              <a:t>int main(void)</a:t>
+              <a:t>State 3  file offbyone.c  line 15</a:t>
             </a:r>
           </a:p>
           <a:p>
@@ -10137,7 +10125,7 @@
                 </a:solidFill>
                 <a:latin typeface="Courier New"/>
               </a:rPr>
-              <a:t>{</a:t>
+              <a:t>  i = 5 (00000000 ... 101)      ← the value the solver chose</a:t>
             </a:r>
           </a:p>
           <a:p>
@@ -10153,7 +10141,7 @@
                 </a:solidFill>
                 <a:latin typeface="Courier New"/>
               </a:rPr>
-              <a:t>  int a[5];</a:t>
+              <a:t>...</a:t>
             </a:r>
           </a:p>
           <a:p>
@@ -10169,7 +10157,7 @@
                 </a:solidFill>
                 <a:latin typeface="Courier New"/>
               </a:rPr>
-              <a:t>  for (int i = 0; i &lt;= 5; i++)</a:t>
+              <a:t>Violated property:</a:t>
             </a:r>
           </a:p>
           <a:p>
@@ -10185,7 +10173,7 @@
                 </a:solidFill>
                 <a:latin typeface="Courier New"/>
               </a:rPr>
-              <a:t>    a[i] = i;</a:t>
+              <a:t>  array bounds violated: a[i]   ← what broke</a:t>
             </a:r>
           </a:p>
           <a:p>
@@ -10201,21 +10189,20 @@
                 </a:solidFill>
                 <a:latin typeface="Courier New"/>
               </a:rPr>
-              <a:t>}</a:t>
-            </a:r>
-          </a:p>
-          <a:p>
-            <a:pPr>
-              <a:spcAft>
-                <a:spcPts val="0"/>
-              </a:spcAft>
-            </a:pPr>
-            <a:r>
-              <a:rPr sz="1800">
-                <a:solidFill>
-                  <a:srgbClr val="212121"/>
-                </a:solidFill>
-                <a:latin typeface="Courier New"/>
+              <a:t>  CWE: CWE-787                   ← the vulnerability class</a:t>
+            </a:r>
+          </a:p>
+          <a:p>
+            <a:pPr>
+              <a:spcAft>
+                <a:spcPts val="800"/>
+              </a:spcAft>
+            </a:pPr>
+            <a:r>
+              <a:rPr sz="2200">
+                <a:solidFill>
+                  <a:srgbClr val="212121"/>
+                </a:solidFill>
               </a:rPr>
               <a:t/>
             </a:r>
@@ -10223,22 +10210,6 @@
           <a:p>
             <a:pPr>
               <a:spcAft>
-                <a:spcPts val="0"/>
-              </a:spcAft>
-            </a:pPr>
-            <a:r>
-              <a:rPr sz="1800">
-                <a:solidFill>
-                  <a:srgbClr val="212121"/>
-                </a:solidFill>
-                <a:latin typeface="Courier New"/>
-              </a:rPr>
-              <a:t>$ esbmc offbyone.c --unwind 7</a:t>
-            </a:r>
-          </a:p>
-          <a:p>
-            <a:pPr>
-              <a:spcAft>
                 <a:spcPts val="800"/>
               </a:spcAft>
             </a:pPr>
@@ -10248,7 +10219,7 @@
                   <a:srgbClr val="212121"/>
                 </a:solidFill>
               </a:rPr>
-              <a:t/>
+              <a:t>Read it bottom-up: first what was violated, then scroll up for the values that caused it.</a:t>
             </a:r>
           </a:p>
           <a:p>
@@ -10263,22 +10234,7 @@
                   <a:srgbClr val="212121"/>
                 </a:solidFill>
               </a:rPr>
-              <a:t>Predict first: FAILED or SUCCESSFUL? If FAILED — at which i?</a:t>
-            </a:r>
-          </a:p>
-          <a:p>
-            <a:pPr>
-              <a:spcAft>
-                <a:spcPts val="800"/>
-              </a:spcAft>
-            </a:pPr>
-            <a:r>
-              <a:rPr sz="2200">
-                <a:solidFill>
-                  <a:srgbClr val="212121"/>
-                </a:solidFill>
-              </a:rPr>
-              <a:t>Then we read the trace together, bottom-up.</a:t>
+              <a:t>Those values are a ready-made failing test case — keep them.</a:t>
             </a:r>
           </a:p>
         </p:txBody>
@@ -10329,7 +10285,7 @@
                   <a:srgbClr val="5A0A7A"/>
                 </a:solidFill>
               </a:rPr>
-              <a:t>Modelling the environment: a preview</a:t>
+              <a:t>Live: the whole pipeline on five lines</a:t>
             </a:r>
           </a:p>
         </p:txBody>
@@ -10368,7 +10324,7 @@
                 </a:solidFill>
                 <a:latin typeface="Courier New"/>
               </a:rPr>
-              <a:t>int x = nondet_int();              /* every value at once */</a:t>
+              <a:t>int main(void)</a:t>
             </a:r>
           </a:p>
           <a:p>
@@ -10384,7 +10340,7 @@
                 </a:solidFill>
                 <a:latin typeface="Courier New"/>
               </a:rPr>
-              <a:t>__ESBMC_assume(x &gt; 0 &amp;&amp; x &lt; 100);  /* now: every value in 1..99 */</a:t>
+              <a:t>{</a:t>
             </a:r>
           </a:p>
           <a:p>
@@ -10400,7 +10356,87 @@
                 </a:solidFill>
                 <a:latin typeface="Courier New"/>
               </a:rPr>
-              <a:t>assert(property(x));               /* must hold for ALL of them */</a:t>
+              <a:t>  int a[5];</a:t>
+            </a:r>
+          </a:p>
+          <a:p>
+            <a:pPr>
+              <a:spcAft>
+                <a:spcPts val="0"/>
+              </a:spcAft>
+            </a:pPr>
+            <a:r>
+              <a:rPr sz="1800">
+                <a:solidFill>
+                  <a:srgbClr val="212121"/>
+                </a:solidFill>
+                <a:latin typeface="Courier New"/>
+              </a:rPr>
+              <a:t>  for (int i = 0; i &lt;= 5; i++)</a:t>
+            </a:r>
+          </a:p>
+          <a:p>
+            <a:pPr>
+              <a:spcAft>
+                <a:spcPts val="0"/>
+              </a:spcAft>
+            </a:pPr>
+            <a:r>
+              <a:rPr sz="1800">
+                <a:solidFill>
+                  <a:srgbClr val="212121"/>
+                </a:solidFill>
+                <a:latin typeface="Courier New"/>
+              </a:rPr>
+              <a:t>    a[i] = i;</a:t>
+            </a:r>
+          </a:p>
+          <a:p>
+            <a:pPr>
+              <a:spcAft>
+                <a:spcPts val="0"/>
+              </a:spcAft>
+            </a:pPr>
+            <a:r>
+              <a:rPr sz="1800">
+                <a:solidFill>
+                  <a:srgbClr val="212121"/>
+                </a:solidFill>
+                <a:latin typeface="Courier New"/>
+              </a:rPr>
+              <a:t>}</a:t>
+            </a:r>
+          </a:p>
+          <a:p>
+            <a:pPr>
+              <a:spcAft>
+                <a:spcPts val="0"/>
+              </a:spcAft>
+            </a:pPr>
+            <a:r>
+              <a:rPr sz="1800">
+                <a:solidFill>
+                  <a:srgbClr val="212121"/>
+                </a:solidFill>
+                <a:latin typeface="Courier New"/>
+              </a:rPr>
+              <a:t/>
+            </a:r>
+          </a:p>
+          <a:p>
+            <a:pPr>
+              <a:spcAft>
+                <a:spcPts val="0"/>
+              </a:spcAft>
+            </a:pPr>
+            <a:r>
+              <a:rPr sz="1800">
+                <a:solidFill>
+                  <a:srgbClr val="212121"/>
+                </a:solidFill>
+                <a:latin typeface="Courier New"/>
+              </a:rPr>
+              <a:t>$ esbmc offbyone.c --unwind 7</a:t>
             </a:r>
           </a:p>
           <a:p>
@@ -10430,7 +10466,7 @@
                   <a:srgbClr val="212121"/>
                 </a:solidFill>
               </a:rPr>
-              <a:t>One nondeterministic input = all tests of that input at once.</a:t>
+              <a:t>Predict first: FAILED or SUCCESSFUL? If FAILED — at which i?</a:t>
             </a:r>
           </a:p>
           <a:p>
@@ -10445,7 +10481,7 @@
                   <a:srgbClr val="212121"/>
                 </a:solidFill>
               </a:rPr>
-              <a:t>In Session 2 you will use these three lines to expose a bug in a program that verifies green as shipped — the tool only checks what you specify.</a:t>
+              <a:t>Then we read the trace together, bottom-up.</a:t>
             </a:r>
           </a:p>
         </p:txBody>
@@ -10690,7 +10726,7 @@
                   <a:srgbClr val="5A0A7A"/>
                 </a:solidFill>
               </a:rPr>
-              <a:t>Beyond one thread</a:t>
+              <a:t>Modelling the environment: a preview</a:t>
             </a:r>
           </a:p>
         </p:txBody>
@@ -10703,8 +10739,8 @@
         </p:nvSpPr>
         <p:spPr>
           <a:xfrm>
-            <a:off x="731520" y="1645920"/>
-            <a:ext cx="10789920" cy="4937760"/>
+            <a:off x="731520" y="1463040"/>
+            <a:ext cx="10789920" cy="5120640"/>
           </a:xfrm>
           <a:prstGeom prst="rect">
             <a:avLst/>
@@ -10719,56 +10755,59 @@
           <a:p>
             <a:pPr>
               <a:spcAft>
-                <a:spcPts val="800"/>
-              </a:spcAft>
-            </a:pPr>
-            <a:r>
-              <a:rPr sz="2400">
-                <a:solidFill>
-                  <a:srgbClr val="212121"/>
-                </a:solidFill>
-              </a:rPr>
-              <a:t>Two threads of two and one statements already have three interleavings. Real code has billions.</a:t>
-            </a:r>
-          </a:p>
-          <a:p>
-            <a:pPr>
-              <a:spcAft>
-                <a:spcPts val="800"/>
-              </a:spcAft>
-            </a:pPr>
-            <a:r>
-              <a:rPr sz="2400">
-                <a:solidFill>
-                  <a:srgbClr val="212121"/>
-                </a:solidFill>
-              </a:rPr>
-              <a:t>Run the program a million times and the bad interleaving may never show up — Therac-25's bug hid exactly this way.</a:t>
-            </a:r>
-          </a:p>
-          <a:p>
-            <a:pPr>
-              <a:spcAft>
-                <a:spcPts val="800"/>
-              </a:spcAft>
-            </a:pPr>
-            <a:r>
-              <a:rPr sz="2400">
-                <a:solidFill>
-                  <a:srgbClr val="212121"/>
-                </a:solidFill>
-              </a:rPr>
-              <a:t>A model checker enumerates every interleaving up to a bound, including the one that kills your assertion.</a:t>
-            </a:r>
-          </a:p>
-          <a:p>
-            <a:pPr>
-              <a:spcAft>
-                <a:spcPts val="800"/>
-              </a:spcAft>
-            </a:pPr>
-            <a:r>
-              <a:rPr sz="2400">
+                <a:spcPts val="0"/>
+              </a:spcAft>
+            </a:pPr>
+            <a:r>
+              <a:rPr sz="1800">
+                <a:solidFill>
+                  <a:srgbClr val="212121"/>
+                </a:solidFill>
+                <a:latin typeface="Courier New"/>
+              </a:rPr>
+              <a:t>int x = nondet_int();              /* every value at once */</a:t>
+            </a:r>
+          </a:p>
+          <a:p>
+            <a:pPr>
+              <a:spcAft>
+                <a:spcPts val="0"/>
+              </a:spcAft>
+            </a:pPr>
+            <a:r>
+              <a:rPr sz="1800">
+                <a:solidFill>
+                  <a:srgbClr val="212121"/>
+                </a:solidFill>
+                <a:latin typeface="Courier New"/>
+              </a:rPr>
+              <a:t>__ESBMC_assume(x &gt; 0 &amp;&amp; x &lt; 100);  /* now: every value in 1..99 */</a:t>
+            </a:r>
+          </a:p>
+          <a:p>
+            <a:pPr>
+              <a:spcAft>
+                <a:spcPts val="0"/>
+              </a:spcAft>
+            </a:pPr>
+            <a:r>
+              <a:rPr sz="1800">
+                <a:solidFill>
+                  <a:srgbClr val="212121"/>
+                </a:solidFill>
+                <a:latin typeface="Courier New"/>
+              </a:rPr>
+              <a:t>assert(property(x));               /* must hold for ALL of them */</a:t>
+            </a:r>
+          </a:p>
+          <a:p>
+            <a:pPr>
+              <a:spcAft>
+                <a:spcPts val="800"/>
+              </a:spcAft>
+            </a:pPr>
+            <a:r>
+              <a:rPr sz="2200">
                 <a:solidFill>
                   <a:srgbClr val="212121"/>
                 </a:solidFill>
@@ -10783,12 +10822,27 @@
               </a:spcAft>
             </a:pPr>
             <a:r>
-              <a:rPr sz="2400">
-                <a:solidFill>
-                  <a:srgbClr val="212121"/>
-                </a:solidFill>
-              </a:rPr>
-              <a:t>Session 2, Lab 4: you write down the killer interleaving before the tool finds it.</a:t>
+              <a:rPr sz="2200">
+                <a:solidFill>
+                  <a:srgbClr val="212121"/>
+                </a:solidFill>
+              </a:rPr>
+              <a:t>One nondeterministic input = all tests of that input at once.</a:t>
+            </a:r>
+          </a:p>
+          <a:p>
+            <a:pPr>
+              <a:spcAft>
+                <a:spcPts val="800"/>
+              </a:spcAft>
+            </a:pPr>
+            <a:r>
+              <a:rPr sz="2200">
+                <a:solidFill>
+                  <a:srgbClr val="212121"/>
+                </a:solidFill>
+              </a:rPr>
+              <a:t>In Session 2 you will use these three lines to expose a bug in a program that verifies green as shipped — the tool only checks what you specify.</a:t>
             </a:r>
           </a:p>
         </p:txBody>
@@ -10839,7 +10893,7 @@
                   <a:srgbClr val="5A0A7A"/>
                 </a:solidFill>
               </a:rPr>
-              <a:t>Homework for your intuition</a:t>
+              <a:t>Beyond one thread</a:t>
             </a:r>
           </a:p>
         </p:txBody>
@@ -10852,8 +10906,8 @@
         </p:nvSpPr>
         <p:spPr>
           <a:xfrm>
-            <a:off x="731520" y="1828800"/>
-            <a:ext cx="10789920" cy="4754880"/>
+            <a:off x="731520" y="1645920"/>
+            <a:ext cx="10789920" cy="4937760"/>
           </a:xfrm>
           <a:prstGeom prst="rect">
             <a:avLst/>
@@ -10868,43 +10922,56 @@
           <a:p>
             <a:pPr>
               <a:spcAft>
-                <a:spcPts val="0"/>
-              </a:spcAft>
-            </a:pPr>
-            <a:r>
-              <a:rPr sz="2200">
-                <a:solidFill>
-                  <a:srgbClr val="212121"/>
-                </a:solidFill>
-                <a:latin typeface="Courier New"/>
-              </a:rPr>
-              <a:t>double w = 0.1 + 0.2;</a:t>
-            </a:r>
-          </a:p>
-          <a:p>
-            <a:pPr>
-              <a:spcAft>
-                <a:spcPts val="0"/>
-              </a:spcAft>
-            </a:pPr>
-            <a:r>
-              <a:rPr sz="2200">
-                <a:solidFill>
-                  <a:srgbClr val="212121"/>
-                </a:solidFill>
-                <a:latin typeface="Courier New"/>
-              </a:rPr>
-              <a:t>assert(w == 0.3);</a:t>
-            </a:r>
-          </a:p>
-          <a:p>
-            <a:pPr>
-              <a:spcAft>
-                <a:spcPts val="800"/>
-              </a:spcAft>
-            </a:pPr>
-            <a:r>
-              <a:rPr sz="2600">
+                <a:spcPts val="800"/>
+              </a:spcAft>
+            </a:pPr>
+            <a:r>
+              <a:rPr sz="2400">
+                <a:solidFill>
+                  <a:srgbClr val="212121"/>
+                </a:solidFill>
+              </a:rPr>
+              <a:t>Two threads of two and one statements already have three interleavings. Real code has billions.</a:t>
+            </a:r>
+          </a:p>
+          <a:p>
+            <a:pPr>
+              <a:spcAft>
+                <a:spcPts val="800"/>
+              </a:spcAft>
+            </a:pPr>
+            <a:r>
+              <a:rPr sz="2400">
+                <a:solidFill>
+                  <a:srgbClr val="212121"/>
+                </a:solidFill>
+              </a:rPr>
+              <a:t>Run the program a million times and the bad interleaving may never show up — Therac-25's bug hid exactly this way.</a:t>
+            </a:r>
+          </a:p>
+          <a:p>
+            <a:pPr>
+              <a:spcAft>
+                <a:spcPts val="800"/>
+              </a:spcAft>
+            </a:pPr>
+            <a:r>
+              <a:rPr sz="2400">
+                <a:solidFill>
+                  <a:srgbClr val="212121"/>
+                </a:solidFill>
+              </a:rPr>
+              <a:t>A model checker enumerates every interleaving up to a bound, including the one that kills your assertion.</a:t>
+            </a:r>
+          </a:p>
+          <a:p>
+            <a:pPr>
+              <a:spcAft>
+                <a:spcPts val="800"/>
+              </a:spcAft>
+            </a:pPr>
+            <a:r>
+              <a:rPr sz="2400">
                 <a:solidFill>
                   <a:srgbClr val="212121"/>
                 </a:solidFill>
@@ -10919,57 +10986,12 @@
               </a:spcAft>
             </a:pPr>
             <a:r>
-              <a:rPr sz="2600">
-                <a:solidFill>
-                  <a:srgbClr val="212121"/>
-                </a:solidFill>
-              </a:rPr>
-              <a:t>FAILED or SUCCESSFUL?</a:t>
-            </a:r>
-          </a:p>
-          <a:p>
-            <a:pPr>
-              <a:spcAft>
-                <a:spcPts val="800"/>
-              </a:spcAft>
-            </a:pPr>
-            <a:r>
-              <a:rPr sz="2600">
-                <a:solidFill>
-                  <a:srgbClr val="212121"/>
-                </a:solidFill>
-              </a:rPr>
-              <a:t/>
-            </a:r>
-          </a:p>
-          <a:p>
-            <a:pPr>
-              <a:spcAft>
-                <a:spcPts val="800"/>
-              </a:spcAft>
-            </a:pPr>
-            <a:r>
-              <a:rPr sz="2600">
-                <a:solidFill>
-                  <a:srgbClr val="212121"/>
-                </a:solidFill>
-              </a:rPr>
-              <a:t>Bring your answer to Session 2 — Lab 4 settles it with a solver that does exact IEEE-754 arithmetic.</a:t>
-            </a:r>
-          </a:p>
-          <a:p>
-            <a:pPr lvl="1">
-              <a:spcAft>
-                <a:spcPts val="800"/>
-              </a:spcAft>
-            </a:pPr>
-            <a:r>
               <a:rPr sz="2400">
                 <a:solidFill>
                   <a:srgbClr val="212121"/>
                 </a:solidFill>
               </a:rPr>
-              <a:t>Hint: 0.1 in binary is like 1/3 in decimal.</a:t>
+              <a:t>Session 2, Lab 4: you write down the killer interleaving before the tool finds it.</a:t>
             </a:r>
           </a:p>
         </p:txBody>
@@ -11020,7 +11042,7 @@
                   <a:srgbClr val="5A0A7A"/>
                 </a:solidFill>
               </a:rPr>
-              <a:t>Exercise 2 — Predict the Verdict (15 min)</a:t>
+              <a:t>Homework for your intuition</a:t>
             </a:r>
           </a:p>
         </p:txBody>
@@ -11033,8 +11055,8 @@
         </p:nvSpPr>
         <p:spPr>
           <a:xfrm>
-            <a:off x="731520" y="1463040"/>
-            <a:ext cx="10789920" cy="5120640"/>
+            <a:off x="731520" y="1828800"/>
+            <a:ext cx="10789920" cy="4754880"/>
           </a:xfrm>
           <a:prstGeom prst="rect">
             <a:avLst/>
@@ -11049,7 +11071,7 @@
           <a:p>
             <a:pPr>
               <a:spcAft>
-                <a:spcPts val="800"/>
+                <a:spcPts val="0"/>
               </a:spcAft>
             </a:pPr>
             <a:r>
@@ -11057,14 +11079,15 @@
                 <a:solidFill>
                   <a:srgbClr val="212121"/>
                 </a:solidFill>
-              </a:rPr>
-              <a:t>Groups of 3–4. Three short C programs on the handout (predict1.c, predict2.c, predict3.c).</a:t>
-            </a:r>
-          </a:p>
-          <a:p>
-            <a:pPr>
-              <a:spcAft>
-                <a:spcPts val="800"/>
+                <a:latin typeface="Courier New"/>
+              </a:rPr>
+              <a:t>double w = 0.1 + 0.2;</a:t>
+            </a:r>
+          </a:p>
+          <a:p>
+            <a:pPr>
+              <a:spcAft>
+                <a:spcPts val="0"/>
               </a:spcAft>
             </a:pPr>
             <a:r>
@@ -11072,8 +11095,69 @@
                 <a:solidFill>
                   <a:srgbClr val="212121"/>
                 </a:solidFill>
-              </a:rPr>
-              <a:t>For each program, write down BEFORE we run anything:</a:t>
+                <a:latin typeface="Courier New"/>
+              </a:rPr>
+              <a:t>assert(w == 0.3);</a:t>
+            </a:r>
+          </a:p>
+          <a:p>
+            <a:pPr>
+              <a:spcAft>
+                <a:spcPts val="800"/>
+              </a:spcAft>
+            </a:pPr>
+            <a:r>
+              <a:rPr sz="2600">
+                <a:solidFill>
+                  <a:srgbClr val="212121"/>
+                </a:solidFill>
+              </a:rPr>
+              <a:t/>
+            </a:r>
+          </a:p>
+          <a:p>
+            <a:pPr>
+              <a:spcAft>
+                <a:spcPts val="800"/>
+              </a:spcAft>
+            </a:pPr>
+            <a:r>
+              <a:rPr sz="2600">
+                <a:solidFill>
+                  <a:srgbClr val="212121"/>
+                </a:solidFill>
+              </a:rPr>
+              <a:t>FAILED or SUCCESSFUL?</a:t>
+            </a:r>
+          </a:p>
+          <a:p>
+            <a:pPr>
+              <a:spcAft>
+                <a:spcPts val="800"/>
+              </a:spcAft>
+            </a:pPr>
+            <a:r>
+              <a:rPr sz="2600">
+                <a:solidFill>
+                  <a:srgbClr val="212121"/>
+                </a:solidFill>
+              </a:rPr>
+              <a:t/>
+            </a:r>
+          </a:p>
+          <a:p>
+            <a:pPr>
+              <a:spcAft>
+                <a:spcPts val="800"/>
+              </a:spcAft>
+            </a:pPr>
+            <a:r>
+              <a:rPr sz="2600">
+                <a:solidFill>
+                  <a:srgbClr val="212121"/>
+                </a:solidFill>
+              </a:rPr>
+              <a:t>Bring your answer to Session 2 — Lab 4 settles it with a solver that does exact IEEE-754 arithmetic.</a:t>
             </a:r>
           </a:p>
           <a:p>
@@ -11083,42 +11167,12 @@
               </a:spcAft>
             </a:pPr>
             <a:r>
-              <a:rPr sz="2000">
-                <a:solidFill>
-                  <a:srgbClr val="212121"/>
-                </a:solidFill>
-              </a:rPr>
-              <a:t>Will the model checker say VERIFICATION FAILED or SUCCESSFUL?</a:t>
-            </a:r>
-          </a:p>
-          <a:p>
-            <a:pPr lvl="1">
-              <a:spcAft>
-                <a:spcPts val="800"/>
-              </a:spcAft>
-            </a:pPr>
-            <a:r>
-              <a:rPr sz="2000">
-                <a:solidFill>
-                  <a:srgbClr val="212121"/>
-                </a:solidFill>
-              </a:rPr>
-              <a:t>If FAILED — which line is the culprit?</a:t>
-            </a:r>
-          </a:p>
-          <a:p>
-            <a:pPr>
-              <a:spcAft>
-                <a:spcPts val="800"/>
-              </a:spcAft>
-            </a:pPr>
-            <a:r>
-              <a:rPr sz="2200">
-                <a:solidFill>
-                  <a:srgbClr val="212121"/>
-                </a:solidFill>
-              </a:rPr>
-              <a:t>Then we run ESBMC live and settle every bet.</a:t>
+              <a:rPr sz="2400">
+                <a:solidFill>
+                  <a:srgbClr val="212121"/>
+                </a:solidFill>
+              </a:rPr>
+              <a:t>Hint: 0.1 in binary is like 1/3 in decimal.</a:t>
             </a:r>
           </a:p>
         </p:txBody>
@@ -11169,7 +11223,7 @@
                   <a:srgbClr val="5A0A7A"/>
                 </a:solidFill>
               </a:rPr>
-              <a:t>Who uses this? — Model checking</a:t>
+              <a:t>Exercise 2 — Predict the Verdict (15 min)</a:t>
             </a:r>
           </a:p>
         </p:txBody>
@@ -11207,7 +11261,7 @@
                   <a:srgbClr val="212121"/>
                 </a:solidFill>
               </a:rPr>
-              <a:t>Amazon Web Services — CBMC proves memory safety of the TLS library s2n; bounded proofs run in CI on every commit</a:t>
+              <a:t>Groups of 3–4. Three short C programs on the handout (predict1.c, predict2.c, predict3.c).</a:t>
             </a:r>
           </a:p>
           <a:p>
@@ -11222,7 +11276,37 @@
                   <a:srgbClr val="212121"/>
                 </a:solidFill>
               </a:rPr>
-              <a:t>ESBMC / CBMC — the tools from tonight's demos; compete yearly in SV-COMP on tens of thousands of benchmarks</a:t>
+              <a:t>For each program, write down BEFORE we run anything:</a:t>
+            </a:r>
+          </a:p>
+          <a:p>
+            <a:pPr lvl="1">
+              <a:spcAft>
+                <a:spcPts val="800"/>
+              </a:spcAft>
+            </a:pPr>
+            <a:r>
+              <a:rPr sz="2000">
+                <a:solidFill>
+                  <a:srgbClr val="212121"/>
+                </a:solidFill>
+              </a:rPr>
+              <a:t>Will the model checker say VERIFICATION FAILED or SUCCESSFUL?</a:t>
+            </a:r>
+          </a:p>
+          <a:p>
+            <a:pPr lvl="1">
+              <a:spcAft>
+                <a:spcPts val="800"/>
+              </a:spcAft>
+            </a:pPr>
+            <a:r>
+              <a:rPr sz="2000">
+                <a:solidFill>
+                  <a:srgbClr val="212121"/>
+                </a:solidFill>
+              </a:rPr>
+              <a:t>If FAILED — which line is the culprit?</a:t>
             </a:r>
           </a:p>
           <a:p>
@@ -11237,7 +11321,7 @@
                   <a:srgbClr val="212121"/>
                 </a:solidFill>
               </a:rPr>
-              <a:t>The counterexample you saw for getpassword.c is the same artefact AWS engineers read when a proof fails</a:t>
+              <a:t>Then we run ESBMC live and settle every bet.</a:t>
             </a:r>
           </a:p>
         </p:txBody>
@@ -11288,7 +11372,7 @@
                   <a:srgbClr val="5A0A7A"/>
                 </a:solidFill>
               </a:rPr>
-              <a:t>Who uses this? — Symbolic execution &amp; fuzzing</a:t>
+              <a:t>Who uses this? — Model checking</a:t>
             </a:r>
           </a:p>
         </p:txBody>
@@ -11326,7 +11410,7 @@
                   <a:srgbClr val="212121"/>
                 </a:solidFill>
               </a:rPr>
-              <a:t>KLEE found 56 serious bugs in coreutils, busybox and Minix — including three in coreutils that had survived 15 years of testing</a:t>
+              <a:t>Amazon Web Services — CBMC proves memory safety of the TLS library s2n; bounded proofs run in CI on every commit</a:t>
             </a:r>
           </a:p>
           <a:p>
@@ -11341,7 +11425,7 @@
                   <a:srgbClr val="212121"/>
                 </a:solidFill>
               </a:rPr>
-              <a:t>Microsoft SAGE fuzzed Windows file parsers with symbolic execution; it found ~1/3 of all bugs caught by file fuzzing during Windows 7 development — running last, after every other tool</a:t>
+              <a:t>ESBMC / CBMC — the tools from tonight's demos; compete yearly in SV-COMP on tens of thousands of benchmarks</a:t>
             </a:r>
           </a:p>
           <a:p>
@@ -11356,22 +11440,7 @@
                   <a:srgbClr val="212121"/>
                 </a:solidFill>
               </a:rPr>
-              <a:t>AFL / OSS-Fuzz — Google fuzzes ~1,000 open-source projects continuously; tens of thousands of bugs found</a:t>
-            </a:r>
-          </a:p>
-          <a:p>
-            <a:pPr>
-              <a:spcAft>
-                <a:spcPts val="800"/>
-              </a:spcAft>
-            </a:pPr>
-            <a:r>
-              <a:rPr sz="2200">
-                <a:solidFill>
-                  <a:srgbClr val="212121"/>
-                </a:solidFill>
-              </a:rPr>
-              <a:t>The pragmatic cousin of verification: no proofs, ruthless effectiveness</a:t>
+              <a:t>The counterexample you saw for getpassword.c is the same artefact AWS engineers read when a proof fails</a:t>
             </a:r>
           </a:p>
         </p:txBody>
@@ -11422,7 +11491,7 @@
                   <a:srgbClr val="5A0A7A"/>
                 </a:solidFill>
               </a:rPr>
-              <a:t>Who uses this? — Proofs all the way up</a:t>
+              <a:t>Who uses this? — Symbolic execution &amp; fuzzing</a:t>
             </a:r>
           </a:p>
         </p:txBody>
@@ -11460,7 +11529,7 @@
                   <a:srgbClr val="212121"/>
                 </a:solidFill>
               </a:rPr>
-              <a:t>Astrée (abstract interpretation) proved absence of runtime errors in the Airbus A340 fly-by-wire code — 132,000 lines of C — and was then applied to the A380</a:t>
+              <a:t>KLEE found 56 serious bugs in coreutils, busybox and Minix — including three in coreutils that had survived 15 years of testing</a:t>
             </a:r>
           </a:p>
           <a:p>
@@ -11475,7 +11544,7 @@
                   <a:srgbClr val="212121"/>
                 </a:solidFill>
               </a:rPr>
-              <a:t>seL4 — an OS microkernel with a machine-checked proof of functional correctness</a:t>
+              <a:t>Microsoft SAGE fuzzed Windows file parsers with symbolic execution; it found ~1/3 of all bugs caught by file fuzzing during Windows 7 development — running last, after every other tool</a:t>
             </a:r>
           </a:p>
           <a:p>
@@ -11490,7 +11559,22 @@
                   <a:srgbClr val="212121"/>
                 </a:solidFill>
               </a:rPr>
-              <a:t>CompCert — a C compiler with a proof that compilation preserves semantics; six CPU-years of fuzzing found no wrong-code bugs in its verified core, while every other compiler tested failed</a:t>
+              <a:t>AFL / OSS-Fuzz — Google fuzzes ~1,000 open-source projects continuously; tens of thousands of bugs found</a:t>
+            </a:r>
+          </a:p>
+          <a:p>
+            <a:pPr>
+              <a:spcAft>
+                <a:spcPts val="800"/>
+              </a:spcAft>
+            </a:pPr>
+            <a:r>
+              <a:rPr sz="2200">
+                <a:solidFill>
+                  <a:srgbClr val="212121"/>
+                </a:solidFill>
+              </a:rPr>
+              <a:t>The pragmatic cousin of verification: no proofs, ruthless effectiveness</a:t>
             </a:r>
           </a:p>
         </p:txBody>
@@ -11541,7 +11625,7 @@
                   <a:srgbClr val="5A0A7A"/>
                 </a:solidFill>
               </a:rPr>
-              <a:t>Discussion</a:t>
+              <a:t>Who uses this? — Proofs all the way up</a:t>
             </a:r>
           </a:p>
         </p:txBody>
@@ -11554,8 +11638,8 @@
         </p:nvSpPr>
         <p:spPr>
           <a:xfrm>
-            <a:off x="731520" y="2194560"/>
-            <a:ext cx="10789920" cy="4389120"/>
+            <a:off x="731520" y="1463040"/>
+            <a:ext cx="10789920" cy="5120640"/>
           </a:xfrm>
           <a:prstGeom prst="rect">
             <a:avLst/>
@@ -11574,42 +11658,42 @@
               </a:spcAft>
             </a:pPr>
             <a:r>
-              <a:rPr sz="2800">
-                <a:solidFill>
-                  <a:srgbClr val="212121"/>
-                </a:solidFill>
-              </a:rPr>
-              <a:t>If verification can prove the absence of bugs…</a:t>
-            </a:r>
-          </a:p>
-          <a:p>
-            <a:pPr>
-              <a:spcAft>
-                <a:spcPts val="800"/>
-              </a:spcAft>
-            </a:pPr>
-            <a:r>
-              <a:rPr sz="2800">
-                <a:solidFill>
-                  <a:srgbClr val="212121"/>
-                </a:solidFill>
-              </a:rPr>
-              <a:t>why isn't all software verified?</a:t>
-            </a:r>
-          </a:p>
-          <a:p>
-            <a:pPr>
-              <a:spcAft>
-                <a:spcPts val="800"/>
-              </a:spcAft>
-            </a:pPr>
-            <a:r>
-              <a:rPr sz="2800">
-                <a:solidFill>
-                  <a:srgbClr val="212121"/>
-                </a:solidFill>
-              </a:rPr>
-              <a:t>(Let's collect reasons — then I'll tell you which ones the industry actually cites.)</a:t>
+              <a:rPr sz="2200">
+                <a:solidFill>
+                  <a:srgbClr val="212121"/>
+                </a:solidFill>
+              </a:rPr>
+              <a:t>Astrée (abstract interpretation) proved absence of runtime errors in the Airbus A340 fly-by-wire code — 132,000 lines of C — and was then applied to the A380</a:t>
+            </a:r>
+          </a:p>
+          <a:p>
+            <a:pPr>
+              <a:spcAft>
+                <a:spcPts val="800"/>
+              </a:spcAft>
+            </a:pPr>
+            <a:r>
+              <a:rPr sz="2200">
+                <a:solidFill>
+                  <a:srgbClr val="212121"/>
+                </a:solidFill>
+              </a:rPr>
+              <a:t>seL4 — an OS microkernel with a machine-checked proof of functional correctness</a:t>
+            </a:r>
+          </a:p>
+          <a:p>
+            <a:pPr>
+              <a:spcAft>
+                <a:spcPts val="800"/>
+              </a:spcAft>
+            </a:pPr>
+            <a:r>
+              <a:rPr sz="2200">
+                <a:solidFill>
+                  <a:srgbClr val="212121"/>
+                </a:solidFill>
+              </a:rPr>
+              <a:t>CompCert — a C compiler with a proof that compilation preserves semantics; six CPU-years of fuzzing found no wrong-code bugs in its verified core, while every other compiler tested failed</a:t>
             </a:r>
           </a:p>
         </p:txBody>
@@ -11660,6 +11744,125 @@
                   <a:srgbClr val="5A0A7A"/>
                 </a:solidFill>
               </a:rPr>
+              <a:t>Discussion</a:t>
+            </a:r>
+          </a:p>
+        </p:txBody>
+      </p:sp>
+      <p:sp>
+        <p:nvSpPr>
+          <p:cNvPr id="3" name="TextBox 2"/>
+          <p:cNvSpPr txBox="1"/>
+          <p:nvPr/>
+        </p:nvSpPr>
+        <p:spPr>
+          <a:xfrm>
+            <a:off x="731520" y="2194560"/>
+            <a:ext cx="10789920" cy="4389120"/>
+          </a:xfrm>
+          <a:prstGeom prst="rect">
+            <a:avLst/>
+          </a:prstGeom>
+          <a:noFill/>
+        </p:spPr>
+        <p:txBody>
+          <a:bodyPr wrap="square">
+            <a:spAutoFit/>
+          </a:bodyPr>
+          <a:lstStyle/>
+          <a:p>
+            <a:pPr>
+              <a:spcAft>
+                <a:spcPts val="800"/>
+              </a:spcAft>
+            </a:pPr>
+            <a:r>
+              <a:rPr sz="2800">
+                <a:solidFill>
+                  <a:srgbClr val="212121"/>
+                </a:solidFill>
+              </a:rPr>
+              <a:t>If verification can prove the absence of bugs…</a:t>
+            </a:r>
+          </a:p>
+          <a:p>
+            <a:pPr>
+              <a:spcAft>
+                <a:spcPts val="800"/>
+              </a:spcAft>
+            </a:pPr>
+            <a:r>
+              <a:rPr sz="2800">
+                <a:solidFill>
+                  <a:srgbClr val="212121"/>
+                </a:solidFill>
+              </a:rPr>
+              <a:t>why isn't all software verified?</a:t>
+            </a:r>
+          </a:p>
+          <a:p>
+            <a:pPr>
+              <a:spcAft>
+                <a:spcPts val="800"/>
+              </a:spcAft>
+            </a:pPr>
+            <a:r>
+              <a:rPr sz="2800">
+                <a:solidFill>
+                  <a:srgbClr val="212121"/>
+                </a:solidFill>
+              </a:rPr>
+              <a:t>(Let's collect reasons — then I'll tell you which ones the industry actually cites.)</a:t>
+            </a:r>
+          </a:p>
+        </p:txBody>
+      </p:sp>
+    </p:spTree>
+  </p:cSld>
+  <p:clrMapOvr>
+    <a:masterClrMapping/>
+  </p:clrMapOvr>
+</p:sld>
+</file>
+
+<file path=ppt/slides/slide48.xml><?xml version="1.0" encoding="utf-8"?>
+<p:sld xmlns:a="http://schemas.openxmlformats.org/drawingml/2006/main" xmlns:p="http://schemas.openxmlformats.org/presentationml/2006/main" xmlns:r="http://schemas.openxmlformats.org/officeDocument/2006/relationships">
+  <p:cSld>
+    <p:spTree>
+      <p:nvGrpSpPr>
+        <p:cNvPr id="1" name=""/>
+        <p:cNvGrpSpPr/>
+        <p:nvPr/>
+      </p:nvGrpSpPr>
+      <p:grpSpPr/>
+      <p:sp>
+        <p:nvSpPr>
+          <p:cNvPr id="2" name="TextBox 1"/>
+          <p:cNvSpPr txBox="1"/>
+          <p:nvPr/>
+        </p:nvSpPr>
+        <p:spPr>
+          <a:xfrm>
+            <a:off x="548640" y="365760"/>
+            <a:ext cx="11064240" cy="1005840"/>
+          </a:xfrm>
+          <a:prstGeom prst="rect">
+            <a:avLst/>
+          </a:prstGeom>
+          <a:noFill/>
+        </p:spPr>
+        <p:txBody>
+          <a:bodyPr wrap="square">
+            <a:spAutoFit/>
+          </a:bodyPr>
+          <a:lstStyle/>
+          <a:p>
+            <a:r>
+              <a:rPr sz="3600" b="1">
+                <a:solidFill>
+                  <a:srgbClr val="5A0A7A"/>
+                </a:solidFill>
+              </a:rPr>
               <a:t>Closing quiz</a:t>
             </a:r>
           </a:p>
@@ -11771,7 +11974,7 @@
 </p:sld>
 </file>
 
-<file path=ppt/slides/slide48.xml><?xml version="1.0" encoding="utf-8"?>
+<file path=ppt/slides/slide49.xml><?xml version="1.0" encoding="utf-8"?>
 <p:sld xmlns:a="http://schemas.openxmlformats.org/drawingml/2006/main" xmlns:p="http://schemas.openxmlformats.org/presentationml/2006/main" xmlns:r="http://schemas.openxmlformats.org/officeDocument/2006/relationships">
   <p:cSld>
     <p:spTree>

--- a/slides/session1/01-session1-fundamentals.pptx
+++ b/slides/session1/01-session1-fundamentals.pptx
@@ -8648,7 +8648,7 @@
                   <a:srgbClr val="212121"/>
                 </a:solidFill>
               </a:rPr>
-              <a:t>Eight letters, all different digits, S ≠ 0, M ≠ 0 — about 10⁸ candidate assignments.</a:t>
+              <a:t>Eight letters, ten digits — naïvely 10⁸ ways to fill them in. “All different, S ≠ 0, M ≠ 0” cuts that to about 1.5 million — still far too many to eyeball.</a:t>
             </a:r>
           </a:p>
           <a:p>
@@ -8663,7 +8663,7 @@
                   <a:srgbClr val="212121"/>
                 </a:solidFill>
               </a:rPr>
-              <a:t>Z3 finds the unique solution in well under a second.</a:t>
+              <a:t>Z3 finds the unique solution (9567 + 1085 = 10652) in well under a second.</a:t>
             </a:r>
           </a:p>
           <a:p>

--- a/slides/session1/01-session1-fundamentals.pptx
+++ b/slides/session1/01-session1-fundamentals.pptx
@@ -54,6 +54,8 @@
     <p:sldId id="302" r:id="rId53"/>
     <p:sldId id="303" r:id="rId54"/>
     <p:sldId id="304" r:id="rId55"/>
+    <p:sldId id="305" r:id="rId56"/>
+    <p:sldId id="306" r:id="rId57"/>
   </p:sldIdLst>
   <p:sldSz cx="12191695" cy="6858000" type="screen4x3"/>
   <p:notesSz cx="6858000" cy="9144000"/>
@@ -8648,7 +8650,7 @@
                   <a:srgbClr val="212121"/>
                 </a:solidFill>
               </a:rPr>
-              <a:t>Eight letters, ten digits — naïvely 10⁸ ways to fill them in. “All different, S ≠ 0, M ≠ 0” cuts that to about 1.5 million — still far too many to eyeball.</a:t>
+              <a:t>A substitution puzzle: replace each letter with a digit. Same letter → same digit; different letters → different digits.</a:t>
             </a:r>
           </a:p>
           <a:p>
@@ -8663,7 +8665,7 @@
                   <a:srgbClr val="212121"/>
                 </a:solidFill>
               </a:rPr>
-              <a:t>Z3 finds the unique solution (9567 + 1085 = 10652) in well under a second.</a:t>
+              <a:t>Eight distinct letters — S E N D M O R Y. The words are fixed; what we solve for is the digit hiding behind each letter.</a:t>
             </a:r>
           </a:p>
           <a:p>
@@ -8678,22 +8680,7 @@
                   <a:srgbClr val="212121"/>
                 </a:solidFill>
               </a:rPr>
-              <a:t>The same engine that solves puzzles finds your bugs: a counterexample is just a solution to “break my program”.</a:t>
-            </a:r>
-          </a:p>
-          <a:p>
-            <a:pPr>
-              <a:spcAft>
-                <a:spcPts val="800"/>
-              </a:spcAft>
-            </a:pPr>
-            <a:r>
-              <a:rPr sz="2200">
-                <a:solidFill>
-                  <a:srgbClr val="212121"/>
-                </a:solidFill>
-              </a:rPr>
-              <a:t>Lab 1, Stage 2: you run this yourself.</a:t>
+              <a:t>Goal: find the assignment that makes the addition come out true.</a:t>
             </a:r>
           </a:p>
         </p:txBody>
@@ -8707,6 +8694,383 @@
 </file>
 
 <file path=ppt/slides/slide33.xml><?xml version="1.0" encoding="utf-8"?>
+<p:sld xmlns:a="http://schemas.openxmlformats.org/drawingml/2006/main" xmlns:p="http://schemas.openxmlformats.org/presentationml/2006/main" xmlns:r="http://schemas.openxmlformats.org/officeDocument/2006/relationships">
+  <p:cSld>
+    <p:spTree>
+      <p:nvGrpSpPr>
+        <p:cNvPr id="1" name=""/>
+        <p:cNvGrpSpPr/>
+        <p:nvPr/>
+      </p:nvGrpSpPr>
+      <p:grpSpPr/>
+      <p:sp>
+        <p:nvSpPr>
+          <p:cNvPr id="2" name="TextBox 1"/>
+          <p:cNvSpPr txBox="1"/>
+          <p:nvPr/>
+        </p:nvSpPr>
+        <p:spPr>
+          <a:xfrm>
+            <a:off x="548640" y="365760"/>
+            <a:ext cx="11064240" cy="1005840"/>
+          </a:xfrm>
+          <a:prstGeom prst="rect">
+            <a:avLst/>
+          </a:prstGeom>
+          <a:noFill/>
+        </p:spPr>
+        <p:txBody>
+          <a:bodyPr wrap="square">
+            <a:spAutoFit/>
+          </a:bodyPr>
+          <a:lstStyle/>
+          <a:p>
+            <a:r>
+              <a:rPr sz="3600" b="1">
+                <a:solidFill>
+                  <a:srgbClr val="5A0A7A"/>
+                </a:solidFill>
+              </a:rPr>
+              <a:t>Turn the puzzle into arithmetic</a:t>
+            </a:r>
+          </a:p>
+        </p:txBody>
+      </p:sp>
+      <p:sp>
+        <p:nvSpPr>
+          <p:cNvPr id="3" name="TextBox 2"/>
+          <p:cNvSpPr txBox="1"/>
+          <p:nvPr/>
+        </p:nvSpPr>
+        <p:spPr>
+          <a:xfrm>
+            <a:off x="731520" y="1463040"/>
+            <a:ext cx="10789920" cy="5120640"/>
+          </a:xfrm>
+          <a:prstGeom prst="rect">
+            <a:avLst/>
+          </a:prstGeom>
+          <a:noFill/>
+        </p:spPr>
+        <p:txBody>
+          <a:bodyPr wrap="square">
+            <a:spAutoFit/>
+          </a:bodyPr>
+          <a:lstStyle/>
+          <a:p>
+            <a:pPr>
+              <a:spcAft>
+                <a:spcPts val="800"/>
+              </a:spcAft>
+            </a:pPr>
+            <a:r>
+              <a:rPr sz="2200">
+                <a:solidFill>
+                  <a:srgbClr val="212121"/>
+                </a:solidFill>
+              </a:rPr>
+              <a:t>A word is just its digits times their place value:</a:t>
+            </a:r>
+          </a:p>
+          <a:p>
+            <a:pPr lvl="1">
+              <a:spcAft>
+                <a:spcPts val="0"/>
+              </a:spcAft>
+            </a:pPr>
+            <a:r>
+              <a:rPr sz="1800">
+                <a:solidFill>
+                  <a:srgbClr val="212121"/>
+                </a:solidFill>
+                <a:latin typeface="Courier New"/>
+              </a:rPr>
+              <a:t>SEND  = 1000·S + 100·E + 10·N + D</a:t>
+            </a:r>
+          </a:p>
+          <a:p>
+            <a:pPr lvl="1">
+              <a:spcAft>
+                <a:spcPts val="0"/>
+              </a:spcAft>
+            </a:pPr>
+            <a:r>
+              <a:rPr sz="1800">
+                <a:solidFill>
+                  <a:srgbClr val="212121"/>
+                </a:solidFill>
+                <a:latin typeface="Courier New"/>
+              </a:rPr>
+              <a:t>MORE  = 1000·M + 100·O + 10·R + E</a:t>
+            </a:r>
+          </a:p>
+          <a:p>
+            <a:pPr lvl="1">
+              <a:spcAft>
+                <a:spcPts val="0"/>
+              </a:spcAft>
+            </a:pPr>
+            <a:r>
+              <a:rPr sz="1800">
+                <a:solidFill>
+                  <a:srgbClr val="212121"/>
+                </a:solidFill>
+                <a:latin typeface="Courier New"/>
+              </a:rPr>
+              <a:t>MONEY = 10000·M + 1000·O + 100·N + 10·E + Y</a:t>
+            </a:r>
+          </a:p>
+          <a:p>
+            <a:pPr>
+              <a:spcAft>
+                <a:spcPts val="800"/>
+              </a:spcAft>
+            </a:pPr>
+            <a:r>
+              <a:rPr sz="2200">
+                <a:solidFill>
+                  <a:srgbClr val="212121"/>
+                </a:solidFill>
+              </a:rPr>
+              <a:t/>
+            </a:r>
+          </a:p>
+          <a:p>
+            <a:pPr>
+              <a:spcAft>
+                <a:spcPts val="800"/>
+              </a:spcAft>
+            </a:pPr>
+            <a:r>
+              <a:rPr sz="2200">
+                <a:solidFill>
+                  <a:srgbClr val="212121"/>
+                </a:solidFill>
+              </a:rPr>
+              <a:t>So the whole puzzle becomes one equation:  SEND + MORE = MONEY.</a:t>
+            </a:r>
+          </a:p>
+          <a:p>
+            <a:pPr>
+              <a:spcAft>
+                <a:spcPts val="800"/>
+              </a:spcAft>
+            </a:pPr>
+            <a:r>
+              <a:rPr sz="2200">
+                <a:solidFill>
+                  <a:srgbClr val="212121"/>
+                </a:solidFill>
+              </a:rPr>
+              <a:t>Plus the rules: every letter is a digit 0–9; all eight are different; S ≠ 0 and M ≠ 0 (no number starts with 0).</a:t>
+            </a:r>
+          </a:p>
+          <a:p>
+            <a:pPr>
+              <a:spcAft>
+                <a:spcPts val="800"/>
+              </a:spcAft>
+            </a:pPr>
+            <a:r>
+              <a:rPr sz="2200">
+                <a:solidFill>
+                  <a:srgbClr val="212121"/>
+                </a:solidFill>
+              </a:rPr>
+              <a:t>Why is MONEY five digits? Two 4-digit numbers can carry into a fifth place — and that carry is at most 1, so M = 1 before we even start.</a:t>
+            </a:r>
+          </a:p>
+        </p:txBody>
+      </p:sp>
+    </p:spTree>
+  </p:cSld>
+  <p:clrMapOvr>
+    <a:masterClrMapping/>
+  </p:clrMapOvr>
+</p:sld>
+</file>
+
+<file path=ppt/slides/slide34.xml><?xml version="1.0" encoding="utf-8"?>
+<p:sld xmlns:a="http://schemas.openxmlformats.org/drawingml/2006/main" xmlns:p="http://schemas.openxmlformats.org/presentationml/2006/main" xmlns:r="http://schemas.openxmlformats.org/officeDocument/2006/relationships">
+  <p:cSld>
+    <p:spTree>
+      <p:nvGrpSpPr>
+        <p:cNvPr id="1" name=""/>
+        <p:cNvGrpSpPr/>
+        <p:nvPr/>
+      </p:nvGrpSpPr>
+      <p:grpSpPr/>
+      <p:sp>
+        <p:nvSpPr>
+          <p:cNvPr id="2" name="TextBox 1"/>
+          <p:cNvSpPr txBox="1"/>
+          <p:nvPr/>
+        </p:nvSpPr>
+        <p:spPr>
+          <a:xfrm>
+            <a:off x="548640" y="365760"/>
+            <a:ext cx="11064240" cy="1005840"/>
+          </a:xfrm>
+          <a:prstGeom prst="rect">
+            <a:avLst/>
+          </a:prstGeom>
+          <a:noFill/>
+        </p:spPr>
+        <p:txBody>
+          <a:bodyPr wrap="square">
+            <a:spAutoFit/>
+          </a:bodyPr>
+          <a:lstStyle/>
+          <a:p>
+            <a:r>
+              <a:rPr sz="3600" b="1">
+                <a:solidFill>
+                  <a:srgbClr val="5A0A7A"/>
+                </a:solidFill>
+              </a:rPr>
+              <a:t>Let the solver search</a:t>
+            </a:r>
+          </a:p>
+        </p:txBody>
+      </p:sp>
+      <p:sp>
+        <p:nvSpPr>
+          <p:cNvPr id="3" name="TextBox 2"/>
+          <p:cNvSpPr txBox="1"/>
+          <p:nvPr/>
+        </p:nvSpPr>
+        <p:spPr>
+          <a:xfrm>
+            <a:off x="731520" y="1463040"/>
+            <a:ext cx="10789920" cy="5120640"/>
+          </a:xfrm>
+          <a:prstGeom prst="rect">
+            <a:avLst/>
+          </a:prstGeom>
+          <a:noFill/>
+        </p:spPr>
+        <p:txBody>
+          <a:bodyPr wrap="square">
+            <a:spAutoFit/>
+          </a:bodyPr>
+          <a:lstStyle/>
+          <a:p>
+            <a:pPr>
+              <a:spcAft>
+                <a:spcPts val="800"/>
+              </a:spcAft>
+            </a:pPr>
+            <a:r>
+              <a:rPr sz="2200">
+                <a:solidFill>
+                  <a:srgbClr val="212121"/>
+                </a:solidFill>
+              </a:rPr>
+              <a:t>Naïvely 10⁸ ways to fill in eight letters; “all different, S ≠ 0, M ≠ 0” cuts it to about 1.5 million — still far too many to eyeball.</a:t>
+            </a:r>
+          </a:p>
+          <a:p>
+            <a:pPr>
+              <a:spcAft>
+                <a:spcPts val="800"/>
+              </a:spcAft>
+            </a:pPr>
+            <a:r>
+              <a:rPr sz="2200">
+                <a:solidFill>
+                  <a:srgbClr val="212121"/>
+                </a:solidFill>
+              </a:rPr>
+              <a:t>The solver does not guess blindly: it fixes M = 1, then propagates each column's carry, backtracking when a choice clashes — the way you solve Sudoku.</a:t>
+            </a:r>
+          </a:p>
+          <a:p>
+            <a:pPr>
+              <a:spcAft>
+                <a:spcPts val="800"/>
+              </a:spcAft>
+            </a:pPr>
+            <a:r>
+              <a:rPr sz="2200">
+                <a:solidFill>
+                  <a:srgbClr val="212121"/>
+                </a:solidFill>
+              </a:rPr>
+              <a:t>Z3 returns the unique solution in well under a second:</a:t>
+            </a:r>
+          </a:p>
+          <a:p>
+            <a:pPr lvl="1">
+              <a:spcAft>
+                <a:spcPts val="0"/>
+              </a:spcAft>
+            </a:pPr>
+            <a:r>
+              <a:rPr sz="1800">
+                <a:solidFill>
+                  <a:srgbClr val="212121"/>
+                </a:solidFill>
+                <a:latin typeface="Courier New"/>
+              </a:rPr>
+              <a:t>9567 + 1085 = 10652   (S=9 E=5 N=6 D=7 M=1 O=0 R=8 Y=2)</a:t>
+            </a:r>
+          </a:p>
+          <a:p>
+            <a:pPr>
+              <a:spcAft>
+                <a:spcPts val="800"/>
+              </a:spcAft>
+            </a:pPr>
+            <a:r>
+              <a:rPr sz="2200">
+                <a:solidFill>
+                  <a:srgbClr val="212121"/>
+                </a:solidFill>
+              </a:rPr>
+              <a:t/>
+            </a:r>
+          </a:p>
+          <a:p>
+            <a:pPr>
+              <a:spcAft>
+                <a:spcPts val="800"/>
+              </a:spcAft>
+            </a:pPr>
+            <a:r>
+              <a:rPr sz="2200">
+                <a:solidFill>
+                  <a:srgbClr val="212121"/>
+                </a:solidFill>
+              </a:rPr>
+              <a:t>The same engine that solves this finds your bugs: a counterexample is just a satisfying assignment to “break my program”.</a:t>
+            </a:r>
+          </a:p>
+          <a:p>
+            <a:pPr>
+              <a:spcAft>
+                <a:spcPts val="800"/>
+              </a:spcAft>
+            </a:pPr>
+            <a:r>
+              <a:rPr sz="2200">
+                <a:solidFill>
+                  <a:srgbClr val="212121"/>
+                </a:solidFill>
+              </a:rPr>
+              <a:t>Lab 1, Stage 2: you run this yourself.</a:t>
+            </a:r>
+          </a:p>
+        </p:txBody>
+      </p:sp>
+    </p:spTree>
+  </p:cSld>
+  <p:clrMapOvr>
+    <a:masterClrMapping/>
+  </p:clrMapOvr>
+</p:sld>
+</file>
+
+<file path=ppt/slides/slide35.xml><?xml version="1.0" encoding="utf-8"?>
 <p:sld xmlns:a="http://schemas.openxmlformats.org/drawingml/2006/main" xmlns:p="http://schemas.openxmlformats.org/presentationml/2006/main" xmlns:r="http://schemas.openxmlformats.org/officeDocument/2006/relationships">
   <p:cSld>
     <p:spTree>
@@ -9278,7 +9642,7 @@
 </p:sld>
 </file>
 
-<file path=ppt/slides/slide34.xml><?xml version="1.0" encoding="utf-8"?>
+<file path=ppt/slides/slide36.xml><?xml version="1.0" encoding="utf-8"?>
 <p:sld xmlns:a="http://schemas.openxmlformats.org/drawingml/2006/main" xmlns:p="http://schemas.openxmlformats.org/presentationml/2006/main" xmlns:r="http://schemas.openxmlformats.org/officeDocument/2006/relationships">
   <p:cSld>
     <p:spTree>
@@ -9458,7 +9822,7 @@
 </p:sld>
 </file>
 
-<file path=ppt/slides/slide35.xml><?xml version="1.0" encoding="utf-8"?>
+<file path=ppt/slides/slide37.xml><?xml version="1.0" encoding="utf-8"?>
 <p:sld xmlns:a="http://schemas.openxmlformats.org/drawingml/2006/main" xmlns:p="http://schemas.openxmlformats.org/presentationml/2006/main" xmlns:r="http://schemas.openxmlformats.org/officeDocument/2006/relationships">
   <p:cSld>
     <p:spTree>
@@ -9700,7 +10064,7 @@
 </p:sld>
 </file>
 
-<file path=ppt/slides/slide36.xml><?xml version="1.0" encoding="utf-8"?>
+<file path=ppt/slides/slide38.xml><?xml version="1.0" encoding="utf-8"?>
 <p:sld xmlns:a="http://schemas.openxmlformats.org/drawingml/2006/main" xmlns:p="http://schemas.openxmlformats.org/presentationml/2006/main" xmlns:r="http://schemas.openxmlformats.org/officeDocument/2006/relationships">
   <p:cSld>
     <p:spTree>
@@ -9855,386 +10219,6 @@
                 </a:solidFill>
               </a:rPr>
               <a:t>Recognise the three lines? In Lab 1, Stage 3 you translate exactly this function by hand and hand it to Z3. You will be doing ESBMC's job yourself.</a:t>
-            </a:r>
-          </a:p>
-        </p:txBody>
-      </p:sp>
-    </p:spTree>
-  </p:cSld>
-  <p:clrMapOvr>
-    <a:masterClrMapping/>
-  </p:clrMapOvr>
-</p:sld>
-</file>
-
-<file path=ppt/slides/slide37.xml><?xml version="1.0" encoding="utf-8"?>
-<p:sld xmlns:a="http://schemas.openxmlformats.org/drawingml/2006/main" xmlns:p="http://schemas.openxmlformats.org/presentationml/2006/main" xmlns:r="http://schemas.openxmlformats.org/officeDocument/2006/relationships">
-  <p:cSld>
-    <p:spTree>
-      <p:nvGrpSpPr>
-        <p:cNvPr id="1" name=""/>
-        <p:cNvGrpSpPr/>
-        <p:nvPr/>
-      </p:nvGrpSpPr>
-      <p:grpSpPr/>
-      <p:sp>
-        <p:nvSpPr>
-          <p:cNvPr id="2" name="TextBox 1"/>
-          <p:cNvSpPr txBox="1"/>
-          <p:nvPr/>
-        </p:nvSpPr>
-        <p:spPr>
-          <a:xfrm>
-            <a:off x="548640" y="365760"/>
-            <a:ext cx="11064240" cy="1005840"/>
-          </a:xfrm>
-          <a:prstGeom prst="rect">
-            <a:avLst/>
-          </a:prstGeom>
-          <a:noFill/>
-        </p:spPr>
-        <p:txBody>
-          <a:bodyPr wrap="square">
-            <a:spAutoFit/>
-          </a:bodyPr>
-          <a:lstStyle/>
-          <a:p>
-            <a:r>
-              <a:rPr sz="3600" b="1">
-                <a:solidFill>
-                  <a:srgbClr val="5A0A7A"/>
-                </a:solidFill>
-              </a:rPr>
-              <a:t>Putting it together</a:t>
-            </a:r>
-          </a:p>
-        </p:txBody>
-      </p:sp>
-      <p:sp>
-        <p:nvSpPr>
-          <p:cNvPr id="3" name="TextBox 2"/>
-          <p:cNvSpPr txBox="1"/>
-          <p:nvPr/>
-        </p:nvSpPr>
-        <p:spPr>
-          <a:xfrm>
-            <a:off x="731520" y="1737360"/>
-            <a:ext cx="10789920" cy="4846320"/>
-          </a:xfrm>
-          <a:prstGeom prst="rect">
-            <a:avLst/>
-          </a:prstGeom>
-          <a:noFill/>
-        </p:spPr>
-        <p:txBody>
-          <a:bodyPr wrap="square">
-            <a:spAutoFit/>
-          </a:bodyPr>
-          <a:lstStyle/>
-          <a:p>
-            <a:pPr>
-              <a:spcAft>
-                <a:spcPts val="0"/>
-              </a:spcAft>
-            </a:pPr>
-            <a:r>
-              <a:rPr sz="2200">
-                <a:solidFill>
-                  <a:srgbClr val="212121"/>
-                </a:solidFill>
-                <a:latin typeface="Courier New"/>
-              </a:rPr>
-              <a:t>⟦program⟧  ∧  ¬P      →  SMT solver</a:t>
-            </a:r>
-          </a:p>
-          <a:p>
-            <a:pPr>
-              <a:spcAft>
-                <a:spcPts val="800"/>
-              </a:spcAft>
-            </a:pPr>
-            <a:r>
-              <a:rPr sz="2600">
-                <a:solidFill>
-                  <a:srgbClr val="212121"/>
-                </a:solidFill>
-              </a:rPr>
-              <a:t/>
-            </a:r>
-          </a:p>
-          <a:p>
-            <a:pPr>
-              <a:spcAft>
-                <a:spcPts val="800"/>
-              </a:spcAft>
-            </a:pPr>
-            <a:r>
-              <a:rPr sz="2600">
-                <a:solidFill>
-                  <a:srgbClr val="212121"/>
-                </a:solidFill>
-              </a:rPr>
-              <a:t>sat — the model assigns every input and every choice: replayed in program order, that is the counterexample trace.</a:t>
-            </a:r>
-          </a:p>
-          <a:p>
-            <a:pPr>
-              <a:spcAft>
-                <a:spcPts val="800"/>
-              </a:spcAft>
-            </a:pPr>
-            <a:r>
-              <a:rPr sz="2600">
-                <a:solidFill>
-                  <a:srgbClr val="212121"/>
-                </a:solidFill>
-              </a:rPr>
-              <a:t>unsat — no execution within the bound violates P.</a:t>
-            </a:r>
-          </a:p>
-          <a:p>
-            <a:pPr>
-              <a:spcAft>
-                <a:spcPts val="800"/>
-              </a:spcAft>
-            </a:pPr>
-            <a:r>
-              <a:rPr sz="2600">
-                <a:solidFill>
-                  <a:srgbClr val="212121"/>
-                </a:solidFill>
-              </a:rPr>
-              <a:t/>
-            </a:r>
-          </a:p>
-          <a:p>
-            <a:pPr>
-              <a:spcAft>
-                <a:spcPts val="800"/>
-              </a:spcAft>
-            </a:pPr>
-            <a:r>
-              <a:rPr sz="2600">
-                <a:solidFill>
-                  <a:srgbClr val="212121"/>
-                </a:solidFill>
-              </a:rPr>
-              <a:t>One formula, every path at once. That is why nobody has to enumerate 2⁶⁴ test cases.</a:t>
-            </a:r>
-          </a:p>
-        </p:txBody>
-      </p:sp>
-    </p:spTree>
-  </p:cSld>
-  <p:clrMapOvr>
-    <a:masterClrMapping/>
-  </p:clrMapOvr>
-</p:sld>
-</file>
-
-<file path=ppt/slides/slide38.xml><?xml version="1.0" encoding="utf-8"?>
-<p:sld xmlns:a="http://schemas.openxmlformats.org/drawingml/2006/main" xmlns:p="http://schemas.openxmlformats.org/presentationml/2006/main" xmlns:r="http://schemas.openxmlformats.org/officeDocument/2006/relationships">
-  <p:cSld>
-    <p:spTree>
-      <p:nvGrpSpPr>
-        <p:cNvPr id="1" name=""/>
-        <p:cNvGrpSpPr/>
-        <p:nvPr/>
-      </p:nvGrpSpPr>
-      <p:grpSpPr/>
-      <p:sp>
-        <p:nvSpPr>
-          <p:cNvPr id="2" name="TextBox 1"/>
-          <p:cNvSpPr txBox="1"/>
-          <p:nvPr/>
-        </p:nvSpPr>
-        <p:spPr>
-          <a:xfrm>
-            <a:off x="548640" y="365760"/>
-            <a:ext cx="11064240" cy="1005840"/>
-          </a:xfrm>
-          <a:prstGeom prst="rect">
-            <a:avLst/>
-          </a:prstGeom>
-          <a:noFill/>
-        </p:spPr>
-        <p:txBody>
-          <a:bodyPr wrap="square">
-            <a:spAutoFit/>
-          </a:bodyPr>
-          <a:lstStyle/>
-          <a:p>
-            <a:r>
-              <a:rPr sz="3600" b="1">
-                <a:solidFill>
-                  <a:srgbClr val="5A0A7A"/>
-                </a:solidFill>
-              </a:rPr>
-              <a:t>Anatomy of a counterexample</a:t>
-            </a:r>
-          </a:p>
-        </p:txBody>
-      </p:sp>
-      <p:sp>
-        <p:nvSpPr>
-          <p:cNvPr id="3" name="TextBox 2"/>
-          <p:cNvSpPr txBox="1"/>
-          <p:nvPr/>
-        </p:nvSpPr>
-        <p:spPr>
-          <a:xfrm>
-            <a:off x="731520" y="1463040"/>
-            <a:ext cx="10789920" cy="5120640"/>
-          </a:xfrm>
-          <a:prstGeom prst="rect">
-            <a:avLst/>
-          </a:prstGeom>
-          <a:noFill/>
-        </p:spPr>
-        <p:txBody>
-          <a:bodyPr wrap="square">
-            <a:spAutoFit/>
-          </a:bodyPr>
-          <a:lstStyle/>
-          <a:p>
-            <a:pPr>
-              <a:spcAft>
-                <a:spcPts val="0"/>
-              </a:spcAft>
-            </a:pPr>
-            <a:r>
-              <a:rPr sz="1800">
-                <a:solidFill>
-                  <a:srgbClr val="212121"/>
-                </a:solidFill>
-                <a:latin typeface="Courier New"/>
-              </a:rPr>
-              <a:t>State 3  file offbyone.c  line 15</a:t>
-            </a:r>
-          </a:p>
-          <a:p>
-            <a:pPr>
-              <a:spcAft>
-                <a:spcPts val="0"/>
-              </a:spcAft>
-            </a:pPr>
-            <a:r>
-              <a:rPr sz="1800">
-                <a:solidFill>
-                  <a:srgbClr val="212121"/>
-                </a:solidFill>
-                <a:latin typeface="Courier New"/>
-              </a:rPr>
-              <a:t>  i = 5 (00000000 ... 101)      ← the value the solver chose</a:t>
-            </a:r>
-          </a:p>
-          <a:p>
-            <a:pPr>
-              <a:spcAft>
-                <a:spcPts val="0"/>
-              </a:spcAft>
-            </a:pPr>
-            <a:r>
-              <a:rPr sz="1800">
-                <a:solidFill>
-                  <a:srgbClr val="212121"/>
-                </a:solidFill>
-                <a:latin typeface="Courier New"/>
-              </a:rPr>
-              <a:t>...</a:t>
-            </a:r>
-          </a:p>
-          <a:p>
-            <a:pPr>
-              <a:spcAft>
-                <a:spcPts val="0"/>
-              </a:spcAft>
-            </a:pPr>
-            <a:r>
-              <a:rPr sz="1800">
-                <a:solidFill>
-                  <a:srgbClr val="212121"/>
-                </a:solidFill>
-                <a:latin typeface="Courier New"/>
-              </a:rPr>
-              <a:t>Violated property:</a:t>
-            </a:r>
-          </a:p>
-          <a:p>
-            <a:pPr>
-              <a:spcAft>
-                <a:spcPts val="0"/>
-              </a:spcAft>
-            </a:pPr>
-            <a:r>
-              <a:rPr sz="1800">
-                <a:solidFill>
-                  <a:srgbClr val="212121"/>
-                </a:solidFill>
-                <a:latin typeface="Courier New"/>
-              </a:rPr>
-              <a:t>  array bounds violated: a[i]   ← what broke</a:t>
-            </a:r>
-          </a:p>
-          <a:p>
-            <a:pPr>
-              <a:spcAft>
-                <a:spcPts val="0"/>
-              </a:spcAft>
-            </a:pPr>
-            <a:r>
-              <a:rPr sz="1800">
-                <a:solidFill>
-                  <a:srgbClr val="212121"/>
-                </a:solidFill>
-                <a:latin typeface="Courier New"/>
-              </a:rPr>
-              <a:t>  CWE: CWE-787                   ← the vulnerability class</a:t>
-            </a:r>
-          </a:p>
-          <a:p>
-            <a:pPr>
-              <a:spcAft>
-                <a:spcPts val="800"/>
-              </a:spcAft>
-            </a:pPr>
-            <a:r>
-              <a:rPr sz="2200">
-                <a:solidFill>
-                  <a:srgbClr val="212121"/>
-                </a:solidFill>
-              </a:rPr>
-              <a:t/>
-            </a:r>
-          </a:p>
-          <a:p>
-            <a:pPr>
-              <a:spcAft>
-                <a:spcPts val="800"/>
-              </a:spcAft>
-            </a:pPr>
-            <a:r>
-              <a:rPr sz="2200">
-                <a:solidFill>
-                  <a:srgbClr val="212121"/>
-                </a:solidFill>
-              </a:rPr>
-              <a:t>Read it bottom-up: first what was violated, then scroll up for the values that caused it.</a:t>
-            </a:r>
-          </a:p>
-          <a:p>
-            <a:pPr>
-              <a:spcAft>
-                <a:spcPts val="800"/>
-              </a:spcAft>
-            </a:pPr>
-            <a:r>
-              <a:rPr sz="2200">
-                <a:solidFill>
-                  <a:srgbClr val="212121"/>
-                </a:solidFill>
-              </a:rPr>
-              <a:t>Those values are a ready-made failing test case — keep them.</a:t>
             </a:r>
           </a:p>
         </p:txBody>
@@ -10285,7 +10269,7 @@
                   <a:srgbClr val="5A0A7A"/>
                 </a:solidFill>
               </a:rPr>
-              <a:t>Live: the whole pipeline on five lines</a:t>
+              <a:t>Putting it together</a:t>
             </a:r>
           </a:p>
         </p:txBody>
@@ -10298,8 +10282,8 @@
         </p:nvSpPr>
         <p:spPr>
           <a:xfrm>
-            <a:off x="731520" y="1463040"/>
-            <a:ext cx="10789920" cy="5120640"/>
+            <a:off x="731520" y="1737360"/>
+            <a:ext cx="10789920" cy="4846320"/>
           </a:xfrm>
           <a:prstGeom prst="rect">
             <a:avLst/>
@@ -10318,107 +10302,26 @@
               </a:spcAft>
             </a:pPr>
             <a:r>
-              <a:rPr sz="1800">
+              <a:rPr sz="2200">
                 <a:solidFill>
                   <a:srgbClr val="212121"/>
                 </a:solidFill>
                 <a:latin typeface="Courier New"/>
               </a:rPr>
-              <a:t>int main(void)</a:t>
-            </a:r>
-          </a:p>
-          <a:p>
-            <a:pPr>
-              <a:spcAft>
-                <a:spcPts val="0"/>
-              </a:spcAft>
-            </a:pPr>
-            <a:r>
-              <a:rPr sz="1800">
-                <a:solidFill>
-                  <a:srgbClr val="212121"/>
-                </a:solidFill>
-                <a:latin typeface="Courier New"/>
-              </a:rPr>
-              <a:t>{</a:t>
-            </a:r>
-          </a:p>
-          <a:p>
-            <a:pPr>
-              <a:spcAft>
-                <a:spcPts val="0"/>
-              </a:spcAft>
-            </a:pPr>
-            <a:r>
-              <a:rPr sz="1800">
-                <a:solidFill>
-                  <a:srgbClr val="212121"/>
-                </a:solidFill>
-                <a:latin typeface="Courier New"/>
-              </a:rPr>
-              <a:t>  int a[5];</a:t>
-            </a:r>
-          </a:p>
-          <a:p>
-            <a:pPr>
-              <a:spcAft>
-                <a:spcPts val="0"/>
-              </a:spcAft>
-            </a:pPr>
-            <a:r>
-              <a:rPr sz="1800">
-                <a:solidFill>
-                  <a:srgbClr val="212121"/>
-                </a:solidFill>
-                <a:latin typeface="Courier New"/>
-              </a:rPr>
-              <a:t>  for (int i = 0; i &lt;= 5; i++)</a:t>
-            </a:r>
-          </a:p>
-          <a:p>
-            <a:pPr>
-              <a:spcAft>
-                <a:spcPts val="0"/>
-              </a:spcAft>
-            </a:pPr>
-            <a:r>
-              <a:rPr sz="1800">
-                <a:solidFill>
-                  <a:srgbClr val="212121"/>
-                </a:solidFill>
-                <a:latin typeface="Courier New"/>
-              </a:rPr>
-              <a:t>    a[i] = i;</a:t>
-            </a:r>
-          </a:p>
-          <a:p>
-            <a:pPr>
-              <a:spcAft>
-                <a:spcPts val="0"/>
-              </a:spcAft>
-            </a:pPr>
-            <a:r>
-              <a:rPr sz="1800">
-                <a:solidFill>
-                  <a:srgbClr val="212121"/>
-                </a:solidFill>
-                <a:latin typeface="Courier New"/>
-              </a:rPr>
-              <a:t>}</a:t>
-            </a:r>
-          </a:p>
-          <a:p>
-            <a:pPr>
-              <a:spcAft>
-                <a:spcPts val="0"/>
-              </a:spcAft>
-            </a:pPr>
-            <a:r>
-              <a:rPr sz="1800">
-                <a:solidFill>
-                  <a:srgbClr val="212121"/>
-                </a:solidFill>
-                <a:latin typeface="Courier New"/>
+              <a:t>⟦program⟧  ∧  ¬P      →  SMT solver</a:t>
+            </a:r>
+          </a:p>
+          <a:p>
+            <a:pPr>
+              <a:spcAft>
+                <a:spcPts val="800"/>
+              </a:spcAft>
+            </a:pPr>
+            <a:r>
+              <a:rPr sz="2600">
+                <a:solidFill>
+                  <a:srgbClr val="212121"/>
+                </a:solidFill>
               </a:rPr>
               <a:t/>
             </a:r>
@@ -10426,27 +10329,41 @@
           <a:p>
             <a:pPr>
               <a:spcAft>
-                <a:spcPts val="0"/>
-              </a:spcAft>
-            </a:pPr>
-            <a:r>
-              <a:rPr sz="1800">
-                <a:solidFill>
-                  <a:srgbClr val="212121"/>
-                </a:solidFill>
-                <a:latin typeface="Courier New"/>
-              </a:rPr>
-              <a:t>$ esbmc offbyone.c --unwind 7</a:t>
-            </a:r>
-          </a:p>
-          <a:p>
-            <a:pPr>
-              <a:spcAft>
-                <a:spcPts val="800"/>
-              </a:spcAft>
-            </a:pPr>
-            <a:r>
-              <a:rPr sz="2200">
+                <a:spcPts val="800"/>
+              </a:spcAft>
+            </a:pPr>
+            <a:r>
+              <a:rPr sz="2600">
+                <a:solidFill>
+                  <a:srgbClr val="212121"/>
+                </a:solidFill>
+              </a:rPr>
+              <a:t>sat — the model assigns every input and every choice: replayed in program order, that is the counterexample trace.</a:t>
+            </a:r>
+          </a:p>
+          <a:p>
+            <a:pPr>
+              <a:spcAft>
+                <a:spcPts val="800"/>
+              </a:spcAft>
+            </a:pPr>
+            <a:r>
+              <a:rPr sz="2600">
+                <a:solidFill>
+                  <a:srgbClr val="212121"/>
+                </a:solidFill>
+              </a:rPr>
+              <a:t>unsat — no execution within the bound violates P.</a:t>
+            </a:r>
+          </a:p>
+          <a:p>
+            <a:pPr>
+              <a:spcAft>
+                <a:spcPts val="800"/>
+              </a:spcAft>
+            </a:pPr>
+            <a:r>
+              <a:rPr sz="2600">
                 <a:solidFill>
                   <a:srgbClr val="212121"/>
                 </a:solidFill>
@@ -10461,27 +10378,12 @@
               </a:spcAft>
             </a:pPr>
             <a:r>
-              <a:rPr sz="2200">
-                <a:solidFill>
-                  <a:srgbClr val="212121"/>
-                </a:solidFill>
-              </a:rPr>
-              <a:t>Predict first: FAILED or SUCCESSFUL? If FAILED — at which i?</a:t>
-            </a:r>
-          </a:p>
-          <a:p>
-            <a:pPr>
-              <a:spcAft>
-                <a:spcPts val="800"/>
-              </a:spcAft>
-            </a:pPr>
-            <a:r>
-              <a:rPr sz="2200">
-                <a:solidFill>
-                  <a:srgbClr val="212121"/>
-                </a:solidFill>
-              </a:rPr>
-              <a:t>Then we read the trace together, bottom-up.</a:t>
+              <a:rPr sz="2600">
+                <a:solidFill>
+                  <a:srgbClr val="212121"/>
+                </a:solidFill>
+              </a:rPr>
+              <a:t>One formula, every path at once. That is why nobody has to enumerate 2⁶⁴ test cases.</a:t>
             </a:r>
           </a:p>
         </p:txBody>
@@ -10726,7 +10628,7 @@
                   <a:srgbClr val="5A0A7A"/>
                 </a:solidFill>
               </a:rPr>
-              <a:t>Modelling the environment: a preview</a:t>
+              <a:t>Anatomy of a counterexample</a:t>
             </a:r>
           </a:p>
         </p:txBody>
@@ -10765,7 +10667,7 @@
                 </a:solidFill>
                 <a:latin typeface="Courier New"/>
               </a:rPr>
-              <a:t>int x = nondet_int();              /* every value at once */</a:t>
+              <a:t>State 3  file offbyone.c  line 15</a:t>
             </a:r>
           </a:p>
           <a:p>
@@ -10781,7 +10683,7 @@
                 </a:solidFill>
                 <a:latin typeface="Courier New"/>
               </a:rPr>
-              <a:t>__ESBMC_assume(x &gt; 0 &amp;&amp; x &lt; 100);  /* now: every value in 1..99 */</a:t>
+              <a:t>  i = 5 (00000000 ... 101)      ← the value the solver chose</a:t>
             </a:r>
           </a:p>
           <a:p>
@@ -10797,7 +10699,55 @@
                 </a:solidFill>
                 <a:latin typeface="Courier New"/>
               </a:rPr>
-              <a:t>assert(property(x));               /* must hold for ALL of them */</a:t>
+              <a:t>...</a:t>
+            </a:r>
+          </a:p>
+          <a:p>
+            <a:pPr>
+              <a:spcAft>
+                <a:spcPts val="0"/>
+              </a:spcAft>
+            </a:pPr>
+            <a:r>
+              <a:rPr sz="1800">
+                <a:solidFill>
+                  <a:srgbClr val="212121"/>
+                </a:solidFill>
+                <a:latin typeface="Courier New"/>
+              </a:rPr>
+              <a:t>Violated property:</a:t>
+            </a:r>
+          </a:p>
+          <a:p>
+            <a:pPr>
+              <a:spcAft>
+                <a:spcPts val="0"/>
+              </a:spcAft>
+            </a:pPr>
+            <a:r>
+              <a:rPr sz="1800">
+                <a:solidFill>
+                  <a:srgbClr val="212121"/>
+                </a:solidFill>
+                <a:latin typeface="Courier New"/>
+              </a:rPr>
+              <a:t>  array bounds violated: a[i]   ← what broke</a:t>
+            </a:r>
+          </a:p>
+          <a:p>
+            <a:pPr>
+              <a:spcAft>
+                <a:spcPts val="0"/>
+              </a:spcAft>
+            </a:pPr>
+            <a:r>
+              <a:rPr sz="1800">
+                <a:solidFill>
+                  <a:srgbClr val="212121"/>
+                </a:solidFill>
+                <a:latin typeface="Courier New"/>
+              </a:rPr>
+              <a:t>  CWE: CWE-787                   ← the vulnerability class</a:t>
             </a:r>
           </a:p>
           <a:p>
@@ -10827,7 +10777,7 @@
                   <a:srgbClr val="212121"/>
                 </a:solidFill>
               </a:rPr>
-              <a:t>One nondeterministic input = all tests of that input at once.</a:t>
+              <a:t>Read it bottom-up: first what was violated, then scroll up for the values that caused it.</a:t>
             </a:r>
           </a:p>
           <a:p>
@@ -10842,7 +10792,7 @@
                   <a:srgbClr val="212121"/>
                 </a:solidFill>
               </a:rPr>
-              <a:t>In Session 2 you will use these three lines to expose a bug in a program that verifies green as shipped — the tool only checks what you specify.</a:t>
+              <a:t>Those values are a ready-made failing test case — keep them.</a:t>
             </a:r>
           </a:p>
         </p:txBody>
@@ -10893,7 +10843,7 @@
                   <a:srgbClr val="5A0A7A"/>
                 </a:solidFill>
               </a:rPr>
-              <a:t>Beyond one thread</a:t>
+              <a:t>Live: the whole pipeline on five lines</a:t>
             </a:r>
           </a:p>
         </p:txBody>
@@ -10906,8 +10856,8 @@
         </p:nvSpPr>
         <p:spPr>
           <a:xfrm>
-            <a:off x="731520" y="1645920"/>
-            <a:ext cx="10789920" cy="4937760"/>
+            <a:off x="731520" y="1463040"/>
+            <a:ext cx="10789920" cy="5120640"/>
           </a:xfrm>
           <a:prstGeom prst="rect">
             <a:avLst/>
@@ -10922,59 +10872,111 @@
           <a:p>
             <a:pPr>
               <a:spcAft>
-                <a:spcPts val="800"/>
-              </a:spcAft>
-            </a:pPr>
-            <a:r>
-              <a:rPr sz="2400">
-                <a:solidFill>
-                  <a:srgbClr val="212121"/>
-                </a:solidFill>
-              </a:rPr>
-              <a:t>Two threads of two and one statements already have three interleavings. Real code has billions.</a:t>
-            </a:r>
-          </a:p>
-          <a:p>
-            <a:pPr>
-              <a:spcAft>
-                <a:spcPts val="800"/>
-              </a:spcAft>
-            </a:pPr>
-            <a:r>
-              <a:rPr sz="2400">
-                <a:solidFill>
-                  <a:srgbClr val="212121"/>
-                </a:solidFill>
-              </a:rPr>
-              <a:t>Run the program a million times and the bad interleaving may never show up — Therac-25's bug hid exactly this way.</a:t>
-            </a:r>
-          </a:p>
-          <a:p>
-            <a:pPr>
-              <a:spcAft>
-                <a:spcPts val="800"/>
-              </a:spcAft>
-            </a:pPr>
-            <a:r>
-              <a:rPr sz="2400">
-                <a:solidFill>
-                  <a:srgbClr val="212121"/>
-                </a:solidFill>
-              </a:rPr>
-              <a:t>A model checker enumerates every interleaving up to a bound, including the one that kills your assertion.</a:t>
-            </a:r>
-          </a:p>
-          <a:p>
-            <a:pPr>
-              <a:spcAft>
-                <a:spcPts val="800"/>
-              </a:spcAft>
-            </a:pPr>
-            <a:r>
-              <a:rPr sz="2400">
-                <a:solidFill>
-                  <a:srgbClr val="212121"/>
-                </a:solidFill>
+                <a:spcPts val="0"/>
+              </a:spcAft>
+            </a:pPr>
+            <a:r>
+              <a:rPr sz="1800">
+                <a:solidFill>
+                  <a:srgbClr val="212121"/>
+                </a:solidFill>
+                <a:latin typeface="Courier New"/>
+              </a:rPr>
+              <a:t>int main(void)</a:t>
+            </a:r>
+          </a:p>
+          <a:p>
+            <a:pPr>
+              <a:spcAft>
+                <a:spcPts val="0"/>
+              </a:spcAft>
+            </a:pPr>
+            <a:r>
+              <a:rPr sz="1800">
+                <a:solidFill>
+                  <a:srgbClr val="212121"/>
+                </a:solidFill>
+                <a:latin typeface="Courier New"/>
+              </a:rPr>
+              <a:t>{</a:t>
+            </a:r>
+          </a:p>
+          <a:p>
+            <a:pPr>
+              <a:spcAft>
+                <a:spcPts val="0"/>
+              </a:spcAft>
+            </a:pPr>
+            <a:r>
+              <a:rPr sz="1800">
+                <a:solidFill>
+                  <a:srgbClr val="212121"/>
+                </a:solidFill>
+                <a:latin typeface="Courier New"/>
+              </a:rPr>
+              <a:t>  int a[5];</a:t>
+            </a:r>
+          </a:p>
+          <a:p>
+            <a:pPr>
+              <a:spcAft>
+                <a:spcPts val="0"/>
+              </a:spcAft>
+            </a:pPr>
+            <a:r>
+              <a:rPr sz="1800">
+                <a:solidFill>
+                  <a:srgbClr val="212121"/>
+                </a:solidFill>
+                <a:latin typeface="Courier New"/>
+              </a:rPr>
+              <a:t>  for (int i = 0; i &lt;= 5; i++)</a:t>
+            </a:r>
+          </a:p>
+          <a:p>
+            <a:pPr>
+              <a:spcAft>
+                <a:spcPts val="0"/>
+              </a:spcAft>
+            </a:pPr>
+            <a:r>
+              <a:rPr sz="1800">
+                <a:solidFill>
+                  <a:srgbClr val="212121"/>
+                </a:solidFill>
+                <a:latin typeface="Courier New"/>
+              </a:rPr>
+              <a:t>    a[i] = i;</a:t>
+            </a:r>
+          </a:p>
+          <a:p>
+            <a:pPr>
+              <a:spcAft>
+                <a:spcPts val="0"/>
+              </a:spcAft>
+            </a:pPr>
+            <a:r>
+              <a:rPr sz="1800">
+                <a:solidFill>
+                  <a:srgbClr val="212121"/>
+                </a:solidFill>
+                <a:latin typeface="Courier New"/>
+              </a:rPr>
+              <a:t>}</a:t>
+            </a:r>
+          </a:p>
+          <a:p>
+            <a:pPr>
+              <a:spcAft>
+                <a:spcPts val="0"/>
+              </a:spcAft>
+            </a:pPr>
+            <a:r>
+              <a:rPr sz="1800">
+                <a:solidFill>
+                  <a:srgbClr val="212121"/>
+                </a:solidFill>
+                <a:latin typeface="Courier New"/>
               </a:rPr>
               <a:t/>
             </a:r>
@@ -10982,16 +10984,62 @@
           <a:p>
             <a:pPr>
               <a:spcAft>
-                <a:spcPts val="800"/>
-              </a:spcAft>
-            </a:pPr>
-            <a:r>
-              <a:rPr sz="2400">
-                <a:solidFill>
-                  <a:srgbClr val="212121"/>
-                </a:solidFill>
-              </a:rPr>
-              <a:t>Session 2, Lab 4: you write down the killer interleaving before the tool finds it.</a:t>
+                <a:spcPts val="0"/>
+              </a:spcAft>
+            </a:pPr>
+            <a:r>
+              <a:rPr sz="1800">
+                <a:solidFill>
+                  <a:srgbClr val="212121"/>
+                </a:solidFill>
+                <a:latin typeface="Courier New"/>
+              </a:rPr>
+              <a:t>$ esbmc offbyone.c --unwind 7</a:t>
+            </a:r>
+          </a:p>
+          <a:p>
+            <a:pPr>
+              <a:spcAft>
+                <a:spcPts val="800"/>
+              </a:spcAft>
+            </a:pPr>
+            <a:r>
+              <a:rPr sz="2200">
+                <a:solidFill>
+                  <a:srgbClr val="212121"/>
+                </a:solidFill>
+              </a:rPr>
+              <a:t/>
+            </a:r>
+          </a:p>
+          <a:p>
+            <a:pPr>
+              <a:spcAft>
+                <a:spcPts val="800"/>
+              </a:spcAft>
+            </a:pPr>
+            <a:r>
+              <a:rPr sz="2200">
+                <a:solidFill>
+                  <a:srgbClr val="212121"/>
+                </a:solidFill>
+              </a:rPr>
+              <a:t>Predict first: FAILED or SUCCESSFUL? If FAILED — at which i?</a:t>
+            </a:r>
+          </a:p>
+          <a:p>
+            <a:pPr>
+              <a:spcAft>
+                <a:spcPts val="800"/>
+              </a:spcAft>
+            </a:pPr>
+            <a:r>
+              <a:rPr sz="2200">
+                <a:solidFill>
+                  <a:srgbClr val="212121"/>
+                </a:solidFill>
+              </a:rPr>
+              <a:t>Then we read the trace together, bottom-up.</a:t>
             </a:r>
           </a:p>
         </p:txBody>
@@ -11042,7 +11090,7 @@
                   <a:srgbClr val="5A0A7A"/>
                 </a:solidFill>
               </a:rPr>
-              <a:t>Homework for your intuition</a:t>
+              <a:t>Modelling the environment: a preview</a:t>
             </a:r>
           </a:p>
         </p:txBody>
@@ -11055,8 +11103,8 @@
         </p:nvSpPr>
         <p:spPr>
           <a:xfrm>
-            <a:off x="731520" y="1828800"/>
-            <a:ext cx="10789920" cy="4754880"/>
+            <a:off x="731520" y="1463040"/>
+            <a:ext cx="10789920" cy="5120640"/>
           </a:xfrm>
           <a:prstGeom prst="rect">
             <a:avLst/>
@@ -11075,19 +11123,66 @@
               </a:spcAft>
             </a:pPr>
             <a:r>
+              <a:rPr sz="1800">
+                <a:solidFill>
+                  <a:srgbClr val="212121"/>
+                </a:solidFill>
+                <a:latin typeface="Courier New"/>
+              </a:rPr>
+              <a:t>int x = nondet_int();              /* every value at once */</a:t>
+            </a:r>
+          </a:p>
+          <a:p>
+            <a:pPr>
+              <a:spcAft>
+                <a:spcPts val="0"/>
+              </a:spcAft>
+            </a:pPr>
+            <a:r>
+              <a:rPr sz="1800">
+                <a:solidFill>
+                  <a:srgbClr val="212121"/>
+                </a:solidFill>
+                <a:latin typeface="Courier New"/>
+              </a:rPr>
+              <a:t>__ESBMC_assume(x &gt; 0 &amp;&amp; x &lt; 100);  /* now: every value in 1..99 */</a:t>
+            </a:r>
+          </a:p>
+          <a:p>
+            <a:pPr>
+              <a:spcAft>
+                <a:spcPts val="0"/>
+              </a:spcAft>
+            </a:pPr>
+            <a:r>
+              <a:rPr sz="1800">
+                <a:solidFill>
+                  <a:srgbClr val="212121"/>
+                </a:solidFill>
+                <a:latin typeface="Courier New"/>
+              </a:rPr>
+              <a:t>assert(property(x));               /* must hold for ALL of them */</a:t>
+            </a:r>
+          </a:p>
+          <a:p>
+            <a:pPr>
+              <a:spcAft>
+                <a:spcPts val="800"/>
+              </a:spcAft>
+            </a:pPr>
+            <a:r>
               <a:rPr sz="2200">
                 <a:solidFill>
                   <a:srgbClr val="212121"/>
                 </a:solidFill>
-                <a:latin typeface="Courier New"/>
-              </a:rPr>
-              <a:t>double w = 0.1 + 0.2;</a:t>
-            </a:r>
-          </a:p>
-          <a:p>
-            <a:pPr>
-              <a:spcAft>
-                <a:spcPts val="0"/>
+              </a:rPr>
+              <a:t/>
+            </a:r>
+          </a:p>
+          <a:p>
+            <a:pPr>
+              <a:spcAft>
+                <a:spcPts val="800"/>
               </a:spcAft>
             </a:pPr>
             <a:r>
@@ -11095,84 +11190,23 @@
                 <a:solidFill>
                   <a:srgbClr val="212121"/>
                 </a:solidFill>
-                <a:latin typeface="Courier New"/>
-              </a:rPr>
-              <a:t>assert(w == 0.3);</a:t>
-            </a:r>
-          </a:p>
-          <a:p>
-            <a:pPr>
-              <a:spcAft>
-                <a:spcPts val="800"/>
-              </a:spcAft>
-            </a:pPr>
-            <a:r>
-              <a:rPr sz="2600">
-                <a:solidFill>
-                  <a:srgbClr val="212121"/>
-                </a:solidFill>
-              </a:rPr>
-              <a:t/>
-            </a:r>
-          </a:p>
-          <a:p>
-            <a:pPr>
-              <a:spcAft>
-                <a:spcPts val="800"/>
-              </a:spcAft>
-            </a:pPr>
-            <a:r>
-              <a:rPr sz="2600">
-                <a:solidFill>
-                  <a:srgbClr val="212121"/>
-                </a:solidFill>
-              </a:rPr>
-              <a:t>FAILED or SUCCESSFUL?</a:t>
-            </a:r>
-          </a:p>
-          <a:p>
-            <a:pPr>
-              <a:spcAft>
-                <a:spcPts val="800"/>
-              </a:spcAft>
-            </a:pPr>
-            <a:r>
-              <a:rPr sz="2600">
-                <a:solidFill>
-                  <a:srgbClr val="212121"/>
-                </a:solidFill>
-              </a:rPr>
-              <a:t/>
-            </a:r>
-          </a:p>
-          <a:p>
-            <a:pPr>
-              <a:spcAft>
-                <a:spcPts val="800"/>
-              </a:spcAft>
-            </a:pPr>
-            <a:r>
-              <a:rPr sz="2600">
-                <a:solidFill>
-                  <a:srgbClr val="212121"/>
-                </a:solidFill>
-              </a:rPr>
-              <a:t>Bring your answer to Session 2 — Lab 4 settles it with a solver that does exact IEEE-754 arithmetic.</a:t>
-            </a:r>
-          </a:p>
-          <a:p>
-            <a:pPr lvl="1">
-              <a:spcAft>
-                <a:spcPts val="800"/>
-              </a:spcAft>
-            </a:pPr>
-            <a:r>
-              <a:rPr sz="2400">
-                <a:solidFill>
-                  <a:srgbClr val="212121"/>
-                </a:solidFill>
-              </a:rPr>
-              <a:t>Hint: 0.1 in binary is like 1/3 in decimal.</a:t>
+              </a:rPr>
+              <a:t>One nondeterministic input = all tests of that input at once.</a:t>
+            </a:r>
+          </a:p>
+          <a:p>
+            <a:pPr>
+              <a:spcAft>
+                <a:spcPts val="800"/>
+              </a:spcAft>
+            </a:pPr>
+            <a:r>
+              <a:rPr sz="2200">
+                <a:solidFill>
+                  <a:srgbClr val="212121"/>
+                </a:solidFill>
+              </a:rPr>
+              <a:t>In Session 2 you will use these three lines to expose a bug in a program that verifies green as shipped — the tool only checks what you specify.</a:t>
             </a:r>
           </a:p>
         </p:txBody>
@@ -11223,7 +11257,7 @@
                   <a:srgbClr val="5A0A7A"/>
                 </a:solidFill>
               </a:rPr>
-              <a:t>Exercise 2 — Predict the Verdict (15 min)</a:t>
+              <a:t>Beyond one thread</a:t>
             </a:r>
           </a:p>
         </p:txBody>
@@ -11236,8 +11270,8 @@
         </p:nvSpPr>
         <p:spPr>
           <a:xfrm>
-            <a:off x="731520" y="1463040"/>
-            <a:ext cx="10789920" cy="5120640"/>
+            <a:off x="731520" y="1645920"/>
+            <a:ext cx="10789920" cy="4937760"/>
           </a:xfrm>
           <a:prstGeom prst="rect">
             <a:avLst/>
@@ -11256,72 +11290,72 @@
               </a:spcAft>
             </a:pPr>
             <a:r>
-              <a:rPr sz="2200">
-                <a:solidFill>
-                  <a:srgbClr val="212121"/>
-                </a:solidFill>
-              </a:rPr>
-              <a:t>Groups of 3–4. Three short C programs on the handout (predict1.c, predict2.c, predict3.c).</a:t>
-            </a:r>
-          </a:p>
-          <a:p>
-            <a:pPr>
-              <a:spcAft>
-                <a:spcPts val="800"/>
-              </a:spcAft>
-            </a:pPr>
-            <a:r>
-              <a:rPr sz="2200">
-                <a:solidFill>
-                  <a:srgbClr val="212121"/>
-                </a:solidFill>
-              </a:rPr>
-              <a:t>For each program, write down BEFORE we run anything:</a:t>
-            </a:r>
-          </a:p>
-          <a:p>
-            <a:pPr lvl="1">
-              <a:spcAft>
-                <a:spcPts val="800"/>
-              </a:spcAft>
-            </a:pPr>
-            <a:r>
-              <a:rPr sz="2000">
-                <a:solidFill>
-                  <a:srgbClr val="212121"/>
-                </a:solidFill>
-              </a:rPr>
-              <a:t>Will the model checker say VERIFICATION FAILED or SUCCESSFUL?</a:t>
-            </a:r>
-          </a:p>
-          <a:p>
-            <a:pPr lvl="1">
-              <a:spcAft>
-                <a:spcPts val="800"/>
-              </a:spcAft>
-            </a:pPr>
-            <a:r>
-              <a:rPr sz="2000">
-                <a:solidFill>
-                  <a:srgbClr val="212121"/>
-                </a:solidFill>
-              </a:rPr>
-              <a:t>If FAILED — which line is the culprit?</a:t>
-            </a:r>
-          </a:p>
-          <a:p>
-            <a:pPr>
-              <a:spcAft>
-                <a:spcPts val="800"/>
-              </a:spcAft>
-            </a:pPr>
-            <a:r>
-              <a:rPr sz="2200">
-                <a:solidFill>
-                  <a:srgbClr val="212121"/>
-                </a:solidFill>
-              </a:rPr>
-              <a:t>Then we run ESBMC live and settle every bet.</a:t>
+              <a:rPr sz="2400">
+                <a:solidFill>
+                  <a:srgbClr val="212121"/>
+                </a:solidFill>
+              </a:rPr>
+              <a:t>Two threads of two and one statements already have three interleavings. Real code has billions.</a:t>
+            </a:r>
+          </a:p>
+          <a:p>
+            <a:pPr>
+              <a:spcAft>
+                <a:spcPts val="800"/>
+              </a:spcAft>
+            </a:pPr>
+            <a:r>
+              <a:rPr sz="2400">
+                <a:solidFill>
+                  <a:srgbClr val="212121"/>
+                </a:solidFill>
+              </a:rPr>
+              <a:t>Run the program a million times and the bad interleaving may never show up — Therac-25's bug hid exactly this way.</a:t>
+            </a:r>
+          </a:p>
+          <a:p>
+            <a:pPr>
+              <a:spcAft>
+                <a:spcPts val="800"/>
+              </a:spcAft>
+            </a:pPr>
+            <a:r>
+              <a:rPr sz="2400">
+                <a:solidFill>
+                  <a:srgbClr val="212121"/>
+                </a:solidFill>
+              </a:rPr>
+              <a:t>A model checker enumerates every interleaving up to a bound, including the one that kills your assertion.</a:t>
+            </a:r>
+          </a:p>
+          <a:p>
+            <a:pPr>
+              <a:spcAft>
+                <a:spcPts val="800"/>
+              </a:spcAft>
+            </a:pPr>
+            <a:r>
+              <a:rPr sz="2400">
+                <a:solidFill>
+                  <a:srgbClr val="212121"/>
+                </a:solidFill>
+              </a:rPr>
+              <a:t/>
+            </a:r>
+          </a:p>
+          <a:p>
+            <a:pPr>
+              <a:spcAft>
+                <a:spcPts val="800"/>
+              </a:spcAft>
+            </a:pPr>
+            <a:r>
+              <a:rPr sz="2400">
+                <a:solidFill>
+                  <a:srgbClr val="212121"/>
+                </a:solidFill>
+              </a:rPr>
+              <a:t>Session 2, Lab 4: you write down the killer interleaving before the tool finds it.</a:t>
             </a:r>
           </a:p>
         </p:txBody>
@@ -11372,7 +11406,7 @@
                   <a:srgbClr val="5A0A7A"/>
                 </a:solidFill>
               </a:rPr>
-              <a:t>Who uses this? — Model checking</a:t>
+              <a:t>Homework for your intuition</a:t>
             </a:r>
           </a:p>
         </p:txBody>
@@ -11385,8 +11419,8 @@
         </p:nvSpPr>
         <p:spPr>
           <a:xfrm>
-            <a:off x="731520" y="1463040"/>
-            <a:ext cx="10789920" cy="5120640"/>
+            <a:off x="731520" y="1828800"/>
+            <a:ext cx="10789920" cy="4754880"/>
           </a:xfrm>
           <a:prstGeom prst="rect">
             <a:avLst/>
@@ -11401,7 +11435,7 @@
           <a:p>
             <a:pPr>
               <a:spcAft>
-                <a:spcPts val="800"/>
+                <a:spcPts val="0"/>
               </a:spcAft>
             </a:pPr>
             <a:r>
@@ -11409,14 +11443,15 @@
                 <a:solidFill>
                   <a:srgbClr val="212121"/>
                 </a:solidFill>
-              </a:rPr>
-              <a:t>Amazon Web Services — CBMC proves memory safety of the TLS library s2n; bounded proofs run in CI on every commit</a:t>
-            </a:r>
-          </a:p>
-          <a:p>
-            <a:pPr>
-              <a:spcAft>
-                <a:spcPts val="800"/>
+                <a:latin typeface="Courier New"/>
+              </a:rPr>
+              <a:t>double w = 0.1 + 0.2;</a:t>
+            </a:r>
+          </a:p>
+          <a:p>
+            <a:pPr>
+              <a:spcAft>
+                <a:spcPts val="0"/>
               </a:spcAft>
             </a:pPr>
             <a:r>
@@ -11424,23 +11459,84 @@
                 <a:solidFill>
                   <a:srgbClr val="212121"/>
                 </a:solidFill>
-              </a:rPr>
-              <a:t>ESBMC / CBMC — the tools from tonight's demos; compete yearly in SV-COMP on tens of thousands of benchmarks</a:t>
-            </a:r>
-          </a:p>
-          <a:p>
-            <a:pPr>
-              <a:spcAft>
-                <a:spcPts val="800"/>
-              </a:spcAft>
-            </a:pPr>
-            <a:r>
-              <a:rPr sz="2200">
-                <a:solidFill>
-                  <a:srgbClr val="212121"/>
-                </a:solidFill>
-              </a:rPr>
-              <a:t>The counterexample you saw for getpassword.c is the same artefact AWS engineers read when a proof fails</a:t>
+                <a:latin typeface="Courier New"/>
+              </a:rPr>
+              <a:t>assert(w == 0.3);</a:t>
+            </a:r>
+          </a:p>
+          <a:p>
+            <a:pPr>
+              <a:spcAft>
+                <a:spcPts val="800"/>
+              </a:spcAft>
+            </a:pPr>
+            <a:r>
+              <a:rPr sz="2600">
+                <a:solidFill>
+                  <a:srgbClr val="212121"/>
+                </a:solidFill>
+              </a:rPr>
+              <a:t/>
+            </a:r>
+          </a:p>
+          <a:p>
+            <a:pPr>
+              <a:spcAft>
+                <a:spcPts val="800"/>
+              </a:spcAft>
+            </a:pPr>
+            <a:r>
+              <a:rPr sz="2600">
+                <a:solidFill>
+                  <a:srgbClr val="212121"/>
+                </a:solidFill>
+              </a:rPr>
+              <a:t>FAILED or SUCCESSFUL?</a:t>
+            </a:r>
+          </a:p>
+          <a:p>
+            <a:pPr>
+              <a:spcAft>
+                <a:spcPts val="800"/>
+              </a:spcAft>
+            </a:pPr>
+            <a:r>
+              <a:rPr sz="2600">
+                <a:solidFill>
+                  <a:srgbClr val="212121"/>
+                </a:solidFill>
+              </a:rPr>
+              <a:t/>
+            </a:r>
+          </a:p>
+          <a:p>
+            <a:pPr>
+              <a:spcAft>
+                <a:spcPts val="800"/>
+              </a:spcAft>
+            </a:pPr>
+            <a:r>
+              <a:rPr sz="2600">
+                <a:solidFill>
+                  <a:srgbClr val="212121"/>
+                </a:solidFill>
+              </a:rPr>
+              <a:t>Bring your answer to Session 2 — Lab 4 settles it with a solver that does exact IEEE-754 arithmetic.</a:t>
+            </a:r>
+          </a:p>
+          <a:p>
+            <a:pPr lvl="1">
+              <a:spcAft>
+                <a:spcPts val="800"/>
+              </a:spcAft>
+            </a:pPr>
+            <a:r>
+              <a:rPr sz="2400">
+                <a:solidFill>
+                  <a:srgbClr val="212121"/>
+                </a:solidFill>
+              </a:rPr>
+              <a:t>Hint: 0.1 in binary is like 1/3 in decimal.</a:t>
             </a:r>
           </a:p>
         </p:txBody>
@@ -11491,7 +11587,7 @@
                   <a:srgbClr val="5A0A7A"/>
                 </a:solidFill>
               </a:rPr>
-              <a:t>Who uses this? — Symbolic execution &amp; fuzzing</a:t>
+              <a:t>Exercise 2 — Predict the Verdict (15 min)</a:t>
             </a:r>
           </a:p>
         </p:txBody>
@@ -11529,7 +11625,7 @@
                   <a:srgbClr val="212121"/>
                 </a:solidFill>
               </a:rPr>
-              <a:t>KLEE found 56 serious bugs in coreutils, busybox and Minix — including three in coreutils that had survived 15 years of testing</a:t>
+              <a:t>Groups of 3–4. Three short C programs on the handout (predict1.c, predict2.c, predict3.c).</a:t>
             </a:r>
           </a:p>
           <a:p>
@@ -11544,7 +11640,37 @@
                   <a:srgbClr val="212121"/>
                 </a:solidFill>
               </a:rPr>
-              <a:t>Microsoft SAGE fuzzed Windows file parsers with symbolic execution; it found ~1/3 of all bugs caught by file fuzzing during Windows 7 development — running last, after every other tool</a:t>
+              <a:t>For each program, write down BEFORE we run anything:</a:t>
+            </a:r>
+          </a:p>
+          <a:p>
+            <a:pPr lvl="1">
+              <a:spcAft>
+                <a:spcPts val="800"/>
+              </a:spcAft>
+            </a:pPr>
+            <a:r>
+              <a:rPr sz="2000">
+                <a:solidFill>
+                  <a:srgbClr val="212121"/>
+                </a:solidFill>
+              </a:rPr>
+              <a:t>Will the model checker say VERIFICATION FAILED or SUCCESSFUL?</a:t>
+            </a:r>
+          </a:p>
+          <a:p>
+            <a:pPr lvl="1">
+              <a:spcAft>
+                <a:spcPts val="800"/>
+              </a:spcAft>
+            </a:pPr>
+            <a:r>
+              <a:rPr sz="2000">
+                <a:solidFill>
+                  <a:srgbClr val="212121"/>
+                </a:solidFill>
+              </a:rPr>
+              <a:t>If FAILED — which line is the culprit?</a:t>
             </a:r>
           </a:p>
           <a:p>
@@ -11559,22 +11685,7 @@
                   <a:srgbClr val="212121"/>
                 </a:solidFill>
               </a:rPr>
-              <a:t>AFL / OSS-Fuzz — Google fuzzes ~1,000 open-source projects continuously; tens of thousands of bugs found</a:t>
-            </a:r>
-          </a:p>
-          <a:p>
-            <a:pPr>
-              <a:spcAft>
-                <a:spcPts val="800"/>
-              </a:spcAft>
-            </a:pPr>
-            <a:r>
-              <a:rPr sz="2200">
-                <a:solidFill>
-                  <a:srgbClr val="212121"/>
-                </a:solidFill>
-              </a:rPr>
-              <a:t>The pragmatic cousin of verification: no proofs, ruthless effectiveness</a:t>
+              <a:t>Then we run ESBMC live and settle every bet.</a:t>
             </a:r>
           </a:p>
         </p:txBody>
@@ -11625,7 +11736,7 @@
                   <a:srgbClr val="5A0A7A"/>
                 </a:solidFill>
               </a:rPr>
-              <a:t>Who uses this? — Proofs all the way up</a:t>
+              <a:t>Who uses this? — Model checking</a:t>
             </a:r>
           </a:p>
         </p:txBody>
@@ -11663,7 +11774,7 @@
                   <a:srgbClr val="212121"/>
                 </a:solidFill>
               </a:rPr>
-              <a:t>Astrée (abstract interpretation) proved absence of runtime errors in the Airbus A340 fly-by-wire code — 132,000 lines of C — and was then applied to the A380</a:t>
+              <a:t>Amazon Web Services — CBMC proves memory safety of the TLS library s2n; bounded proofs run in CI on every commit</a:t>
             </a:r>
           </a:p>
           <a:p>
@@ -11678,7 +11789,7 @@
                   <a:srgbClr val="212121"/>
                 </a:solidFill>
               </a:rPr>
-              <a:t>seL4 — an OS microkernel with a machine-checked proof of functional correctness</a:t>
+              <a:t>ESBMC / CBMC — the tools from tonight's demos; compete yearly in SV-COMP on tens of thousands of benchmarks</a:t>
             </a:r>
           </a:p>
           <a:p>
@@ -11693,7 +11804,7 @@
                   <a:srgbClr val="212121"/>
                 </a:solidFill>
               </a:rPr>
-              <a:t>CompCert — a C compiler with a proof that compilation preserves semantics; six CPU-years of fuzzing found no wrong-code bugs in its verified core, while every other compiler tested failed</a:t>
+              <a:t>The counterexample you saw for getpassword.c is the same artefact AWS engineers read when a proof fails</a:t>
             </a:r>
           </a:p>
         </p:txBody>
@@ -11744,7 +11855,7 @@
                   <a:srgbClr val="5A0A7A"/>
                 </a:solidFill>
               </a:rPr>
-              <a:t>Discussion</a:t>
+              <a:t>Who uses this? — Symbolic execution &amp; fuzzing</a:t>
             </a:r>
           </a:p>
         </p:txBody>
@@ -11757,8 +11868,8 @@
         </p:nvSpPr>
         <p:spPr>
           <a:xfrm>
-            <a:off x="731520" y="2194560"/>
-            <a:ext cx="10789920" cy="4389120"/>
+            <a:off x="731520" y="1463040"/>
+            <a:ext cx="10789920" cy="5120640"/>
           </a:xfrm>
           <a:prstGeom prst="rect">
             <a:avLst/>
@@ -11777,42 +11888,57 @@
               </a:spcAft>
             </a:pPr>
             <a:r>
-              <a:rPr sz="2800">
-                <a:solidFill>
-                  <a:srgbClr val="212121"/>
-                </a:solidFill>
-              </a:rPr>
-              <a:t>If verification can prove the absence of bugs…</a:t>
-            </a:r>
-          </a:p>
-          <a:p>
-            <a:pPr>
-              <a:spcAft>
-                <a:spcPts val="800"/>
-              </a:spcAft>
-            </a:pPr>
-            <a:r>
-              <a:rPr sz="2800">
-                <a:solidFill>
-                  <a:srgbClr val="212121"/>
-                </a:solidFill>
-              </a:rPr>
-              <a:t>why isn't all software verified?</a:t>
-            </a:r>
-          </a:p>
-          <a:p>
-            <a:pPr>
-              <a:spcAft>
-                <a:spcPts val="800"/>
-              </a:spcAft>
-            </a:pPr>
-            <a:r>
-              <a:rPr sz="2800">
-                <a:solidFill>
-                  <a:srgbClr val="212121"/>
-                </a:solidFill>
-              </a:rPr>
-              <a:t>(Let's collect reasons — then I'll tell you which ones the industry actually cites.)</a:t>
+              <a:rPr sz="2200">
+                <a:solidFill>
+                  <a:srgbClr val="212121"/>
+                </a:solidFill>
+              </a:rPr>
+              <a:t>KLEE found 56 serious bugs in coreutils, busybox and Minix — including three in coreutils that had survived 15 years of testing</a:t>
+            </a:r>
+          </a:p>
+          <a:p>
+            <a:pPr>
+              <a:spcAft>
+                <a:spcPts val="800"/>
+              </a:spcAft>
+            </a:pPr>
+            <a:r>
+              <a:rPr sz="2200">
+                <a:solidFill>
+                  <a:srgbClr val="212121"/>
+                </a:solidFill>
+              </a:rPr>
+              <a:t>Microsoft SAGE fuzzed Windows file parsers with symbolic execution; it found ~1/3 of all bugs caught by file fuzzing during Windows 7 development — running last, after every other tool</a:t>
+            </a:r>
+          </a:p>
+          <a:p>
+            <a:pPr>
+              <a:spcAft>
+                <a:spcPts val="800"/>
+              </a:spcAft>
+            </a:pPr>
+            <a:r>
+              <a:rPr sz="2200">
+                <a:solidFill>
+                  <a:srgbClr val="212121"/>
+                </a:solidFill>
+              </a:rPr>
+              <a:t>AFL / OSS-Fuzz — Google fuzzes ~1,000 open-source projects continuously; tens of thousands of bugs found</a:t>
+            </a:r>
+          </a:p>
+          <a:p>
+            <a:pPr>
+              <a:spcAft>
+                <a:spcPts val="800"/>
+              </a:spcAft>
+            </a:pPr>
+            <a:r>
+              <a:rPr sz="2200">
+                <a:solidFill>
+                  <a:srgbClr val="212121"/>
+                </a:solidFill>
+              </a:rPr>
+              <a:t>The pragmatic cousin of verification: no proofs, ruthless effectiveness</a:t>
             </a:r>
           </a:p>
         </p:txBody>
@@ -11863,7 +11989,7 @@
                   <a:srgbClr val="5A0A7A"/>
                 </a:solidFill>
               </a:rPr>
-              <a:t>Closing quiz</a:t>
+              <a:t>Who uses this? — Proofs all the way up</a:t>
             </a:r>
           </a:p>
         </p:txBody>
@@ -11896,72 +12022,42 @@
               </a:spcAft>
             </a:pPr>
             <a:r>
-              <a:rPr sz="2400">
-                <a:solidFill>
-                  <a:srgbClr val="212121"/>
-                </a:solidFill>
-              </a:rPr>
-              <a:t>1. A tool that never raises a false alarm is called …?</a:t>
-            </a:r>
-          </a:p>
-          <a:p>
-            <a:pPr>
-              <a:spcAft>
-                <a:spcPts val="800"/>
-              </a:spcAft>
-            </a:pPr>
-            <a:r>
-              <a:rPr sz="2400">
-                <a:solidFill>
-                  <a:srgbClr val="212121"/>
-                </a:solidFill>
-              </a:rPr>
-              <a:t>2. ESBMC returns UNSAT for C ∧ ¬P at --unwind 10. What do we know?</a:t>
-            </a:r>
-          </a:p>
-          <a:p>
-            <a:pPr>
-              <a:spcAft>
-                <a:spcPts val="800"/>
-              </a:spcAft>
-            </a:pPr>
-            <a:r>
-              <a:rPr sz="2400">
-                <a:solidFill>
-                  <a:srgbClr val="212121"/>
-                </a:solidFill>
-              </a:rPr>
-              <a:t>3. What's inside a counterexample?</a:t>
-            </a:r>
-          </a:p>
-          <a:p>
-            <a:pPr>
-              <a:spcAft>
-                <a:spcPts val="800"/>
-              </a:spcAft>
-            </a:pPr>
-            <a:r>
-              <a:rPr sz="2400">
-                <a:solidFill>
-                  <a:srgbClr val="212121"/>
-                </a:solidFill>
-              </a:rPr>
-              <a:t>4. Which technique proved the A340 flight-control code free of runtime errors?</a:t>
-            </a:r>
-          </a:p>
-          <a:p>
-            <a:pPr>
-              <a:spcAft>
-                <a:spcPts val="800"/>
-              </a:spcAft>
-            </a:pPr>
-            <a:r>
-              <a:rPr sz="2400">
-                <a:solidFill>
-                  <a:srgbClr val="212121"/>
-                </a:solidFill>
-              </a:rPr>
-              <a:t>5. Why can't testing prove the getPassword program safe?</a:t>
+              <a:rPr sz="2200">
+                <a:solidFill>
+                  <a:srgbClr val="212121"/>
+                </a:solidFill>
+              </a:rPr>
+              <a:t>Astrée (abstract interpretation) proved absence of runtime errors in the Airbus A340 fly-by-wire code — 132,000 lines of C — and was then applied to the A380</a:t>
+            </a:r>
+          </a:p>
+          <a:p>
+            <a:pPr>
+              <a:spcAft>
+                <a:spcPts val="800"/>
+              </a:spcAft>
+            </a:pPr>
+            <a:r>
+              <a:rPr sz="2200">
+                <a:solidFill>
+                  <a:srgbClr val="212121"/>
+                </a:solidFill>
+              </a:rPr>
+              <a:t>seL4 — an OS microkernel with a machine-checked proof of functional correctness</a:t>
+            </a:r>
+          </a:p>
+          <a:p>
+            <a:pPr>
+              <a:spcAft>
+                <a:spcPts val="800"/>
+              </a:spcAft>
+            </a:pPr>
+            <a:r>
+              <a:rPr sz="2200">
+                <a:solidFill>
+                  <a:srgbClr val="212121"/>
+                </a:solidFill>
+              </a:rPr>
+              <a:t>CompCert — a C compiler with a proof that compilation preserves semantics; six CPU-years of fuzzing found no wrong-code bugs in its verified core, while every other compiler tested failed</a:t>
             </a:r>
           </a:p>
         </p:txBody>
@@ -12012,7 +12108,7 @@
                   <a:srgbClr val="5A0A7A"/>
                 </a:solidFill>
               </a:rPr>
-              <a:t>Before Session 2 — 10 minutes of homework</a:t>
+              <a:t>Discussion</a:t>
             </a:r>
           </a:p>
         </p:txBody>
@@ -12025,8 +12121,8 @@
         </p:nvSpPr>
         <p:spPr>
           <a:xfrm>
-            <a:off x="731520" y="1463040"/>
-            <a:ext cx="10789920" cy="5120640"/>
+            <a:off x="731520" y="2194560"/>
+            <a:ext cx="10789920" cy="4389120"/>
           </a:xfrm>
           <a:prstGeom prst="rect">
             <a:avLst/>
@@ -12045,91 +12141,42 @@
               </a:spcAft>
             </a:pPr>
             <a:r>
-              <a:rPr sz="2200">
-                <a:solidFill>
-                  <a:srgbClr val="212121"/>
-                </a:solidFill>
-              </a:rPr>
-              <a:t>Follow handouts/setup.md in the repo:</a:t>
-            </a:r>
-          </a:p>
-          <a:p>
-            <a:pPr>
-              <a:spcAft>
-                <a:spcPts val="0"/>
-              </a:spcAft>
-            </a:pPr>
-            <a:r>
-              <a:rPr sz="1800">
-                <a:solidFill>
-                  <a:srgbClr val="212121"/>
-                </a:solidFill>
-                <a:latin typeface="Courier New"/>
-              </a:rPr>
-              <a:t>1.  pip install z3-solver</a:t>
-            </a:r>
-          </a:p>
-          <a:p>
-            <a:pPr>
-              <a:spcAft>
-                <a:spcPts val="0"/>
-              </a:spcAft>
-            </a:pPr>
-            <a:r>
-              <a:rPr sz="1800">
-                <a:solidFill>
-                  <a:srgbClr val="212121"/>
-                </a:solidFill>
-                <a:latin typeface="Courier New"/>
-              </a:rPr>
-              <a:t>2.  download ESBMC: github.com/esbmc/esbmc/releases</a:t>
-            </a:r>
-          </a:p>
-          <a:p>
-            <a:pPr>
-              <a:spcAft>
-                <a:spcPts val="0"/>
-              </a:spcAft>
-            </a:pPr>
-            <a:r>
-              <a:rPr sz="1800">
-                <a:solidFill>
-                  <a:srgbClr val="212121"/>
-                </a:solidFill>
-                <a:latin typeface="Courier New"/>
-              </a:rPr>
-              <a:t>3.  smoke test:  esbmc labs/lab4/float.c</a:t>
-            </a:r>
-          </a:p>
-          <a:p>
-            <a:pPr>
-              <a:spcAft>
-                <a:spcPts val="0"/>
-              </a:spcAft>
-            </a:pPr>
-            <a:r>
-              <a:rPr sz="1800">
-                <a:solidFill>
-                  <a:srgbClr val="212121"/>
-                </a:solidFill>
-                <a:latin typeface="Courier New"/>
-              </a:rPr>
-              <a:t>    → should print VERIFICATION FAILED (yes, failed — that's the point)</a:t>
-            </a:r>
-          </a:p>
-          <a:p>
-            <a:pPr>
-              <a:spcAft>
-                <a:spcPts val="800"/>
-              </a:spcAft>
-            </a:pPr>
-            <a:r>
-              <a:rPr sz="2200">
-                <a:solidFill>
-                  <a:srgbClr val="212121"/>
-                </a:solidFill>
-              </a:rPr>
-              <a:t>Can't make it work? Come at 17:45 — we'll fix it together.</a:t>
+              <a:rPr sz="2800">
+                <a:solidFill>
+                  <a:srgbClr val="212121"/>
+                </a:solidFill>
+              </a:rPr>
+              <a:t>If verification can prove the absence of bugs…</a:t>
+            </a:r>
+          </a:p>
+          <a:p>
+            <a:pPr>
+              <a:spcAft>
+                <a:spcPts val="800"/>
+              </a:spcAft>
+            </a:pPr>
+            <a:r>
+              <a:rPr sz="2800">
+                <a:solidFill>
+                  <a:srgbClr val="212121"/>
+                </a:solidFill>
+              </a:rPr>
+              <a:t>why isn't all software verified?</a:t>
+            </a:r>
+          </a:p>
+          <a:p>
+            <a:pPr>
+              <a:spcAft>
+                <a:spcPts val="800"/>
+              </a:spcAft>
+            </a:pPr>
+            <a:r>
+              <a:rPr sz="2800">
+                <a:solidFill>
+                  <a:srgbClr val="212121"/>
+                </a:solidFill>
+              </a:rPr>
+              <a:t>(Let's collect reasons — then I'll tell you which ones the industry actually cites.)</a:t>
             </a:r>
           </a:p>
         </p:txBody>
@@ -12394,6 +12441,323 @@
                 </a:solidFill>
               </a:rPr>
               <a:t>session1-demos/getpassword.c — what happens if you type more than three characters?</a:t>
+            </a:r>
+          </a:p>
+        </p:txBody>
+      </p:sp>
+    </p:spTree>
+  </p:cSld>
+  <p:clrMapOvr>
+    <a:masterClrMapping/>
+  </p:clrMapOvr>
+</p:sld>
+</file>
+
+<file path=ppt/slides/slide50.xml><?xml version="1.0" encoding="utf-8"?>
+<p:sld xmlns:a="http://schemas.openxmlformats.org/drawingml/2006/main" xmlns:p="http://schemas.openxmlformats.org/presentationml/2006/main" xmlns:r="http://schemas.openxmlformats.org/officeDocument/2006/relationships">
+  <p:cSld>
+    <p:spTree>
+      <p:nvGrpSpPr>
+        <p:cNvPr id="1" name=""/>
+        <p:cNvGrpSpPr/>
+        <p:nvPr/>
+      </p:nvGrpSpPr>
+      <p:grpSpPr/>
+      <p:sp>
+        <p:nvSpPr>
+          <p:cNvPr id="2" name="TextBox 1"/>
+          <p:cNvSpPr txBox="1"/>
+          <p:nvPr/>
+        </p:nvSpPr>
+        <p:spPr>
+          <a:xfrm>
+            <a:off x="548640" y="365760"/>
+            <a:ext cx="11064240" cy="1005840"/>
+          </a:xfrm>
+          <a:prstGeom prst="rect">
+            <a:avLst/>
+          </a:prstGeom>
+          <a:noFill/>
+        </p:spPr>
+        <p:txBody>
+          <a:bodyPr wrap="square">
+            <a:spAutoFit/>
+          </a:bodyPr>
+          <a:lstStyle/>
+          <a:p>
+            <a:r>
+              <a:rPr sz="3600" b="1">
+                <a:solidFill>
+                  <a:srgbClr val="5A0A7A"/>
+                </a:solidFill>
+              </a:rPr>
+              <a:t>Closing quiz</a:t>
+            </a:r>
+          </a:p>
+        </p:txBody>
+      </p:sp>
+      <p:sp>
+        <p:nvSpPr>
+          <p:cNvPr id="3" name="TextBox 2"/>
+          <p:cNvSpPr txBox="1"/>
+          <p:nvPr/>
+        </p:nvSpPr>
+        <p:spPr>
+          <a:xfrm>
+            <a:off x="731520" y="1463040"/>
+            <a:ext cx="10789920" cy="5120640"/>
+          </a:xfrm>
+          <a:prstGeom prst="rect">
+            <a:avLst/>
+          </a:prstGeom>
+          <a:noFill/>
+        </p:spPr>
+        <p:txBody>
+          <a:bodyPr wrap="square">
+            <a:spAutoFit/>
+          </a:bodyPr>
+          <a:lstStyle/>
+          <a:p>
+            <a:pPr>
+              <a:spcAft>
+                <a:spcPts val="800"/>
+              </a:spcAft>
+            </a:pPr>
+            <a:r>
+              <a:rPr sz="2400">
+                <a:solidFill>
+                  <a:srgbClr val="212121"/>
+                </a:solidFill>
+              </a:rPr>
+              <a:t>1. A tool that never raises a false alarm is called …?</a:t>
+            </a:r>
+          </a:p>
+          <a:p>
+            <a:pPr>
+              <a:spcAft>
+                <a:spcPts val="800"/>
+              </a:spcAft>
+            </a:pPr>
+            <a:r>
+              <a:rPr sz="2400">
+                <a:solidFill>
+                  <a:srgbClr val="212121"/>
+                </a:solidFill>
+              </a:rPr>
+              <a:t>2. ESBMC returns UNSAT for C ∧ ¬P at --unwind 10. What do we know?</a:t>
+            </a:r>
+          </a:p>
+          <a:p>
+            <a:pPr>
+              <a:spcAft>
+                <a:spcPts val="800"/>
+              </a:spcAft>
+            </a:pPr>
+            <a:r>
+              <a:rPr sz="2400">
+                <a:solidFill>
+                  <a:srgbClr val="212121"/>
+                </a:solidFill>
+              </a:rPr>
+              <a:t>3. What's inside a counterexample?</a:t>
+            </a:r>
+          </a:p>
+          <a:p>
+            <a:pPr>
+              <a:spcAft>
+                <a:spcPts val="800"/>
+              </a:spcAft>
+            </a:pPr>
+            <a:r>
+              <a:rPr sz="2400">
+                <a:solidFill>
+                  <a:srgbClr val="212121"/>
+                </a:solidFill>
+              </a:rPr>
+              <a:t>4. Which technique proved the A340 flight-control code free of runtime errors?</a:t>
+            </a:r>
+          </a:p>
+          <a:p>
+            <a:pPr>
+              <a:spcAft>
+                <a:spcPts val="800"/>
+              </a:spcAft>
+            </a:pPr>
+            <a:r>
+              <a:rPr sz="2400">
+                <a:solidFill>
+                  <a:srgbClr val="212121"/>
+                </a:solidFill>
+              </a:rPr>
+              <a:t>5. Why can't testing prove the getPassword program safe?</a:t>
+            </a:r>
+          </a:p>
+        </p:txBody>
+      </p:sp>
+    </p:spTree>
+  </p:cSld>
+  <p:clrMapOvr>
+    <a:masterClrMapping/>
+  </p:clrMapOvr>
+</p:sld>
+</file>
+
+<file path=ppt/slides/slide51.xml><?xml version="1.0" encoding="utf-8"?>
+<p:sld xmlns:a="http://schemas.openxmlformats.org/drawingml/2006/main" xmlns:p="http://schemas.openxmlformats.org/presentationml/2006/main" xmlns:r="http://schemas.openxmlformats.org/officeDocument/2006/relationships">
+  <p:cSld>
+    <p:spTree>
+      <p:nvGrpSpPr>
+        <p:cNvPr id="1" name=""/>
+        <p:cNvGrpSpPr/>
+        <p:nvPr/>
+      </p:nvGrpSpPr>
+      <p:grpSpPr/>
+      <p:sp>
+        <p:nvSpPr>
+          <p:cNvPr id="2" name="TextBox 1"/>
+          <p:cNvSpPr txBox="1"/>
+          <p:nvPr/>
+        </p:nvSpPr>
+        <p:spPr>
+          <a:xfrm>
+            <a:off x="548640" y="365760"/>
+            <a:ext cx="11064240" cy="1005840"/>
+          </a:xfrm>
+          <a:prstGeom prst="rect">
+            <a:avLst/>
+          </a:prstGeom>
+          <a:noFill/>
+        </p:spPr>
+        <p:txBody>
+          <a:bodyPr wrap="square">
+            <a:spAutoFit/>
+          </a:bodyPr>
+          <a:lstStyle/>
+          <a:p>
+            <a:r>
+              <a:rPr sz="3600" b="1">
+                <a:solidFill>
+                  <a:srgbClr val="5A0A7A"/>
+                </a:solidFill>
+              </a:rPr>
+              <a:t>Before Session 2 — 10 minutes of homework</a:t>
+            </a:r>
+          </a:p>
+        </p:txBody>
+      </p:sp>
+      <p:sp>
+        <p:nvSpPr>
+          <p:cNvPr id="3" name="TextBox 2"/>
+          <p:cNvSpPr txBox="1"/>
+          <p:nvPr/>
+        </p:nvSpPr>
+        <p:spPr>
+          <a:xfrm>
+            <a:off x="731520" y="1463040"/>
+            <a:ext cx="10789920" cy="5120640"/>
+          </a:xfrm>
+          <a:prstGeom prst="rect">
+            <a:avLst/>
+          </a:prstGeom>
+          <a:noFill/>
+        </p:spPr>
+        <p:txBody>
+          <a:bodyPr wrap="square">
+            <a:spAutoFit/>
+          </a:bodyPr>
+          <a:lstStyle/>
+          <a:p>
+            <a:pPr>
+              <a:spcAft>
+                <a:spcPts val="800"/>
+              </a:spcAft>
+            </a:pPr>
+            <a:r>
+              <a:rPr sz="2200">
+                <a:solidFill>
+                  <a:srgbClr val="212121"/>
+                </a:solidFill>
+              </a:rPr>
+              <a:t>Follow handouts/setup.md in the repo:</a:t>
+            </a:r>
+          </a:p>
+          <a:p>
+            <a:pPr>
+              <a:spcAft>
+                <a:spcPts val="0"/>
+              </a:spcAft>
+            </a:pPr>
+            <a:r>
+              <a:rPr sz="1800">
+                <a:solidFill>
+                  <a:srgbClr val="212121"/>
+                </a:solidFill>
+                <a:latin typeface="Courier New"/>
+              </a:rPr>
+              <a:t>1.  pip install z3-solver</a:t>
+            </a:r>
+          </a:p>
+          <a:p>
+            <a:pPr>
+              <a:spcAft>
+                <a:spcPts val="0"/>
+              </a:spcAft>
+            </a:pPr>
+            <a:r>
+              <a:rPr sz="1800">
+                <a:solidFill>
+                  <a:srgbClr val="212121"/>
+                </a:solidFill>
+                <a:latin typeface="Courier New"/>
+              </a:rPr>
+              <a:t>2.  download ESBMC: github.com/esbmc/esbmc/releases</a:t>
+            </a:r>
+          </a:p>
+          <a:p>
+            <a:pPr>
+              <a:spcAft>
+                <a:spcPts val="0"/>
+              </a:spcAft>
+            </a:pPr>
+            <a:r>
+              <a:rPr sz="1800">
+                <a:solidFill>
+                  <a:srgbClr val="212121"/>
+                </a:solidFill>
+                <a:latin typeface="Courier New"/>
+              </a:rPr>
+              <a:t>3.  smoke test:  esbmc labs/lab4/float.c</a:t>
+            </a:r>
+          </a:p>
+          <a:p>
+            <a:pPr>
+              <a:spcAft>
+                <a:spcPts val="0"/>
+              </a:spcAft>
+            </a:pPr>
+            <a:r>
+              <a:rPr sz="1800">
+                <a:solidFill>
+                  <a:srgbClr val="212121"/>
+                </a:solidFill>
+                <a:latin typeface="Courier New"/>
+              </a:rPr>
+              <a:t>    → should print VERIFICATION FAILED (yes, failed — that's the point)</a:t>
+            </a:r>
+          </a:p>
+          <a:p>
+            <a:pPr>
+              <a:spcAft>
+                <a:spcPts val="800"/>
+              </a:spcAft>
+            </a:pPr>
+            <a:r>
+              <a:rPr sz="2200">
+                <a:solidFill>
+                  <a:srgbClr val="212121"/>
+                </a:solidFill>
+              </a:rPr>
+              <a:t>Can't make it work? Come at 17:45 — we'll fix it together.</a:t>
             </a:r>
           </a:p>
         </p:txBody>

--- a/slides/session1/01-session1-fundamentals.pptx
+++ b/slides/session1/01-session1-fundamentals.pptx
@@ -9058,6 +9058,44 @@
                 </a:solidFill>
               </a:rPr>
               <a:t>Lab 1, Stage 2: you run this yourself.</a:t>
+            </a:r>
+          </a:p>
+        </p:txBody>
+      </p:sp>
+      <p:sp>
+        <p:nvSpPr>
+          <p:cNvPr id="4" name="TextBox 3"/>
+          <p:cNvSpPr txBox="1"/>
+          <p:nvPr/>
+        </p:nvSpPr>
+        <p:spPr>
+          <a:xfrm>
+            <a:off x="731520" y="6400800"/>
+            <a:ext cx="10789920" cy="182880"/>
+          </a:xfrm>
+          <a:prstGeom prst="rect">
+            <a:avLst/>
+          </a:prstGeom>
+          <a:noFill/>
+        </p:spPr>
+        <p:txBody>
+          <a:bodyPr wrap="square">
+            <a:spAutoFit/>
+          </a:bodyPr>
+          <a:lstStyle/>
+          <a:p>
+            <a:pPr>
+              <a:spcAft>
+                <a:spcPts val="800"/>
+              </a:spcAft>
+            </a:pPr>
+            <a:r>
+              <a:rPr sz="1400">
+                <a:solidFill>
+                  <a:srgbClr val="212121"/>
+                </a:solidFill>
+              </a:rPr>
+              <a:t>Run it live: session1-demos/send_more_money.py</a:t>
             </a:r>
           </a:p>
         </p:txBody>

--- a/slides/session1/01-session1-fundamentals.pptx
+++ b/slides/session1/01-session1-fundamentals.pptx
@@ -9012,6 +9012,22 @@
                 </a:solidFill>
                 <a:latin typeface="Courier New"/>
               </a:rPr>
+              <a:t>$ python3 send_more_money.py        # in session1-demos/</a:t>
+            </a:r>
+          </a:p>
+          <a:p>
+            <a:pPr lvl="1">
+              <a:spcAft>
+                <a:spcPts val="0"/>
+              </a:spcAft>
+            </a:pPr>
+            <a:r>
+              <a:rPr sz="1800">
+                <a:solidFill>
+                  <a:srgbClr val="212121"/>
+                </a:solidFill>
+                <a:latin typeface="Courier New"/>
+              </a:rPr>
               <a:t>9567 + 1085 = 10652   (S=9 E=5 N=6 D=7 M=1 O=0 R=8 Y=2)</a:t>
             </a:r>
           </a:p>
@@ -9058,44 +9074,6 @@
                 </a:solidFill>
               </a:rPr>
               <a:t>Lab 1, Stage 2: you run this yourself.</a:t>
-            </a:r>
-          </a:p>
-        </p:txBody>
-      </p:sp>
-      <p:sp>
-        <p:nvSpPr>
-          <p:cNvPr id="4" name="TextBox 3"/>
-          <p:cNvSpPr txBox="1"/>
-          <p:nvPr/>
-        </p:nvSpPr>
-        <p:spPr>
-          <a:xfrm>
-            <a:off x="731520" y="6400800"/>
-            <a:ext cx="10789920" cy="182880"/>
-          </a:xfrm>
-          <a:prstGeom prst="rect">
-            <a:avLst/>
-          </a:prstGeom>
-          <a:noFill/>
-        </p:spPr>
-        <p:txBody>
-          <a:bodyPr wrap="square">
-            <a:spAutoFit/>
-          </a:bodyPr>
-          <a:lstStyle/>
-          <a:p>
-            <a:pPr>
-              <a:spcAft>
-                <a:spcPts val="800"/>
-              </a:spcAft>
-            </a:pPr>
-            <a:r>
-              <a:rPr sz="1400">
-                <a:solidFill>
-                  <a:srgbClr val="212121"/>
-                </a:solidFill>
-              </a:rPr>
-              <a:t>Run it live: session1-demos/send_more_money.py</a:t>
             </a:r>
           </a:p>
         </p:txBody>

--- a/slides/session1/01-session1-fundamentals.pptx
+++ b/slides/session1/01-session1-fundamentals.pptx
@@ -56,6 +56,7 @@
     <p:sldId id="304" r:id="rId55"/>
     <p:sldId id="305" r:id="rId56"/>
     <p:sldId id="306" r:id="rId57"/>
+    <p:sldId id="307" r:id="rId58"/>
   </p:sldIdLst>
   <p:sldSz cx="12191695" cy="6858000" type="screen4x3"/>
   <p:notesSz cx="6858000" cy="9144000"/>
@@ -12507,7 +12508,7 @@
                   <a:srgbClr val="5A0A7A"/>
                 </a:solidFill>
               </a:rPr>
-              <a:t>Closing quiz</a:t>
+              <a:t>Under the hood — and how to hack on it</a:t>
             </a:r>
           </a:p>
         </p:txBody>
@@ -12540,72 +12541,157 @@
               </a:spcAft>
             </a:pPr>
             <a:r>
-              <a:rPr sz="2400">
-                <a:solidFill>
-                  <a:srgbClr val="212121"/>
-                </a:solidFill>
-              </a:rPr>
-              <a:t>1. A tool that never raises a false alarm is called …?</a:t>
-            </a:r>
-          </a:p>
-          <a:p>
-            <a:pPr>
-              <a:spcAft>
-                <a:spcPts val="800"/>
-              </a:spcAft>
-            </a:pPr>
-            <a:r>
-              <a:rPr sz="2400">
-                <a:solidFill>
-                  <a:srgbClr val="212121"/>
-                </a:solidFill>
-              </a:rPr>
-              <a:t>2. ESBMC returns UNSAT for C ∧ ¬P at --unwind 10. What do we know?</a:t>
-            </a:r>
-          </a:p>
-          <a:p>
-            <a:pPr>
-              <a:spcAft>
-                <a:spcPts val="800"/>
-              </a:spcAft>
-            </a:pPr>
-            <a:r>
-              <a:rPr sz="2400">
-                <a:solidFill>
-                  <a:srgbClr val="212121"/>
-                </a:solidFill>
-              </a:rPr>
-              <a:t>3. What's inside a counterexample?</a:t>
-            </a:r>
-          </a:p>
-          <a:p>
-            <a:pPr>
-              <a:spcAft>
-                <a:spcPts val="800"/>
-              </a:spcAft>
-            </a:pPr>
-            <a:r>
-              <a:rPr sz="2400">
-                <a:solidFill>
-                  <a:srgbClr val="212121"/>
-                </a:solidFill>
-              </a:rPr>
-              <a:t>4. Which technique proved the A340 flight-control code free of runtime errors?</a:t>
-            </a:r>
-          </a:p>
-          <a:p>
-            <a:pPr>
-              <a:spcAft>
-                <a:spcPts val="800"/>
-              </a:spcAft>
-            </a:pPr>
-            <a:r>
-              <a:rPr sz="2400">
-                <a:solidFill>
-                  <a:srgbClr val="212121"/>
-                </a:solidFill>
-              </a:rPr>
-              <a:t>5. Why can't testing prove the getPassword program safe?</a:t>
+              <a:rPr sz="2200">
+                <a:solidFill>
+                  <a:srgbClr val="212121"/>
+                </a:solidFill>
+              </a:rPr>
+              <a:t>Tonight's pipeline was the conceptual one. ESBMC's real pipeline:</a:t>
+            </a:r>
+          </a:p>
+          <a:p>
+            <a:pPr lvl="1">
+              <a:spcAft>
+                <a:spcPts val="800"/>
+              </a:spcAft>
+            </a:pPr>
+            <a:r>
+              <a:rPr sz="2000">
+                <a:solidFill>
+                  <a:srgbClr val="212121"/>
+                </a:solidFill>
+              </a:rPr>
+              <a:t>Clang frontend → irep2 (typed IR) → GOTO program → symbolic execution (unwind, SSA) → SMT backends (Z3, Bitwuzla, cvc5)</a:t>
+            </a:r>
+          </a:p>
+          <a:p>
+            <a:pPr>
+              <a:spcAft>
+                <a:spcPts val="800"/>
+              </a:spcAft>
+            </a:pPr>
+            <a:r>
+              <a:rPr sz="2200">
+                <a:solidFill>
+                  <a:srgbClr val="212121"/>
+                </a:solidFill>
+              </a:rPr>
+              <a:t/>
+            </a:r>
+          </a:p>
+          <a:p>
+            <a:pPr>
+              <a:spcAft>
+                <a:spcPts val="800"/>
+              </a:spcAft>
+            </a:pPr>
+            <a:r>
+              <a:rPr sz="2200">
+                <a:solidFill>
+                  <a:srgbClr val="212121"/>
+                </a:solidFill>
+              </a:rPr>
+              <a:t>irep2 is the typed, reference-counted representation everything lowers to and every backend consumes.</a:t>
+            </a:r>
+          </a:p>
+          <a:p>
+            <a:pPr>
+              <a:spcAft>
+                <a:spcPts val="800"/>
+              </a:spcAft>
+            </a:pPr>
+            <a:r>
+              <a:rPr sz="2200">
+                <a:solidFill>
+                  <a:srgbClr val="212121"/>
+                </a:solidFill>
+              </a:rPr>
+              <a:t>Want to add a check, a frontend, or a new node type? Start here:</a:t>
+            </a:r>
+          </a:p>
+          <a:p>
+            <a:pPr lvl="1">
+              <a:spcAft>
+                <a:spcPts val="0"/>
+              </a:spcAft>
+            </a:pPr>
+            <a:r>
+              <a:rPr sz="1800">
+                <a:solidFill>
+                  <a:srgbClr val="212121"/>
+                </a:solidFill>
+                <a:latin typeface="Courier New"/>
+              </a:rPr>
+              <a:t>github.com/esbmc/esbmc  →  src/irep2/README.md</a:t>
+            </a:r>
+          </a:p>
+          <a:p>
+            <a:pPr>
+              <a:spcAft>
+                <a:spcPts val="800"/>
+              </a:spcAft>
+            </a:pPr>
+            <a:r>
+              <a:rPr sz="2200">
+                <a:solidFill>
+                  <a:srgbClr val="212121"/>
+                </a:solidFill>
+              </a:rPr>
+              <a:t/>
+            </a:r>
+          </a:p>
+          <a:p>
+            <a:pPr>
+              <a:spcAft>
+                <a:spcPts val="800"/>
+              </a:spcAft>
+            </a:pPr>
+            <a:r>
+              <a:rPr sz="2200">
+                <a:solidFill>
+                  <a:srgbClr val="212121"/>
+                </a:solidFill>
+              </a:rPr>
+              <a:t>For the curious — and anyone who wants to contribute.</a:t>
+            </a:r>
+          </a:p>
+        </p:txBody>
+      </p:sp>
+      <p:sp>
+        <p:nvSpPr>
+          <p:cNvPr id="4" name="TextBox 3"/>
+          <p:cNvSpPr txBox="1"/>
+          <p:nvPr/>
+        </p:nvSpPr>
+        <p:spPr>
+          <a:xfrm>
+            <a:off x="731520" y="6400800"/>
+            <a:ext cx="10789920" cy="182880"/>
+          </a:xfrm>
+          <a:prstGeom prst="rect">
+            <a:avLst/>
+          </a:prstGeom>
+          <a:noFill/>
+        </p:spPr>
+        <p:txBody>
+          <a:bodyPr wrap="square">
+            <a:spAutoFit/>
+          </a:bodyPr>
+          <a:lstStyle/>
+          <a:p>
+            <a:pPr>
+              <a:spcAft>
+                <a:spcPts val="800"/>
+              </a:spcAft>
+            </a:pPr>
+            <a:r>
+              <a:rPr sz="1400">
+                <a:solidFill>
+                  <a:srgbClr val="212121"/>
+                </a:solidFill>
+                <a:hlinkClick r:id="rId2"/>
+              </a:rPr>
+              <a:t>src/irep2/README.md</a:t>
             </a:r>
           </a:p>
         </p:txBody>
@@ -12619,6 +12705,155 @@
 </file>
 
 <file path=ppt/slides/slide51.xml><?xml version="1.0" encoding="utf-8"?>
+<p:sld xmlns:a="http://schemas.openxmlformats.org/drawingml/2006/main" xmlns:p="http://schemas.openxmlformats.org/presentationml/2006/main" xmlns:r="http://schemas.openxmlformats.org/officeDocument/2006/relationships">
+  <p:cSld>
+    <p:spTree>
+      <p:nvGrpSpPr>
+        <p:cNvPr id="1" name=""/>
+        <p:cNvGrpSpPr/>
+        <p:nvPr/>
+      </p:nvGrpSpPr>
+      <p:grpSpPr/>
+      <p:sp>
+        <p:nvSpPr>
+          <p:cNvPr id="2" name="TextBox 1"/>
+          <p:cNvSpPr txBox="1"/>
+          <p:nvPr/>
+        </p:nvSpPr>
+        <p:spPr>
+          <a:xfrm>
+            <a:off x="548640" y="365760"/>
+            <a:ext cx="11064240" cy="1005840"/>
+          </a:xfrm>
+          <a:prstGeom prst="rect">
+            <a:avLst/>
+          </a:prstGeom>
+          <a:noFill/>
+        </p:spPr>
+        <p:txBody>
+          <a:bodyPr wrap="square">
+            <a:spAutoFit/>
+          </a:bodyPr>
+          <a:lstStyle/>
+          <a:p>
+            <a:r>
+              <a:rPr sz="3600" b="1">
+                <a:solidFill>
+                  <a:srgbClr val="5A0A7A"/>
+                </a:solidFill>
+              </a:rPr>
+              <a:t>Closing quiz</a:t>
+            </a:r>
+          </a:p>
+        </p:txBody>
+      </p:sp>
+      <p:sp>
+        <p:nvSpPr>
+          <p:cNvPr id="3" name="TextBox 2"/>
+          <p:cNvSpPr txBox="1"/>
+          <p:nvPr/>
+        </p:nvSpPr>
+        <p:spPr>
+          <a:xfrm>
+            <a:off x="731520" y="1463040"/>
+            <a:ext cx="10789920" cy="5120640"/>
+          </a:xfrm>
+          <a:prstGeom prst="rect">
+            <a:avLst/>
+          </a:prstGeom>
+          <a:noFill/>
+        </p:spPr>
+        <p:txBody>
+          <a:bodyPr wrap="square">
+            <a:spAutoFit/>
+          </a:bodyPr>
+          <a:lstStyle/>
+          <a:p>
+            <a:pPr>
+              <a:spcAft>
+                <a:spcPts val="800"/>
+              </a:spcAft>
+            </a:pPr>
+            <a:r>
+              <a:rPr sz="2400">
+                <a:solidFill>
+                  <a:srgbClr val="212121"/>
+                </a:solidFill>
+              </a:rPr>
+              <a:t>1. A tool that never raises a false alarm is called …?</a:t>
+            </a:r>
+          </a:p>
+          <a:p>
+            <a:pPr>
+              <a:spcAft>
+                <a:spcPts val="800"/>
+              </a:spcAft>
+            </a:pPr>
+            <a:r>
+              <a:rPr sz="2400">
+                <a:solidFill>
+                  <a:srgbClr val="212121"/>
+                </a:solidFill>
+              </a:rPr>
+              <a:t>2. ESBMC returns UNSAT for C ∧ ¬P at --unwind 10. What do we know?</a:t>
+            </a:r>
+          </a:p>
+          <a:p>
+            <a:pPr>
+              <a:spcAft>
+                <a:spcPts val="800"/>
+              </a:spcAft>
+            </a:pPr>
+            <a:r>
+              <a:rPr sz="2400">
+                <a:solidFill>
+                  <a:srgbClr val="212121"/>
+                </a:solidFill>
+              </a:rPr>
+              <a:t>3. What's inside a counterexample?</a:t>
+            </a:r>
+          </a:p>
+          <a:p>
+            <a:pPr>
+              <a:spcAft>
+                <a:spcPts val="800"/>
+              </a:spcAft>
+            </a:pPr>
+            <a:r>
+              <a:rPr sz="2400">
+                <a:solidFill>
+                  <a:srgbClr val="212121"/>
+                </a:solidFill>
+              </a:rPr>
+              <a:t>4. Which technique proved the A340 flight-control code free of runtime errors?</a:t>
+            </a:r>
+          </a:p>
+          <a:p>
+            <a:pPr>
+              <a:spcAft>
+                <a:spcPts val="800"/>
+              </a:spcAft>
+            </a:pPr>
+            <a:r>
+              <a:rPr sz="2400">
+                <a:solidFill>
+                  <a:srgbClr val="212121"/>
+                </a:solidFill>
+              </a:rPr>
+              <a:t>5. Why can't testing prove the getPassword program safe?</a:t>
+            </a:r>
+          </a:p>
+        </p:txBody>
+      </p:sp>
+    </p:spTree>
+  </p:cSld>
+  <p:clrMapOvr>
+    <a:masterClrMapping/>
+  </p:clrMapOvr>
+</p:sld>
+</file>
+
+<file path=ppt/slides/slide52.xml><?xml version="1.0" encoding="utf-8"?>
 <p:sld xmlns:a="http://schemas.openxmlformats.org/drawingml/2006/main" xmlns:p="http://schemas.openxmlformats.org/presentationml/2006/main" xmlns:r="http://schemas.openxmlformats.org/officeDocument/2006/relationships">
   <p:cSld>
     <p:spTree>

--- a/slides/session1/01-session1-fundamentals.pptx
+++ b/slides/session1/01-session1-fundamentals.pptx
@@ -5,60 +5,60 @@
     <p:sldMasterId id="2147483648" r:id="rId1"/>
   </p:sldMasterIdLst>
   <p:sldIdLst>
-    <p:sldId id="256" r:id="rId7"/>
-    <p:sldId id="257" r:id="rId8"/>
-    <p:sldId id="258" r:id="rId9"/>
-    <p:sldId id="259" r:id="rId10"/>
-    <p:sldId id="260" r:id="rId11"/>
-    <p:sldId id="261" r:id="rId12"/>
-    <p:sldId id="262" r:id="rId13"/>
-    <p:sldId id="263" r:id="rId14"/>
-    <p:sldId id="264" r:id="rId15"/>
-    <p:sldId id="265" r:id="rId16"/>
-    <p:sldId id="266" r:id="rId17"/>
-    <p:sldId id="267" r:id="rId18"/>
-    <p:sldId id="268" r:id="rId19"/>
-    <p:sldId id="269" r:id="rId20"/>
-    <p:sldId id="270" r:id="rId21"/>
-    <p:sldId id="271" r:id="rId22"/>
-    <p:sldId id="272" r:id="rId23"/>
-    <p:sldId id="273" r:id="rId24"/>
-    <p:sldId id="274" r:id="rId25"/>
-    <p:sldId id="275" r:id="rId26"/>
-    <p:sldId id="276" r:id="rId27"/>
-    <p:sldId id="277" r:id="rId28"/>
-    <p:sldId id="278" r:id="rId29"/>
-    <p:sldId id="279" r:id="rId30"/>
-    <p:sldId id="280" r:id="rId31"/>
-    <p:sldId id="281" r:id="rId32"/>
-    <p:sldId id="282" r:id="rId33"/>
-    <p:sldId id="283" r:id="rId34"/>
-    <p:sldId id="284" r:id="rId35"/>
-    <p:sldId id="285" r:id="rId36"/>
-    <p:sldId id="286" r:id="rId37"/>
-    <p:sldId id="287" r:id="rId38"/>
-    <p:sldId id="288" r:id="rId39"/>
-    <p:sldId id="289" r:id="rId40"/>
-    <p:sldId id="290" r:id="rId41"/>
-    <p:sldId id="291" r:id="rId42"/>
-    <p:sldId id="292" r:id="rId43"/>
-    <p:sldId id="293" r:id="rId44"/>
-    <p:sldId id="294" r:id="rId45"/>
-    <p:sldId id="295" r:id="rId46"/>
-    <p:sldId id="296" r:id="rId47"/>
-    <p:sldId id="297" r:id="rId48"/>
-    <p:sldId id="298" r:id="rId49"/>
-    <p:sldId id="299" r:id="rId50"/>
-    <p:sldId id="300" r:id="rId51"/>
-    <p:sldId id="301" r:id="rId52"/>
-    <p:sldId id="302" r:id="rId53"/>
-    <p:sldId id="303" r:id="rId54"/>
-    <p:sldId id="304" r:id="rId55"/>
-    <p:sldId id="305" r:id="rId56"/>
-    <p:sldId id="306" r:id="rId57"/>
-    <p:sldId id="307" r:id="rId58"/>
+    <p:sldId id="256" r:id="rId2"/>
+    <p:sldId id="257" r:id="rId3"/>
+    <p:sldId id="258" r:id="rId4"/>
+    <p:sldId id="259" r:id="rId5"/>
+    <p:sldId id="260" r:id="rId6"/>
+    <p:sldId id="261" r:id="rId7"/>
+    <p:sldId id="262" r:id="rId8"/>
+    <p:sldId id="263" r:id="rId9"/>
+    <p:sldId id="264" r:id="rId10"/>
+    <p:sldId id="265" r:id="rId11"/>
+    <p:sldId id="266" r:id="rId12"/>
+    <p:sldId id="267" r:id="rId13"/>
+    <p:sldId id="268" r:id="rId14"/>
+    <p:sldId id="269" r:id="rId15"/>
+    <p:sldId id="270" r:id="rId16"/>
+    <p:sldId id="271" r:id="rId17"/>
+    <p:sldId id="272" r:id="rId18"/>
+    <p:sldId id="273" r:id="rId19"/>
+    <p:sldId id="274" r:id="rId20"/>
+    <p:sldId id="275" r:id="rId21"/>
+    <p:sldId id="276" r:id="rId22"/>
+    <p:sldId id="277" r:id="rId23"/>
+    <p:sldId id="278" r:id="rId24"/>
+    <p:sldId id="279" r:id="rId25"/>
+    <p:sldId id="280" r:id="rId26"/>
+    <p:sldId id="281" r:id="rId27"/>
+    <p:sldId id="282" r:id="rId28"/>
+    <p:sldId id="283" r:id="rId29"/>
+    <p:sldId id="284" r:id="rId30"/>
+    <p:sldId id="285" r:id="rId31"/>
+    <p:sldId id="286" r:id="rId32"/>
+    <p:sldId id="287" r:id="rId33"/>
+    <p:sldId id="288" r:id="rId34"/>
+    <p:sldId id="289" r:id="rId35"/>
+    <p:sldId id="290" r:id="rId36"/>
+    <p:sldId id="291" r:id="rId37"/>
+    <p:sldId id="292" r:id="rId38"/>
+    <p:sldId id="293" r:id="rId39"/>
+    <p:sldId id="294" r:id="rId40"/>
+    <p:sldId id="295" r:id="rId41"/>
+    <p:sldId id="296" r:id="rId42"/>
+    <p:sldId id="297" r:id="rId43"/>
+    <p:sldId id="298" r:id="rId44"/>
+    <p:sldId id="299" r:id="rId45"/>
+    <p:sldId id="300" r:id="rId46"/>
+    <p:sldId id="301" r:id="rId47"/>
+    <p:sldId id="302" r:id="rId48"/>
+    <p:sldId id="303" r:id="rId49"/>
+    <p:sldId id="304" r:id="rId50"/>
+    <p:sldId id="305" r:id="rId51"/>
+    <p:sldId id="306" r:id="rId52"/>
+    <p:sldId id="307" r:id="rId53"/>
   </p:sldIdLst>
-  <p:sldSz cx="12191695" cy="6858000" type="screen4x3"/>
+  <p:sldSz cx="12192000" cy="6858000"/>
   <p:notesSz cx="6858000" cy="9144000"/>
   <p:defaultTextStyle>
     <a:defPPr>
@@ -155,15 +155,38 @@
       </a:defRPr>
     </a:lvl9pPr>
   </p:defaultTextStyle>
+  <p:extLst>
+    <p:ext uri="{EFAFB233-063F-42B5-8137-9DF3F51BA10A}">
+      <p15:sldGuideLst xmlns:p15="http://schemas.microsoft.com/office/powerpoint/2012/main">
+        <p15:guide id="1" orient="horz" pos="2160">
+          <p15:clr>
+            <a:srgbClr val="A4A3A4"/>
+          </p15:clr>
+        </p15:guide>
+        <p15:guide id="2" pos="2880">
+          <p15:clr>
+            <a:srgbClr val="A4A3A4"/>
+          </p15:clr>
+        </p15:guide>
+      </p15:sldGuideLst>
+    </p:ext>
+  </p:extLst>
 </p:presentation>
 </file>
 
 <file path=ppt/charts/chart1.xml><?xml version="1.0" encoding="utf-8"?>
-<c:chartSpace xmlns:c="http://schemas.openxmlformats.org/drawingml/2006/chart" xmlns:a="http://schemas.openxmlformats.org/drawingml/2006/main" xmlns:r="http://schemas.openxmlformats.org/officeDocument/2006/relationships">
+<c:chartSpace xmlns:c="http://schemas.openxmlformats.org/drawingml/2006/chart" xmlns:a="http://schemas.openxmlformats.org/drawingml/2006/main" xmlns:r="http://schemas.openxmlformats.org/officeDocument/2006/relationships" xmlns:c16r2="http://schemas.microsoft.com/office/drawing/2015/06/chart">
   <c:date1904 val="0"/>
+  <c:lang val="en-GB"/>
+  <c:roundedCorners val="1"/>
+  <c:style val="2"/>
   <c:chart>
+    <c:title>
+      <c:overlay val="0"/>
+    </c:title>
     <c:autoTitleDeleted val="0"/>
     <c:plotArea>
+      <c:layout/>
       <c:lineChart>
         <c:grouping val="standard"/>
         <c:varyColors val="0"/>
@@ -259,7 +282,20 @@
             </c:numRef>
           </c:val>
           <c:smooth val="0"/>
+          <c:extLst>
+            <c:ext xmlns:c16="http://schemas.microsoft.com/office/drawing/2014/chart" uri="{C3380CC4-5D6E-409C-BE32-E72D297353CC}">
+              <c16:uniqueId val="{00000000-3DAB-F942-930F-2328B436AADD}"/>
+            </c:ext>
+          </c:extLst>
         </c:ser>
+        <c:dLbls>
+          <c:showLegendKey val="0"/>
+          <c:showVal val="0"/>
+          <c:showCatName val="0"/>
+          <c:showSerName val="0"/>
+          <c:showPercent val="0"/>
+          <c:showBubbleSize val="0"/>
+        </c:dLbls>
         <c:marker val="1"/>
         <c:smooth val="0"/>
         <c:axId val="2118791784"/>
@@ -272,6 +308,7 @@
         </c:scaling>
         <c:delete val="0"/>
         <c:axPos val="b"/>
+        <c:numFmt formatCode="General" sourceLinked="0"/>
         <c:majorTickMark val="out"/>
         <c:minorTickMark val="none"/>
         <c:tickLblPos val="nextTo"/>
@@ -282,6 +319,7 @@
             <a:pPr>
               <a:defRPr sz="1200"/>
             </a:pPr>
+            <a:endParaRPr lang="en-US"/>
           </a:p>
         </c:txPr>
         <c:crossAx val="2140495176"/>
@@ -293,10 +331,13 @@
       </c:catAx>
       <c:valAx>
         <c:axId val="2140495176"/>
-        <c:scaling/>
+        <c:scaling>
+          <c:orientation val="minMax"/>
+        </c:scaling>
         <c:delete val="0"/>
         <c:axPos val="l"/>
         <c:majorGridlines/>
+        <c:numFmt formatCode="General" sourceLinked="1"/>
         <c:majorTickMark val="out"/>
         <c:minorTickMark val="none"/>
         <c:tickLblPos val="nextTo"/>
@@ -307,10 +348,12 @@
             <a:pPr>
               <a:defRPr sz="1200"/>
             </a:pPr>
+            <a:endParaRPr lang="en-US"/>
           </a:p>
         </c:txPr>
         <c:crossAx val="2118791784"/>
         <c:crosses val="autoZero"/>
+        <c:crossBetween val="between"/>
       </c:valAx>
     </c:plotArea>
     <c:plotVisOnly val="1"/>
@@ -334,14 +377,22 @@
 </file>
 
 <file path=ppt/charts/chart2.xml><?xml version="1.0" encoding="utf-8"?>
-<c:chartSpace xmlns:c="http://schemas.openxmlformats.org/drawingml/2006/chart" xmlns:a="http://schemas.openxmlformats.org/drawingml/2006/main" xmlns:r="http://schemas.openxmlformats.org/officeDocument/2006/relationships">
+<c:chartSpace xmlns:c="http://schemas.openxmlformats.org/drawingml/2006/chart" xmlns:a="http://schemas.openxmlformats.org/drawingml/2006/main" xmlns:r="http://schemas.openxmlformats.org/officeDocument/2006/relationships" xmlns:c16r2="http://schemas.microsoft.com/office/drawing/2015/06/chart">
   <c:date1904 val="0"/>
+  <c:lang val="en-GB"/>
+  <c:roundedCorners val="1"/>
+  <c:style val="2"/>
   <c:chart>
+    <c:title>
+      <c:overlay val="0"/>
+    </c:title>
     <c:autoTitleDeleted val="0"/>
     <c:plotArea>
+      <c:layout/>
       <c:barChart>
         <c:barDir val="bar"/>
         <c:grouping val="clustered"/>
+        <c:varyColors val="1"/>
         <c:ser>
           <c:idx val="0"/>
           <c:order val="0"/>
@@ -356,6 +407,7 @@
               </c:strCache>
             </c:strRef>
           </c:tx>
+          <c:invertIfNegative val="1"/>
           <c:cat>
             <c:strRef>
               <c:f>Sheet1!$A$2:$A$11</c:f>
@@ -410,7 +462,7 @@
                   <c:v>7.88</c:v>
                 </c:pt>
                 <c:pt idx="3">
-                  <c:v>8.47</c:v>
+                  <c:v>8.4700000000000006</c:v>
                 </c:pt>
                 <c:pt idx="4">
                   <c:v>8.99</c:v>
@@ -433,7 +485,21 @@
               </c:numCache>
             </c:numRef>
           </c:val>
+          <c:extLst>
+            <c:ext xmlns:c16="http://schemas.microsoft.com/office/drawing/2014/chart" uri="{C3380CC4-5D6E-409C-BE32-E72D297353CC}">
+              <c16:uniqueId val="{00000000-FE76-5642-BD96-C4DA54E1A2AB}"/>
+            </c:ext>
+          </c:extLst>
         </c:ser>
+        <c:dLbls>
+          <c:showLegendKey val="0"/>
+          <c:showVal val="0"/>
+          <c:showCatName val="0"/>
+          <c:showSerName val="0"/>
+          <c:showPercent val="0"/>
+          <c:showBubbleSize val="0"/>
+        </c:dLbls>
+        <c:gapWidth val="150"/>
         <c:axId val="-2068027336"/>
         <c:axId val="-2113994440"/>
       </c:barChart>
@@ -444,6 +510,7 @@
         </c:scaling>
         <c:delete val="0"/>
         <c:axPos val="l"/>
+        <c:numFmt formatCode="General" sourceLinked="0"/>
         <c:majorTickMark val="out"/>
         <c:minorTickMark val="none"/>
         <c:tickLblPos val="nextTo"/>
@@ -454,6 +521,7 @@
             <a:pPr>
               <a:defRPr sz="1200"/>
             </a:pPr>
+            <a:endParaRPr lang="en-US"/>
           </a:p>
         </c:txPr>
         <c:crossAx val="-2113994440"/>
@@ -465,10 +533,13 @@
       </c:catAx>
       <c:valAx>
         <c:axId val="-2113994440"/>
-        <c:scaling/>
+        <c:scaling>
+          <c:orientation val="minMax"/>
+        </c:scaling>
         <c:delete val="0"/>
         <c:axPos val="b"/>
         <c:majorGridlines/>
+        <c:numFmt formatCode="General" sourceLinked="1"/>
         <c:majorTickMark val="out"/>
         <c:minorTickMark val="none"/>
         <c:tickLblPos val="nextTo"/>
@@ -479,13 +550,17 @@
             <a:pPr>
               <a:defRPr sz="1200"/>
             </a:pPr>
+            <a:endParaRPr lang="en-US"/>
           </a:p>
         </c:txPr>
         <c:crossAx val="-2068027336"/>
         <c:crosses val="autoZero"/>
+        <c:crossBetween val="between"/>
       </c:valAx>
     </c:plotArea>
+    <c:plotVisOnly val="1"/>
     <c:dispBlanksAs val="gap"/>
+    <c:showDLblsOverMax val="1"/>
   </c:chart>
   <c:txPr>
     <a:bodyPr/>
@@ -541,10 +616,9 @@
           <a:lstStyle/>
           <a:p>
             <a:r>
-              <a:rPr lang="en-US" smtClean="0"/>
+              <a:rPr lang="en-US"/>
               <a:t>Click to edit Master title style</a:t>
             </a:r>
-            <a:endParaRPr lang="en-US"/>
           </a:p>
         </p:txBody>
       </p:sp>
@@ -660,10 +734,9 @@
           </a:lstStyle>
           <a:p>
             <a:r>
-              <a:rPr lang="en-US" smtClean="0"/>
+              <a:rPr lang="en-US"/>
               <a:t>Click to edit Master subtitle style</a:t>
             </a:r>
-            <a:endParaRPr lang="en-US"/>
           </a:p>
         </p:txBody>
       </p:sp>
@@ -684,7 +757,7 @@
           <a:p>
             <a:fld id="{5BCAD085-E8A6-8845-BD4E-CB4CCA059FC4}" type="datetimeFigureOut">
               <a:rPr lang="en-US" smtClean="0"/>
-              <a:t>1/27/13</a:t>
+              <a:t>6/12/26</a:t>
             </a:fld>
             <a:endParaRPr lang="en-US"/>
           </a:p>
@@ -778,10 +851,9 @@
           <a:lstStyle/>
           <a:p>
             <a:r>
-              <a:rPr lang="en-US" smtClean="0"/>
+              <a:rPr lang="en-US"/>
               <a:t>Click to edit Master title style</a:t>
             </a:r>
-            <a:endParaRPr lang="en-US"/>
           </a:p>
         </p:txBody>
       </p:sp>
@@ -802,38 +874,37 @@
           <a:p>
             <a:pPr lvl="0"/>
             <a:r>
-              <a:rPr lang="en-US" smtClean="0"/>
+              <a:rPr lang="en-US"/>
               <a:t>Click to edit Master text styles</a:t>
             </a:r>
           </a:p>
           <a:p>
             <a:pPr lvl="1"/>
             <a:r>
-              <a:rPr lang="en-US" smtClean="0"/>
+              <a:rPr lang="en-US"/>
               <a:t>Second level</a:t>
             </a:r>
           </a:p>
           <a:p>
             <a:pPr lvl="2"/>
             <a:r>
-              <a:rPr lang="en-US" smtClean="0"/>
+              <a:rPr lang="en-US"/>
               <a:t>Third level</a:t>
             </a:r>
           </a:p>
           <a:p>
             <a:pPr lvl="3"/>
             <a:r>
-              <a:rPr lang="en-US" smtClean="0"/>
+              <a:rPr lang="en-US"/>
               <a:t>Fourth level</a:t>
             </a:r>
           </a:p>
           <a:p>
             <a:pPr lvl="4"/>
             <a:r>
-              <a:rPr lang="en-US" smtClean="0"/>
+              <a:rPr lang="en-US"/>
               <a:t>Fifth level</a:t>
             </a:r>
-            <a:endParaRPr lang="en-US"/>
           </a:p>
         </p:txBody>
       </p:sp>
@@ -854,7 +925,7 @@
           <a:p>
             <a:fld id="{5BCAD085-E8A6-8845-BD4E-CB4CCA059FC4}" type="datetimeFigureOut">
               <a:rPr lang="en-US" smtClean="0"/>
-              <a:t>1/27/13</a:t>
+              <a:t>6/12/26</a:t>
             </a:fld>
             <a:endParaRPr lang="en-US"/>
           </a:p>
@@ -953,10 +1024,9 @@
           <a:lstStyle/>
           <a:p>
             <a:r>
-              <a:rPr lang="en-US" smtClean="0"/>
+              <a:rPr lang="en-US"/>
               <a:t>Click to edit Master title style</a:t>
             </a:r>
-            <a:endParaRPr lang="en-US"/>
           </a:p>
         </p:txBody>
       </p:sp>
@@ -982,38 +1052,37 @@
           <a:p>
             <a:pPr lvl="0"/>
             <a:r>
-              <a:rPr lang="en-US" smtClean="0"/>
+              <a:rPr lang="en-US"/>
               <a:t>Click to edit Master text styles</a:t>
             </a:r>
           </a:p>
           <a:p>
             <a:pPr lvl="1"/>
             <a:r>
-              <a:rPr lang="en-US" smtClean="0"/>
+              <a:rPr lang="en-US"/>
               <a:t>Second level</a:t>
             </a:r>
           </a:p>
           <a:p>
             <a:pPr lvl="2"/>
             <a:r>
-              <a:rPr lang="en-US" smtClean="0"/>
+              <a:rPr lang="en-US"/>
               <a:t>Third level</a:t>
             </a:r>
           </a:p>
           <a:p>
             <a:pPr lvl="3"/>
             <a:r>
-              <a:rPr lang="en-US" smtClean="0"/>
+              <a:rPr lang="en-US"/>
               <a:t>Fourth level</a:t>
             </a:r>
           </a:p>
           <a:p>
             <a:pPr lvl="4"/>
             <a:r>
-              <a:rPr lang="en-US" smtClean="0"/>
+              <a:rPr lang="en-US"/>
               <a:t>Fifth level</a:t>
             </a:r>
-            <a:endParaRPr lang="en-US"/>
           </a:p>
         </p:txBody>
       </p:sp>
@@ -1034,7 +1103,7 @@
           <a:p>
             <a:fld id="{5BCAD085-E8A6-8845-BD4E-CB4CCA059FC4}" type="datetimeFigureOut">
               <a:rPr lang="en-US" smtClean="0"/>
-              <a:t>1/27/13</a:t>
+              <a:t>6/12/26</a:t>
             </a:fld>
             <a:endParaRPr lang="en-US"/>
           </a:p>
@@ -1128,10 +1197,9 @@
           <a:lstStyle/>
           <a:p>
             <a:r>
-              <a:rPr lang="en-US" smtClean="0"/>
+              <a:rPr lang="en-US"/>
               <a:t>Click to edit Master title style</a:t>
             </a:r>
-            <a:endParaRPr lang="en-US"/>
           </a:p>
         </p:txBody>
       </p:sp>
@@ -1152,38 +1220,37 @@
           <a:p>
             <a:pPr lvl="0"/>
             <a:r>
-              <a:rPr lang="en-US" smtClean="0"/>
+              <a:rPr lang="en-US"/>
               <a:t>Click to edit Master text styles</a:t>
             </a:r>
           </a:p>
           <a:p>
             <a:pPr lvl="1"/>
             <a:r>
-              <a:rPr lang="en-US" smtClean="0"/>
+              <a:rPr lang="en-US"/>
               <a:t>Second level</a:t>
             </a:r>
           </a:p>
           <a:p>
             <a:pPr lvl="2"/>
             <a:r>
-              <a:rPr lang="en-US" smtClean="0"/>
+              <a:rPr lang="en-US"/>
               <a:t>Third level</a:t>
             </a:r>
           </a:p>
           <a:p>
             <a:pPr lvl="3"/>
             <a:r>
-              <a:rPr lang="en-US" smtClean="0"/>
+              <a:rPr lang="en-US"/>
               <a:t>Fourth level</a:t>
             </a:r>
           </a:p>
           <a:p>
             <a:pPr lvl="4"/>
             <a:r>
-              <a:rPr lang="en-US" smtClean="0"/>
+              <a:rPr lang="en-US"/>
               <a:t>Fifth level</a:t>
             </a:r>
-            <a:endParaRPr lang="en-US"/>
           </a:p>
         </p:txBody>
       </p:sp>
@@ -1204,7 +1271,7 @@
           <a:p>
             <a:fld id="{5BCAD085-E8A6-8845-BD4E-CB4CCA059FC4}" type="datetimeFigureOut">
               <a:rPr lang="en-US" smtClean="0"/>
-              <a:t>1/27/13</a:t>
+              <a:t>6/12/26</a:t>
             </a:fld>
             <a:endParaRPr lang="en-US"/>
           </a:p>
@@ -1307,10 +1374,9 @@
           </a:lstStyle>
           <a:p>
             <a:r>
-              <a:rPr lang="en-US" smtClean="0"/>
+              <a:rPr lang="en-US"/>
               <a:t>Click to edit Master title style</a:t>
             </a:r>
-            <a:endParaRPr lang="en-US"/>
           </a:p>
         </p:txBody>
       </p:sp>
@@ -1427,7 +1493,7 @@
           <a:p>
             <a:pPr lvl="0"/>
             <a:r>
-              <a:rPr lang="en-US" smtClean="0"/>
+              <a:rPr lang="en-US"/>
               <a:t>Click to edit Master text styles</a:t>
             </a:r>
           </a:p>
@@ -1450,7 +1516,7 @@
           <a:p>
             <a:fld id="{5BCAD085-E8A6-8845-BD4E-CB4CCA059FC4}" type="datetimeFigureOut">
               <a:rPr lang="en-US" smtClean="0"/>
-              <a:t>1/27/13</a:t>
+              <a:t>6/12/26</a:t>
             </a:fld>
             <a:endParaRPr lang="en-US"/>
           </a:p>
@@ -1544,10 +1610,9 @@
           <a:lstStyle/>
           <a:p>
             <a:r>
-              <a:rPr lang="en-US" smtClean="0"/>
+              <a:rPr lang="en-US"/>
               <a:t>Click to edit Master title style</a:t>
             </a:r>
-            <a:endParaRPr lang="en-US"/>
           </a:p>
         </p:txBody>
       </p:sp>
@@ -1601,38 +1666,37 @@
           <a:p>
             <a:pPr lvl="0"/>
             <a:r>
-              <a:rPr lang="en-US" smtClean="0"/>
+              <a:rPr lang="en-US"/>
               <a:t>Click to edit Master text styles</a:t>
             </a:r>
           </a:p>
           <a:p>
             <a:pPr lvl="1"/>
             <a:r>
-              <a:rPr lang="en-US" smtClean="0"/>
+              <a:rPr lang="en-US"/>
               <a:t>Second level</a:t>
             </a:r>
           </a:p>
           <a:p>
             <a:pPr lvl="2"/>
             <a:r>
-              <a:rPr lang="en-US" smtClean="0"/>
+              <a:rPr lang="en-US"/>
               <a:t>Third level</a:t>
             </a:r>
           </a:p>
           <a:p>
             <a:pPr lvl="3"/>
             <a:r>
-              <a:rPr lang="en-US" smtClean="0"/>
+              <a:rPr lang="en-US"/>
               <a:t>Fourth level</a:t>
             </a:r>
           </a:p>
           <a:p>
             <a:pPr lvl="4"/>
             <a:r>
-              <a:rPr lang="en-US" smtClean="0"/>
+              <a:rPr lang="en-US"/>
               <a:t>Fifth level</a:t>
             </a:r>
-            <a:endParaRPr lang="en-US"/>
           </a:p>
         </p:txBody>
       </p:sp>
@@ -1686,38 +1750,37 @@
           <a:p>
             <a:pPr lvl="0"/>
             <a:r>
-              <a:rPr lang="en-US" smtClean="0"/>
+              <a:rPr lang="en-US"/>
               <a:t>Click to edit Master text styles</a:t>
             </a:r>
           </a:p>
           <a:p>
             <a:pPr lvl="1"/>
             <a:r>
-              <a:rPr lang="en-US" smtClean="0"/>
+              <a:rPr lang="en-US"/>
               <a:t>Second level</a:t>
             </a:r>
           </a:p>
           <a:p>
             <a:pPr lvl="2"/>
             <a:r>
-              <a:rPr lang="en-US" smtClean="0"/>
+              <a:rPr lang="en-US"/>
               <a:t>Third level</a:t>
             </a:r>
           </a:p>
           <a:p>
             <a:pPr lvl="3"/>
             <a:r>
-              <a:rPr lang="en-US" smtClean="0"/>
+              <a:rPr lang="en-US"/>
               <a:t>Fourth level</a:t>
             </a:r>
           </a:p>
           <a:p>
             <a:pPr lvl="4"/>
             <a:r>
-              <a:rPr lang="en-US" smtClean="0"/>
+              <a:rPr lang="en-US"/>
               <a:t>Fifth level</a:t>
             </a:r>
-            <a:endParaRPr lang="en-US"/>
           </a:p>
         </p:txBody>
       </p:sp>
@@ -1738,7 +1801,7 @@
           <a:p>
             <a:fld id="{5BCAD085-E8A6-8845-BD4E-CB4CCA059FC4}" type="datetimeFigureOut">
               <a:rPr lang="en-US" smtClean="0"/>
-              <a:t>1/27/13</a:t>
+              <a:t>6/12/26</a:t>
             </a:fld>
             <a:endParaRPr lang="en-US"/>
           </a:p>
@@ -1836,10 +1899,9 @@
           </a:lstStyle>
           <a:p>
             <a:r>
-              <a:rPr lang="en-US" smtClean="0"/>
+              <a:rPr lang="en-US"/>
               <a:t>Click to edit Master title style</a:t>
             </a:r>
-            <a:endParaRPr lang="en-US"/>
           </a:p>
         </p:txBody>
       </p:sp>
@@ -1902,7 +1964,7 @@
           <a:p>
             <a:pPr lvl="0"/>
             <a:r>
-              <a:rPr lang="en-US" smtClean="0"/>
+              <a:rPr lang="en-US"/>
               <a:t>Click to edit Master text styles</a:t>
             </a:r>
           </a:p>
@@ -1958,38 +2020,37 @@
           <a:p>
             <a:pPr lvl="0"/>
             <a:r>
-              <a:rPr lang="en-US" smtClean="0"/>
+              <a:rPr lang="en-US"/>
               <a:t>Click to edit Master text styles</a:t>
             </a:r>
           </a:p>
           <a:p>
             <a:pPr lvl="1"/>
             <a:r>
-              <a:rPr lang="en-US" smtClean="0"/>
+              <a:rPr lang="en-US"/>
               <a:t>Second level</a:t>
             </a:r>
           </a:p>
           <a:p>
             <a:pPr lvl="2"/>
             <a:r>
-              <a:rPr lang="en-US" smtClean="0"/>
+              <a:rPr lang="en-US"/>
               <a:t>Third level</a:t>
             </a:r>
           </a:p>
           <a:p>
             <a:pPr lvl="3"/>
             <a:r>
-              <a:rPr lang="en-US" smtClean="0"/>
+              <a:rPr lang="en-US"/>
               <a:t>Fourth level</a:t>
             </a:r>
           </a:p>
           <a:p>
             <a:pPr lvl="4"/>
             <a:r>
-              <a:rPr lang="en-US" smtClean="0"/>
+              <a:rPr lang="en-US"/>
               <a:t>Fifth level</a:t>
             </a:r>
-            <a:endParaRPr lang="en-US"/>
           </a:p>
         </p:txBody>
       </p:sp>
@@ -2052,7 +2113,7 @@
           <a:p>
             <a:pPr lvl="0"/>
             <a:r>
-              <a:rPr lang="en-US" smtClean="0"/>
+              <a:rPr lang="en-US"/>
               <a:t>Click to edit Master text styles</a:t>
             </a:r>
           </a:p>
@@ -2108,38 +2169,37 @@
           <a:p>
             <a:pPr lvl="0"/>
             <a:r>
-              <a:rPr lang="en-US" smtClean="0"/>
+              <a:rPr lang="en-US"/>
               <a:t>Click to edit Master text styles</a:t>
             </a:r>
           </a:p>
           <a:p>
             <a:pPr lvl="1"/>
             <a:r>
-              <a:rPr lang="en-US" smtClean="0"/>
+              <a:rPr lang="en-US"/>
               <a:t>Second level</a:t>
             </a:r>
           </a:p>
           <a:p>
             <a:pPr lvl="2"/>
             <a:r>
-              <a:rPr lang="en-US" smtClean="0"/>
+              <a:rPr lang="en-US"/>
               <a:t>Third level</a:t>
             </a:r>
           </a:p>
           <a:p>
             <a:pPr lvl="3"/>
             <a:r>
-              <a:rPr lang="en-US" smtClean="0"/>
+              <a:rPr lang="en-US"/>
               <a:t>Fourth level</a:t>
             </a:r>
           </a:p>
           <a:p>
             <a:pPr lvl="4"/>
             <a:r>
-              <a:rPr lang="en-US" smtClean="0"/>
+              <a:rPr lang="en-US"/>
               <a:t>Fifth level</a:t>
             </a:r>
-            <a:endParaRPr lang="en-US"/>
           </a:p>
         </p:txBody>
       </p:sp>
@@ -2160,7 +2220,7 @@
           <a:p>
             <a:fld id="{5BCAD085-E8A6-8845-BD4E-CB4CCA059FC4}" type="datetimeFigureOut">
               <a:rPr lang="en-US" smtClean="0"/>
-              <a:t>1/27/13</a:t>
+              <a:t>6/12/26</a:t>
             </a:fld>
             <a:endParaRPr lang="en-US"/>
           </a:p>
@@ -2254,10 +2314,9 @@
           <a:lstStyle/>
           <a:p>
             <a:r>
-              <a:rPr lang="en-US" smtClean="0"/>
+              <a:rPr lang="en-US"/>
               <a:t>Click to edit Master title style</a:t>
             </a:r>
-            <a:endParaRPr lang="en-US"/>
           </a:p>
         </p:txBody>
       </p:sp>
@@ -2278,7 +2337,7 @@
           <a:p>
             <a:fld id="{5BCAD085-E8A6-8845-BD4E-CB4CCA059FC4}" type="datetimeFigureOut">
               <a:rPr lang="en-US" smtClean="0"/>
-              <a:t>1/27/13</a:t>
+              <a:t>6/12/26</a:t>
             </a:fld>
             <a:endParaRPr lang="en-US"/>
           </a:p>
@@ -2373,7 +2432,7 @@
           <a:p>
             <a:fld id="{5BCAD085-E8A6-8845-BD4E-CB4CCA059FC4}" type="datetimeFigureOut">
               <a:rPr lang="en-US" smtClean="0"/>
-              <a:t>1/27/13</a:t>
+              <a:t>6/12/26</a:t>
             </a:fld>
             <a:endParaRPr lang="en-US"/>
           </a:p>
@@ -2476,10 +2535,9 @@
           </a:lstStyle>
           <a:p>
             <a:r>
-              <a:rPr lang="en-US" smtClean="0"/>
+              <a:rPr lang="en-US"/>
               <a:t>Click to edit Master title style</a:t>
             </a:r>
-            <a:endParaRPr lang="en-US"/>
           </a:p>
         </p:txBody>
       </p:sp>
@@ -2533,38 +2591,37 @@
           <a:p>
             <a:pPr lvl="0"/>
             <a:r>
-              <a:rPr lang="en-US" smtClean="0"/>
+              <a:rPr lang="en-US"/>
               <a:t>Click to edit Master text styles</a:t>
             </a:r>
           </a:p>
           <a:p>
             <a:pPr lvl="1"/>
             <a:r>
-              <a:rPr lang="en-US" smtClean="0"/>
+              <a:rPr lang="en-US"/>
               <a:t>Second level</a:t>
             </a:r>
           </a:p>
           <a:p>
             <a:pPr lvl="2"/>
             <a:r>
-              <a:rPr lang="en-US" smtClean="0"/>
+              <a:rPr lang="en-US"/>
               <a:t>Third level</a:t>
             </a:r>
           </a:p>
           <a:p>
             <a:pPr lvl="3"/>
             <a:r>
-              <a:rPr lang="en-US" smtClean="0"/>
+              <a:rPr lang="en-US"/>
               <a:t>Fourth level</a:t>
             </a:r>
           </a:p>
           <a:p>
             <a:pPr lvl="4"/>
             <a:r>
-              <a:rPr lang="en-US" smtClean="0"/>
+              <a:rPr lang="en-US"/>
               <a:t>Fifth level</a:t>
             </a:r>
-            <a:endParaRPr lang="en-US"/>
           </a:p>
         </p:txBody>
       </p:sp>
@@ -2627,7 +2684,7 @@
           <a:p>
             <a:pPr lvl="0"/>
             <a:r>
-              <a:rPr lang="en-US" smtClean="0"/>
+              <a:rPr lang="en-US"/>
               <a:t>Click to edit Master text styles</a:t>
             </a:r>
           </a:p>
@@ -2650,7 +2707,7 @@
           <a:p>
             <a:fld id="{5BCAD085-E8A6-8845-BD4E-CB4CCA059FC4}" type="datetimeFigureOut">
               <a:rPr lang="en-US" smtClean="0"/>
-              <a:t>1/27/13</a:t>
+              <a:t>6/12/26</a:t>
             </a:fld>
             <a:endParaRPr lang="en-US"/>
           </a:p>
@@ -2753,10 +2810,9 @@
           </a:lstStyle>
           <a:p>
             <a:r>
-              <a:rPr lang="en-US" smtClean="0"/>
+              <a:rPr lang="en-US"/>
               <a:t>Click to edit Master title style</a:t>
             </a:r>
-            <a:endParaRPr lang="en-US"/>
           </a:p>
         </p:txBody>
       </p:sp>
@@ -2880,7 +2936,7 @@
           <a:p>
             <a:pPr lvl="0"/>
             <a:r>
-              <a:rPr lang="en-US" smtClean="0"/>
+              <a:rPr lang="en-US"/>
               <a:t>Click to edit Master text styles</a:t>
             </a:r>
           </a:p>
@@ -2903,7 +2959,7 @@
           <a:p>
             <a:fld id="{5BCAD085-E8A6-8845-BD4E-CB4CCA059FC4}" type="datetimeFigureOut">
               <a:rPr lang="en-US" smtClean="0"/>
-              <a:t>1/27/13</a:t>
+              <a:t>6/12/26</a:t>
             </a:fld>
             <a:endParaRPr lang="en-US"/>
           </a:p>
@@ -3012,10 +3068,9 @@
           <a:lstStyle/>
           <a:p>
             <a:r>
-              <a:rPr lang="en-US" smtClean="0"/>
+              <a:rPr lang="en-US"/>
               <a:t>Click to edit Master title style</a:t>
             </a:r>
-            <a:endParaRPr lang="en-US"/>
           </a:p>
         </p:txBody>
       </p:sp>
@@ -3046,38 +3101,37 @@
           <a:p>
             <a:pPr lvl="0"/>
             <a:r>
-              <a:rPr lang="en-US" smtClean="0"/>
+              <a:rPr lang="en-US"/>
               <a:t>Click to edit Master text styles</a:t>
             </a:r>
           </a:p>
           <a:p>
             <a:pPr lvl="1"/>
             <a:r>
-              <a:rPr lang="en-US" smtClean="0"/>
+              <a:rPr lang="en-US"/>
               <a:t>Second level</a:t>
             </a:r>
           </a:p>
           <a:p>
             <a:pPr lvl="2"/>
             <a:r>
-              <a:rPr lang="en-US" smtClean="0"/>
+              <a:rPr lang="en-US"/>
               <a:t>Third level</a:t>
             </a:r>
           </a:p>
           <a:p>
             <a:pPr lvl="3"/>
             <a:r>
-              <a:rPr lang="en-US" smtClean="0"/>
+              <a:rPr lang="en-US"/>
               <a:t>Fourth level</a:t>
             </a:r>
           </a:p>
           <a:p>
             <a:pPr lvl="4"/>
             <a:r>
-              <a:rPr lang="en-US" smtClean="0"/>
+              <a:rPr lang="en-US"/>
               <a:t>Fifth level</a:t>
             </a:r>
-            <a:endParaRPr lang="en-US"/>
           </a:p>
         </p:txBody>
       </p:sp>
@@ -3116,7 +3170,7 @@
           <a:p>
             <a:fld id="{5BCAD085-E8A6-8845-BD4E-CB4CCA059FC4}" type="datetimeFigureOut">
               <a:rPr lang="en-US" smtClean="0"/>
-              <a:t>1/27/13</a:t>
+              <a:t>6/12/26</a:t>
             </a:fld>
             <a:endParaRPr lang="en-US"/>
           </a:p>
@@ -3475,7 +3529,7 @@
 </file>
 
 <file path=ppt/slides/slide1.xml><?xml version="1.0" encoding="utf-8"?>
-<p:sld xmlns:a="http://schemas.openxmlformats.org/drawingml/2006/main" xmlns:p="http://schemas.openxmlformats.org/presentationml/2006/main" xmlns:r="http://schemas.openxmlformats.org/officeDocument/2006/relationships">
+<p:sld xmlns:a="http://schemas.openxmlformats.org/drawingml/2006/main" xmlns:r="http://schemas.openxmlformats.org/officeDocument/2006/relationships" xmlns:p="http://schemas.openxmlformats.org/presentationml/2006/main">
   <p:cSld>
     <p:spTree>
       <p:nvGrpSpPr>
@@ -3483,7 +3537,14 @@
         <p:cNvGrpSpPr/>
         <p:nvPr/>
       </p:nvGrpSpPr>
-      <p:grpSpPr/>
+      <p:grpSpPr>
+        <a:xfrm>
+          <a:off x="0" y="0"/>
+          <a:ext cx="0" cy="0"/>
+          <a:chOff x="0" y="0"/>
+          <a:chExt cx="0" cy="0"/>
+        </a:xfrm>
+      </p:grpSpPr>
       <p:sp>
         <p:nvSpPr>
           <p:cNvPr id="2" name="TextBox 1"/>
@@ -3595,7 +3656,7 @@
 </file>
 
 <file path=ppt/slides/slide10.xml><?xml version="1.0" encoding="utf-8"?>
-<p:sld xmlns:a="http://schemas.openxmlformats.org/drawingml/2006/main" xmlns:p="http://schemas.openxmlformats.org/presentationml/2006/main" xmlns:r="http://schemas.openxmlformats.org/officeDocument/2006/relationships">
+<p:sld xmlns:a="http://schemas.openxmlformats.org/drawingml/2006/main" xmlns:r="http://schemas.openxmlformats.org/officeDocument/2006/relationships" xmlns:p="http://schemas.openxmlformats.org/presentationml/2006/main">
   <p:cSld>
     <p:spTree>
       <p:nvGrpSpPr>
@@ -3603,7 +3664,14 @@
         <p:cNvGrpSpPr/>
         <p:nvPr/>
       </p:nvGrpSpPr>
-      <p:grpSpPr/>
+      <p:grpSpPr>
+        <a:xfrm>
+          <a:off x="0" y="0"/>
+          <a:ext cx="0" cy="0"/>
+          <a:chOff x="0" y="0"/>
+          <a:chExt cx="0" cy="0"/>
+        </a:xfrm>
+      </p:grpSpPr>
       <p:sp>
         <p:nvSpPr>
           <p:cNvPr id="2" name="TextBox 1"/>
@@ -3724,9 +3792,27 @@
                 <a:tableStyleId>{5C22544A-7EE6-4342-B048-85BDC9FD1C3A}</a:tableStyleId>
               </a:tblPr>
               <a:tblGrid>
-                <a:gridCol w="2560320"/>
-                <a:gridCol w="3840480"/>
-                <a:gridCol w="4297680"/>
+                <a:gridCol w="2560320">
+                  <a:extLst>
+                    <a:ext uri="{9D8B030D-6E8A-4147-A177-3AD203B41FA5}">
+                      <a16:colId xmlns:a16="http://schemas.microsoft.com/office/drawing/2014/main" val="20000"/>
+                    </a:ext>
+                  </a:extLst>
+                </a:gridCol>
+                <a:gridCol w="3840480">
+                  <a:extLst>
+                    <a:ext uri="{9D8B030D-6E8A-4147-A177-3AD203B41FA5}">
+                      <a16:colId xmlns:a16="http://schemas.microsoft.com/office/drawing/2014/main" val="20001"/>
+                    </a:ext>
+                  </a:extLst>
+                </a:gridCol>
+                <a:gridCol w="4297680">
+                  <a:extLst>
+                    <a:ext uri="{9D8B030D-6E8A-4147-A177-3AD203B41FA5}">
+                      <a16:colId xmlns:a16="http://schemas.microsoft.com/office/drawing/2014/main" val="20002"/>
+                    </a:ext>
+                  </a:extLst>
+                </a:gridCol>
               </a:tblGrid>
               <a:tr h="365760">
                 <a:tc>
@@ -3768,6 +3854,11 @@
                   </a:txBody>
                   <a:tcPr/>
                 </a:tc>
+                <a:extLst>
+                  <a:ext uri="{0D108BD9-81ED-4DB2-BD59-A6C34878D82A}">
+                    <a16:rowId xmlns:a16="http://schemas.microsoft.com/office/drawing/2014/main" val="10000"/>
+                  </a:ext>
+                </a:extLst>
               </a:tr>
               <a:tr h="365760">
                 <a:tc>
@@ -3809,6 +3900,11 @@
                   </a:txBody>
                   <a:tcPr/>
                 </a:tc>
+                <a:extLst>
+                  <a:ext uri="{0D108BD9-81ED-4DB2-BD59-A6C34878D82A}">
+                    <a16:rowId xmlns:a16="http://schemas.microsoft.com/office/drawing/2014/main" val="10001"/>
+                  </a:ext>
+                </a:extLst>
               </a:tr>
               <a:tr h="365760">
                 <a:tc>
@@ -3850,6 +3946,11 @@
                   </a:txBody>
                   <a:tcPr/>
                 </a:tc>
+                <a:extLst>
+                  <a:ext uri="{0D108BD9-81ED-4DB2-BD59-A6C34878D82A}">
+                    <a16:rowId xmlns:a16="http://schemas.microsoft.com/office/drawing/2014/main" val="10002"/>
+                  </a:ext>
+                </a:extLst>
               </a:tr>
               <a:tr h="365760">
                 <a:tc>
@@ -3891,6 +3992,11 @@
                   </a:txBody>
                   <a:tcPr/>
                 </a:tc>
+                <a:extLst>
+                  <a:ext uri="{0D108BD9-81ED-4DB2-BD59-A6C34878D82A}">
+                    <a16:rowId xmlns:a16="http://schemas.microsoft.com/office/drawing/2014/main" val="10003"/>
+                  </a:ext>
+                </a:extLst>
               </a:tr>
             </a:tbl>
           </a:graphicData>
@@ -3905,7 +4011,7 @@
 </file>
 
 <file path=ppt/slides/slide11.xml><?xml version="1.0" encoding="utf-8"?>
-<p:sld xmlns:a="http://schemas.openxmlformats.org/drawingml/2006/main" xmlns:p="http://schemas.openxmlformats.org/presentationml/2006/main" xmlns:r="http://schemas.openxmlformats.org/officeDocument/2006/relationships">
+<p:sld xmlns:a="http://schemas.openxmlformats.org/drawingml/2006/main" xmlns:r="http://schemas.openxmlformats.org/officeDocument/2006/relationships" xmlns:p="http://schemas.openxmlformats.org/presentationml/2006/main">
   <p:cSld>
     <p:spTree>
       <p:nvGrpSpPr>
@@ -3913,7 +4019,14 @@
         <p:cNvGrpSpPr/>
         <p:nvPr/>
       </p:nvGrpSpPr>
-      <p:grpSpPr/>
+      <p:grpSpPr>
+        <a:xfrm>
+          <a:off x="0" y="0"/>
+          <a:ext cx="0" cy="0"/>
+          <a:chOff x="0" y="0"/>
+          <a:chExt cx="0" cy="0"/>
+        </a:xfrm>
+      </p:grpSpPr>
       <p:sp>
         <p:nvSpPr>
           <p:cNvPr id="2" name="TextBox 1"/>
@@ -4019,14 +4132,11 @@
                 <a:spcPts val="800"/>
               </a:spcAft>
             </a:pPr>
-            <a:r>
-              <a:rPr sz="2400">
-                <a:solidFill>
-                  <a:srgbClr val="212121"/>
-                </a:solidFill>
-              </a:rPr>
-              <a:t/>
-            </a:r>
+            <a:endParaRPr sz="2400">
+              <a:solidFill>
+                <a:srgbClr val="212121"/>
+              </a:solidFill>
+            </a:endParaRPr>
           </a:p>
           <a:p>
             <a:pPr>
@@ -4054,7 +4164,7 @@
 </file>
 
 <file path=ppt/slides/slide12.xml><?xml version="1.0" encoding="utf-8"?>
-<p:sld xmlns:a="http://schemas.openxmlformats.org/drawingml/2006/main" xmlns:p="http://schemas.openxmlformats.org/presentationml/2006/main" xmlns:r="http://schemas.openxmlformats.org/officeDocument/2006/relationships">
+<p:sld xmlns:a="http://schemas.openxmlformats.org/drawingml/2006/main" xmlns:r="http://schemas.openxmlformats.org/officeDocument/2006/relationships" xmlns:p="http://schemas.openxmlformats.org/presentationml/2006/main">
   <p:cSld>
     <p:spTree>
       <p:nvGrpSpPr>
@@ -4062,7 +4172,14 @@
         <p:cNvGrpSpPr/>
         <p:nvPr/>
       </p:nvGrpSpPr>
-      <p:grpSpPr/>
+      <p:grpSpPr>
+        <a:xfrm>
+          <a:off x="0" y="0"/>
+          <a:ext cx="0" cy="0"/>
+          <a:chOff x="0" y="0"/>
+          <a:chExt cx="0" cy="0"/>
+        </a:xfrm>
+      </p:grpSpPr>
       <p:sp>
         <p:nvSpPr>
           <p:cNvPr id="2" name="TextBox 1"/>
@@ -4110,7 +4227,7 @@
         </p:xfrm>
         <a:graphic>
           <a:graphicData uri="http://schemas.openxmlformats.org/drawingml/2006/chart">
-            <c:chart xmlns:c="http://schemas.openxmlformats.org/drawingml/2006/chart" r:id="rId2"/>
+            <c:chart xmlns:c="http://schemas.openxmlformats.org/drawingml/2006/chart" xmlns:r="http://schemas.openxmlformats.org/officeDocument/2006/relationships" r:id="rId2"/>
           </a:graphicData>
         </a:graphic>
       </p:graphicFrame>
@@ -4161,7 +4278,7 @@
 </file>
 
 <file path=ppt/slides/slide13.xml><?xml version="1.0" encoding="utf-8"?>
-<p:sld xmlns:a="http://schemas.openxmlformats.org/drawingml/2006/main" xmlns:p="http://schemas.openxmlformats.org/presentationml/2006/main" xmlns:r="http://schemas.openxmlformats.org/officeDocument/2006/relationships">
+<p:sld xmlns:a="http://schemas.openxmlformats.org/drawingml/2006/main" xmlns:r="http://schemas.openxmlformats.org/officeDocument/2006/relationships" xmlns:p="http://schemas.openxmlformats.org/presentationml/2006/main">
   <p:cSld>
     <p:spTree>
       <p:nvGrpSpPr>
@@ -4169,7 +4286,14 @@
         <p:cNvGrpSpPr/>
         <p:nvPr/>
       </p:nvGrpSpPr>
-      <p:grpSpPr/>
+      <p:grpSpPr>
+        <a:xfrm>
+          <a:off x="0" y="0"/>
+          <a:ext cx="0" cy="0"/>
+          <a:chOff x="0" y="0"/>
+          <a:chExt cx="0" cy="0"/>
+        </a:xfrm>
+      </p:grpSpPr>
       <p:sp>
         <p:nvSpPr>
           <p:cNvPr id="2" name="TextBox 1"/>
@@ -4217,7 +4341,7 @@
         </p:xfrm>
         <a:graphic>
           <a:graphicData uri="http://schemas.openxmlformats.org/drawingml/2006/chart">
-            <c:chart xmlns:c="http://schemas.openxmlformats.org/drawingml/2006/chart" r:id="rId2"/>
+            <c:chart xmlns:c="http://schemas.openxmlformats.org/drawingml/2006/chart" xmlns:r="http://schemas.openxmlformats.org/officeDocument/2006/relationships" r:id="rId2"/>
           </a:graphicData>
         </a:graphic>
       </p:graphicFrame>
@@ -4268,7 +4392,7 @@
 </file>
 
 <file path=ppt/slides/slide14.xml><?xml version="1.0" encoding="utf-8"?>
-<p:sld xmlns:a="http://schemas.openxmlformats.org/drawingml/2006/main" xmlns:p="http://schemas.openxmlformats.org/presentationml/2006/main" xmlns:r="http://schemas.openxmlformats.org/officeDocument/2006/relationships">
+<p:sld xmlns:a="http://schemas.openxmlformats.org/drawingml/2006/main" xmlns:r="http://schemas.openxmlformats.org/officeDocument/2006/relationships" xmlns:p="http://schemas.openxmlformats.org/presentationml/2006/main">
   <p:cSld>
     <p:spTree>
       <p:nvGrpSpPr>
@@ -4276,7 +4400,14 @@
         <p:cNvGrpSpPr/>
         <p:nvPr/>
       </p:nvGrpSpPr>
-      <p:grpSpPr/>
+      <p:grpSpPr>
+        <a:xfrm>
+          <a:off x="0" y="0"/>
+          <a:ext cx="0" cy="0"/>
+          <a:chOff x="0" y="0"/>
+          <a:chExt cx="0" cy="0"/>
+        </a:xfrm>
+      </p:grpSpPr>
       <p:sp>
         <p:nvSpPr>
           <p:cNvPr id="2" name="TextBox 1"/>
@@ -4367,14 +4498,11 @@
                 <a:spcPts val="800"/>
               </a:spcAft>
             </a:pPr>
-            <a:r>
-              <a:rPr sz="2400">
-                <a:solidFill>
-                  <a:srgbClr val="212121"/>
-                </a:solidFill>
-              </a:rPr>
-              <a:t/>
-            </a:r>
+            <a:endParaRPr sz="2400">
+              <a:solidFill>
+                <a:srgbClr val="212121"/>
+              </a:solidFill>
+            </a:endParaRPr>
           </a:p>
           <a:p>
             <a:pPr>
@@ -4432,7 +4560,7 @@
 </file>
 
 <file path=ppt/slides/slide15.xml><?xml version="1.0" encoding="utf-8"?>
-<p:sld xmlns:a="http://schemas.openxmlformats.org/drawingml/2006/main" xmlns:p="http://schemas.openxmlformats.org/presentationml/2006/main" xmlns:r="http://schemas.openxmlformats.org/officeDocument/2006/relationships">
+<p:sld xmlns:a="http://schemas.openxmlformats.org/drawingml/2006/main" xmlns:r="http://schemas.openxmlformats.org/officeDocument/2006/relationships" xmlns:p="http://schemas.openxmlformats.org/presentationml/2006/main">
   <p:cSld>
     <p:spTree>
       <p:nvGrpSpPr>
@@ -4440,7 +4568,14 @@
         <p:cNvGrpSpPr/>
         <p:nvPr/>
       </p:nvGrpSpPr>
-      <p:grpSpPr/>
+      <p:grpSpPr>
+        <a:xfrm>
+          <a:off x="0" y="0"/>
+          <a:ext cx="0" cy="0"/>
+          <a:chOff x="0" y="0"/>
+          <a:chExt cx="0" cy="0"/>
+        </a:xfrm>
+      </p:grpSpPr>
       <p:sp>
         <p:nvSpPr>
           <p:cNvPr id="2" name="TextBox 1"/>
@@ -4663,7 +4798,7 @@
 </file>
 
 <file path=ppt/slides/slide16.xml><?xml version="1.0" encoding="utf-8"?>
-<p:sld xmlns:a="http://schemas.openxmlformats.org/drawingml/2006/main" xmlns:p="http://schemas.openxmlformats.org/presentationml/2006/main" xmlns:r="http://schemas.openxmlformats.org/officeDocument/2006/relationships">
+<p:sld xmlns:a="http://schemas.openxmlformats.org/drawingml/2006/main" xmlns:r="http://schemas.openxmlformats.org/officeDocument/2006/relationships" xmlns:p="http://schemas.openxmlformats.org/presentationml/2006/main">
   <p:cSld>
     <p:spTree>
       <p:nvGrpSpPr>
@@ -4671,7 +4806,14 @@
         <p:cNvGrpSpPr/>
         <p:nvPr/>
       </p:nvGrpSpPr>
-      <p:grpSpPr/>
+      <p:grpSpPr>
+        <a:xfrm>
+          <a:off x="0" y="0"/>
+          <a:ext cx="0" cy="0"/>
+          <a:chOff x="0" y="0"/>
+          <a:chExt cx="0" cy="0"/>
+        </a:xfrm>
+      </p:grpSpPr>
       <p:sp>
         <p:nvSpPr>
           <p:cNvPr id="2" name="TextBox 1"/>
@@ -4762,14 +4904,11 @@
                 <a:spcPts val="800"/>
               </a:spcAft>
             </a:pPr>
-            <a:r>
-              <a:rPr sz="2600">
-                <a:solidFill>
-                  <a:srgbClr val="212121"/>
-                </a:solidFill>
-              </a:rPr>
-              <a:t/>
-            </a:r>
+            <a:endParaRPr sz="2600">
+              <a:solidFill>
+                <a:srgbClr val="212121"/>
+              </a:solidFill>
+            </a:endParaRPr>
           </a:p>
           <a:p>
             <a:pPr>
@@ -4797,7 +4936,7 @@
 </file>
 
 <file path=ppt/slides/slide17.xml><?xml version="1.0" encoding="utf-8"?>
-<p:sld xmlns:a="http://schemas.openxmlformats.org/drawingml/2006/main" xmlns:p="http://schemas.openxmlformats.org/presentationml/2006/main" xmlns:r="http://schemas.openxmlformats.org/officeDocument/2006/relationships">
+<p:sld xmlns:a="http://schemas.openxmlformats.org/drawingml/2006/main" xmlns:r="http://schemas.openxmlformats.org/officeDocument/2006/relationships" xmlns:p="http://schemas.openxmlformats.org/presentationml/2006/main">
   <p:cSld>
     <p:spTree>
       <p:nvGrpSpPr>
@@ -4805,7 +4944,14 @@
         <p:cNvGrpSpPr/>
         <p:nvPr/>
       </p:nvGrpSpPr>
-      <p:grpSpPr/>
+      <p:grpSpPr>
+        <a:xfrm>
+          <a:off x="0" y="0"/>
+          <a:ext cx="0" cy="0"/>
+          <a:chOff x="0" y="0"/>
+          <a:chExt cx="0" cy="0"/>
+        </a:xfrm>
+      </p:grpSpPr>
       <p:sp>
         <p:nvSpPr>
           <p:cNvPr id="2" name="TextBox 1"/>
@@ -4911,27 +5057,24 @@
                 <a:spcPts val="800"/>
               </a:spcAft>
             </a:pPr>
+            <a:endParaRPr sz="2400">
+              <a:solidFill>
+                <a:srgbClr val="212121"/>
+              </a:solidFill>
+            </a:endParaRPr>
+          </a:p>
+          <a:p>
+            <a:pPr>
+              <a:spcAft>
+                <a:spcPts val="800"/>
+              </a:spcAft>
+            </a:pPr>
             <a:r>
               <a:rPr sz="2400">
                 <a:solidFill>
                   <a:srgbClr val="212121"/>
                 </a:solidFill>
               </a:rPr>
-              <a:t/>
-            </a:r>
-          </a:p>
-          <a:p>
-            <a:pPr>
-              <a:spcAft>
-                <a:spcPts val="800"/>
-              </a:spcAft>
-            </a:pPr>
-            <a:r>
-              <a:rPr sz="2400">
-                <a:solidFill>
-                  <a:srgbClr val="212121"/>
-                </a:solidFill>
-              </a:rPr>
               <a:t>“Program testing can be used to show the presence of bugs, but never to show their absence.” — E. W. Dijkstra, 1970</a:t>
             </a:r>
           </a:p>
@@ -4941,14 +5084,11 @@
                 <a:spcPts val="800"/>
               </a:spcAft>
             </a:pPr>
-            <a:r>
-              <a:rPr sz="2400">
-                <a:solidFill>
-                  <a:srgbClr val="212121"/>
-                </a:solidFill>
-              </a:rPr>
-              <a:t/>
-            </a:r>
+            <a:endParaRPr sz="2400">
+              <a:solidFill>
+                <a:srgbClr val="212121"/>
+              </a:solidFill>
+            </a:endParaRPr>
           </a:p>
           <a:p>
             <a:pPr>
@@ -4976,7 +5116,7 @@
 </file>
 
 <file path=ppt/slides/slide18.xml><?xml version="1.0" encoding="utf-8"?>
-<p:sld xmlns:a="http://schemas.openxmlformats.org/drawingml/2006/main" xmlns:p="http://schemas.openxmlformats.org/presentationml/2006/main" xmlns:r="http://schemas.openxmlformats.org/officeDocument/2006/relationships">
+<p:sld xmlns:a="http://schemas.openxmlformats.org/drawingml/2006/main" xmlns:r="http://schemas.openxmlformats.org/officeDocument/2006/relationships" xmlns:p="http://schemas.openxmlformats.org/presentationml/2006/main">
   <p:cSld>
     <p:spTree>
       <p:nvGrpSpPr>
@@ -4984,7 +5124,14 @@
         <p:cNvGrpSpPr/>
         <p:nvPr/>
       </p:nvGrpSpPr>
-      <p:grpSpPr/>
+      <p:grpSpPr>
+        <a:xfrm>
+          <a:off x="0" y="0"/>
+          <a:ext cx="0" cy="0"/>
+          <a:chOff x="0" y="0"/>
+          <a:chExt cx="0" cy="0"/>
+        </a:xfrm>
+      </p:grpSpPr>
       <p:sp>
         <p:nvSpPr>
           <p:cNvPr id="2" name="TextBox 1"/>
@@ -5060,27 +5207,24 @@
                 <a:spcPts val="800"/>
               </a:spcAft>
             </a:pPr>
+            <a:endParaRPr sz="2600">
+              <a:solidFill>
+                <a:srgbClr val="212121"/>
+              </a:solidFill>
+            </a:endParaRPr>
+          </a:p>
+          <a:p>
+            <a:pPr>
+              <a:spcAft>
+                <a:spcPts val="800"/>
+              </a:spcAft>
+            </a:pPr>
             <a:r>
               <a:rPr sz="2600">
                 <a:solidFill>
                   <a:srgbClr val="212121"/>
                 </a:solidFill>
               </a:rPr>
-              <a:t/>
-            </a:r>
-          </a:p>
-          <a:p>
-            <a:pPr>
-              <a:spcAft>
-                <a:spcPts val="800"/>
-              </a:spcAft>
-            </a:pPr>
-            <a:r>
-              <a:rPr sz="2600">
-                <a:solidFill>
-                  <a:srgbClr val="212121"/>
-                </a:solidFill>
-              </a:rPr>
               <a:t>Can the program reach a state where the property fails?</a:t>
             </a:r>
           </a:p>
@@ -5090,14 +5234,11 @@
                 <a:spcPts val="800"/>
               </a:spcAft>
             </a:pPr>
-            <a:r>
-              <a:rPr sz="2600">
-                <a:solidFill>
-                  <a:srgbClr val="212121"/>
-                </a:solidFill>
-              </a:rPr>
-              <a:t/>
-            </a:r>
+            <a:endParaRPr sz="2600">
+              <a:solidFill>
+                <a:srgbClr val="212121"/>
+              </a:solidFill>
+            </a:endParaRPr>
           </a:p>
           <a:p>
             <a:pPr lvl="1">
@@ -5135,14 +5276,11 @@
                 <a:spcPts val="800"/>
               </a:spcAft>
             </a:pPr>
-            <a:r>
-              <a:rPr sz="2600">
-                <a:solidFill>
-                  <a:srgbClr val="212121"/>
-                </a:solidFill>
-              </a:rPr>
-              <a:t/>
-            </a:r>
+            <a:endParaRPr sz="2400">
+              <a:solidFill>
+                <a:srgbClr val="212121"/>
+              </a:solidFill>
+            </a:endParaRPr>
           </a:p>
           <a:p>
             <a:pPr>
@@ -5170,7 +5308,7 @@
 </file>
 
 <file path=ppt/slides/slide19.xml><?xml version="1.0" encoding="utf-8"?>
-<p:sld xmlns:a="http://schemas.openxmlformats.org/drawingml/2006/main" xmlns:p="http://schemas.openxmlformats.org/presentationml/2006/main" xmlns:r="http://schemas.openxmlformats.org/officeDocument/2006/relationships">
+<p:sld xmlns:a="http://schemas.openxmlformats.org/drawingml/2006/main" xmlns:r="http://schemas.openxmlformats.org/officeDocument/2006/relationships" xmlns:p="http://schemas.openxmlformats.org/presentationml/2006/main">
   <p:cSld>
     <p:spTree>
       <p:nvGrpSpPr>
@@ -5178,7 +5316,14 @@
         <p:cNvGrpSpPr/>
         <p:nvPr/>
       </p:nvGrpSpPr>
-      <p:grpSpPr/>
+      <p:grpSpPr>
+        <a:xfrm>
+          <a:off x="0" y="0"/>
+          <a:ext cx="0" cy="0"/>
+          <a:chOff x="0" y="0"/>
+          <a:chExt cx="0" cy="0"/>
+        </a:xfrm>
+      </p:grpSpPr>
       <p:sp>
         <p:nvSpPr>
           <p:cNvPr id="2" name="TextBox 1"/>
@@ -5299,14 +5444,11 @@
                 <a:spcPts val="800"/>
               </a:spcAft>
             </a:pPr>
-            <a:r>
-              <a:rPr sz="2400">
-                <a:solidFill>
-                  <a:srgbClr val="212121"/>
-                </a:solidFill>
-              </a:rPr>
-              <a:t/>
-            </a:r>
+            <a:endParaRPr sz="2200">
+              <a:solidFill>
+                <a:srgbClr val="212121"/>
+              </a:solidFill>
+            </a:endParaRPr>
           </a:p>
           <a:p>
             <a:pPr>
@@ -5364,7 +5506,7 @@
 </file>
 
 <file path=ppt/slides/slide2.xml><?xml version="1.0" encoding="utf-8"?>
-<p:sld xmlns:a="http://schemas.openxmlformats.org/drawingml/2006/main" xmlns:p="http://schemas.openxmlformats.org/presentationml/2006/main" xmlns:r="http://schemas.openxmlformats.org/officeDocument/2006/relationships">
+<p:sld xmlns:a="http://schemas.openxmlformats.org/drawingml/2006/main" xmlns:r="http://schemas.openxmlformats.org/officeDocument/2006/relationships" xmlns:p="http://schemas.openxmlformats.org/presentationml/2006/main">
   <p:cSld>
     <p:spTree>
       <p:nvGrpSpPr>
@@ -5372,7 +5514,14 @@
         <p:cNvGrpSpPr/>
         <p:nvPr/>
       </p:nvGrpSpPr>
-      <p:grpSpPr/>
+      <p:grpSpPr>
+        <a:xfrm>
+          <a:off x="0" y="0"/>
+          <a:ext cx="0" cy="0"/>
+          <a:chOff x="0" y="0"/>
+          <a:chExt cx="0" cy="0"/>
+        </a:xfrm>
+      </p:grpSpPr>
       <p:sp>
         <p:nvSpPr>
           <p:cNvPr id="2" name="TextBox 1"/>
@@ -5416,7 +5565,7 @@
         </p:nvGraphicFramePr>
         <p:xfrm>
           <a:off x="731520" y="1371600"/>
-          <a:ext cx="10698480" cy="3657600"/>
+          <a:ext cx="10698480" cy="3962400"/>
         </p:xfrm>
         <a:graphic>
           <a:graphicData uri="http://schemas.openxmlformats.org/drawingml/2006/table">
@@ -5425,8 +5574,20 @@
                 <a:tableStyleId>{5C22544A-7EE6-4342-B048-85BDC9FD1C3A}</a:tableStyleId>
               </a:tblPr>
               <a:tblGrid>
-                <a:gridCol w="1463040"/>
-                <a:gridCol w="9235440"/>
+                <a:gridCol w="1463040">
+                  <a:extLst>
+                    <a:ext uri="{9D8B030D-6E8A-4147-A177-3AD203B41FA5}">
+                      <a16:colId xmlns:a16="http://schemas.microsoft.com/office/drawing/2014/main" val="20000"/>
+                    </a:ext>
+                  </a:extLst>
+                </a:gridCol>
+                <a:gridCol w="9235440">
+                  <a:extLst>
+                    <a:ext uri="{9D8B030D-6E8A-4147-A177-3AD203B41FA5}">
+                      <a16:colId xmlns:a16="http://schemas.microsoft.com/office/drawing/2014/main" val="20001"/>
+                    </a:ext>
+                  </a:extLst>
+                </a:gridCol>
               </a:tblGrid>
               <a:tr h="365760">
                 <a:tc>
@@ -5455,6 +5616,11 @@
                   </a:txBody>
                   <a:tcPr/>
                 </a:tc>
+                <a:extLst>
+                  <a:ext uri="{0D108BD9-81ED-4DB2-BD59-A6C34878D82A}">
+                    <a16:rowId xmlns:a16="http://schemas.microsoft.com/office/drawing/2014/main" val="10000"/>
+                  </a:ext>
+                </a:extLst>
               </a:tr>
               <a:tr h="365760">
                 <a:tc>
@@ -5483,6 +5649,11 @@
                   </a:txBody>
                   <a:tcPr/>
                 </a:tc>
+                <a:extLst>
+                  <a:ext uri="{0D108BD9-81ED-4DB2-BD59-A6C34878D82A}">
+                    <a16:rowId xmlns:a16="http://schemas.microsoft.com/office/drawing/2014/main" val="10001"/>
+                  </a:ext>
+                </a:extLst>
               </a:tr>
               <a:tr h="365760">
                 <a:tc>
@@ -5511,6 +5682,11 @@
                   </a:txBody>
                   <a:tcPr/>
                 </a:tc>
+                <a:extLst>
+                  <a:ext uri="{0D108BD9-81ED-4DB2-BD59-A6C34878D82A}">
+                    <a16:rowId xmlns:a16="http://schemas.microsoft.com/office/drawing/2014/main" val="10002"/>
+                  </a:ext>
+                </a:extLst>
               </a:tr>
               <a:tr h="365760">
                 <a:tc>
@@ -5539,6 +5715,11 @@
                   </a:txBody>
                   <a:tcPr/>
                 </a:tc>
+                <a:extLst>
+                  <a:ext uri="{0D108BD9-81ED-4DB2-BD59-A6C34878D82A}">
+                    <a16:rowId xmlns:a16="http://schemas.microsoft.com/office/drawing/2014/main" val="10003"/>
+                  </a:ext>
+                </a:extLst>
               </a:tr>
               <a:tr h="365760">
                 <a:tc>
@@ -5567,6 +5748,11 @@
                   </a:txBody>
                   <a:tcPr/>
                 </a:tc>
+                <a:extLst>
+                  <a:ext uri="{0D108BD9-81ED-4DB2-BD59-A6C34878D82A}">
+                    <a16:rowId xmlns:a16="http://schemas.microsoft.com/office/drawing/2014/main" val="10004"/>
+                  </a:ext>
+                </a:extLst>
               </a:tr>
               <a:tr h="365760">
                 <a:tc>
@@ -5595,6 +5781,11 @@
                   </a:txBody>
                   <a:tcPr/>
                 </a:tc>
+                <a:extLst>
+                  <a:ext uri="{0D108BD9-81ED-4DB2-BD59-A6C34878D82A}">
+                    <a16:rowId xmlns:a16="http://schemas.microsoft.com/office/drawing/2014/main" val="10005"/>
+                  </a:ext>
+                </a:extLst>
               </a:tr>
               <a:tr h="365760">
                 <a:tc>
@@ -5623,6 +5814,11 @@
                   </a:txBody>
                   <a:tcPr/>
                 </a:tc>
+                <a:extLst>
+                  <a:ext uri="{0D108BD9-81ED-4DB2-BD59-A6C34878D82A}">
+                    <a16:rowId xmlns:a16="http://schemas.microsoft.com/office/drawing/2014/main" val="10006"/>
+                  </a:ext>
+                </a:extLst>
               </a:tr>
               <a:tr h="365760">
                 <a:tc>
@@ -5651,6 +5847,11 @@
                   </a:txBody>
                   <a:tcPr/>
                 </a:tc>
+                <a:extLst>
+                  <a:ext uri="{0D108BD9-81ED-4DB2-BD59-A6C34878D82A}">
+                    <a16:rowId xmlns:a16="http://schemas.microsoft.com/office/drawing/2014/main" val="10007"/>
+                  </a:ext>
+                </a:extLst>
               </a:tr>
               <a:tr h="365760">
                 <a:tc>
@@ -5679,6 +5880,11 @@
                   </a:txBody>
                   <a:tcPr/>
                 </a:tc>
+                <a:extLst>
+                  <a:ext uri="{0D108BD9-81ED-4DB2-BD59-A6C34878D82A}">
+                    <a16:rowId xmlns:a16="http://schemas.microsoft.com/office/drawing/2014/main" val="10008"/>
+                  </a:ext>
+                </a:extLst>
               </a:tr>
               <a:tr h="365760">
                 <a:tc>
@@ -5707,6 +5913,11 @@
                   </a:txBody>
                   <a:tcPr/>
                 </a:tc>
+                <a:extLst>
+                  <a:ext uri="{0D108BD9-81ED-4DB2-BD59-A6C34878D82A}">
+                    <a16:rowId xmlns:a16="http://schemas.microsoft.com/office/drawing/2014/main" val="10009"/>
+                  </a:ext>
+                </a:extLst>
               </a:tr>
             </a:tbl>
           </a:graphicData>
@@ -5721,7 +5932,7 @@
 </file>
 
 <file path=ppt/slides/slide20.xml><?xml version="1.0" encoding="utf-8"?>
-<p:sld xmlns:a="http://schemas.openxmlformats.org/drawingml/2006/main" xmlns:p="http://schemas.openxmlformats.org/presentationml/2006/main" xmlns:r="http://schemas.openxmlformats.org/officeDocument/2006/relationships">
+<p:sld xmlns:a="http://schemas.openxmlformats.org/drawingml/2006/main" xmlns:r="http://schemas.openxmlformats.org/officeDocument/2006/relationships" xmlns:p="http://schemas.openxmlformats.org/presentationml/2006/main">
   <p:cSld>
     <p:spTree>
       <p:nvGrpSpPr>
@@ -5729,7 +5940,14 @@
         <p:cNvGrpSpPr/>
         <p:nvPr/>
       </p:nvGrpSpPr>
-      <p:grpSpPr/>
+      <p:grpSpPr>
+        <a:xfrm>
+          <a:off x="0" y="0"/>
+          <a:ext cx="0" cy="0"/>
+          <a:chOff x="0" y="0"/>
+          <a:chExt cx="0" cy="0"/>
+        </a:xfrm>
+      </p:grpSpPr>
       <p:sp>
         <p:nvSpPr>
           <p:cNvPr id="2" name="TextBox 1"/>
@@ -5773,7 +5991,7 @@
         </p:nvGraphicFramePr>
         <p:xfrm>
           <a:off x="731520" y="1280160"/>
-          <a:ext cx="10698480" cy="2560320"/>
+          <a:ext cx="10698480" cy="3108960"/>
         </p:xfrm>
         <a:graphic>
           <a:graphicData uri="http://schemas.openxmlformats.org/drawingml/2006/table">
@@ -5782,9 +6000,27 @@
                 <a:tableStyleId>{5C22544A-7EE6-4342-B048-85BDC9FD1C3A}</a:tableStyleId>
               </a:tblPr>
               <a:tblGrid>
-                <a:gridCol w="2468880"/>
-                <a:gridCol w="4206240"/>
-                <a:gridCol w="4023360"/>
+                <a:gridCol w="2468880">
+                  <a:extLst>
+                    <a:ext uri="{9D8B030D-6E8A-4147-A177-3AD203B41FA5}">
+                      <a16:colId xmlns:a16="http://schemas.microsoft.com/office/drawing/2014/main" val="20000"/>
+                    </a:ext>
+                  </a:extLst>
+                </a:gridCol>
+                <a:gridCol w="4206240">
+                  <a:extLst>
+                    <a:ext uri="{9D8B030D-6E8A-4147-A177-3AD203B41FA5}">
+                      <a16:colId xmlns:a16="http://schemas.microsoft.com/office/drawing/2014/main" val="20001"/>
+                    </a:ext>
+                  </a:extLst>
+                </a:gridCol>
+                <a:gridCol w="4023360">
+                  <a:extLst>
+                    <a:ext uri="{9D8B030D-6E8A-4147-A177-3AD203B41FA5}">
+                      <a16:colId xmlns:a16="http://schemas.microsoft.com/office/drawing/2014/main" val="20002"/>
+                    </a:ext>
+                  </a:extLst>
+                </a:gridCol>
               </a:tblGrid>
               <a:tr h="365760">
                 <a:tc>
@@ -5826,6 +6062,11 @@
                   </a:txBody>
                   <a:tcPr/>
                 </a:tc>
+                <a:extLst>
+                  <a:ext uri="{0D108BD9-81ED-4DB2-BD59-A6C34878D82A}">
+                    <a16:rowId xmlns:a16="http://schemas.microsoft.com/office/drawing/2014/main" val="10000"/>
+                  </a:ext>
+                </a:extLst>
               </a:tr>
               <a:tr h="365760">
                 <a:tc>
@@ -5867,6 +6108,11 @@
                   </a:txBody>
                   <a:tcPr/>
                 </a:tc>
+                <a:extLst>
+                  <a:ext uri="{0D108BD9-81ED-4DB2-BD59-A6C34878D82A}">
+                    <a16:rowId xmlns:a16="http://schemas.microsoft.com/office/drawing/2014/main" val="10001"/>
+                  </a:ext>
+                </a:extLst>
               </a:tr>
               <a:tr h="365760">
                 <a:tc>
@@ -5908,6 +6154,11 @@
                   </a:txBody>
                   <a:tcPr/>
                 </a:tc>
+                <a:extLst>
+                  <a:ext uri="{0D108BD9-81ED-4DB2-BD59-A6C34878D82A}">
+                    <a16:rowId xmlns:a16="http://schemas.microsoft.com/office/drawing/2014/main" val="10002"/>
+                  </a:ext>
+                </a:extLst>
               </a:tr>
               <a:tr h="365760">
                 <a:tc>
@@ -5949,6 +6200,11 @@
                   </a:txBody>
                   <a:tcPr/>
                 </a:tc>
+                <a:extLst>
+                  <a:ext uri="{0D108BD9-81ED-4DB2-BD59-A6C34878D82A}">
+                    <a16:rowId xmlns:a16="http://schemas.microsoft.com/office/drawing/2014/main" val="10003"/>
+                  </a:ext>
+                </a:extLst>
               </a:tr>
               <a:tr h="365760">
                 <a:tc>
@@ -5990,6 +6246,11 @@
                   </a:txBody>
                   <a:tcPr/>
                 </a:tc>
+                <a:extLst>
+                  <a:ext uri="{0D108BD9-81ED-4DB2-BD59-A6C34878D82A}">
+                    <a16:rowId xmlns:a16="http://schemas.microsoft.com/office/drawing/2014/main" val="10004"/>
+                  </a:ext>
+                </a:extLst>
               </a:tr>
               <a:tr h="365760">
                 <a:tc>
@@ -6031,6 +6292,11 @@
                   </a:txBody>
                   <a:tcPr/>
                 </a:tc>
+                <a:extLst>
+                  <a:ext uri="{0D108BD9-81ED-4DB2-BD59-A6C34878D82A}">
+                    <a16:rowId xmlns:a16="http://schemas.microsoft.com/office/drawing/2014/main" val="10005"/>
+                  </a:ext>
+                </a:extLst>
               </a:tr>
               <a:tr h="365760">
                 <a:tc>
@@ -6072,6 +6338,11 @@
                   </a:txBody>
                   <a:tcPr/>
                 </a:tc>
+                <a:extLst>
+                  <a:ext uri="{0D108BD9-81ED-4DB2-BD59-A6C34878D82A}">
+                    <a16:rowId xmlns:a16="http://schemas.microsoft.com/office/drawing/2014/main" val="10006"/>
+                  </a:ext>
+                </a:extLst>
               </a:tr>
             </a:tbl>
           </a:graphicData>
@@ -6124,7 +6395,7 @@
 </file>
 
 <file path=ppt/slides/slide21.xml><?xml version="1.0" encoding="utf-8"?>
-<p:sld xmlns:a="http://schemas.openxmlformats.org/drawingml/2006/main" xmlns:p="http://schemas.openxmlformats.org/presentationml/2006/main" xmlns:r="http://schemas.openxmlformats.org/officeDocument/2006/relationships">
+<p:sld xmlns:a="http://schemas.openxmlformats.org/drawingml/2006/main" xmlns:r="http://schemas.openxmlformats.org/officeDocument/2006/relationships" xmlns:p="http://schemas.openxmlformats.org/presentationml/2006/main">
   <p:cSld>
     <p:spTree>
       <p:nvGrpSpPr>
@@ -6132,7 +6403,14 @@
         <p:cNvGrpSpPr/>
         <p:nvPr/>
       </p:nvGrpSpPr>
-      <p:grpSpPr/>
+      <p:grpSpPr>
+        <a:xfrm>
+          <a:off x="0" y="0"/>
+          <a:ext cx="0" cy="0"/>
+          <a:chOff x="0" y="0"/>
+          <a:chExt cx="0" cy="0"/>
+        </a:xfrm>
+      </p:grpSpPr>
       <p:sp>
         <p:nvSpPr>
           <p:cNvPr id="2" name="TextBox 1"/>
@@ -6176,7 +6454,7 @@
         </p:nvGraphicFramePr>
         <p:xfrm>
           <a:off x="731520" y="1554480"/>
-          <a:ext cx="10698480" cy="1097280"/>
+          <a:ext cx="10698480" cy="1188720"/>
         </p:xfrm>
         <a:graphic>
           <a:graphicData uri="http://schemas.openxmlformats.org/drawingml/2006/table">
@@ -6185,16 +6463,36 @@
                 <a:tableStyleId>{5C22544A-7EE6-4342-B048-85BDC9FD1C3A}</a:tableStyleId>
               </a:tblPr>
               <a:tblGrid>
-                <a:gridCol w="3108960"/>
-                <a:gridCol w="4023360"/>
-                <a:gridCol w="3566160"/>
+                <a:gridCol w="3108960">
+                  <a:extLst>
+                    <a:ext uri="{9D8B030D-6E8A-4147-A177-3AD203B41FA5}">
+                      <a16:colId xmlns:a16="http://schemas.microsoft.com/office/drawing/2014/main" val="20000"/>
+                    </a:ext>
+                  </a:extLst>
+                </a:gridCol>
+                <a:gridCol w="4023360">
+                  <a:extLst>
+                    <a:ext uri="{9D8B030D-6E8A-4147-A177-3AD203B41FA5}">
+                      <a16:colId xmlns:a16="http://schemas.microsoft.com/office/drawing/2014/main" val="20001"/>
+                    </a:ext>
+                  </a:extLst>
+                </a:gridCol>
+                <a:gridCol w="3566160">
+                  <a:extLst>
+                    <a:ext uri="{9D8B030D-6E8A-4147-A177-3AD203B41FA5}">
+                      <a16:colId xmlns:a16="http://schemas.microsoft.com/office/drawing/2014/main" val="20002"/>
+                    </a:ext>
+                  </a:extLst>
+                </a:gridCol>
               </a:tblGrid>
               <a:tr h="365760">
                 <a:tc>
                   <a:txBody>
                     <a:bodyPr/>
                     <a:lstStyle/>
-                    <a:p/>
+                    <a:p>
+                      <a:endParaRPr/>
+                    </a:p>
                   </a:txBody>
                   <a:tcPr/>
                 </a:tc>
@@ -6224,6 +6522,11 @@
                   </a:txBody>
                   <a:tcPr/>
                 </a:tc>
+                <a:extLst>
+                  <a:ext uri="{0D108BD9-81ED-4DB2-BD59-A6C34878D82A}">
+                    <a16:rowId xmlns:a16="http://schemas.microsoft.com/office/drawing/2014/main" val="10000"/>
+                  </a:ext>
+                </a:extLst>
               </a:tr>
               <a:tr h="365760">
                 <a:tc>
@@ -6265,6 +6568,11 @@
                   </a:txBody>
                   <a:tcPr/>
                 </a:tc>
+                <a:extLst>
+                  <a:ext uri="{0D108BD9-81ED-4DB2-BD59-A6C34878D82A}">
+                    <a16:rowId xmlns:a16="http://schemas.microsoft.com/office/drawing/2014/main" val="10001"/>
+                  </a:ext>
+                </a:extLst>
               </a:tr>
               <a:tr h="365760">
                 <a:tc>
@@ -6306,6 +6614,11 @@
                   </a:txBody>
                   <a:tcPr/>
                 </a:tc>
+                <a:extLst>
+                  <a:ext uri="{0D108BD9-81ED-4DB2-BD59-A6C34878D82A}">
+                    <a16:rowId xmlns:a16="http://schemas.microsoft.com/office/drawing/2014/main" val="10002"/>
+                  </a:ext>
+                </a:extLst>
               </a:tr>
             </a:tbl>
           </a:graphicData>
@@ -6373,7 +6686,7 @@
 </file>
 
 <file path=ppt/slides/slide22.xml><?xml version="1.0" encoding="utf-8"?>
-<p:sld xmlns:a="http://schemas.openxmlformats.org/drawingml/2006/main" xmlns:p="http://schemas.openxmlformats.org/presentationml/2006/main" xmlns:r="http://schemas.openxmlformats.org/officeDocument/2006/relationships">
+<p:sld xmlns:a="http://schemas.openxmlformats.org/drawingml/2006/main" xmlns:r="http://schemas.openxmlformats.org/officeDocument/2006/relationships" xmlns:p="http://schemas.openxmlformats.org/presentationml/2006/main">
   <p:cSld>
     <p:spTree>
       <p:nvGrpSpPr>
@@ -6381,7 +6694,14 @@
         <p:cNvGrpSpPr/>
         <p:nvPr/>
       </p:nvGrpSpPr>
-      <p:grpSpPr/>
+      <p:grpSpPr>
+        <a:xfrm>
+          <a:off x="0" y="0"/>
+          <a:ext cx="0" cy="0"/>
+          <a:chOff x="0" y="0"/>
+          <a:chExt cx="0" cy="0"/>
+        </a:xfrm>
+      </p:grpSpPr>
       <p:sp>
         <p:nvSpPr>
           <p:cNvPr id="2" name="TextBox 1"/>
@@ -6434,9 +6754,27 @@
                 <a:tableStyleId>{5C22544A-7EE6-4342-B048-85BDC9FD1C3A}</a:tableStyleId>
               </a:tblPr>
               <a:tblGrid>
-                <a:gridCol w="3474720"/>
-                <a:gridCol w="4023360"/>
-                <a:gridCol w="3200400"/>
+                <a:gridCol w="3474720">
+                  <a:extLst>
+                    <a:ext uri="{9D8B030D-6E8A-4147-A177-3AD203B41FA5}">
+                      <a16:colId xmlns:a16="http://schemas.microsoft.com/office/drawing/2014/main" val="20000"/>
+                    </a:ext>
+                  </a:extLst>
+                </a:gridCol>
+                <a:gridCol w="4023360">
+                  <a:extLst>
+                    <a:ext uri="{9D8B030D-6E8A-4147-A177-3AD203B41FA5}">
+                      <a16:colId xmlns:a16="http://schemas.microsoft.com/office/drawing/2014/main" val="20001"/>
+                    </a:ext>
+                  </a:extLst>
+                </a:gridCol>
+                <a:gridCol w="3200400">
+                  <a:extLst>
+                    <a:ext uri="{9D8B030D-6E8A-4147-A177-3AD203B41FA5}">
+                      <a16:colId xmlns:a16="http://schemas.microsoft.com/office/drawing/2014/main" val="20002"/>
+                    </a:ext>
+                  </a:extLst>
+                </a:gridCol>
               </a:tblGrid>
               <a:tr h="365760">
                 <a:tc>
@@ -6478,6 +6816,11 @@
                   </a:txBody>
                   <a:tcPr/>
                 </a:tc>
+                <a:extLst>
+                  <a:ext uri="{0D108BD9-81ED-4DB2-BD59-A6C34878D82A}">
+                    <a16:rowId xmlns:a16="http://schemas.microsoft.com/office/drawing/2014/main" val="10000"/>
+                  </a:ext>
+                </a:extLst>
               </a:tr>
               <a:tr h="365760">
                 <a:tc>
@@ -6519,6 +6862,11 @@
                   </a:txBody>
                   <a:tcPr/>
                 </a:tc>
+                <a:extLst>
+                  <a:ext uri="{0D108BD9-81ED-4DB2-BD59-A6C34878D82A}">
+                    <a16:rowId xmlns:a16="http://schemas.microsoft.com/office/drawing/2014/main" val="10001"/>
+                  </a:ext>
+                </a:extLst>
               </a:tr>
               <a:tr h="365760">
                 <a:tc>
@@ -6560,6 +6908,11 @@
                   </a:txBody>
                   <a:tcPr/>
                 </a:tc>
+                <a:extLst>
+                  <a:ext uri="{0D108BD9-81ED-4DB2-BD59-A6C34878D82A}">
+                    <a16:rowId xmlns:a16="http://schemas.microsoft.com/office/drawing/2014/main" val="10002"/>
+                  </a:ext>
+                </a:extLst>
               </a:tr>
               <a:tr h="365760">
                 <a:tc>
@@ -6601,6 +6954,11 @@
                   </a:txBody>
                   <a:tcPr/>
                 </a:tc>
+                <a:extLst>
+                  <a:ext uri="{0D108BD9-81ED-4DB2-BD59-A6C34878D82A}">
+                    <a16:rowId xmlns:a16="http://schemas.microsoft.com/office/drawing/2014/main" val="10003"/>
+                  </a:ext>
+                </a:extLst>
               </a:tr>
               <a:tr h="365760">
                 <a:tc>
@@ -6642,6 +7000,11 @@
                   </a:txBody>
                   <a:tcPr/>
                 </a:tc>
+                <a:extLst>
+                  <a:ext uri="{0D108BD9-81ED-4DB2-BD59-A6C34878D82A}">
+                    <a16:rowId xmlns:a16="http://schemas.microsoft.com/office/drawing/2014/main" val="10004"/>
+                  </a:ext>
+                </a:extLst>
               </a:tr>
               <a:tr h="365760">
                 <a:tc>
@@ -6683,6 +7046,11 @@
                   </a:txBody>
                   <a:tcPr/>
                 </a:tc>
+                <a:extLst>
+                  <a:ext uri="{0D108BD9-81ED-4DB2-BD59-A6C34878D82A}">
+                    <a16:rowId xmlns:a16="http://schemas.microsoft.com/office/drawing/2014/main" val="10005"/>
+                  </a:ext>
+                </a:extLst>
               </a:tr>
             </a:tbl>
           </a:graphicData>
@@ -6735,7 +7103,7 @@
 </file>
 
 <file path=ppt/slides/slide23.xml><?xml version="1.0" encoding="utf-8"?>
-<p:sld xmlns:a="http://schemas.openxmlformats.org/drawingml/2006/main" xmlns:p="http://schemas.openxmlformats.org/presentationml/2006/main" xmlns:r="http://schemas.openxmlformats.org/officeDocument/2006/relationships">
+<p:sld xmlns:a="http://schemas.openxmlformats.org/drawingml/2006/main" xmlns:r="http://schemas.openxmlformats.org/officeDocument/2006/relationships" xmlns:p="http://schemas.openxmlformats.org/presentationml/2006/main">
   <p:cSld>
     <p:spTree>
       <p:nvGrpSpPr>
@@ -6743,7 +7111,14 @@
         <p:cNvGrpSpPr/>
         <p:nvPr/>
       </p:nvGrpSpPr>
-      <p:grpSpPr/>
+      <p:grpSpPr>
+        <a:xfrm>
+          <a:off x="0" y="0"/>
+          <a:ext cx="0" cy="0"/>
+          <a:chOff x="0" y="0"/>
+          <a:chExt cx="0" cy="0"/>
+        </a:xfrm>
+      </p:grpSpPr>
       <p:sp>
         <p:nvSpPr>
           <p:cNvPr id="2" name="TextBox 1"/>
@@ -6937,7 +7312,7 @@
 </file>
 
 <file path=ppt/slides/slide24.xml><?xml version="1.0" encoding="utf-8"?>
-<p:sld xmlns:a="http://schemas.openxmlformats.org/drawingml/2006/main" xmlns:p="http://schemas.openxmlformats.org/presentationml/2006/main" xmlns:r="http://schemas.openxmlformats.org/officeDocument/2006/relationships">
+<p:sld xmlns:a="http://schemas.openxmlformats.org/drawingml/2006/main" xmlns:r="http://schemas.openxmlformats.org/officeDocument/2006/relationships" xmlns:p="http://schemas.openxmlformats.org/presentationml/2006/main">
   <p:cSld>
     <p:spTree>
       <p:nvGrpSpPr>
@@ -6945,7 +7320,14 @@
         <p:cNvGrpSpPr/>
         <p:nvPr/>
       </p:nvGrpSpPr>
-      <p:grpSpPr/>
+      <p:grpSpPr>
+        <a:xfrm>
+          <a:off x="0" y="0"/>
+          <a:ext cx="0" cy="0"/>
+          <a:chOff x="0" y="0"/>
+          <a:chExt cx="0" cy="0"/>
+        </a:xfrm>
+      </p:grpSpPr>
       <p:sp>
         <p:nvSpPr>
           <p:cNvPr id="2" name="TextBox 1"/>
@@ -7051,27 +7433,24 @@
                 <a:spcPts val="800"/>
               </a:spcAft>
             </a:pPr>
+            <a:endParaRPr sz="2400">
+              <a:solidFill>
+                <a:srgbClr val="212121"/>
+              </a:solidFill>
+            </a:endParaRPr>
+          </a:p>
+          <a:p>
+            <a:pPr>
+              <a:spcAft>
+                <a:spcPts val="800"/>
+              </a:spcAft>
+            </a:pPr>
             <a:r>
               <a:rPr sz="2600">
                 <a:solidFill>
                   <a:srgbClr val="212121"/>
                 </a:solidFill>
               </a:rPr>
-              <a:t/>
-            </a:r>
-          </a:p>
-          <a:p>
-            <a:pPr>
-              <a:spcAft>
-                <a:spcPts val="800"/>
-              </a:spcAft>
-            </a:pPr>
-            <a:r>
-              <a:rPr sz="2600">
-                <a:solidFill>
-                  <a:srgbClr val="212121"/>
-                </a:solidFill>
-              </a:rPr>
               <a:t>Every tool tonight, and every lab in Session 2, is this one move in different costumes.</a:t>
             </a:r>
           </a:p>
@@ -7081,14 +7460,11 @@
                 <a:spcPts val="800"/>
               </a:spcAft>
             </a:pPr>
-            <a:r>
-              <a:rPr sz="2600">
-                <a:solidFill>
-                  <a:srgbClr val="212121"/>
-                </a:solidFill>
-              </a:rPr>
-              <a:t/>
-            </a:r>
+            <a:endParaRPr sz="2600">
+              <a:solidFill>
+                <a:srgbClr val="212121"/>
+              </a:solidFill>
+            </a:endParaRPr>
           </a:p>
           <a:p>
             <a:pPr>
@@ -7116,7 +7492,7 @@
 </file>
 
 <file path=ppt/slides/slide25.xml><?xml version="1.0" encoding="utf-8"?>
-<p:sld xmlns:a="http://schemas.openxmlformats.org/drawingml/2006/main" xmlns:p="http://schemas.openxmlformats.org/presentationml/2006/main" xmlns:r="http://schemas.openxmlformats.org/officeDocument/2006/relationships">
+<p:sld xmlns:a="http://schemas.openxmlformats.org/drawingml/2006/main" xmlns:r="http://schemas.openxmlformats.org/officeDocument/2006/relationships" xmlns:p="http://schemas.openxmlformats.org/presentationml/2006/main">
   <p:cSld>
     <p:spTree>
       <p:nvGrpSpPr>
@@ -7124,7 +7500,14 @@
         <p:cNvGrpSpPr/>
         <p:nvPr/>
       </p:nvGrpSpPr>
-      <p:grpSpPr/>
+      <p:grpSpPr>
+        <a:xfrm>
+          <a:off x="0" y="0"/>
+          <a:ext cx="0" cy="0"/>
+          <a:chOff x="0" y="0"/>
+          <a:chExt cx="0" cy="0"/>
+        </a:xfrm>
+      </p:grpSpPr>
       <p:sp>
         <p:nvSpPr>
           <p:cNvPr id="2" name="TextBox 1"/>
@@ -7167,7 +7550,7 @@
 </file>
 
 <file path=ppt/slides/slide26.xml><?xml version="1.0" encoding="utf-8"?>
-<p:sld xmlns:a="http://schemas.openxmlformats.org/drawingml/2006/main" xmlns:p="http://schemas.openxmlformats.org/presentationml/2006/main" xmlns:r="http://schemas.openxmlformats.org/officeDocument/2006/relationships">
+<p:sld xmlns:a="http://schemas.openxmlformats.org/drawingml/2006/main" xmlns:r="http://schemas.openxmlformats.org/officeDocument/2006/relationships" xmlns:p="http://schemas.openxmlformats.org/presentationml/2006/main">
   <p:cSld>
     <p:spTree>
       <p:nvGrpSpPr>
@@ -7175,7 +7558,14 @@
         <p:cNvGrpSpPr/>
         <p:nvPr/>
       </p:nvGrpSpPr>
-      <p:grpSpPr/>
+      <p:grpSpPr>
+        <a:xfrm>
+          <a:off x="0" y="0"/>
+          <a:ext cx="0" cy="0"/>
+          <a:chOff x="0" y="0"/>
+          <a:chExt cx="0" cy="0"/>
+        </a:xfrm>
+      </p:grpSpPr>
       <p:sp>
         <p:nvSpPr>
           <p:cNvPr id="2" name="TextBox 1"/>
@@ -7252,27 +7642,25 @@
                 <a:spcPts val="800"/>
               </a:spcAft>
             </a:pPr>
+            <a:endParaRPr sz="2000">
+              <a:solidFill>
+                <a:srgbClr val="212121"/>
+              </a:solidFill>
+              <a:latin typeface="Courier New"/>
+            </a:endParaRPr>
+          </a:p>
+          <a:p>
+            <a:pPr>
+              <a:spcAft>
+                <a:spcPts val="800"/>
+              </a:spcAft>
+            </a:pPr>
             <a:r>
               <a:rPr sz="2400">
                 <a:solidFill>
                   <a:srgbClr val="212121"/>
                 </a:solidFill>
               </a:rPr>
-              <a:t/>
-            </a:r>
-          </a:p>
-          <a:p>
-            <a:pPr>
-              <a:spcAft>
-                <a:spcPts val="800"/>
-              </a:spcAft>
-            </a:pPr>
-            <a:r>
-              <a:rPr sz="2400">
-                <a:solidFill>
-                  <a:srgbClr val="212121"/>
-                </a:solidFill>
-              </a:rPr>
               <a:t>Is there a true/false assignment that makes the whole formula true?</a:t>
             </a:r>
           </a:p>
@@ -7282,14 +7670,11 @@
                 <a:spcPts val="800"/>
               </a:spcAft>
             </a:pPr>
-            <a:r>
-              <a:rPr sz="2400">
-                <a:solidFill>
-                  <a:srgbClr val="212121"/>
-                </a:solidFill>
-              </a:rPr>
-              <a:t/>
-            </a:r>
+            <a:endParaRPr sz="2400">
+              <a:solidFill>
+                <a:srgbClr val="212121"/>
+              </a:solidFill>
+            </a:endParaRPr>
           </a:p>
           <a:p>
             <a:pPr>
@@ -7332,7 +7717,7 @@
 </file>
 
 <file path=ppt/slides/slide27.xml><?xml version="1.0" encoding="utf-8"?>
-<p:sld xmlns:a="http://schemas.openxmlformats.org/drawingml/2006/main" xmlns:p="http://schemas.openxmlformats.org/presentationml/2006/main" xmlns:r="http://schemas.openxmlformats.org/officeDocument/2006/relationships">
+<p:sld xmlns:a="http://schemas.openxmlformats.org/drawingml/2006/main" xmlns:r="http://schemas.openxmlformats.org/officeDocument/2006/relationships" xmlns:p="http://schemas.openxmlformats.org/presentationml/2006/main">
   <p:cSld>
     <p:spTree>
       <p:nvGrpSpPr>
@@ -7340,7 +7725,14 @@
         <p:cNvGrpSpPr/>
         <p:nvPr/>
       </p:nvGrpSpPr>
-      <p:grpSpPr/>
+      <p:grpSpPr>
+        <a:xfrm>
+          <a:off x="0" y="0"/>
+          <a:ext cx="0" cy="0"/>
+          <a:chOff x="0" y="0"/>
+          <a:chExt cx="0" cy="0"/>
+        </a:xfrm>
+      </p:grpSpPr>
       <p:sp>
         <p:nvSpPr>
           <p:cNvPr id="2" name="TextBox 1"/>
@@ -7461,14 +7853,11 @@
                 <a:spcPts val="800"/>
               </a:spcAft>
             </a:pPr>
-            <a:r>
-              <a:rPr sz="2400">
-                <a:solidFill>
-                  <a:srgbClr val="212121"/>
-                </a:solidFill>
-              </a:rPr>
-              <a:t/>
-            </a:r>
+            <a:endParaRPr sz="2200">
+              <a:solidFill>
+                <a:srgbClr val="212121"/>
+              </a:solidFill>
+            </a:endParaRPr>
           </a:p>
           <a:p>
             <a:pPr>
@@ -7526,7 +7915,7 @@
 </file>
 
 <file path=ppt/slides/slide28.xml><?xml version="1.0" encoding="utf-8"?>
-<p:sld xmlns:a="http://schemas.openxmlformats.org/drawingml/2006/main" xmlns:p="http://schemas.openxmlformats.org/presentationml/2006/main" xmlns:r="http://schemas.openxmlformats.org/officeDocument/2006/relationships">
+<p:sld xmlns:a="http://schemas.openxmlformats.org/drawingml/2006/main" xmlns:r="http://schemas.openxmlformats.org/officeDocument/2006/relationships" xmlns:p="http://schemas.openxmlformats.org/presentationml/2006/main">
   <p:cSld>
     <p:spTree>
       <p:nvGrpSpPr>
@@ -7534,7 +7923,14 @@
         <p:cNvGrpSpPr/>
         <p:nvPr/>
       </p:nvGrpSpPr>
-      <p:grpSpPr/>
+      <p:grpSpPr>
+        <a:xfrm>
+          <a:off x="0" y="0"/>
+          <a:ext cx="0" cy="0"/>
+          <a:chOff x="0" y="0"/>
+          <a:chExt cx="0" cy="0"/>
+        </a:xfrm>
+      </p:grpSpPr>
       <p:sp>
         <p:nvSpPr>
           <p:cNvPr id="2" name="TextBox 1"/>
@@ -7578,7 +7974,7 @@
         </p:nvGraphicFramePr>
         <p:xfrm>
           <a:off x="731520" y="1554480"/>
-          <a:ext cx="10698480" cy="1828800"/>
+          <a:ext cx="10698480" cy="1981200"/>
         </p:xfrm>
         <a:graphic>
           <a:graphicData uri="http://schemas.openxmlformats.org/drawingml/2006/table">
@@ -7587,8 +7983,20 @@
                 <a:tableStyleId>{5C22544A-7EE6-4342-B048-85BDC9FD1C3A}</a:tableStyleId>
               </a:tblPr>
               <a:tblGrid>
-                <a:gridCol w="4754880"/>
-                <a:gridCol w="5943600"/>
+                <a:gridCol w="4754880">
+                  <a:extLst>
+                    <a:ext uri="{9D8B030D-6E8A-4147-A177-3AD203B41FA5}">
+                      <a16:colId xmlns:a16="http://schemas.microsoft.com/office/drawing/2014/main" val="20000"/>
+                    </a:ext>
+                  </a:extLst>
+                </a:gridCol>
+                <a:gridCol w="5943600">
+                  <a:extLst>
+                    <a:ext uri="{9D8B030D-6E8A-4147-A177-3AD203B41FA5}">
+                      <a16:colId xmlns:a16="http://schemas.microsoft.com/office/drawing/2014/main" val="20001"/>
+                    </a:ext>
+                  </a:extLst>
+                </a:gridCol>
               </a:tblGrid>
               <a:tr h="365760">
                 <a:tc>
@@ -7617,6 +8025,11 @@
                   </a:txBody>
                   <a:tcPr/>
                 </a:tc>
+                <a:extLst>
+                  <a:ext uri="{0D108BD9-81ED-4DB2-BD59-A6C34878D82A}">
+                    <a16:rowId xmlns:a16="http://schemas.microsoft.com/office/drawing/2014/main" val="10000"/>
+                  </a:ext>
+                </a:extLst>
               </a:tr>
               <a:tr h="365760">
                 <a:tc>
@@ -7645,6 +8058,11 @@
                   </a:txBody>
                   <a:tcPr/>
                 </a:tc>
+                <a:extLst>
+                  <a:ext uri="{0D108BD9-81ED-4DB2-BD59-A6C34878D82A}">
+                    <a16:rowId xmlns:a16="http://schemas.microsoft.com/office/drawing/2014/main" val="10001"/>
+                  </a:ext>
+                </a:extLst>
               </a:tr>
               <a:tr h="365760">
                 <a:tc>
@@ -7673,6 +8091,11 @@
                   </a:txBody>
                   <a:tcPr/>
                 </a:tc>
+                <a:extLst>
+                  <a:ext uri="{0D108BD9-81ED-4DB2-BD59-A6C34878D82A}">
+                    <a16:rowId xmlns:a16="http://schemas.microsoft.com/office/drawing/2014/main" val="10002"/>
+                  </a:ext>
+                </a:extLst>
               </a:tr>
               <a:tr h="365760">
                 <a:tc>
@@ -7701,6 +8124,11 @@
                   </a:txBody>
                   <a:tcPr/>
                 </a:tc>
+                <a:extLst>
+                  <a:ext uri="{0D108BD9-81ED-4DB2-BD59-A6C34878D82A}">
+                    <a16:rowId xmlns:a16="http://schemas.microsoft.com/office/drawing/2014/main" val="10003"/>
+                  </a:ext>
+                </a:extLst>
               </a:tr>
               <a:tr h="365760">
                 <a:tc>
@@ -7729,6 +8157,11 @@
                   </a:txBody>
                   <a:tcPr/>
                 </a:tc>
+                <a:extLst>
+                  <a:ext uri="{0D108BD9-81ED-4DB2-BD59-A6C34878D82A}">
+                    <a16:rowId xmlns:a16="http://schemas.microsoft.com/office/drawing/2014/main" val="10004"/>
+                  </a:ext>
+                </a:extLst>
               </a:tr>
             </a:tbl>
           </a:graphicData>
@@ -7781,7 +8214,7 @@
 </file>
 
 <file path=ppt/slides/slide29.xml><?xml version="1.0" encoding="utf-8"?>
-<p:sld xmlns:a="http://schemas.openxmlformats.org/drawingml/2006/main" xmlns:p="http://schemas.openxmlformats.org/presentationml/2006/main" xmlns:r="http://schemas.openxmlformats.org/officeDocument/2006/relationships">
+<p:sld xmlns:a="http://schemas.openxmlformats.org/drawingml/2006/main" xmlns:r="http://schemas.openxmlformats.org/officeDocument/2006/relationships" xmlns:p="http://schemas.openxmlformats.org/presentationml/2006/main">
   <p:cSld>
     <p:spTree>
       <p:nvGrpSpPr>
@@ -7789,7 +8222,14 @@
         <p:cNvGrpSpPr/>
         <p:nvPr/>
       </p:nvGrpSpPr>
-      <p:grpSpPr/>
+      <p:grpSpPr>
+        <a:xfrm>
+          <a:off x="0" y="0"/>
+          <a:ext cx="0" cy="0"/>
+          <a:chOff x="0" y="0"/>
+          <a:chExt cx="0" cy="0"/>
+        </a:xfrm>
+      </p:grpSpPr>
       <p:sp>
         <p:nvSpPr>
           <p:cNvPr id="2" name="TextBox 1"/>
@@ -7882,14 +8322,12 @@
                 <a:spcPts val="800"/>
               </a:spcAft>
             </a:pPr>
-            <a:r>
-              <a:rPr sz="2400">
-                <a:solidFill>
-                  <a:srgbClr val="212121"/>
-                </a:solidFill>
-              </a:rPr>
-              <a:t/>
-            </a:r>
+            <a:endParaRPr sz="2000">
+              <a:solidFill>
+                <a:srgbClr val="212121"/>
+              </a:solidFill>
+              <a:latin typeface="Courier New"/>
+            </a:endParaRPr>
           </a:p>
           <a:p>
             <a:pPr>
@@ -7962,7 +8400,7 @@
 </file>
 
 <file path=ppt/slides/slide3.xml><?xml version="1.0" encoding="utf-8"?>
-<p:sld xmlns:a="http://schemas.openxmlformats.org/drawingml/2006/main" xmlns:p="http://schemas.openxmlformats.org/presentationml/2006/main" xmlns:r="http://schemas.openxmlformats.org/officeDocument/2006/relationships">
+<p:sld xmlns:a="http://schemas.openxmlformats.org/drawingml/2006/main" xmlns:r="http://schemas.openxmlformats.org/officeDocument/2006/relationships" xmlns:p="http://schemas.openxmlformats.org/presentationml/2006/main">
   <p:cSld>
     <p:spTree>
       <p:nvGrpSpPr>
@@ -7970,7 +8408,14 @@
         <p:cNvGrpSpPr/>
         <p:nvPr/>
       </p:nvGrpSpPr>
-      <p:grpSpPr/>
+      <p:grpSpPr>
+        <a:xfrm>
+          <a:off x="0" y="0"/>
+          <a:ext cx="0" cy="0"/>
+          <a:chOff x="0" y="0"/>
+          <a:chExt cx="0" cy="0"/>
+        </a:xfrm>
+      </p:grpSpPr>
       <p:sp>
         <p:nvSpPr>
           <p:cNvPr id="2" name="TextBox 1"/>
@@ -8066,7 +8511,7 @@
 </file>
 
 <file path=ppt/slides/slide30.xml><?xml version="1.0" encoding="utf-8"?>
-<p:sld xmlns:a="http://schemas.openxmlformats.org/drawingml/2006/main" xmlns:p="http://schemas.openxmlformats.org/presentationml/2006/main" xmlns:r="http://schemas.openxmlformats.org/officeDocument/2006/relationships">
+<p:sld xmlns:a="http://schemas.openxmlformats.org/drawingml/2006/main" xmlns:r="http://schemas.openxmlformats.org/officeDocument/2006/relationships" xmlns:p="http://schemas.openxmlformats.org/presentationml/2006/main">
   <p:cSld>
     <p:spTree>
       <p:nvGrpSpPr>
@@ -8074,7 +8519,14 @@
         <p:cNvGrpSpPr/>
         <p:nvPr/>
       </p:nvGrpSpPr>
-      <p:grpSpPr/>
+      <p:grpSpPr>
+        <a:xfrm>
+          <a:off x="0" y="0"/>
+          <a:ext cx="0" cy="0"/>
+          <a:chOff x="0" y="0"/>
+          <a:chExt cx="0" cy="0"/>
+        </a:xfrm>
+      </p:grpSpPr>
       <p:sp>
         <p:nvSpPr>
           <p:cNvPr id="2" name="TextBox 1"/>
@@ -8151,6 +8603,19 @@
                 <a:spcPts val="0"/>
               </a:spcAft>
             </a:pPr>
+            <a:endParaRPr sz="1800">
+              <a:solidFill>
+                <a:srgbClr val="212121"/>
+              </a:solidFill>
+              <a:latin typeface="Courier New"/>
+            </a:endParaRPr>
+          </a:p>
+          <a:p>
+            <a:pPr>
+              <a:spcAft>
+                <a:spcPts val="0"/>
+              </a:spcAft>
+            </a:pPr>
             <a:r>
               <a:rPr sz="1800">
                 <a:solidFill>
@@ -8158,7 +8623,7 @@
                 </a:solidFill>
                 <a:latin typeface="Courier New"/>
               </a:rPr>
-              <a:t/>
+              <a:t>Query 1: x + y == 42 and x &gt; 100</a:t>
             </a:r>
           </a:p>
           <a:p>
@@ -8174,7 +8639,7 @@
                 </a:solidFill>
                 <a:latin typeface="Courier New"/>
               </a:rPr>
-              <a:t>Query 1: x + y == 42 and x &gt; 100</a:t>
+              <a:t>[y = -59, x = 101]            ← a model, in milliseconds</a:t>
             </a:r>
           </a:p>
           <a:p>
@@ -8183,6 +8648,19 @@
                 <a:spcPts val="0"/>
               </a:spcAft>
             </a:pPr>
+            <a:endParaRPr sz="1800">
+              <a:solidFill>
+                <a:srgbClr val="212121"/>
+              </a:solidFill>
+              <a:latin typeface="Courier New"/>
+            </a:endParaRPr>
+          </a:p>
+          <a:p>
+            <a:pPr>
+              <a:spcAft>
+                <a:spcPts val="0"/>
+              </a:spcAft>
+            </a:pPr>
             <a:r>
               <a:rPr sz="1800">
                 <a:solidFill>
@@ -8190,7 +8668,7 @@
                 </a:solidFill>
                 <a:latin typeface="Courier New"/>
               </a:rPr>
-              <a:t>[y = -59, x = 101]            ← a model, in milliseconds</a:t>
+              <a:t>Query 2: x*x == 2*y*y, x &gt; 0, y &gt; 0 (no overflow)</a:t>
             </a:r>
           </a:p>
           <a:p>
@@ -8206,38 +8684,6 @@
                 </a:solidFill>
                 <a:latin typeface="Courier New"/>
               </a:rPr>
-              <a:t/>
-            </a:r>
-          </a:p>
-          <a:p>
-            <a:pPr>
-              <a:spcAft>
-                <a:spcPts val="0"/>
-              </a:spcAft>
-            </a:pPr>
-            <a:r>
-              <a:rPr sz="1800">
-                <a:solidFill>
-                  <a:srgbClr val="212121"/>
-                </a:solidFill>
-                <a:latin typeface="Courier New"/>
-              </a:rPr>
-              <a:t>Query 2: x*x == 2*y*y, x &gt; 0, y &gt; 0 (no overflow)</a:t>
-            </a:r>
-          </a:p>
-          <a:p>
-            <a:pPr>
-              <a:spcAft>
-                <a:spcPts val="0"/>
-              </a:spcAft>
-            </a:pPr>
-            <a:r>
-              <a:rPr sz="1800">
-                <a:solidFill>
-                  <a:srgbClr val="212121"/>
-                </a:solidFill>
-                <a:latin typeface="Courier New"/>
-              </a:rPr>
               <a:t>unsat                          ← a proof</a:t>
             </a:r>
           </a:p>
@@ -8247,14 +8693,12 @@
                 <a:spcPts val="800"/>
               </a:spcAft>
             </a:pPr>
-            <a:r>
-              <a:rPr sz="2200">
-                <a:solidFill>
-                  <a:srgbClr val="212121"/>
-                </a:solidFill>
-              </a:rPr>
-              <a:t/>
-            </a:r>
+            <a:endParaRPr sz="1800">
+              <a:solidFill>
+                <a:srgbClr val="212121"/>
+              </a:solidFill>
+              <a:latin typeface="Courier New"/>
+            </a:endParaRPr>
           </a:p>
           <a:p>
             <a:pPr>
@@ -8282,7 +8726,7 @@
 </file>
 
 <file path=ppt/slides/slide31.xml><?xml version="1.0" encoding="utf-8"?>
-<p:sld xmlns:a="http://schemas.openxmlformats.org/drawingml/2006/main" xmlns:p="http://schemas.openxmlformats.org/presentationml/2006/main" xmlns:r="http://schemas.openxmlformats.org/officeDocument/2006/relationships">
+<p:sld xmlns:a="http://schemas.openxmlformats.org/drawingml/2006/main" xmlns:r="http://schemas.openxmlformats.org/officeDocument/2006/relationships" xmlns:p="http://schemas.openxmlformats.org/presentationml/2006/main">
   <p:cSld>
     <p:spTree>
       <p:nvGrpSpPr>
@@ -8290,7 +8734,14 @@
         <p:cNvGrpSpPr/>
         <p:nvPr/>
       </p:nvGrpSpPr>
-      <p:grpSpPr/>
+      <p:grpSpPr>
+        <a:xfrm>
+          <a:off x="0" y="0"/>
+          <a:ext cx="0" cy="0"/>
+          <a:chOff x="0" y="0"/>
+          <a:chExt cx="0" cy="0"/>
+        </a:xfrm>
+      </p:grpSpPr>
       <p:sp>
         <p:nvSpPr>
           <p:cNvPr id="2" name="TextBox 1"/>
@@ -8399,14 +8850,12 @@
                 <a:spcPts val="800"/>
               </a:spcAft>
             </a:pPr>
-            <a:r>
-              <a:rPr sz="2200">
-                <a:solidFill>
-                  <a:srgbClr val="212121"/>
-                </a:solidFill>
-              </a:rPr>
-              <a:t/>
-            </a:r>
+            <a:endParaRPr sz="1800">
+              <a:solidFill>
+                <a:srgbClr val="212121"/>
+              </a:solidFill>
+              <a:latin typeface="Courier New"/>
+            </a:endParaRPr>
           </a:p>
           <a:p>
             <a:pPr>
@@ -8462,14 +8911,12 @@
                 <a:spcPts val="800"/>
               </a:spcAft>
             </a:pPr>
-            <a:r>
-              <a:rPr sz="2200">
-                <a:solidFill>
-                  <a:srgbClr val="212121"/>
-                </a:solidFill>
-              </a:rPr>
-              <a:t/>
-            </a:r>
+            <a:endParaRPr sz="1800">
+              <a:solidFill>
+                <a:srgbClr val="212121"/>
+              </a:solidFill>
+              <a:latin typeface="Courier New"/>
+            </a:endParaRPr>
           </a:p>
           <a:p>
             <a:pPr>
@@ -8497,7 +8944,7 @@
 </file>
 
 <file path=ppt/slides/slide32.xml><?xml version="1.0" encoding="utf-8"?>
-<p:sld xmlns:a="http://schemas.openxmlformats.org/drawingml/2006/main" xmlns:p="http://schemas.openxmlformats.org/presentationml/2006/main" xmlns:r="http://schemas.openxmlformats.org/officeDocument/2006/relationships">
+<p:sld xmlns:a="http://schemas.openxmlformats.org/drawingml/2006/main" xmlns:r="http://schemas.openxmlformats.org/officeDocument/2006/relationships" xmlns:p="http://schemas.openxmlformats.org/presentationml/2006/main">
   <p:cSld>
     <p:spTree>
       <p:nvGrpSpPr>
@@ -8505,7 +8952,14 @@
         <p:cNvGrpSpPr/>
         <p:nvPr/>
       </p:nvGrpSpPr>
-      <p:grpSpPr/>
+      <p:grpSpPr>
+        <a:xfrm>
+          <a:off x="0" y="0"/>
+          <a:ext cx="0" cy="0"/>
+          <a:chOff x="0" y="0"/>
+          <a:chExt cx="0" cy="0"/>
+        </a:xfrm>
+      </p:grpSpPr>
       <p:sp>
         <p:nvSpPr>
           <p:cNvPr id="2" name="TextBox 1"/>
@@ -8630,14 +9084,12 @@
                 <a:spcPts val="800"/>
               </a:spcAft>
             </a:pPr>
-            <a:r>
-              <a:rPr sz="2200">
-                <a:solidFill>
-                  <a:srgbClr val="212121"/>
-                </a:solidFill>
-              </a:rPr>
-              <a:t/>
-            </a:r>
+            <a:endParaRPr sz="1800">
+              <a:solidFill>
+                <a:srgbClr val="212121"/>
+              </a:solidFill>
+              <a:latin typeface="Courier New"/>
+            </a:endParaRPr>
           </a:p>
           <a:p>
             <a:pPr>
@@ -8695,7 +9147,7 @@
 </file>
 
 <file path=ppt/slides/slide33.xml><?xml version="1.0" encoding="utf-8"?>
-<p:sld xmlns:a="http://schemas.openxmlformats.org/drawingml/2006/main" xmlns:p="http://schemas.openxmlformats.org/presentationml/2006/main" xmlns:r="http://schemas.openxmlformats.org/officeDocument/2006/relationships">
+<p:sld xmlns:a="http://schemas.openxmlformats.org/drawingml/2006/main" xmlns:r="http://schemas.openxmlformats.org/officeDocument/2006/relationships" xmlns:p="http://schemas.openxmlformats.org/presentationml/2006/main">
   <p:cSld>
     <p:spTree>
       <p:nvGrpSpPr>
@@ -8703,7 +9155,14 @@
         <p:cNvGrpSpPr/>
         <p:nvPr/>
       </p:nvGrpSpPr>
-      <p:grpSpPr/>
+      <p:grpSpPr>
+        <a:xfrm>
+          <a:off x="0" y="0"/>
+          <a:ext cx="0" cy="0"/>
+          <a:chOff x="0" y="0"/>
+          <a:chExt cx="0" cy="0"/>
+        </a:xfrm>
+      </p:grpSpPr>
       <p:sp>
         <p:nvSpPr>
           <p:cNvPr id="2" name="TextBox 1"/>
@@ -8827,14 +9286,12 @@
                 <a:spcPts val="800"/>
               </a:spcAft>
             </a:pPr>
-            <a:r>
-              <a:rPr sz="2200">
-                <a:solidFill>
-                  <a:srgbClr val="212121"/>
-                </a:solidFill>
-              </a:rPr>
-              <a:t/>
-            </a:r>
+            <a:endParaRPr sz="1800">
+              <a:solidFill>
+                <a:srgbClr val="212121"/>
+              </a:solidFill>
+              <a:latin typeface="Courier New"/>
+            </a:endParaRPr>
           </a:p>
           <a:p>
             <a:pPr>
@@ -8892,7 +9349,7 @@
 </file>
 
 <file path=ppt/slides/slide34.xml><?xml version="1.0" encoding="utf-8"?>
-<p:sld xmlns:a="http://schemas.openxmlformats.org/drawingml/2006/main" xmlns:p="http://schemas.openxmlformats.org/presentationml/2006/main" xmlns:r="http://schemas.openxmlformats.org/officeDocument/2006/relationships">
+<p:sld xmlns:a="http://schemas.openxmlformats.org/drawingml/2006/main" xmlns:r="http://schemas.openxmlformats.org/officeDocument/2006/relationships" xmlns:p="http://schemas.openxmlformats.org/presentationml/2006/main">
   <p:cSld>
     <p:spTree>
       <p:nvGrpSpPr>
@@ -8900,7 +9357,14 @@
         <p:cNvGrpSpPr/>
         <p:nvPr/>
       </p:nvGrpSpPr>
-      <p:grpSpPr/>
+      <p:grpSpPr>
+        <a:xfrm>
+          <a:off x="0" y="0"/>
+          <a:ext cx="0" cy="0"/>
+          <a:chOff x="0" y="0"/>
+          <a:chExt cx="0" cy="0"/>
+        </a:xfrm>
+      </p:grpSpPr>
       <p:sp>
         <p:nvSpPr>
           <p:cNvPr id="2" name="TextBox 1"/>
@@ -9038,14 +9502,12 @@
                 <a:spcPts val="800"/>
               </a:spcAft>
             </a:pPr>
-            <a:r>
-              <a:rPr sz="2200">
-                <a:solidFill>
-                  <a:srgbClr val="212121"/>
-                </a:solidFill>
-              </a:rPr>
-              <a:t/>
-            </a:r>
+            <a:endParaRPr sz="1800">
+              <a:solidFill>
+                <a:srgbClr val="212121"/>
+              </a:solidFill>
+              <a:latin typeface="Courier New"/>
+            </a:endParaRPr>
           </a:p>
           <a:p>
             <a:pPr>
@@ -9088,7 +9550,7 @@
 </file>
 
 <file path=ppt/slides/slide35.xml><?xml version="1.0" encoding="utf-8"?>
-<p:sld xmlns:a="http://schemas.openxmlformats.org/drawingml/2006/main" xmlns:p="http://schemas.openxmlformats.org/presentationml/2006/main" xmlns:r="http://schemas.openxmlformats.org/officeDocument/2006/relationships">
+<p:sld xmlns:a="http://schemas.openxmlformats.org/drawingml/2006/main" xmlns:r="http://schemas.openxmlformats.org/officeDocument/2006/relationships" xmlns:p="http://schemas.openxmlformats.org/presentationml/2006/main">
   <p:cSld>
     <p:spTree>
       <p:nvGrpSpPr>
@@ -9096,7 +9558,14 @@
         <p:cNvGrpSpPr/>
         <p:nvPr/>
       </p:nvGrpSpPr>
-      <p:grpSpPr/>
+      <p:grpSpPr>
+        <a:xfrm>
+          <a:off x="0" y="0"/>
+          <a:ext cx="0" cy="0"/>
+          <a:chOff x="0" y="0"/>
+          <a:chExt cx="0" cy="0"/>
+        </a:xfrm>
+      </p:grpSpPr>
       <p:sp>
         <p:nvSpPr>
           <p:cNvPr id="2" name="TextBox 1"/>
@@ -9168,7 +9637,7 @@
           </a:fontRef>
         </p:style>
         <p:txBody>
-          <a:bodyPr rtlCol="0" anchor="ctr" wrap="square"/>
+          <a:bodyPr wrap="square" rtlCol="0" anchor="ctr"/>
           <a:lstStyle/>
           <a:p>
             <a:pPr algn="ctr"/>
@@ -9221,7 +9690,7 @@
           </a:fontRef>
         </p:style>
         <p:txBody>
-          <a:bodyPr rtlCol="0" anchor="ctr" wrap="square"/>
+          <a:bodyPr wrap="square" rtlCol="0" anchor="ctr"/>
           <a:lstStyle/>
           <a:p>
             <a:pPr algn="ctr"/>
@@ -9276,6 +9745,7 @@
           <a:lstStyle/>
           <a:p>
             <a:pPr algn="ctr"/>
+            <a:endParaRPr/>
           </a:p>
         </p:txBody>
       </p:sp>
@@ -9317,7 +9787,7 @@
           </a:fontRef>
         </p:style>
         <p:txBody>
-          <a:bodyPr rtlCol="0" anchor="ctr" wrap="square"/>
+          <a:bodyPr wrap="square" rtlCol="0" anchor="ctr"/>
           <a:lstStyle/>
           <a:p>
             <a:pPr algn="ctr"/>
@@ -9373,6 +9843,7 @@
           <a:lstStyle/>
           <a:p>
             <a:pPr algn="ctr"/>
+            <a:endParaRPr/>
           </a:p>
         </p:txBody>
       </p:sp>
@@ -9414,7 +9885,7 @@
           </a:fontRef>
         </p:style>
         <p:txBody>
-          <a:bodyPr rtlCol="0" anchor="ctr" wrap="square"/>
+          <a:bodyPr wrap="square" rtlCol="0" anchor="ctr"/>
           <a:lstStyle/>
           <a:p>
             <a:pPr algn="ctr"/>
@@ -9469,6 +9940,7 @@
           <a:lstStyle/>
           <a:p>
             <a:pPr algn="ctr"/>
+            <a:endParaRPr/>
           </a:p>
         </p:txBody>
       </p:sp>
@@ -9510,7 +9982,7 @@
           </a:fontRef>
         </p:style>
         <p:txBody>
-          <a:bodyPr rtlCol="0" anchor="ctr" wrap="square"/>
+          <a:bodyPr wrap="square" rtlCol="0" anchor="ctr"/>
           <a:lstStyle/>
           <a:p>
             <a:pPr algn="ctr"/>
@@ -9565,6 +10037,7 @@
           <a:lstStyle/>
           <a:p>
             <a:pPr algn="ctr"/>
+            <a:endParaRPr/>
           </a:p>
         </p:txBody>
       </p:sp>
@@ -9625,14 +10098,11 @@
                 <a:spcPts val="800"/>
               </a:spcAft>
             </a:pPr>
-            <a:r>
-              <a:rPr sz="2400">
-                <a:solidFill>
-                  <a:srgbClr val="212121"/>
-                </a:solidFill>
-              </a:rPr>
-              <a:t/>
-            </a:r>
+            <a:endParaRPr sz="2400">
+              <a:solidFill>
+                <a:srgbClr val="212121"/>
+              </a:solidFill>
+            </a:endParaRPr>
           </a:p>
           <a:p>
             <a:pPr>
@@ -9660,7 +10130,7 @@
 </file>
 
 <file path=ppt/slides/slide36.xml><?xml version="1.0" encoding="utf-8"?>
-<p:sld xmlns:a="http://schemas.openxmlformats.org/drawingml/2006/main" xmlns:p="http://schemas.openxmlformats.org/presentationml/2006/main" xmlns:r="http://schemas.openxmlformats.org/officeDocument/2006/relationships">
+<p:sld xmlns:a="http://schemas.openxmlformats.org/drawingml/2006/main" xmlns:r="http://schemas.openxmlformats.org/officeDocument/2006/relationships" xmlns:p="http://schemas.openxmlformats.org/presentationml/2006/main">
   <p:cSld>
     <p:spTree>
       <p:nvGrpSpPr>
@@ -9668,7 +10138,14 @@
         <p:cNvGrpSpPr/>
         <p:nvPr/>
       </p:nvGrpSpPr>
-      <p:grpSpPr/>
+      <p:grpSpPr>
+        <a:xfrm>
+          <a:off x="0" y="0"/>
+          <a:ext cx="0" cy="0"/>
+          <a:chOff x="0" y="0"/>
+          <a:chExt cx="0" cy="0"/>
+        </a:xfrm>
+      </p:grpSpPr>
       <p:sp>
         <p:nvSpPr>
           <p:cNvPr id="2" name="TextBox 1"/>
@@ -9745,13 +10222,26 @@
                 <a:spcPts val="800"/>
               </a:spcAft>
             </a:pPr>
+            <a:endParaRPr sz="2000">
+              <a:solidFill>
+                <a:srgbClr val="212121"/>
+              </a:solidFill>
+              <a:latin typeface="Courier New"/>
+            </a:endParaRPr>
+          </a:p>
+          <a:p>
+            <a:pPr>
+              <a:spcAft>
+                <a:spcPts val="800"/>
+              </a:spcAft>
+            </a:pPr>
             <a:r>
               <a:rPr sz="2400">
                 <a:solidFill>
                   <a:srgbClr val="212121"/>
                 </a:solidFill>
               </a:rPr>
-              <a:t/>
+              <a:t>--unwind k copies the loop body k times, each copy guarded by the loop condition.</a:t>
             </a:r>
           </a:p>
           <a:p>
@@ -9766,21 +10256,6 @@
                   <a:srgbClr val="212121"/>
                 </a:solidFill>
               </a:rPr>
-              <a:t>--unwind k copies the loop body k times, each copy guarded by the loop condition.</a:t>
-            </a:r>
-          </a:p>
-          <a:p>
-            <a:pPr>
-              <a:spcAft>
-                <a:spcPts val="800"/>
-              </a:spcAft>
-            </a:pPr>
-            <a:r>
-              <a:rPr sz="2400">
-                <a:solidFill>
-                  <a:srgbClr val="212121"/>
-                </a:solidFill>
-              </a:rPr>
               <a:t>Then one extra check, the unwinding assertion:</a:t>
             </a:r>
           </a:p>
@@ -9805,14 +10280,11 @@
                 <a:spcPts val="800"/>
               </a:spcAft>
             </a:pPr>
-            <a:r>
-              <a:rPr sz="2400">
-                <a:solidFill>
-                  <a:srgbClr val="212121"/>
-                </a:solidFill>
-              </a:rPr>
-              <a:t/>
-            </a:r>
+            <a:endParaRPr sz="2200">
+              <a:solidFill>
+                <a:srgbClr val="212121"/>
+              </a:solidFill>
+            </a:endParaRPr>
           </a:p>
           <a:p>
             <a:pPr>
@@ -9840,7 +10312,7 @@
 </file>
 
 <file path=ppt/slides/slide37.xml><?xml version="1.0" encoding="utf-8"?>
-<p:sld xmlns:a="http://schemas.openxmlformats.org/drawingml/2006/main" xmlns:p="http://schemas.openxmlformats.org/presentationml/2006/main" xmlns:r="http://schemas.openxmlformats.org/officeDocument/2006/relationships">
+<p:sld xmlns:a="http://schemas.openxmlformats.org/drawingml/2006/main" xmlns:r="http://schemas.openxmlformats.org/officeDocument/2006/relationships" xmlns:p="http://schemas.openxmlformats.org/presentationml/2006/main">
   <p:cSld>
     <p:spTree>
       <p:nvGrpSpPr>
@@ -9848,7 +10320,14 @@
         <p:cNvGrpSpPr/>
         <p:nvPr/>
       </p:nvGrpSpPr>
-      <p:grpSpPr/>
+      <p:grpSpPr>
+        <a:xfrm>
+          <a:off x="0" y="0"/>
+          <a:ext cx="0" cy="0"/>
+          <a:chOff x="0" y="0"/>
+          <a:chExt cx="0" cy="0"/>
+        </a:xfrm>
+      </p:grpSpPr>
       <p:sp>
         <p:nvSpPr>
           <p:cNvPr id="2" name="TextBox 1"/>
@@ -9892,7 +10371,7 @@
         </p:nvGraphicFramePr>
         <p:xfrm>
           <a:off x="731520" y="1554480"/>
-          <a:ext cx="10698480" cy="1463040"/>
+          <a:ext cx="10698480" cy="1889760"/>
         </p:xfrm>
         <a:graphic>
           <a:graphicData uri="http://schemas.openxmlformats.org/drawingml/2006/table">
@@ -9901,8 +10380,20 @@
                 <a:tableStyleId>{5C22544A-7EE6-4342-B048-85BDC9FD1C3A}</a:tableStyleId>
               </a:tblPr>
               <a:tblGrid>
-                <a:gridCol w="4572000"/>
-                <a:gridCol w="6126480"/>
+                <a:gridCol w="4572000">
+                  <a:extLst>
+                    <a:ext uri="{9D8B030D-6E8A-4147-A177-3AD203B41FA5}">
+                      <a16:colId xmlns:a16="http://schemas.microsoft.com/office/drawing/2014/main" val="20000"/>
+                    </a:ext>
+                  </a:extLst>
+                </a:gridCol>
+                <a:gridCol w="6126480">
+                  <a:extLst>
+                    <a:ext uri="{9D8B030D-6E8A-4147-A177-3AD203B41FA5}">
+                      <a16:colId xmlns:a16="http://schemas.microsoft.com/office/drawing/2014/main" val="20001"/>
+                    </a:ext>
+                  </a:extLst>
+                </a:gridCol>
               </a:tblGrid>
               <a:tr h="365760">
                 <a:tc>
@@ -9931,6 +10422,11 @@
                   </a:txBody>
                   <a:tcPr/>
                 </a:tc>
+                <a:extLst>
+                  <a:ext uri="{0D108BD9-81ED-4DB2-BD59-A6C34878D82A}">
+                    <a16:rowId xmlns:a16="http://schemas.microsoft.com/office/drawing/2014/main" val="10000"/>
+                  </a:ext>
+                </a:extLst>
               </a:tr>
               <a:tr h="365760">
                 <a:tc>
@@ -9959,6 +10455,11 @@
                   </a:txBody>
                   <a:tcPr/>
                 </a:tc>
+                <a:extLst>
+                  <a:ext uri="{0D108BD9-81ED-4DB2-BD59-A6C34878D82A}">
+                    <a16:rowId xmlns:a16="http://schemas.microsoft.com/office/drawing/2014/main" val="10001"/>
+                  </a:ext>
+                </a:extLst>
               </a:tr>
               <a:tr h="365760">
                 <a:tc>
@@ -9987,6 +10488,11 @@
                   </a:txBody>
                   <a:tcPr/>
                 </a:tc>
+                <a:extLst>
+                  <a:ext uri="{0D108BD9-81ED-4DB2-BD59-A6C34878D82A}">
+                    <a16:rowId xmlns:a16="http://schemas.microsoft.com/office/drawing/2014/main" val="10002"/>
+                  </a:ext>
+                </a:extLst>
               </a:tr>
               <a:tr h="365760">
                 <a:tc>
@@ -10015,6 +10521,11 @@
                   </a:txBody>
                   <a:tcPr/>
                 </a:tc>
+                <a:extLst>
+                  <a:ext uri="{0D108BD9-81ED-4DB2-BD59-A6C34878D82A}">
+                    <a16:rowId xmlns:a16="http://schemas.microsoft.com/office/drawing/2014/main" val="10003"/>
+                  </a:ext>
+                </a:extLst>
               </a:tr>
             </a:tbl>
           </a:graphicData>
@@ -10082,7 +10593,7 @@
 </file>
 
 <file path=ppt/slides/slide38.xml><?xml version="1.0" encoding="utf-8"?>
-<p:sld xmlns:a="http://schemas.openxmlformats.org/drawingml/2006/main" xmlns:p="http://schemas.openxmlformats.org/presentationml/2006/main" xmlns:r="http://schemas.openxmlformats.org/officeDocument/2006/relationships">
+<p:sld xmlns:a="http://schemas.openxmlformats.org/drawingml/2006/main" xmlns:r="http://schemas.openxmlformats.org/officeDocument/2006/relationships" xmlns:p="http://schemas.openxmlformats.org/presentationml/2006/main">
   <p:cSld>
     <p:spTree>
       <p:nvGrpSpPr>
@@ -10090,7 +10601,14 @@
         <p:cNvGrpSpPr/>
         <p:nvPr/>
       </p:nvGrpSpPr>
-      <p:grpSpPr/>
+      <p:grpSpPr>
+        <a:xfrm>
+          <a:off x="0" y="0"/>
+          <a:ext cx="0" cy="0"/>
+          <a:chOff x="0" y="0"/>
+          <a:chExt cx="0" cy="0"/>
+        </a:xfrm>
+      </p:grpSpPr>
       <p:sp>
         <p:nvSpPr>
           <p:cNvPr id="2" name="TextBox 1"/>
@@ -10199,14 +10717,12 @@
                 <a:spcPts val="800"/>
               </a:spcAft>
             </a:pPr>
-            <a:r>
-              <a:rPr sz="2400">
-                <a:solidFill>
-                  <a:srgbClr val="212121"/>
-                </a:solidFill>
-              </a:rPr>
-              <a:t/>
-            </a:r>
+            <a:endParaRPr sz="2000">
+              <a:solidFill>
+                <a:srgbClr val="212121"/>
+              </a:solidFill>
+              <a:latin typeface="Courier New"/>
+            </a:endParaRPr>
           </a:p>
           <a:p>
             <a:pPr>
@@ -10249,7 +10765,7 @@
 </file>
 
 <file path=ppt/slides/slide39.xml><?xml version="1.0" encoding="utf-8"?>
-<p:sld xmlns:a="http://schemas.openxmlformats.org/drawingml/2006/main" xmlns:p="http://schemas.openxmlformats.org/presentationml/2006/main" xmlns:r="http://schemas.openxmlformats.org/officeDocument/2006/relationships">
+<p:sld xmlns:a="http://schemas.openxmlformats.org/drawingml/2006/main" xmlns:r="http://schemas.openxmlformats.org/officeDocument/2006/relationships" xmlns:p="http://schemas.openxmlformats.org/presentationml/2006/main">
   <p:cSld>
     <p:spTree>
       <p:nvGrpSpPr>
@@ -10257,7 +10773,14 @@
         <p:cNvGrpSpPr/>
         <p:nvPr/>
       </p:nvGrpSpPr>
-      <p:grpSpPr/>
+      <p:grpSpPr>
+        <a:xfrm>
+          <a:off x="0" y="0"/>
+          <a:ext cx="0" cy="0"/>
+          <a:chOff x="0" y="0"/>
+          <a:chExt cx="0" cy="0"/>
+        </a:xfrm>
+      </p:grpSpPr>
       <p:sp>
         <p:nvSpPr>
           <p:cNvPr id="2" name="TextBox 1"/>
@@ -10334,13 +10857,26 @@
                 <a:spcPts val="800"/>
               </a:spcAft>
             </a:pPr>
+            <a:endParaRPr sz="2200">
+              <a:solidFill>
+                <a:srgbClr val="212121"/>
+              </a:solidFill>
+              <a:latin typeface="Courier New"/>
+            </a:endParaRPr>
+          </a:p>
+          <a:p>
+            <a:pPr>
+              <a:spcAft>
+                <a:spcPts val="800"/>
+              </a:spcAft>
+            </a:pPr>
             <a:r>
               <a:rPr sz="2600">
                 <a:solidFill>
                   <a:srgbClr val="212121"/>
                 </a:solidFill>
               </a:rPr>
-              <a:t/>
+              <a:t>sat — the model assigns every input and every choice: replayed in program order, that is the counterexample trace.</a:t>
             </a:r>
           </a:p>
           <a:p>
@@ -10355,21 +10891,6 @@
                   <a:srgbClr val="212121"/>
                 </a:solidFill>
               </a:rPr>
-              <a:t>sat — the model assigns every input and every choice: replayed in program order, that is the counterexample trace.</a:t>
-            </a:r>
-          </a:p>
-          <a:p>
-            <a:pPr>
-              <a:spcAft>
-                <a:spcPts val="800"/>
-              </a:spcAft>
-            </a:pPr>
-            <a:r>
-              <a:rPr sz="2600">
-                <a:solidFill>
-                  <a:srgbClr val="212121"/>
-                </a:solidFill>
-              </a:rPr>
               <a:t>unsat — no execution within the bound violates P.</a:t>
             </a:r>
           </a:p>
@@ -10379,14 +10900,11 @@
                 <a:spcPts val="800"/>
               </a:spcAft>
             </a:pPr>
-            <a:r>
-              <a:rPr sz="2600">
-                <a:solidFill>
-                  <a:srgbClr val="212121"/>
-                </a:solidFill>
-              </a:rPr>
-              <a:t/>
-            </a:r>
+            <a:endParaRPr sz="2600">
+              <a:solidFill>
+                <a:srgbClr val="212121"/>
+              </a:solidFill>
+            </a:endParaRPr>
           </a:p>
           <a:p>
             <a:pPr>
@@ -10414,7 +10932,7 @@
 </file>
 
 <file path=ppt/slides/slide4.xml><?xml version="1.0" encoding="utf-8"?>
-<p:sld xmlns:a="http://schemas.openxmlformats.org/drawingml/2006/main" xmlns:p="http://schemas.openxmlformats.org/presentationml/2006/main" xmlns:r="http://schemas.openxmlformats.org/officeDocument/2006/relationships">
+<p:sld xmlns:a="http://schemas.openxmlformats.org/drawingml/2006/main" xmlns:r="http://schemas.openxmlformats.org/officeDocument/2006/relationships" xmlns:p="http://schemas.openxmlformats.org/presentationml/2006/main">
   <p:cSld>
     <p:spTree>
       <p:nvGrpSpPr>
@@ -10422,7 +10940,14 @@
         <p:cNvGrpSpPr/>
         <p:nvPr/>
       </p:nvGrpSpPr>
-      <p:grpSpPr/>
+      <p:grpSpPr>
+        <a:xfrm>
+          <a:off x="0" y="0"/>
+          <a:ext cx="0" cy="0"/>
+          <a:chOff x="0" y="0"/>
+          <a:chExt cx="0" cy="0"/>
+        </a:xfrm>
+      </p:grpSpPr>
       <p:sp>
         <p:nvSpPr>
           <p:cNvPr id="2" name="TextBox 1"/>
@@ -10573,14 +11098,11 @@
                 <a:spcPts val="800"/>
               </a:spcAft>
             </a:pPr>
-            <a:r>
-              <a:rPr sz="2200">
-                <a:solidFill>
-                  <a:srgbClr val="212121"/>
-                </a:solidFill>
-              </a:rPr>
-              <a:t/>
-            </a:r>
+            <a:endParaRPr sz="2000">
+              <a:solidFill>
+                <a:srgbClr val="212121"/>
+              </a:solidFill>
+            </a:endParaRPr>
           </a:p>
           <a:p>
             <a:pPr>
@@ -10608,7 +11130,7 @@
 </file>
 
 <file path=ppt/slides/slide40.xml><?xml version="1.0" encoding="utf-8"?>
-<p:sld xmlns:a="http://schemas.openxmlformats.org/drawingml/2006/main" xmlns:p="http://schemas.openxmlformats.org/presentationml/2006/main" xmlns:r="http://schemas.openxmlformats.org/officeDocument/2006/relationships">
+<p:sld xmlns:a="http://schemas.openxmlformats.org/drawingml/2006/main" xmlns:r="http://schemas.openxmlformats.org/officeDocument/2006/relationships" xmlns:p="http://schemas.openxmlformats.org/presentationml/2006/main">
   <p:cSld>
     <p:spTree>
       <p:nvGrpSpPr>
@@ -10616,7 +11138,14 @@
         <p:cNvGrpSpPr/>
         <p:nvPr/>
       </p:nvGrpSpPr>
-      <p:grpSpPr/>
+      <p:grpSpPr>
+        <a:xfrm>
+          <a:off x="0" y="0"/>
+          <a:ext cx="0" cy="0"/>
+          <a:chOff x="0" y="0"/>
+          <a:chExt cx="0" cy="0"/>
+        </a:xfrm>
+      </p:grpSpPr>
       <p:sp>
         <p:nvSpPr>
           <p:cNvPr id="2" name="TextBox 1"/>
@@ -10773,14 +11302,12 @@
                 <a:spcPts val="800"/>
               </a:spcAft>
             </a:pPr>
-            <a:r>
-              <a:rPr sz="2200">
-                <a:solidFill>
-                  <a:srgbClr val="212121"/>
-                </a:solidFill>
-              </a:rPr>
-              <a:t/>
-            </a:r>
+            <a:endParaRPr sz="1800">
+              <a:solidFill>
+                <a:srgbClr val="212121"/>
+              </a:solidFill>
+              <a:latin typeface="Courier New"/>
+            </a:endParaRPr>
           </a:p>
           <a:p>
             <a:pPr>
@@ -10823,7 +11350,7 @@
 </file>
 
 <file path=ppt/slides/slide41.xml><?xml version="1.0" encoding="utf-8"?>
-<p:sld xmlns:a="http://schemas.openxmlformats.org/drawingml/2006/main" xmlns:p="http://schemas.openxmlformats.org/presentationml/2006/main" xmlns:r="http://schemas.openxmlformats.org/officeDocument/2006/relationships">
+<p:sld xmlns:a="http://schemas.openxmlformats.org/drawingml/2006/main" xmlns:r="http://schemas.openxmlformats.org/officeDocument/2006/relationships" xmlns:p="http://schemas.openxmlformats.org/presentationml/2006/main">
   <p:cSld>
     <p:spTree>
       <p:nvGrpSpPr>
@@ -10831,7 +11358,14 @@
         <p:cNvGrpSpPr/>
         <p:nvPr/>
       </p:nvGrpSpPr>
-      <p:grpSpPr/>
+      <p:grpSpPr>
+        <a:xfrm>
+          <a:off x="0" y="0"/>
+          <a:ext cx="0" cy="0"/>
+          <a:chOff x="0" y="0"/>
+          <a:chExt cx="0" cy="0"/>
+        </a:xfrm>
+      </p:grpSpPr>
       <p:sp>
         <p:nvSpPr>
           <p:cNvPr id="2" name="TextBox 1"/>
@@ -10988,6 +11522,19 @@
                 <a:spcPts val="0"/>
               </a:spcAft>
             </a:pPr>
+            <a:endParaRPr sz="1800">
+              <a:solidFill>
+                <a:srgbClr val="212121"/>
+              </a:solidFill>
+              <a:latin typeface="Courier New"/>
+            </a:endParaRPr>
+          </a:p>
+          <a:p>
+            <a:pPr>
+              <a:spcAft>
+                <a:spcPts val="0"/>
+              </a:spcAft>
+            </a:pPr>
             <a:r>
               <a:rPr sz="1800">
                 <a:solidFill>
@@ -10995,22 +11542,6 @@
                 </a:solidFill>
                 <a:latin typeface="Courier New"/>
               </a:rPr>
-              <a:t/>
-            </a:r>
-          </a:p>
-          <a:p>
-            <a:pPr>
-              <a:spcAft>
-                <a:spcPts val="0"/>
-              </a:spcAft>
-            </a:pPr>
-            <a:r>
-              <a:rPr sz="1800">
-                <a:solidFill>
-                  <a:srgbClr val="212121"/>
-                </a:solidFill>
-                <a:latin typeface="Courier New"/>
-              </a:rPr>
               <a:t>$ esbmc offbyone.c --unwind 7</a:t>
             </a:r>
           </a:p>
@@ -11020,14 +11551,12 @@
                 <a:spcPts val="800"/>
               </a:spcAft>
             </a:pPr>
-            <a:r>
-              <a:rPr sz="2200">
-                <a:solidFill>
-                  <a:srgbClr val="212121"/>
-                </a:solidFill>
-              </a:rPr>
-              <a:t/>
-            </a:r>
+            <a:endParaRPr sz="1800">
+              <a:solidFill>
+                <a:srgbClr val="212121"/>
+              </a:solidFill>
+              <a:latin typeface="Courier New"/>
+            </a:endParaRPr>
           </a:p>
           <a:p>
             <a:pPr>
@@ -11070,7 +11599,7 @@
 </file>
 
 <file path=ppt/slides/slide42.xml><?xml version="1.0" encoding="utf-8"?>
-<p:sld xmlns:a="http://schemas.openxmlformats.org/drawingml/2006/main" xmlns:p="http://schemas.openxmlformats.org/presentationml/2006/main" xmlns:r="http://schemas.openxmlformats.org/officeDocument/2006/relationships">
+<p:sld xmlns:a="http://schemas.openxmlformats.org/drawingml/2006/main" xmlns:r="http://schemas.openxmlformats.org/officeDocument/2006/relationships" xmlns:p="http://schemas.openxmlformats.org/presentationml/2006/main">
   <p:cSld>
     <p:spTree>
       <p:nvGrpSpPr>
@@ -11078,7 +11607,14 @@
         <p:cNvGrpSpPr/>
         <p:nvPr/>
       </p:nvGrpSpPr>
-      <p:grpSpPr/>
+      <p:grpSpPr>
+        <a:xfrm>
+          <a:off x="0" y="0"/>
+          <a:ext cx="0" cy="0"/>
+          <a:chOff x="0" y="0"/>
+          <a:chExt cx="0" cy="0"/>
+        </a:xfrm>
+      </p:grpSpPr>
       <p:sp>
         <p:nvSpPr>
           <p:cNvPr id="2" name="TextBox 1"/>
@@ -11187,14 +11723,12 @@
                 <a:spcPts val="800"/>
               </a:spcAft>
             </a:pPr>
-            <a:r>
-              <a:rPr sz="2200">
-                <a:solidFill>
-                  <a:srgbClr val="212121"/>
-                </a:solidFill>
-              </a:rPr>
-              <a:t/>
-            </a:r>
+            <a:endParaRPr sz="1800">
+              <a:solidFill>
+                <a:srgbClr val="212121"/>
+              </a:solidFill>
+              <a:latin typeface="Courier New"/>
+            </a:endParaRPr>
           </a:p>
           <a:p>
             <a:pPr>
@@ -11237,7 +11771,7 @@
 </file>
 
 <file path=ppt/slides/slide43.xml><?xml version="1.0" encoding="utf-8"?>
-<p:sld xmlns:a="http://schemas.openxmlformats.org/drawingml/2006/main" xmlns:p="http://schemas.openxmlformats.org/presentationml/2006/main" xmlns:r="http://schemas.openxmlformats.org/officeDocument/2006/relationships">
+<p:sld xmlns:a="http://schemas.openxmlformats.org/drawingml/2006/main" xmlns:r="http://schemas.openxmlformats.org/officeDocument/2006/relationships" xmlns:p="http://schemas.openxmlformats.org/presentationml/2006/main">
   <p:cSld>
     <p:spTree>
       <p:nvGrpSpPr>
@@ -11245,7 +11779,14 @@
         <p:cNvGrpSpPr/>
         <p:nvPr/>
       </p:nvGrpSpPr>
-      <p:grpSpPr/>
+      <p:grpSpPr>
+        <a:xfrm>
+          <a:off x="0" y="0"/>
+          <a:ext cx="0" cy="0"/>
+          <a:chOff x="0" y="0"/>
+          <a:chExt cx="0" cy="0"/>
+        </a:xfrm>
+      </p:grpSpPr>
       <p:sp>
         <p:nvSpPr>
           <p:cNvPr id="2" name="TextBox 1"/>
@@ -11351,14 +11892,11 @@
                 <a:spcPts val="800"/>
               </a:spcAft>
             </a:pPr>
-            <a:r>
-              <a:rPr sz="2400">
-                <a:solidFill>
-                  <a:srgbClr val="212121"/>
-                </a:solidFill>
-              </a:rPr>
-              <a:t/>
-            </a:r>
+            <a:endParaRPr sz="2400">
+              <a:solidFill>
+                <a:srgbClr val="212121"/>
+              </a:solidFill>
+            </a:endParaRPr>
           </a:p>
           <a:p>
             <a:pPr>
@@ -11386,7 +11924,7 @@
 </file>
 
 <file path=ppt/slides/slide44.xml><?xml version="1.0" encoding="utf-8"?>
-<p:sld xmlns:a="http://schemas.openxmlformats.org/drawingml/2006/main" xmlns:p="http://schemas.openxmlformats.org/presentationml/2006/main" xmlns:r="http://schemas.openxmlformats.org/officeDocument/2006/relationships">
+<p:sld xmlns:a="http://schemas.openxmlformats.org/drawingml/2006/main" xmlns:r="http://schemas.openxmlformats.org/officeDocument/2006/relationships" xmlns:p="http://schemas.openxmlformats.org/presentationml/2006/main">
   <p:cSld>
     <p:spTree>
       <p:nvGrpSpPr>
@@ -11394,7 +11932,14 @@
         <p:cNvGrpSpPr/>
         <p:nvPr/>
       </p:nvGrpSpPr>
-      <p:grpSpPr/>
+      <p:grpSpPr>
+        <a:xfrm>
+          <a:off x="0" y="0"/>
+          <a:ext cx="0" cy="0"/>
+          <a:chOff x="0" y="0"/>
+          <a:chExt cx="0" cy="0"/>
+        </a:xfrm>
+      </p:grpSpPr>
       <p:sp>
         <p:nvSpPr>
           <p:cNvPr id="2" name="TextBox 1"/>
@@ -11487,27 +12032,25 @@
                 <a:spcPts val="800"/>
               </a:spcAft>
             </a:pPr>
+            <a:endParaRPr sz="2200">
+              <a:solidFill>
+                <a:srgbClr val="212121"/>
+              </a:solidFill>
+              <a:latin typeface="Courier New"/>
+            </a:endParaRPr>
+          </a:p>
+          <a:p>
+            <a:pPr>
+              <a:spcAft>
+                <a:spcPts val="800"/>
+              </a:spcAft>
+            </a:pPr>
             <a:r>
               <a:rPr sz="2600">
                 <a:solidFill>
                   <a:srgbClr val="212121"/>
                 </a:solidFill>
               </a:rPr>
-              <a:t/>
-            </a:r>
-          </a:p>
-          <a:p>
-            <a:pPr>
-              <a:spcAft>
-                <a:spcPts val="800"/>
-              </a:spcAft>
-            </a:pPr>
-            <a:r>
-              <a:rPr sz="2600">
-                <a:solidFill>
-                  <a:srgbClr val="212121"/>
-                </a:solidFill>
-              </a:rPr>
               <a:t>FAILED or SUCCESSFUL?</a:t>
             </a:r>
           </a:p>
@@ -11517,14 +12060,11 @@
                 <a:spcPts val="800"/>
               </a:spcAft>
             </a:pPr>
-            <a:r>
-              <a:rPr sz="2600">
-                <a:solidFill>
-                  <a:srgbClr val="212121"/>
-                </a:solidFill>
-              </a:rPr>
-              <a:t/>
-            </a:r>
+            <a:endParaRPr sz="2600">
+              <a:solidFill>
+                <a:srgbClr val="212121"/>
+              </a:solidFill>
+            </a:endParaRPr>
           </a:p>
           <a:p>
             <a:pPr>
@@ -11567,7 +12107,7 @@
 </file>
 
 <file path=ppt/slides/slide45.xml><?xml version="1.0" encoding="utf-8"?>
-<p:sld xmlns:a="http://schemas.openxmlformats.org/drawingml/2006/main" xmlns:p="http://schemas.openxmlformats.org/presentationml/2006/main" xmlns:r="http://schemas.openxmlformats.org/officeDocument/2006/relationships">
+<p:sld xmlns:a="http://schemas.openxmlformats.org/drawingml/2006/main" xmlns:r="http://schemas.openxmlformats.org/officeDocument/2006/relationships" xmlns:p="http://schemas.openxmlformats.org/presentationml/2006/main">
   <p:cSld>
     <p:spTree>
       <p:nvGrpSpPr>
@@ -11575,7 +12115,14 @@
         <p:cNvGrpSpPr/>
         <p:nvPr/>
       </p:nvGrpSpPr>
-      <p:grpSpPr/>
+      <p:grpSpPr>
+        <a:xfrm>
+          <a:off x="0" y="0"/>
+          <a:ext cx="0" cy="0"/>
+          <a:chOff x="0" y="0"/>
+          <a:chExt cx="0" cy="0"/>
+        </a:xfrm>
+      </p:grpSpPr>
       <p:sp>
         <p:nvSpPr>
           <p:cNvPr id="2" name="TextBox 1"/>
@@ -11716,7 +12263,7 @@
 </file>
 
 <file path=ppt/slides/slide46.xml><?xml version="1.0" encoding="utf-8"?>
-<p:sld xmlns:a="http://schemas.openxmlformats.org/drawingml/2006/main" xmlns:p="http://schemas.openxmlformats.org/presentationml/2006/main" xmlns:r="http://schemas.openxmlformats.org/officeDocument/2006/relationships">
+<p:sld xmlns:a="http://schemas.openxmlformats.org/drawingml/2006/main" xmlns:r="http://schemas.openxmlformats.org/officeDocument/2006/relationships" xmlns:p="http://schemas.openxmlformats.org/presentationml/2006/main">
   <p:cSld>
     <p:spTree>
       <p:nvGrpSpPr>
@@ -11724,7 +12271,14 @@
         <p:cNvGrpSpPr/>
         <p:nvPr/>
       </p:nvGrpSpPr>
-      <p:grpSpPr/>
+      <p:grpSpPr>
+        <a:xfrm>
+          <a:off x="0" y="0"/>
+          <a:ext cx="0" cy="0"/>
+          <a:chOff x="0" y="0"/>
+          <a:chExt cx="0" cy="0"/>
+        </a:xfrm>
+      </p:grpSpPr>
       <p:sp>
         <p:nvSpPr>
           <p:cNvPr id="2" name="TextBox 1"/>
@@ -11835,7 +12389,7 @@
 </file>
 
 <file path=ppt/slides/slide47.xml><?xml version="1.0" encoding="utf-8"?>
-<p:sld xmlns:a="http://schemas.openxmlformats.org/drawingml/2006/main" xmlns:p="http://schemas.openxmlformats.org/presentationml/2006/main" xmlns:r="http://schemas.openxmlformats.org/officeDocument/2006/relationships">
+<p:sld xmlns:a="http://schemas.openxmlformats.org/drawingml/2006/main" xmlns:r="http://schemas.openxmlformats.org/officeDocument/2006/relationships" xmlns:p="http://schemas.openxmlformats.org/presentationml/2006/main">
   <p:cSld>
     <p:spTree>
       <p:nvGrpSpPr>
@@ -11843,7 +12397,14 @@
         <p:cNvGrpSpPr/>
         <p:nvPr/>
       </p:nvGrpSpPr>
-      <p:grpSpPr/>
+      <p:grpSpPr>
+        <a:xfrm>
+          <a:off x="0" y="0"/>
+          <a:ext cx="0" cy="0"/>
+          <a:chOff x="0" y="0"/>
+          <a:chExt cx="0" cy="0"/>
+        </a:xfrm>
+      </p:grpSpPr>
       <p:sp>
         <p:nvSpPr>
           <p:cNvPr id="2" name="TextBox 1"/>
@@ -11969,7 +12530,7 @@
 </file>
 
 <file path=ppt/slides/slide48.xml><?xml version="1.0" encoding="utf-8"?>
-<p:sld xmlns:a="http://schemas.openxmlformats.org/drawingml/2006/main" xmlns:p="http://schemas.openxmlformats.org/presentationml/2006/main" xmlns:r="http://schemas.openxmlformats.org/officeDocument/2006/relationships">
+<p:sld xmlns:a="http://schemas.openxmlformats.org/drawingml/2006/main" xmlns:r="http://schemas.openxmlformats.org/officeDocument/2006/relationships" xmlns:p="http://schemas.openxmlformats.org/presentationml/2006/main">
   <p:cSld>
     <p:spTree>
       <p:nvGrpSpPr>
@@ -11977,7 +12538,14 @@
         <p:cNvGrpSpPr/>
         <p:nvPr/>
       </p:nvGrpSpPr>
-      <p:grpSpPr/>
+      <p:grpSpPr>
+        <a:xfrm>
+          <a:off x="0" y="0"/>
+          <a:ext cx="0" cy="0"/>
+          <a:chOff x="0" y="0"/>
+          <a:chExt cx="0" cy="0"/>
+        </a:xfrm>
+      </p:grpSpPr>
       <p:sp>
         <p:nvSpPr>
           <p:cNvPr id="2" name="TextBox 1"/>
@@ -12088,7 +12656,7 @@
 </file>
 
 <file path=ppt/slides/slide49.xml><?xml version="1.0" encoding="utf-8"?>
-<p:sld xmlns:a="http://schemas.openxmlformats.org/drawingml/2006/main" xmlns:p="http://schemas.openxmlformats.org/presentationml/2006/main" xmlns:r="http://schemas.openxmlformats.org/officeDocument/2006/relationships">
+<p:sld xmlns:a="http://schemas.openxmlformats.org/drawingml/2006/main" xmlns:r="http://schemas.openxmlformats.org/officeDocument/2006/relationships" xmlns:p="http://schemas.openxmlformats.org/presentationml/2006/main">
   <p:cSld>
     <p:spTree>
       <p:nvGrpSpPr>
@@ -12096,7 +12664,14 @@
         <p:cNvGrpSpPr/>
         <p:nvPr/>
       </p:nvGrpSpPr>
-      <p:grpSpPr/>
+      <p:grpSpPr>
+        <a:xfrm>
+          <a:off x="0" y="0"/>
+          <a:ext cx="0" cy="0"/>
+          <a:chOff x="0" y="0"/>
+          <a:chExt cx="0" cy="0"/>
+        </a:xfrm>
+      </p:grpSpPr>
       <p:sp>
         <p:nvSpPr>
           <p:cNvPr id="2" name="TextBox 1"/>
@@ -12207,7 +12782,7 @@
 </file>
 
 <file path=ppt/slides/slide5.xml><?xml version="1.0" encoding="utf-8"?>
-<p:sld xmlns:a="http://schemas.openxmlformats.org/drawingml/2006/main" xmlns:p="http://schemas.openxmlformats.org/presentationml/2006/main" xmlns:r="http://schemas.openxmlformats.org/officeDocument/2006/relationships">
+<p:sld xmlns:a="http://schemas.openxmlformats.org/drawingml/2006/main" xmlns:r="http://schemas.openxmlformats.org/officeDocument/2006/relationships" xmlns:p="http://schemas.openxmlformats.org/presentationml/2006/main">
   <p:cSld>
     <p:spTree>
       <p:nvGrpSpPr>
@@ -12215,7 +12790,14 @@
         <p:cNvGrpSpPr/>
         <p:nvPr/>
       </p:nvGrpSpPr>
-      <p:grpSpPr/>
+      <p:grpSpPr>
+        <a:xfrm>
+          <a:off x="0" y="0"/>
+          <a:ext cx="0" cy="0"/>
+          <a:chOff x="0" y="0"/>
+          <a:chExt cx="0" cy="0"/>
+        </a:xfrm>
+      </p:grpSpPr>
       <p:sp>
         <p:nvSpPr>
           <p:cNvPr id="2" name="TextBox 1"/>
@@ -12292,6 +12874,19 @@
                 <a:spcPts val="0"/>
               </a:spcAft>
             </a:pPr>
+            <a:endParaRPr sz="2000">
+              <a:solidFill>
+                <a:srgbClr val="212121"/>
+              </a:solidFill>
+              <a:latin typeface="Courier New"/>
+            </a:endParaRPr>
+          </a:p>
+          <a:p>
+            <a:pPr>
+              <a:spcAft>
+                <a:spcPts val="0"/>
+              </a:spcAft>
+            </a:pPr>
             <a:r>
               <a:rPr sz="2000">
                 <a:solidFill>
@@ -12299,7 +12894,7 @@
                 </a:solidFill>
                 <a:latin typeface="Courier New"/>
               </a:rPr>
-              <a:t/>
+              <a:t>int getPassword(void)</a:t>
             </a:r>
           </a:p>
           <a:p>
@@ -12315,7 +12910,7 @@
                 </a:solidFill>
                 <a:latin typeface="Courier New"/>
               </a:rPr>
-              <a:t>int getPassword(void)</a:t>
+              <a:t>{</a:t>
             </a:r>
           </a:p>
           <a:p>
@@ -12331,7 +12926,7 @@
                 </a:solidFill>
                 <a:latin typeface="Courier New"/>
               </a:rPr>
-              <a:t>{</a:t>
+              <a:t>  char buf[4];</a:t>
             </a:r>
           </a:p>
           <a:p>
@@ -12347,7 +12942,7 @@
                 </a:solidFill>
                 <a:latin typeface="Courier New"/>
               </a:rPr>
-              <a:t>  char buf[4];</a:t>
+              <a:t>  gets(buf);</a:t>
             </a:r>
           </a:p>
           <a:p>
@@ -12363,7 +12958,7 @@
                 </a:solidFill>
                 <a:latin typeface="Courier New"/>
               </a:rPr>
-              <a:t>  gets(buf);</a:t>
+              <a:t>  return strcmp(buf, "SMT");</a:t>
             </a:r>
           </a:p>
           <a:p>
@@ -12379,7 +12974,7 @@
                 </a:solidFill>
                 <a:latin typeface="Courier New"/>
               </a:rPr>
-              <a:t>  return strcmp(buf, "SMT");</a:t>
+              <a:t>}</a:t>
             </a:r>
           </a:p>
           <a:p>
@@ -12388,6 +12983,19 @@
                 <a:spcPts val="0"/>
               </a:spcAft>
             </a:pPr>
+            <a:endParaRPr sz="2000">
+              <a:solidFill>
+                <a:srgbClr val="212121"/>
+              </a:solidFill>
+              <a:latin typeface="Courier New"/>
+            </a:endParaRPr>
+          </a:p>
+          <a:p>
+            <a:pPr>
+              <a:spcAft>
+                <a:spcPts val="0"/>
+              </a:spcAft>
+            </a:pPr>
             <a:r>
               <a:rPr sz="2000">
                 <a:solidFill>
@@ -12395,38 +13003,6 @@
                 </a:solidFill>
                 <a:latin typeface="Courier New"/>
               </a:rPr>
-              <a:t>}</a:t>
-            </a:r>
-          </a:p>
-          <a:p>
-            <a:pPr>
-              <a:spcAft>
-                <a:spcPts val="0"/>
-              </a:spcAft>
-            </a:pPr>
-            <a:r>
-              <a:rPr sz="2000">
-                <a:solidFill>
-                  <a:srgbClr val="212121"/>
-                </a:solidFill>
-                <a:latin typeface="Courier New"/>
-              </a:rPr>
-              <a:t/>
-            </a:r>
-          </a:p>
-          <a:p>
-            <a:pPr>
-              <a:spcAft>
-                <a:spcPts val="0"/>
-              </a:spcAft>
-            </a:pPr>
-            <a:r>
-              <a:rPr sz="2000">
-                <a:solidFill>
-                  <a:srgbClr val="212121"/>
-                </a:solidFill>
-                <a:latin typeface="Courier New"/>
-              </a:rPr>
               <a:t>/* main: 0 from getPassword =&gt; "Access Granted" */</a:t>
             </a:r>
           </a:p>
@@ -12436,14 +13012,12 @@
                 <a:spcPts val="800"/>
               </a:spcAft>
             </a:pPr>
-            <a:r>
-              <a:rPr sz="2400">
-                <a:solidFill>
-                  <a:srgbClr val="212121"/>
-                </a:solidFill>
-              </a:rPr>
-              <a:t/>
-            </a:r>
+            <a:endParaRPr sz="2000">
+              <a:solidFill>
+                <a:srgbClr val="212121"/>
+              </a:solidFill>
+              <a:latin typeface="Courier New"/>
+            </a:endParaRPr>
           </a:p>
           <a:p>
             <a:pPr>
@@ -12471,7 +13045,7 @@
 </file>
 
 <file path=ppt/slides/slide50.xml><?xml version="1.0" encoding="utf-8"?>
-<p:sld xmlns:a="http://schemas.openxmlformats.org/drawingml/2006/main" xmlns:p="http://schemas.openxmlformats.org/presentationml/2006/main" xmlns:r="http://schemas.openxmlformats.org/officeDocument/2006/relationships">
+<p:sld xmlns:a="http://schemas.openxmlformats.org/drawingml/2006/main" xmlns:r="http://schemas.openxmlformats.org/officeDocument/2006/relationships" xmlns:p="http://schemas.openxmlformats.org/presentationml/2006/main">
   <p:cSld>
     <p:spTree>
       <p:nvGrpSpPr>
@@ -12479,7 +13053,14 @@
         <p:cNvGrpSpPr/>
         <p:nvPr/>
       </p:nvGrpSpPr>
-      <p:grpSpPr/>
+      <p:grpSpPr>
+        <a:xfrm>
+          <a:off x="0" y="0"/>
+          <a:ext cx="0" cy="0"/>
+          <a:chOff x="0" y="0"/>
+          <a:chExt cx="0" cy="0"/>
+        </a:xfrm>
+      </p:grpSpPr>
       <p:sp>
         <p:nvSpPr>
           <p:cNvPr id="2" name="TextBox 1"/>
@@ -12570,13 +13151,25 @@
                 <a:spcPts val="800"/>
               </a:spcAft>
             </a:pPr>
+            <a:endParaRPr sz="2000">
+              <a:solidFill>
+                <a:srgbClr val="212121"/>
+              </a:solidFill>
+            </a:endParaRPr>
+          </a:p>
+          <a:p>
+            <a:pPr>
+              <a:spcAft>
+                <a:spcPts val="800"/>
+              </a:spcAft>
+            </a:pPr>
             <a:r>
               <a:rPr sz="2200">
                 <a:solidFill>
                   <a:srgbClr val="212121"/>
                 </a:solidFill>
               </a:rPr>
-              <a:t/>
+              <a:t>irep2 is the typed, reference-counted representation everything lowers to and every backend consumes.</a:t>
             </a:r>
           </a:p>
           <a:p>
@@ -12591,21 +13184,6 @@
                   <a:srgbClr val="212121"/>
                 </a:solidFill>
               </a:rPr>
-              <a:t>irep2 is the typed, reference-counted representation everything lowers to and every backend consumes.</a:t>
-            </a:r>
-          </a:p>
-          <a:p>
-            <a:pPr>
-              <a:spcAft>
-                <a:spcPts val="800"/>
-              </a:spcAft>
-            </a:pPr>
-            <a:r>
-              <a:rPr sz="2200">
-                <a:solidFill>
-                  <a:srgbClr val="212121"/>
-                </a:solidFill>
-              </a:rPr>
               <a:t>Want to add a check, a frontend, or a new node type? Start here:</a:t>
             </a:r>
           </a:p>
@@ -12631,14 +13209,12 @@
                 <a:spcPts val="800"/>
               </a:spcAft>
             </a:pPr>
-            <a:r>
-              <a:rPr sz="2200">
-                <a:solidFill>
-                  <a:srgbClr val="212121"/>
-                </a:solidFill>
-              </a:rPr>
-              <a:t/>
-            </a:r>
+            <a:endParaRPr sz="1800">
+              <a:solidFill>
+                <a:srgbClr val="212121"/>
+              </a:solidFill>
+              <a:latin typeface="Courier New"/>
+            </a:endParaRPr>
           </a:p>
           <a:p>
             <a:pPr>
@@ -12705,7 +13281,7 @@
 </file>
 
 <file path=ppt/slides/slide51.xml><?xml version="1.0" encoding="utf-8"?>
-<p:sld xmlns:a="http://schemas.openxmlformats.org/drawingml/2006/main" xmlns:p="http://schemas.openxmlformats.org/presentationml/2006/main" xmlns:r="http://schemas.openxmlformats.org/officeDocument/2006/relationships">
+<p:sld xmlns:a="http://schemas.openxmlformats.org/drawingml/2006/main" xmlns:r="http://schemas.openxmlformats.org/officeDocument/2006/relationships" xmlns:p="http://schemas.openxmlformats.org/presentationml/2006/main">
   <p:cSld>
     <p:spTree>
       <p:nvGrpSpPr>
@@ -12713,7 +13289,14 @@
         <p:cNvGrpSpPr/>
         <p:nvPr/>
       </p:nvGrpSpPr>
-      <p:grpSpPr/>
+      <p:grpSpPr>
+        <a:xfrm>
+          <a:off x="0" y="0"/>
+          <a:ext cx="0" cy="0"/>
+          <a:chOff x="0" y="0"/>
+          <a:chExt cx="0" cy="0"/>
+        </a:xfrm>
+      </p:grpSpPr>
       <p:sp>
         <p:nvSpPr>
           <p:cNvPr id="2" name="TextBox 1"/>
@@ -12854,7 +13437,7 @@
 </file>
 
 <file path=ppt/slides/slide52.xml><?xml version="1.0" encoding="utf-8"?>
-<p:sld xmlns:a="http://schemas.openxmlformats.org/drawingml/2006/main" xmlns:p="http://schemas.openxmlformats.org/presentationml/2006/main" xmlns:r="http://schemas.openxmlformats.org/officeDocument/2006/relationships">
+<p:sld xmlns:a="http://schemas.openxmlformats.org/drawingml/2006/main" xmlns:r="http://schemas.openxmlformats.org/officeDocument/2006/relationships" xmlns:p="http://schemas.openxmlformats.org/presentationml/2006/main">
   <p:cSld>
     <p:spTree>
       <p:nvGrpSpPr>
@@ -12862,7 +13445,14 @@
         <p:cNvGrpSpPr/>
         <p:nvPr/>
       </p:nvGrpSpPr>
-      <p:grpSpPr/>
+      <p:grpSpPr>
+        <a:xfrm>
+          <a:off x="0" y="0"/>
+          <a:ext cx="0" cy="0"/>
+          <a:chOff x="0" y="0"/>
+          <a:chExt cx="0" cy="0"/>
+        </a:xfrm>
+      </p:grpSpPr>
       <p:sp>
         <p:nvSpPr>
           <p:cNvPr id="2" name="TextBox 1"/>
@@ -13022,7 +13612,7 @@
 </file>
 
 <file path=ppt/slides/slide6.xml><?xml version="1.0" encoding="utf-8"?>
-<p:sld xmlns:a="http://schemas.openxmlformats.org/drawingml/2006/main" xmlns:p="http://schemas.openxmlformats.org/presentationml/2006/main" xmlns:r="http://schemas.openxmlformats.org/officeDocument/2006/relationships">
+<p:sld xmlns:a="http://schemas.openxmlformats.org/drawingml/2006/main" xmlns:r="http://schemas.openxmlformats.org/officeDocument/2006/relationships" xmlns:p="http://schemas.openxmlformats.org/presentationml/2006/main">
   <p:cSld>
     <p:spTree>
       <p:nvGrpSpPr>
@@ -13030,7 +13620,14 @@
         <p:cNvGrpSpPr/>
         <p:nvPr/>
       </p:nvGrpSpPr>
-      <p:grpSpPr/>
+      <p:grpSpPr>
+        <a:xfrm>
+          <a:off x="0" y="0"/>
+          <a:ext cx="0" cy="0"/>
+          <a:chOff x="0" y="0"/>
+          <a:chExt cx="0" cy="0"/>
+        </a:xfrm>
+      </p:grpSpPr>
       <p:sp>
         <p:nvSpPr>
           <p:cNvPr id="2" name="TextBox 1"/>
@@ -13074,7 +13671,7 @@
         </p:nvGraphicFramePr>
         <p:xfrm>
           <a:off x="731520" y="1463040"/>
-          <a:ext cx="10698480" cy="1463040"/>
+          <a:ext cx="10698480" cy="1584960"/>
         </p:xfrm>
         <a:graphic>
           <a:graphicData uri="http://schemas.openxmlformats.org/drawingml/2006/table">
@@ -13083,8 +13680,20 @@
                 <a:tableStyleId>{5C22544A-7EE6-4342-B048-85BDC9FD1C3A}</a:tableStyleId>
               </a:tblPr>
               <a:tblGrid>
-                <a:gridCol w="3840480"/>
-                <a:gridCol w="6858000"/>
+                <a:gridCol w="3840480">
+                  <a:extLst>
+                    <a:ext uri="{9D8B030D-6E8A-4147-A177-3AD203B41FA5}">
+                      <a16:colId xmlns:a16="http://schemas.microsoft.com/office/drawing/2014/main" val="20000"/>
+                    </a:ext>
+                  </a:extLst>
+                </a:gridCol>
+                <a:gridCol w="6858000">
+                  <a:extLst>
+                    <a:ext uri="{9D8B030D-6E8A-4147-A177-3AD203B41FA5}">
+                      <a16:colId xmlns:a16="http://schemas.microsoft.com/office/drawing/2014/main" val="20001"/>
+                    </a:ext>
+                  </a:extLst>
+                </a:gridCol>
               </a:tblGrid>
               <a:tr h="365760">
                 <a:tc>
@@ -13104,10 +13713,17 @@
                   <a:txBody>
                     <a:bodyPr/>
                     <a:lstStyle/>
-                    <a:p/>
+                    <a:p>
+                      <a:endParaRPr/>
+                    </a:p>
                   </a:txBody>
                   <a:tcPr/>
                 </a:tc>
+                <a:extLst>
+                  <a:ext uri="{0D108BD9-81ED-4DB2-BD59-A6C34878D82A}">
+                    <a16:rowId xmlns:a16="http://schemas.microsoft.com/office/drawing/2014/main" val="10000"/>
+                  </a:ext>
+                </a:extLst>
               </a:tr>
               <a:tr h="365760">
                 <a:tc>
@@ -13136,6 +13752,11 @@
                   </a:txBody>
                   <a:tcPr/>
                 </a:tc>
+                <a:extLst>
+                  <a:ext uri="{0D108BD9-81ED-4DB2-BD59-A6C34878D82A}">
+                    <a16:rowId xmlns:a16="http://schemas.microsoft.com/office/drawing/2014/main" val="10001"/>
+                  </a:ext>
+                </a:extLst>
               </a:tr>
               <a:tr h="365760">
                 <a:tc>
@@ -13164,6 +13785,11 @@
                   </a:txBody>
                   <a:tcPr/>
                 </a:tc>
+                <a:extLst>
+                  <a:ext uri="{0D108BD9-81ED-4DB2-BD59-A6C34878D82A}">
+                    <a16:rowId xmlns:a16="http://schemas.microsoft.com/office/drawing/2014/main" val="10002"/>
+                  </a:ext>
+                </a:extLst>
               </a:tr>
               <a:tr h="365760">
                 <a:tc>
@@ -13192,6 +13818,11 @@
                   </a:txBody>
                   <a:tcPr/>
                 </a:tc>
+                <a:extLst>
+                  <a:ext uri="{0D108BD9-81ED-4DB2-BD59-A6C34878D82A}">
+                    <a16:rowId xmlns:a16="http://schemas.microsoft.com/office/drawing/2014/main" val="10003"/>
+                  </a:ext>
+                </a:extLst>
               </a:tr>
             </a:tbl>
           </a:graphicData>
@@ -13289,7 +13920,7 @@
 </file>
 
 <file path=ppt/slides/slide7.xml><?xml version="1.0" encoding="utf-8"?>
-<p:sld xmlns:a="http://schemas.openxmlformats.org/drawingml/2006/main" xmlns:p="http://schemas.openxmlformats.org/presentationml/2006/main" xmlns:r="http://schemas.openxmlformats.org/officeDocument/2006/relationships">
+<p:sld xmlns:a="http://schemas.openxmlformats.org/drawingml/2006/main" xmlns:r="http://schemas.openxmlformats.org/officeDocument/2006/relationships" xmlns:p="http://schemas.openxmlformats.org/presentationml/2006/main">
   <p:cSld>
     <p:spTree>
       <p:nvGrpSpPr>
@@ -13297,7 +13928,14 @@
         <p:cNvGrpSpPr/>
         <p:nvPr/>
       </p:nvGrpSpPr>
-      <p:grpSpPr/>
+      <p:grpSpPr>
+        <a:xfrm>
+          <a:off x="0" y="0"/>
+          <a:ext cx="0" cy="0"/>
+          <a:chOff x="0" y="0"/>
+          <a:chExt cx="0" cy="0"/>
+        </a:xfrm>
+      </p:grpSpPr>
       <p:sp>
         <p:nvSpPr>
           <p:cNvPr id="2" name="TextBox 1"/>
@@ -13374,6 +14012,19 @@
                 <a:spcPts val="0"/>
               </a:spcAft>
             </a:pPr>
+            <a:endParaRPr sz="1800">
+              <a:solidFill>
+                <a:srgbClr val="212121"/>
+              </a:solidFill>
+              <a:latin typeface="Courier New"/>
+            </a:endParaRPr>
+          </a:p>
+          <a:p>
+            <a:pPr>
+              <a:spcAft>
+                <a:spcPts val="0"/>
+              </a:spcAft>
+            </a:pPr>
             <a:r>
               <a:rPr sz="1800">
                 <a:solidFill>
@@ -13381,7 +14032,7 @@
                 </a:solidFill>
                 <a:latin typeface="Courier New"/>
               </a:rPr>
-              <a:t/>
+              <a:t>[Counterexample]</a:t>
             </a:r>
           </a:p>
           <a:p>
@@ -13397,7 +14048,7 @@
                 </a:solidFill>
                 <a:latin typeface="Courier New"/>
               </a:rPr>
-              <a:t>[Counterexample]</a:t>
+              <a:t>...</a:t>
             </a:r>
           </a:p>
           <a:p>
@@ -13413,7 +14064,7 @@
                 </a:solidFill>
                 <a:latin typeface="Courier New"/>
               </a:rPr>
-              <a:t>...</a:t>
+              <a:t>Violated property:</a:t>
             </a:r>
           </a:p>
           <a:p>
@@ -13429,7 +14080,7 @@
                 </a:solidFill>
                 <a:latin typeface="Courier New"/>
               </a:rPr>
-              <a:t>Violated property:</a:t>
+              <a:t>  dereference failure: array bounds violated</a:t>
             </a:r>
           </a:p>
           <a:p>
@@ -13445,7 +14096,7 @@
                 </a:solidFill>
                 <a:latin typeface="Courier New"/>
               </a:rPr>
-              <a:t>  dereference failure: array bounds violated</a:t>
+              <a:t>  CWE: CWE-787 (out-of-bounds write)</a:t>
             </a:r>
           </a:p>
           <a:p>
@@ -13454,6 +14105,19 @@
                 <a:spcPts val="0"/>
               </a:spcAft>
             </a:pPr>
+            <a:endParaRPr sz="1800">
+              <a:solidFill>
+                <a:srgbClr val="212121"/>
+              </a:solidFill>
+              <a:latin typeface="Courier New"/>
+            </a:endParaRPr>
+          </a:p>
+          <a:p>
+            <a:pPr>
+              <a:spcAft>
+                <a:spcPts val="0"/>
+              </a:spcAft>
+            </a:pPr>
             <a:r>
               <a:rPr sz="1800">
                 <a:solidFill>
@@ -13461,38 +14125,6 @@
                 </a:solidFill>
                 <a:latin typeface="Courier New"/>
               </a:rPr>
-              <a:t>  CWE: CWE-787 (out-of-bounds write)</a:t>
-            </a:r>
-          </a:p>
-          <a:p>
-            <a:pPr>
-              <a:spcAft>
-                <a:spcPts val="0"/>
-              </a:spcAft>
-            </a:pPr>
-            <a:r>
-              <a:rPr sz="1800">
-                <a:solidFill>
-                  <a:srgbClr val="212121"/>
-                </a:solidFill>
-                <a:latin typeface="Courier New"/>
-              </a:rPr>
-              <a:t/>
-            </a:r>
-          </a:p>
-          <a:p>
-            <a:pPr>
-              <a:spcAft>
-                <a:spcPts val="0"/>
-              </a:spcAft>
-            </a:pPr>
-            <a:r>
-              <a:rPr sz="1800">
-                <a:solidFill>
-                  <a:srgbClr val="212121"/>
-                </a:solidFill>
-                <a:latin typeface="Courier New"/>
-              </a:rPr>
               <a:t>VERIFICATION FAILED</a:t>
             </a:r>
           </a:p>
@@ -13502,14 +14134,12 @@
                 <a:spcPts val="800"/>
               </a:spcAft>
             </a:pPr>
-            <a:r>
-              <a:rPr sz="2200">
-                <a:solidFill>
-                  <a:srgbClr val="212121"/>
-                </a:solidFill>
-              </a:rPr>
-              <a:t/>
-            </a:r>
+            <a:endParaRPr sz="1800">
+              <a:solidFill>
+                <a:srgbClr val="212121"/>
+              </a:solidFill>
+              <a:latin typeface="Courier New"/>
+            </a:endParaRPr>
           </a:p>
           <a:p>
             <a:pPr>
@@ -13537,7 +14167,7 @@
 </file>
 
 <file path=ppt/slides/slide8.xml><?xml version="1.0" encoding="utf-8"?>
-<p:sld xmlns:a="http://schemas.openxmlformats.org/drawingml/2006/main" xmlns:p="http://schemas.openxmlformats.org/presentationml/2006/main" xmlns:r="http://schemas.openxmlformats.org/officeDocument/2006/relationships">
+<p:sld xmlns:a="http://schemas.openxmlformats.org/drawingml/2006/main" xmlns:r="http://schemas.openxmlformats.org/officeDocument/2006/relationships" xmlns:p="http://schemas.openxmlformats.org/presentationml/2006/main">
   <p:cSld>
     <p:spTree>
       <p:nvGrpSpPr>
@@ -13545,7 +14175,14 @@
         <p:cNvGrpSpPr/>
         <p:nvPr/>
       </p:nvGrpSpPr>
-      <p:grpSpPr/>
+      <p:grpSpPr>
+        <a:xfrm>
+          <a:off x="0" y="0"/>
+          <a:ext cx="0" cy="0"/>
+          <a:chOff x="0" y="0"/>
+          <a:chExt cx="0" cy="0"/>
+        </a:xfrm>
+      </p:grpSpPr>
       <p:sp>
         <p:nvSpPr>
           <p:cNvPr id="2" name="TextBox 1"/>
@@ -13701,6 +14338,19 @@
                 <a:spcPts val="0"/>
               </a:spcAft>
             </a:pPr>
+            <a:endParaRPr sz="1600">
+              <a:solidFill>
+                <a:srgbClr val="212121"/>
+              </a:solidFill>
+              <a:latin typeface="Courier New"/>
+            </a:endParaRPr>
+          </a:p>
+          <a:p>
+            <a:pPr>
+              <a:spcAft>
+                <a:spcPts val="0"/>
+              </a:spcAft>
+            </a:pPr>
             <a:r>
               <a:rPr sz="1600">
                 <a:solidFill>
@@ -13708,7 +14358,7 @@
                 </a:solidFill>
                 <a:latin typeface="Courier New"/>
               </a:rPr>
-              <a:t/>
+              <a:t>$ esbmc getpassword.c --unwind 8 --generate-ctest-testcase</a:t>
             </a:r>
           </a:p>
           <a:p>
@@ -13724,7 +14374,7 @@
                 </a:solidFill>
                 <a:latin typeface="Courier New"/>
               </a:rPr>
-              <a:t>$ esbmc getpassword.c --unwind 8 --generate-ctest-testcase</a:t>
+              <a:t>  → Generated CTest test case: test_case.c</a:t>
             </a:r>
           </a:p>
           <a:p>
@@ -13733,6 +14383,19 @@
                 <a:spcPts val="0"/>
               </a:spcAft>
             </a:pPr>
+            <a:endParaRPr sz="1600">
+              <a:solidFill>
+                <a:srgbClr val="212121"/>
+              </a:solidFill>
+              <a:latin typeface="Courier New"/>
+            </a:endParaRPr>
+          </a:p>
+          <a:p>
+            <a:pPr>
+              <a:spcAft>
+                <a:spcPts val="0"/>
+              </a:spcAft>
+            </a:pPr>
             <a:r>
               <a:rPr sz="1600">
                 <a:solidFill>
@@ -13740,7 +14403,7 @@
                 </a:solidFill>
                 <a:latin typeface="Courier New"/>
               </a:rPr>
-              <a:t>  → Generated CTest test case: test_case.c</a:t>
+              <a:t>char nondet_char(void) {            /* test_case.c */</a:t>
             </a:r>
           </a:p>
           <a:p>
@@ -13756,7 +14419,7 @@
                 </a:solidFill>
                 <a:latin typeface="Courier New"/>
               </a:rPr>
-              <a:t/>
+              <a:t>  static const char v[] = { 83, 77, 84 };  /* "SMT" */</a:t>
             </a:r>
           </a:p>
           <a:p>
@@ -13772,7 +14435,7 @@
                 </a:solidFill>
                 <a:latin typeface="Courier New"/>
               </a:rPr>
-              <a:t>char nondet_char(void) {            /* test_case.c */</a:t>
+              <a:t>  static int i = 0; return v[i++];</a:t>
             </a:r>
           </a:p>
           <a:p>
@@ -13788,38 +14451,6 @@
                 </a:solidFill>
                 <a:latin typeface="Courier New"/>
               </a:rPr>
-              <a:t>  static const char v[] = { 83, 77, 84 };  /* "SMT" */</a:t>
-            </a:r>
-          </a:p>
-          <a:p>
-            <a:pPr>
-              <a:spcAft>
-                <a:spcPts val="0"/>
-              </a:spcAft>
-            </a:pPr>
-            <a:r>
-              <a:rPr sz="1600">
-                <a:solidFill>
-                  <a:srgbClr val="212121"/>
-                </a:solidFill>
-                <a:latin typeface="Courier New"/>
-              </a:rPr>
-              <a:t>  static int i = 0; return v[i++];</a:t>
-            </a:r>
-          </a:p>
-          <a:p>
-            <a:pPr>
-              <a:spcAft>
-                <a:spcPts val="0"/>
-              </a:spcAft>
-            </a:pPr>
-            <a:r>
-              <a:rPr sz="1600">
-                <a:solidFill>
-                  <a:srgbClr val="212121"/>
-                </a:solidFill>
-                <a:latin typeface="Courier New"/>
-              </a:rPr>
               <a:t>}</a:t>
             </a:r>
           </a:p>
@@ -13829,14 +14460,12 @@
                 <a:spcPts val="800"/>
               </a:spcAft>
             </a:pPr>
-            <a:r>
-              <a:rPr sz="2000">
-                <a:solidFill>
-                  <a:srgbClr val="212121"/>
-                </a:solidFill>
-              </a:rPr>
-              <a:t/>
-            </a:r>
+            <a:endParaRPr sz="1600">
+              <a:solidFill>
+                <a:srgbClr val="212121"/>
+              </a:solidFill>
+              <a:latin typeface="Courier New"/>
+            </a:endParaRPr>
           </a:p>
           <a:p>
             <a:pPr>
@@ -13903,7 +14532,7 @@
 </file>
 
 <file path=ppt/slides/slide9.xml><?xml version="1.0" encoding="utf-8"?>
-<p:sld xmlns:a="http://schemas.openxmlformats.org/drawingml/2006/main" xmlns:p="http://schemas.openxmlformats.org/presentationml/2006/main" xmlns:r="http://schemas.openxmlformats.org/officeDocument/2006/relationships">
+<p:sld xmlns:a="http://schemas.openxmlformats.org/drawingml/2006/main" xmlns:r="http://schemas.openxmlformats.org/officeDocument/2006/relationships" xmlns:p="http://schemas.openxmlformats.org/presentationml/2006/main">
   <p:cSld>
     <p:spTree>
       <p:nvGrpSpPr>
@@ -13911,7 +14540,14 @@
         <p:cNvGrpSpPr/>
         <p:nvPr/>
       </p:nvGrpSpPr>
-      <p:grpSpPr/>
+      <p:grpSpPr>
+        <a:xfrm>
+          <a:off x="0" y="0"/>
+          <a:ext cx="0" cy="0"/>
+          <a:chOff x="0" y="0"/>
+          <a:chExt cx="0" cy="0"/>
+        </a:xfrm>
+      </p:grpSpPr>
       <p:sp>
         <p:nvSpPr>
           <p:cNvPr id="2" name="TextBox 1"/>
@@ -14035,6 +14671,19 @@
                 <a:spcPts val="0"/>
               </a:spcAft>
             </a:pPr>
+            <a:endParaRPr sz="1600">
+              <a:solidFill>
+                <a:srgbClr val="212121"/>
+              </a:solidFill>
+              <a:latin typeface="Courier New"/>
+            </a:endParaRPr>
+          </a:p>
+          <a:p>
+            <a:pPr>
+              <a:spcAft>
+                <a:spcPts val="0"/>
+              </a:spcAft>
+            </a:pPr>
             <a:r>
               <a:rPr sz="1600">
                 <a:solidFill>
@@ -14042,7 +14691,7 @@
                 </a:solidFill>
                 <a:latin typeface="Courier New"/>
               </a:rPr>
-              <a:t/>
+              <a:t>  if (access_granted(buf) &amp;&amp; strcmp(buf, "SMT") != 0)</a:t>
             </a:r>
           </a:p>
           <a:p>
@@ -14058,7 +14707,7 @@
                 </a:solidFill>
                 <a:latin typeface="Courier New"/>
               </a:rPr>
-              <a:t>  if (access_granted(buf) &amp;&amp; strcmp(buf, "SMT") != 0)</a:t>
+              <a:t>    assert(0);     /* got in WITHOUT the password */</a:t>
             </a:r>
           </a:p>
           <a:p>
@@ -14067,6 +14716,19 @@
                 <a:spcPts val="0"/>
               </a:spcAft>
             </a:pPr>
+            <a:endParaRPr sz="1600">
+              <a:solidFill>
+                <a:srgbClr val="212121"/>
+              </a:solidFill>
+              <a:latin typeface="Courier New"/>
+            </a:endParaRPr>
+          </a:p>
+          <a:p>
+            <a:pPr>
+              <a:spcAft>
+                <a:spcPts val="0"/>
+              </a:spcAft>
+            </a:pPr>
             <a:r>
               <a:rPr sz="1600">
                 <a:solidFill>
@@ -14074,7 +14736,7 @@
                 </a:solidFill>
                 <a:latin typeface="Courier New"/>
               </a:rPr>
-              <a:t>    assert(0);     /* got in WITHOUT the password */</a:t>
+              <a:t>$ esbmc getpassword.c --unwind 8 --generate-ctest-testcase</a:t>
             </a:r>
           </a:p>
           <a:p>
@@ -14090,7 +14752,7 @@
                 </a:solidFill>
                 <a:latin typeface="Courier New"/>
               </a:rPr>
-              <a:t/>
+              <a:t>  buf = { 0, 0, 0 }            → the empty string ""</a:t>
             </a:r>
           </a:p>
           <a:p>
@@ -14106,38 +14768,6 @@
                 </a:solidFill>
                 <a:latin typeface="Courier New"/>
               </a:rPr>
-              <a:t>$ esbmc getpassword.c --unwind 8 --generate-ctest-testcase</a:t>
-            </a:r>
-          </a:p>
-          <a:p>
-            <a:pPr>
-              <a:spcAft>
-                <a:spcPts val="0"/>
-              </a:spcAft>
-            </a:pPr>
-            <a:r>
-              <a:rPr sz="1600">
-                <a:solidFill>
-                  <a:srgbClr val="212121"/>
-                </a:solidFill>
-                <a:latin typeface="Courier New"/>
-              </a:rPr>
-              <a:t>  buf = { 0, 0, 0 }            → the empty string ""</a:t>
-            </a:r>
-          </a:p>
-          <a:p>
-            <a:pPr>
-              <a:spcAft>
-                <a:spcPts val="0"/>
-              </a:spcAft>
-            </a:pPr>
-            <a:r>
-              <a:rPr sz="1600">
-                <a:solidFill>
-                  <a:srgbClr val="212121"/>
-                </a:solidFill>
-                <a:latin typeface="Courier New"/>
-              </a:rPr>
               <a:t>VERIFICATION FAILED</a:t>
             </a:r>
           </a:p>
@@ -14147,14 +14777,12 @@
                 <a:spcPts val="800"/>
               </a:spcAft>
             </a:pPr>
-            <a:r>
-              <a:rPr sz="2000">
-                <a:solidFill>
-                  <a:srgbClr val="212121"/>
-                </a:solidFill>
-              </a:rPr>
-              <a:t/>
-            </a:r>
+            <a:endParaRPr sz="1600">
+              <a:solidFill>
+                <a:srgbClr val="212121"/>
+              </a:solidFill>
+              <a:latin typeface="Courier New"/>
+            </a:endParaRPr>
           </a:p>
           <a:p>
             <a:pPr>

--- a/slides/session1/01-session1-fundamentals.pptx
+++ b/slides/session1/01-session1-fundamentals.pptx
@@ -5,60 +5,62 @@
     <p:sldMasterId id="2147483648" r:id="rId1"/>
   </p:sldMasterIdLst>
   <p:sldIdLst>
-    <p:sldId id="256" r:id="rId2"/>
-    <p:sldId id="257" r:id="rId3"/>
-    <p:sldId id="258" r:id="rId4"/>
-    <p:sldId id="259" r:id="rId5"/>
-    <p:sldId id="260" r:id="rId6"/>
-    <p:sldId id="261" r:id="rId7"/>
-    <p:sldId id="262" r:id="rId8"/>
-    <p:sldId id="263" r:id="rId9"/>
-    <p:sldId id="264" r:id="rId10"/>
-    <p:sldId id="265" r:id="rId11"/>
-    <p:sldId id="266" r:id="rId12"/>
-    <p:sldId id="267" r:id="rId13"/>
-    <p:sldId id="268" r:id="rId14"/>
-    <p:sldId id="269" r:id="rId15"/>
-    <p:sldId id="270" r:id="rId16"/>
-    <p:sldId id="271" r:id="rId17"/>
-    <p:sldId id="272" r:id="rId18"/>
-    <p:sldId id="273" r:id="rId19"/>
-    <p:sldId id="274" r:id="rId20"/>
-    <p:sldId id="275" r:id="rId21"/>
-    <p:sldId id="276" r:id="rId22"/>
-    <p:sldId id="277" r:id="rId23"/>
-    <p:sldId id="278" r:id="rId24"/>
-    <p:sldId id="279" r:id="rId25"/>
-    <p:sldId id="280" r:id="rId26"/>
-    <p:sldId id="281" r:id="rId27"/>
-    <p:sldId id="282" r:id="rId28"/>
-    <p:sldId id="283" r:id="rId29"/>
-    <p:sldId id="284" r:id="rId30"/>
-    <p:sldId id="285" r:id="rId31"/>
-    <p:sldId id="286" r:id="rId32"/>
-    <p:sldId id="287" r:id="rId33"/>
-    <p:sldId id="288" r:id="rId34"/>
-    <p:sldId id="289" r:id="rId35"/>
-    <p:sldId id="290" r:id="rId36"/>
-    <p:sldId id="291" r:id="rId37"/>
-    <p:sldId id="292" r:id="rId38"/>
-    <p:sldId id="293" r:id="rId39"/>
-    <p:sldId id="294" r:id="rId40"/>
-    <p:sldId id="295" r:id="rId41"/>
-    <p:sldId id="296" r:id="rId42"/>
-    <p:sldId id="297" r:id="rId43"/>
-    <p:sldId id="298" r:id="rId44"/>
-    <p:sldId id="299" r:id="rId45"/>
-    <p:sldId id="300" r:id="rId46"/>
-    <p:sldId id="301" r:id="rId47"/>
-    <p:sldId id="302" r:id="rId48"/>
-    <p:sldId id="303" r:id="rId49"/>
-    <p:sldId id="304" r:id="rId50"/>
-    <p:sldId id="305" r:id="rId51"/>
-    <p:sldId id="306" r:id="rId52"/>
-    <p:sldId id="307" r:id="rId53"/>
+    <p:sldId id="256" r:id="rId7"/>
+    <p:sldId id="257" r:id="rId8"/>
+    <p:sldId id="258" r:id="rId9"/>
+    <p:sldId id="259" r:id="rId10"/>
+    <p:sldId id="260" r:id="rId11"/>
+    <p:sldId id="261" r:id="rId12"/>
+    <p:sldId id="262" r:id="rId13"/>
+    <p:sldId id="263" r:id="rId14"/>
+    <p:sldId id="264" r:id="rId15"/>
+    <p:sldId id="265" r:id="rId16"/>
+    <p:sldId id="266" r:id="rId17"/>
+    <p:sldId id="267" r:id="rId18"/>
+    <p:sldId id="268" r:id="rId19"/>
+    <p:sldId id="269" r:id="rId20"/>
+    <p:sldId id="270" r:id="rId21"/>
+    <p:sldId id="271" r:id="rId22"/>
+    <p:sldId id="272" r:id="rId23"/>
+    <p:sldId id="273" r:id="rId24"/>
+    <p:sldId id="274" r:id="rId25"/>
+    <p:sldId id="275" r:id="rId26"/>
+    <p:sldId id="276" r:id="rId27"/>
+    <p:sldId id="277" r:id="rId28"/>
+    <p:sldId id="278" r:id="rId29"/>
+    <p:sldId id="279" r:id="rId30"/>
+    <p:sldId id="280" r:id="rId31"/>
+    <p:sldId id="281" r:id="rId32"/>
+    <p:sldId id="282" r:id="rId33"/>
+    <p:sldId id="283" r:id="rId34"/>
+    <p:sldId id="284" r:id="rId35"/>
+    <p:sldId id="285" r:id="rId36"/>
+    <p:sldId id="286" r:id="rId37"/>
+    <p:sldId id="287" r:id="rId38"/>
+    <p:sldId id="288" r:id="rId39"/>
+    <p:sldId id="289" r:id="rId40"/>
+    <p:sldId id="290" r:id="rId41"/>
+    <p:sldId id="291" r:id="rId42"/>
+    <p:sldId id="292" r:id="rId43"/>
+    <p:sldId id="293" r:id="rId44"/>
+    <p:sldId id="294" r:id="rId45"/>
+    <p:sldId id="295" r:id="rId46"/>
+    <p:sldId id="296" r:id="rId47"/>
+    <p:sldId id="297" r:id="rId48"/>
+    <p:sldId id="298" r:id="rId49"/>
+    <p:sldId id="299" r:id="rId50"/>
+    <p:sldId id="300" r:id="rId51"/>
+    <p:sldId id="301" r:id="rId52"/>
+    <p:sldId id="302" r:id="rId53"/>
+    <p:sldId id="303" r:id="rId54"/>
+    <p:sldId id="304" r:id="rId55"/>
+    <p:sldId id="305" r:id="rId56"/>
+    <p:sldId id="306" r:id="rId57"/>
+    <p:sldId id="307" r:id="rId58"/>
+    <p:sldId id="308" r:id="rId59"/>
+    <p:sldId id="309" r:id="rId60"/>
   </p:sldIdLst>
-  <p:sldSz cx="12192000" cy="6858000"/>
+  <p:sldSz cx="12191695" cy="6858000" type="screen4x3"/>
   <p:notesSz cx="6858000" cy="9144000"/>
   <p:defaultTextStyle>
     <a:defPPr>
@@ -155,38 +157,15 @@
       </a:defRPr>
     </a:lvl9pPr>
   </p:defaultTextStyle>
-  <p:extLst>
-    <p:ext uri="{EFAFB233-063F-42B5-8137-9DF3F51BA10A}">
-      <p15:sldGuideLst xmlns:p15="http://schemas.microsoft.com/office/powerpoint/2012/main">
-        <p15:guide id="1" orient="horz" pos="2160">
-          <p15:clr>
-            <a:srgbClr val="A4A3A4"/>
-          </p15:clr>
-        </p15:guide>
-        <p15:guide id="2" pos="2880">
-          <p15:clr>
-            <a:srgbClr val="A4A3A4"/>
-          </p15:clr>
-        </p15:guide>
-      </p15:sldGuideLst>
-    </p:ext>
-  </p:extLst>
 </p:presentation>
 </file>
 
 <file path=ppt/charts/chart1.xml><?xml version="1.0" encoding="utf-8"?>
-<c:chartSpace xmlns:c="http://schemas.openxmlformats.org/drawingml/2006/chart" xmlns:a="http://schemas.openxmlformats.org/drawingml/2006/main" xmlns:r="http://schemas.openxmlformats.org/officeDocument/2006/relationships" xmlns:c16r2="http://schemas.microsoft.com/office/drawing/2015/06/chart">
+<c:chartSpace xmlns:c="http://schemas.openxmlformats.org/drawingml/2006/chart" xmlns:a="http://schemas.openxmlformats.org/drawingml/2006/main" xmlns:r="http://schemas.openxmlformats.org/officeDocument/2006/relationships">
   <c:date1904 val="0"/>
-  <c:lang val="en-GB"/>
-  <c:roundedCorners val="1"/>
-  <c:style val="2"/>
   <c:chart>
-    <c:title>
-      <c:overlay val="0"/>
-    </c:title>
     <c:autoTitleDeleted val="0"/>
     <c:plotArea>
-      <c:layout/>
       <c:lineChart>
         <c:grouping val="standard"/>
         <c:varyColors val="0"/>
@@ -282,20 +261,7 @@
             </c:numRef>
           </c:val>
           <c:smooth val="0"/>
-          <c:extLst>
-            <c:ext xmlns:c16="http://schemas.microsoft.com/office/drawing/2014/chart" uri="{C3380CC4-5D6E-409C-BE32-E72D297353CC}">
-              <c16:uniqueId val="{00000000-3DAB-F942-930F-2328B436AADD}"/>
-            </c:ext>
-          </c:extLst>
         </c:ser>
-        <c:dLbls>
-          <c:showLegendKey val="0"/>
-          <c:showVal val="0"/>
-          <c:showCatName val="0"/>
-          <c:showSerName val="0"/>
-          <c:showPercent val="0"/>
-          <c:showBubbleSize val="0"/>
-        </c:dLbls>
         <c:marker val="1"/>
         <c:smooth val="0"/>
         <c:axId val="2118791784"/>
@@ -308,7 +274,6 @@
         </c:scaling>
         <c:delete val="0"/>
         <c:axPos val="b"/>
-        <c:numFmt formatCode="General" sourceLinked="0"/>
         <c:majorTickMark val="out"/>
         <c:minorTickMark val="none"/>
         <c:tickLblPos val="nextTo"/>
@@ -319,7 +284,6 @@
             <a:pPr>
               <a:defRPr sz="1200"/>
             </a:pPr>
-            <a:endParaRPr lang="en-US"/>
           </a:p>
         </c:txPr>
         <c:crossAx val="2140495176"/>
@@ -331,13 +295,10 @@
       </c:catAx>
       <c:valAx>
         <c:axId val="2140495176"/>
-        <c:scaling>
-          <c:orientation val="minMax"/>
-        </c:scaling>
+        <c:scaling/>
         <c:delete val="0"/>
         <c:axPos val="l"/>
         <c:majorGridlines/>
-        <c:numFmt formatCode="General" sourceLinked="1"/>
         <c:majorTickMark val="out"/>
         <c:minorTickMark val="none"/>
         <c:tickLblPos val="nextTo"/>
@@ -348,12 +309,10 @@
             <a:pPr>
               <a:defRPr sz="1200"/>
             </a:pPr>
-            <a:endParaRPr lang="en-US"/>
           </a:p>
         </c:txPr>
         <c:crossAx val="2118791784"/>
         <c:crosses val="autoZero"/>
-        <c:crossBetween val="between"/>
       </c:valAx>
     </c:plotArea>
     <c:plotVisOnly val="1"/>
@@ -377,22 +336,14 @@
 </file>
 
 <file path=ppt/charts/chart2.xml><?xml version="1.0" encoding="utf-8"?>
-<c:chartSpace xmlns:c="http://schemas.openxmlformats.org/drawingml/2006/chart" xmlns:a="http://schemas.openxmlformats.org/drawingml/2006/main" xmlns:r="http://schemas.openxmlformats.org/officeDocument/2006/relationships" xmlns:c16r2="http://schemas.microsoft.com/office/drawing/2015/06/chart">
+<c:chartSpace xmlns:c="http://schemas.openxmlformats.org/drawingml/2006/chart" xmlns:a="http://schemas.openxmlformats.org/drawingml/2006/main" xmlns:r="http://schemas.openxmlformats.org/officeDocument/2006/relationships">
   <c:date1904 val="0"/>
-  <c:lang val="en-GB"/>
-  <c:roundedCorners val="1"/>
-  <c:style val="2"/>
   <c:chart>
-    <c:title>
-      <c:overlay val="0"/>
-    </c:title>
     <c:autoTitleDeleted val="0"/>
     <c:plotArea>
-      <c:layout/>
       <c:barChart>
         <c:barDir val="bar"/>
         <c:grouping val="clustered"/>
-        <c:varyColors val="1"/>
         <c:ser>
           <c:idx val="0"/>
           <c:order val="0"/>
@@ -407,7 +358,6 @@
               </c:strCache>
             </c:strRef>
           </c:tx>
-          <c:invertIfNegative val="1"/>
           <c:cat>
             <c:strRef>
               <c:f>Sheet1!$A$2:$A$11</c:f>
@@ -462,7 +412,7 @@
                   <c:v>7.88</c:v>
                 </c:pt>
                 <c:pt idx="3">
-                  <c:v>8.4700000000000006</c:v>
+                  <c:v>8.47</c:v>
                 </c:pt>
                 <c:pt idx="4">
                   <c:v>8.99</c:v>
@@ -485,21 +435,7 @@
               </c:numCache>
             </c:numRef>
           </c:val>
-          <c:extLst>
-            <c:ext xmlns:c16="http://schemas.microsoft.com/office/drawing/2014/chart" uri="{C3380CC4-5D6E-409C-BE32-E72D297353CC}">
-              <c16:uniqueId val="{00000000-FE76-5642-BD96-C4DA54E1A2AB}"/>
-            </c:ext>
-          </c:extLst>
         </c:ser>
-        <c:dLbls>
-          <c:showLegendKey val="0"/>
-          <c:showVal val="0"/>
-          <c:showCatName val="0"/>
-          <c:showSerName val="0"/>
-          <c:showPercent val="0"/>
-          <c:showBubbleSize val="0"/>
-        </c:dLbls>
-        <c:gapWidth val="150"/>
         <c:axId val="-2068027336"/>
         <c:axId val="-2113994440"/>
       </c:barChart>
@@ -510,7 +446,6 @@
         </c:scaling>
         <c:delete val="0"/>
         <c:axPos val="l"/>
-        <c:numFmt formatCode="General" sourceLinked="0"/>
         <c:majorTickMark val="out"/>
         <c:minorTickMark val="none"/>
         <c:tickLblPos val="nextTo"/>
@@ -521,7 +456,6 @@
             <a:pPr>
               <a:defRPr sz="1200"/>
             </a:pPr>
-            <a:endParaRPr lang="en-US"/>
           </a:p>
         </c:txPr>
         <c:crossAx val="-2113994440"/>
@@ -533,13 +467,10 @@
       </c:catAx>
       <c:valAx>
         <c:axId val="-2113994440"/>
-        <c:scaling>
-          <c:orientation val="minMax"/>
-        </c:scaling>
+        <c:scaling/>
         <c:delete val="0"/>
         <c:axPos val="b"/>
         <c:majorGridlines/>
-        <c:numFmt formatCode="General" sourceLinked="1"/>
         <c:majorTickMark val="out"/>
         <c:minorTickMark val="none"/>
         <c:tickLblPos val="nextTo"/>
@@ -550,17 +481,13 @@
             <a:pPr>
               <a:defRPr sz="1200"/>
             </a:pPr>
-            <a:endParaRPr lang="en-US"/>
           </a:p>
         </c:txPr>
         <c:crossAx val="-2068027336"/>
         <c:crosses val="autoZero"/>
-        <c:crossBetween val="between"/>
       </c:valAx>
     </c:plotArea>
-    <c:plotVisOnly val="1"/>
     <c:dispBlanksAs val="gap"/>
-    <c:showDLblsOverMax val="1"/>
   </c:chart>
   <c:txPr>
     <a:bodyPr/>
@@ -616,9 +543,10 @@
           <a:lstStyle/>
           <a:p>
             <a:r>
-              <a:rPr lang="en-US"/>
+              <a:rPr lang="en-US" smtClean="0"/>
               <a:t>Click to edit Master title style</a:t>
             </a:r>
+            <a:endParaRPr lang="en-US"/>
           </a:p>
         </p:txBody>
       </p:sp>
@@ -734,9 +662,10 @@
           </a:lstStyle>
           <a:p>
             <a:r>
-              <a:rPr lang="en-US"/>
+              <a:rPr lang="en-US" smtClean="0"/>
               <a:t>Click to edit Master subtitle style</a:t>
             </a:r>
+            <a:endParaRPr lang="en-US"/>
           </a:p>
         </p:txBody>
       </p:sp>
@@ -757,7 +686,7 @@
           <a:p>
             <a:fld id="{5BCAD085-E8A6-8845-BD4E-CB4CCA059FC4}" type="datetimeFigureOut">
               <a:rPr lang="en-US" smtClean="0"/>
-              <a:t>6/12/26</a:t>
+              <a:t>1/27/13</a:t>
             </a:fld>
             <a:endParaRPr lang="en-US"/>
           </a:p>
@@ -851,9 +780,10 @@
           <a:lstStyle/>
           <a:p>
             <a:r>
-              <a:rPr lang="en-US"/>
+              <a:rPr lang="en-US" smtClean="0"/>
               <a:t>Click to edit Master title style</a:t>
             </a:r>
+            <a:endParaRPr lang="en-US"/>
           </a:p>
         </p:txBody>
       </p:sp>
@@ -874,37 +804,38 @@
           <a:p>
             <a:pPr lvl="0"/>
             <a:r>
-              <a:rPr lang="en-US"/>
+              <a:rPr lang="en-US" smtClean="0"/>
               <a:t>Click to edit Master text styles</a:t>
             </a:r>
           </a:p>
           <a:p>
             <a:pPr lvl="1"/>
             <a:r>
-              <a:rPr lang="en-US"/>
+              <a:rPr lang="en-US" smtClean="0"/>
               <a:t>Second level</a:t>
             </a:r>
           </a:p>
           <a:p>
             <a:pPr lvl="2"/>
             <a:r>
-              <a:rPr lang="en-US"/>
+              <a:rPr lang="en-US" smtClean="0"/>
               <a:t>Third level</a:t>
             </a:r>
           </a:p>
           <a:p>
             <a:pPr lvl="3"/>
             <a:r>
-              <a:rPr lang="en-US"/>
+              <a:rPr lang="en-US" smtClean="0"/>
               <a:t>Fourth level</a:t>
             </a:r>
           </a:p>
           <a:p>
             <a:pPr lvl="4"/>
             <a:r>
-              <a:rPr lang="en-US"/>
+              <a:rPr lang="en-US" smtClean="0"/>
               <a:t>Fifth level</a:t>
             </a:r>
+            <a:endParaRPr lang="en-US"/>
           </a:p>
         </p:txBody>
       </p:sp>
@@ -925,7 +856,7 @@
           <a:p>
             <a:fld id="{5BCAD085-E8A6-8845-BD4E-CB4CCA059FC4}" type="datetimeFigureOut">
               <a:rPr lang="en-US" smtClean="0"/>
-              <a:t>6/12/26</a:t>
+              <a:t>1/27/13</a:t>
             </a:fld>
             <a:endParaRPr lang="en-US"/>
           </a:p>
@@ -1024,9 +955,10 @@
           <a:lstStyle/>
           <a:p>
             <a:r>
-              <a:rPr lang="en-US"/>
+              <a:rPr lang="en-US" smtClean="0"/>
               <a:t>Click to edit Master title style</a:t>
             </a:r>
+            <a:endParaRPr lang="en-US"/>
           </a:p>
         </p:txBody>
       </p:sp>
@@ -1052,37 +984,38 @@
           <a:p>
             <a:pPr lvl="0"/>
             <a:r>
-              <a:rPr lang="en-US"/>
+              <a:rPr lang="en-US" smtClean="0"/>
               <a:t>Click to edit Master text styles</a:t>
             </a:r>
           </a:p>
           <a:p>
             <a:pPr lvl="1"/>
             <a:r>
-              <a:rPr lang="en-US"/>
+              <a:rPr lang="en-US" smtClean="0"/>
               <a:t>Second level</a:t>
             </a:r>
           </a:p>
           <a:p>
             <a:pPr lvl="2"/>
             <a:r>
-              <a:rPr lang="en-US"/>
+              <a:rPr lang="en-US" smtClean="0"/>
               <a:t>Third level</a:t>
             </a:r>
           </a:p>
           <a:p>
             <a:pPr lvl="3"/>
             <a:r>
-              <a:rPr lang="en-US"/>
+              <a:rPr lang="en-US" smtClean="0"/>
               <a:t>Fourth level</a:t>
             </a:r>
           </a:p>
           <a:p>
             <a:pPr lvl="4"/>
             <a:r>
-              <a:rPr lang="en-US"/>
+              <a:rPr lang="en-US" smtClean="0"/>
               <a:t>Fifth level</a:t>
             </a:r>
+            <a:endParaRPr lang="en-US"/>
           </a:p>
         </p:txBody>
       </p:sp>
@@ -1103,7 +1036,7 @@
           <a:p>
             <a:fld id="{5BCAD085-E8A6-8845-BD4E-CB4CCA059FC4}" type="datetimeFigureOut">
               <a:rPr lang="en-US" smtClean="0"/>
-              <a:t>6/12/26</a:t>
+              <a:t>1/27/13</a:t>
             </a:fld>
             <a:endParaRPr lang="en-US"/>
           </a:p>
@@ -1197,9 +1130,10 @@
           <a:lstStyle/>
           <a:p>
             <a:r>
-              <a:rPr lang="en-US"/>
+              <a:rPr lang="en-US" smtClean="0"/>
               <a:t>Click to edit Master title style</a:t>
             </a:r>
+            <a:endParaRPr lang="en-US"/>
           </a:p>
         </p:txBody>
       </p:sp>
@@ -1220,37 +1154,38 @@
           <a:p>
             <a:pPr lvl="0"/>
             <a:r>
-              <a:rPr lang="en-US"/>
+              <a:rPr lang="en-US" smtClean="0"/>
               <a:t>Click to edit Master text styles</a:t>
             </a:r>
           </a:p>
           <a:p>
             <a:pPr lvl="1"/>
             <a:r>
-              <a:rPr lang="en-US"/>
+              <a:rPr lang="en-US" smtClean="0"/>
               <a:t>Second level</a:t>
             </a:r>
           </a:p>
           <a:p>
             <a:pPr lvl="2"/>
             <a:r>
-              <a:rPr lang="en-US"/>
+              <a:rPr lang="en-US" smtClean="0"/>
               <a:t>Third level</a:t>
             </a:r>
           </a:p>
           <a:p>
             <a:pPr lvl="3"/>
             <a:r>
-              <a:rPr lang="en-US"/>
+              <a:rPr lang="en-US" smtClean="0"/>
               <a:t>Fourth level</a:t>
             </a:r>
           </a:p>
           <a:p>
             <a:pPr lvl="4"/>
             <a:r>
-              <a:rPr lang="en-US"/>
+              <a:rPr lang="en-US" smtClean="0"/>
               <a:t>Fifth level</a:t>
             </a:r>
+            <a:endParaRPr lang="en-US"/>
           </a:p>
         </p:txBody>
       </p:sp>
@@ -1271,7 +1206,7 @@
           <a:p>
             <a:fld id="{5BCAD085-E8A6-8845-BD4E-CB4CCA059FC4}" type="datetimeFigureOut">
               <a:rPr lang="en-US" smtClean="0"/>
-              <a:t>6/12/26</a:t>
+              <a:t>1/27/13</a:t>
             </a:fld>
             <a:endParaRPr lang="en-US"/>
           </a:p>
@@ -1374,9 +1309,10 @@
           </a:lstStyle>
           <a:p>
             <a:r>
-              <a:rPr lang="en-US"/>
+              <a:rPr lang="en-US" smtClean="0"/>
               <a:t>Click to edit Master title style</a:t>
             </a:r>
+            <a:endParaRPr lang="en-US"/>
           </a:p>
         </p:txBody>
       </p:sp>
@@ -1493,7 +1429,7 @@
           <a:p>
             <a:pPr lvl="0"/>
             <a:r>
-              <a:rPr lang="en-US"/>
+              <a:rPr lang="en-US" smtClean="0"/>
               <a:t>Click to edit Master text styles</a:t>
             </a:r>
           </a:p>
@@ -1516,7 +1452,7 @@
           <a:p>
             <a:fld id="{5BCAD085-E8A6-8845-BD4E-CB4CCA059FC4}" type="datetimeFigureOut">
               <a:rPr lang="en-US" smtClean="0"/>
-              <a:t>6/12/26</a:t>
+              <a:t>1/27/13</a:t>
             </a:fld>
             <a:endParaRPr lang="en-US"/>
           </a:p>
@@ -1610,9 +1546,10 @@
           <a:lstStyle/>
           <a:p>
             <a:r>
-              <a:rPr lang="en-US"/>
+              <a:rPr lang="en-US" smtClean="0"/>
               <a:t>Click to edit Master title style</a:t>
             </a:r>
+            <a:endParaRPr lang="en-US"/>
           </a:p>
         </p:txBody>
       </p:sp>
@@ -1666,37 +1603,38 @@
           <a:p>
             <a:pPr lvl="0"/>
             <a:r>
-              <a:rPr lang="en-US"/>
+              <a:rPr lang="en-US" smtClean="0"/>
               <a:t>Click to edit Master text styles</a:t>
             </a:r>
           </a:p>
           <a:p>
             <a:pPr lvl="1"/>
             <a:r>
-              <a:rPr lang="en-US"/>
+              <a:rPr lang="en-US" smtClean="0"/>
               <a:t>Second level</a:t>
             </a:r>
           </a:p>
           <a:p>
             <a:pPr lvl="2"/>
             <a:r>
-              <a:rPr lang="en-US"/>
+              <a:rPr lang="en-US" smtClean="0"/>
               <a:t>Third level</a:t>
             </a:r>
           </a:p>
           <a:p>
             <a:pPr lvl="3"/>
             <a:r>
-              <a:rPr lang="en-US"/>
+              <a:rPr lang="en-US" smtClean="0"/>
               <a:t>Fourth level</a:t>
             </a:r>
           </a:p>
           <a:p>
             <a:pPr lvl="4"/>
             <a:r>
-              <a:rPr lang="en-US"/>
+              <a:rPr lang="en-US" smtClean="0"/>
               <a:t>Fifth level</a:t>
             </a:r>
+            <a:endParaRPr lang="en-US"/>
           </a:p>
         </p:txBody>
       </p:sp>
@@ -1750,37 +1688,38 @@
           <a:p>
             <a:pPr lvl="0"/>
             <a:r>
-              <a:rPr lang="en-US"/>
+              <a:rPr lang="en-US" smtClean="0"/>
               <a:t>Click to edit Master text styles</a:t>
             </a:r>
           </a:p>
           <a:p>
             <a:pPr lvl="1"/>
             <a:r>
-              <a:rPr lang="en-US"/>
+              <a:rPr lang="en-US" smtClean="0"/>
               <a:t>Second level</a:t>
             </a:r>
           </a:p>
           <a:p>
             <a:pPr lvl="2"/>
             <a:r>
-              <a:rPr lang="en-US"/>
+              <a:rPr lang="en-US" smtClean="0"/>
               <a:t>Third level</a:t>
             </a:r>
           </a:p>
           <a:p>
             <a:pPr lvl="3"/>
             <a:r>
-              <a:rPr lang="en-US"/>
+              <a:rPr lang="en-US" smtClean="0"/>
               <a:t>Fourth level</a:t>
             </a:r>
           </a:p>
           <a:p>
             <a:pPr lvl="4"/>
             <a:r>
-              <a:rPr lang="en-US"/>
+              <a:rPr lang="en-US" smtClean="0"/>
               <a:t>Fifth level</a:t>
             </a:r>
+            <a:endParaRPr lang="en-US"/>
           </a:p>
         </p:txBody>
       </p:sp>
@@ -1801,7 +1740,7 @@
           <a:p>
             <a:fld id="{5BCAD085-E8A6-8845-BD4E-CB4CCA059FC4}" type="datetimeFigureOut">
               <a:rPr lang="en-US" smtClean="0"/>
-              <a:t>6/12/26</a:t>
+              <a:t>1/27/13</a:t>
             </a:fld>
             <a:endParaRPr lang="en-US"/>
           </a:p>
@@ -1899,9 +1838,10 @@
           </a:lstStyle>
           <a:p>
             <a:r>
-              <a:rPr lang="en-US"/>
+              <a:rPr lang="en-US" smtClean="0"/>
               <a:t>Click to edit Master title style</a:t>
             </a:r>
+            <a:endParaRPr lang="en-US"/>
           </a:p>
         </p:txBody>
       </p:sp>
@@ -1964,7 +1904,7 @@
           <a:p>
             <a:pPr lvl="0"/>
             <a:r>
-              <a:rPr lang="en-US"/>
+              <a:rPr lang="en-US" smtClean="0"/>
               <a:t>Click to edit Master text styles</a:t>
             </a:r>
           </a:p>
@@ -2020,37 +1960,38 @@
           <a:p>
             <a:pPr lvl="0"/>
             <a:r>
-              <a:rPr lang="en-US"/>
+              <a:rPr lang="en-US" smtClean="0"/>
               <a:t>Click to edit Master text styles</a:t>
             </a:r>
           </a:p>
           <a:p>
             <a:pPr lvl="1"/>
             <a:r>
-              <a:rPr lang="en-US"/>
+              <a:rPr lang="en-US" smtClean="0"/>
               <a:t>Second level</a:t>
             </a:r>
           </a:p>
           <a:p>
             <a:pPr lvl="2"/>
             <a:r>
-              <a:rPr lang="en-US"/>
+              <a:rPr lang="en-US" smtClean="0"/>
               <a:t>Third level</a:t>
             </a:r>
           </a:p>
           <a:p>
             <a:pPr lvl="3"/>
             <a:r>
-              <a:rPr lang="en-US"/>
+              <a:rPr lang="en-US" smtClean="0"/>
               <a:t>Fourth level</a:t>
             </a:r>
           </a:p>
           <a:p>
             <a:pPr lvl="4"/>
             <a:r>
-              <a:rPr lang="en-US"/>
+              <a:rPr lang="en-US" smtClean="0"/>
               <a:t>Fifth level</a:t>
             </a:r>
+            <a:endParaRPr lang="en-US"/>
           </a:p>
         </p:txBody>
       </p:sp>
@@ -2113,7 +2054,7 @@
           <a:p>
             <a:pPr lvl="0"/>
             <a:r>
-              <a:rPr lang="en-US"/>
+              <a:rPr lang="en-US" smtClean="0"/>
               <a:t>Click to edit Master text styles</a:t>
             </a:r>
           </a:p>
@@ -2169,37 +2110,38 @@
           <a:p>
             <a:pPr lvl="0"/>
             <a:r>
-              <a:rPr lang="en-US"/>
+              <a:rPr lang="en-US" smtClean="0"/>
               <a:t>Click to edit Master text styles</a:t>
             </a:r>
           </a:p>
           <a:p>
             <a:pPr lvl="1"/>
             <a:r>
-              <a:rPr lang="en-US"/>
+              <a:rPr lang="en-US" smtClean="0"/>
               <a:t>Second level</a:t>
             </a:r>
           </a:p>
           <a:p>
             <a:pPr lvl="2"/>
             <a:r>
-              <a:rPr lang="en-US"/>
+              <a:rPr lang="en-US" smtClean="0"/>
               <a:t>Third level</a:t>
             </a:r>
           </a:p>
           <a:p>
             <a:pPr lvl="3"/>
             <a:r>
-              <a:rPr lang="en-US"/>
+              <a:rPr lang="en-US" smtClean="0"/>
               <a:t>Fourth level</a:t>
             </a:r>
           </a:p>
           <a:p>
             <a:pPr lvl="4"/>
             <a:r>
-              <a:rPr lang="en-US"/>
+              <a:rPr lang="en-US" smtClean="0"/>
               <a:t>Fifth level</a:t>
             </a:r>
+            <a:endParaRPr lang="en-US"/>
           </a:p>
         </p:txBody>
       </p:sp>
@@ -2220,7 +2162,7 @@
           <a:p>
             <a:fld id="{5BCAD085-E8A6-8845-BD4E-CB4CCA059FC4}" type="datetimeFigureOut">
               <a:rPr lang="en-US" smtClean="0"/>
-              <a:t>6/12/26</a:t>
+              <a:t>1/27/13</a:t>
             </a:fld>
             <a:endParaRPr lang="en-US"/>
           </a:p>
@@ -2314,9 +2256,10 @@
           <a:lstStyle/>
           <a:p>
             <a:r>
-              <a:rPr lang="en-US"/>
+              <a:rPr lang="en-US" smtClean="0"/>
               <a:t>Click to edit Master title style</a:t>
             </a:r>
+            <a:endParaRPr lang="en-US"/>
           </a:p>
         </p:txBody>
       </p:sp>
@@ -2337,7 +2280,7 @@
           <a:p>
             <a:fld id="{5BCAD085-E8A6-8845-BD4E-CB4CCA059FC4}" type="datetimeFigureOut">
               <a:rPr lang="en-US" smtClean="0"/>
-              <a:t>6/12/26</a:t>
+              <a:t>1/27/13</a:t>
             </a:fld>
             <a:endParaRPr lang="en-US"/>
           </a:p>
@@ -2432,7 +2375,7 @@
           <a:p>
             <a:fld id="{5BCAD085-E8A6-8845-BD4E-CB4CCA059FC4}" type="datetimeFigureOut">
               <a:rPr lang="en-US" smtClean="0"/>
-              <a:t>6/12/26</a:t>
+              <a:t>1/27/13</a:t>
             </a:fld>
             <a:endParaRPr lang="en-US"/>
           </a:p>
@@ -2535,9 +2478,10 @@
           </a:lstStyle>
           <a:p>
             <a:r>
-              <a:rPr lang="en-US"/>
+              <a:rPr lang="en-US" smtClean="0"/>
               <a:t>Click to edit Master title style</a:t>
             </a:r>
+            <a:endParaRPr lang="en-US"/>
           </a:p>
         </p:txBody>
       </p:sp>
@@ -2591,37 +2535,38 @@
           <a:p>
             <a:pPr lvl="0"/>
             <a:r>
-              <a:rPr lang="en-US"/>
+              <a:rPr lang="en-US" smtClean="0"/>
               <a:t>Click to edit Master text styles</a:t>
             </a:r>
           </a:p>
           <a:p>
             <a:pPr lvl="1"/>
             <a:r>
-              <a:rPr lang="en-US"/>
+              <a:rPr lang="en-US" smtClean="0"/>
               <a:t>Second level</a:t>
             </a:r>
           </a:p>
           <a:p>
             <a:pPr lvl="2"/>
             <a:r>
-              <a:rPr lang="en-US"/>
+              <a:rPr lang="en-US" smtClean="0"/>
               <a:t>Third level</a:t>
             </a:r>
           </a:p>
           <a:p>
             <a:pPr lvl="3"/>
             <a:r>
-              <a:rPr lang="en-US"/>
+              <a:rPr lang="en-US" smtClean="0"/>
               <a:t>Fourth level</a:t>
             </a:r>
           </a:p>
           <a:p>
             <a:pPr lvl="4"/>
             <a:r>
-              <a:rPr lang="en-US"/>
+              <a:rPr lang="en-US" smtClean="0"/>
               <a:t>Fifth level</a:t>
             </a:r>
+            <a:endParaRPr lang="en-US"/>
           </a:p>
         </p:txBody>
       </p:sp>
@@ -2684,7 +2629,7 @@
           <a:p>
             <a:pPr lvl="0"/>
             <a:r>
-              <a:rPr lang="en-US"/>
+              <a:rPr lang="en-US" smtClean="0"/>
               <a:t>Click to edit Master text styles</a:t>
             </a:r>
           </a:p>
@@ -2707,7 +2652,7 @@
           <a:p>
             <a:fld id="{5BCAD085-E8A6-8845-BD4E-CB4CCA059FC4}" type="datetimeFigureOut">
               <a:rPr lang="en-US" smtClean="0"/>
-              <a:t>6/12/26</a:t>
+              <a:t>1/27/13</a:t>
             </a:fld>
             <a:endParaRPr lang="en-US"/>
           </a:p>
@@ -2810,9 +2755,10 @@
           </a:lstStyle>
           <a:p>
             <a:r>
-              <a:rPr lang="en-US"/>
+              <a:rPr lang="en-US" smtClean="0"/>
               <a:t>Click to edit Master title style</a:t>
             </a:r>
+            <a:endParaRPr lang="en-US"/>
           </a:p>
         </p:txBody>
       </p:sp>
@@ -2936,7 +2882,7 @@
           <a:p>
             <a:pPr lvl="0"/>
             <a:r>
-              <a:rPr lang="en-US"/>
+              <a:rPr lang="en-US" smtClean="0"/>
               <a:t>Click to edit Master text styles</a:t>
             </a:r>
           </a:p>
@@ -2959,7 +2905,7 @@
           <a:p>
             <a:fld id="{5BCAD085-E8A6-8845-BD4E-CB4CCA059FC4}" type="datetimeFigureOut">
               <a:rPr lang="en-US" smtClean="0"/>
-              <a:t>6/12/26</a:t>
+              <a:t>1/27/13</a:t>
             </a:fld>
             <a:endParaRPr lang="en-US"/>
           </a:p>
@@ -3068,9 +3014,10 @@
           <a:lstStyle/>
           <a:p>
             <a:r>
-              <a:rPr lang="en-US"/>
+              <a:rPr lang="en-US" smtClean="0"/>
               <a:t>Click to edit Master title style</a:t>
             </a:r>
+            <a:endParaRPr lang="en-US"/>
           </a:p>
         </p:txBody>
       </p:sp>
@@ -3101,37 +3048,38 @@
           <a:p>
             <a:pPr lvl="0"/>
             <a:r>
-              <a:rPr lang="en-US"/>
+              <a:rPr lang="en-US" smtClean="0"/>
               <a:t>Click to edit Master text styles</a:t>
             </a:r>
           </a:p>
           <a:p>
             <a:pPr lvl="1"/>
             <a:r>
-              <a:rPr lang="en-US"/>
+              <a:rPr lang="en-US" smtClean="0"/>
               <a:t>Second level</a:t>
             </a:r>
           </a:p>
           <a:p>
             <a:pPr lvl="2"/>
             <a:r>
-              <a:rPr lang="en-US"/>
+              <a:rPr lang="en-US" smtClean="0"/>
               <a:t>Third level</a:t>
             </a:r>
           </a:p>
           <a:p>
             <a:pPr lvl="3"/>
             <a:r>
-              <a:rPr lang="en-US"/>
+              <a:rPr lang="en-US" smtClean="0"/>
               <a:t>Fourth level</a:t>
             </a:r>
           </a:p>
           <a:p>
             <a:pPr lvl="4"/>
             <a:r>
-              <a:rPr lang="en-US"/>
+              <a:rPr lang="en-US" smtClean="0"/>
               <a:t>Fifth level</a:t>
             </a:r>
+            <a:endParaRPr lang="en-US"/>
           </a:p>
         </p:txBody>
       </p:sp>
@@ -3170,7 +3118,7 @@
           <a:p>
             <a:fld id="{5BCAD085-E8A6-8845-BD4E-CB4CCA059FC4}" type="datetimeFigureOut">
               <a:rPr lang="en-US" smtClean="0"/>
-              <a:t>6/12/26</a:t>
+              <a:t>1/27/13</a:t>
             </a:fld>
             <a:endParaRPr lang="en-US"/>
           </a:p>
@@ -3529,7 +3477,7 @@
 </file>
 
 <file path=ppt/slides/slide1.xml><?xml version="1.0" encoding="utf-8"?>
-<p:sld xmlns:a="http://schemas.openxmlformats.org/drawingml/2006/main" xmlns:r="http://schemas.openxmlformats.org/officeDocument/2006/relationships" xmlns:p="http://schemas.openxmlformats.org/presentationml/2006/main">
+<p:sld xmlns:a="http://schemas.openxmlformats.org/drawingml/2006/main" xmlns:p="http://schemas.openxmlformats.org/presentationml/2006/main" xmlns:r="http://schemas.openxmlformats.org/officeDocument/2006/relationships">
   <p:cSld>
     <p:spTree>
       <p:nvGrpSpPr>
@@ -3537,14 +3485,7 @@
         <p:cNvGrpSpPr/>
         <p:nvPr/>
       </p:nvGrpSpPr>
-      <p:grpSpPr>
-        <a:xfrm>
-          <a:off x="0" y="0"/>
-          <a:ext cx="0" cy="0"/>
-          <a:chOff x="0" y="0"/>
-          <a:chExt cx="0" cy="0"/>
-        </a:xfrm>
-      </p:grpSpPr>
+      <p:grpSpPr/>
       <p:sp>
         <p:nvSpPr>
           <p:cNvPr id="2" name="TextBox 1"/>
@@ -3656,7 +3597,7 @@
 </file>
 
 <file path=ppt/slides/slide10.xml><?xml version="1.0" encoding="utf-8"?>
-<p:sld xmlns:a="http://schemas.openxmlformats.org/drawingml/2006/main" xmlns:r="http://schemas.openxmlformats.org/officeDocument/2006/relationships" xmlns:p="http://schemas.openxmlformats.org/presentationml/2006/main">
+<p:sld xmlns:a="http://schemas.openxmlformats.org/drawingml/2006/main" xmlns:p="http://schemas.openxmlformats.org/presentationml/2006/main" xmlns:r="http://schemas.openxmlformats.org/officeDocument/2006/relationships">
   <p:cSld>
     <p:spTree>
       <p:nvGrpSpPr>
@@ -3664,14 +3605,7 @@
         <p:cNvGrpSpPr/>
         <p:nvPr/>
       </p:nvGrpSpPr>
-      <p:grpSpPr>
-        <a:xfrm>
-          <a:off x="0" y="0"/>
-          <a:ext cx="0" cy="0"/>
-          <a:chOff x="0" y="0"/>
-          <a:chExt cx="0" cy="0"/>
-        </a:xfrm>
-      </p:grpSpPr>
+      <p:grpSpPr/>
       <p:sp>
         <p:nvSpPr>
           <p:cNvPr id="2" name="TextBox 1"/>
@@ -3792,27 +3726,9 @@
                 <a:tableStyleId>{5C22544A-7EE6-4342-B048-85BDC9FD1C3A}</a:tableStyleId>
               </a:tblPr>
               <a:tblGrid>
-                <a:gridCol w="2560320">
-                  <a:extLst>
-                    <a:ext uri="{9D8B030D-6E8A-4147-A177-3AD203B41FA5}">
-                      <a16:colId xmlns:a16="http://schemas.microsoft.com/office/drawing/2014/main" val="20000"/>
-                    </a:ext>
-                  </a:extLst>
-                </a:gridCol>
-                <a:gridCol w="3840480">
-                  <a:extLst>
-                    <a:ext uri="{9D8B030D-6E8A-4147-A177-3AD203B41FA5}">
-                      <a16:colId xmlns:a16="http://schemas.microsoft.com/office/drawing/2014/main" val="20001"/>
-                    </a:ext>
-                  </a:extLst>
-                </a:gridCol>
-                <a:gridCol w="4297680">
-                  <a:extLst>
-                    <a:ext uri="{9D8B030D-6E8A-4147-A177-3AD203B41FA5}">
-                      <a16:colId xmlns:a16="http://schemas.microsoft.com/office/drawing/2014/main" val="20002"/>
-                    </a:ext>
-                  </a:extLst>
-                </a:gridCol>
+                <a:gridCol w="2560320"/>
+                <a:gridCol w="3840480"/>
+                <a:gridCol w="4297680"/>
               </a:tblGrid>
               <a:tr h="365760">
                 <a:tc>
@@ -3854,11 +3770,6 @@
                   </a:txBody>
                   <a:tcPr/>
                 </a:tc>
-                <a:extLst>
-                  <a:ext uri="{0D108BD9-81ED-4DB2-BD59-A6C34878D82A}">
-                    <a16:rowId xmlns:a16="http://schemas.microsoft.com/office/drawing/2014/main" val="10000"/>
-                  </a:ext>
-                </a:extLst>
               </a:tr>
               <a:tr h="365760">
                 <a:tc>
@@ -3900,11 +3811,6 @@
                   </a:txBody>
                   <a:tcPr/>
                 </a:tc>
-                <a:extLst>
-                  <a:ext uri="{0D108BD9-81ED-4DB2-BD59-A6C34878D82A}">
-                    <a16:rowId xmlns:a16="http://schemas.microsoft.com/office/drawing/2014/main" val="10001"/>
-                  </a:ext>
-                </a:extLst>
               </a:tr>
               <a:tr h="365760">
                 <a:tc>
@@ -3946,11 +3852,6 @@
                   </a:txBody>
                   <a:tcPr/>
                 </a:tc>
-                <a:extLst>
-                  <a:ext uri="{0D108BD9-81ED-4DB2-BD59-A6C34878D82A}">
-                    <a16:rowId xmlns:a16="http://schemas.microsoft.com/office/drawing/2014/main" val="10002"/>
-                  </a:ext>
-                </a:extLst>
               </a:tr>
               <a:tr h="365760">
                 <a:tc>
@@ -3992,11 +3893,6 @@
                   </a:txBody>
                   <a:tcPr/>
                 </a:tc>
-                <a:extLst>
-                  <a:ext uri="{0D108BD9-81ED-4DB2-BD59-A6C34878D82A}">
-                    <a16:rowId xmlns:a16="http://schemas.microsoft.com/office/drawing/2014/main" val="10003"/>
-                  </a:ext>
-                </a:extLst>
               </a:tr>
             </a:tbl>
           </a:graphicData>
@@ -4011,7 +3907,7 @@
 </file>
 
 <file path=ppt/slides/slide11.xml><?xml version="1.0" encoding="utf-8"?>
-<p:sld xmlns:a="http://schemas.openxmlformats.org/drawingml/2006/main" xmlns:r="http://schemas.openxmlformats.org/officeDocument/2006/relationships" xmlns:p="http://schemas.openxmlformats.org/presentationml/2006/main">
+<p:sld xmlns:a="http://schemas.openxmlformats.org/drawingml/2006/main" xmlns:p="http://schemas.openxmlformats.org/presentationml/2006/main" xmlns:r="http://schemas.openxmlformats.org/officeDocument/2006/relationships">
   <p:cSld>
     <p:spTree>
       <p:nvGrpSpPr>
@@ -4019,14 +3915,7 @@
         <p:cNvGrpSpPr/>
         <p:nvPr/>
       </p:nvGrpSpPr>
-      <p:grpSpPr>
-        <a:xfrm>
-          <a:off x="0" y="0"/>
-          <a:ext cx="0" cy="0"/>
-          <a:chOff x="0" y="0"/>
-          <a:chExt cx="0" cy="0"/>
-        </a:xfrm>
-      </p:grpSpPr>
+      <p:grpSpPr/>
       <p:sp>
         <p:nvSpPr>
           <p:cNvPr id="2" name="TextBox 1"/>
@@ -4132,11 +4021,14 @@
                 <a:spcPts val="800"/>
               </a:spcAft>
             </a:pPr>
-            <a:endParaRPr sz="2400">
-              <a:solidFill>
-                <a:srgbClr val="212121"/>
-              </a:solidFill>
-            </a:endParaRPr>
+            <a:r>
+              <a:rPr sz="2400">
+                <a:solidFill>
+                  <a:srgbClr val="212121"/>
+                </a:solidFill>
+              </a:rPr>
+              <a:t/>
+            </a:r>
           </a:p>
           <a:p>
             <a:pPr>
@@ -4164,7 +4056,7 @@
 </file>
 
 <file path=ppt/slides/slide12.xml><?xml version="1.0" encoding="utf-8"?>
-<p:sld xmlns:a="http://schemas.openxmlformats.org/drawingml/2006/main" xmlns:r="http://schemas.openxmlformats.org/officeDocument/2006/relationships" xmlns:p="http://schemas.openxmlformats.org/presentationml/2006/main">
+<p:sld xmlns:a="http://schemas.openxmlformats.org/drawingml/2006/main" xmlns:p="http://schemas.openxmlformats.org/presentationml/2006/main" xmlns:r="http://schemas.openxmlformats.org/officeDocument/2006/relationships">
   <p:cSld>
     <p:spTree>
       <p:nvGrpSpPr>
@@ -4172,14 +4064,7 @@
         <p:cNvGrpSpPr/>
         <p:nvPr/>
       </p:nvGrpSpPr>
-      <p:grpSpPr>
-        <a:xfrm>
-          <a:off x="0" y="0"/>
-          <a:ext cx="0" cy="0"/>
-          <a:chOff x="0" y="0"/>
-          <a:chExt cx="0" cy="0"/>
-        </a:xfrm>
-      </p:grpSpPr>
+      <p:grpSpPr/>
       <p:sp>
         <p:nvSpPr>
           <p:cNvPr id="2" name="TextBox 1"/>
@@ -4227,7 +4112,7 @@
         </p:xfrm>
         <a:graphic>
           <a:graphicData uri="http://schemas.openxmlformats.org/drawingml/2006/chart">
-            <c:chart xmlns:c="http://schemas.openxmlformats.org/drawingml/2006/chart" xmlns:r="http://schemas.openxmlformats.org/officeDocument/2006/relationships" r:id="rId2"/>
+            <c:chart xmlns:c="http://schemas.openxmlformats.org/drawingml/2006/chart" r:id="rId2"/>
           </a:graphicData>
         </a:graphic>
       </p:graphicFrame>
@@ -4278,7 +4163,7 @@
 </file>
 
 <file path=ppt/slides/slide13.xml><?xml version="1.0" encoding="utf-8"?>
-<p:sld xmlns:a="http://schemas.openxmlformats.org/drawingml/2006/main" xmlns:r="http://schemas.openxmlformats.org/officeDocument/2006/relationships" xmlns:p="http://schemas.openxmlformats.org/presentationml/2006/main">
+<p:sld xmlns:a="http://schemas.openxmlformats.org/drawingml/2006/main" xmlns:p="http://schemas.openxmlformats.org/presentationml/2006/main" xmlns:r="http://schemas.openxmlformats.org/officeDocument/2006/relationships">
   <p:cSld>
     <p:spTree>
       <p:nvGrpSpPr>
@@ -4286,14 +4171,7 @@
         <p:cNvGrpSpPr/>
         <p:nvPr/>
       </p:nvGrpSpPr>
-      <p:grpSpPr>
-        <a:xfrm>
-          <a:off x="0" y="0"/>
-          <a:ext cx="0" cy="0"/>
-          <a:chOff x="0" y="0"/>
-          <a:chExt cx="0" cy="0"/>
-        </a:xfrm>
-      </p:grpSpPr>
+      <p:grpSpPr/>
       <p:sp>
         <p:nvSpPr>
           <p:cNvPr id="2" name="TextBox 1"/>
@@ -4341,7 +4219,7 @@
         </p:xfrm>
         <a:graphic>
           <a:graphicData uri="http://schemas.openxmlformats.org/drawingml/2006/chart">
-            <c:chart xmlns:c="http://schemas.openxmlformats.org/drawingml/2006/chart" xmlns:r="http://schemas.openxmlformats.org/officeDocument/2006/relationships" r:id="rId2"/>
+            <c:chart xmlns:c="http://schemas.openxmlformats.org/drawingml/2006/chart" r:id="rId2"/>
           </a:graphicData>
         </a:graphic>
       </p:graphicFrame>
@@ -4392,7 +4270,7 @@
 </file>
 
 <file path=ppt/slides/slide14.xml><?xml version="1.0" encoding="utf-8"?>
-<p:sld xmlns:a="http://schemas.openxmlformats.org/drawingml/2006/main" xmlns:r="http://schemas.openxmlformats.org/officeDocument/2006/relationships" xmlns:p="http://schemas.openxmlformats.org/presentationml/2006/main">
+<p:sld xmlns:a="http://schemas.openxmlformats.org/drawingml/2006/main" xmlns:p="http://schemas.openxmlformats.org/presentationml/2006/main" xmlns:r="http://schemas.openxmlformats.org/officeDocument/2006/relationships">
   <p:cSld>
     <p:spTree>
       <p:nvGrpSpPr>
@@ -4400,14 +4278,7 @@
         <p:cNvGrpSpPr/>
         <p:nvPr/>
       </p:nvGrpSpPr>
-      <p:grpSpPr>
-        <a:xfrm>
-          <a:off x="0" y="0"/>
-          <a:ext cx="0" cy="0"/>
-          <a:chOff x="0" y="0"/>
-          <a:chExt cx="0" cy="0"/>
-        </a:xfrm>
-      </p:grpSpPr>
+      <p:grpSpPr/>
       <p:sp>
         <p:nvSpPr>
           <p:cNvPr id="2" name="TextBox 1"/>
@@ -4498,11 +4369,14 @@
                 <a:spcPts val="800"/>
               </a:spcAft>
             </a:pPr>
-            <a:endParaRPr sz="2400">
-              <a:solidFill>
-                <a:srgbClr val="212121"/>
-              </a:solidFill>
-            </a:endParaRPr>
+            <a:r>
+              <a:rPr sz="2400">
+                <a:solidFill>
+                  <a:srgbClr val="212121"/>
+                </a:solidFill>
+              </a:rPr>
+              <a:t/>
+            </a:r>
           </a:p>
           <a:p>
             <a:pPr>
@@ -4560,7 +4434,7 @@
 </file>
 
 <file path=ppt/slides/slide15.xml><?xml version="1.0" encoding="utf-8"?>
-<p:sld xmlns:a="http://schemas.openxmlformats.org/drawingml/2006/main" xmlns:r="http://schemas.openxmlformats.org/officeDocument/2006/relationships" xmlns:p="http://schemas.openxmlformats.org/presentationml/2006/main">
+<p:sld xmlns:a="http://schemas.openxmlformats.org/drawingml/2006/main" xmlns:p="http://schemas.openxmlformats.org/presentationml/2006/main" xmlns:r="http://schemas.openxmlformats.org/officeDocument/2006/relationships">
   <p:cSld>
     <p:spTree>
       <p:nvGrpSpPr>
@@ -4568,14 +4442,7 @@
         <p:cNvGrpSpPr/>
         <p:nvPr/>
       </p:nvGrpSpPr>
-      <p:grpSpPr>
-        <a:xfrm>
-          <a:off x="0" y="0"/>
-          <a:ext cx="0" cy="0"/>
-          <a:chOff x="0" y="0"/>
-          <a:chExt cx="0" cy="0"/>
-        </a:xfrm>
-      </p:grpSpPr>
+      <p:grpSpPr/>
       <p:sp>
         <p:nvSpPr>
           <p:cNvPr id="2" name="TextBox 1"/>
@@ -4798,7 +4665,7 @@
 </file>
 
 <file path=ppt/slides/slide16.xml><?xml version="1.0" encoding="utf-8"?>
-<p:sld xmlns:a="http://schemas.openxmlformats.org/drawingml/2006/main" xmlns:r="http://schemas.openxmlformats.org/officeDocument/2006/relationships" xmlns:p="http://schemas.openxmlformats.org/presentationml/2006/main">
+<p:sld xmlns:a="http://schemas.openxmlformats.org/drawingml/2006/main" xmlns:p="http://schemas.openxmlformats.org/presentationml/2006/main" xmlns:r="http://schemas.openxmlformats.org/officeDocument/2006/relationships">
   <p:cSld>
     <p:spTree>
       <p:nvGrpSpPr>
@@ -4806,14 +4673,7 @@
         <p:cNvGrpSpPr/>
         <p:nvPr/>
       </p:nvGrpSpPr>
-      <p:grpSpPr>
-        <a:xfrm>
-          <a:off x="0" y="0"/>
-          <a:ext cx="0" cy="0"/>
-          <a:chOff x="0" y="0"/>
-          <a:chExt cx="0" cy="0"/>
-        </a:xfrm>
-      </p:grpSpPr>
+      <p:grpSpPr/>
       <p:sp>
         <p:nvSpPr>
           <p:cNvPr id="2" name="TextBox 1"/>
@@ -4904,11 +4764,14 @@
                 <a:spcPts val="800"/>
               </a:spcAft>
             </a:pPr>
-            <a:endParaRPr sz="2600">
-              <a:solidFill>
-                <a:srgbClr val="212121"/>
-              </a:solidFill>
-            </a:endParaRPr>
+            <a:r>
+              <a:rPr sz="2600">
+                <a:solidFill>
+                  <a:srgbClr val="212121"/>
+                </a:solidFill>
+              </a:rPr>
+              <a:t/>
+            </a:r>
           </a:p>
           <a:p>
             <a:pPr>
@@ -4936,7 +4799,7 @@
 </file>
 
 <file path=ppt/slides/slide17.xml><?xml version="1.0" encoding="utf-8"?>
-<p:sld xmlns:a="http://schemas.openxmlformats.org/drawingml/2006/main" xmlns:r="http://schemas.openxmlformats.org/officeDocument/2006/relationships" xmlns:p="http://schemas.openxmlformats.org/presentationml/2006/main">
+<p:sld xmlns:a="http://schemas.openxmlformats.org/drawingml/2006/main" xmlns:p="http://schemas.openxmlformats.org/presentationml/2006/main" xmlns:r="http://schemas.openxmlformats.org/officeDocument/2006/relationships">
   <p:cSld>
     <p:spTree>
       <p:nvGrpSpPr>
@@ -4944,14 +4807,7 @@
         <p:cNvGrpSpPr/>
         <p:nvPr/>
       </p:nvGrpSpPr>
-      <p:grpSpPr>
-        <a:xfrm>
-          <a:off x="0" y="0"/>
-          <a:ext cx="0" cy="0"/>
-          <a:chOff x="0" y="0"/>
-          <a:chExt cx="0" cy="0"/>
-        </a:xfrm>
-      </p:grpSpPr>
+      <p:grpSpPr/>
       <p:sp>
         <p:nvSpPr>
           <p:cNvPr id="2" name="TextBox 1"/>
@@ -5057,24 +4913,27 @@
                 <a:spcPts val="800"/>
               </a:spcAft>
             </a:pPr>
-            <a:endParaRPr sz="2400">
-              <a:solidFill>
-                <a:srgbClr val="212121"/>
-              </a:solidFill>
-            </a:endParaRPr>
-          </a:p>
-          <a:p>
-            <a:pPr>
-              <a:spcAft>
-                <a:spcPts val="800"/>
-              </a:spcAft>
-            </a:pPr>
             <a:r>
               <a:rPr sz="2400">
                 <a:solidFill>
                   <a:srgbClr val="212121"/>
                 </a:solidFill>
               </a:rPr>
+              <a:t/>
+            </a:r>
+          </a:p>
+          <a:p>
+            <a:pPr>
+              <a:spcAft>
+                <a:spcPts val="800"/>
+              </a:spcAft>
+            </a:pPr>
+            <a:r>
+              <a:rPr sz="2400">
+                <a:solidFill>
+                  <a:srgbClr val="212121"/>
+                </a:solidFill>
+              </a:rPr>
               <a:t>“Program testing can be used to show the presence of bugs, but never to show their absence.” — E. W. Dijkstra, 1970</a:t>
             </a:r>
           </a:p>
@@ -5084,11 +4943,14 @@
                 <a:spcPts val="800"/>
               </a:spcAft>
             </a:pPr>
-            <a:endParaRPr sz="2400">
-              <a:solidFill>
-                <a:srgbClr val="212121"/>
-              </a:solidFill>
-            </a:endParaRPr>
+            <a:r>
+              <a:rPr sz="2400">
+                <a:solidFill>
+                  <a:srgbClr val="212121"/>
+                </a:solidFill>
+              </a:rPr>
+              <a:t/>
+            </a:r>
           </a:p>
           <a:p>
             <a:pPr>
@@ -5116,7 +4978,7 @@
 </file>
 
 <file path=ppt/slides/slide18.xml><?xml version="1.0" encoding="utf-8"?>
-<p:sld xmlns:a="http://schemas.openxmlformats.org/drawingml/2006/main" xmlns:r="http://schemas.openxmlformats.org/officeDocument/2006/relationships" xmlns:p="http://schemas.openxmlformats.org/presentationml/2006/main">
+<p:sld xmlns:a="http://schemas.openxmlformats.org/drawingml/2006/main" xmlns:p="http://schemas.openxmlformats.org/presentationml/2006/main" xmlns:r="http://schemas.openxmlformats.org/officeDocument/2006/relationships">
   <p:cSld>
     <p:spTree>
       <p:nvGrpSpPr>
@@ -5124,14 +4986,7 @@
         <p:cNvGrpSpPr/>
         <p:nvPr/>
       </p:nvGrpSpPr>
-      <p:grpSpPr>
-        <a:xfrm>
-          <a:off x="0" y="0"/>
-          <a:ext cx="0" cy="0"/>
-          <a:chOff x="0" y="0"/>
-          <a:chExt cx="0" cy="0"/>
-        </a:xfrm>
-      </p:grpSpPr>
+      <p:grpSpPr/>
       <p:sp>
         <p:nvSpPr>
           <p:cNvPr id="2" name="TextBox 1"/>
@@ -5207,24 +5062,27 @@
                 <a:spcPts val="800"/>
               </a:spcAft>
             </a:pPr>
-            <a:endParaRPr sz="2600">
-              <a:solidFill>
-                <a:srgbClr val="212121"/>
-              </a:solidFill>
-            </a:endParaRPr>
-          </a:p>
-          <a:p>
-            <a:pPr>
-              <a:spcAft>
-                <a:spcPts val="800"/>
-              </a:spcAft>
-            </a:pPr>
             <a:r>
               <a:rPr sz="2600">
                 <a:solidFill>
                   <a:srgbClr val="212121"/>
                 </a:solidFill>
               </a:rPr>
+              <a:t/>
+            </a:r>
+          </a:p>
+          <a:p>
+            <a:pPr>
+              <a:spcAft>
+                <a:spcPts val="800"/>
+              </a:spcAft>
+            </a:pPr>
+            <a:r>
+              <a:rPr sz="2600">
+                <a:solidFill>
+                  <a:srgbClr val="212121"/>
+                </a:solidFill>
+              </a:rPr>
               <a:t>Can the program reach a state where the property fails?</a:t>
             </a:r>
           </a:p>
@@ -5234,11 +5092,14 @@
                 <a:spcPts val="800"/>
               </a:spcAft>
             </a:pPr>
-            <a:endParaRPr sz="2600">
-              <a:solidFill>
-                <a:srgbClr val="212121"/>
-              </a:solidFill>
-            </a:endParaRPr>
+            <a:r>
+              <a:rPr sz="2600">
+                <a:solidFill>
+                  <a:srgbClr val="212121"/>
+                </a:solidFill>
+              </a:rPr>
+              <a:t/>
+            </a:r>
           </a:p>
           <a:p>
             <a:pPr lvl="1">
@@ -5276,11 +5137,14 @@
                 <a:spcPts val="800"/>
               </a:spcAft>
             </a:pPr>
-            <a:endParaRPr sz="2400">
-              <a:solidFill>
-                <a:srgbClr val="212121"/>
-              </a:solidFill>
-            </a:endParaRPr>
+            <a:r>
+              <a:rPr sz="2600">
+                <a:solidFill>
+                  <a:srgbClr val="212121"/>
+                </a:solidFill>
+              </a:rPr>
+              <a:t/>
+            </a:r>
           </a:p>
           <a:p>
             <a:pPr>
@@ -5308,7 +5172,7 @@
 </file>
 
 <file path=ppt/slides/slide19.xml><?xml version="1.0" encoding="utf-8"?>
-<p:sld xmlns:a="http://schemas.openxmlformats.org/drawingml/2006/main" xmlns:r="http://schemas.openxmlformats.org/officeDocument/2006/relationships" xmlns:p="http://schemas.openxmlformats.org/presentationml/2006/main">
+<p:sld xmlns:a="http://schemas.openxmlformats.org/drawingml/2006/main" xmlns:p="http://schemas.openxmlformats.org/presentationml/2006/main" xmlns:r="http://schemas.openxmlformats.org/officeDocument/2006/relationships">
   <p:cSld>
     <p:spTree>
       <p:nvGrpSpPr>
@@ -5316,14 +5180,7 @@
         <p:cNvGrpSpPr/>
         <p:nvPr/>
       </p:nvGrpSpPr>
-      <p:grpSpPr>
-        <a:xfrm>
-          <a:off x="0" y="0"/>
-          <a:ext cx="0" cy="0"/>
-          <a:chOff x="0" y="0"/>
-          <a:chExt cx="0" cy="0"/>
-        </a:xfrm>
-      </p:grpSpPr>
+      <p:grpSpPr/>
       <p:sp>
         <p:nvSpPr>
           <p:cNvPr id="2" name="TextBox 1"/>
@@ -5444,11 +5301,14 @@
                 <a:spcPts val="800"/>
               </a:spcAft>
             </a:pPr>
-            <a:endParaRPr sz="2200">
-              <a:solidFill>
-                <a:srgbClr val="212121"/>
-              </a:solidFill>
-            </a:endParaRPr>
+            <a:r>
+              <a:rPr sz="2400">
+                <a:solidFill>
+                  <a:srgbClr val="212121"/>
+                </a:solidFill>
+              </a:rPr>
+              <a:t/>
+            </a:r>
           </a:p>
           <a:p>
             <a:pPr>
@@ -5506,7 +5366,7 @@
 </file>
 
 <file path=ppt/slides/slide2.xml><?xml version="1.0" encoding="utf-8"?>
-<p:sld xmlns:a="http://schemas.openxmlformats.org/drawingml/2006/main" xmlns:r="http://schemas.openxmlformats.org/officeDocument/2006/relationships" xmlns:p="http://schemas.openxmlformats.org/presentationml/2006/main">
+<p:sld xmlns:a="http://schemas.openxmlformats.org/drawingml/2006/main" xmlns:p="http://schemas.openxmlformats.org/presentationml/2006/main" xmlns:r="http://schemas.openxmlformats.org/officeDocument/2006/relationships">
   <p:cSld>
     <p:spTree>
       <p:nvGrpSpPr>
@@ -5514,14 +5374,7 @@
         <p:cNvGrpSpPr/>
         <p:nvPr/>
       </p:nvGrpSpPr>
-      <p:grpSpPr>
-        <a:xfrm>
-          <a:off x="0" y="0"/>
-          <a:ext cx="0" cy="0"/>
-          <a:chOff x="0" y="0"/>
-          <a:chExt cx="0" cy="0"/>
-        </a:xfrm>
-      </p:grpSpPr>
+      <p:grpSpPr/>
       <p:sp>
         <p:nvSpPr>
           <p:cNvPr id="2" name="TextBox 1"/>
@@ -5565,7 +5418,7 @@
         </p:nvGraphicFramePr>
         <p:xfrm>
           <a:off x="731520" y="1371600"/>
-          <a:ext cx="10698480" cy="3962400"/>
+          <a:ext cx="10698480" cy="3657600"/>
         </p:xfrm>
         <a:graphic>
           <a:graphicData uri="http://schemas.openxmlformats.org/drawingml/2006/table">
@@ -5574,20 +5427,8 @@
                 <a:tableStyleId>{5C22544A-7EE6-4342-B048-85BDC9FD1C3A}</a:tableStyleId>
               </a:tblPr>
               <a:tblGrid>
-                <a:gridCol w="1463040">
-                  <a:extLst>
-                    <a:ext uri="{9D8B030D-6E8A-4147-A177-3AD203B41FA5}">
-                      <a16:colId xmlns:a16="http://schemas.microsoft.com/office/drawing/2014/main" val="20000"/>
-                    </a:ext>
-                  </a:extLst>
-                </a:gridCol>
-                <a:gridCol w="9235440">
-                  <a:extLst>
-                    <a:ext uri="{9D8B030D-6E8A-4147-A177-3AD203B41FA5}">
-                      <a16:colId xmlns:a16="http://schemas.microsoft.com/office/drawing/2014/main" val="20001"/>
-                    </a:ext>
-                  </a:extLst>
-                </a:gridCol>
+                <a:gridCol w="1463040"/>
+                <a:gridCol w="9235440"/>
               </a:tblGrid>
               <a:tr h="365760">
                 <a:tc>
@@ -5616,11 +5457,6 @@
                   </a:txBody>
                   <a:tcPr/>
                 </a:tc>
-                <a:extLst>
-                  <a:ext uri="{0D108BD9-81ED-4DB2-BD59-A6C34878D82A}">
-                    <a16:rowId xmlns:a16="http://schemas.microsoft.com/office/drawing/2014/main" val="10000"/>
-                  </a:ext>
-                </a:extLst>
               </a:tr>
               <a:tr h="365760">
                 <a:tc>
@@ -5649,11 +5485,6 @@
                   </a:txBody>
                   <a:tcPr/>
                 </a:tc>
-                <a:extLst>
-                  <a:ext uri="{0D108BD9-81ED-4DB2-BD59-A6C34878D82A}">
-                    <a16:rowId xmlns:a16="http://schemas.microsoft.com/office/drawing/2014/main" val="10001"/>
-                  </a:ext>
-                </a:extLst>
               </a:tr>
               <a:tr h="365760">
                 <a:tc>
@@ -5682,11 +5513,6 @@
                   </a:txBody>
                   <a:tcPr/>
                 </a:tc>
-                <a:extLst>
-                  <a:ext uri="{0D108BD9-81ED-4DB2-BD59-A6C34878D82A}">
-                    <a16:rowId xmlns:a16="http://schemas.microsoft.com/office/drawing/2014/main" val="10002"/>
-                  </a:ext>
-                </a:extLst>
               </a:tr>
               <a:tr h="365760">
                 <a:tc>
@@ -5715,11 +5541,6 @@
                   </a:txBody>
                   <a:tcPr/>
                 </a:tc>
-                <a:extLst>
-                  <a:ext uri="{0D108BD9-81ED-4DB2-BD59-A6C34878D82A}">
-                    <a16:rowId xmlns:a16="http://schemas.microsoft.com/office/drawing/2014/main" val="10003"/>
-                  </a:ext>
-                </a:extLst>
               </a:tr>
               <a:tr h="365760">
                 <a:tc>
@@ -5748,11 +5569,6 @@
                   </a:txBody>
                   <a:tcPr/>
                 </a:tc>
-                <a:extLst>
-                  <a:ext uri="{0D108BD9-81ED-4DB2-BD59-A6C34878D82A}">
-                    <a16:rowId xmlns:a16="http://schemas.microsoft.com/office/drawing/2014/main" val="10004"/>
-                  </a:ext>
-                </a:extLst>
               </a:tr>
               <a:tr h="365760">
                 <a:tc>
@@ -5781,11 +5597,6 @@
                   </a:txBody>
                   <a:tcPr/>
                 </a:tc>
-                <a:extLst>
-                  <a:ext uri="{0D108BD9-81ED-4DB2-BD59-A6C34878D82A}">
-                    <a16:rowId xmlns:a16="http://schemas.microsoft.com/office/drawing/2014/main" val="10005"/>
-                  </a:ext>
-                </a:extLst>
               </a:tr>
               <a:tr h="365760">
                 <a:tc>
@@ -5814,11 +5625,6 @@
                   </a:txBody>
                   <a:tcPr/>
                 </a:tc>
-                <a:extLst>
-                  <a:ext uri="{0D108BD9-81ED-4DB2-BD59-A6C34878D82A}">
-                    <a16:rowId xmlns:a16="http://schemas.microsoft.com/office/drawing/2014/main" val="10006"/>
-                  </a:ext>
-                </a:extLst>
               </a:tr>
               <a:tr h="365760">
                 <a:tc>
@@ -5847,11 +5653,6 @@
                   </a:txBody>
                   <a:tcPr/>
                 </a:tc>
-                <a:extLst>
-                  <a:ext uri="{0D108BD9-81ED-4DB2-BD59-A6C34878D82A}">
-                    <a16:rowId xmlns:a16="http://schemas.microsoft.com/office/drawing/2014/main" val="10007"/>
-                  </a:ext>
-                </a:extLst>
               </a:tr>
               <a:tr h="365760">
                 <a:tc>
@@ -5880,11 +5681,6 @@
                   </a:txBody>
                   <a:tcPr/>
                 </a:tc>
-                <a:extLst>
-                  <a:ext uri="{0D108BD9-81ED-4DB2-BD59-A6C34878D82A}">
-                    <a16:rowId xmlns:a16="http://schemas.microsoft.com/office/drawing/2014/main" val="10008"/>
-                  </a:ext>
-                </a:extLst>
               </a:tr>
               <a:tr h="365760">
                 <a:tc>
@@ -5913,11 +5709,6 @@
                   </a:txBody>
                   <a:tcPr/>
                 </a:tc>
-                <a:extLst>
-                  <a:ext uri="{0D108BD9-81ED-4DB2-BD59-A6C34878D82A}">
-                    <a16:rowId xmlns:a16="http://schemas.microsoft.com/office/drawing/2014/main" val="10009"/>
-                  </a:ext>
-                </a:extLst>
               </a:tr>
             </a:tbl>
           </a:graphicData>
@@ -5932,7 +5723,7 @@
 </file>
 
 <file path=ppt/slides/slide20.xml><?xml version="1.0" encoding="utf-8"?>
-<p:sld xmlns:a="http://schemas.openxmlformats.org/drawingml/2006/main" xmlns:r="http://schemas.openxmlformats.org/officeDocument/2006/relationships" xmlns:p="http://schemas.openxmlformats.org/presentationml/2006/main">
+<p:sld xmlns:a="http://schemas.openxmlformats.org/drawingml/2006/main" xmlns:p="http://schemas.openxmlformats.org/presentationml/2006/main" xmlns:r="http://schemas.openxmlformats.org/officeDocument/2006/relationships">
   <p:cSld>
     <p:spTree>
       <p:nvGrpSpPr>
@@ -5940,14 +5731,7 @@
         <p:cNvGrpSpPr/>
         <p:nvPr/>
       </p:nvGrpSpPr>
-      <p:grpSpPr>
-        <a:xfrm>
-          <a:off x="0" y="0"/>
-          <a:ext cx="0" cy="0"/>
-          <a:chOff x="0" y="0"/>
-          <a:chExt cx="0" cy="0"/>
-        </a:xfrm>
-      </p:grpSpPr>
+      <p:grpSpPr/>
       <p:sp>
         <p:nvSpPr>
           <p:cNvPr id="2" name="TextBox 1"/>
@@ -5991,7 +5775,7 @@
         </p:nvGraphicFramePr>
         <p:xfrm>
           <a:off x="731520" y="1280160"/>
-          <a:ext cx="10698480" cy="3108960"/>
+          <a:ext cx="10698480" cy="2560320"/>
         </p:xfrm>
         <a:graphic>
           <a:graphicData uri="http://schemas.openxmlformats.org/drawingml/2006/table">
@@ -6000,27 +5784,9 @@
                 <a:tableStyleId>{5C22544A-7EE6-4342-B048-85BDC9FD1C3A}</a:tableStyleId>
               </a:tblPr>
               <a:tblGrid>
-                <a:gridCol w="2468880">
-                  <a:extLst>
-                    <a:ext uri="{9D8B030D-6E8A-4147-A177-3AD203B41FA5}">
-                      <a16:colId xmlns:a16="http://schemas.microsoft.com/office/drawing/2014/main" val="20000"/>
-                    </a:ext>
-                  </a:extLst>
-                </a:gridCol>
-                <a:gridCol w="4206240">
-                  <a:extLst>
-                    <a:ext uri="{9D8B030D-6E8A-4147-A177-3AD203B41FA5}">
-                      <a16:colId xmlns:a16="http://schemas.microsoft.com/office/drawing/2014/main" val="20001"/>
-                    </a:ext>
-                  </a:extLst>
-                </a:gridCol>
-                <a:gridCol w="4023360">
-                  <a:extLst>
-                    <a:ext uri="{9D8B030D-6E8A-4147-A177-3AD203B41FA5}">
-                      <a16:colId xmlns:a16="http://schemas.microsoft.com/office/drawing/2014/main" val="20002"/>
-                    </a:ext>
-                  </a:extLst>
-                </a:gridCol>
+                <a:gridCol w="2468880"/>
+                <a:gridCol w="4206240"/>
+                <a:gridCol w="4023360"/>
               </a:tblGrid>
               <a:tr h="365760">
                 <a:tc>
@@ -6062,11 +5828,6 @@
                   </a:txBody>
                   <a:tcPr/>
                 </a:tc>
-                <a:extLst>
-                  <a:ext uri="{0D108BD9-81ED-4DB2-BD59-A6C34878D82A}">
-                    <a16:rowId xmlns:a16="http://schemas.microsoft.com/office/drawing/2014/main" val="10000"/>
-                  </a:ext>
-                </a:extLst>
               </a:tr>
               <a:tr h="365760">
                 <a:tc>
@@ -6108,11 +5869,6 @@
                   </a:txBody>
                   <a:tcPr/>
                 </a:tc>
-                <a:extLst>
-                  <a:ext uri="{0D108BD9-81ED-4DB2-BD59-A6C34878D82A}">
-                    <a16:rowId xmlns:a16="http://schemas.microsoft.com/office/drawing/2014/main" val="10001"/>
-                  </a:ext>
-                </a:extLst>
               </a:tr>
               <a:tr h="365760">
                 <a:tc>
@@ -6154,11 +5910,6 @@
                   </a:txBody>
                   <a:tcPr/>
                 </a:tc>
-                <a:extLst>
-                  <a:ext uri="{0D108BD9-81ED-4DB2-BD59-A6C34878D82A}">
-                    <a16:rowId xmlns:a16="http://schemas.microsoft.com/office/drawing/2014/main" val="10002"/>
-                  </a:ext>
-                </a:extLst>
               </a:tr>
               <a:tr h="365760">
                 <a:tc>
@@ -6200,11 +5951,6 @@
                   </a:txBody>
                   <a:tcPr/>
                 </a:tc>
-                <a:extLst>
-                  <a:ext uri="{0D108BD9-81ED-4DB2-BD59-A6C34878D82A}">
-                    <a16:rowId xmlns:a16="http://schemas.microsoft.com/office/drawing/2014/main" val="10003"/>
-                  </a:ext>
-                </a:extLst>
               </a:tr>
               <a:tr h="365760">
                 <a:tc>
@@ -6246,11 +5992,6 @@
                   </a:txBody>
                   <a:tcPr/>
                 </a:tc>
-                <a:extLst>
-                  <a:ext uri="{0D108BD9-81ED-4DB2-BD59-A6C34878D82A}">
-                    <a16:rowId xmlns:a16="http://schemas.microsoft.com/office/drawing/2014/main" val="10004"/>
-                  </a:ext>
-                </a:extLst>
               </a:tr>
               <a:tr h="365760">
                 <a:tc>
@@ -6292,11 +6033,6 @@
                   </a:txBody>
                   <a:tcPr/>
                 </a:tc>
-                <a:extLst>
-                  <a:ext uri="{0D108BD9-81ED-4DB2-BD59-A6C34878D82A}">
-                    <a16:rowId xmlns:a16="http://schemas.microsoft.com/office/drawing/2014/main" val="10005"/>
-                  </a:ext>
-                </a:extLst>
               </a:tr>
               <a:tr h="365760">
                 <a:tc>
@@ -6338,11 +6074,6 @@
                   </a:txBody>
                   <a:tcPr/>
                 </a:tc>
-                <a:extLst>
-                  <a:ext uri="{0D108BD9-81ED-4DB2-BD59-A6C34878D82A}">
-                    <a16:rowId xmlns:a16="http://schemas.microsoft.com/office/drawing/2014/main" val="10006"/>
-                  </a:ext>
-                </a:extLst>
               </a:tr>
             </a:tbl>
           </a:graphicData>
@@ -6395,7 +6126,7 @@
 </file>
 
 <file path=ppt/slides/slide21.xml><?xml version="1.0" encoding="utf-8"?>
-<p:sld xmlns:a="http://schemas.openxmlformats.org/drawingml/2006/main" xmlns:r="http://schemas.openxmlformats.org/officeDocument/2006/relationships" xmlns:p="http://schemas.openxmlformats.org/presentationml/2006/main">
+<p:sld xmlns:a="http://schemas.openxmlformats.org/drawingml/2006/main" xmlns:p="http://schemas.openxmlformats.org/presentationml/2006/main" xmlns:r="http://schemas.openxmlformats.org/officeDocument/2006/relationships">
   <p:cSld>
     <p:spTree>
       <p:nvGrpSpPr>
@@ -6403,14 +6134,7 @@
         <p:cNvGrpSpPr/>
         <p:nvPr/>
       </p:nvGrpSpPr>
-      <p:grpSpPr>
-        <a:xfrm>
-          <a:off x="0" y="0"/>
-          <a:ext cx="0" cy="0"/>
-          <a:chOff x="0" y="0"/>
-          <a:chExt cx="0" cy="0"/>
-        </a:xfrm>
-      </p:grpSpPr>
+      <p:grpSpPr/>
       <p:sp>
         <p:nvSpPr>
           <p:cNvPr id="2" name="TextBox 1"/>
@@ -6454,7 +6178,7 @@
         </p:nvGraphicFramePr>
         <p:xfrm>
           <a:off x="731520" y="1554480"/>
-          <a:ext cx="10698480" cy="1188720"/>
+          <a:ext cx="10698480" cy="1097280"/>
         </p:xfrm>
         <a:graphic>
           <a:graphicData uri="http://schemas.openxmlformats.org/drawingml/2006/table">
@@ -6463,36 +6187,16 @@
                 <a:tableStyleId>{5C22544A-7EE6-4342-B048-85BDC9FD1C3A}</a:tableStyleId>
               </a:tblPr>
               <a:tblGrid>
-                <a:gridCol w="3108960">
-                  <a:extLst>
-                    <a:ext uri="{9D8B030D-6E8A-4147-A177-3AD203B41FA5}">
-                      <a16:colId xmlns:a16="http://schemas.microsoft.com/office/drawing/2014/main" val="20000"/>
-                    </a:ext>
-                  </a:extLst>
-                </a:gridCol>
-                <a:gridCol w="4023360">
-                  <a:extLst>
-                    <a:ext uri="{9D8B030D-6E8A-4147-A177-3AD203B41FA5}">
-                      <a16:colId xmlns:a16="http://schemas.microsoft.com/office/drawing/2014/main" val="20001"/>
-                    </a:ext>
-                  </a:extLst>
-                </a:gridCol>
-                <a:gridCol w="3566160">
-                  <a:extLst>
-                    <a:ext uri="{9D8B030D-6E8A-4147-A177-3AD203B41FA5}">
-                      <a16:colId xmlns:a16="http://schemas.microsoft.com/office/drawing/2014/main" val="20002"/>
-                    </a:ext>
-                  </a:extLst>
-                </a:gridCol>
+                <a:gridCol w="3108960"/>
+                <a:gridCol w="4023360"/>
+                <a:gridCol w="3566160"/>
               </a:tblGrid>
               <a:tr h="365760">
                 <a:tc>
                   <a:txBody>
                     <a:bodyPr/>
                     <a:lstStyle/>
-                    <a:p>
-                      <a:endParaRPr/>
-                    </a:p>
+                    <a:p/>
                   </a:txBody>
                   <a:tcPr/>
                 </a:tc>
@@ -6522,11 +6226,6 @@
                   </a:txBody>
                   <a:tcPr/>
                 </a:tc>
-                <a:extLst>
-                  <a:ext uri="{0D108BD9-81ED-4DB2-BD59-A6C34878D82A}">
-                    <a16:rowId xmlns:a16="http://schemas.microsoft.com/office/drawing/2014/main" val="10000"/>
-                  </a:ext>
-                </a:extLst>
               </a:tr>
               <a:tr h="365760">
                 <a:tc>
@@ -6568,11 +6267,6 @@
                   </a:txBody>
                   <a:tcPr/>
                 </a:tc>
-                <a:extLst>
-                  <a:ext uri="{0D108BD9-81ED-4DB2-BD59-A6C34878D82A}">
-                    <a16:rowId xmlns:a16="http://schemas.microsoft.com/office/drawing/2014/main" val="10001"/>
-                  </a:ext>
-                </a:extLst>
               </a:tr>
               <a:tr h="365760">
                 <a:tc>
@@ -6614,11 +6308,6 @@
                   </a:txBody>
                   <a:tcPr/>
                 </a:tc>
-                <a:extLst>
-                  <a:ext uri="{0D108BD9-81ED-4DB2-BD59-A6C34878D82A}">
-                    <a16:rowId xmlns:a16="http://schemas.microsoft.com/office/drawing/2014/main" val="10002"/>
-                  </a:ext>
-                </a:extLst>
               </a:tr>
             </a:tbl>
           </a:graphicData>
@@ -6686,7 +6375,7 @@
 </file>
 
 <file path=ppt/slides/slide22.xml><?xml version="1.0" encoding="utf-8"?>
-<p:sld xmlns:a="http://schemas.openxmlformats.org/drawingml/2006/main" xmlns:r="http://schemas.openxmlformats.org/officeDocument/2006/relationships" xmlns:p="http://schemas.openxmlformats.org/presentationml/2006/main">
+<p:sld xmlns:a="http://schemas.openxmlformats.org/drawingml/2006/main" xmlns:p="http://schemas.openxmlformats.org/presentationml/2006/main" xmlns:r="http://schemas.openxmlformats.org/officeDocument/2006/relationships">
   <p:cSld>
     <p:spTree>
       <p:nvGrpSpPr>
@@ -6694,14 +6383,7 @@
         <p:cNvGrpSpPr/>
         <p:nvPr/>
       </p:nvGrpSpPr>
-      <p:grpSpPr>
-        <a:xfrm>
-          <a:off x="0" y="0"/>
-          <a:ext cx="0" cy="0"/>
-          <a:chOff x="0" y="0"/>
-          <a:chExt cx="0" cy="0"/>
-        </a:xfrm>
-      </p:grpSpPr>
+      <p:grpSpPr/>
       <p:sp>
         <p:nvSpPr>
           <p:cNvPr id="2" name="TextBox 1"/>
@@ -6754,27 +6436,9 @@
                 <a:tableStyleId>{5C22544A-7EE6-4342-B048-85BDC9FD1C3A}</a:tableStyleId>
               </a:tblPr>
               <a:tblGrid>
-                <a:gridCol w="3474720">
-                  <a:extLst>
-                    <a:ext uri="{9D8B030D-6E8A-4147-A177-3AD203B41FA5}">
-                      <a16:colId xmlns:a16="http://schemas.microsoft.com/office/drawing/2014/main" val="20000"/>
-                    </a:ext>
-                  </a:extLst>
-                </a:gridCol>
-                <a:gridCol w="4023360">
-                  <a:extLst>
-                    <a:ext uri="{9D8B030D-6E8A-4147-A177-3AD203B41FA5}">
-                      <a16:colId xmlns:a16="http://schemas.microsoft.com/office/drawing/2014/main" val="20001"/>
-                    </a:ext>
-                  </a:extLst>
-                </a:gridCol>
-                <a:gridCol w="3200400">
-                  <a:extLst>
-                    <a:ext uri="{9D8B030D-6E8A-4147-A177-3AD203B41FA5}">
-                      <a16:colId xmlns:a16="http://schemas.microsoft.com/office/drawing/2014/main" val="20002"/>
-                    </a:ext>
-                  </a:extLst>
-                </a:gridCol>
+                <a:gridCol w="3474720"/>
+                <a:gridCol w="4023360"/>
+                <a:gridCol w="3200400"/>
               </a:tblGrid>
               <a:tr h="365760">
                 <a:tc>
@@ -6816,11 +6480,6 @@
                   </a:txBody>
                   <a:tcPr/>
                 </a:tc>
-                <a:extLst>
-                  <a:ext uri="{0D108BD9-81ED-4DB2-BD59-A6C34878D82A}">
-                    <a16:rowId xmlns:a16="http://schemas.microsoft.com/office/drawing/2014/main" val="10000"/>
-                  </a:ext>
-                </a:extLst>
               </a:tr>
               <a:tr h="365760">
                 <a:tc>
@@ -6862,11 +6521,6 @@
                   </a:txBody>
                   <a:tcPr/>
                 </a:tc>
-                <a:extLst>
-                  <a:ext uri="{0D108BD9-81ED-4DB2-BD59-A6C34878D82A}">
-                    <a16:rowId xmlns:a16="http://schemas.microsoft.com/office/drawing/2014/main" val="10001"/>
-                  </a:ext>
-                </a:extLst>
               </a:tr>
               <a:tr h="365760">
                 <a:tc>
@@ -6908,11 +6562,6 @@
                   </a:txBody>
                   <a:tcPr/>
                 </a:tc>
-                <a:extLst>
-                  <a:ext uri="{0D108BD9-81ED-4DB2-BD59-A6C34878D82A}">
-                    <a16:rowId xmlns:a16="http://schemas.microsoft.com/office/drawing/2014/main" val="10002"/>
-                  </a:ext>
-                </a:extLst>
               </a:tr>
               <a:tr h="365760">
                 <a:tc>
@@ -6954,11 +6603,6 @@
                   </a:txBody>
                   <a:tcPr/>
                 </a:tc>
-                <a:extLst>
-                  <a:ext uri="{0D108BD9-81ED-4DB2-BD59-A6C34878D82A}">
-                    <a16:rowId xmlns:a16="http://schemas.microsoft.com/office/drawing/2014/main" val="10003"/>
-                  </a:ext>
-                </a:extLst>
               </a:tr>
               <a:tr h="365760">
                 <a:tc>
@@ -7000,11 +6644,6 @@
                   </a:txBody>
                   <a:tcPr/>
                 </a:tc>
-                <a:extLst>
-                  <a:ext uri="{0D108BD9-81ED-4DB2-BD59-A6C34878D82A}">
-                    <a16:rowId xmlns:a16="http://schemas.microsoft.com/office/drawing/2014/main" val="10004"/>
-                  </a:ext>
-                </a:extLst>
               </a:tr>
               <a:tr h="365760">
                 <a:tc>
@@ -7046,11 +6685,6 @@
                   </a:txBody>
                   <a:tcPr/>
                 </a:tc>
-                <a:extLst>
-                  <a:ext uri="{0D108BD9-81ED-4DB2-BD59-A6C34878D82A}">
-                    <a16:rowId xmlns:a16="http://schemas.microsoft.com/office/drawing/2014/main" val="10005"/>
-                  </a:ext>
-                </a:extLst>
               </a:tr>
             </a:tbl>
           </a:graphicData>
@@ -7103,7 +6737,7 @@
 </file>
 
 <file path=ppt/slides/slide23.xml><?xml version="1.0" encoding="utf-8"?>
-<p:sld xmlns:a="http://schemas.openxmlformats.org/drawingml/2006/main" xmlns:r="http://schemas.openxmlformats.org/officeDocument/2006/relationships" xmlns:p="http://schemas.openxmlformats.org/presentationml/2006/main">
+<p:sld xmlns:a="http://schemas.openxmlformats.org/drawingml/2006/main" xmlns:p="http://schemas.openxmlformats.org/presentationml/2006/main" xmlns:r="http://schemas.openxmlformats.org/officeDocument/2006/relationships">
   <p:cSld>
     <p:spTree>
       <p:nvGrpSpPr>
@@ -7111,14 +6745,7 @@
         <p:cNvGrpSpPr/>
         <p:nvPr/>
       </p:nvGrpSpPr>
-      <p:grpSpPr>
-        <a:xfrm>
-          <a:off x="0" y="0"/>
-          <a:ext cx="0" cy="0"/>
-          <a:chOff x="0" y="0"/>
-          <a:chExt cx="0" cy="0"/>
-        </a:xfrm>
-      </p:grpSpPr>
+      <p:grpSpPr/>
       <p:sp>
         <p:nvSpPr>
           <p:cNvPr id="2" name="TextBox 1"/>
@@ -7312,7 +6939,7 @@
 </file>
 
 <file path=ppt/slides/slide24.xml><?xml version="1.0" encoding="utf-8"?>
-<p:sld xmlns:a="http://schemas.openxmlformats.org/drawingml/2006/main" xmlns:r="http://schemas.openxmlformats.org/officeDocument/2006/relationships" xmlns:p="http://schemas.openxmlformats.org/presentationml/2006/main">
+<p:sld xmlns:a="http://schemas.openxmlformats.org/drawingml/2006/main" xmlns:p="http://schemas.openxmlformats.org/presentationml/2006/main" xmlns:r="http://schemas.openxmlformats.org/officeDocument/2006/relationships">
   <p:cSld>
     <p:spTree>
       <p:nvGrpSpPr>
@@ -7320,14 +6947,7 @@
         <p:cNvGrpSpPr/>
         <p:nvPr/>
       </p:nvGrpSpPr>
-      <p:grpSpPr>
-        <a:xfrm>
-          <a:off x="0" y="0"/>
-          <a:ext cx="0" cy="0"/>
-          <a:chOff x="0" y="0"/>
-          <a:chExt cx="0" cy="0"/>
-        </a:xfrm>
-      </p:grpSpPr>
+      <p:grpSpPr/>
       <p:sp>
         <p:nvSpPr>
           <p:cNvPr id="2" name="TextBox 1"/>
@@ -7433,24 +7053,27 @@
                 <a:spcPts val="800"/>
               </a:spcAft>
             </a:pPr>
-            <a:endParaRPr sz="2400">
-              <a:solidFill>
-                <a:srgbClr val="212121"/>
-              </a:solidFill>
-            </a:endParaRPr>
-          </a:p>
-          <a:p>
-            <a:pPr>
-              <a:spcAft>
-                <a:spcPts val="800"/>
-              </a:spcAft>
-            </a:pPr>
             <a:r>
               <a:rPr sz="2600">
                 <a:solidFill>
                   <a:srgbClr val="212121"/>
                 </a:solidFill>
               </a:rPr>
+              <a:t/>
+            </a:r>
+          </a:p>
+          <a:p>
+            <a:pPr>
+              <a:spcAft>
+                <a:spcPts val="800"/>
+              </a:spcAft>
+            </a:pPr>
+            <a:r>
+              <a:rPr sz="2600">
+                <a:solidFill>
+                  <a:srgbClr val="212121"/>
+                </a:solidFill>
+              </a:rPr>
               <a:t>Every tool tonight, and every lab in Session 2, is this one move in different costumes.</a:t>
             </a:r>
           </a:p>
@@ -7460,11 +7083,14 @@
                 <a:spcPts val="800"/>
               </a:spcAft>
             </a:pPr>
-            <a:endParaRPr sz="2600">
-              <a:solidFill>
-                <a:srgbClr val="212121"/>
-              </a:solidFill>
-            </a:endParaRPr>
+            <a:r>
+              <a:rPr sz="2600">
+                <a:solidFill>
+                  <a:srgbClr val="212121"/>
+                </a:solidFill>
+              </a:rPr>
+              <a:t/>
+            </a:r>
           </a:p>
           <a:p>
             <a:pPr>
@@ -7492,7 +7118,7 @@
 </file>
 
 <file path=ppt/slides/slide25.xml><?xml version="1.0" encoding="utf-8"?>
-<p:sld xmlns:a="http://schemas.openxmlformats.org/drawingml/2006/main" xmlns:r="http://schemas.openxmlformats.org/officeDocument/2006/relationships" xmlns:p="http://schemas.openxmlformats.org/presentationml/2006/main">
+<p:sld xmlns:a="http://schemas.openxmlformats.org/drawingml/2006/main" xmlns:p="http://schemas.openxmlformats.org/presentationml/2006/main" xmlns:r="http://schemas.openxmlformats.org/officeDocument/2006/relationships">
   <p:cSld>
     <p:spTree>
       <p:nvGrpSpPr>
@@ -7500,14 +7126,7 @@
         <p:cNvGrpSpPr/>
         <p:nvPr/>
       </p:nvGrpSpPr>
-      <p:grpSpPr>
-        <a:xfrm>
-          <a:off x="0" y="0"/>
-          <a:ext cx="0" cy="0"/>
-          <a:chOff x="0" y="0"/>
-          <a:chExt cx="0" cy="0"/>
-        </a:xfrm>
-      </p:grpSpPr>
+      <p:grpSpPr/>
       <p:sp>
         <p:nvSpPr>
           <p:cNvPr id="2" name="TextBox 1"/>
@@ -7550,7 +7169,7 @@
 </file>
 
 <file path=ppt/slides/slide26.xml><?xml version="1.0" encoding="utf-8"?>
-<p:sld xmlns:a="http://schemas.openxmlformats.org/drawingml/2006/main" xmlns:r="http://schemas.openxmlformats.org/officeDocument/2006/relationships" xmlns:p="http://schemas.openxmlformats.org/presentationml/2006/main">
+<p:sld xmlns:a="http://schemas.openxmlformats.org/drawingml/2006/main" xmlns:p="http://schemas.openxmlformats.org/presentationml/2006/main" xmlns:r="http://schemas.openxmlformats.org/officeDocument/2006/relationships">
   <p:cSld>
     <p:spTree>
       <p:nvGrpSpPr>
@@ -7558,14 +7177,7 @@
         <p:cNvGrpSpPr/>
         <p:nvPr/>
       </p:nvGrpSpPr>
-      <p:grpSpPr>
-        <a:xfrm>
-          <a:off x="0" y="0"/>
-          <a:ext cx="0" cy="0"/>
-          <a:chOff x="0" y="0"/>
-          <a:chExt cx="0" cy="0"/>
-        </a:xfrm>
-      </p:grpSpPr>
+      <p:grpSpPr/>
       <p:sp>
         <p:nvSpPr>
           <p:cNvPr id="2" name="TextBox 1"/>
@@ -7642,25 +7254,27 @@
                 <a:spcPts val="800"/>
               </a:spcAft>
             </a:pPr>
-            <a:endParaRPr sz="2000">
-              <a:solidFill>
-                <a:srgbClr val="212121"/>
-              </a:solidFill>
-              <a:latin typeface="Courier New"/>
-            </a:endParaRPr>
-          </a:p>
-          <a:p>
-            <a:pPr>
-              <a:spcAft>
-                <a:spcPts val="800"/>
-              </a:spcAft>
-            </a:pPr>
             <a:r>
               <a:rPr sz="2400">
                 <a:solidFill>
                   <a:srgbClr val="212121"/>
                 </a:solidFill>
               </a:rPr>
+              <a:t/>
+            </a:r>
+          </a:p>
+          <a:p>
+            <a:pPr>
+              <a:spcAft>
+                <a:spcPts val="800"/>
+              </a:spcAft>
+            </a:pPr>
+            <a:r>
+              <a:rPr sz="2400">
+                <a:solidFill>
+                  <a:srgbClr val="212121"/>
+                </a:solidFill>
+              </a:rPr>
               <a:t>Is there a true/false assignment that makes the whole formula true?</a:t>
             </a:r>
           </a:p>
@@ -7670,11 +7284,14 @@
                 <a:spcPts val="800"/>
               </a:spcAft>
             </a:pPr>
-            <a:endParaRPr sz="2400">
-              <a:solidFill>
-                <a:srgbClr val="212121"/>
-              </a:solidFill>
-            </a:endParaRPr>
+            <a:r>
+              <a:rPr sz="2400">
+                <a:solidFill>
+                  <a:srgbClr val="212121"/>
+                </a:solidFill>
+              </a:rPr>
+              <a:t/>
+            </a:r>
           </a:p>
           <a:p>
             <a:pPr>
@@ -7717,7 +7334,7 @@
 </file>
 
 <file path=ppt/slides/slide27.xml><?xml version="1.0" encoding="utf-8"?>
-<p:sld xmlns:a="http://schemas.openxmlformats.org/drawingml/2006/main" xmlns:r="http://schemas.openxmlformats.org/officeDocument/2006/relationships" xmlns:p="http://schemas.openxmlformats.org/presentationml/2006/main">
+<p:sld xmlns:a="http://schemas.openxmlformats.org/drawingml/2006/main" xmlns:p="http://schemas.openxmlformats.org/presentationml/2006/main" xmlns:r="http://schemas.openxmlformats.org/officeDocument/2006/relationships">
   <p:cSld>
     <p:spTree>
       <p:nvGrpSpPr>
@@ -7725,14 +7342,7 @@
         <p:cNvGrpSpPr/>
         <p:nvPr/>
       </p:nvGrpSpPr>
-      <p:grpSpPr>
-        <a:xfrm>
-          <a:off x="0" y="0"/>
-          <a:ext cx="0" cy="0"/>
-          <a:chOff x="0" y="0"/>
-          <a:chExt cx="0" cy="0"/>
-        </a:xfrm>
-      </p:grpSpPr>
+      <p:grpSpPr/>
       <p:sp>
         <p:nvSpPr>
           <p:cNvPr id="2" name="TextBox 1"/>
@@ -7853,11 +7463,14 @@
                 <a:spcPts val="800"/>
               </a:spcAft>
             </a:pPr>
-            <a:endParaRPr sz="2200">
-              <a:solidFill>
-                <a:srgbClr val="212121"/>
-              </a:solidFill>
-            </a:endParaRPr>
+            <a:r>
+              <a:rPr sz="2400">
+                <a:solidFill>
+                  <a:srgbClr val="212121"/>
+                </a:solidFill>
+              </a:rPr>
+              <a:t/>
+            </a:r>
           </a:p>
           <a:p>
             <a:pPr>
@@ -7915,7 +7528,7 @@
 </file>
 
 <file path=ppt/slides/slide28.xml><?xml version="1.0" encoding="utf-8"?>
-<p:sld xmlns:a="http://schemas.openxmlformats.org/drawingml/2006/main" xmlns:r="http://schemas.openxmlformats.org/officeDocument/2006/relationships" xmlns:p="http://schemas.openxmlformats.org/presentationml/2006/main">
+<p:sld xmlns:a="http://schemas.openxmlformats.org/drawingml/2006/main" xmlns:p="http://schemas.openxmlformats.org/presentationml/2006/main" xmlns:r="http://schemas.openxmlformats.org/officeDocument/2006/relationships">
   <p:cSld>
     <p:spTree>
       <p:nvGrpSpPr>
@@ -7923,14 +7536,7 @@
         <p:cNvGrpSpPr/>
         <p:nvPr/>
       </p:nvGrpSpPr>
-      <p:grpSpPr>
-        <a:xfrm>
-          <a:off x="0" y="0"/>
-          <a:ext cx="0" cy="0"/>
-          <a:chOff x="0" y="0"/>
-          <a:chExt cx="0" cy="0"/>
-        </a:xfrm>
-      </p:grpSpPr>
+      <p:grpSpPr/>
       <p:sp>
         <p:nvSpPr>
           <p:cNvPr id="2" name="TextBox 1"/>
@@ -7974,7 +7580,7 @@
         </p:nvGraphicFramePr>
         <p:xfrm>
           <a:off x="731520" y="1554480"/>
-          <a:ext cx="10698480" cy="1981200"/>
+          <a:ext cx="10698480" cy="1828800"/>
         </p:xfrm>
         <a:graphic>
           <a:graphicData uri="http://schemas.openxmlformats.org/drawingml/2006/table">
@@ -7983,20 +7589,8 @@
                 <a:tableStyleId>{5C22544A-7EE6-4342-B048-85BDC9FD1C3A}</a:tableStyleId>
               </a:tblPr>
               <a:tblGrid>
-                <a:gridCol w="4754880">
-                  <a:extLst>
-                    <a:ext uri="{9D8B030D-6E8A-4147-A177-3AD203B41FA5}">
-                      <a16:colId xmlns:a16="http://schemas.microsoft.com/office/drawing/2014/main" val="20000"/>
-                    </a:ext>
-                  </a:extLst>
-                </a:gridCol>
-                <a:gridCol w="5943600">
-                  <a:extLst>
-                    <a:ext uri="{9D8B030D-6E8A-4147-A177-3AD203B41FA5}">
-                      <a16:colId xmlns:a16="http://schemas.microsoft.com/office/drawing/2014/main" val="20001"/>
-                    </a:ext>
-                  </a:extLst>
-                </a:gridCol>
+                <a:gridCol w="4754880"/>
+                <a:gridCol w="5943600"/>
               </a:tblGrid>
               <a:tr h="365760">
                 <a:tc>
@@ -8025,11 +7619,6 @@
                   </a:txBody>
                   <a:tcPr/>
                 </a:tc>
-                <a:extLst>
-                  <a:ext uri="{0D108BD9-81ED-4DB2-BD59-A6C34878D82A}">
-                    <a16:rowId xmlns:a16="http://schemas.microsoft.com/office/drawing/2014/main" val="10000"/>
-                  </a:ext>
-                </a:extLst>
               </a:tr>
               <a:tr h="365760">
                 <a:tc>
@@ -8058,11 +7647,6 @@
                   </a:txBody>
                   <a:tcPr/>
                 </a:tc>
-                <a:extLst>
-                  <a:ext uri="{0D108BD9-81ED-4DB2-BD59-A6C34878D82A}">
-                    <a16:rowId xmlns:a16="http://schemas.microsoft.com/office/drawing/2014/main" val="10001"/>
-                  </a:ext>
-                </a:extLst>
               </a:tr>
               <a:tr h="365760">
                 <a:tc>
@@ -8091,11 +7675,6 @@
                   </a:txBody>
                   <a:tcPr/>
                 </a:tc>
-                <a:extLst>
-                  <a:ext uri="{0D108BD9-81ED-4DB2-BD59-A6C34878D82A}">
-                    <a16:rowId xmlns:a16="http://schemas.microsoft.com/office/drawing/2014/main" val="10002"/>
-                  </a:ext>
-                </a:extLst>
               </a:tr>
               <a:tr h="365760">
                 <a:tc>
@@ -8124,11 +7703,6 @@
                   </a:txBody>
                   <a:tcPr/>
                 </a:tc>
-                <a:extLst>
-                  <a:ext uri="{0D108BD9-81ED-4DB2-BD59-A6C34878D82A}">
-                    <a16:rowId xmlns:a16="http://schemas.microsoft.com/office/drawing/2014/main" val="10003"/>
-                  </a:ext>
-                </a:extLst>
               </a:tr>
               <a:tr h="365760">
                 <a:tc>
@@ -8157,11 +7731,6 @@
                   </a:txBody>
                   <a:tcPr/>
                 </a:tc>
-                <a:extLst>
-                  <a:ext uri="{0D108BD9-81ED-4DB2-BD59-A6C34878D82A}">
-                    <a16:rowId xmlns:a16="http://schemas.microsoft.com/office/drawing/2014/main" val="10004"/>
-                  </a:ext>
-                </a:extLst>
               </a:tr>
             </a:tbl>
           </a:graphicData>
@@ -8214,7 +7783,7 @@
 </file>
 
 <file path=ppt/slides/slide29.xml><?xml version="1.0" encoding="utf-8"?>
-<p:sld xmlns:a="http://schemas.openxmlformats.org/drawingml/2006/main" xmlns:r="http://schemas.openxmlformats.org/officeDocument/2006/relationships" xmlns:p="http://schemas.openxmlformats.org/presentationml/2006/main">
+<p:sld xmlns:a="http://schemas.openxmlformats.org/drawingml/2006/main" xmlns:p="http://schemas.openxmlformats.org/presentationml/2006/main" xmlns:r="http://schemas.openxmlformats.org/officeDocument/2006/relationships">
   <p:cSld>
     <p:spTree>
       <p:nvGrpSpPr>
@@ -8222,14 +7791,7 @@
         <p:cNvGrpSpPr/>
         <p:nvPr/>
       </p:nvGrpSpPr>
-      <p:grpSpPr>
-        <a:xfrm>
-          <a:off x="0" y="0"/>
-          <a:ext cx="0" cy="0"/>
-          <a:chOff x="0" y="0"/>
-          <a:chExt cx="0" cy="0"/>
-        </a:xfrm>
-      </p:grpSpPr>
+      <p:grpSpPr/>
       <p:sp>
         <p:nvSpPr>
           <p:cNvPr id="2" name="TextBox 1"/>
@@ -8322,12 +7884,14 @@
                 <a:spcPts val="800"/>
               </a:spcAft>
             </a:pPr>
-            <a:endParaRPr sz="2000">
-              <a:solidFill>
-                <a:srgbClr val="212121"/>
-              </a:solidFill>
-              <a:latin typeface="Courier New"/>
-            </a:endParaRPr>
+            <a:r>
+              <a:rPr sz="2400">
+                <a:solidFill>
+                  <a:srgbClr val="212121"/>
+                </a:solidFill>
+              </a:rPr>
+              <a:t/>
+            </a:r>
           </a:p>
           <a:p>
             <a:pPr>
@@ -8400,7 +7964,7 @@
 </file>
 
 <file path=ppt/slides/slide3.xml><?xml version="1.0" encoding="utf-8"?>
-<p:sld xmlns:a="http://schemas.openxmlformats.org/drawingml/2006/main" xmlns:r="http://schemas.openxmlformats.org/officeDocument/2006/relationships" xmlns:p="http://schemas.openxmlformats.org/presentationml/2006/main">
+<p:sld xmlns:a="http://schemas.openxmlformats.org/drawingml/2006/main" xmlns:p="http://schemas.openxmlformats.org/presentationml/2006/main" xmlns:r="http://schemas.openxmlformats.org/officeDocument/2006/relationships">
   <p:cSld>
     <p:spTree>
       <p:nvGrpSpPr>
@@ -8408,14 +7972,7 @@
         <p:cNvGrpSpPr/>
         <p:nvPr/>
       </p:nvGrpSpPr>
-      <p:grpSpPr>
-        <a:xfrm>
-          <a:off x="0" y="0"/>
-          <a:ext cx="0" cy="0"/>
-          <a:chOff x="0" y="0"/>
-          <a:chExt cx="0" cy="0"/>
-        </a:xfrm>
-      </p:grpSpPr>
+      <p:grpSpPr/>
       <p:sp>
         <p:nvSpPr>
           <p:cNvPr id="2" name="TextBox 1"/>
@@ -8511,7 +8068,7 @@
 </file>
 
 <file path=ppt/slides/slide30.xml><?xml version="1.0" encoding="utf-8"?>
-<p:sld xmlns:a="http://schemas.openxmlformats.org/drawingml/2006/main" xmlns:r="http://schemas.openxmlformats.org/officeDocument/2006/relationships" xmlns:p="http://schemas.openxmlformats.org/presentationml/2006/main">
+<p:sld xmlns:a="http://schemas.openxmlformats.org/drawingml/2006/main" xmlns:p="http://schemas.openxmlformats.org/presentationml/2006/main" xmlns:r="http://schemas.openxmlformats.org/officeDocument/2006/relationships">
   <p:cSld>
     <p:spTree>
       <p:nvGrpSpPr>
@@ -8519,14 +8076,7 @@
         <p:cNvGrpSpPr/>
         <p:nvPr/>
       </p:nvGrpSpPr>
-      <p:grpSpPr>
-        <a:xfrm>
-          <a:off x="0" y="0"/>
-          <a:ext cx="0" cy="0"/>
-          <a:chOff x="0" y="0"/>
-          <a:chExt cx="0" cy="0"/>
-        </a:xfrm>
-      </p:grpSpPr>
+      <p:grpSpPr/>
       <p:sp>
         <p:nvSpPr>
           <p:cNvPr id="2" name="TextBox 1"/>
@@ -8603,12 +8153,15 @@
                 <a:spcPts val="0"/>
               </a:spcAft>
             </a:pPr>
-            <a:endParaRPr sz="1800">
-              <a:solidFill>
-                <a:srgbClr val="212121"/>
-              </a:solidFill>
-              <a:latin typeface="Courier New"/>
-            </a:endParaRPr>
+            <a:r>
+              <a:rPr sz="1800">
+                <a:solidFill>
+                  <a:srgbClr val="212121"/>
+                </a:solidFill>
+                <a:latin typeface="Courier New"/>
+              </a:rPr>
+              <a:t/>
+            </a:r>
           </a:p>
           <a:p>
             <a:pPr>
@@ -8648,12 +8201,15 @@
                 <a:spcPts val="0"/>
               </a:spcAft>
             </a:pPr>
-            <a:endParaRPr sz="1800">
-              <a:solidFill>
-                <a:srgbClr val="212121"/>
-              </a:solidFill>
-              <a:latin typeface="Courier New"/>
-            </a:endParaRPr>
+            <a:r>
+              <a:rPr sz="1800">
+                <a:solidFill>
+                  <a:srgbClr val="212121"/>
+                </a:solidFill>
+                <a:latin typeface="Courier New"/>
+              </a:rPr>
+              <a:t/>
+            </a:r>
           </a:p>
           <a:p>
             <a:pPr>
@@ -8693,12 +8249,14 @@
                 <a:spcPts val="800"/>
               </a:spcAft>
             </a:pPr>
-            <a:endParaRPr sz="1800">
-              <a:solidFill>
-                <a:srgbClr val="212121"/>
-              </a:solidFill>
-              <a:latin typeface="Courier New"/>
-            </a:endParaRPr>
+            <a:r>
+              <a:rPr sz="2200">
+                <a:solidFill>
+                  <a:srgbClr val="212121"/>
+                </a:solidFill>
+              </a:rPr>
+              <a:t/>
+            </a:r>
           </a:p>
           <a:p>
             <a:pPr>
@@ -8726,7 +8284,7 @@
 </file>
 
 <file path=ppt/slides/slide31.xml><?xml version="1.0" encoding="utf-8"?>
-<p:sld xmlns:a="http://schemas.openxmlformats.org/drawingml/2006/main" xmlns:r="http://schemas.openxmlformats.org/officeDocument/2006/relationships" xmlns:p="http://schemas.openxmlformats.org/presentationml/2006/main">
+<p:sld xmlns:a="http://schemas.openxmlformats.org/drawingml/2006/main" xmlns:p="http://schemas.openxmlformats.org/presentationml/2006/main" xmlns:r="http://schemas.openxmlformats.org/officeDocument/2006/relationships">
   <p:cSld>
     <p:spTree>
       <p:nvGrpSpPr>
@@ -8734,14 +8292,7 @@
         <p:cNvGrpSpPr/>
         <p:nvPr/>
       </p:nvGrpSpPr>
-      <p:grpSpPr>
-        <a:xfrm>
-          <a:off x="0" y="0"/>
-          <a:ext cx="0" cy="0"/>
-          <a:chOff x="0" y="0"/>
-          <a:chExt cx="0" cy="0"/>
-        </a:xfrm>
-      </p:grpSpPr>
+      <p:grpSpPr/>
       <p:sp>
         <p:nvSpPr>
           <p:cNvPr id="2" name="TextBox 1"/>
@@ -8850,12 +8401,14 @@
                 <a:spcPts val="800"/>
               </a:spcAft>
             </a:pPr>
-            <a:endParaRPr sz="1800">
-              <a:solidFill>
-                <a:srgbClr val="212121"/>
-              </a:solidFill>
-              <a:latin typeface="Courier New"/>
-            </a:endParaRPr>
+            <a:r>
+              <a:rPr sz="2200">
+                <a:solidFill>
+                  <a:srgbClr val="212121"/>
+                </a:solidFill>
+              </a:rPr>
+              <a:t/>
+            </a:r>
           </a:p>
           <a:p>
             <a:pPr>
@@ -8911,12 +8464,14 @@
                 <a:spcPts val="800"/>
               </a:spcAft>
             </a:pPr>
-            <a:endParaRPr sz="1800">
-              <a:solidFill>
-                <a:srgbClr val="212121"/>
-              </a:solidFill>
-              <a:latin typeface="Courier New"/>
-            </a:endParaRPr>
+            <a:r>
+              <a:rPr sz="2200">
+                <a:solidFill>
+                  <a:srgbClr val="212121"/>
+                </a:solidFill>
+              </a:rPr>
+              <a:t/>
+            </a:r>
           </a:p>
           <a:p>
             <a:pPr>
@@ -8944,7 +8499,7 @@
 </file>
 
 <file path=ppt/slides/slide32.xml><?xml version="1.0" encoding="utf-8"?>
-<p:sld xmlns:a="http://schemas.openxmlformats.org/drawingml/2006/main" xmlns:r="http://schemas.openxmlformats.org/officeDocument/2006/relationships" xmlns:p="http://schemas.openxmlformats.org/presentationml/2006/main">
+<p:sld xmlns:a="http://schemas.openxmlformats.org/drawingml/2006/main" xmlns:p="http://schemas.openxmlformats.org/presentationml/2006/main" xmlns:r="http://schemas.openxmlformats.org/officeDocument/2006/relationships">
   <p:cSld>
     <p:spTree>
       <p:nvGrpSpPr>
@@ -8952,14 +8507,7 @@
         <p:cNvGrpSpPr/>
         <p:nvPr/>
       </p:nvGrpSpPr>
-      <p:grpSpPr>
-        <a:xfrm>
-          <a:off x="0" y="0"/>
-          <a:ext cx="0" cy="0"/>
-          <a:chOff x="0" y="0"/>
-          <a:chExt cx="0" cy="0"/>
-        </a:xfrm>
-      </p:grpSpPr>
+      <p:grpSpPr/>
       <p:sp>
         <p:nvSpPr>
           <p:cNvPr id="2" name="TextBox 1"/>
@@ -9084,12 +8632,14 @@
                 <a:spcPts val="800"/>
               </a:spcAft>
             </a:pPr>
-            <a:endParaRPr sz="1800">
-              <a:solidFill>
-                <a:srgbClr val="212121"/>
-              </a:solidFill>
-              <a:latin typeface="Courier New"/>
-            </a:endParaRPr>
+            <a:r>
+              <a:rPr sz="2200">
+                <a:solidFill>
+                  <a:srgbClr val="212121"/>
+                </a:solidFill>
+              </a:rPr>
+              <a:t/>
+            </a:r>
           </a:p>
           <a:p>
             <a:pPr>
@@ -9147,7 +8697,7 @@
 </file>
 
 <file path=ppt/slides/slide33.xml><?xml version="1.0" encoding="utf-8"?>
-<p:sld xmlns:a="http://schemas.openxmlformats.org/drawingml/2006/main" xmlns:r="http://schemas.openxmlformats.org/officeDocument/2006/relationships" xmlns:p="http://schemas.openxmlformats.org/presentationml/2006/main">
+<p:sld xmlns:a="http://schemas.openxmlformats.org/drawingml/2006/main" xmlns:p="http://schemas.openxmlformats.org/presentationml/2006/main" xmlns:r="http://schemas.openxmlformats.org/officeDocument/2006/relationships">
   <p:cSld>
     <p:spTree>
       <p:nvGrpSpPr>
@@ -9155,14 +8705,7 @@
         <p:cNvGrpSpPr/>
         <p:nvPr/>
       </p:nvGrpSpPr>
-      <p:grpSpPr>
-        <a:xfrm>
-          <a:off x="0" y="0"/>
-          <a:ext cx="0" cy="0"/>
-          <a:chOff x="0" y="0"/>
-          <a:chExt cx="0" cy="0"/>
-        </a:xfrm>
-      </p:grpSpPr>
+      <p:grpSpPr/>
       <p:sp>
         <p:nvSpPr>
           <p:cNvPr id="2" name="TextBox 1"/>
@@ -9286,12 +8829,14 @@
                 <a:spcPts val="800"/>
               </a:spcAft>
             </a:pPr>
-            <a:endParaRPr sz="1800">
-              <a:solidFill>
-                <a:srgbClr val="212121"/>
-              </a:solidFill>
-              <a:latin typeface="Courier New"/>
-            </a:endParaRPr>
+            <a:r>
+              <a:rPr sz="2200">
+                <a:solidFill>
+                  <a:srgbClr val="212121"/>
+                </a:solidFill>
+              </a:rPr>
+              <a:t/>
+            </a:r>
           </a:p>
           <a:p>
             <a:pPr>
@@ -9349,7 +8894,7 @@
 </file>
 
 <file path=ppt/slides/slide34.xml><?xml version="1.0" encoding="utf-8"?>
-<p:sld xmlns:a="http://schemas.openxmlformats.org/drawingml/2006/main" xmlns:r="http://schemas.openxmlformats.org/officeDocument/2006/relationships" xmlns:p="http://schemas.openxmlformats.org/presentationml/2006/main">
+<p:sld xmlns:a="http://schemas.openxmlformats.org/drawingml/2006/main" xmlns:p="http://schemas.openxmlformats.org/presentationml/2006/main" xmlns:r="http://schemas.openxmlformats.org/officeDocument/2006/relationships">
   <p:cSld>
     <p:spTree>
       <p:nvGrpSpPr>
@@ -9357,14 +8902,7 @@
         <p:cNvGrpSpPr/>
         <p:nvPr/>
       </p:nvGrpSpPr>
-      <p:grpSpPr>
-        <a:xfrm>
-          <a:off x="0" y="0"/>
-          <a:ext cx="0" cy="0"/>
-          <a:chOff x="0" y="0"/>
-          <a:chExt cx="0" cy="0"/>
-        </a:xfrm>
-      </p:grpSpPr>
+      <p:grpSpPr/>
       <p:sp>
         <p:nvSpPr>
           <p:cNvPr id="2" name="TextBox 1"/>
@@ -9502,12 +9040,14 @@
                 <a:spcPts val="800"/>
               </a:spcAft>
             </a:pPr>
-            <a:endParaRPr sz="1800">
-              <a:solidFill>
-                <a:srgbClr val="212121"/>
-              </a:solidFill>
-              <a:latin typeface="Courier New"/>
-            </a:endParaRPr>
+            <a:r>
+              <a:rPr sz="2200">
+                <a:solidFill>
+                  <a:srgbClr val="212121"/>
+                </a:solidFill>
+              </a:rPr>
+              <a:t/>
+            </a:r>
           </a:p>
           <a:p>
             <a:pPr>
@@ -9550,7 +9090,7 @@
 </file>
 
 <file path=ppt/slides/slide35.xml><?xml version="1.0" encoding="utf-8"?>
-<p:sld xmlns:a="http://schemas.openxmlformats.org/drawingml/2006/main" xmlns:r="http://schemas.openxmlformats.org/officeDocument/2006/relationships" xmlns:p="http://schemas.openxmlformats.org/presentationml/2006/main">
+<p:sld xmlns:a="http://schemas.openxmlformats.org/drawingml/2006/main" xmlns:p="http://schemas.openxmlformats.org/presentationml/2006/main" xmlns:r="http://schemas.openxmlformats.org/officeDocument/2006/relationships">
   <p:cSld>
     <p:spTree>
       <p:nvGrpSpPr>
@@ -9558,14 +9098,7 @@
         <p:cNvGrpSpPr/>
         <p:nvPr/>
       </p:nvGrpSpPr>
-      <p:grpSpPr>
-        <a:xfrm>
-          <a:off x="0" y="0"/>
-          <a:ext cx="0" cy="0"/>
-          <a:chOff x="0" y="0"/>
-          <a:chExt cx="0" cy="0"/>
-        </a:xfrm>
-      </p:grpSpPr>
+      <p:grpSpPr/>
       <p:sp>
         <p:nvSpPr>
           <p:cNvPr id="2" name="TextBox 1"/>
@@ -9637,7 +9170,7 @@
           </a:fontRef>
         </p:style>
         <p:txBody>
-          <a:bodyPr wrap="square" rtlCol="0" anchor="ctr"/>
+          <a:bodyPr rtlCol="0" anchor="ctr" wrap="square"/>
           <a:lstStyle/>
           <a:p>
             <a:pPr algn="ctr"/>
@@ -9690,7 +9223,7 @@
           </a:fontRef>
         </p:style>
         <p:txBody>
-          <a:bodyPr wrap="square" rtlCol="0" anchor="ctr"/>
+          <a:bodyPr rtlCol="0" anchor="ctr" wrap="square"/>
           <a:lstStyle/>
           <a:p>
             <a:pPr algn="ctr"/>
@@ -9745,7 +9278,6 @@
           <a:lstStyle/>
           <a:p>
             <a:pPr algn="ctr"/>
-            <a:endParaRPr/>
           </a:p>
         </p:txBody>
       </p:sp>
@@ -9787,7 +9319,7 @@
           </a:fontRef>
         </p:style>
         <p:txBody>
-          <a:bodyPr wrap="square" rtlCol="0" anchor="ctr"/>
+          <a:bodyPr rtlCol="0" anchor="ctr" wrap="square"/>
           <a:lstStyle/>
           <a:p>
             <a:pPr algn="ctr"/>
@@ -9843,7 +9375,6 @@
           <a:lstStyle/>
           <a:p>
             <a:pPr algn="ctr"/>
-            <a:endParaRPr/>
           </a:p>
         </p:txBody>
       </p:sp>
@@ -9885,7 +9416,7 @@
           </a:fontRef>
         </p:style>
         <p:txBody>
-          <a:bodyPr wrap="square" rtlCol="0" anchor="ctr"/>
+          <a:bodyPr rtlCol="0" anchor="ctr" wrap="square"/>
           <a:lstStyle/>
           <a:p>
             <a:pPr algn="ctr"/>
@@ -9940,7 +9471,6 @@
           <a:lstStyle/>
           <a:p>
             <a:pPr algn="ctr"/>
-            <a:endParaRPr/>
           </a:p>
         </p:txBody>
       </p:sp>
@@ -9982,7 +9512,7 @@
           </a:fontRef>
         </p:style>
         <p:txBody>
-          <a:bodyPr wrap="square" rtlCol="0" anchor="ctr"/>
+          <a:bodyPr rtlCol="0" anchor="ctr" wrap="square"/>
           <a:lstStyle/>
           <a:p>
             <a:pPr algn="ctr"/>
@@ -10037,7 +9567,6 @@
           <a:lstStyle/>
           <a:p>
             <a:pPr algn="ctr"/>
-            <a:endParaRPr/>
           </a:p>
         </p:txBody>
       </p:sp>
@@ -10098,11 +9627,14 @@
                 <a:spcPts val="800"/>
               </a:spcAft>
             </a:pPr>
-            <a:endParaRPr sz="2400">
-              <a:solidFill>
-                <a:srgbClr val="212121"/>
-              </a:solidFill>
-            </a:endParaRPr>
+            <a:r>
+              <a:rPr sz="2400">
+                <a:solidFill>
+                  <a:srgbClr val="212121"/>
+                </a:solidFill>
+              </a:rPr>
+              <a:t/>
+            </a:r>
           </a:p>
           <a:p>
             <a:pPr>
@@ -10130,7 +9662,7 @@
 </file>
 
 <file path=ppt/slides/slide36.xml><?xml version="1.0" encoding="utf-8"?>
-<p:sld xmlns:a="http://schemas.openxmlformats.org/drawingml/2006/main" xmlns:r="http://schemas.openxmlformats.org/officeDocument/2006/relationships" xmlns:p="http://schemas.openxmlformats.org/presentationml/2006/main">
+<p:sld xmlns:a="http://schemas.openxmlformats.org/drawingml/2006/main" xmlns:p="http://schemas.openxmlformats.org/presentationml/2006/main" xmlns:r="http://schemas.openxmlformats.org/officeDocument/2006/relationships">
   <p:cSld>
     <p:spTree>
       <p:nvGrpSpPr>
@@ -10138,14 +9670,7 @@
         <p:cNvGrpSpPr/>
         <p:nvPr/>
       </p:nvGrpSpPr>
-      <p:grpSpPr>
-        <a:xfrm>
-          <a:off x="0" y="0"/>
-          <a:ext cx="0" cy="0"/>
-          <a:chOff x="0" y="0"/>
-          <a:chExt cx="0" cy="0"/>
-        </a:xfrm>
-      </p:grpSpPr>
+      <p:grpSpPr/>
       <p:sp>
         <p:nvSpPr>
           <p:cNvPr id="2" name="TextBox 1"/>
@@ -10222,25 +9747,27 @@
                 <a:spcPts val="800"/>
               </a:spcAft>
             </a:pPr>
-            <a:endParaRPr sz="2000">
-              <a:solidFill>
-                <a:srgbClr val="212121"/>
-              </a:solidFill>
-              <a:latin typeface="Courier New"/>
-            </a:endParaRPr>
-          </a:p>
-          <a:p>
-            <a:pPr>
-              <a:spcAft>
-                <a:spcPts val="800"/>
-              </a:spcAft>
-            </a:pPr>
             <a:r>
               <a:rPr sz="2400">
                 <a:solidFill>
                   <a:srgbClr val="212121"/>
                 </a:solidFill>
               </a:rPr>
+              <a:t/>
+            </a:r>
+          </a:p>
+          <a:p>
+            <a:pPr>
+              <a:spcAft>
+                <a:spcPts val="800"/>
+              </a:spcAft>
+            </a:pPr>
+            <a:r>
+              <a:rPr sz="2400">
+                <a:solidFill>
+                  <a:srgbClr val="212121"/>
+                </a:solidFill>
+              </a:rPr>
               <a:t>--unwind k copies the loop body k times, each copy guarded by the loop condition.</a:t>
             </a:r>
           </a:p>
@@ -10280,11 +9807,14 @@
                 <a:spcPts val="800"/>
               </a:spcAft>
             </a:pPr>
-            <a:endParaRPr sz="2200">
-              <a:solidFill>
-                <a:srgbClr val="212121"/>
-              </a:solidFill>
-            </a:endParaRPr>
+            <a:r>
+              <a:rPr sz="2400">
+                <a:solidFill>
+                  <a:srgbClr val="212121"/>
+                </a:solidFill>
+              </a:rPr>
+              <a:t/>
+            </a:r>
           </a:p>
           <a:p>
             <a:pPr>
@@ -10312,7 +9842,7 @@
 </file>
 
 <file path=ppt/slides/slide37.xml><?xml version="1.0" encoding="utf-8"?>
-<p:sld xmlns:a="http://schemas.openxmlformats.org/drawingml/2006/main" xmlns:r="http://schemas.openxmlformats.org/officeDocument/2006/relationships" xmlns:p="http://schemas.openxmlformats.org/presentationml/2006/main">
+<p:sld xmlns:a="http://schemas.openxmlformats.org/drawingml/2006/main" xmlns:p="http://schemas.openxmlformats.org/presentationml/2006/main" xmlns:r="http://schemas.openxmlformats.org/officeDocument/2006/relationships">
   <p:cSld>
     <p:spTree>
       <p:nvGrpSpPr>
@@ -10320,14 +9850,7 @@
         <p:cNvGrpSpPr/>
         <p:nvPr/>
       </p:nvGrpSpPr>
-      <p:grpSpPr>
-        <a:xfrm>
-          <a:off x="0" y="0"/>
-          <a:ext cx="0" cy="0"/>
-          <a:chOff x="0" y="0"/>
-          <a:chExt cx="0" cy="0"/>
-        </a:xfrm>
-      </p:grpSpPr>
+      <p:grpSpPr/>
       <p:sp>
         <p:nvSpPr>
           <p:cNvPr id="2" name="TextBox 1"/>
@@ -10371,7 +9894,7 @@
         </p:nvGraphicFramePr>
         <p:xfrm>
           <a:off x="731520" y="1554480"/>
-          <a:ext cx="10698480" cy="1889760"/>
+          <a:ext cx="10698480" cy="1463040"/>
         </p:xfrm>
         <a:graphic>
           <a:graphicData uri="http://schemas.openxmlformats.org/drawingml/2006/table">
@@ -10380,20 +9903,8 @@
                 <a:tableStyleId>{5C22544A-7EE6-4342-B048-85BDC9FD1C3A}</a:tableStyleId>
               </a:tblPr>
               <a:tblGrid>
-                <a:gridCol w="4572000">
-                  <a:extLst>
-                    <a:ext uri="{9D8B030D-6E8A-4147-A177-3AD203B41FA5}">
-                      <a16:colId xmlns:a16="http://schemas.microsoft.com/office/drawing/2014/main" val="20000"/>
-                    </a:ext>
-                  </a:extLst>
-                </a:gridCol>
-                <a:gridCol w="6126480">
-                  <a:extLst>
-                    <a:ext uri="{9D8B030D-6E8A-4147-A177-3AD203B41FA5}">
-                      <a16:colId xmlns:a16="http://schemas.microsoft.com/office/drawing/2014/main" val="20001"/>
-                    </a:ext>
-                  </a:extLst>
-                </a:gridCol>
+                <a:gridCol w="4572000"/>
+                <a:gridCol w="6126480"/>
               </a:tblGrid>
               <a:tr h="365760">
                 <a:tc>
@@ -10422,11 +9933,6 @@
                   </a:txBody>
                   <a:tcPr/>
                 </a:tc>
-                <a:extLst>
-                  <a:ext uri="{0D108BD9-81ED-4DB2-BD59-A6C34878D82A}">
-                    <a16:rowId xmlns:a16="http://schemas.microsoft.com/office/drawing/2014/main" val="10000"/>
-                  </a:ext>
-                </a:extLst>
               </a:tr>
               <a:tr h="365760">
                 <a:tc>
@@ -10455,11 +9961,6 @@
                   </a:txBody>
                   <a:tcPr/>
                 </a:tc>
-                <a:extLst>
-                  <a:ext uri="{0D108BD9-81ED-4DB2-BD59-A6C34878D82A}">
-                    <a16:rowId xmlns:a16="http://schemas.microsoft.com/office/drawing/2014/main" val="10001"/>
-                  </a:ext>
-                </a:extLst>
               </a:tr>
               <a:tr h="365760">
                 <a:tc>
@@ -10488,11 +9989,6 @@
                   </a:txBody>
                   <a:tcPr/>
                 </a:tc>
-                <a:extLst>
-                  <a:ext uri="{0D108BD9-81ED-4DB2-BD59-A6C34878D82A}">
-                    <a16:rowId xmlns:a16="http://schemas.microsoft.com/office/drawing/2014/main" val="10002"/>
-                  </a:ext>
-                </a:extLst>
               </a:tr>
               <a:tr h="365760">
                 <a:tc>
@@ -10521,11 +10017,6 @@
                   </a:txBody>
                   <a:tcPr/>
                 </a:tc>
-                <a:extLst>
-                  <a:ext uri="{0D108BD9-81ED-4DB2-BD59-A6C34878D82A}">
-                    <a16:rowId xmlns:a16="http://schemas.microsoft.com/office/drawing/2014/main" val="10003"/>
-                  </a:ext>
-                </a:extLst>
               </a:tr>
             </a:tbl>
           </a:graphicData>
@@ -10593,7 +10084,7 @@
 </file>
 
 <file path=ppt/slides/slide38.xml><?xml version="1.0" encoding="utf-8"?>
-<p:sld xmlns:a="http://schemas.openxmlformats.org/drawingml/2006/main" xmlns:r="http://schemas.openxmlformats.org/officeDocument/2006/relationships" xmlns:p="http://schemas.openxmlformats.org/presentationml/2006/main">
+<p:sld xmlns:a="http://schemas.openxmlformats.org/drawingml/2006/main" xmlns:p="http://schemas.openxmlformats.org/presentationml/2006/main" xmlns:r="http://schemas.openxmlformats.org/officeDocument/2006/relationships">
   <p:cSld>
     <p:spTree>
       <p:nvGrpSpPr>
@@ -10601,14 +10092,7 @@
         <p:cNvGrpSpPr/>
         <p:nvPr/>
       </p:nvGrpSpPr>
-      <p:grpSpPr>
-        <a:xfrm>
-          <a:off x="0" y="0"/>
-          <a:ext cx="0" cy="0"/>
-          <a:chOff x="0" y="0"/>
-          <a:chExt cx="0" cy="0"/>
-        </a:xfrm>
-      </p:grpSpPr>
+      <p:grpSpPr/>
       <p:sp>
         <p:nvSpPr>
           <p:cNvPr id="2" name="TextBox 1"/>
@@ -10717,12 +10201,14 @@
                 <a:spcPts val="800"/>
               </a:spcAft>
             </a:pPr>
-            <a:endParaRPr sz="2000">
-              <a:solidFill>
-                <a:srgbClr val="212121"/>
-              </a:solidFill>
-              <a:latin typeface="Courier New"/>
-            </a:endParaRPr>
+            <a:r>
+              <a:rPr sz="2400">
+                <a:solidFill>
+                  <a:srgbClr val="212121"/>
+                </a:solidFill>
+              </a:rPr>
+              <a:t/>
+            </a:r>
           </a:p>
           <a:p>
             <a:pPr>
@@ -10765,7 +10251,7 @@
 </file>
 
 <file path=ppt/slides/slide39.xml><?xml version="1.0" encoding="utf-8"?>
-<p:sld xmlns:a="http://schemas.openxmlformats.org/drawingml/2006/main" xmlns:r="http://schemas.openxmlformats.org/officeDocument/2006/relationships" xmlns:p="http://schemas.openxmlformats.org/presentationml/2006/main">
+<p:sld xmlns:a="http://schemas.openxmlformats.org/drawingml/2006/main" xmlns:p="http://schemas.openxmlformats.org/presentationml/2006/main" xmlns:r="http://schemas.openxmlformats.org/officeDocument/2006/relationships">
   <p:cSld>
     <p:spTree>
       <p:nvGrpSpPr>
@@ -10773,14 +10259,7 @@
         <p:cNvGrpSpPr/>
         <p:nvPr/>
       </p:nvGrpSpPr>
-      <p:grpSpPr>
-        <a:xfrm>
-          <a:off x="0" y="0"/>
-          <a:ext cx="0" cy="0"/>
-          <a:chOff x="0" y="0"/>
-          <a:chExt cx="0" cy="0"/>
-        </a:xfrm>
-      </p:grpSpPr>
+      <p:grpSpPr/>
       <p:sp>
         <p:nvSpPr>
           <p:cNvPr id="2" name="TextBox 1"/>
@@ -10857,25 +10336,27 @@
                 <a:spcPts val="800"/>
               </a:spcAft>
             </a:pPr>
-            <a:endParaRPr sz="2200">
-              <a:solidFill>
-                <a:srgbClr val="212121"/>
-              </a:solidFill>
-              <a:latin typeface="Courier New"/>
-            </a:endParaRPr>
-          </a:p>
-          <a:p>
-            <a:pPr>
-              <a:spcAft>
-                <a:spcPts val="800"/>
-              </a:spcAft>
-            </a:pPr>
             <a:r>
               <a:rPr sz="2600">
                 <a:solidFill>
                   <a:srgbClr val="212121"/>
                 </a:solidFill>
               </a:rPr>
+              <a:t/>
+            </a:r>
+          </a:p>
+          <a:p>
+            <a:pPr>
+              <a:spcAft>
+                <a:spcPts val="800"/>
+              </a:spcAft>
+            </a:pPr>
+            <a:r>
+              <a:rPr sz="2600">
+                <a:solidFill>
+                  <a:srgbClr val="212121"/>
+                </a:solidFill>
+              </a:rPr>
               <a:t>sat — the model assigns every input and every choice: replayed in program order, that is the counterexample trace.</a:t>
             </a:r>
           </a:p>
@@ -10900,11 +10381,14 @@
                 <a:spcPts val="800"/>
               </a:spcAft>
             </a:pPr>
-            <a:endParaRPr sz="2600">
-              <a:solidFill>
-                <a:srgbClr val="212121"/>
-              </a:solidFill>
-            </a:endParaRPr>
+            <a:r>
+              <a:rPr sz="2600">
+                <a:solidFill>
+                  <a:srgbClr val="212121"/>
+                </a:solidFill>
+              </a:rPr>
+              <a:t/>
+            </a:r>
           </a:p>
           <a:p>
             <a:pPr>
@@ -10932,7 +10416,7 @@
 </file>
 
 <file path=ppt/slides/slide4.xml><?xml version="1.0" encoding="utf-8"?>
-<p:sld xmlns:a="http://schemas.openxmlformats.org/drawingml/2006/main" xmlns:r="http://schemas.openxmlformats.org/officeDocument/2006/relationships" xmlns:p="http://schemas.openxmlformats.org/presentationml/2006/main">
+<p:sld xmlns:a="http://schemas.openxmlformats.org/drawingml/2006/main" xmlns:p="http://schemas.openxmlformats.org/presentationml/2006/main" xmlns:r="http://schemas.openxmlformats.org/officeDocument/2006/relationships">
   <p:cSld>
     <p:spTree>
       <p:nvGrpSpPr>
@@ -10940,14 +10424,7 @@
         <p:cNvGrpSpPr/>
         <p:nvPr/>
       </p:nvGrpSpPr>
-      <p:grpSpPr>
-        <a:xfrm>
-          <a:off x="0" y="0"/>
-          <a:ext cx="0" cy="0"/>
-          <a:chOff x="0" y="0"/>
-          <a:chExt cx="0" cy="0"/>
-        </a:xfrm>
-      </p:grpSpPr>
+      <p:grpSpPr/>
       <p:sp>
         <p:nvSpPr>
           <p:cNvPr id="2" name="TextBox 1"/>
@@ -11098,11 +10575,14 @@
                 <a:spcPts val="800"/>
               </a:spcAft>
             </a:pPr>
-            <a:endParaRPr sz="2000">
-              <a:solidFill>
-                <a:srgbClr val="212121"/>
-              </a:solidFill>
-            </a:endParaRPr>
+            <a:r>
+              <a:rPr sz="2200">
+                <a:solidFill>
+                  <a:srgbClr val="212121"/>
+                </a:solidFill>
+              </a:rPr>
+              <a:t/>
+            </a:r>
           </a:p>
           <a:p>
             <a:pPr>
@@ -11130,7 +10610,7 @@
 </file>
 
 <file path=ppt/slides/slide40.xml><?xml version="1.0" encoding="utf-8"?>
-<p:sld xmlns:a="http://schemas.openxmlformats.org/drawingml/2006/main" xmlns:r="http://schemas.openxmlformats.org/officeDocument/2006/relationships" xmlns:p="http://schemas.openxmlformats.org/presentationml/2006/main">
+<p:sld xmlns:a="http://schemas.openxmlformats.org/drawingml/2006/main" xmlns:p="http://schemas.openxmlformats.org/presentationml/2006/main" xmlns:r="http://schemas.openxmlformats.org/officeDocument/2006/relationships">
   <p:cSld>
     <p:spTree>
       <p:nvGrpSpPr>
@@ -11138,14 +10618,7 @@
         <p:cNvGrpSpPr/>
         <p:nvPr/>
       </p:nvGrpSpPr>
-      <p:grpSpPr>
-        <a:xfrm>
-          <a:off x="0" y="0"/>
-          <a:ext cx="0" cy="0"/>
-          <a:chOff x="0" y="0"/>
-          <a:chExt cx="0" cy="0"/>
-        </a:xfrm>
-      </p:grpSpPr>
+      <p:grpSpPr/>
       <p:sp>
         <p:nvSpPr>
           <p:cNvPr id="2" name="TextBox 1"/>
@@ -11302,12 +10775,14 @@
                 <a:spcPts val="800"/>
               </a:spcAft>
             </a:pPr>
-            <a:endParaRPr sz="1800">
-              <a:solidFill>
-                <a:srgbClr val="212121"/>
-              </a:solidFill>
-              <a:latin typeface="Courier New"/>
-            </a:endParaRPr>
+            <a:r>
+              <a:rPr sz="2200">
+                <a:solidFill>
+                  <a:srgbClr val="212121"/>
+                </a:solidFill>
+              </a:rPr>
+              <a:t/>
+            </a:r>
           </a:p>
           <a:p>
             <a:pPr>
@@ -11350,7 +10825,7 @@
 </file>
 
 <file path=ppt/slides/slide41.xml><?xml version="1.0" encoding="utf-8"?>
-<p:sld xmlns:a="http://schemas.openxmlformats.org/drawingml/2006/main" xmlns:r="http://schemas.openxmlformats.org/officeDocument/2006/relationships" xmlns:p="http://schemas.openxmlformats.org/presentationml/2006/main">
+<p:sld xmlns:a="http://schemas.openxmlformats.org/drawingml/2006/main" xmlns:p="http://schemas.openxmlformats.org/presentationml/2006/main" xmlns:r="http://schemas.openxmlformats.org/officeDocument/2006/relationships">
   <p:cSld>
     <p:spTree>
       <p:nvGrpSpPr>
@@ -11358,14 +10833,7 @@
         <p:cNvGrpSpPr/>
         <p:nvPr/>
       </p:nvGrpSpPr>
-      <p:grpSpPr>
-        <a:xfrm>
-          <a:off x="0" y="0"/>
-          <a:ext cx="0" cy="0"/>
-          <a:chOff x="0" y="0"/>
-          <a:chExt cx="0" cy="0"/>
-        </a:xfrm>
-      </p:grpSpPr>
+      <p:grpSpPr/>
       <p:sp>
         <p:nvSpPr>
           <p:cNvPr id="2" name="TextBox 1"/>
@@ -11522,12 +10990,15 @@
                 <a:spcPts val="0"/>
               </a:spcAft>
             </a:pPr>
-            <a:endParaRPr sz="1800">
-              <a:solidFill>
-                <a:srgbClr val="212121"/>
-              </a:solidFill>
-              <a:latin typeface="Courier New"/>
-            </a:endParaRPr>
+            <a:r>
+              <a:rPr sz="1800">
+                <a:solidFill>
+                  <a:srgbClr val="212121"/>
+                </a:solidFill>
+                <a:latin typeface="Courier New"/>
+              </a:rPr>
+              <a:t/>
+            </a:r>
           </a:p>
           <a:p>
             <a:pPr>
@@ -11551,12 +11022,14 @@
                 <a:spcPts val="800"/>
               </a:spcAft>
             </a:pPr>
-            <a:endParaRPr sz="1800">
-              <a:solidFill>
-                <a:srgbClr val="212121"/>
-              </a:solidFill>
-              <a:latin typeface="Courier New"/>
-            </a:endParaRPr>
+            <a:r>
+              <a:rPr sz="2200">
+                <a:solidFill>
+                  <a:srgbClr val="212121"/>
+                </a:solidFill>
+              </a:rPr>
+              <a:t/>
+            </a:r>
           </a:p>
           <a:p>
             <a:pPr>
@@ -11599,7 +11072,7 @@
 </file>
 
 <file path=ppt/slides/slide42.xml><?xml version="1.0" encoding="utf-8"?>
-<p:sld xmlns:a="http://schemas.openxmlformats.org/drawingml/2006/main" xmlns:r="http://schemas.openxmlformats.org/officeDocument/2006/relationships" xmlns:p="http://schemas.openxmlformats.org/presentationml/2006/main">
+<p:sld xmlns:a="http://schemas.openxmlformats.org/drawingml/2006/main" xmlns:p="http://schemas.openxmlformats.org/presentationml/2006/main" xmlns:r="http://schemas.openxmlformats.org/officeDocument/2006/relationships">
   <p:cSld>
     <p:spTree>
       <p:nvGrpSpPr>
@@ -11607,14 +11080,7 @@
         <p:cNvGrpSpPr/>
         <p:nvPr/>
       </p:nvGrpSpPr>
-      <p:grpSpPr>
-        <a:xfrm>
-          <a:off x="0" y="0"/>
-          <a:ext cx="0" cy="0"/>
-          <a:chOff x="0" y="0"/>
-          <a:chExt cx="0" cy="0"/>
-        </a:xfrm>
-      </p:grpSpPr>
+      <p:grpSpPr/>
       <p:sp>
         <p:nvSpPr>
           <p:cNvPr id="2" name="TextBox 1"/>
@@ -11723,12 +11189,14 @@
                 <a:spcPts val="800"/>
               </a:spcAft>
             </a:pPr>
-            <a:endParaRPr sz="1800">
-              <a:solidFill>
-                <a:srgbClr val="212121"/>
-              </a:solidFill>
-              <a:latin typeface="Courier New"/>
-            </a:endParaRPr>
+            <a:r>
+              <a:rPr sz="2200">
+                <a:solidFill>
+                  <a:srgbClr val="212121"/>
+                </a:solidFill>
+              </a:rPr>
+              <a:t/>
+            </a:r>
           </a:p>
           <a:p>
             <a:pPr>
@@ -11771,7 +11239,7 @@
 </file>
 
 <file path=ppt/slides/slide43.xml><?xml version="1.0" encoding="utf-8"?>
-<p:sld xmlns:a="http://schemas.openxmlformats.org/drawingml/2006/main" xmlns:r="http://schemas.openxmlformats.org/officeDocument/2006/relationships" xmlns:p="http://schemas.openxmlformats.org/presentationml/2006/main">
+<p:sld xmlns:a="http://schemas.openxmlformats.org/drawingml/2006/main" xmlns:p="http://schemas.openxmlformats.org/presentationml/2006/main" xmlns:r="http://schemas.openxmlformats.org/officeDocument/2006/relationships">
   <p:cSld>
     <p:spTree>
       <p:nvGrpSpPr>
@@ -11779,14 +11247,7 @@
         <p:cNvGrpSpPr/>
         <p:nvPr/>
       </p:nvGrpSpPr>
-      <p:grpSpPr>
-        <a:xfrm>
-          <a:off x="0" y="0"/>
-          <a:ext cx="0" cy="0"/>
-          <a:chOff x="0" y="0"/>
-          <a:chExt cx="0" cy="0"/>
-        </a:xfrm>
-      </p:grpSpPr>
+      <p:grpSpPr/>
       <p:sp>
         <p:nvSpPr>
           <p:cNvPr id="2" name="TextBox 1"/>
@@ -11892,11 +11353,14 @@
                 <a:spcPts val="800"/>
               </a:spcAft>
             </a:pPr>
-            <a:endParaRPr sz="2400">
-              <a:solidFill>
-                <a:srgbClr val="212121"/>
-              </a:solidFill>
-            </a:endParaRPr>
+            <a:r>
+              <a:rPr sz="2400">
+                <a:solidFill>
+                  <a:srgbClr val="212121"/>
+                </a:solidFill>
+              </a:rPr>
+              <a:t/>
+            </a:r>
           </a:p>
           <a:p>
             <a:pPr>
@@ -11924,7 +11388,7 @@
 </file>
 
 <file path=ppt/slides/slide44.xml><?xml version="1.0" encoding="utf-8"?>
-<p:sld xmlns:a="http://schemas.openxmlformats.org/drawingml/2006/main" xmlns:r="http://schemas.openxmlformats.org/officeDocument/2006/relationships" xmlns:p="http://schemas.openxmlformats.org/presentationml/2006/main">
+<p:sld xmlns:a="http://schemas.openxmlformats.org/drawingml/2006/main" xmlns:p="http://schemas.openxmlformats.org/presentationml/2006/main" xmlns:r="http://schemas.openxmlformats.org/officeDocument/2006/relationships">
   <p:cSld>
     <p:spTree>
       <p:nvGrpSpPr>
@@ -11932,14 +11396,7 @@
         <p:cNvGrpSpPr/>
         <p:nvPr/>
       </p:nvGrpSpPr>
-      <p:grpSpPr>
-        <a:xfrm>
-          <a:off x="0" y="0"/>
-          <a:ext cx="0" cy="0"/>
-          <a:chOff x="0" y="0"/>
-          <a:chExt cx="0" cy="0"/>
-        </a:xfrm>
-      </p:grpSpPr>
+      <p:grpSpPr/>
       <p:sp>
         <p:nvSpPr>
           <p:cNvPr id="2" name="TextBox 1"/>
@@ -12032,25 +11489,27 @@
                 <a:spcPts val="800"/>
               </a:spcAft>
             </a:pPr>
-            <a:endParaRPr sz="2200">
-              <a:solidFill>
-                <a:srgbClr val="212121"/>
-              </a:solidFill>
-              <a:latin typeface="Courier New"/>
-            </a:endParaRPr>
-          </a:p>
-          <a:p>
-            <a:pPr>
-              <a:spcAft>
-                <a:spcPts val="800"/>
-              </a:spcAft>
-            </a:pPr>
             <a:r>
               <a:rPr sz="2600">
                 <a:solidFill>
                   <a:srgbClr val="212121"/>
                 </a:solidFill>
               </a:rPr>
+              <a:t/>
+            </a:r>
+          </a:p>
+          <a:p>
+            <a:pPr>
+              <a:spcAft>
+                <a:spcPts val="800"/>
+              </a:spcAft>
+            </a:pPr>
+            <a:r>
+              <a:rPr sz="2600">
+                <a:solidFill>
+                  <a:srgbClr val="212121"/>
+                </a:solidFill>
+              </a:rPr>
               <a:t>FAILED or SUCCESSFUL?</a:t>
             </a:r>
           </a:p>
@@ -12060,11 +11519,14 @@
                 <a:spcPts val="800"/>
               </a:spcAft>
             </a:pPr>
-            <a:endParaRPr sz="2600">
-              <a:solidFill>
-                <a:srgbClr val="212121"/>
-              </a:solidFill>
-            </a:endParaRPr>
+            <a:r>
+              <a:rPr sz="2600">
+                <a:solidFill>
+                  <a:srgbClr val="212121"/>
+                </a:solidFill>
+              </a:rPr>
+              <a:t/>
+            </a:r>
           </a:p>
           <a:p>
             <a:pPr>
@@ -12107,7 +11569,7 @@
 </file>
 
 <file path=ppt/slides/slide45.xml><?xml version="1.0" encoding="utf-8"?>
-<p:sld xmlns:a="http://schemas.openxmlformats.org/drawingml/2006/main" xmlns:r="http://schemas.openxmlformats.org/officeDocument/2006/relationships" xmlns:p="http://schemas.openxmlformats.org/presentationml/2006/main">
+<p:sld xmlns:a="http://schemas.openxmlformats.org/drawingml/2006/main" xmlns:p="http://schemas.openxmlformats.org/presentationml/2006/main" xmlns:r="http://schemas.openxmlformats.org/officeDocument/2006/relationships">
   <p:cSld>
     <p:spTree>
       <p:nvGrpSpPr>
@@ -12115,14 +11577,7 @@
         <p:cNvGrpSpPr/>
         <p:nvPr/>
       </p:nvGrpSpPr>
-      <p:grpSpPr>
-        <a:xfrm>
-          <a:off x="0" y="0"/>
-          <a:ext cx="0" cy="0"/>
-          <a:chOff x="0" y="0"/>
-          <a:chExt cx="0" cy="0"/>
-        </a:xfrm>
-      </p:grpSpPr>
+      <p:grpSpPr/>
       <p:sp>
         <p:nvSpPr>
           <p:cNvPr id="2" name="TextBox 1"/>
@@ -12263,7 +11718,7 @@
 </file>
 
 <file path=ppt/slides/slide46.xml><?xml version="1.0" encoding="utf-8"?>
-<p:sld xmlns:a="http://schemas.openxmlformats.org/drawingml/2006/main" xmlns:r="http://schemas.openxmlformats.org/officeDocument/2006/relationships" xmlns:p="http://schemas.openxmlformats.org/presentationml/2006/main">
+<p:sld xmlns:a="http://schemas.openxmlformats.org/drawingml/2006/main" xmlns:p="http://schemas.openxmlformats.org/presentationml/2006/main" xmlns:r="http://schemas.openxmlformats.org/officeDocument/2006/relationships">
   <p:cSld>
     <p:spTree>
       <p:nvGrpSpPr>
@@ -12271,14 +11726,7 @@
         <p:cNvGrpSpPr/>
         <p:nvPr/>
       </p:nvGrpSpPr>
-      <p:grpSpPr>
-        <a:xfrm>
-          <a:off x="0" y="0"/>
-          <a:ext cx="0" cy="0"/>
-          <a:chOff x="0" y="0"/>
-          <a:chExt cx="0" cy="0"/>
-        </a:xfrm>
-      </p:grpSpPr>
+      <p:grpSpPr/>
       <p:sp>
         <p:nvSpPr>
           <p:cNvPr id="2" name="TextBox 1"/>
@@ -12389,7 +11837,7 @@
 </file>
 
 <file path=ppt/slides/slide47.xml><?xml version="1.0" encoding="utf-8"?>
-<p:sld xmlns:a="http://schemas.openxmlformats.org/drawingml/2006/main" xmlns:r="http://schemas.openxmlformats.org/officeDocument/2006/relationships" xmlns:p="http://schemas.openxmlformats.org/presentationml/2006/main">
+<p:sld xmlns:a="http://schemas.openxmlformats.org/drawingml/2006/main" xmlns:p="http://schemas.openxmlformats.org/presentationml/2006/main" xmlns:r="http://schemas.openxmlformats.org/officeDocument/2006/relationships">
   <p:cSld>
     <p:spTree>
       <p:nvGrpSpPr>
@@ -12397,14 +11845,7 @@
         <p:cNvGrpSpPr/>
         <p:nvPr/>
       </p:nvGrpSpPr>
-      <p:grpSpPr>
-        <a:xfrm>
-          <a:off x="0" y="0"/>
-          <a:ext cx="0" cy="0"/>
-          <a:chOff x="0" y="0"/>
-          <a:chExt cx="0" cy="0"/>
-        </a:xfrm>
-      </p:grpSpPr>
+      <p:grpSpPr/>
       <p:sp>
         <p:nvSpPr>
           <p:cNvPr id="2" name="TextBox 1"/>
@@ -12530,7 +11971,7 @@
 </file>
 
 <file path=ppt/slides/slide48.xml><?xml version="1.0" encoding="utf-8"?>
-<p:sld xmlns:a="http://schemas.openxmlformats.org/drawingml/2006/main" xmlns:r="http://schemas.openxmlformats.org/officeDocument/2006/relationships" xmlns:p="http://schemas.openxmlformats.org/presentationml/2006/main">
+<p:sld xmlns:a="http://schemas.openxmlformats.org/drawingml/2006/main" xmlns:p="http://schemas.openxmlformats.org/presentationml/2006/main" xmlns:r="http://schemas.openxmlformats.org/officeDocument/2006/relationships">
   <p:cSld>
     <p:spTree>
       <p:nvGrpSpPr>
@@ -12538,14 +11979,7 @@
         <p:cNvGrpSpPr/>
         <p:nvPr/>
       </p:nvGrpSpPr>
-      <p:grpSpPr>
-        <a:xfrm>
-          <a:off x="0" y="0"/>
-          <a:ext cx="0" cy="0"/>
-          <a:chOff x="0" y="0"/>
-          <a:chExt cx="0" cy="0"/>
-        </a:xfrm>
-      </p:grpSpPr>
+      <p:grpSpPr/>
       <p:sp>
         <p:nvSpPr>
           <p:cNvPr id="2" name="TextBox 1"/>
@@ -12574,7 +12008,7 @@
                   <a:srgbClr val="5A0A7A"/>
                 </a:solidFill>
               </a:rPr>
-              <a:t>Who uses this? — Proofs all the way up</a:t>
+              <a:t>Another route to a proof: abstract interpretation</a:t>
             </a:r>
           </a:p>
         </p:txBody>
@@ -12607,42 +12041,152 @@
               </a:spcAft>
             </a:pPr>
             <a:r>
-              <a:rPr sz="2200">
-                <a:solidFill>
-                  <a:srgbClr val="212121"/>
-                </a:solidFill>
-              </a:rPr>
-              <a:t>Astrée (abstract interpretation) proved absence of runtime errors in the Airbus A340 fly-by-wire code — 132,000 lines of C — and was then applied to the A380</a:t>
-            </a:r>
-          </a:p>
-          <a:p>
-            <a:pPr>
-              <a:spcAft>
-                <a:spcPts val="800"/>
-              </a:spcAft>
-            </a:pPr>
-            <a:r>
-              <a:rPr sz="2200">
-                <a:solidFill>
-                  <a:srgbClr val="212121"/>
-                </a:solidFill>
-              </a:rPr>
-              <a:t>seL4 — an OS microkernel with a machine-checked proof of functional correctness</a:t>
-            </a:r>
-          </a:p>
-          <a:p>
-            <a:pPr>
-              <a:spcAft>
-                <a:spcPts val="800"/>
-              </a:spcAft>
-            </a:pPr>
-            <a:r>
-              <a:rPr sz="2200">
-                <a:solidFill>
-                  <a:srgbClr val="212121"/>
-                </a:solidFill>
-              </a:rPr>
-              <a:t>CompCert — a C compiler with a proof that compilation preserves semantics; six CPU-years of fuzzing found no wrong-code bugs in its verified core, while every other compiler tested failed</a:t>
+              <a:rPr sz="2000">
+                <a:solidFill>
+                  <a:srgbClr val="212121"/>
+                </a:solidFill>
+              </a:rPr>
+              <a:t>The BMC pipeline you just saw hunts a counterexample (or proves up to a bound). Abstract interpretation proves P the other way — over-approximate every run at once: no inputs, no paths, no bound.</a:t>
+            </a:r>
+          </a:p>
+          <a:p>
+            <a:pPr>
+              <a:spcAft>
+                <a:spcPts val="800"/>
+              </a:spcAft>
+            </a:pPr>
+            <a:r>
+              <a:rPr sz="2000">
+                <a:solidFill>
+                  <a:srgbClr val="212121"/>
+                </a:solidFill>
+              </a:rPr>
+              <a:t/>
+            </a:r>
+          </a:p>
+          <a:p>
+            <a:pPr>
+              <a:spcAft>
+                <a:spcPts val="0"/>
+              </a:spcAft>
+            </a:pPr>
+            <a:r>
+              <a:rPr sz="1600">
+                <a:solidFill>
+                  <a:srgbClr val="212121"/>
+                </a:solidFill>
+                <a:latin typeface="Courier New"/>
+              </a:rPr>
+              <a:t>x = 0                 # x ∈ [0, 0]</a:t>
+            </a:r>
+          </a:p>
+          <a:p>
+            <a:pPr>
+              <a:spcAft>
+                <a:spcPts val="0"/>
+              </a:spcAft>
+            </a:pPr>
+            <a:r>
+              <a:rPr sz="1600">
+                <a:solidFill>
+                  <a:srgbClr val="212121"/>
+                </a:solidFill>
+                <a:latin typeface="Courier New"/>
+              </a:rPr>
+              <a:t>while x &lt; 100:</a:t>
+            </a:r>
+          </a:p>
+          <a:p>
+            <a:pPr>
+              <a:spcAft>
+                <a:spcPts val="0"/>
+              </a:spcAft>
+            </a:pPr>
+            <a:r>
+              <a:rPr sz="1600">
+                <a:solidFill>
+                  <a:srgbClr val="212121"/>
+                </a:solidFill>
+                <a:latin typeface="Courier New"/>
+              </a:rPr>
+              <a:t>    x = x + 1         # x ∈ [1, 100]</a:t>
+            </a:r>
+          </a:p>
+          <a:p>
+            <a:pPr>
+              <a:spcAft>
+                <a:spcPts val="0"/>
+              </a:spcAft>
+            </a:pPr>
+            <a:r>
+              <a:rPr sz="1600">
+                <a:solidFill>
+                  <a:srgbClr val="212121"/>
+                </a:solidFill>
+                <a:latin typeface="Courier New"/>
+              </a:rPr>
+              <a:t># fixpoint invariant:  x ∈ [0, 100]</a:t>
+            </a:r>
+          </a:p>
+          <a:p>
+            <a:pPr>
+              <a:spcAft>
+                <a:spcPts val="0"/>
+              </a:spcAft>
+            </a:pPr>
+            <a:r>
+              <a:rPr sz="1600">
+                <a:solidFill>
+                  <a:srgbClr val="212121"/>
+                </a:solidFill>
+                <a:latin typeface="Courier New"/>
+              </a:rPr>
+              <a:t>assert 0 &lt;= x &lt;= 100  # implied by the invariant → PROVED</a:t>
+            </a:r>
+          </a:p>
+          <a:p>
+            <a:pPr>
+              <a:spcAft>
+                <a:spcPts val="800"/>
+              </a:spcAft>
+            </a:pPr>
+            <a:r>
+              <a:rPr sz="2000">
+                <a:solidFill>
+                  <a:srgbClr val="212121"/>
+                </a:solidFill>
+              </a:rPr>
+              <a:t/>
+            </a:r>
+          </a:p>
+          <a:p>
+            <a:pPr lvl="1">
+              <a:spcAft>
+                <a:spcPts val="800"/>
+              </a:spcAft>
+            </a:pPr>
+            <a:r>
+              <a:rPr sz="1800">
+                <a:solidFill>
+                  <a:srgbClr val="212121"/>
+                </a:solidFill>
+              </a:rPr>
+              <a:t>Compute the tightest fact the loop can't escape (a fixpoint); if it implies P, P holds for every run — no unrolling.</a:t>
+            </a:r>
+          </a:p>
+          <a:p>
+            <a:pPr lvl="1">
+              <a:spcAft>
+                <a:spcPts val="800"/>
+              </a:spcAft>
+            </a:pPr>
+            <a:r>
+              <a:rPr sz="1800">
+                <a:solidFill>
+                  <a:srgbClr val="212121"/>
+                </a:solidFill>
+              </a:rPr>
+              <a:t>Sound, not complete: too coarse → a false alarm. (Astrée proved the A340/A380 fly-by-wire this way — next slide.)</a:t>
             </a:r>
           </a:p>
         </p:txBody>
@@ -12656,7 +12200,7 @@
 </file>
 
 <file path=ppt/slides/slide49.xml><?xml version="1.0" encoding="utf-8"?>
-<p:sld xmlns:a="http://schemas.openxmlformats.org/drawingml/2006/main" xmlns:r="http://schemas.openxmlformats.org/officeDocument/2006/relationships" xmlns:p="http://schemas.openxmlformats.org/presentationml/2006/main">
+<p:sld xmlns:a="http://schemas.openxmlformats.org/drawingml/2006/main" xmlns:p="http://schemas.openxmlformats.org/presentationml/2006/main" xmlns:r="http://schemas.openxmlformats.org/officeDocument/2006/relationships">
   <p:cSld>
     <p:spTree>
       <p:nvGrpSpPr>
@@ -12664,14 +12208,7 @@
         <p:cNvGrpSpPr/>
         <p:nvPr/>
       </p:nvGrpSpPr>
-      <p:grpSpPr>
-        <a:xfrm>
-          <a:off x="0" y="0"/>
-          <a:ext cx="0" cy="0"/>
-          <a:chOff x="0" y="0"/>
-          <a:chExt cx="0" cy="0"/>
-        </a:xfrm>
-      </p:grpSpPr>
+      <p:grpSpPr/>
       <p:sp>
         <p:nvSpPr>
           <p:cNvPr id="2" name="TextBox 1"/>
@@ -12700,6 +12237,568 @@
                   <a:srgbClr val="5A0A7A"/>
                 </a:solidFill>
               </a:rPr>
+              <a:t>Abstract interpretation: domain, widening, narrowing</a:t>
+            </a:r>
+          </a:p>
+        </p:txBody>
+      </p:sp>
+      <p:sp>
+        <p:nvSpPr>
+          <p:cNvPr id="3" name="TextBox 2"/>
+          <p:cNvSpPr txBox="1"/>
+          <p:nvPr/>
+        </p:nvSpPr>
+        <p:spPr>
+          <a:xfrm>
+            <a:off x="731520" y="1463040"/>
+            <a:ext cx="10789920" cy="5120640"/>
+          </a:xfrm>
+          <a:prstGeom prst="rect">
+            <a:avLst/>
+          </a:prstGeom>
+          <a:noFill/>
+        </p:spPr>
+        <p:txBody>
+          <a:bodyPr wrap="square">
+            <a:spAutoFit/>
+          </a:bodyPr>
+          <a:lstStyle/>
+          <a:p>
+            <a:pPr lvl="1">
+              <a:spcAft>
+                <a:spcPts val="800"/>
+              </a:spcAft>
+            </a:pPr>
+            <a:r>
+              <a:rPr sz="1800">
+                <a:solidFill>
+                  <a:srgbClr val="212121"/>
+                </a:solidFill>
+              </a:rPr>
+              <a:t>Abstract domain — the facts you track instead of exact values. Intervals x ∈ [a, b]; richer ones add relationships (octagons ±x ±y ≤ c, polyhedra). At a branch you join the two sides — richer domain → more precise, but more costly.</a:t>
+            </a:r>
+          </a:p>
+          <a:p>
+            <a:pPr>
+              <a:spcAft>
+                <a:spcPts val="800"/>
+              </a:spcAft>
+            </a:pPr>
+            <a:r>
+              <a:rPr sz="2000">
+                <a:solidFill>
+                  <a:srgbClr val="212121"/>
+                </a:solidFill>
+              </a:rPr>
+              <a:t/>
+            </a:r>
+          </a:p>
+          <a:p>
+            <a:pPr lvl="1">
+              <a:spcAft>
+                <a:spcPts val="800"/>
+              </a:spcAft>
+            </a:pPr>
+            <a:r>
+              <a:rPr sz="1800">
+                <a:solidFill>
+                  <a:srgbClr val="212121"/>
+                </a:solidFill>
+              </a:rPr>
+              <a:t>Widening (∇) — forces loops to converge. The loop ascends [0,0] → [0,1] → [0,2] → … and may never stop; widening sees the bound climbing and extrapolates it to [0, +∞). Termination, at the cost of precision.</a:t>
+            </a:r>
+          </a:p>
+          <a:p>
+            <a:pPr>
+              <a:spcAft>
+                <a:spcPts val="800"/>
+              </a:spcAft>
+            </a:pPr>
+            <a:r>
+              <a:rPr sz="2000">
+                <a:solidFill>
+                  <a:srgbClr val="212121"/>
+                </a:solidFill>
+              </a:rPr>
+              <a:t/>
+            </a:r>
+          </a:p>
+          <a:p>
+            <a:pPr lvl="1">
+              <a:spcAft>
+                <a:spcPts val="800"/>
+              </a:spcAft>
+            </a:pPr>
+            <a:r>
+              <a:rPr sz="1800">
+                <a:solidFill>
+                  <a:srgbClr val="212121"/>
+                </a:solidFill>
+              </a:rPr>
+              <a:t>Narrowing (Δ) — recovers what widening overshot. Re-reading the guard x &lt; 100 pulls [0, +∞) back to [0, 100]: precision restored, still terminating.</a:t>
+            </a:r>
+          </a:p>
+          <a:p>
+            <a:pPr>
+              <a:spcAft>
+                <a:spcPts val="800"/>
+              </a:spcAft>
+            </a:pPr>
+            <a:r>
+              <a:rPr sz="2000">
+                <a:solidFill>
+                  <a:srgbClr val="212121"/>
+                </a:solidFill>
+              </a:rPr>
+              <a:t/>
+            </a:r>
+          </a:p>
+          <a:p>
+            <a:pPr>
+              <a:spcAft>
+                <a:spcPts val="800"/>
+              </a:spcAft>
+            </a:pPr>
+            <a:r>
+              <a:rPr sz="2000">
+                <a:solidFill>
+                  <a:srgbClr val="212121"/>
+                </a:solidFill>
+              </a:rPr>
+              <a:t>ESBMC ships it too — --interval-analysis — and can supply the invariant k-induction needs (Session 2, Lab 3).</a:t>
+            </a:r>
+          </a:p>
+        </p:txBody>
+      </p:sp>
+    </p:spTree>
+  </p:cSld>
+  <p:clrMapOvr>
+    <a:masterClrMapping/>
+  </p:clrMapOvr>
+</p:sld>
+</file>
+
+<file path=ppt/slides/slide5.xml><?xml version="1.0" encoding="utf-8"?>
+<p:sld xmlns:a="http://schemas.openxmlformats.org/drawingml/2006/main" xmlns:p="http://schemas.openxmlformats.org/presentationml/2006/main" xmlns:r="http://schemas.openxmlformats.org/officeDocument/2006/relationships">
+  <p:cSld>
+    <p:spTree>
+      <p:nvGrpSpPr>
+        <p:cNvPr id="1" name=""/>
+        <p:cNvGrpSpPr/>
+        <p:nvPr/>
+      </p:nvGrpSpPr>
+      <p:grpSpPr/>
+      <p:sp>
+        <p:nvSpPr>
+          <p:cNvPr id="2" name="TextBox 1"/>
+          <p:cNvSpPr txBox="1"/>
+          <p:nvPr/>
+        </p:nvSpPr>
+        <p:spPr>
+          <a:xfrm>
+            <a:off x="548640" y="365760"/>
+            <a:ext cx="11064240" cy="1005840"/>
+          </a:xfrm>
+          <a:prstGeom prst="rect">
+            <a:avLst/>
+          </a:prstGeom>
+          <a:noFill/>
+        </p:spPr>
+        <p:txBody>
+          <a:bodyPr wrap="square">
+            <a:spAutoFit/>
+          </a:bodyPr>
+          <a:lstStyle/>
+          <a:p>
+            <a:r>
+              <a:rPr sz="3600" b="1">
+                <a:solidFill>
+                  <a:srgbClr val="5A0A7A"/>
+                </a:solidFill>
+              </a:rPr>
+              <a:t>A password check in 11 lines of C</a:t>
+            </a:r>
+          </a:p>
+        </p:txBody>
+      </p:sp>
+      <p:sp>
+        <p:nvSpPr>
+          <p:cNvPr id="3" name="TextBox 2"/>
+          <p:cNvSpPr txBox="1"/>
+          <p:nvPr/>
+        </p:nvSpPr>
+        <p:spPr>
+          <a:xfrm>
+            <a:off x="731520" y="1463040"/>
+            <a:ext cx="10789920" cy="5120640"/>
+          </a:xfrm>
+          <a:prstGeom prst="rect">
+            <a:avLst/>
+          </a:prstGeom>
+          <a:noFill/>
+        </p:spPr>
+        <p:txBody>
+          <a:bodyPr wrap="square">
+            <a:spAutoFit/>
+          </a:bodyPr>
+          <a:lstStyle/>
+          <a:p>
+            <a:pPr>
+              <a:spcAft>
+                <a:spcPts val="0"/>
+              </a:spcAft>
+            </a:pPr>
+            <a:r>
+              <a:rPr sz="2000">
+                <a:solidFill>
+                  <a:srgbClr val="212121"/>
+                </a:solidFill>
+                <a:latin typeface="Courier New"/>
+              </a:rPr>
+              <a:t>char *gets(char *s);  /* removed from C11 — unsafe by design */</a:t>
+            </a:r>
+          </a:p>
+          <a:p>
+            <a:pPr>
+              <a:spcAft>
+                <a:spcPts val="0"/>
+              </a:spcAft>
+            </a:pPr>
+            <a:r>
+              <a:rPr sz="2000">
+                <a:solidFill>
+                  <a:srgbClr val="212121"/>
+                </a:solidFill>
+                <a:latin typeface="Courier New"/>
+              </a:rPr>
+              <a:t/>
+            </a:r>
+          </a:p>
+          <a:p>
+            <a:pPr>
+              <a:spcAft>
+                <a:spcPts val="0"/>
+              </a:spcAft>
+            </a:pPr>
+            <a:r>
+              <a:rPr sz="2000">
+                <a:solidFill>
+                  <a:srgbClr val="212121"/>
+                </a:solidFill>
+                <a:latin typeface="Courier New"/>
+              </a:rPr>
+              <a:t>int getPassword(void)</a:t>
+            </a:r>
+          </a:p>
+          <a:p>
+            <a:pPr>
+              <a:spcAft>
+                <a:spcPts val="0"/>
+              </a:spcAft>
+            </a:pPr>
+            <a:r>
+              <a:rPr sz="2000">
+                <a:solidFill>
+                  <a:srgbClr val="212121"/>
+                </a:solidFill>
+                <a:latin typeface="Courier New"/>
+              </a:rPr>
+              <a:t>{</a:t>
+            </a:r>
+          </a:p>
+          <a:p>
+            <a:pPr>
+              <a:spcAft>
+                <a:spcPts val="0"/>
+              </a:spcAft>
+            </a:pPr>
+            <a:r>
+              <a:rPr sz="2000">
+                <a:solidFill>
+                  <a:srgbClr val="212121"/>
+                </a:solidFill>
+                <a:latin typeface="Courier New"/>
+              </a:rPr>
+              <a:t>  char buf[4];</a:t>
+            </a:r>
+          </a:p>
+          <a:p>
+            <a:pPr>
+              <a:spcAft>
+                <a:spcPts val="0"/>
+              </a:spcAft>
+            </a:pPr>
+            <a:r>
+              <a:rPr sz="2000">
+                <a:solidFill>
+                  <a:srgbClr val="212121"/>
+                </a:solidFill>
+                <a:latin typeface="Courier New"/>
+              </a:rPr>
+              <a:t>  gets(buf);</a:t>
+            </a:r>
+          </a:p>
+          <a:p>
+            <a:pPr>
+              <a:spcAft>
+                <a:spcPts val="0"/>
+              </a:spcAft>
+            </a:pPr>
+            <a:r>
+              <a:rPr sz="2000">
+                <a:solidFill>
+                  <a:srgbClr val="212121"/>
+                </a:solidFill>
+                <a:latin typeface="Courier New"/>
+              </a:rPr>
+              <a:t>  return strcmp(buf, "SMT");</a:t>
+            </a:r>
+          </a:p>
+          <a:p>
+            <a:pPr>
+              <a:spcAft>
+                <a:spcPts val="0"/>
+              </a:spcAft>
+            </a:pPr>
+            <a:r>
+              <a:rPr sz="2000">
+                <a:solidFill>
+                  <a:srgbClr val="212121"/>
+                </a:solidFill>
+                <a:latin typeface="Courier New"/>
+              </a:rPr>
+              <a:t>}</a:t>
+            </a:r>
+          </a:p>
+          <a:p>
+            <a:pPr>
+              <a:spcAft>
+                <a:spcPts val="0"/>
+              </a:spcAft>
+            </a:pPr>
+            <a:r>
+              <a:rPr sz="2000">
+                <a:solidFill>
+                  <a:srgbClr val="212121"/>
+                </a:solidFill>
+                <a:latin typeface="Courier New"/>
+              </a:rPr>
+              <a:t/>
+            </a:r>
+          </a:p>
+          <a:p>
+            <a:pPr>
+              <a:spcAft>
+                <a:spcPts val="0"/>
+              </a:spcAft>
+            </a:pPr>
+            <a:r>
+              <a:rPr sz="2000">
+                <a:solidFill>
+                  <a:srgbClr val="212121"/>
+                </a:solidFill>
+                <a:latin typeface="Courier New"/>
+              </a:rPr>
+              <a:t>/* main: 0 from getPassword =&gt; "Access Granted" */</a:t>
+            </a:r>
+          </a:p>
+          <a:p>
+            <a:pPr>
+              <a:spcAft>
+                <a:spcPts val="800"/>
+              </a:spcAft>
+            </a:pPr>
+            <a:r>
+              <a:rPr sz="2400">
+                <a:solidFill>
+                  <a:srgbClr val="212121"/>
+                </a:solidFill>
+              </a:rPr>
+              <a:t/>
+            </a:r>
+          </a:p>
+          <a:p>
+            <a:pPr>
+              <a:spcAft>
+                <a:spcPts val="800"/>
+              </a:spcAft>
+            </a:pPr>
+            <a:r>
+              <a:rPr sz="2400">
+                <a:solidFill>
+                  <a:srgbClr val="212121"/>
+                </a:solidFill>
+              </a:rPr>
+              <a:t>session1-demos/getpassword.c — what happens if you type more than three characters?</a:t>
+            </a:r>
+          </a:p>
+        </p:txBody>
+      </p:sp>
+    </p:spTree>
+  </p:cSld>
+  <p:clrMapOvr>
+    <a:masterClrMapping/>
+  </p:clrMapOvr>
+</p:sld>
+</file>
+
+<file path=ppt/slides/slide50.xml><?xml version="1.0" encoding="utf-8"?>
+<p:sld xmlns:a="http://schemas.openxmlformats.org/drawingml/2006/main" xmlns:p="http://schemas.openxmlformats.org/presentationml/2006/main" xmlns:r="http://schemas.openxmlformats.org/officeDocument/2006/relationships">
+  <p:cSld>
+    <p:spTree>
+      <p:nvGrpSpPr>
+        <p:cNvPr id="1" name=""/>
+        <p:cNvGrpSpPr/>
+        <p:nvPr/>
+      </p:nvGrpSpPr>
+      <p:grpSpPr/>
+      <p:sp>
+        <p:nvSpPr>
+          <p:cNvPr id="2" name="TextBox 1"/>
+          <p:cNvSpPr txBox="1"/>
+          <p:nvPr/>
+        </p:nvSpPr>
+        <p:spPr>
+          <a:xfrm>
+            <a:off x="548640" y="365760"/>
+            <a:ext cx="11064240" cy="1005840"/>
+          </a:xfrm>
+          <a:prstGeom prst="rect">
+            <a:avLst/>
+          </a:prstGeom>
+          <a:noFill/>
+        </p:spPr>
+        <p:txBody>
+          <a:bodyPr wrap="square">
+            <a:spAutoFit/>
+          </a:bodyPr>
+          <a:lstStyle/>
+          <a:p>
+            <a:r>
+              <a:rPr sz="3600" b="1">
+                <a:solidFill>
+                  <a:srgbClr val="5A0A7A"/>
+                </a:solidFill>
+              </a:rPr>
+              <a:t>Who uses this? — Proofs all the way up</a:t>
+            </a:r>
+          </a:p>
+        </p:txBody>
+      </p:sp>
+      <p:sp>
+        <p:nvSpPr>
+          <p:cNvPr id="3" name="TextBox 2"/>
+          <p:cNvSpPr txBox="1"/>
+          <p:nvPr/>
+        </p:nvSpPr>
+        <p:spPr>
+          <a:xfrm>
+            <a:off x="731520" y="1463040"/>
+            <a:ext cx="10789920" cy="5120640"/>
+          </a:xfrm>
+          <a:prstGeom prst="rect">
+            <a:avLst/>
+          </a:prstGeom>
+          <a:noFill/>
+        </p:spPr>
+        <p:txBody>
+          <a:bodyPr wrap="square">
+            <a:spAutoFit/>
+          </a:bodyPr>
+          <a:lstStyle/>
+          <a:p>
+            <a:pPr>
+              <a:spcAft>
+                <a:spcPts val="800"/>
+              </a:spcAft>
+            </a:pPr>
+            <a:r>
+              <a:rPr sz="2200">
+                <a:solidFill>
+                  <a:srgbClr val="212121"/>
+                </a:solidFill>
+              </a:rPr>
+              <a:t>Astrée (abstract interpretation) proved absence of runtime errors in the Airbus A340 fly-by-wire code — 132,000 lines of C — and was then applied to the A380</a:t>
+            </a:r>
+          </a:p>
+          <a:p>
+            <a:pPr>
+              <a:spcAft>
+                <a:spcPts val="800"/>
+              </a:spcAft>
+            </a:pPr>
+            <a:r>
+              <a:rPr sz="2200">
+                <a:solidFill>
+                  <a:srgbClr val="212121"/>
+                </a:solidFill>
+              </a:rPr>
+              <a:t>seL4 — an OS microkernel with a machine-checked proof of functional correctness</a:t>
+            </a:r>
+          </a:p>
+          <a:p>
+            <a:pPr>
+              <a:spcAft>
+                <a:spcPts val="800"/>
+              </a:spcAft>
+            </a:pPr>
+            <a:r>
+              <a:rPr sz="2200">
+                <a:solidFill>
+                  <a:srgbClr val="212121"/>
+                </a:solidFill>
+              </a:rPr>
+              <a:t>CompCert — a C compiler with a proof that compilation preserves semantics; six CPU-years of fuzzing found no wrong-code bugs in its verified core, while every other compiler tested failed</a:t>
+            </a:r>
+          </a:p>
+        </p:txBody>
+      </p:sp>
+    </p:spTree>
+  </p:cSld>
+  <p:clrMapOvr>
+    <a:masterClrMapping/>
+  </p:clrMapOvr>
+</p:sld>
+</file>
+
+<file path=ppt/slides/slide51.xml><?xml version="1.0" encoding="utf-8"?>
+<p:sld xmlns:a="http://schemas.openxmlformats.org/drawingml/2006/main" xmlns:p="http://schemas.openxmlformats.org/presentationml/2006/main" xmlns:r="http://schemas.openxmlformats.org/officeDocument/2006/relationships">
+  <p:cSld>
+    <p:spTree>
+      <p:nvGrpSpPr>
+        <p:cNvPr id="1" name=""/>
+        <p:cNvGrpSpPr/>
+        <p:nvPr/>
+      </p:nvGrpSpPr>
+      <p:grpSpPr/>
+      <p:sp>
+        <p:nvSpPr>
+          <p:cNvPr id="2" name="TextBox 1"/>
+          <p:cNvSpPr txBox="1"/>
+          <p:nvPr/>
+        </p:nvSpPr>
+        <p:spPr>
+          <a:xfrm>
+            <a:off x="548640" y="365760"/>
+            <a:ext cx="11064240" cy="1005840"/>
+          </a:xfrm>
+          <a:prstGeom prst="rect">
+            <a:avLst/>
+          </a:prstGeom>
+          <a:noFill/>
+        </p:spPr>
+        <p:txBody>
+          <a:bodyPr wrap="square">
+            <a:spAutoFit/>
+          </a:bodyPr>
+          <a:lstStyle/>
+          <a:p>
+            <a:r>
+              <a:rPr sz="3600" b="1">
+                <a:solidFill>
+                  <a:srgbClr val="5A0A7A"/>
+                </a:solidFill>
+              </a:rPr>
               <a:t>Discussion</a:t>
             </a:r>
           </a:p>
@@ -12781,8 +12880,8 @@
 </p:sld>
 </file>
 
-<file path=ppt/slides/slide5.xml><?xml version="1.0" encoding="utf-8"?>
-<p:sld xmlns:a="http://schemas.openxmlformats.org/drawingml/2006/main" xmlns:r="http://schemas.openxmlformats.org/officeDocument/2006/relationships" xmlns:p="http://schemas.openxmlformats.org/presentationml/2006/main">
+<file path=ppt/slides/slide52.xml><?xml version="1.0" encoding="utf-8"?>
+<p:sld xmlns:a="http://schemas.openxmlformats.org/drawingml/2006/main" xmlns:p="http://schemas.openxmlformats.org/presentationml/2006/main" xmlns:r="http://schemas.openxmlformats.org/officeDocument/2006/relationships">
   <p:cSld>
     <p:spTree>
       <p:nvGrpSpPr>
@@ -12790,14 +12889,7 @@
         <p:cNvGrpSpPr/>
         <p:nvPr/>
       </p:nvGrpSpPr>
-      <p:grpSpPr>
-        <a:xfrm>
-          <a:off x="0" y="0"/>
-          <a:ext cx="0" cy="0"/>
-          <a:chOff x="0" y="0"/>
-          <a:chExt cx="0" cy="0"/>
-        </a:xfrm>
-      </p:grpSpPr>
+      <p:grpSpPr/>
       <p:sp>
         <p:nvSpPr>
           <p:cNvPr id="2" name="TextBox 1"/>
@@ -12826,7 +12918,7 @@
                   <a:srgbClr val="5A0A7A"/>
                 </a:solidFill>
               </a:rPr>
-              <a:t>A password check in 11 lines of C</a:t>
+              <a:t>Under the hood — and how to hack on it</a:t>
             </a:r>
           </a:p>
         </p:txBody>
@@ -12855,183 +12947,161 @@
           <a:p>
             <a:pPr>
               <a:spcAft>
+                <a:spcPts val="800"/>
+              </a:spcAft>
+            </a:pPr>
+            <a:r>
+              <a:rPr sz="2200">
+                <a:solidFill>
+                  <a:srgbClr val="212121"/>
+                </a:solidFill>
+              </a:rPr>
+              <a:t>Tonight's pipeline was the conceptual one. ESBMC's real pipeline:</a:t>
+            </a:r>
+          </a:p>
+          <a:p>
+            <a:pPr lvl="1">
+              <a:spcAft>
+                <a:spcPts val="800"/>
+              </a:spcAft>
+            </a:pPr>
+            <a:r>
+              <a:rPr sz="2000">
+                <a:solidFill>
+                  <a:srgbClr val="212121"/>
+                </a:solidFill>
+              </a:rPr>
+              <a:t>Clang frontend → irep2 (typed IR) → GOTO program → symbolic execution (unwind, SSA) → SMT backends (Z3, Bitwuzla, cvc5)</a:t>
+            </a:r>
+          </a:p>
+          <a:p>
+            <a:pPr>
+              <a:spcAft>
+                <a:spcPts val="800"/>
+              </a:spcAft>
+            </a:pPr>
+            <a:r>
+              <a:rPr sz="2200">
+                <a:solidFill>
+                  <a:srgbClr val="212121"/>
+                </a:solidFill>
+              </a:rPr>
+              <a:t/>
+            </a:r>
+          </a:p>
+          <a:p>
+            <a:pPr>
+              <a:spcAft>
+                <a:spcPts val="800"/>
+              </a:spcAft>
+            </a:pPr>
+            <a:r>
+              <a:rPr sz="2200">
+                <a:solidFill>
+                  <a:srgbClr val="212121"/>
+                </a:solidFill>
+              </a:rPr>
+              <a:t>irep2 is the typed, reference-counted representation everything lowers to and every backend consumes.</a:t>
+            </a:r>
+          </a:p>
+          <a:p>
+            <a:pPr>
+              <a:spcAft>
+                <a:spcPts val="800"/>
+              </a:spcAft>
+            </a:pPr>
+            <a:r>
+              <a:rPr sz="2200">
+                <a:solidFill>
+                  <a:srgbClr val="212121"/>
+                </a:solidFill>
+              </a:rPr>
+              <a:t>Want to add a check, a frontend, or a new node type? Start here:</a:t>
+            </a:r>
+          </a:p>
+          <a:p>
+            <a:pPr lvl="1">
+              <a:spcAft>
                 <a:spcPts val="0"/>
               </a:spcAft>
             </a:pPr>
             <a:r>
-              <a:rPr sz="2000">
+              <a:rPr sz="1800">
                 <a:solidFill>
                   <a:srgbClr val="212121"/>
                 </a:solidFill>
                 <a:latin typeface="Courier New"/>
               </a:rPr>
-              <a:t>char *gets(char *s);  /* removed from C11 — unsafe by design */</a:t>
-            </a:r>
-          </a:p>
-          <a:p>
-            <a:pPr>
-              <a:spcAft>
-                <a:spcPts val="0"/>
-              </a:spcAft>
-            </a:pPr>
-            <a:endParaRPr sz="2000">
-              <a:solidFill>
-                <a:srgbClr val="212121"/>
-              </a:solidFill>
-              <a:latin typeface="Courier New"/>
-            </a:endParaRPr>
-          </a:p>
-          <a:p>
-            <a:pPr>
-              <a:spcAft>
-                <a:spcPts val="0"/>
-              </a:spcAft>
-            </a:pPr>
-            <a:r>
-              <a:rPr sz="2000">
-                <a:solidFill>
-                  <a:srgbClr val="212121"/>
-                </a:solidFill>
-                <a:latin typeface="Courier New"/>
-              </a:rPr>
-              <a:t>int getPassword(void)</a:t>
-            </a:r>
-          </a:p>
-          <a:p>
-            <a:pPr>
-              <a:spcAft>
-                <a:spcPts val="0"/>
-              </a:spcAft>
-            </a:pPr>
-            <a:r>
-              <a:rPr sz="2000">
-                <a:solidFill>
-                  <a:srgbClr val="212121"/>
-                </a:solidFill>
-                <a:latin typeface="Courier New"/>
-              </a:rPr>
-              <a:t>{</a:t>
-            </a:r>
-          </a:p>
-          <a:p>
-            <a:pPr>
-              <a:spcAft>
-                <a:spcPts val="0"/>
-              </a:spcAft>
-            </a:pPr>
-            <a:r>
-              <a:rPr sz="2000">
-                <a:solidFill>
-                  <a:srgbClr val="212121"/>
-                </a:solidFill>
-                <a:latin typeface="Courier New"/>
-              </a:rPr>
-              <a:t>  char buf[4];</a:t>
-            </a:r>
-          </a:p>
-          <a:p>
-            <a:pPr>
-              <a:spcAft>
-                <a:spcPts val="0"/>
-              </a:spcAft>
-            </a:pPr>
-            <a:r>
-              <a:rPr sz="2000">
-                <a:solidFill>
-                  <a:srgbClr val="212121"/>
-                </a:solidFill>
-                <a:latin typeface="Courier New"/>
-              </a:rPr>
-              <a:t>  gets(buf);</a:t>
-            </a:r>
-          </a:p>
-          <a:p>
-            <a:pPr>
-              <a:spcAft>
-                <a:spcPts val="0"/>
-              </a:spcAft>
-            </a:pPr>
-            <a:r>
-              <a:rPr sz="2000">
-                <a:solidFill>
-                  <a:srgbClr val="212121"/>
-                </a:solidFill>
-                <a:latin typeface="Courier New"/>
-              </a:rPr>
-              <a:t>  return strcmp(buf, "SMT");</a:t>
-            </a:r>
-          </a:p>
-          <a:p>
-            <a:pPr>
-              <a:spcAft>
-                <a:spcPts val="0"/>
-              </a:spcAft>
-            </a:pPr>
-            <a:r>
-              <a:rPr sz="2000">
-                <a:solidFill>
-                  <a:srgbClr val="212121"/>
-                </a:solidFill>
-                <a:latin typeface="Courier New"/>
-              </a:rPr>
-              <a:t>}</a:t>
-            </a:r>
-          </a:p>
-          <a:p>
-            <a:pPr>
-              <a:spcAft>
-                <a:spcPts val="0"/>
-              </a:spcAft>
-            </a:pPr>
-            <a:endParaRPr sz="2000">
-              <a:solidFill>
-                <a:srgbClr val="212121"/>
-              </a:solidFill>
-              <a:latin typeface="Courier New"/>
-            </a:endParaRPr>
-          </a:p>
-          <a:p>
-            <a:pPr>
-              <a:spcAft>
-                <a:spcPts val="0"/>
-              </a:spcAft>
-            </a:pPr>
-            <a:r>
-              <a:rPr sz="2000">
-                <a:solidFill>
-                  <a:srgbClr val="212121"/>
-                </a:solidFill>
-                <a:latin typeface="Courier New"/>
-              </a:rPr>
-              <a:t>/* main: 0 from getPassword =&gt; "Access Granted" */</a:t>
-            </a:r>
-          </a:p>
-          <a:p>
-            <a:pPr>
-              <a:spcAft>
-                <a:spcPts val="800"/>
-              </a:spcAft>
-            </a:pPr>
-            <a:endParaRPr sz="2000">
-              <a:solidFill>
-                <a:srgbClr val="212121"/>
-              </a:solidFill>
-              <a:latin typeface="Courier New"/>
-            </a:endParaRPr>
-          </a:p>
-          <a:p>
-            <a:pPr>
-              <a:spcAft>
-                <a:spcPts val="800"/>
-              </a:spcAft>
-            </a:pPr>
-            <a:r>
-              <a:rPr sz="2400">
-                <a:solidFill>
-                  <a:srgbClr val="212121"/>
-                </a:solidFill>
-              </a:rPr>
-              <a:t>session1-demos/getpassword.c — what happens if you type more than three characters?</a:t>
+              <a:t>github.com/esbmc/esbmc  →  src/irep2/README.md</a:t>
+            </a:r>
+          </a:p>
+          <a:p>
+            <a:pPr>
+              <a:spcAft>
+                <a:spcPts val="800"/>
+              </a:spcAft>
+            </a:pPr>
+            <a:r>
+              <a:rPr sz="2200">
+                <a:solidFill>
+                  <a:srgbClr val="212121"/>
+                </a:solidFill>
+              </a:rPr>
+              <a:t/>
+            </a:r>
+          </a:p>
+          <a:p>
+            <a:pPr>
+              <a:spcAft>
+                <a:spcPts val="800"/>
+              </a:spcAft>
+            </a:pPr>
+            <a:r>
+              <a:rPr sz="2200">
+                <a:solidFill>
+                  <a:srgbClr val="212121"/>
+                </a:solidFill>
+              </a:rPr>
+              <a:t>For the curious — and anyone who wants to contribute.</a:t>
+            </a:r>
+          </a:p>
+        </p:txBody>
+      </p:sp>
+      <p:sp>
+        <p:nvSpPr>
+          <p:cNvPr id="4" name="TextBox 3"/>
+          <p:cNvSpPr txBox="1"/>
+          <p:nvPr/>
+        </p:nvSpPr>
+        <p:spPr>
+          <a:xfrm>
+            <a:off x="731520" y="6400800"/>
+            <a:ext cx="10789920" cy="182880"/>
+          </a:xfrm>
+          <a:prstGeom prst="rect">
+            <a:avLst/>
+          </a:prstGeom>
+          <a:noFill/>
+        </p:spPr>
+        <p:txBody>
+          <a:bodyPr wrap="square">
+            <a:spAutoFit/>
+          </a:bodyPr>
+          <a:lstStyle/>
+          <a:p>
+            <a:pPr>
+              <a:spcAft>
+                <a:spcPts val="800"/>
+              </a:spcAft>
+            </a:pPr>
+            <a:r>
+              <a:rPr sz="1400">
+                <a:solidFill>
+                  <a:srgbClr val="212121"/>
+                </a:solidFill>
+                <a:hlinkClick r:id="rId2"/>
+              </a:rPr>
+              <a:t>src/irep2/README.md</a:t>
             </a:r>
           </a:p>
         </p:txBody>
@@ -13044,8 +13114,8 @@
 </p:sld>
 </file>
 
-<file path=ppt/slides/slide50.xml><?xml version="1.0" encoding="utf-8"?>
-<p:sld xmlns:a="http://schemas.openxmlformats.org/drawingml/2006/main" xmlns:r="http://schemas.openxmlformats.org/officeDocument/2006/relationships" xmlns:p="http://schemas.openxmlformats.org/presentationml/2006/main">
+<file path=ppt/slides/slide53.xml><?xml version="1.0" encoding="utf-8"?>
+<p:sld xmlns:a="http://schemas.openxmlformats.org/drawingml/2006/main" xmlns:p="http://schemas.openxmlformats.org/presentationml/2006/main" xmlns:r="http://schemas.openxmlformats.org/officeDocument/2006/relationships">
   <p:cSld>
     <p:spTree>
       <p:nvGrpSpPr>
@@ -13053,14 +13123,7 @@
         <p:cNvGrpSpPr/>
         <p:nvPr/>
       </p:nvGrpSpPr>
-      <p:grpSpPr>
-        <a:xfrm>
-          <a:off x="0" y="0"/>
-          <a:ext cx="0" cy="0"/>
-          <a:chOff x="0" y="0"/>
-          <a:chExt cx="0" cy="0"/>
-        </a:xfrm>
-      </p:grpSpPr>
+      <p:grpSpPr/>
       <p:sp>
         <p:nvSpPr>
           <p:cNvPr id="2" name="TextBox 1"/>
@@ -13089,7 +13152,7 @@
                   <a:srgbClr val="5A0A7A"/>
                 </a:solidFill>
               </a:rPr>
-              <a:t>Under the hood — and how to hack on it</a:t>
+              <a:t>Closing quiz</a:t>
             </a:r>
           </a:p>
         </p:txBody>
@@ -13122,152 +13185,72 @@
               </a:spcAft>
             </a:pPr>
             <a:r>
-              <a:rPr sz="2200">
-                <a:solidFill>
-                  <a:srgbClr val="212121"/>
-                </a:solidFill>
-              </a:rPr>
-              <a:t>Tonight's pipeline was the conceptual one. ESBMC's real pipeline:</a:t>
-            </a:r>
-          </a:p>
-          <a:p>
-            <a:pPr lvl="1">
-              <a:spcAft>
-                <a:spcPts val="800"/>
-              </a:spcAft>
-            </a:pPr>
-            <a:r>
-              <a:rPr sz="2000">
-                <a:solidFill>
-                  <a:srgbClr val="212121"/>
-                </a:solidFill>
-              </a:rPr>
-              <a:t>Clang frontend → irep2 (typed IR) → GOTO program → symbolic execution (unwind, SSA) → SMT backends (Z3, Bitwuzla, cvc5)</a:t>
-            </a:r>
-          </a:p>
-          <a:p>
-            <a:pPr>
-              <a:spcAft>
-                <a:spcPts val="800"/>
-              </a:spcAft>
-            </a:pPr>
-            <a:endParaRPr sz="2000">
-              <a:solidFill>
-                <a:srgbClr val="212121"/>
-              </a:solidFill>
-            </a:endParaRPr>
-          </a:p>
-          <a:p>
-            <a:pPr>
-              <a:spcAft>
-                <a:spcPts val="800"/>
-              </a:spcAft>
-            </a:pPr>
-            <a:r>
-              <a:rPr sz="2200">
-                <a:solidFill>
-                  <a:srgbClr val="212121"/>
-                </a:solidFill>
-              </a:rPr>
-              <a:t>irep2 is the typed, reference-counted representation everything lowers to and every backend consumes.</a:t>
-            </a:r>
-          </a:p>
-          <a:p>
-            <a:pPr>
-              <a:spcAft>
-                <a:spcPts val="800"/>
-              </a:spcAft>
-            </a:pPr>
-            <a:r>
-              <a:rPr sz="2200">
-                <a:solidFill>
-                  <a:srgbClr val="212121"/>
-                </a:solidFill>
-              </a:rPr>
-              <a:t>Want to add a check, a frontend, or a new node type? Start here:</a:t>
-            </a:r>
-          </a:p>
-          <a:p>
-            <a:pPr lvl="1">
-              <a:spcAft>
-                <a:spcPts val="0"/>
-              </a:spcAft>
-            </a:pPr>
-            <a:r>
-              <a:rPr sz="1800">
-                <a:solidFill>
-                  <a:srgbClr val="212121"/>
-                </a:solidFill>
-                <a:latin typeface="Courier New"/>
-              </a:rPr>
-              <a:t>github.com/esbmc/esbmc  →  src/irep2/README.md</a:t>
-            </a:r>
-          </a:p>
-          <a:p>
-            <a:pPr>
-              <a:spcAft>
-                <a:spcPts val="800"/>
-              </a:spcAft>
-            </a:pPr>
-            <a:endParaRPr sz="1800">
-              <a:solidFill>
-                <a:srgbClr val="212121"/>
-              </a:solidFill>
-              <a:latin typeface="Courier New"/>
-            </a:endParaRPr>
-          </a:p>
-          <a:p>
-            <a:pPr>
-              <a:spcAft>
-                <a:spcPts val="800"/>
-              </a:spcAft>
-            </a:pPr>
-            <a:r>
-              <a:rPr sz="2200">
-                <a:solidFill>
-                  <a:srgbClr val="212121"/>
-                </a:solidFill>
-              </a:rPr>
-              <a:t>For the curious — and anyone who wants to contribute.</a:t>
-            </a:r>
-          </a:p>
-        </p:txBody>
-      </p:sp>
-      <p:sp>
-        <p:nvSpPr>
-          <p:cNvPr id="4" name="TextBox 3"/>
-          <p:cNvSpPr txBox="1"/>
-          <p:nvPr/>
-        </p:nvSpPr>
-        <p:spPr>
-          <a:xfrm>
-            <a:off x="731520" y="6400800"/>
-            <a:ext cx="10789920" cy="182880"/>
-          </a:xfrm>
-          <a:prstGeom prst="rect">
-            <a:avLst/>
-          </a:prstGeom>
-          <a:noFill/>
-        </p:spPr>
-        <p:txBody>
-          <a:bodyPr wrap="square">
-            <a:spAutoFit/>
-          </a:bodyPr>
-          <a:lstStyle/>
-          <a:p>
-            <a:pPr>
-              <a:spcAft>
-                <a:spcPts val="800"/>
-              </a:spcAft>
-            </a:pPr>
-            <a:r>
-              <a:rPr sz="1400">
-                <a:solidFill>
-                  <a:srgbClr val="212121"/>
-                </a:solidFill>
-                <a:hlinkClick r:id="rId2"/>
-              </a:rPr>
-              <a:t>src/irep2/README.md</a:t>
+              <a:rPr sz="2400">
+                <a:solidFill>
+                  <a:srgbClr val="212121"/>
+                </a:solidFill>
+              </a:rPr>
+              <a:t>1. A tool that never raises a false alarm is called …?</a:t>
+            </a:r>
+          </a:p>
+          <a:p>
+            <a:pPr>
+              <a:spcAft>
+                <a:spcPts val="800"/>
+              </a:spcAft>
+            </a:pPr>
+            <a:r>
+              <a:rPr sz="2400">
+                <a:solidFill>
+                  <a:srgbClr val="212121"/>
+                </a:solidFill>
+              </a:rPr>
+              <a:t>2. ESBMC returns UNSAT for C ∧ ¬P at --unwind 10. What do we know?</a:t>
+            </a:r>
+          </a:p>
+          <a:p>
+            <a:pPr>
+              <a:spcAft>
+                <a:spcPts val="800"/>
+              </a:spcAft>
+            </a:pPr>
+            <a:r>
+              <a:rPr sz="2400">
+                <a:solidFill>
+                  <a:srgbClr val="212121"/>
+                </a:solidFill>
+              </a:rPr>
+              <a:t>3. What's inside a counterexample?</a:t>
+            </a:r>
+          </a:p>
+          <a:p>
+            <a:pPr>
+              <a:spcAft>
+                <a:spcPts val="800"/>
+              </a:spcAft>
+            </a:pPr>
+            <a:r>
+              <a:rPr sz="2400">
+                <a:solidFill>
+                  <a:srgbClr val="212121"/>
+                </a:solidFill>
+              </a:rPr>
+              <a:t>4. Which technique proved the A340 flight-control code free of runtime errors?</a:t>
+            </a:r>
+          </a:p>
+          <a:p>
+            <a:pPr>
+              <a:spcAft>
+                <a:spcPts val="800"/>
+              </a:spcAft>
+            </a:pPr>
+            <a:r>
+              <a:rPr sz="2400">
+                <a:solidFill>
+                  <a:srgbClr val="212121"/>
+                </a:solidFill>
+              </a:rPr>
+              <a:t>5. Why can't testing prove the getPassword program safe?</a:t>
             </a:r>
           </a:p>
         </p:txBody>
@@ -13280,8 +13263,8 @@
 </p:sld>
 </file>
 
-<file path=ppt/slides/slide51.xml><?xml version="1.0" encoding="utf-8"?>
-<p:sld xmlns:a="http://schemas.openxmlformats.org/drawingml/2006/main" xmlns:r="http://schemas.openxmlformats.org/officeDocument/2006/relationships" xmlns:p="http://schemas.openxmlformats.org/presentationml/2006/main">
+<file path=ppt/slides/slide54.xml><?xml version="1.0" encoding="utf-8"?>
+<p:sld xmlns:a="http://schemas.openxmlformats.org/drawingml/2006/main" xmlns:p="http://schemas.openxmlformats.org/presentationml/2006/main" xmlns:r="http://schemas.openxmlformats.org/officeDocument/2006/relationships">
   <p:cSld>
     <p:spTree>
       <p:nvGrpSpPr>
@@ -13289,14 +13272,7 @@
         <p:cNvGrpSpPr/>
         <p:nvPr/>
       </p:nvGrpSpPr>
-      <p:grpSpPr>
-        <a:xfrm>
-          <a:off x="0" y="0"/>
-          <a:ext cx="0" cy="0"/>
-          <a:chOff x="0" y="0"/>
-          <a:chExt cx="0" cy="0"/>
-        </a:xfrm>
-      </p:grpSpPr>
+      <p:grpSpPr/>
       <p:sp>
         <p:nvSpPr>
           <p:cNvPr id="2" name="TextBox 1"/>
@@ -13325,7 +13301,7 @@
                   <a:srgbClr val="5A0A7A"/>
                 </a:solidFill>
               </a:rPr>
-              <a:t>Closing quiz</a:t>
+              <a:t>Before Session 2 — 10 minutes of homework</a:t>
             </a:r>
           </a:p>
         </p:txBody>
@@ -13358,72 +13334,91 @@
               </a:spcAft>
             </a:pPr>
             <a:r>
-              <a:rPr sz="2400">
-                <a:solidFill>
-                  <a:srgbClr val="212121"/>
-                </a:solidFill>
-              </a:rPr>
-              <a:t>1. A tool that never raises a false alarm is called …?</a:t>
-            </a:r>
-          </a:p>
-          <a:p>
-            <a:pPr>
-              <a:spcAft>
-                <a:spcPts val="800"/>
-              </a:spcAft>
-            </a:pPr>
-            <a:r>
-              <a:rPr sz="2400">
-                <a:solidFill>
-                  <a:srgbClr val="212121"/>
-                </a:solidFill>
-              </a:rPr>
-              <a:t>2. ESBMC returns UNSAT for C ∧ ¬P at --unwind 10. What do we know?</a:t>
-            </a:r>
-          </a:p>
-          <a:p>
-            <a:pPr>
-              <a:spcAft>
-                <a:spcPts val="800"/>
-              </a:spcAft>
-            </a:pPr>
-            <a:r>
-              <a:rPr sz="2400">
-                <a:solidFill>
-                  <a:srgbClr val="212121"/>
-                </a:solidFill>
-              </a:rPr>
-              <a:t>3. What's inside a counterexample?</a:t>
-            </a:r>
-          </a:p>
-          <a:p>
-            <a:pPr>
-              <a:spcAft>
-                <a:spcPts val="800"/>
-              </a:spcAft>
-            </a:pPr>
-            <a:r>
-              <a:rPr sz="2400">
-                <a:solidFill>
-                  <a:srgbClr val="212121"/>
-                </a:solidFill>
-              </a:rPr>
-              <a:t>4. Which technique proved the A340 flight-control code free of runtime errors?</a:t>
-            </a:r>
-          </a:p>
-          <a:p>
-            <a:pPr>
-              <a:spcAft>
-                <a:spcPts val="800"/>
-              </a:spcAft>
-            </a:pPr>
-            <a:r>
-              <a:rPr sz="2400">
-                <a:solidFill>
-                  <a:srgbClr val="212121"/>
-                </a:solidFill>
-              </a:rPr>
-              <a:t>5. Why can't testing prove the getPassword program safe?</a:t>
+              <a:rPr sz="2200">
+                <a:solidFill>
+                  <a:srgbClr val="212121"/>
+                </a:solidFill>
+              </a:rPr>
+              <a:t>Follow handouts/setup.md in the repo:</a:t>
+            </a:r>
+          </a:p>
+          <a:p>
+            <a:pPr>
+              <a:spcAft>
+                <a:spcPts val="0"/>
+              </a:spcAft>
+            </a:pPr>
+            <a:r>
+              <a:rPr sz="1800">
+                <a:solidFill>
+                  <a:srgbClr val="212121"/>
+                </a:solidFill>
+                <a:latin typeface="Courier New"/>
+              </a:rPr>
+              <a:t>1.  pip install z3-solver</a:t>
+            </a:r>
+          </a:p>
+          <a:p>
+            <a:pPr>
+              <a:spcAft>
+                <a:spcPts val="0"/>
+              </a:spcAft>
+            </a:pPr>
+            <a:r>
+              <a:rPr sz="1800">
+                <a:solidFill>
+                  <a:srgbClr val="212121"/>
+                </a:solidFill>
+                <a:latin typeface="Courier New"/>
+              </a:rPr>
+              <a:t>2.  download ESBMC: github.com/esbmc/esbmc/releases</a:t>
+            </a:r>
+          </a:p>
+          <a:p>
+            <a:pPr>
+              <a:spcAft>
+                <a:spcPts val="0"/>
+              </a:spcAft>
+            </a:pPr>
+            <a:r>
+              <a:rPr sz="1800">
+                <a:solidFill>
+                  <a:srgbClr val="212121"/>
+                </a:solidFill>
+                <a:latin typeface="Courier New"/>
+              </a:rPr>
+              <a:t>3.  smoke test:  esbmc labs/lab4/float.c</a:t>
+            </a:r>
+          </a:p>
+          <a:p>
+            <a:pPr>
+              <a:spcAft>
+                <a:spcPts val="0"/>
+              </a:spcAft>
+            </a:pPr>
+            <a:r>
+              <a:rPr sz="1800">
+                <a:solidFill>
+                  <a:srgbClr val="212121"/>
+                </a:solidFill>
+                <a:latin typeface="Courier New"/>
+              </a:rPr>
+              <a:t>    → should print VERIFICATION FAILED (yes, failed — that's the point)</a:t>
+            </a:r>
+          </a:p>
+          <a:p>
+            <a:pPr>
+              <a:spcAft>
+                <a:spcPts val="800"/>
+              </a:spcAft>
+            </a:pPr>
+            <a:r>
+              <a:rPr sz="2200">
+                <a:solidFill>
+                  <a:srgbClr val="212121"/>
+                </a:solidFill>
+              </a:rPr>
+              <a:t>Can't make it work? Come at 17:45 — we'll fix it together.</a:t>
             </a:r>
           </a:p>
         </p:txBody>
@@ -13436,8 +13431,8 @@
 </p:sld>
 </file>
 
-<file path=ppt/slides/slide52.xml><?xml version="1.0" encoding="utf-8"?>
-<p:sld xmlns:a="http://schemas.openxmlformats.org/drawingml/2006/main" xmlns:r="http://schemas.openxmlformats.org/officeDocument/2006/relationships" xmlns:p="http://schemas.openxmlformats.org/presentationml/2006/main">
+<file path=ppt/slides/slide6.xml><?xml version="1.0" encoding="utf-8"?>
+<p:sld xmlns:a="http://schemas.openxmlformats.org/drawingml/2006/main" xmlns:p="http://schemas.openxmlformats.org/presentationml/2006/main" xmlns:r="http://schemas.openxmlformats.org/officeDocument/2006/relationships">
   <p:cSld>
     <p:spTree>
       <p:nvGrpSpPr>
@@ -13445,14 +13440,7 @@
         <p:cNvGrpSpPr/>
         <p:nvPr/>
       </p:nvGrpSpPr>
-      <p:grpSpPr>
-        <a:xfrm>
-          <a:off x="0" y="0"/>
-          <a:ext cx="0" cy="0"/>
-          <a:chOff x="0" y="0"/>
-          <a:chExt cx="0" cy="0"/>
-        </a:xfrm>
-      </p:grpSpPr>
+      <p:grpSpPr/>
       <p:sp>
         <p:nvSpPr>
           <p:cNvPr id="2" name="TextBox 1"/>
@@ -13481,181 +13469,6 @@
                   <a:srgbClr val="5A0A7A"/>
                 </a:solidFill>
               </a:rPr>
-              <a:t>Before Session 2 — 10 minutes of homework</a:t>
-            </a:r>
-          </a:p>
-        </p:txBody>
-      </p:sp>
-      <p:sp>
-        <p:nvSpPr>
-          <p:cNvPr id="3" name="TextBox 2"/>
-          <p:cNvSpPr txBox="1"/>
-          <p:nvPr/>
-        </p:nvSpPr>
-        <p:spPr>
-          <a:xfrm>
-            <a:off x="731520" y="1463040"/>
-            <a:ext cx="10789920" cy="5120640"/>
-          </a:xfrm>
-          <a:prstGeom prst="rect">
-            <a:avLst/>
-          </a:prstGeom>
-          <a:noFill/>
-        </p:spPr>
-        <p:txBody>
-          <a:bodyPr wrap="square">
-            <a:spAutoFit/>
-          </a:bodyPr>
-          <a:lstStyle/>
-          <a:p>
-            <a:pPr>
-              <a:spcAft>
-                <a:spcPts val="800"/>
-              </a:spcAft>
-            </a:pPr>
-            <a:r>
-              <a:rPr sz="2200">
-                <a:solidFill>
-                  <a:srgbClr val="212121"/>
-                </a:solidFill>
-              </a:rPr>
-              <a:t>Follow handouts/setup.md in the repo:</a:t>
-            </a:r>
-          </a:p>
-          <a:p>
-            <a:pPr>
-              <a:spcAft>
-                <a:spcPts val="0"/>
-              </a:spcAft>
-            </a:pPr>
-            <a:r>
-              <a:rPr sz="1800">
-                <a:solidFill>
-                  <a:srgbClr val="212121"/>
-                </a:solidFill>
-                <a:latin typeface="Courier New"/>
-              </a:rPr>
-              <a:t>1.  pip install z3-solver</a:t>
-            </a:r>
-          </a:p>
-          <a:p>
-            <a:pPr>
-              <a:spcAft>
-                <a:spcPts val="0"/>
-              </a:spcAft>
-            </a:pPr>
-            <a:r>
-              <a:rPr sz="1800">
-                <a:solidFill>
-                  <a:srgbClr val="212121"/>
-                </a:solidFill>
-                <a:latin typeface="Courier New"/>
-              </a:rPr>
-              <a:t>2.  download ESBMC: github.com/esbmc/esbmc/releases</a:t>
-            </a:r>
-          </a:p>
-          <a:p>
-            <a:pPr>
-              <a:spcAft>
-                <a:spcPts val="0"/>
-              </a:spcAft>
-            </a:pPr>
-            <a:r>
-              <a:rPr sz="1800">
-                <a:solidFill>
-                  <a:srgbClr val="212121"/>
-                </a:solidFill>
-                <a:latin typeface="Courier New"/>
-              </a:rPr>
-              <a:t>3.  smoke test:  esbmc labs/lab4/float.c</a:t>
-            </a:r>
-          </a:p>
-          <a:p>
-            <a:pPr>
-              <a:spcAft>
-                <a:spcPts val="0"/>
-              </a:spcAft>
-            </a:pPr>
-            <a:r>
-              <a:rPr sz="1800">
-                <a:solidFill>
-                  <a:srgbClr val="212121"/>
-                </a:solidFill>
-                <a:latin typeface="Courier New"/>
-              </a:rPr>
-              <a:t>    → should print VERIFICATION FAILED (yes, failed — that's the point)</a:t>
-            </a:r>
-          </a:p>
-          <a:p>
-            <a:pPr>
-              <a:spcAft>
-                <a:spcPts val="800"/>
-              </a:spcAft>
-            </a:pPr>
-            <a:r>
-              <a:rPr sz="2200">
-                <a:solidFill>
-                  <a:srgbClr val="212121"/>
-                </a:solidFill>
-              </a:rPr>
-              <a:t>Can't make it work? Come at 17:45 — we'll fix it together.</a:t>
-            </a:r>
-          </a:p>
-        </p:txBody>
-      </p:sp>
-    </p:spTree>
-  </p:cSld>
-  <p:clrMapOvr>
-    <a:masterClrMapping/>
-  </p:clrMapOvr>
-</p:sld>
-</file>
-
-<file path=ppt/slides/slide6.xml><?xml version="1.0" encoding="utf-8"?>
-<p:sld xmlns:a="http://schemas.openxmlformats.org/drawingml/2006/main" xmlns:r="http://schemas.openxmlformats.org/officeDocument/2006/relationships" xmlns:p="http://schemas.openxmlformats.org/presentationml/2006/main">
-  <p:cSld>
-    <p:spTree>
-      <p:nvGrpSpPr>
-        <p:cNvPr id="1" name=""/>
-        <p:cNvGrpSpPr/>
-        <p:nvPr/>
-      </p:nvGrpSpPr>
-      <p:grpSpPr>
-        <a:xfrm>
-          <a:off x="0" y="0"/>
-          <a:ext cx="0" cy="0"/>
-          <a:chOff x="0" y="0"/>
-          <a:chExt cx="0" cy="0"/>
-        </a:xfrm>
-      </p:grpSpPr>
-      <p:sp>
-        <p:nvSpPr>
-          <p:cNvPr id="2" name="TextBox 1"/>
-          <p:cNvSpPr txBox="1"/>
-          <p:nvPr/>
-        </p:nvSpPr>
-        <p:spPr>
-          <a:xfrm>
-            <a:off x="548640" y="365760"/>
-            <a:ext cx="11064240" cy="1005840"/>
-          </a:xfrm>
-          <a:prstGeom prst="rect">
-            <a:avLst/>
-          </a:prstGeom>
-          <a:noFill/>
-        </p:spPr>
-        <p:txBody>
-          <a:bodyPr wrap="square">
-            <a:spAutoFit/>
-          </a:bodyPr>
-          <a:lstStyle/>
-          <a:p>
-            <a:r>
-              <a:rPr sz="3600" b="1">
-                <a:solidFill>
-                  <a:srgbClr val="5A0A7A"/>
-                </a:solidFill>
-              </a:rPr>
               <a:t>What gets() does to the stack</a:t>
             </a:r>
           </a:p>
@@ -13671,7 +13484,7 @@
         </p:nvGraphicFramePr>
         <p:xfrm>
           <a:off x="731520" y="1463040"/>
-          <a:ext cx="10698480" cy="1584960"/>
+          <a:ext cx="10698480" cy="1463040"/>
         </p:xfrm>
         <a:graphic>
           <a:graphicData uri="http://schemas.openxmlformats.org/drawingml/2006/table">
@@ -13680,20 +13493,8 @@
                 <a:tableStyleId>{5C22544A-7EE6-4342-B048-85BDC9FD1C3A}</a:tableStyleId>
               </a:tblPr>
               <a:tblGrid>
-                <a:gridCol w="3840480">
-                  <a:extLst>
-                    <a:ext uri="{9D8B030D-6E8A-4147-A177-3AD203B41FA5}">
-                      <a16:colId xmlns:a16="http://schemas.microsoft.com/office/drawing/2014/main" val="20000"/>
-                    </a:ext>
-                  </a:extLst>
-                </a:gridCol>
-                <a:gridCol w="6858000">
-                  <a:extLst>
-                    <a:ext uri="{9D8B030D-6E8A-4147-A177-3AD203B41FA5}">
-                      <a16:colId xmlns:a16="http://schemas.microsoft.com/office/drawing/2014/main" val="20001"/>
-                    </a:ext>
-                  </a:extLst>
-                </a:gridCol>
+                <a:gridCol w="3840480"/>
+                <a:gridCol w="6858000"/>
               </a:tblGrid>
               <a:tr h="365760">
                 <a:tc>
@@ -13713,17 +13514,10 @@
                   <a:txBody>
                     <a:bodyPr/>
                     <a:lstStyle/>
-                    <a:p>
-                      <a:endParaRPr/>
-                    </a:p>
+                    <a:p/>
                   </a:txBody>
                   <a:tcPr/>
                 </a:tc>
-                <a:extLst>
-                  <a:ext uri="{0D108BD9-81ED-4DB2-BD59-A6C34878D82A}">
-                    <a16:rowId xmlns:a16="http://schemas.microsoft.com/office/drawing/2014/main" val="10000"/>
-                  </a:ext>
-                </a:extLst>
               </a:tr>
               <a:tr h="365760">
                 <a:tc>
@@ -13752,11 +13546,6 @@
                   </a:txBody>
                   <a:tcPr/>
                 </a:tc>
-                <a:extLst>
-                  <a:ext uri="{0D108BD9-81ED-4DB2-BD59-A6C34878D82A}">
-                    <a16:rowId xmlns:a16="http://schemas.microsoft.com/office/drawing/2014/main" val="10001"/>
-                  </a:ext>
-                </a:extLst>
               </a:tr>
               <a:tr h="365760">
                 <a:tc>
@@ -13785,11 +13574,6 @@
                   </a:txBody>
                   <a:tcPr/>
                 </a:tc>
-                <a:extLst>
-                  <a:ext uri="{0D108BD9-81ED-4DB2-BD59-A6C34878D82A}">
-                    <a16:rowId xmlns:a16="http://schemas.microsoft.com/office/drawing/2014/main" val="10002"/>
-                  </a:ext>
-                </a:extLst>
               </a:tr>
               <a:tr h="365760">
                 <a:tc>
@@ -13818,11 +13602,6 @@
                   </a:txBody>
                   <a:tcPr/>
                 </a:tc>
-                <a:extLst>
-                  <a:ext uri="{0D108BD9-81ED-4DB2-BD59-A6C34878D82A}">
-                    <a16:rowId xmlns:a16="http://schemas.microsoft.com/office/drawing/2014/main" val="10003"/>
-                  </a:ext>
-                </a:extLst>
               </a:tr>
             </a:tbl>
           </a:graphicData>
@@ -13920,7 +13699,7 @@
 </file>
 
 <file path=ppt/slides/slide7.xml><?xml version="1.0" encoding="utf-8"?>
-<p:sld xmlns:a="http://schemas.openxmlformats.org/drawingml/2006/main" xmlns:r="http://schemas.openxmlformats.org/officeDocument/2006/relationships" xmlns:p="http://schemas.openxmlformats.org/presentationml/2006/main">
+<p:sld xmlns:a="http://schemas.openxmlformats.org/drawingml/2006/main" xmlns:p="http://schemas.openxmlformats.org/presentationml/2006/main" xmlns:r="http://schemas.openxmlformats.org/officeDocument/2006/relationships">
   <p:cSld>
     <p:spTree>
       <p:nvGrpSpPr>
@@ -13928,14 +13707,7 @@
         <p:cNvGrpSpPr/>
         <p:nvPr/>
       </p:nvGrpSpPr>
-      <p:grpSpPr>
-        <a:xfrm>
-          <a:off x="0" y="0"/>
-          <a:ext cx="0" cy="0"/>
-          <a:chOff x="0" y="0"/>
-          <a:chExt cx="0" cy="0"/>
-        </a:xfrm>
-      </p:grpSpPr>
+      <p:grpSpPr/>
       <p:sp>
         <p:nvSpPr>
           <p:cNvPr id="2" name="TextBox 1"/>
@@ -14012,12 +13784,15 @@
                 <a:spcPts val="0"/>
               </a:spcAft>
             </a:pPr>
-            <a:endParaRPr sz="1800">
-              <a:solidFill>
-                <a:srgbClr val="212121"/>
-              </a:solidFill>
-              <a:latin typeface="Courier New"/>
-            </a:endParaRPr>
+            <a:r>
+              <a:rPr sz="1800">
+                <a:solidFill>
+                  <a:srgbClr val="212121"/>
+                </a:solidFill>
+                <a:latin typeface="Courier New"/>
+              </a:rPr>
+              <a:t/>
+            </a:r>
           </a:p>
           <a:p>
             <a:pPr>
@@ -14105,12 +13880,15 @@
                 <a:spcPts val="0"/>
               </a:spcAft>
             </a:pPr>
-            <a:endParaRPr sz="1800">
-              <a:solidFill>
-                <a:srgbClr val="212121"/>
-              </a:solidFill>
-              <a:latin typeface="Courier New"/>
-            </a:endParaRPr>
+            <a:r>
+              <a:rPr sz="1800">
+                <a:solidFill>
+                  <a:srgbClr val="212121"/>
+                </a:solidFill>
+                <a:latin typeface="Courier New"/>
+              </a:rPr>
+              <a:t/>
+            </a:r>
           </a:p>
           <a:p>
             <a:pPr>
@@ -14134,12 +13912,14 @@
                 <a:spcPts val="800"/>
               </a:spcAft>
             </a:pPr>
-            <a:endParaRPr sz="1800">
-              <a:solidFill>
-                <a:srgbClr val="212121"/>
-              </a:solidFill>
-              <a:latin typeface="Courier New"/>
-            </a:endParaRPr>
+            <a:r>
+              <a:rPr sz="2200">
+                <a:solidFill>
+                  <a:srgbClr val="212121"/>
+                </a:solidFill>
+              </a:rPr>
+              <a:t/>
+            </a:r>
           </a:p>
           <a:p>
             <a:pPr>
@@ -14167,7 +13947,7 @@
 </file>
 
 <file path=ppt/slides/slide8.xml><?xml version="1.0" encoding="utf-8"?>
-<p:sld xmlns:a="http://schemas.openxmlformats.org/drawingml/2006/main" xmlns:r="http://schemas.openxmlformats.org/officeDocument/2006/relationships" xmlns:p="http://schemas.openxmlformats.org/presentationml/2006/main">
+<p:sld xmlns:a="http://schemas.openxmlformats.org/drawingml/2006/main" xmlns:p="http://schemas.openxmlformats.org/presentationml/2006/main" xmlns:r="http://schemas.openxmlformats.org/officeDocument/2006/relationships">
   <p:cSld>
     <p:spTree>
       <p:nvGrpSpPr>
@@ -14175,14 +13955,7 @@
         <p:cNvGrpSpPr/>
         <p:nvPr/>
       </p:nvGrpSpPr>
-      <p:grpSpPr>
-        <a:xfrm>
-          <a:off x="0" y="0"/>
-          <a:ext cx="0" cy="0"/>
-          <a:chOff x="0" y="0"/>
-          <a:chExt cx="0" cy="0"/>
-        </a:xfrm>
-      </p:grpSpPr>
+      <p:grpSpPr/>
       <p:sp>
         <p:nvSpPr>
           <p:cNvPr id="2" name="TextBox 1"/>
@@ -14338,12 +14111,15 @@
                 <a:spcPts val="0"/>
               </a:spcAft>
             </a:pPr>
-            <a:endParaRPr sz="1600">
-              <a:solidFill>
-                <a:srgbClr val="212121"/>
-              </a:solidFill>
-              <a:latin typeface="Courier New"/>
-            </a:endParaRPr>
+            <a:r>
+              <a:rPr sz="1600">
+                <a:solidFill>
+                  <a:srgbClr val="212121"/>
+                </a:solidFill>
+                <a:latin typeface="Courier New"/>
+              </a:rPr>
+              <a:t/>
+            </a:r>
           </a:p>
           <a:p>
             <a:pPr>
@@ -14383,12 +14159,15 @@
                 <a:spcPts val="0"/>
               </a:spcAft>
             </a:pPr>
-            <a:endParaRPr sz="1600">
-              <a:solidFill>
-                <a:srgbClr val="212121"/>
-              </a:solidFill>
-              <a:latin typeface="Courier New"/>
-            </a:endParaRPr>
+            <a:r>
+              <a:rPr sz="1600">
+                <a:solidFill>
+                  <a:srgbClr val="212121"/>
+                </a:solidFill>
+                <a:latin typeface="Courier New"/>
+              </a:rPr>
+              <a:t/>
+            </a:r>
           </a:p>
           <a:p>
             <a:pPr>
@@ -14460,12 +14239,14 @@
                 <a:spcPts val="800"/>
               </a:spcAft>
             </a:pPr>
-            <a:endParaRPr sz="1600">
-              <a:solidFill>
-                <a:srgbClr val="212121"/>
-              </a:solidFill>
-              <a:latin typeface="Courier New"/>
-            </a:endParaRPr>
+            <a:r>
+              <a:rPr sz="2000">
+                <a:solidFill>
+                  <a:srgbClr val="212121"/>
+                </a:solidFill>
+              </a:rPr>
+              <a:t/>
+            </a:r>
           </a:p>
           <a:p>
             <a:pPr>
@@ -14532,7 +14313,7 @@
 </file>
 
 <file path=ppt/slides/slide9.xml><?xml version="1.0" encoding="utf-8"?>
-<p:sld xmlns:a="http://schemas.openxmlformats.org/drawingml/2006/main" xmlns:r="http://schemas.openxmlformats.org/officeDocument/2006/relationships" xmlns:p="http://schemas.openxmlformats.org/presentationml/2006/main">
+<p:sld xmlns:a="http://schemas.openxmlformats.org/drawingml/2006/main" xmlns:p="http://schemas.openxmlformats.org/presentationml/2006/main" xmlns:r="http://schemas.openxmlformats.org/officeDocument/2006/relationships">
   <p:cSld>
     <p:spTree>
       <p:nvGrpSpPr>
@@ -14540,14 +14321,7 @@
         <p:cNvGrpSpPr/>
         <p:nvPr/>
       </p:nvGrpSpPr>
-      <p:grpSpPr>
-        <a:xfrm>
-          <a:off x="0" y="0"/>
-          <a:ext cx="0" cy="0"/>
-          <a:chOff x="0" y="0"/>
-          <a:chExt cx="0" cy="0"/>
-        </a:xfrm>
-      </p:grpSpPr>
+      <p:grpSpPr/>
       <p:sp>
         <p:nvSpPr>
           <p:cNvPr id="2" name="TextBox 1"/>
@@ -14671,12 +14445,15 @@
                 <a:spcPts val="0"/>
               </a:spcAft>
             </a:pPr>
-            <a:endParaRPr sz="1600">
-              <a:solidFill>
-                <a:srgbClr val="212121"/>
-              </a:solidFill>
-              <a:latin typeface="Courier New"/>
-            </a:endParaRPr>
+            <a:r>
+              <a:rPr sz="1600">
+                <a:solidFill>
+                  <a:srgbClr val="212121"/>
+                </a:solidFill>
+                <a:latin typeface="Courier New"/>
+              </a:rPr>
+              <a:t/>
+            </a:r>
           </a:p>
           <a:p>
             <a:pPr>
@@ -14716,12 +14493,15 @@
                 <a:spcPts val="0"/>
               </a:spcAft>
             </a:pPr>
-            <a:endParaRPr sz="1600">
-              <a:solidFill>
-                <a:srgbClr val="212121"/>
-              </a:solidFill>
-              <a:latin typeface="Courier New"/>
-            </a:endParaRPr>
+            <a:r>
+              <a:rPr sz="1600">
+                <a:solidFill>
+                  <a:srgbClr val="212121"/>
+                </a:solidFill>
+                <a:latin typeface="Courier New"/>
+              </a:rPr>
+              <a:t/>
+            </a:r>
           </a:p>
           <a:p>
             <a:pPr>
@@ -14777,12 +14557,14 @@
                 <a:spcPts val="800"/>
               </a:spcAft>
             </a:pPr>
-            <a:endParaRPr sz="1600">
-              <a:solidFill>
-                <a:srgbClr val="212121"/>
-              </a:solidFill>
-              <a:latin typeface="Courier New"/>
-            </a:endParaRPr>
+            <a:r>
+              <a:rPr sz="2000">
+                <a:solidFill>
+                  <a:srgbClr val="212121"/>
+                </a:solidFill>
+              </a:rPr>
+              <a:t/>
+            </a:r>
           </a:p>
           <a:p>
             <a:pPr>

--- a/slides/session1/01-session1-fundamentals.pptx
+++ b/slides/session1/01-session1-fundamentals.pptx
@@ -5,62 +5,62 @@
     <p:sldMasterId id="2147483648" r:id="rId1"/>
   </p:sldMasterIdLst>
   <p:sldIdLst>
-    <p:sldId id="256" r:id="rId7"/>
-    <p:sldId id="257" r:id="rId8"/>
-    <p:sldId id="258" r:id="rId9"/>
-    <p:sldId id="259" r:id="rId10"/>
-    <p:sldId id="260" r:id="rId11"/>
-    <p:sldId id="261" r:id="rId12"/>
-    <p:sldId id="262" r:id="rId13"/>
-    <p:sldId id="263" r:id="rId14"/>
-    <p:sldId id="264" r:id="rId15"/>
-    <p:sldId id="265" r:id="rId16"/>
-    <p:sldId id="266" r:id="rId17"/>
-    <p:sldId id="267" r:id="rId18"/>
-    <p:sldId id="268" r:id="rId19"/>
-    <p:sldId id="269" r:id="rId20"/>
-    <p:sldId id="270" r:id="rId21"/>
-    <p:sldId id="271" r:id="rId22"/>
-    <p:sldId id="272" r:id="rId23"/>
-    <p:sldId id="273" r:id="rId24"/>
-    <p:sldId id="274" r:id="rId25"/>
-    <p:sldId id="275" r:id="rId26"/>
-    <p:sldId id="276" r:id="rId27"/>
-    <p:sldId id="277" r:id="rId28"/>
-    <p:sldId id="278" r:id="rId29"/>
-    <p:sldId id="279" r:id="rId30"/>
-    <p:sldId id="280" r:id="rId31"/>
-    <p:sldId id="281" r:id="rId32"/>
-    <p:sldId id="282" r:id="rId33"/>
-    <p:sldId id="283" r:id="rId34"/>
-    <p:sldId id="284" r:id="rId35"/>
-    <p:sldId id="285" r:id="rId36"/>
-    <p:sldId id="286" r:id="rId37"/>
-    <p:sldId id="287" r:id="rId38"/>
-    <p:sldId id="288" r:id="rId39"/>
-    <p:sldId id="289" r:id="rId40"/>
-    <p:sldId id="290" r:id="rId41"/>
-    <p:sldId id="291" r:id="rId42"/>
-    <p:sldId id="292" r:id="rId43"/>
-    <p:sldId id="293" r:id="rId44"/>
-    <p:sldId id="294" r:id="rId45"/>
-    <p:sldId id="295" r:id="rId46"/>
-    <p:sldId id="296" r:id="rId47"/>
-    <p:sldId id="297" r:id="rId48"/>
-    <p:sldId id="298" r:id="rId49"/>
-    <p:sldId id="299" r:id="rId50"/>
-    <p:sldId id="300" r:id="rId51"/>
-    <p:sldId id="301" r:id="rId52"/>
-    <p:sldId id="302" r:id="rId53"/>
-    <p:sldId id="303" r:id="rId54"/>
-    <p:sldId id="304" r:id="rId55"/>
-    <p:sldId id="305" r:id="rId56"/>
-    <p:sldId id="306" r:id="rId57"/>
-    <p:sldId id="307" r:id="rId58"/>
-    <p:sldId id="308" r:id="rId59"/>
-    <p:sldId id="309" r:id="rId60"/>
+    <p:sldId id="256" r:id="rId2"/>
+    <p:sldId id="257" r:id="rId3"/>
+    <p:sldId id="258" r:id="rId4"/>
+    <p:sldId id="259" r:id="rId5"/>
+    <p:sldId id="260" r:id="rId6"/>
+    <p:sldId id="261" r:id="rId7"/>
+    <p:sldId id="262" r:id="rId8"/>
+    <p:sldId id="263" r:id="rId9"/>
+    <p:sldId id="264" r:id="rId10"/>
+    <p:sldId id="265" r:id="rId11"/>
+    <p:sldId id="266" r:id="rId12"/>
+    <p:sldId id="267" r:id="rId13"/>
+    <p:sldId id="268" r:id="rId14"/>
+    <p:sldId id="269" r:id="rId15"/>
+    <p:sldId id="270" r:id="rId16"/>
+    <p:sldId id="271" r:id="rId17"/>
+    <p:sldId id="272" r:id="rId18"/>
+    <p:sldId id="273" r:id="rId19"/>
+    <p:sldId id="274" r:id="rId20"/>
+    <p:sldId id="275" r:id="rId21"/>
+    <p:sldId id="276" r:id="rId22"/>
+    <p:sldId id="277" r:id="rId23"/>
+    <p:sldId id="278" r:id="rId24"/>
+    <p:sldId id="279" r:id="rId25"/>
+    <p:sldId id="280" r:id="rId26"/>
+    <p:sldId id="281" r:id="rId27"/>
+    <p:sldId id="282" r:id="rId28"/>
+    <p:sldId id="283" r:id="rId29"/>
+    <p:sldId id="284" r:id="rId30"/>
+    <p:sldId id="285" r:id="rId31"/>
+    <p:sldId id="286" r:id="rId32"/>
+    <p:sldId id="287" r:id="rId33"/>
+    <p:sldId id="288" r:id="rId34"/>
+    <p:sldId id="289" r:id="rId35"/>
+    <p:sldId id="290" r:id="rId36"/>
+    <p:sldId id="291" r:id="rId37"/>
+    <p:sldId id="292" r:id="rId38"/>
+    <p:sldId id="293" r:id="rId39"/>
+    <p:sldId id="294" r:id="rId40"/>
+    <p:sldId id="295" r:id="rId41"/>
+    <p:sldId id="296" r:id="rId42"/>
+    <p:sldId id="297" r:id="rId43"/>
+    <p:sldId id="298" r:id="rId44"/>
+    <p:sldId id="299" r:id="rId45"/>
+    <p:sldId id="300" r:id="rId46"/>
+    <p:sldId id="301" r:id="rId47"/>
+    <p:sldId id="302" r:id="rId48"/>
+    <p:sldId id="303" r:id="rId49"/>
+    <p:sldId id="304" r:id="rId50"/>
+    <p:sldId id="305" r:id="rId51"/>
+    <p:sldId id="306" r:id="rId52"/>
+    <p:sldId id="307" r:id="rId53"/>
+    <p:sldId id="308" r:id="rId54"/>
+    <p:sldId id="309" r:id="rId55"/>
   </p:sldIdLst>
-  <p:sldSz cx="12191695" cy="6858000" type="screen4x3"/>
+  <p:sldSz cx="12192000" cy="6858000"/>
   <p:notesSz cx="6858000" cy="9144000"/>
   <p:defaultTextStyle>
     <a:defPPr>
@@ -157,15 +157,38 @@
       </a:defRPr>
     </a:lvl9pPr>
   </p:defaultTextStyle>
+  <p:extLst>
+    <p:ext uri="{EFAFB233-063F-42B5-8137-9DF3F51BA10A}">
+      <p15:sldGuideLst xmlns:p15="http://schemas.microsoft.com/office/powerpoint/2012/main">
+        <p15:guide id="1" orient="horz" pos="2160">
+          <p15:clr>
+            <a:srgbClr val="A4A3A4"/>
+          </p15:clr>
+        </p15:guide>
+        <p15:guide id="2" pos="2880">
+          <p15:clr>
+            <a:srgbClr val="A4A3A4"/>
+          </p15:clr>
+        </p15:guide>
+      </p15:sldGuideLst>
+    </p:ext>
+  </p:extLst>
 </p:presentation>
 </file>
 
 <file path=ppt/charts/chart1.xml><?xml version="1.0" encoding="utf-8"?>
-<c:chartSpace xmlns:c="http://schemas.openxmlformats.org/drawingml/2006/chart" xmlns:a="http://schemas.openxmlformats.org/drawingml/2006/main" xmlns:r="http://schemas.openxmlformats.org/officeDocument/2006/relationships">
+<c:chartSpace xmlns:c="http://schemas.openxmlformats.org/drawingml/2006/chart" xmlns:a="http://schemas.openxmlformats.org/drawingml/2006/main" xmlns:r="http://schemas.openxmlformats.org/officeDocument/2006/relationships" xmlns:c16r2="http://schemas.microsoft.com/office/drawing/2015/06/chart">
   <c:date1904 val="0"/>
+  <c:lang val="en-GB"/>
+  <c:roundedCorners val="1"/>
+  <c:style val="2"/>
   <c:chart>
+    <c:title>
+      <c:overlay val="0"/>
+    </c:title>
     <c:autoTitleDeleted val="0"/>
     <c:plotArea>
+      <c:layout/>
       <c:lineChart>
         <c:grouping val="standard"/>
         <c:varyColors val="0"/>
@@ -261,7 +284,20 @@
             </c:numRef>
           </c:val>
           <c:smooth val="0"/>
+          <c:extLst>
+            <c:ext xmlns:c16="http://schemas.microsoft.com/office/drawing/2014/chart" uri="{C3380CC4-5D6E-409C-BE32-E72D297353CC}">
+              <c16:uniqueId val="{00000000-11F0-1948-BDAE-261F7823F5CE}"/>
+            </c:ext>
+          </c:extLst>
         </c:ser>
+        <c:dLbls>
+          <c:showLegendKey val="0"/>
+          <c:showVal val="0"/>
+          <c:showCatName val="0"/>
+          <c:showSerName val="0"/>
+          <c:showPercent val="0"/>
+          <c:showBubbleSize val="0"/>
+        </c:dLbls>
         <c:marker val="1"/>
         <c:smooth val="0"/>
         <c:axId val="2118791784"/>
@@ -274,6 +310,7 @@
         </c:scaling>
         <c:delete val="0"/>
         <c:axPos val="b"/>
+        <c:numFmt formatCode="General" sourceLinked="0"/>
         <c:majorTickMark val="out"/>
         <c:minorTickMark val="none"/>
         <c:tickLblPos val="nextTo"/>
@@ -284,6 +321,7 @@
             <a:pPr>
               <a:defRPr sz="1200"/>
             </a:pPr>
+            <a:endParaRPr lang="en-US"/>
           </a:p>
         </c:txPr>
         <c:crossAx val="2140495176"/>
@@ -295,10 +333,13 @@
       </c:catAx>
       <c:valAx>
         <c:axId val="2140495176"/>
-        <c:scaling/>
+        <c:scaling>
+          <c:orientation val="minMax"/>
+        </c:scaling>
         <c:delete val="0"/>
         <c:axPos val="l"/>
         <c:majorGridlines/>
+        <c:numFmt formatCode="General" sourceLinked="1"/>
         <c:majorTickMark val="out"/>
         <c:minorTickMark val="none"/>
         <c:tickLblPos val="nextTo"/>
@@ -309,10 +350,12 @@
             <a:pPr>
               <a:defRPr sz="1200"/>
             </a:pPr>
+            <a:endParaRPr lang="en-US"/>
           </a:p>
         </c:txPr>
         <c:crossAx val="2118791784"/>
         <c:crosses val="autoZero"/>
+        <c:crossBetween val="between"/>
       </c:valAx>
     </c:plotArea>
     <c:plotVisOnly val="1"/>
@@ -336,14 +379,22 @@
 </file>
 
 <file path=ppt/charts/chart2.xml><?xml version="1.0" encoding="utf-8"?>
-<c:chartSpace xmlns:c="http://schemas.openxmlformats.org/drawingml/2006/chart" xmlns:a="http://schemas.openxmlformats.org/drawingml/2006/main" xmlns:r="http://schemas.openxmlformats.org/officeDocument/2006/relationships">
+<c:chartSpace xmlns:c="http://schemas.openxmlformats.org/drawingml/2006/chart" xmlns:a="http://schemas.openxmlformats.org/drawingml/2006/main" xmlns:r="http://schemas.openxmlformats.org/officeDocument/2006/relationships" xmlns:c16r2="http://schemas.microsoft.com/office/drawing/2015/06/chart">
   <c:date1904 val="0"/>
+  <c:lang val="en-GB"/>
+  <c:roundedCorners val="1"/>
+  <c:style val="2"/>
   <c:chart>
+    <c:title>
+      <c:overlay val="0"/>
+    </c:title>
     <c:autoTitleDeleted val="0"/>
     <c:plotArea>
+      <c:layout/>
       <c:barChart>
         <c:barDir val="bar"/>
         <c:grouping val="clustered"/>
+        <c:varyColors val="1"/>
         <c:ser>
           <c:idx val="0"/>
           <c:order val="0"/>
@@ -358,6 +409,7 @@
               </c:strCache>
             </c:strRef>
           </c:tx>
+          <c:invertIfNegative val="1"/>
           <c:cat>
             <c:strRef>
               <c:f>Sheet1!$A$2:$A$11</c:f>
@@ -412,7 +464,7 @@
                   <c:v>7.88</c:v>
                 </c:pt>
                 <c:pt idx="3">
-                  <c:v>8.47</c:v>
+                  <c:v>8.4700000000000006</c:v>
                 </c:pt>
                 <c:pt idx="4">
                   <c:v>8.99</c:v>
@@ -435,7 +487,21 @@
               </c:numCache>
             </c:numRef>
           </c:val>
+          <c:extLst>
+            <c:ext xmlns:c16="http://schemas.microsoft.com/office/drawing/2014/chart" uri="{C3380CC4-5D6E-409C-BE32-E72D297353CC}">
+              <c16:uniqueId val="{00000000-3865-8246-B023-CCC09D27C1E9}"/>
+            </c:ext>
+          </c:extLst>
         </c:ser>
+        <c:dLbls>
+          <c:showLegendKey val="0"/>
+          <c:showVal val="0"/>
+          <c:showCatName val="0"/>
+          <c:showSerName val="0"/>
+          <c:showPercent val="0"/>
+          <c:showBubbleSize val="0"/>
+        </c:dLbls>
+        <c:gapWidth val="150"/>
         <c:axId val="-2068027336"/>
         <c:axId val="-2113994440"/>
       </c:barChart>
@@ -446,6 +512,7 @@
         </c:scaling>
         <c:delete val="0"/>
         <c:axPos val="l"/>
+        <c:numFmt formatCode="General" sourceLinked="0"/>
         <c:majorTickMark val="out"/>
         <c:minorTickMark val="none"/>
         <c:tickLblPos val="nextTo"/>
@@ -456,6 +523,7 @@
             <a:pPr>
               <a:defRPr sz="1200"/>
             </a:pPr>
+            <a:endParaRPr lang="en-US"/>
           </a:p>
         </c:txPr>
         <c:crossAx val="-2113994440"/>
@@ -467,10 +535,13 @@
       </c:catAx>
       <c:valAx>
         <c:axId val="-2113994440"/>
-        <c:scaling/>
+        <c:scaling>
+          <c:orientation val="minMax"/>
+        </c:scaling>
         <c:delete val="0"/>
         <c:axPos val="b"/>
         <c:majorGridlines/>
+        <c:numFmt formatCode="General" sourceLinked="1"/>
         <c:majorTickMark val="out"/>
         <c:minorTickMark val="none"/>
         <c:tickLblPos val="nextTo"/>
@@ -481,13 +552,17 @@
             <a:pPr>
               <a:defRPr sz="1200"/>
             </a:pPr>
+            <a:endParaRPr lang="en-US"/>
           </a:p>
         </c:txPr>
         <c:crossAx val="-2068027336"/>
         <c:crosses val="autoZero"/>
+        <c:crossBetween val="between"/>
       </c:valAx>
     </c:plotArea>
+    <c:plotVisOnly val="1"/>
     <c:dispBlanksAs val="gap"/>
+    <c:showDLblsOverMax val="1"/>
   </c:chart>
   <c:txPr>
     <a:bodyPr/>
@@ -543,10 +618,9 @@
           <a:lstStyle/>
           <a:p>
             <a:r>
-              <a:rPr lang="en-US" smtClean="0"/>
+              <a:rPr lang="en-US"/>
               <a:t>Click to edit Master title style</a:t>
             </a:r>
-            <a:endParaRPr lang="en-US"/>
           </a:p>
         </p:txBody>
       </p:sp>
@@ -662,10 +736,9 @@
           </a:lstStyle>
           <a:p>
             <a:r>
-              <a:rPr lang="en-US" smtClean="0"/>
+              <a:rPr lang="en-US"/>
               <a:t>Click to edit Master subtitle style</a:t>
             </a:r>
-            <a:endParaRPr lang="en-US"/>
           </a:p>
         </p:txBody>
       </p:sp>
@@ -686,7 +759,7 @@
           <a:p>
             <a:fld id="{5BCAD085-E8A6-8845-BD4E-CB4CCA059FC4}" type="datetimeFigureOut">
               <a:rPr lang="en-US" smtClean="0"/>
-              <a:t>1/27/13</a:t>
+              <a:t>6/13/26</a:t>
             </a:fld>
             <a:endParaRPr lang="en-US"/>
           </a:p>
@@ -780,10 +853,9 @@
           <a:lstStyle/>
           <a:p>
             <a:r>
-              <a:rPr lang="en-US" smtClean="0"/>
+              <a:rPr lang="en-US"/>
               <a:t>Click to edit Master title style</a:t>
             </a:r>
-            <a:endParaRPr lang="en-US"/>
           </a:p>
         </p:txBody>
       </p:sp>
@@ -804,38 +876,37 @@
           <a:p>
             <a:pPr lvl="0"/>
             <a:r>
-              <a:rPr lang="en-US" smtClean="0"/>
+              <a:rPr lang="en-US"/>
               <a:t>Click to edit Master text styles</a:t>
             </a:r>
           </a:p>
           <a:p>
             <a:pPr lvl="1"/>
             <a:r>
-              <a:rPr lang="en-US" smtClean="0"/>
+              <a:rPr lang="en-US"/>
               <a:t>Second level</a:t>
             </a:r>
           </a:p>
           <a:p>
             <a:pPr lvl="2"/>
             <a:r>
-              <a:rPr lang="en-US" smtClean="0"/>
+              <a:rPr lang="en-US"/>
               <a:t>Third level</a:t>
             </a:r>
           </a:p>
           <a:p>
             <a:pPr lvl="3"/>
             <a:r>
-              <a:rPr lang="en-US" smtClean="0"/>
+              <a:rPr lang="en-US"/>
               <a:t>Fourth level</a:t>
             </a:r>
           </a:p>
           <a:p>
             <a:pPr lvl="4"/>
             <a:r>
-              <a:rPr lang="en-US" smtClean="0"/>
+              <a:rPr lang="en-US"/>
               <a:t>Fifth level</a:t>
             </a:r>
-            <a:endParaRPr lang="en-US"/>
           </a:p>
         </p:txBody>
       </p:sp>
@@ -856,7 +927,7 @@
           <a:p>
             <a:fld id="{5BCAD085-E8A6-8845-BD4E-CB4CCA059FC4}" type="datetimeFigureOut">
               <a:rPr lang="en-US" smtClean="0"/>
-              <a:t>1/27/13</a:t>
+              <a:t>6/13/26</a:t>
             </a:fld>
             <a:endParaRPr lang="en-US"/>
           </a:p>
@@ -955,10 +1026,9 @@
           <a:lstStyle/>
           <a:p>
             <a:r>
-              <a:rPr lang="en-US" smtClean="0"/>
+              <a:rPr lang="en-US"/>
               <a:t>Click to edit Master title style</a:t>
             </a:r>
-            <a:endParaRPr lang="en-US"/>
           </a:p>
         </p:txBody>
       </p:sp>
@@ -984,38 +1054,37 @@
           <a:p>
             <a:pPr lvl="0"/>
             <a:r>
-              <a:rPr lang="en-US" smtClean="0"/>
+              <a:rPr lang="en-US"/>
               <a:t>Click to edit Master text styles</a:t>
             </a:r>
           </a:p>
           <a:p>
             <a:pPr lvl="1"/>
             <a:r>
-              <a:rPr lang="en-US" smtClean="0"/>
+              <a:rPr lang="en-US"/>
               <a:t>Second level</a:t>
             </a:r>
           </a:p>
           <a:p>
             <a:pPr lvl="2"/>
             <a:r>
-              <a:rPr lang="en-US" smtClean="0"/>
+              <a:rPr lang="en-US"/>
               <a:t>Third level</a:t>
             </a:r>
           </a:p>
           <a:p>
             <a:pPr lvl="3"/>
             <a:r>
-              <a:rPr lang="en-US" smtClean="0"/>
+              <a:rPr lang="en-US"/>
               <a:t>Fourth level</a:t>
             </a:r>
           </a:p>
           <a:p>
             <a:pPr lvl="4"/>
             <a:r>
-              <a:rPr lang="en-US" smtClean="0"/>
+              <a:rPr lang="en-US"/>
               <a:t>Fifth level</a:t>
             </a:r>
-            <a:endParaRPr lang="en-US"/>
           </a:p>
         </p:txBody>
       </p:sp>
@@ -1036,7 +1105,7 @@
           <a:p>
             <a:fld id="{5BCAD085-E8A6-8845-BD4E-CB4CCA059FC4}" type="datetimeFigureOut">
               <a:rPr lang="en-US" smtClean="0"/>
-              <a:t>1/27/13</a:t>
+              <a:t>6/13/26</a:t>
             </a:fld>
             <a:endParaRPr lang="en-US"/>
           </a:p>
@@ -1130,10 +1199,9 @@
           <a:lstStyle/>
           <a:p>
             <a:r>
-              <a:rPr lang="en-US" smtClean="0"/>
+              <a:rPr lang="en-US"/>
               <a:t>Click to edit Master title style</a:t>
             </a:r>
-            <a:endParaRPr lang="en-US"/>
           </a:p>
         </p:txBody>
       </p:sp>
@@ -1154,38 +1222,37 @@
           <a:p>
             <a:pPr lvl="0"/>
             <a:r>
-              <a:rPr lang="en-US" smtClean="0"/>
+              <a:rPr lang="en-US"/>
               <a:t>Click to edit Master text styles</a:t>
             </a:r>
           </a:p>
           <a:p>
             <a:pPr lvl="1"/>
             <a:r>
-              <a:rPr lang="en-US" smtClean="0"/>
+              <a:rPr lang="en-US"/>
               <a:t>Second level</a:t>
             </a:r>
           </a:p>
           <a:p>
             <a:pPr lvl="2"/>
             <a:r>
-              <a:rPr lang="en-US" smtClean="0"/>
+              <a:rPr lang="en-US"/>
               <a:t>Third level</a:t>
             </a:r>
           </a:p>
           <a:p>
             <a:pPr lvl="3"/>
             <a:r>
-              <a:rPr lang="en-US" smtClean="0"/>
+              <a:rPr lang="en-US"/>
               <a:t>Fourth level</a:t>
             </a:r>
           </a:p>
           <a:p>
             <a:pPr lvl="4"/>
             <a:r>
-              <a:rPr lang="en-US" smtClean="0"/>
+              <a:rPr lang="en-US"/>
               <a:t>Fifth level</a:t>
             </a:r>
-            <a:endParaRPr lang="en-US"/>
           </a:p>
         </p:txBody>
       </p:sp>
@@ -1206,7 +1273,7 @@
           <a:p>
             <a:fld id="{5BCAD085-E8A6-8845-BD4E-CB4CCA059FC4}" type="datetimeFigureOut">
               <a:rPr lang="en-US" smtClean="0"/>
-              <a:t>1/27/13</a:t>
+              <a:t>6/13/26</a:t>
             </a:fld>
             <a:endParaRPr lang="en-US"/>
           </a:p>
@@ -1309,10 +1376,9 @@
           </a:lstStyle>
           <a:p>
             <a:r>
-              <a:rPr lang="en-US" smtClean="0"/>
+              <a:rPr lang="en-US"/>
               <a:t>Click to edit Master title style</a:t>
             </a:r>
-            <a:endParaRPr lang="en-US"/>
           </a:p>
         </p:txBody>
       </p:sp>
@@ -1429,7 +1495,7 @@
           <a:p>
             <a:pPr lvl="0"/>
             <a:r>
-              <a:rPr lang="en-US" smtClean="0"/>
+              <a:rPr lang="en-US"/>
               <a:t>Click to edit Master text styles</a:t>
             </a:r>
           </a:p>
@@ -1452,7 +1518,7 @@
           <a:p>
             <a:fld id="{5BCAD085-E8A6-8845-BD4E-CB4CCA059FC4}" type="datetimeFigureOut">
               <a:rPr lang="en-US" smtClean="0"/>
-              <a:t>1/27/13</a:t>
+              <a:t>6/13/26</a:t>
             </a:fld>
             <a:endParaRPr lang="en-US"/>
           </a:p>
@@ -1546,10 +1612,9 @@
           <a:lstStyle/>
           <a:p>
             <a:r>
-              <a:rPr lang="en-US" smtClean="0"/>
+              <a:rPr lang="en-US"/>
               <a:t>Click to edit Master title style</a:t>
             </a:r>
-            <a:endParaRPr lang="en-US"/>
           </a:p>
         </p:txBody>
       </p:sp>
@@ -1603,38 +1668,37 @@
           <a:p>
             <a:pPr lvl="0"/>
             <a:r>
-              <a:rPr lang="en-US" smtClean="0"/>
+              <a:rPr lang="en-US"/>
               <a:t>Click to edit Master text styles</a:t>
             </a:r>
           </a:p>
           <a:p>
             <a:pPr lvl="1"/>
             <a:r>
-              <a:rPr lang="en-US" smtClean="0"/>
+              <a:rPr lang="en-US"/>
               <a:t>Second level</a:t>
             </a:r>
           </a:p>
           <a:p>
             <a:pPr lvl="2"/>
             <a:r>
-              <a:rPr lang="en-US" smtClean="0"/>
+              <a:rPr lang="en-US"/>
               <a:t>Third level</a:t>
             </a:r>
           </a:p>
           <a:p>
             <a:pPr lvl="3"/>
             <a:r>
-              <a:rPr lang="en-US" smtClean="0"/>
+              <a:rPr lang="en-US"/>
               <a:t>Fourth level</a:t>
             </a:r>
           </a:p>
           <a:p>
             <a:pPr lvl="4"/>
             <a:r>
-              <a:rPr lang="en-US" smtClean="0"/>
+              <a:rPr lang="en-US"/>
               <a:t>Fifth level</a:t>
             </a:r>
-            <a:endParaRPr lang="en-US"/>
           </a:p>
         </p:txBody>
       </p:sp>
@@ -1688,38 +1752,37 @@
           <a:p>
             <a:pPr lvl="0"/>
             <a:r>
-              <a:rPr lang="en-US" smtClean="0"/>
+              <a:rPr lang="en-US"/>
               <a:t>Click to edit Master text styles</a:t>
             </a:r>
           </a:p>
           <a:p>
             <a:pPr lvl="1"/>
             <a:r>
-              <a:rPr lang="en-US" smtClean="0"/>
+              <a:rPr lang="en-US"/>
               <a:t>Second level</a:t>
             </a:r>
           </a:p>
           <a:p>
             <a:pPr lvl="2"/>
             <a:r>
-              <a:rPr lang="en-US" smtClean="0"/>
+              <a:rPr lang="en-US"/>
               <a:t>Third level</a:t>
             </a:r>
           </a:p>
           <a:p>
             <a:pPr lvl="3"/>
             <a:r>
-              <a:rPr lang="en-US" smtClean="0"/>
+              <a:rPr lang="en-US"/>
               <a:t>Fourth level</a:t>
             </a:r>
           </a:p>
           <a:p>
             <a:pPr lvl="4"/>
             <a:r>
-              <a:rPr lang="en-US" smtClean="0"/>
+              <a:rPr lang="en-US"/>
               <a:t>Fifth level</a:t>
             </a:r>
-            <a:endParaRPr lang="en-US"/>
           </a:p>
         </p:txBody>
       </p:sp>
@@ -1740,7 +1803,7 @@
           <a:p>
             <a:fld id="{5BCAD085-E8A6-8845-BD4E-CB4CCA059FC4}" type="datetimeFigureOut">
               <a:rPr lang="en-US" smtClean="0"/>
-              <a:t>1/27/13</a:t>
+              <a:t>6/13/26</a:t>
             </a:fld>
             <a:endParaRPr lang="en-US"/>
           </a:p>
@@ -1838,10 +1901,9 @@
           </a:lstStyle>
           <a:p>
             <a:r>
-              <a:rPr lang="en-US" smtClean="0"/>
+              <a:rPr lang="en-US"/>
               <a:t>Click to edit Master title style</a:t>
             </a:r>
-            <a:endParaRPr lang="en-US"/>
           </a:p>
         </p:txBody>
       </p:sp>
@@ -1904,7 +1966,7 @@
           <a:p>
             <a:pPr lvl="0"/>
             <a:r>
-              <a:rPr lang="en-US" smtClean="0"/>
+              <a:rPr lang="en-US"/>
               <a:t>Click to edit Master text styles</a:t>
             </a:r>
           </a:p>
@@ -1960,38 +2022,37 @@
           <a:p>
             <a:pPr lvl="0"/>
             <a:r>
-              <a:rPr lang="en-US" smtClean="0"/>
+              <a:rPr lang="en-US"/>
               <a:t>Click to edit Master text styles</a:t>
             </a:r>
           </a:p>
           <a:p>
             <a:pPr lvl="1"/>
             <a:r>
-              <a:rPr lang="en-US" smtClean="0"/>
+              <a:rPr lang="en-US"/>
               <a:t>Second level</a:t>
             </a:r>
           </a:p>
           <a:p>
             <a:pPr lvl="2"/>
             <a:r>
-              <a:rPr lang="en-US" smtClean="0"/>
+              <a:rPr lang="en-US"/>
               <a:t>Third level</a:t>
             </a:r>
           </a:p>
           <a:p>
             <a:pPr lvl="3"/>
             <a:r>
-              <a:rPr lang="en-US" smtClean="0"/>
+              <a:rPr lang="en-US"/>
               <a:t>Fourth level</a:t>
             </a:r>
           </a:p>
           <a:p>
             <a:pPr lvl="4"/>
             <a:r>
-              <a:rPr lang="en-US" smtClean="0"/>
+              <a:rPr lang="en-US"/>
               <a:t>Fifth level</a:t>
             </a:r>
-            <a:endParaRPr lang="en-US"/>
           </a:p>
         </p:txBody>
       </p:sp>
@@ -2054,7 +2115,7 @@
           <a:p>
             <a:pPr lvl="0"/>
             <a:r>
-              <a:rPr lang="en-US" smtClean="0"/>
+              <a:rPr lang="en-US"/>
               <a:t>Click to edit Master text styles</a:t>
             </a:r>
           </a:p>
@@ -2110,38 +2171,37 @@
           <a:p>
             <a:pPr lvl="0"/>
             <a:r>
-              <a:rPr lang="en-US" smtClean="0"/>
+              <a:rPr lang="en-US"/>
               <a:t>Click to edit Master text styles</a:t>
             </a:r>
           </a:p>
           <a:p>
             <a:pPr lvl="1"/>
             <a:r>
-              <a:rPr lang="en-US" smtClean="0"/>
+              <a:rPr lang="en-US"/>
               <a:t>Second level</a:t>
             </a:r>
           </a:p>
           <a:p>
             <a:pPr lvl="2"/>
             <a:r>
-              <a:rPr lang="en-US" smtClean="0"/>
+              <a:rPr lang="en-US"/>
               <a:t>Third level</a:t>
             </a:r>
           </a:p>
           <a:p>
             <a:pPr lvl="3"/>
             <a:r>
-              <a:rPr lang="en-US" smtClean="0"/>
+              <a:rPr lang="en-US"/>
               <a:t>Fourth level</a:t>
             </a:r>
           </a:p>
           <a:p>
             <a:pPr lvl="4"/>
             <a:r>
-              <a:rPr lang="en-US" smtClean="0"/>
+              <a:rPr lang="en-US"/>
               <a:t>Fifth level</a:t>
             </a:r>
-            <a:endParaRPr lang="en-US"/>
           </a:p>
         </p:txBody>
       </p:sp>
@@ -2162,7 +2222,7 @@
           <a:p>
             <a:fld id="{5BCAD085-E8A6-8845-BD4E-CB4CCA059FC4}" type="datetimeFigureOut">
               <a:rPr lang="en-US" smtClean="0"/>
-              <a:t>1/27/13</a:t>
+              <a:t>6/13/26</a:t>
             </a:fld>
             <a:endParaRPr lang="en-US"/>
           </a:p>
@@ -2256,10 +2316,9 @@
           <a:lstStyle/>
           <a:p>
             <a:r>
-              <a:rPr lang="en-US" smtClean="0"/>
+              <a:rPr lang="en-US"/>
               <a:t>Click to edit Master title style</a:t>
             </a:r>
-            <a:endParaRPr lang="en-US"/>
           </a:p>
         </p:txBody>
       </p:sp>
@@ -2280,7 +2339,7 @@
           <a:p>
             <a:fld id="{5BCAD085-E8A6-8845-BD4E-CB4CCA059FC4}" type="datetimeFigureOut">
               <a:rPr lang="en-US" smtClean="0"/>
-              <a:t>1/27/13</a:t>
+              <a:t>6/13/26</a:t>
             </a:fld>
             <a:endParaRPr lang="en-US"/>
           </a:p>
@@ -2375,7 +2434,7 @@
           <a:p>
             <a:fld id="{5BCAD085-E8A6-8845-BD4E-CB4CCA059FC4}" type="datetimeFigureOut">
               <a:rPr lang="en-US" smtClean="0"/>
-              <a:t>1/27/13</a:t>
+              <a:t>6/13/26</a:t>
             </a:fld>
             <a:endParaRPr lang="en-US"/>
           </a:p>
@@ -2478,10 +2537,9 @@
           </a:lstStyle>
           <a:p>
             <a:r>
-              <a:rPr lang="en-US" smtClean="0"/>
+              <a:rPr lang="en-US"/>
               <a:t>Click to edit Master title style</a:t>
             </a:r>
-            <a:endParaRPr lang="en-US"/>
           </a:p>
         </p:txBody>
       </p:sp>
@@ -2535,38 +2593,37 @@
           <a:p>
             <a:pPr lvl="0"/>
             <a:r>
-              <a:rPr lang="en-US" smtClean="0"/>
+              <a:rPr lang="en-US"/>
               <a:t>Click to edit Master text styles</a:t>
             </a:r>
           </a:p>
           <a:p>
             <a:pPr lvl="1"/>
             <a:r>
-              <a:rPr lang="en-US" smtClean="0"/>
+              <a:rPr lang="en-US"/>
               <a:t>Second level</a:t>
             </a:r>
           </a:p>
           <a:p>
             <a:pPr lvl="2"/>
             <a:r>
-              <a:rPr lang="en-US" smtClean="0"/>
+              <a:rPr lang="en-US"/>
               <a:t>Third level</a:t>
             </a:r>
           </a:p>
           <a:p>
             <a:pPr lvl="3"/>
             <a:r>
-              <a:rPr lang="en-US" smtClean="0"/>
+              <a:rPr lang="en-US"/>
               <a:t>Fourth level</a:t>
             </a:r>
           </a:p>
           <a:p>
             <a:pPr lvl="4"/>
             <a:r>
-              <a:rPr lang="en-US" smtClean="0"/>
+              <a:rPr lang="en-US"/>
               <a:t>Fifth level</a:t>
             </a:r>
-            <a:endParaRPr lang="en-US"/>
           </a:p>
         </p:txBody>
       </p:sp>
@@ -2629,7 +2686,7 @@
           <a:p>
             <a:pPr lvl="0"/>
             <a:r>
-              <a:rPr lang="en-US" smtClean="0"/>
+              <a:rPr lang="en-US"/>
               <a:t>Click to edit Master text styles</a:t>
             </a:r>
           </a:p>
@@ -2652,7 +2709,7 @@
           <a:p>
             <a:fld id="{5BCAD085-E8A6-8845-BD4E-CB4CCA059FC4}" type="datetimeFigureOut">
               <a:rPr lang="en-US" smtClean="0"/>
-              <a:t>1/27/13</a:t>
+              <a:t>6/13/26</a:t>
             </a:fld>
             <a:endParaRPr lang="en-US"/>
           </a:p>
@@ -2755,10 +2812,9 @@
           </a:lstStyle>
           <a:p>
             <a:r>
-              <a:rPr lang="en-US" smtClean="0"/>
+              <a:rPr lang="en-US"/>
               <a:t>Click to edit Master title style</a:t>
             </a:r>
-            <a:endParaRPr lang="en-US"/>
           </a:p>
         </p:txBody>
       </p:sp>
@@ -2882,7 +2938,7 @@
           <a:p>
             <a:pPr lvl="0"/>
             <a:r>
-              <a:rPr lang="en-US" smtClean="0"/>
+              <a:rPr lang="en-US"/>
               <a:t>Click to edit Master text styles</a:t>
             </a:r>
           </a:p>
@@ -2905,7 +2961,7 @@
           <a:p>
             <a:fld id="{5BCAD085-E8A6-8845-BD4E-CB4CCA059FC4}" type="datetimeFigureOut">
               <a:rPr lang="en-US" smtClean="0"/>
-              <a:t>1/27/13</a:t>
+              <a:t>6/13/26</a:t>
             </a:fld>
             <a:endParaRPr lang="en-US"/>
           </a:p>
@@ -3014,10 +3070,9 @@
           <a:lstStyle/>
           <a:p>
             <a:r>
-              <a:rPr lang="en-US" smtClean="0"/>
+              <a:rPr lang="en-US"/>
               <a:t>Click to edit Master title style</a:t>
             </a:r>
-            <a:endParaRPr lang="en-US"/>
           </a:p>
         </p:txBody>
       </p:sp>
@@ -3048,38 +3103,37 @@
           <a:p>
             <a:pPr lvl="0"/>
             <a:r>
-              <a:rPr lang="en-US" smtClean="0"/>
+              <a:rPr lang="en-US"/>
               <a:t>Click to edit Master text styles</a:t>
             </a:r>
           </a:p>
           <a:p>
             <a:pPr lvl="1"/>
             <a:r>
-              <a:rPr lang="en-US" smtClean="0"/>
+              <a:rPr lang="en-US"/>
               <a:t>Second level</a:t>
             </a:r>
           </a:p>
           <a:p>
             <a:pPr lvl="2"/>
             <a:r>
-              <a:rPr lang="en-US" smtClean="0"/>
+              <a:rPr lang="en-US"/>
               <a:t>Third level</a:t>
             </a:r>
           </a:p>
           <a:p>
             <a:pPr lvl="3"/>
             <a:r>
-              <a:rPr lang="en-US" smtClean="0"/>
+              <a:rPr lang="en-US"/>
               <a:t>Fourth level</a:t>
             </a:r>
           </a:p>
           <a:p>
             <a:pPr lvl="4"/>
             <a:r>
-              <a:rPr lang="en-US" smtClean="0"/>
+              <a:rPr lang="en-US"/>
               <a:t>Fifth level</a:t>
             </a:r>
-            <a:endParaRPr lang="en-US"/>
           </a:p>
         </p:txBody>
       </p:sp>
@@ -3118,7 +3172,7 @@
           <a:p>
             <a:fld id="{5BCAD085-E8A6-8845-BD4E-CB4CCA059FC4}" type="datetimeFigureOut">
               <a:rPr lang="en-US" smtClean="0"/>
-              <a:t>1/27/13</a:t>
+              <a:t>6/13/26</a:t>
             </a:fld>
             <a:endParaRPr lang="en-US"/>
           </a:p>
@@ -3477,7 +3531,7 @@
 </file>
 
 <file path=ppt/slides/slide1.xml><?xml version="1.0" encoding="utf-8"?>
-<p:sld xmlns:a="http://schemas.openxmlformats.org/drawingml/2006/main" xmlns:p="http://schemas.openxmlformats.org/presentationml/2006/main" xmlns:r="http://schemas.openxmlformats.org/officeDocument/2006/relationships">
+<p:sld xmlns:a="http://schemas.openxmlformats.org/drawingml/2006/main" xmlns:r="http://schemas.openxmlformats.org/officeDocument/2006/relationships" xmlns:p="http://schemas.openxmlformats.org/presentationml/2006/main">
   <p:cSld>
     <p:spTree>
       <p:nvGrpSpPr>
@@ -3485,7 +3539,14 @@
         <p:cNvGrpSpPr/>
         <p:nvPr/>
       </p:nvGrpSpPr>
-      <p:grpSpPr/>
+      <p:grpSpPr>
+        <a:xfrm>
+          <a:off x="0" y="0"/>
+          <a:ext cx="0" cy="0"/>
+          <a:chOff x="0" y="0"/>
+          <a:chExt cx="0" cy="0"/>
+        </a:xfrm>
+      </p:grpSpPr>
       <p:sp>
         <p:nvSpPr>
           <p:cNvPr id="2" name="TextBox 1"/>
@@ -3597,7 +3658,7 @@
 </file>
 
 <file path=ppt/slides/slide10.xml><?xml version="1.0" encoding="utf-8"?>
-<p:sld xmlns:a="http://schemas.openxmlformats.org/drawingml/2006/main" xmlns:p="http://schemas.openxmlformats.org/presentationml/2006/main" xmlns:r="http://schemas.openxmlformats.org/officeDocument/2006/relationships">
+<p:sld xmlns:a="http://schemas.openxmlformats.org/drawingml/2006/main" xmlns:r="http://schemas.openxmlformats.org/officeDocument/2006/relationships" xmlns:p="http://schemas.openxmlformats.org/presentationml/2006/main">
   <p:cSld>
     <p:spTree>
       <p:nvGrpSpPr>
@@ -3605,7 +3666,14 @@
         <p:cNvGrpSpPr/>
         <p:nvPr/>
       </p:nvGrpSpPr>
-      <p:grpSpPr/>
+      <p:grpSpPr>
+        <a:xfrm>
+          <a:off x="0" y="0"/>
+          <a:ext cx="0" cy="0"/>
+          <a:chOff x="0" y="0"/>
+          <a:chExt cx="0" cy="0"/>
+        </a:xfrm>
+      </p:grpSpPr>
       <p:sp>
         <p:nvSpPr>
           <p:cNvPr id="2" name="TextBox 1"/>
@@ -3726,9 +3794,27 @@
                 <a:tableStyleId>{5C22544A-7EE6-4342-B048-85BDC9FD1C3A}</a:tableStyleId>
               </a:tblPr>
               <a:tblGrid>
-                <a:gridCol w="2560320"/>
-                <a:gridCol w="3840480"/>
-                <a:gridCol w="4297680"/>
+                <a:gridCol w="2560320">
+                  <a:extLst>
+                    <a:ext uri="{9D8B030D-6E8A-4147-A177-3AD203B41FA5}">
+                      <a16:colId xmlns:a16="http://schemas.microsoft.com/office/drawing/2014/main" val="20000"/>
+                    </a:ext>
+                  </a:extLst>
+                </a:gridCol>
+                <a:gridCol w="3840480">
+                  <a:extLst>
+                    <a:ext uri="{9D8B030D-6E8A-4147-A177-3AD203B41FA5}">
+                      <a16:colId xmlns:a16="http://schemas.microsoft.com/office/drawing/2014/main" val="20001"/>
+                    </a:ext>
+                  </a:extLst>
+                </a:gridCol>
+                <a:gridCol w="4297680">
+                  <a:extLst>
+                    <a:ext uri="{9D8B030D-6E8A-4147-A177-3AD203B41FA5}">
+                      <a16:colId xmlns:a16="http://schemas.microsoft.com/office/drawing/2014/main" val="20002"/>
+                    </a:ext>
+                  </a:extLst>
+                </a:gridCol>
               </a:tblGrid>
               <a:tr h="365760">
                 <a:tc>
@@ -3770,6 +3856,11 @@
                   </a:txBody>
                   <a:tcPr/>
                 </a:tc>
+                <a:extLst>
+                  <a:ext uri="{0D108BD9-81ED-4DB2-BD59-A6C34878D82A}">
+                    <a16:rowId xmlns:a16="http://schemas.microsoft.com/office/drawing/2014/main" val="10000"/>
+                  </a:ext>
+                </a:extLst>
               </a:tr>
               <a:tr h="365760">
                 <a:tc>
@@ -3811,6 +3902,11 @@
                   </a:txBody>
                   <a:tcPr/>
                 </a:tc>
+                <a:extLst>
+                  <a:ext uri="{0D108BD9-81ED-4DB2-BD59-A6C34878D82A}">
+                    <a16:rowId xmlns:a16="http://schemas.microsoft.com/office/drawing/2014/main" val="10001"/>
+                  </a:ext>
+                </a:extLst>
               </a:tr>
               <a:tr h="365760">
                 <a:tc>
@@ -3852,6 +3948,11 @@
                   </a:txBody>
                   <a:tcPr/>
                 </a:tc>
+                <a:extLst>
+                  <a:ext uri="{0D108BD9-81ED-4DB2-BD59-A6C34878D82A}">
+                    <a16:rowId xmlns:a16="http://schemas.microsoft.com/office/drawing/2014/main" val="10002"/>
+                  </a:ext>
+                </a:extLst>
               </a:tr>
               <a:tr h="365760">
                 <a:tc>
@@ -3893,6 +3994,11 @@
                   </a:txBody>
                   <a:tcPr/>
                 </a:tc>
+                <a:extLst>
+                  <a:ext uri="{0D108BD9-81ED-4DB2-BD59-A6C34878D82A}">
+                    <a16:rowId xmlns:a16="http://schemas.microsoft.com/office/drawing/2014/main" val="10003"/>
+                  </a:ext>
+                </a:extLst>
               </a:tr>
             </a:tbl>
           </a:graphicData>
@@ -3907,7 +4013,7 @@
 </file>
 
 <file path=ppt/slides/slide11.xml><?xml version="1.0" encoding="utf-8"?>
-<p:sld xmlns:a="http://schemas.openxmlformats.org/drawingml/2006/main" xmlns:p="http://schemas.openxmlformats.org/presentationml/2006/main" xmlns:r="http://schemas.openxmlformats.org/officeDocument/2006/relationships">
+<p:sld xmlns:a="http://schemas.openxmlformats.org/drawingml/2006/main" xmlns:r="http://schemas.openxmlformats.org/officeDocument/2006/relationships" xmlns:p="http://schemas.openxmlformats.org/presentationml/2006/main">
   <p:cSld>
     <p:spTree>
       <p:nvGrpSpPr>
@@ -3915,7 +4021,14 @@
         <p:cNvGrpSpPr/>
         <p:nvPr/>
       </p:nvGrpSpPr>
-      <p:grpSpPr/>
+      <p:grpSpPr>
+        <a:xfrm>
+          <a:off x="0" y="0"/>
+          <a:ext cx="0" cy="0"/>
+          <a:chOff x="0" y="0"/>
+          <a:chExt cx="0" cy="0"/>
+        </a:xfrm>
+      </p:grpSpPr>
       <p:sp>
         <p:nvSpPr>
           <p:cNvPr id="2" name="TextBox 1"/>
@@ -4021,14 +4134,11 @@
                 <a:spcPts val="800"/>
               </a:spcAft>
             </a:pPr>
-            <a:r>
-              <a:rPr sz="2400">
-                <a:solidFill>
-                  <a:srgbClr val="212121"/>
-                </a:solidFill>
-              </a:rPr>
-              <a:t/>
-            </a:r>
+            <a:endParaRPr sz="2400">
+              <a:solidFill>
+                <a:srgbClr val="212121"/>
+              </a:solidFill>
+            </a:endParaRPr>
           </a:p>
           <a:p>
             <a:pPr>
@@ -4056,7 +4166,7 @@
 </file>
 
 <file path=ppt/slides/slide12.xml><?xml version="1.0" encoding="utf-8"?>
-<p:sld xmlns:a="http://schemas.openxmlformats.org/drawingml/2006/main" xmlns:p="http://schemas.openxmlformats.org/presentationml/2006/main" xmlns:r="http://schemas.openxmlformats.org/officeDocument/2006/relationships">
+<p:sld xmlns:a="http://schemas.openxmlformats.org/drawingml/2006/main" xmlns:r="http://schemas.openxmlformats.org/officeDocument/2006/relationships" xmlns:p="http://schemas.openxmlformats.org/presentationml/2006/main">
   <p:cSld>
     <p:spTree>
       <p:nvGrpSpPr>
@@ -4064,7 +4174,14 @@
         <p:cNvGrpSpPr/>
         <p:nvPr/>
       </p:nvGrpSpPr>
-      <p:grpSpPr/>
+      <p:grpSpPr>
+        <a:xfrm>
+          <a:off x="0" y="0"/>
+          <a:ext cx="0" cy="0"/>
+          <a:chOff x="0" y="0"/>
+          <a:chExt cx="0" cy="0"/>
+        </a:xfrm>
+      </p:grpSpPr>
       <p:sp>
         <p:nvSpPr>
           <p:cNvPr id="2" name="TextBox 1"/>
@@ -4112,7 +4229,7 @@
         </p:xfrm>
         <a:graphic>
           <a:graphicData uri="http://schemas.openxmlformats.org/drawingml/2006/chart">
-            <c:chart xmlns:c="http://schemas.openxmlformats.org/drawingml/2006/chart" r:id="rId2"/>
+            <c:chart xmlns:c="http://schemas.openxmlformats.org/drawingml/2006/chart" xmlns:r="http://schemas.openxmlformats.org/officeDocument/2006/relationships" r:id="rId2"/>
           </a:graphicData>
         </a:graphic>
       </p:graphicFrame>
@@ -4163,7 +4280,7 @@
 </file>
 
 <file path=ppt/slides/slide13.xml><?xml version="1.0" encoding="utf-8"?>
-<p:sld xmlns:a="http://schemas.openxmlformats.org/drawingml/2006/main" xmlns:p="http://schemas.openxmlformats.org/presentationml/2006/main" xmlns:r="http://schemas.openxmlformats.org/officeDocument/2006/relationships">
+<p:sld xmlns:a="http://schemas.openxmlformats.org/drawingml/2006/main" xmlns:r="http://schemas.openxmlformats.org/officeDocument/2006/relationships" xmlns:p="http://schemas.openxmlformats.org/presentationml/2006/main">
   <p:cSld>
     <p:spTree>
       <p:nvGrpSpPr>
@@ -4171,7 +4288,14 @@
         <p:cNvGrpSpPr/>
         <p:nvPr/>
       </p:nvGrpSpPr>
-      <p:grpSpPr/>
+      <p:grpSpPr>
+        <a:xfrm>
+          <a:off x="0" y="0"/>
+          <a:ext cx="0" cy="0"/>
+          <a:chOff x="0" y="0"/>
+          <a:chExt cx="0" cy="0"/>
+        </a:xfrm>
+      </p:grpSpPr>
       <p:sp>
         <p:nvSpPr>
           <p:cNvPr id="2" name="TextBox 1"/>
@@ -4219,7 +4343,7 @@
         </p:xfrm>
         <a:graphic>
           <a:graphicData uri="http://schemas.openxmlformats.org/drawingml/2006/chart">
-            <c:chart xmlns:c="http://schemas.openxmlformats.org/drawingml/2006/chart" r:id="rId2"/>
+            <c:chart xmlns:c="http://schemas.openxmlformats.org/drawingml/2006/chart" xmlns:r="http://schemas.openxmlformats.org/officeDocument/2006/relationships" r:id="rId2"/>
           </a:graphicData>
         </a:graphic>
       </p:graphicFrame>
@@ -4270,7 +4394,7 @@
 </file>
 
 <file path=ppt/slides/slide14.xml><?xml version="1.0" encoding="utf-8"?>
-<p:sld xmlns:a="http://schemas.openxmlformats.org/drawingml/2006/main" xmlns:p="http://schemas.openxmlformats.org/presentationml/2006/main" xmlns:r="http://schemas.openxmlformats.org/officeDocument/2006/relationships">
+<p:sld xmlns:a="http://schemas.openxmlformats.org/drawingml/2006/main" xmlns:r="http://schemas.openxmlformats.org/officeDocument/2006/relationships" xmlns:p="http://schemas.openxmlformats.org/presentationml/2006/main">
   <p:cSld>
     <p:spTree>
       <p:nvGrpSpPr>
@@ -4278,7 +4402,14 @@
         <p:cNvGrpSpPr/>
         <p:nvPr/>
       </p:nvGrpSpPr>
-      <p:grpSpPr/>
+      <p:grpSpPr>
+        <a:xfrm>
+          <a:off x="0" y="0"/>
+          <a:ext cx="0" cy="0"/>
+          <a:chOff x="0" y="0"/>
+          <a:chExt cx="0" cy="0"/>
+        </a:xfrm>
+      </p:grpSpPr>
       <p:sp>
         <p:nvSpPr>
           <p:cNvPr id="2" name="TextBox 1"/>
@@ -4369,14 +4500,11 @@
                 <a:spcPts val="800"/>
               </a:spcAft>
             </a:pPr>
-            <a:r>
-              <a:rPr sz="2400">
-                <a:solidFill>
-                  <a:srgbClr val="212121"/>
-                </a:solidFill>
-              </a:rPr>
-              <a:t/>
-            </a:r>
+            <a:endParaRPr sz="2400">
+              <a:solidFill>
+                <a:srgbClr val="212121"/>
+              </a:solidFill>
+            </a:endParaRPr>
           </a:p>
           <a:p>
             <a:pPr>
@@ -4434,7 +4562,7 @@
 </file>
 
 <file path=ppt/slides/slide15.xml><?xml version="1.0" encoding="utf-8"?>
-<p:sld xmlns:a="http://schemas.openxmlformats.org/drawingml/2006/main" xmlns:p="http://schemas.openxmlformats.org/presentationml/2006/main" xmlns:r="http://schemas.openxmlformats.org/officeDocument/2006/relationships">
+<p:sld xmlns:a="http://schemas.openxmlformats.org/drawingml/2006/main" xmlns:r="http://schemas.openxmlformats.org/officeDocument/2006/relationships" xmlns:p="http://schemas.openxmlformats.org/presentationml/2006/main">
   <p:cSld>
     <p:spTree>
       <p:nvGrpSpPr>
@@ -4442,7 +4570,14 @@
         <p:cNvGrpSpPr/>
         <p:nvPr/>
       </p:nvGrpSpPr>
-      <p:grpSpPr/>
+      <p:grpSpPr>
+        <a:xfrm>
+          <a:off x="0" y="0"/>
+          <a:ext cx="0" cy="0"/>
+          <a:chOff x="0" y="0"/>
+          <a:chExt cx="0" cy="0"/>
+        </a:xfrm>
+      </p:grpSpPr>
       <p:sp>
         <p:nvSpPr>
           <p:cNvPr id="2" name="TextBox 1"/>
@@ -4665,7 +4800,7 @@
 </file>
 
 <file path=ppt/slides/slide16.xml><?xml version="1.0" encoding="utf-8"?>
-<p:sld xmlns:a="http://schemas.openxmlformats.org/drawingml/2006/main" xmlns:p="http://schemas.openxmlformats.org/presentationml/2006/main" xmlns:r="http://schemas.openxmlformats.org/officeDocument/2006/relationships">
+<p:sld xmlns:a="http://schemas.openxmlformats.org/drawingml/2006/main" xmlns:r="http://schemas.openxmlformats.org/officeDocument/2006/relationships" xmlns:p="http://schemas.openxmlformats.org/presentationml/2006/main">
   <p:cSld>
     <p:spTree>
       <p:nvGrpSpPr>
@@ -4673,7 +4808,14 @@
         <p:cNvGrpSpPr/>
         <p:nvPr/>
       </p:nvGrpSpPr>
-      <p:grpSpPr/>
+      <p:grpSpPr>
+        <a:xfrm>
+          <a:off x="0" y="0"/>
+          <a:ext cx="0" cy="0"/>
+          <a:chOff x="0" y="0"/>
+          <a:chExt cx="0" cy="0"/>
+        </a:xfrm>
+      </p:grpSpPr>
       <p:sp>
         <p:nvSpPr>
           <p:cNvPr id="2" name="TextBox 1"/>
@@ -4764,14 +4906,11 @@
                 <a:spcPts val="800"/>
               </a:spcAft>
             </a:pPr>
-            <a:r>
-              <a:rPr sz="2600">
-                <a:solidFill>
-                  <a:srgbClr val="212121"/>
-                </a:solidFill>
-              </a:rPr>
-              <a:t/>
-            </a:r>
+            <a:endParaRPr sz="2600">
+              <a:solidFill>
+                <a:srgbClr val="212121"/>
+              </a:solidFill>
+            </a:endParaRPr>
           </a:p>
           <a:p>
             <a:pPr>
@@ -4799,7 +4938,7 @@
 </file>
 
 <file path=ppt/slides/slide17.xml><?xml version="1.0" encoding="utf-8"?>
-<p:sld xmlns:a="http://schemas.openxmlformats.org/drawingml/2006/main" xmlns:p="http://schemas.openxmlformats.org/presentationml/2006/main" xmlns:r="http://schemas.openxmlformats.org/officeDocument/2006/relationships">
+<p:sld xmlns:a="http://schemas.openxmlformats.org/drawingml/2006/main" xmlns:r="http://schemas.openxmlformats.org/officeDocument/2006/relationships" xmlns:p="http://schemas.openxmlformats.org/presentationml/2006/main">
   <p:cSld>
     <p:spTree>
       <p:nvGrpSpPr>
@@ -4807,7 +4946,14 @@
         <p:cNvGrpSpPr/>
         <p:nvPr/>
       </p:nvGrpSpPr>
-      <p:grpSpPr/>
+      <p:grpSpPr>
+        <a:xfrm>
+          <a:off x="0" y="0"/>
+          <a:ext cx="0" cy="0"/>
+          <a:chOff x="0" y="0"/>
+          <a:chExt cx="0" cy="0"/>
+        </a:xfrm>
+      </p:grpSpPr>
       <p:sp>
         <p:nvSpPr>
           <p:cNvPr id="2" name="TextBox 1"/>
@@ -4913,27 +5059,24 @@
                 <a:spcPts val="800"/>
               </a:spcAft>
             </a:pPr>
+            <a:endParaRPr sz="2400">
+              <a:solidFill>
+                <a:srgbClr val="212121"/>
+              </a:solidFill>
+            </a:endParaRPr>
+          </a:p>
+          <a:p>
+            <a:pPr>
+              <a:spcAft>
+                <a:spcPts val="800"/>
+              </a:spcAft>
+            </a:pPr>
             <a:r>
               <a:rPr sz="2400">
                 <a:solidFill>
                   <a:srgbClr val="212121"/>
                 </a:solidFill>
               </a:rPr>
-              <a:t/>
-            </a:r>
-          </a:p>
-          <a:p>
-            <a:pPr>
-              <a:spcAft>
-                <a:spcPts val="800"/>
-              </a:spcAft>
-            </a:pPr>
-            <a:r>
-              <a:rPr sz="2400">
-                <a:solidFill>
-                  <a:srgbClr val="212121"/>
-                </a:solidFill>
-              </a:rPr>
               <a:t>“Program testing can be used to show the presence of bugs, but never to show their absence.” — E. W. Dijkstra, 1970</a:t>
             </a:r>
           </a:p>
@@ -4943,14 +5086,11 @@
                 <a:spcPts val="800"/>
               </a:spcAft>
             </a:pPr>
-            <a:r>
-              <a:rPr sz="2400">
-                <a:solidFill>
-                  <a:srgbClr val="212121"/>
-                </a:solidFill>
-              </a:rPr>
-              <a:t/>
-            </a:r>
+            <a:endParaRPr sz="2400">
+              <a:solidFill>
+                <a:srgbClr val="212121"/>
+              </a:solidFill>
+            </a:endParaRPr>
           </a:p>
           <a:p>
             <a:pPr>
@@ -4978,7 +5118,7 @@
 </file>
 
 <file path=ppt/slides/slide18.xml><?xml version="1.0" encoding="utf-8"?>
-<p:sld xmlns:a="http://schemas.openxmlformats.org/drawingml/2006/main" xmlns:p="http://schemas.openxmlformats.org/presentationml/2006/main" xmlns:r="http://schemas.openxmlformats.org/officeDocument/2006/relationships">
+<p:sld xmlns:a="http://schemas.openxmlformats.org/drawingml/2006/main" xmlns:r="http://schemas.openxmlformats.org/officeDocument/2006/relationships" xmlns:p="http://schemas.openxmlformats.org/presentationml/2006/main">
   <p:cSld>
     <p:spTree>
       <p:nvGrpSpPr>
@@ -4986,7 +5126,14 @@
         <p:cNvGrpSpPr/>
         <p:nvPr/>
       </p:nvGrpSpPr>
-      <p:grpSpPr/>
+      <p:grpSpPr>
+        <a:xfrm>
+          <a:off x="0" y="0"/>
+          <a:ext cx="0" cy="0"/>
+          <a:chOff x="0" y="0"/>
+          <a:chExt cx="0" cy="0"/>
+        </a:xfrm>
+      </p:grpSpPr>
       <p:sp>
         <p:nvSpPr>
           <p:cNvPr id="2" name="TextBox 1"/>
@@ -5062,27 +5209,24 @@
                 <a:spcPts val="800"/>
               </a:spcAft>
             </a:pPr>
+            <a:endParaRPr sz="2600">
+              <a:solidFill>
+                <a:srgbClr val="212121"/>
+              </a:solidFill>
+            </a:endParaRPr>
+          </a:p>
+          <a:p>
+            <a:pPr>
+              <a:spcAft>
+                <a:spcPts val="800"/>
+              </a:spcAft>
+            </a:pPr>
             <a:r>
               <a:rPr sz="2600">
                 <a:solidFill>
                   <a:srgbClr val="212121"/>
                 </a:solidFill>
               </a:rPr>
-              <a:t/>
-            </a:r>
-          </a:p>
-          <a:p>
-            <a:pPr>
-              <a:spcAft>
-                <a:spcPts val="800"/>
-              </a:spcAft>
-            </a:pPr>
-            <a:r>
-              <a:rPr sz="2600">
-                <a:solidFill>
-                  <a:srgbClr val="212121"/>
-                </a:solidFill>
-              </a:rPr>
               <a:t>Can the program reach a state where the property fails?</a:t>
             </a:r>
           </a:p>
@@ -5092,14 +5236,11 @@
                 <a:spcPts val="800"/>
               </a:spcAft>
             </a:pPr>
-            <a:r>
-              <a:rPr sz="2600">
-                <a:solidFill>
-                  <a:srgbClr val="212121"/>
-                </a:solidFill>
-              </a:rPr>
-              <a:t/>
-            </a:r>
+            <a:endParaRPr sz="2600">
+              <a:solidFill>
+                <a:srgbClr val="212121"/>
+              </a:solidFill>
+            </a:endParaRPr>
           </a:p>
           <a:p>
             <a:pPr lvl="1">
@@ -5137,14 +5278,11 @@
                 <a:spcPts val="800"/>
               </a:spcAft>
             </a:pPr>
-            <a:r>
-              <a:rPr sz="2600">
-                <a:solidFill>
-                  <a:srgbClr val="212121"/>
-                </a:solidFill>
-              </a:rPr>
-              <a:t/>
-            </a:r>
+            <a:endParaRPr sz="2400">
+              <a:solidFill>
+                <a:srgbClr val="212121"/>
+              </a:solidFill>
+            </a:endParaRPr>
           </a:p>
           <a:p>
             <a:pPr>
@@ -5172,7 +5310,7 @@
 </file>
 
 <file path=ppt/slides/slide19.xml><?xml version="1.0" encoding="utf-8"?>
-<p:sld xmlns:a="http://schemas.openxmlformats.org/drawingml/2006/main" xmlns:p="http://schemas.openxmlformats.org/presentationml/2006/main" xmlns:r="http://schemas.openxmlformats.org/officeDocument/2006/relationships">
+<p:sld xmlns:a="http://schemas.openxmlformats.org/drawingml/2006/main" xmlns:r="http://schemas.openxmlformats.org/officeDocument/2006/relationships" xmlns:p="http://schemas.openxmlformats.org/presentationml/2006/main">
   <p:cSld>
     <p:spTree>
       <p:nvGrpSpPr>
@@ -5180,7 +5318,14 @@
         <p:cNvGrpSpPr/>
         <p:nvPr/>
       </p:nvGrpSpPr>
-      <p:grpSpPr/>
+      <p:grpSpPr>
+        <a:xfrm>
+          <a:off x="0" y="0"/>
+          <a:ext cx="0" cy="0"/>
+          <a:chOff x="0" y="0"/>
+          <a:chExt cx="0" cy="0"/>
+        </a:xfrm>
+      </p:grpSpPr>
       <p:sp>
         <p:nvSpPr>
           <p:cNvPr id="2" name="TextBox 1"/>
@@ -5301,14 +5446,11 @@
                 <a:spcPts val="800"/>
               </a:spcAft>
             </a:pPr>
-            <a:r>
-              <a:rPr sz="2400">
-                <a:solidFill>
-                  <a:srgbClr val="212121"/>
-                </a:solidFill>
-              </a:rPr>
-              <a:t/>
-            </a:r>
+            <a:endParaRPr sz="2200">
+              <a:solidFill>
+                <a:srgbClr val="212121"/>
+              </a:solidFill>
+            </a:endParaRPr>
           </a:p>
           <a:p>
             <a:pPr>
@@ -5366,7 +5508,7 @@
 </file>
 
 <file path=ppt/slides/slide2.xml><?xml version="1.0" encoding="utf-8"?>
-<p:sld xmlns:a="http://schemas.openxmlformats.org/drawingml/2006/main" xmlns:p="http://schemas.openxmlformats.org/presentationml/2006/main" xmlns:r="http://schemas.openxmlformats.org/officeDocument/2006/relationships">
+<p:sld xmlns:a="http://schemas.openxmlformats.org/drawingml/2006/main" xmlns:r="http://schemas.openxmlformats.org/officeDocument/2006/relationships" xmlns:p="http://schemas.openxmlformats.org/presentationml/2006/main">
   <p:cSld>
     <p:spTree>
       <p:nvGrpSpPr>
@@ -5374,7 +5516,14 @@
         <p:cNvGrpSpPr/>
         <p:nvPr/>
       </p:nvGrpSpPr>
-      <p:grpSpPr/>
+      <p:grpSpPr>
+        <a:xfrm>
+          <a:off x="0" y="0"/>
+          <a:ext cx="0" cy="0"/>
+          <a:chOff x="0" y="0"/>
+          <a:chExt cx="0" cy="0"/>
+        </a:xfrm>
+      </p:grpSpPr>
       <p:sp>
         <p:nvSpPr>
           <p:cNvPr id="2" name="TextBox 1"/>
@@ -5418,7 +5567,7 @@
         </p:nvGraphicFramePr>
         <p:xfrm>
           <a:off x="731520" y="1371600"/>
-          <a:ext cx="10698480" cy="3657600"/>
+          <a:ext cx="10698480" cy="3962400"/>
         </p:xfrm>
         <a:graphic>
           <a:graphicData uri="http://schemas.openxmlformats.org/drawingml/2006/table">
@@ -5427,8 +5576,20 @@
                 <a:tableStyleId>{5C22544A-7EE6-4342-B048-85BDC9FD1C3A}</a:tableStyleId>
               </a:tblPr>
               <a:tblGrid>
-                <a:gridCol w="1463040"/>
-                <a:gridCol w="9235440"/>
+                <a:gridCol w="1463040">
+                  <a:extLst>
+                    <a:ext uri="{9D8B030D-6E8A-4147-A177-3AD203B41FA5}">
+                      <a16:colId xmlns:a16="http://schemas.microsoft.com/office/drawing/2014/main" val="20000"/>
+                    </a:ext>
+                  </a:extLst>
+                </a:gridCol>
+                <a:gridCol w="9235440">
+                  <a:extLst>
+                    <a:ext uri="{9D8B030D-6E8A-4147-A177-3AD203B41FA5}">
+                      <a16:colId xmlns:a16="http://schemas.microsoft.com/office/drawing/2014/main" val="20001"/>
+                    </a:ext>
+                  </a:extLst>
+                </a:gridCol>
               </a:tblGrid>
               <a:tr h="365760">
                 <a:tc>
@@ -5457,6 +5618,11 @@
                   </a:txBody>
                   <a:tcPr/>
                 </a:tc>
+                <a:extLst>
+                  <a:ext uri="{0D108BD9-81ED-4DB2-BD59-A6C34878D82A}">
+                    <a16:rowId xmlns:a16="http://schemas.microsoft.com/office/drawing/2014/main" val="10000"/>
+                  </a:ext>
+                </a:extLst>
               </a:tr>
               <a:tr h="365760">
                 <a:tc>
@@ -5485,6 +5651,11 @@
                   </a:txBody>
                   <a:tcPr/>
                 </a:tc>
+                <a:extLst>
+                  <a:ext uri="{0D108BD9-81ED-4DB2-BD59-A6C34878D82A}">
+                    <a16:rowId xmlns:a16="http://schemas.microsoft.com/office/drawing/2014/main" val="10001"/>
+                  </a:ext>
+                </a:extLst>
               </a:tr>
               <a:tr h="365760">
                 <a:tc>
@@ -5513,6 +5684,11 @@
                   </a:txBody>
                   <a:tcPr/>
                 </a:tc>
+                <a:extLst>
+                  <a:ext uri="{0D108BD9-81ED-4DB2-BD59-A6C34878D82A}">
+                    <a16:rowId xmlns:a16="http://schemas.microsoft.com/office/drawing/2014/main" val="10002"/>
+                  </a:ext>
+                </a:extLst>
               </a:tr>
               <a:tr h="365760">
                 <a:tc>
@@ -5541,6 +5717,11 @@
                   </a:txBody>
                   <a:tcPr/>
                 </a:tc>
+                <a:extLst>
+                  <a:ext uri="{0D108BD9-81ED-4DB2-BD59-A6C34878D82A}">
+                    <a16:rowId xmlns:a16="http://schemas.microsoft.com/office/drawing/2014/main" val="10003"/>
+                  </a:ext>
+                </a:extLst>
               </a:tr>
               <a:tr h="365760">
                 <a:tc>
@@ -5569,6 +5750,11 @@
                   </a:txBody>
                   <a:tcPr/>
                 </a:tc>
+                <a:extLst>
+                  <a:ext uri="{0D108BD9-81ED-4DB2-BD59-A6C34878D82A}">
+                    <a16:rowId xmlns:a16="http://schemas.microsoft.com/office/drawing/2014/main" val="10004"/>
+                  </a:ext>
+                </a:extLst>
               </a:tr>
               <a:tr h="365760">
                 <a:tc>
@@ -5597,6 +5783,11 @@
                   </a:txBody>
                   <a:tcPr/>
                 </a:tc>
+                <a:extLst>
+                  <a:ext uri="{0D108BD9-81ED-4DB2-BD59-A6C34878D82A}">
+                    <a16:rowId xmlns:a16="http://schemas.microsoft.com/office/drawing/2014/main" val="10005"/>
+                  </a:ext>
+                </a:extLst>
               </a:tr>
               <a:tr h="365760">
                 <a:tc>
@@ -5625,6 +5816,11 @@
                   </a:txBody>
                   <a:tcPr/>
                 </a:tc>
+                <a:extLst>
+                  <a:ext uri="{0D108BD9-81ED-4DB2-BD59-A6C34878D82A}">
+                    <a16:rowId xmlns:a16="http://schemas.microsoft.com/office/drawing/2014/main" val="10006"/>
+                  </a:ext>
+                </a:extLst>
               </a:tr>
               <a:tr h="365760">
                 <a:tc>
@@ -5653,6 +5849,11 @@
                   </a:txBody>
                   <a:tcPr/>
                 </a:tc>
+                <a:extLst>
+                  <a:ext uri="{0D108BD9-81ED-4DB2-BD59-A6C34878D82A}">
+                    <a16:rowId xmlns:a16="http://schemas.microsoft.com/office/drawing/2014/main" val="10007"/>
+                  </a:ext>
+                </a:extLst>
               </a:tr>
               <a:tr h="365760">
                 <a:tc>
@@ -5681,6 +5882,11 @@
                   </a:txBody>
                   <a:tcPr/>
                 </a:tc>
+                <a:extLst>
+                  <a:ext uri="{0D108BD9-81ED-4DB2-BD59-A6C34878D82A}">
+                    <a16:rowId xmlns:a16="http://schemas.microsoft.com/office/drawing/2014/main" val="10008"/>
+                  </a:ext>
+                </a:extLst>
               </a:tr>
               <a:tr h="365760">
                 <a:tc>
@@ -5709,6 +5915,11 @@
                   </a:txBody>
                   <a:tcPr/>
                 </a:tc>
+                <a:extLst>
+                  <a:ext uri="{0D108BD9-81ED-4DB2-BD59-A6C34878D82A}">
+                    <a16:rowId xmlns:a16="http://schemas.microsoft.com/office/drawing/2014/main" val="10009"/>
+                  </a:ext>
+                </a:extLst>
               </a:tr>
             </a:tbl>
           </a:graphicData>
@@ -5723,7 +5934,7 @@
 </file>
 
 <file path=ppt/slides/slide20.xml><?xml version="1.0" encoding="utf-8"?>
-<p:sld xmlns:a="http://schemas.openxmlformats.org/drawingml/2006/main" xmlns:p="http://schemas.openxmlformats.org/presentationml/2006/main" xmlns:r="http://schemas.openxmlformats.org/officeDocument/2006/relationships">
+<p:sld xmlns:a="http://schemas.openxmlformats.org/drawingml/2006/main" xmlns:r="http://schemas.openxmlformats.org/officeDocument/2006/relationships" xmlns:p="http://schemas.openxmlformats.org/presentationml/2006/main">
   <p:cSld>
     <p:spTree>
       <p:nvGrpSpPr>
@@ -5731,7 +5942,14 @@
         <p:cNvGrpSpPr/>
         <p:nvPr/>
       </p:nvGrpSpPr>
-      <p:grpSpPr/>
+      <p:grpSpPr>
+        <a:xfrm>
+          <a:off x="0" y="0"/>
+          <a:ext cx="0" cy="0"/>
+          <a:chOff x="0" y="0"/>
+          <a:chExt cx="0" cy="0"/>
+        </a:xfrm>
+      </p:grpSpPr>
       <p:sp>
         <p:nvSpPr>
           <p:cNvPr id="2" name="TextBox 1"/>
@@ -5775,7 +5993,7 @@
         </p:nvGraphicFramePr>
         <p:xfrm>
           <a:off x="731520" y="1280160"/>
-          <a:ext cx="10698480" cy="2560320"/>
+          <a:ext cx="10698480" cy="3108960"/>
         </p:xfrm>
         <a:graphic>
           <a:graphicData uri="http://schemas.openxmlformats.org/drawingml/2006/table">
@@ -5784,9 +6002,27 @@
                 <a:tableStyleId>{5C22544A-7EE6-4342-B048-85BDC9FD1C3A}</a:tableStyleId>
               </a:tblPr>
               <a:tblGrid>
-                <a:gridCol w="2468880"/>
-                <a:gridCol w="4206240"/>
-                <a:gridCol w="4023360"/>
+                <a:gridCol w="2468880">
+                  <a:extLst>
+                    <a:ext uri="{9D8B030D-6E8A-4147-A177-3AD203B41FA5}">
+                      <a16:colId xmlns:a16="http://schemas.microsoft.com/office/drawing/2014/main" val="20000"/>
+                    </a:ext>
+                  </a:extLst>
+                </a:gridCol>
+                <a:gridCol w="4206240">
+                  <a:extLst>
+                    <a:ext uri="{9D8B030D-6E8A-4147-A177-3AD203B41FA5}">
+                      <a16:colId xmlns:a16="http://schemas.microsoft.com/office/drawing/2014/main" val="20001"/>
+                    </a:ext>
+                  </a:extLst>
+                </a:gridCol>
+                <a:gridCol w="4023360">
+                  <a:extLst>
+                    <a:ext uri="{9D8B030D-6E8A-4147-A177-3AD203B41FA5}">
+                      <a16:colId xmlns:a16="http://schemas.microsoft.com/office/drawing/2014/main" val="20002"/>
+                    </a:ext>
+                  </a:extLst>
+                </a:gridCol>
               </a:tblGrid>
               <a:tr h="365760">
                 <a:tc>
@@ -5828,6 +6064,11 @@
                   </a:txBody>
                   <a:tcPr/>
                 </a:tc>
+                <a:extLst>
+                  <a:ext uri="{0D108BD9-81ED-4DB2-BD59-A6C34878D82A}">
+                    <a16:rowId xmlns:a16="http://schemas.microsoft.com/office/drawing/2014/main" val="10000"/>
+                  </a:ext>
+                </a:extLst>
               </a:tr>
               <a:tr h="365760">
                 <a:tc>
@@ -5869,6 +6110,11 @@
                   </a:txBody>
                   <a:tcPr/>
                 </a:tc>
+                <a:extLst>
+                  <a:ext uri="{0D108BD9-81ED-4DB2-BD59-A6C34878D82A}">
+                    <a16:rowId xmlns:a16="http://schemas.microsoft.com/office/drawing/2014/main" val="10001"/>
+                  </a:ext>
+                </a:extLst>
               </a:tr>
               <a:tr h="365760">
                 <a:tc>
@@ -5910,6 +6156,11 @@
                   </a:txBody>
                   <a:tcPr/>
                 </a:tc>
+                <a:extLst>
+                  <a:ext uri="{0D108BD9-81ED-4DB2-BD59-A6C34878D82A}">
+                    <a16:rowId xmlns:a16="http://schemas.microsoft.com/office/drawing/2014/main" val="10002"/>
+                  </a:ext>
+                </a:extLst>
               </a:tr>
               <a:tr h="365760">
                 <a:tc>
@@ -5951,6 +6202,11 @@
                   </a:txBody>
                   <a:tcPr/>
                 </a:tc>
+                <a:extLst>
+                  <a:ext uri="{0D108BD9-81ED-4DB2-BD59-A6C34878D82A}">
+                    <a16:rowId xmlns:a16="http://schemas.microsoft.com/office/drawing/2014/main" val="10003"/>
+                  </a:ext>
+                </a:extLst>
               </a:tr>
               <a:tr h="365760">
                 <a:tc>
@@ -5992,6 +6248,11 @@
                   </a:txBody>
                   <a:tcPr/>
                 </a:tc>
+                <a:extLst>
+                  <a:ext uri="{0D108BD9-81ED-4DB2-BD59-A6C34878D82A}">
+                    <a16:rowId xmlns:a16="http://schemas.microsoft.com/office/drawing/2014/main" val="10004"/>
+                  </a:ext>
+                </a:extLst>
               </a:tr>
               <a:tr h="365760">
                 <a:tc>
@@ -6033,6 +6294,11 @@
                   </a:txBody>
                   <a:tcPr/>
                 </a:tc>
+                <a:extLst>
+                  <a:ext uri="{0D108BD9-81ED-4DB2-BD59-A6C34878D82A}">
+                    <a16:rowId xmlns:a16="http://schemas.microsoft.com/office/drawing/2014/main" val="10005"/>
+                  </a:ext>
+                </a:extLst>
               </a:tr>
               <a:tr h="365760">
                 <a:tc>
@@ -6074,6 +6340,11 @@
                   </a:txBody>
                   <a:tcPr/>
                 </a:tc>
+                <a:extLst>
+                  <a:ext uri="{0D108BD9-81ED-4DB2-BD59-A6C34878D82A}">
+                    <a16:rowId xmlns:a16="http://schemas.microsoft.com/office/drawing/2014/main" val="10006"/>
+                  </a:ext>
+                </a:extLst>
               </a:tr>
             </a:tbl>
           </a:graphicData>
@@ -6126,7 +6397,7 @@
 </file>
 
 <file path=ppt/slides/slide21.xml><?xml version="1.0" encoding="utf-8"?>
-<p:sld xmlns:a="http://schemas.openxmlformats.org/drawingml/2006/main" xmlns:p="http://schemas.openxmlformats.org/presentationml/2006/main" xmlns:r="http://schemas.openxmlformats.org/officeDocument/2006/relationships">
+<p:sld xmlns:a="http://schemas.openxmlformats.org/drawingml/2006/main" xmlns:r="http://schemas.openxmlformats.org/officeDocument/2006/relationships" xmlns:p="http://schemas.openxmlformats.org/presentationml/2006/main">
   <p:cSld>
     <p:spTree>
       <p:nvGrpSpPr>
@@ -6134,7 +6405,14 @@
         <p:cNvGrpSpPr/>
         <p:nvPr/>
       </p:nvGrpSpPr>
-      <p:grpSpPr/>
+      <p:grpSpPr>
+        <a:xfrm>
+          <a:off x="0" y="0"/>
+          <a:ext cx="0" cy="0"/>
+          <a:chOff x="0" y="0"/>
+          <a:chExt cx="0" cy="0"/>
+        </a:xfrm>
+      </p:grpSpPr>
       <p:sp>
         <p:nvSpPr>
           <p:cNvPr id="2" name="TextBox 1"/>
@@ -6178,7 +6456,7 @@
         </p:nvGraphicFramePr>
         <p:xfrm>
           <a:off x="731520" y="1554480"/>
-          <a:ext cx="10698480" cy="1097280"/>
+          <a:ext cx="10698480" cy="1188720"/>
         </p:xfrm>
         <a:graphic>
           <a:graphicData uri="http://schemas.openxmlformats.org/drawingml/2006/table">
@@ -6187,16 +6465,36 @@
                 <a:tableStyleId>{5C22544A-7EE6-4342-B048-85BDC9FD1C3A}</a:tableStyleId>
               </a:tblPr>
               <a:tblGrid>
-                <a:gridCol w="3108960"/>
-                <a:gridCol w="4023360"/>
-                <a:gridCol w="3566160"/>
+                <a:gridCol w="3108960">
+                  <a:extLst>
+                    <a:ext uri="{9D8B030D-6E8A-4147-A177-3AD203B41FA5}">
+                      <a16:colId xmlns:a16="http://schemas.microsoft.com/office/drawing/2014/main" val="20000"/>
+                    </a:ext>
+                  </a:extLst>
+                </a:gridCol>
+                <a:gridCol w="4023360">
+                  <a:extLst>
+                    <a:ext uri="{9D8B030D-6E8A-4147-A177-3AD203B41FA5}">
+                      <a16:colId xmlns:a16="http://schemas.microsoft.com/office/drawing/2014/main" val="20001"/>
+                    </a:ext>
+                  </a:extLst>
+                </a:gridCol>
+                <a:gridCol w="3566160">
+                  <a:extLst>
+                    <a:ext uri="{9D8B030D-6E8A-4147-A177-3AD203B41FA5}">
+                      <a16:colId xmlns:a16="http://schemas.microsoft.com/office/drawing/2014/main" val="20002"/>
+                    </a:ext>
+                  </a:extLst>
+                </a:gridCol>
               </a:tblGrid>
               <a:tr h="365760">
                 <a:tc>
                   <a:txBody>
                     <a:bodyPr/>
                     <a:lstStyle/>
-                    <a:p/>
+                    <a:p>
+                      <a:endParaRPr/>
+                    </a:p>
                   </a:txBody>
                   <a:tcPr/>
                 </a:tc>
@@ -6226,6 +6524,11 @@
                   </a:txBody>
                   <a:tcPr/>
                 </a:tc>
+                <a:extLst>
+                  <a:ext uri="{0D108BD9-81ED-4DB2-BD59-A6C34878D82A}">
+                    <a16:rowId xmlns:a16="http://schemas.microsoft.com/office/drawing/2014/main" val="10000"/>
+                  </a:ext>
+                </a:extLst>
               </a:tr>
               <a:tr h="365760">
                 <a:tc>
@@ -6267,6 +6570,11 @@
                   </a:txBody>
                   <a:tcPr/>
                 </a:tc>
+                <a:extLst>
+                  <a:ext uri="{0D108BD9-81ED-4DB2-BD59-A6C34878D82A}">
+                    <a16:rowId xmlns:a16="http://schemas.microsoft.com/office/drawing/2014/main" val="10001"/>
+                  </a:ext>
+                </a:extLst>
               </a:tr>
               <a:tr h="365760">
                 <a:tc>
@@ -6308,6 +6616,11 @@
                   </a:txBody>
                   <a:tcPr/>
                 </a:tc>
+                <a:extLst>
+                  <a:ext uri="{0D108BD9-81ED-4DB2-BD59-A6C34878D82A}">
+                    <a16:rowId xmlns:a16="http://schemas.microsoft.com/office/drawing/2014/main" val="10002"/>
+                  </a:ext>
+                </a:extLst>
               </a:tr>
             </a:tbl>
           </a:graphicData>
@@ -6375,7 +6688,7 @@
 </file>
 
 <file path=ppt/slides/slide22.xml><?xml version="1.0" encoding="utf-8"?>
-<p:sld xmlns:a="http://schemas.openxmlformats.org/drawingml/2006/main" xmlns:p="http://schemas.openxmlformats.org/presentationml/2006/main" xmlns:r="http://schemas.openxmlformats.org/officeDocument/2006/relationships">
+<p:sld xmlns:a="http://schemas.openxmlformats.org/drawingml/2006/main" xmlns:r="http://schemas.openxmlformats.org/officeDocument/2006/relationships" xmlns:p="http://schemas.openxmlformats.org/presentationml/2006/main">
   <p:cSld>
     <p:spTree>
       <p:nvGrpSpPr>
@@ -6383,7 +6696,14 @@
         <p:cNvGrpSpPr/>
         <p:nvPr/>
       </p:nvGrpSpPr>
-      <p:grpSpPr/>
+      <p:grpSpPr>
+        <a:xfrm>
+          <a:off x="0" y="0"/>
+          <a:ext cx="0" cy="0"/>
+          <a:chOff x="0" y="0"/>
+          <a:chExt cx="0" cy="0"/>
+        </a:xfrm>
+      </p:grpSpPr>
       <p:sp>
         <p:nvSpPr>
           <p:cNvPr id="2" name="TextBox 1"/>
@@ -6436,9 +6756,27 @@
                 <a:tableStyleId>{5C22544A-7EE6-4342-B048-85BDC9FD1C3A}</a:tableStyleId>
               </a:tblPr>
               <a:tblGrid>
-                <a:gridCol w="3474720"/>
-                <a:gridCol w="4023360"/>
-                <a:gridCol w="3200400"/>
+                <a:gridCol w="3474720">
+                  <a:extLst>
+                    <a:ext uri="{9D8B030D-6E8A-4147-A177-3AD203B41FA5}">
+                      <a16:colId xmlns:a16="http://schemas.microsoft.com/office/drawing/2014/main" val="20000"/>
+                    </a:ext>
+                  </a:extLst>
+                </a:gridCol>
+                <a:gridCol w="4023360">
+                  <a:extLst>
+                    <a:ext uri="{9D8B030D-6E8A-4147-A177-3AD203B41FA5}">
+                      <a16:colId xmlns:a16="http://schemas.microsoft.com/office/drawing/2014/main" val="20001"/>
+                    </a:ext>
+                  </a:extLst>
+                </a:gridCol>
+                <a:gridCol w="3200400">
+                  <a:extLst>
+                    <a:ext uri="{9D8B030D-6E8A-4147-A177-3AD203B41FA5}">
+                      <a16:colId xmlns:a16="http://schemas.microsoft.com/office/drawing/2014/main" val="20002"/>
+                    </a:ext>
+                  </a:extLst>
+                </a:gridCol>
               </a:tblGrid>
               <a:tr h="365760">
                 <a:tc>
@@ -6480,6 +6818,11 @@
                   </a:txBody>
                   <a:tcPr/>
                 </a:tc>
+                <a:extLst>
+                  <a:ext uri="{0D108BD9-81ED-4DB2-BD59-A6C34878D82A}">
+                    <a16:rowId xmlns:a16="http://schemas.microsoft.com/office/drawing/2014/main" val="10000"/>
+                  </a:ext>
+                </a:extLst>
               </a:tr>
               <a:tr h="365760">
                 <a:tc>
@@ -6521,6 +6864,11 @@
                   </a:txBody>
                   <a:tcPr/>
                 </a:tc>
+                <a:extLst>
+                  <a:ext uri="{0D108BD9-81ED-4DB2-BD59-A6C34878D82A}">
+                    <a16:rowId xmlns:a16="http://schemas.microsoft.com/office/drawing/2014/main" val="10001"/>
+                  </a:ext>
+                </a:extLst>
               </a:tr>
               <a:tr h="365760">
                 <a:tc>
@@ -6562,6 +6910,11 @@
                   </a:txBody>
                   <a:tcPr/>
                 </a:tc>
+                <a:extLst>
+                  <a:ext uri="{0D108BD9-81ED-4DB2-BD59-A6C34878D82A}">
+                    <a16:rowId xmlns:a16="http://schemas.microsoft.com/office/drawing/2014/main" val="10002"/>
+                  </a:ext>
+                </a:extLst>
               </a:tr>
               <a:tr h="365760">
                 <a:tc>
@@ -6603,6 +6956,11 @@
                   </a:txBody>
                   <a:tcPr/>
                 </a:tc>
+                <a:extLst>
+                  <a:ext uri="{0D108BD9-81ED-4DB2-BD59-A6C34878D82A}">
+                    <a16:rowId xmlns:a16="http://schemas.microsoft.com/office/drawing/2014/main" val="10003"/>
+                  </a:ext>
+                </a:extLst>
               </a:tr>
               <a:tr h="365760">
                 <a:tc>
@@ -6644,6 +7002,11 @@
                   </a:txBody>
                   <a:tcPr/>
                 </a:tc>
+                <a:extLst>
+                  <a:ext uri="{0D108BD9-81ED-4DB2-BD59-A6C34878D82A}">
+                    <a16:rowId xmlns:a16="http://schemas.microsoft.com/office/drawing/2014/main" val="10004"/>
+                  </a:ext>
+                </a:extLst>
               </a:tr>
               <a:tr h="365760">
                 <a:tc>
@@ -6685,6 +7048,11 @@
                   </a:txBody>
                   <a:tcPr/>
                 </a:tc>
+                <a:extLst>
+                  <a:ext uri="{0D108BD9-81ED-4DB2-BD59-A6C34878D82A}">
+                    <a16:rowId xmlns:a16="http://schemas.microsoft.com/office/drawing/2014/main" val="10005"/>
+                  </a:ext>
+                </a:extLst>
               </a:tr>
             </a:tbl>
           </a:graphicData>
@@ -6737,7 +7105,7 @@
 </file>
 
 <file path=ppt/slides/slide23.xml><?xml version="1.0" encoding="utf-8"?>
-<p:sld xmlns:a="http://schemas.openxmlformats.org/drawingml/2006/main" xmlns:p="http://schemas.openxmlformats.org/presentationml/2006/main" xmlns:r="http://schemas.openxmlformats.org/officeDocument/2006/relationships">
+<p:sld xmlns:a="http://schemas.openxmlformats.org/drawingml/2006/main" xmlns:r="http://schemas.openxmlformats.org/officeDocument/2006/relationships" xmlns:p="http://schemas.openxmlformats.org/presentationml/2006/main">
   <p:cSld>
     <p:spTree>
       <p:nvGrpSpPr>
@@ -6745,7 +7113,14 @@
         <p:cNvGrpSpPr/>
         <p:nvPr/>
       </p:nvGrpSpPr>
-      <p:grpSpPr/>
+      <p:grpSpPr>
+        <a:xfrm>
+          <a:off x="0" y="0"/>
+          <a:ext cx="0" cy="0"/>
+          <a:chOff x="0" y="0"/>
+          <a:chExt cx="0" cy="0"/>
+        </a:xfrm>
+      </p:grpSpPr>
       <p:sp>
         <p:nvSpPr>
           <p:cNvPr id="2" name="TextBox 1"/>
@@ -6939,7 +7314,7 @@
 </file>
 
 <file path=ppt/slides/slide24.xml><?xml version="1.0" encoding="utf-8"?>
-<p:sld xmlns:a="http://schemas.openxmlformats.org/drawingml/2006/main" xmlns:p="http://schemas.openxmlformats.org/presentationml/2006/main" xmlns:r="http://schemas.openxmlformats.org/officeDocument/2006/relationships">
+<p:sld xmlns:a="http://schemas.openxmlformats.org/drawingml/2006/main" xmlns:r="http://schemas.openxmlformats.org/officeDocument/2006/relationships" xmlns:p="http://schemas.openxmlformats.org/presentationml/2006/main">
   <p:cSld>
     <p:spTree>
       <p:nvGrpSpPr>
@@ -6947,7 +7322,14 @@
         <p:cNvGrpSpPr/>
         <p:nvPr/>
       </p:nvGrpSpPr>
-      <p:grpSpPr/>
+      <p:grpSpPr>
+        <a:xfrm>
+          <a:off x="0" y="0"/>
+          <a:ext cx="0" cy="0"/>
+          <a:chOff x="0" y="0"/>
+          <a:chExt cx="0" cy="0"/>
+        </a:xfrm>
+      </p:grpSpPr>
       <p:sp>
         <p:nvSpPr>
           <p:cNvPr id="2" name="TextBox 1"/>
@@ -7053,27 +7435,24 @@
                 <a:spcPts val="800"/>
               </a:spcAft>
             </a:pPr>
+            <a:endParaRPr sz="2400">
+              <a:solidFill>
+                <a:srgbClr val="212121"/>
+              </a:solidFill>
+            </a:endParaRPr>
+          </a:p>
+          <a:p>
+            <a:pPr>
+              <a:spcAft>
+                <a:spcPts val="800"/>
+              </a:spcAft>
+            </a:pPr>
             <a:r>
               <a:rPr sz="2600">
                 <a:solidFill>
                   <a:srgbClr val="212121"/>
                 </a:solidFill>
               </a:rPr>
-              <a:t/>
-            </a:r>
-          </a:p>
-          <a:p>
-            <a:pPr>
-              <a:spcAft>
-                <a:spcPts val="800"/>
-              </a:spcAft>
-            </a:pPr>
-            <a:r>
-              <a:rPr sz="2600">
-                <a:solidFill>
-                  <a:srgbClr val="212121"/>
-                </a:solidFill>
-              </a:rPr>
               <a:t>Every tool tonight, and every lab in Session 2, is this one move in different costumes.</a:t>
             </a:r>
           </a:p>
@@ -7083,14 +7462,11 @@
                 <a:spcPts val="800"/>
               </a:spcAft>
             </a:pPr>
-            <a:r>
-              <a:rPr sz="2600">
-                <a:solidFill>
-                  <a:srgbClr val="212121"/>
-                </a:solidFill>
-              </a:rPr>
-              <a:t/>
-            </a:r>
+            <a:endParaRPr sz="2600">
+              <a:solidFill>
+                <a:srgbClr val="212121"/>
+              </a:solidFill>
+            </a:endParaRPr>
           </a:p>
           <a:p>
             <a:pPr>
@@ -7118,7 +7494,7 @@
 </file>
 
 <file path=ppt/slides/slide25.xml><?xml version="1.0" encoding="utf-8"?>
-<p:sld xmlns:a="http://schemas.openxmlformats.org/drawingml/2006/main" xmlns:p="http://schemas.openxmlformats.org/presentationml/2006/main" xmlns:r="http://schemas.openxmlformats.org/officeDocument/2006/relationships">
+<p:sld xmlns:a="http://schemas.openxmlformats.org/drawingml/2006/main" xmlns:r="http://schemas.openxmlformats.org/officeDocument/2006/relationships" xmlns:p="http://schemas.openxmlformats.org/presentationml/2006/main">
   <p:cSld>
     <p:spTree>
       <p:nvGrpSpPr>
@@ -7126,7 +7502,14 @@
         <p:cNvGrpSpPr/>
         <p:nvPr/>
       </p:nvGrpSpPr>
-      <p:grpSpPr/>
+      <p:grpSpPr>
+        <a:xfrm>
+          <a:off x="0" y="0"/>
+          <a:ext cx="0" cy="0"/>
+          <a:chOff x="0" y="0"/>
+          <a:chExt cx="0" cy="0"/>
+        </a:xfrm>
+      </p:grpSpPr>
       <p:sp>
         <p:nvSpPr>
           <p:cNvPr id="2" name="TextBox 1"/>
@@ -7169,7 +7552,7 @@
 </file>
 
 <file path=ppt/slides/slide26.xml><?xml version="1.0" encoding="utf-8"?>
-<p:sld xmlns:a="http://schemas.openxmlformats.org/drawingml/2006/main" xmlns:p="http://schemas.openxmlformats.org/presentationml/2006/main" xmlns:r="http://schemas.openxmlformats.org/officeDocument/2006/relationships">
+<p:sld xmlns:a="http://schemas.openxmlformats.org/drawingml/2006/main" xmlns:r="http://schemas.openxmlformats.org/officeDocument/2006/relationships" xmlns:p="http://schemas.openxmlformats.org/presentationml/2006/main">
   <p:cSld>
     <p:spTree>
       <p:nvGrpSpPr>
@@ -7177,7 +7560,14 @@
         <p:cNvGrpSpPr/>
         <p:nvPr/>
       </p:nvGrpSpPr>
-      <p:grpSpPr/>
+      <p:grpSpPr>
+        <a:xfrm>
+          <a:off x="0" y="0"/>
+          <a:ext cx="0" cy="0"/>
+          <a:chOff x="0" y="0"/>
+          <a:chExt cx="0" cy="0"/>
+        </a:xfrm>
+      </p:grpSpPr>
       <p:sp>
         <p:nvSpPr>
           <p:cNvPr id="2" name="TextBox 1"/>
@@ -7254,27 +7644,25 @@
                 <a:spcPts val="800"/>
               </a:spcAft>
             </a:pPr>
+            <a:endParaRPr sz="2000">
+              <a:solidFill>
+                <a:srgbClr val="212121"/>
+              </a:solidFill>
+              <a:latin typeface="Courier New"/>
+            </a:endParaRPr>
+          </a:p>
+          <a:p>
+            <a:pPr>
+              <a:spcAft>
+                <a:spcPts val="800"/>
+              </a:spcAft>
+            </a:pPr>
             <a:r>
               <a:rPr sz="2400">
                 <a:solidFill>
                   <a:srgbClr val="212121"/>
                 </a:solidFill>
               </a:rPr>
-              <a:t/>
-            </a:r>
-          </a:p>
-          <a:p>
-            <a:pPr>
-              <a:spcAft>
-                <a:spcPts val="800"/>
-              </a:spcAft>
-            </a:pPr>
-            <a:r>
-              <a:rPr sz="2400">
-                <a:solidFill>
-                  <a:srgbClr val="212121"/>
-                </a:solidFill>
-              </a:rPr>
               <a:t>Is there a true/false assignment that makes the whole formula true?</a:t>
             </a:r>
           </a:p>
@@ -7284,14 +7672,11 @@
                 <a:spcPts val="800"/>
               </a:spcAft>
             </a:pPr>
-            <a:r>
-              <a:rPr sz="2400">
-                <a:solidFill>
-                  <a:srgbClr val="212121"/>
-                </a:solidFill>
-              </a:rPr>
-              <a:t/>
-            </a:r>
+            <a:endParaRPr sz="2400">
+              <a:solidFill>
+                <a:srgbClr val="212121"/>
+              </a:solidFill>
+            </a:endParaRPr>
           </a:p>
           <a:p>
             <a:pPr>
@@ -7334,7 +7719,7 @@
 </file>
 
 <file path=ppt/slides/slide27.xml><?xml version="1.0" encoding="utf-8"?>
-<p:sld xmlns:a="http://schemas.openxmlformats.org/drawingml/2006/main" xmlns:p="http://schemas.openxmlformats.org/presentationml/2006/main" xmlns:r="http://schemas.openxmlformats.org/officeDocument/2006/relationships">
+<p:sld xmlns:a="http://schemas.openxmlformats.org/drawingml/2006/main" xmlns:r="http://schemas.openxmlformats.org/officeDocument/2006/relationships" xmlns:p="http://schemas.openxmlformats.org/presentationml/2006/main">
   <p:cSld>
     <p:spTree>
       <p:nvGrpSpPr>
@@ -7342,7 +7727,14 @@
         <p:cNvGrpSpPr/>
         <p:nvPr/>
       </p:nvGrpSpPr>
-      <p:grpSpPr/>
+      <p:grpSpPr>
+        <a:xfrm>
+          <a:off x="0" y="0"/>
+          <a:ext cx="0" cy="0"/>
+          <a:chOff x="0" y="0"/>
+          <a:chExt cx="0" cy="0"/>
+        </a:xfrm>
+      </p:grpSpPr>
       <p:sp>
         <p:nvSpPr>
           <p:cNvPr id="2" name="TextBox 1"/>
@@ -7463,14 +7855,11 @@
                 <a:spcPts val="800"/>
               </a:spcAft>
             </a:pPr>
-            <a:r>
-              <a:rPr sz="2400">
-                <a:solidFill>
-                  <a:srgbClr val="212121"/>
-                </a:solidFill>
-              </a:rPr>
-              <a:t/>
-            </a:r>
+            <a:endParaRPr sz="2200">
+              <a:solidFill>
+                <a:srgbClr val="212121"/>
+              </a:solidFill>
+            </a:endParaRPr>
           </a:p>
           <a:p>
             <a:pPr>
@@ -7528,7 +7917,7 @@
 </file>
 
 <file path=ppt/slides/slide28.xml><?xml version="1.0" encoding="utf-8"?>
-<p:sld xmlns:a="http://schemas.openxmlformats.org/drawingml/2006/main" xmlns:p="http://schemas.openxmlformats.org/presentationml/2006/main" xmlns:r="http://schemas.openxmlformats.org/officeDocument/2006/relationships">
+<p:sld xmlns:a="http://schemas.openxmlformats.org/drawingml/2006/main" xmlns:r="http://schemas.openxmlformats.org/officeDocument/2006/relationships" xmlns:p="http://schemas.openxmlformats.org/presentationml/2006/main">
   <p:cSld>
     <p:spTree>
       <p:nvGrpSpPr>
@@ -7536,7 +7925,14 @@
         <p:cNvGrpSpPr/>
         <p:nvPr/>
       </p:nvGrpSpPr>
-      <p:grpSpPr/>
+      <p:grpSpPr>
+        <a:xfrm>
+          <a:off x="0" y="0"/>
+          <a:ext cx="0" cy="0"/>
+          <a:chOff x="0" y="0"/>
+          <a:chExt cx="0" cy="0"/>
+        </a:xfrm>
+      </p:grpSpPr>
       <p:sp>
         <p:nvSpPr>
           <p:cNvPr id="2" name="TextBox 1"/>
@@ -7580,7 +7976,7 @@
         </p:nvGraphicFramePr>
         <p:xfrm>
           <a:off x="731520" y="1554480"/>
-          <a:ext cx="10698480" cy="1828800"/>
+          <a:ext cx="10698480" cy="1981200"/>
         </p:xfrm>
         <a:graphic>
           <a:graphicData uri="http://schemas.openxmlformats.org/drawingml/2006/table">
@@ -7589,8 +7985,20 @@
                 <a:tableStyleId>{5C22544A-7EE6-4342-B048-85BDC9FD1C3A}</a:tableStyleId>
               </a:tblPr>
               <a:tblGrid>
-                <a:gridCol w="4754880"/>
-                <a:gridCol w="5943600"/>
+                <a:gridCol w="4754880">
+                  <a:extLst>
+                    <a:ext uri="{9D8B030D-6E8A-4147-A177-3AD203B41FA5}">
+                      <a16:colId xmlns:a16="http://schemas.microsoft.com/office/drawing/2014/main" val="20000"/>
+                    </a:ext>
+                  </a:extLst>
+                </a:gridCol>
+                <a:gridCol w="5943600">
+                  <a:extLst>
+                    <a:ext uri="{9D8B030D-6E8A-4147-A177-3AD203B41FA5}">
+                      <a16:colId xmlns:a16="http://schemas.microsoft.com/office/drawing/2014/main" val="20001"/>
+                    </a:ext>
+                  </a:extLst>
+                </a:gridCol>
               </a:tblGrid>
               <a:tr h="365760">
                 <a:tc>
@@ -7619,6 +8027,11 @@
                   </a:txBody>
                   <a:tcPr/>
                 </a:tc>
+                <a:extLst>
+                  <a:ext uri="{0D108BD9-81ED-4DB2-BD59-A6C34878D82A}">
+                    <a16:rowId xmlns:a16="http://schemas.microsoft.com/office/drawing/2014/main" val="10000"/>
+                  </a:ext>
+                </a:extLst>
               </a:tr>
               <a:tr h="365760">
                 <a:tc>
@@ -7647,6 +8060,11 @@
                   </a:txBody>
                   <a:tcPr/>
                 </a:tc>
+                <a:extLst>
+                  <a:ext uri="{0D108BD9-81ED-4DB2-BD59-A6C34878D82A}">
+                    <a16:rowId xmlns:a16="http://schemas.microsoft.com/office/drawing/2014/main" val="10001"/>
+                  </a:ext>
+                </a:extLst>
               </a:tr>
               <a:tr h="365760">
                 <a:tc>
@@ -7675,6 +8093,11 @@
                   </a:txBody>
                   <a:tcPr/>
                 </a:tc>
+                <a:extLst>
+                  <a:ext uri="{0D108BD9-81ED-4DB2-BD59-A6C34878D82A}">
+                    <a16:rowId xmlns:a16="http://schemas.microsoft.com/office/drawing/2014/main" val="10002"/>
+                  </a:ext>
+                </a:extLst>
               </a:tr>
               <a:tr h="365760">
                 <a:tc>
@@ -7703,6 +8126,11 @@
                   </a:txBody>
                   <a:tcPr/>
                 </a:tc>
+                <a:extLst>
+                  <a:ext uri="{0D108BD9-81ED-4DB2-BD59-A6C34878D82A}">
+                    <a16:rowId xmlns:a16="http://schemas.microsoft.com/office/drawing/2014/main" val="10003"/>
+                  </a:ext>
+                </a:extLst>
               </a:tr>
               <a:tr h="365760">
                 <a:tc>
@@ -7731,6 +8159,11 @@
                   </a:txBody>
                   <a:tcPr/>
                 </a:tc>
+                <a:extLst>
+                  <a:ext uri="{0D108BD9-81ED-4DB2-BD59-A6C34878D82A}">
+                    <a16:rowId xmlns:a16="http://schemas.microsoft.com/office/drawing/2014/main" val="10004"/>
+                  </a:ext>
+                </a:extLst>
               </a:tr>
             </a:tbl>
           </a:graphicData>
@@ -7783,7 +8216,7 @@
 </file>
 
 <file path=ppt/slides/slide29.xml><?xml version="1.0" encoding="utf-8"?>
-<p:sld xmlns:a="http://schemas.openxmlformats.org/drawingml/2006/main" xmlns:p="http://schemas.openxmlformats.org/presentationml/2006/main" xmlns:r="http://schemas.openxmlformats.org/officeDocument/2006/relationships">
+<p:sld xmlns:a="http://schemas.openxmlformats.org/drawingml/2006/main" xmlns:r="http://schemas.openxmlformats.org/officeDocument/2006/relationships" xmlns:p="http://schemas.openxmlformats.org/presentationml/2006/main">
   <p:cSld>
     <p:spTree>
       <p:nvGrpSpPr>
@@ -7791,7 +8224,14 @@
         <p:cNvGrpSpPr/>
         <p:nvPr/>
       </p:nvGrpSpPr>
-      <p:grpSpPr/>
+      <p:grpSpPr>
+        <a:xfrm>
+          <a:off x="0" y="0"/>
+          <a:ext cx="0" cy="0"/>
+          <a:chOff x="0" y="0"/>
+          <a:chExt cx="0" cy="0"/>
+        </a:xfrm>
+      </p:grpSpPr>
       <p:sp>
         <p:nvSpPr>
           <p:cNvPr id="2" name="TextBox 1"/>
@@ -7884,14 +8324,12 @@
                 <a:spcPts val="800"/>
               </a:spcAft>
             </a:pPr>
-            <a:r>
-              <a:rPr sz="2400">
-                <a:solidFill>
-                  <a:srgbClr val="212121"/>
-                </a:solidFill>
-              </a:rPr>
-              <a:t/>
-            </a:r>
+            <a:endParaRPr sz="2000">
+              <a:solidFill>
+                <a:srgbClr val="212121"/>
+              </a:solidFill>
+              <a:latin typeface="Courier New"/>
+            </a:endParaRPr>
           </a:p>
           <a:p>
             <a:pPr>
@@ -7964,7 +8402,7 @@
 </file>
 
 <file path=ppt/slides/slide3.xml><?xml version="1.0" encoding="utf-8"?>
-<p:sld xmlns:a="http://schemas.openxmlformats.org/drawingml/2006/main" xmlns:p="http://schemas.openxmlformats.org/presentationml/2006/main" xmlns:r="http://schemas.openxmlformats.org/officeDocument/2006/relationships">
+<p:sld xmlns:a="http://schemas.openxmlformats.org/drawingml/2006/main" xmlns:r="http://schemas.openxmlformats.org/officeDocument/2006/relationships" xmlns:p="http://schemas.openxmlformats.org/presentationml/2006/main">
   <p:cSld>
     <p:spTree>
       <p:nvGrpSpPr>
@@ -7972,7 +8410,14 @@
         <p:cNvGrpSpPr/>
         <p:nvPr/>
       </p:nvGrpSpPr>
-      <p:grpSpPr/>
+      <p:grpSpPr>
+        <a:xfrm>
+          <a:off x="0" y="0"/>
+          <a:ext cx="0" cy="0"/>
+          <a:chOff x="0" y="0"/>
+          <a:chExt cx="0" cy="0"/>
+        </a:xfrm>
+      </p:grpSpPr>
       <p:sp>
         <p:nvSpPr>
           <p:cNvPr id="2" name="TextBox 1"/>
@@ -8068,7 +8513,7 @@
 </file>
 
 <file path=ppt/slides/slide30.xml><?xml version="1.0" encoding="utf-8"?>
-<p:sld xmlns:a="http://schemas.openxmlformats.org/drawingml/2006/main" xmlns:p="http://schemas.openxmlformats.org/presentationml/2006/main" xmlns:r="http://schemas.openxmlformats.org/officeDocument/2006/relationships">
+<p:sld xmlns:a="http://schemas.openxmlformats.org/drawingml/2006/main" xmlns:r="http://schemas.openxmlformats.org/officeDocument/2006/relationships" xmlns:p="http://schemas.openxmlformats.org/presentationml/2006/main">
   <p:cSld>
     <p:spTree>
       <p:nvGrpSpPr>
@@ -8076,7 +8521,14 @@
         <p:cNvGrpSpPr/>
         <p:nvPr/>
       </p:nvGrpSpPr>
-      <p:grpSpPr/>
+      <p:grpSpPr>
+        <a:xfrm>
+          <a:off x="0" y="0"/>
+          <a:ext cx="0" cy="0"/>
+          <a:chOff x="0" y="0"/>
+          <a:chExt cx="0" cy="0"/>
+        </a:xfrm>
+      </p:grpSpPr>
       <p:sp>
         <p:nvSpPr>
           <p:cNvPr id="2" name="TextBox 1"/>
@@ -8153,6 +8605,19 @@
                 <a:spcPts val="0"/>
               </a:spcAft>
             </a:pPr>
+            <a:endParaRPr sz="1800">
+              <a:solidFill>
+                <a:srgbClr val="212121"/>
+              </a:solidFill>
+              <a:latin typeface="Courier New"/>
+            </a:endParaRPr>
+          </a:p>
+          <a:p>
+            <a:pPr>
+              <a:spcAft>
+                <a:spcPts val="0"/>
+              </a:spcAft>
+            </a:pPr>
             <a:r>
               <a:rPr sz="1800">
                 <a:solidFill>
@@ -8160,7 +8625,7 @@
                 </a:solidFill>
                 <a:latin typeface="Courier New"/>
               </a:rPr>
-              <a:t/>
+              <a:t>Query 1: x + y == 42 and x &gt; 100</a:t>
             </a:r>
           </a:p>
           <a:p>
@@ -8176,7 +8641,7 @@
                 </a:solidFill>
                 <a:latin typeface="Courier New"/>
               </a:rPr>
-              <a:t>Query 1: x + y == 42 and x &gt; 100</a:t>
+              <a:t>[y = -59, x = 101]            ← a model, in milliseconds</a:t>
             </a:r>
           </a:p>
           <a:p>
@@ -8185,6 +8650,19 @@
                 <a:spcPts val="0"/>
               </a:spcAft>
             </a:pPr>
+            <a:endParaRPr sz="1800">
+              <a:solidFill>
+                <a:srgbClr val="212121"/>
+              </a:solidFill>
+              <a:latin typeface="Courier New"/>
+            </a:endParaRPr>
+          </a:p>
+          <a:p>
+            <a:pPr>
+              <a:spcAft>
+                <a:spcPts val="0"/>
+              </a:spcAft>
+            </a:pPr>
             <a:r>
               <a:rPr sz="1800">
                 <a:solidFill>
@@ -8192,7 +8670,7 @@
                 </a:solidFill>
                 <a:latin typeface="Courier New"/>
               </a:rPr>
-              <a:t>[y = -59, x = 101]            ← a model, in milliseconds</a:t>
+              <a:t>Query 2: x*x == 2*y*y, x &gt; 0, y &gt; 0 (no overflow)</a:t>
             </a:r>
           </a:p>
           <a:p>
@@ -8208,38 +8686,6 @@
                 </a:solidFill>
                 <a:latin typeface="Courier New"/>
               </a:rPr>
-              <a:t/>
-            </a:r>
-          </a:p>
-          <a:p>
-            <a:pPr>
-              <a:spcAft>
-                <a:spcPts val="0"/>
-              </a:spcAft>
-            </a:pPr>
-            <a:r>
-              <a:rPr sz="1800">
-                <a:solidFill>
-                  <a:srgbClr val="212121"/>
-                </a:solidFill>
-                <a:latin typeface="Courier New"/>
-              </a:rPr>
-              <a:t>Query 2: x*x == 2*y*y, x &gt; 0, y &gt; 0 (no overflow)</a:t>
-            </a:r>
-          </a:p>
-          <a:p>
-            <a:pPr>
-              <a:spcAft>
-                <a:spcPts val="0"/>
-              </a:spcAft>
-            </a:pPr>
-            <a:r>
-              <a:rPr sz="1800">
-                <a:solidFill>
-                  <a:srgbClr val="212121"/>
-                </a:solidFill>
-                <a:latin typeface="Courier New"/>
-              </a:rPr>
               <a:t>unsat                          ← a proof</a:t>
             </a:r>
           </a:p>
@@ -8249,14 +8695,12 @@
                 <a:spcPts val="800"/>
               </a:spcAft>
             </a:pPr>
-            <a:r>
-              <a:rPr sz="2200">
-                <a:solidFill>
-                  <a:srgbClr val="212121"/>
-                </a:solidFill>
-              </a:rPr>
-              <a:t/>
-            </a:r>
+            <a:endParaRPr sz="1800">
+              <a:solidFill>
+                <a:srgbClr val="212121"/>
+              </a:solidFill>
+              <a:latin typeface="Courier New"/>
+            </a:endParaRPr>
           </a:p>
           <a:p>
             <a:pPr>
@@ -8284,7 +8728,7 @@
 </file>
 
 <file path=ppt/slides/slide31.xml><?xml version="1.0" encoding="utf-8"?>
-<p:sld xmlns:a="http://schemas.openxmlformats.org/drawingml/2006/main" xmlns:p="http://schemas.openxmlformats.org/presentationml/2006/main" xmlns:r="http://schemas.openxmlformats.org/officeDocument/2006/relationships">
+<p:sld xmlns:a="http://schemas.openxmlformats.org/drawingml/2006/main" xmlns:r="http://schemas.openxmlformats.org/officeDocument/2006/relationships" xmlns:p="http://schemas.openxmlformats.org/presentationml/2006/main">
   <p:cSld>
     <p:spTree>
       <p:nvGrpSpPr>
@@ -8292,7 +8736,14 @@
         <p:cNvGrpSpPr/>
         <p:nvPr/>
       </p:nvGrpSpPr>
-      <p:grpSpPr/>
+      <p:grpSpPr>
+        <a:xfrm>
+          <a:off x="0" y="0"/>
+          <a:ext cx="0" cy="0"/>
+          <a:chOff x="0" y="0"/>
+          <a:chExt cx="0" cy="0"/>
+        </a:xfrm>
+      </p:grpSpPr>
       <p:sp>
         <p:nvSpPr>
           <p:cNvPr id="2" name="TextBox 1"/>
@@ -8401,14 +8852,12 @@
                 <a:spcPts val="800"/>
               </a:spcAft>
             </a:pPr>
-            <a:r>
-              <a:rPr sz="2200">
-                <a:solidFill>
-                  <a:srgbClr val="212121"/>
-                </a:solidFill>
-              </a:rPr>
-              <a:t/>
-            </a:r>
+            <a:endParaRPr sz="1800">
+              <a:solidFill>
+                <a:srgbClr val="212121"/>
+              </a:solidFill>
+              <a:latin typeface="Courier New"/>
+            </a:endParaRPr>
           </a:p>
           <a:p>
             <a:pPr>
@@ -8464,14 +8913,12 @@
                 <a:spcPts val="800"/>
               </a:spcAft>
             </a:pPr>
-            <a:r>
-              <a:rPr sz="2200">
-                <a:solidFill>
-                  <a:srgbClr val="212121"/>
-                </a:solidFill>
-              </a:rPr>
-              <a:t/>
-            </a:r>
+            <a:endParaRPr sz="1800">
+              <a:solidFill>
+                <a:srgbClr val="212121"/>
+              </a:solidFill>
+              <a:latin typeface="Courier New"/>
+            </a:endParaRPr>
           </a:p>
           <a:p>
             <a:pPr>
@@ -8499,7 +8946,7 @@
 </file>
 
 <file path=ppt/slides/slide32.xml><?xml version="1.0" encoding="utf-8"?>
-<p:sld xmlns:a="http://schemas.openxmlformats.org/drawingml/2006/main" xmlns:p="http://schemas.openxmlformats.org/presentationml/2006/main" xmlns:r="http://schemas.openxmlformats.org/officeDocument/2006/relationships">
+<p:sld xmlns:a="http://schemas.openxmlformats.org/drawingml/2006/main" xmlns:r="http://schemas.openxmlformats.org/officeDocument/2006/relationships" xmlns:p="http://schemas.openxmlformats.org/presentationml/2006/main">
   <p:cSld>
     <p:spTree>
       <p:nvGrpSpPr>
@@ -8507,7 +8954,14 @@
         <p:cNvGrpSpPr/>
         <p:nvPr/>
       </p:nvGrpSpPr>
-      <p:grpSpPr/>
+      <p:grpSpPr>
+        <a:xfrm>
+          <a:off x="0" y="0"/>
+          <a:ext cx="0" cy="0"/>
+          <a:chOff x="0" y="0"/>
+          <a:chExt cx="0" cy="0"/>
+        </a:xfrm>
+      </p:grpSpPr>
       <p:sp>
         <p:nvSpPr>
           <p:cNvPr id="2" name="TextBox 1"/>
@@ -8632,14 +9086,12 @@
                 <a:spcPts val="800"/>
               </a:spcAft>
             </a:pPr>
-            <a:r>
-              <a:rPr sz="2200">
-                <a:solidFill>
-                  <a:srgbClr val="212121"/>
-                </a:solidFill>
-              </a:rPr>
-              <a:t/>
-            </a:r>
+            <a:endParaRPr sz="1800">
+              <a:solidFill>
+                <a:srgbClr val="212121"/>
+              </a:solidFill>
+              <a:latin typeface="Courier New"/>
+            </a:endParaRPr>
           </a:p>
           <a:p>
             <a:pPr>
@@ -8697,7 +9149,7 @@
 </file>
 
 <file path=ppt/slides/slide33.xml><?xml version="1.0" encoding="utf-8"?>
-<p:sld xmlns:a="http://schemas.openxmlformats.org/drawingml/2006/main" xmlns:p="http://schemas.openxmlformats.org/presentationml/2006/main" xmlns:r="http://schemas.openxmlformats.org/officeDocument/2006/relationships">
+<p:sld xmlns:a="http://schemas.openxmlformats.org/drawingml/2006/main" xmlns:r="http://schemas.openxmlformats.org/officeDocument/2006/relationships" xmlns:p="http://schemas.openxmlformats.org/presentationml/2006/main">
   <p:cSld>
     <p:spTree>
       <p:nvGrpSpPr>
@@ -8705,7 +9157,14 @@
         <p:cNvGrpSpPr/>
         <p:nvPr/>
       </p:nvGrpSpPr>
-      <p:grpSpPr/>
+      <p:grpSpPr>
+        <a:xfrm>
+          <a:off x="0" y="0"/>
+          <a:ext cx="0" cy="0"/>
+          <a:chOff x="0" y="0"/>
+          <a:chExt cx="0" cy="0"/>
+        </a:xfrm>
+      </p:grpSpPr>
       <p:sp>
         <p:nvSpPr>
           <p:cNvPr id="2" name="TextBox 1"/>
@@ -8829,14 +9288,12 @@
                 <a:spcPts val="800"/>
               </a:spcAft>
             </a:pPr>
-            <a:r>
-              <a:rPr sz="2200">
-                <a:solidFill>
-                  <a:srgbClr val="212121"/>
-                </a:solidFill>
-              </a:rPr>
-              <a:t/>
-            </a:r>
+            <a:endParaRPr sz="1800">
+              <a:solidFill>
+                <a:srgbClr val="212121"/>
+              </a:solidFill>
+              <a:latin typeface="Courier New"/>
+            </a:endParaRPr>
           </a:p>
           <a:p>
             <a:pPr>
@@ -8894,7 +9351,7 @@
 </file>
 
 <file path=ppt/slides/slide34.xml><?xml version="1.0" encoding="utf-8"?>
-<p:sld xmlns:a="http://schemas.openxmlformats.org/drawingml/2006/main" xmlns:p="http://schemas.openxmlformats.org/presentationml/2006/main" xmlns:r="http://schemas.openxmlformats.org/officeDocument/2006/relationships">
+<p:sld xmlns:a="http://schemas.openxmlformats.org/drawingml/2006/main" xmlns:r="http://schemas.openxmlformats.org/officeDocument/2006/relationships" xmlns:p="http://schemas.openxmlformats.org/presentationml/2006/main">
   <p:cSld>
     <p:spTree>
       <p:nvGrpSpPr>
@@ -8902,7 +9359,14 @@
         <p:cNvGrpSpPr/>
         <p:nvPr/>
       </p:nvGrpSpPr>
-      <p:grpSpPr/>
+      <p:grpSpPr>
+        <a:xfrm>
+          <a:off x="0" y="0"/>
+          <a:ext cx="0" cy="0"/>
+          <a:chOff x="0" y="0"/>
+          <a:chExt cx="0" cy="0"/>
+        </a:xfrm>
+      </p:grpSpPr>
       <p:sp>
         <p:nvSpPr>
           <p:cNvPr id="2" name="TextBox 1"/>
@@ -9040,14 +9504,12 @@
                 <a:spcPts val="800"/>
               </a:spcAft>
             </a:pPr>
-            <a:r>
-              <a:rPr sz="2200">
-                <a:solidFill>
-                  <a:srgbClr val="212121"/>
-                </a:solidFill>
-              </a:rPr>
-              <a:t/>
-            </a:r>
+            <a:endParaRPr sz="1800">
+              <a:solidFill>
+                <a:srgbClr val="212121"/>
+              </a:solidFill>
+              <a:latin typeface="Courier New"/>
+            </a:endParaRPr>
           </a:p>
           <a:p>
             <a:pPr>
@@ -9090,7 +9552,7 @@
 </file>
 
 <file path=ppt/slides/slide35.xml><?xml version="1.0" encoding="utf-8"?>
-<p:sld xmlns:a="http://schemas.openxmlformats.org/drawingml/2006/main" xmlns:p="http://schemas.openxmlformats.org/presentationml/2006/main" xmlns:r="http://schemas.openxmlformats.org/officeDocument/2006/relationships">
+<p:sld xmlns:a="http://schemas.openxmlformats.org/drawingml/2006/main" xmlns:r="http://schemas.openxmlformats.org/officeDocument/2006/relationships" xmlns:p="http://schemas.openxmlformats.org/presentationml/2006/main">
   <p:cSld>
     <p:spTree>
       <p:nvGrpSpPr>
@@ -9098,7 +9560,14 @@
         <p:cNvGrpSpPr/>
         <p:nvPr/>
       </p:nvGrpSpPr>
-      <p:grpSpPr/>
+      <p:grpSpPr>
+        <a:xfrm>
+          <a:off x="0" y="0"/>
+          <a:ext cx="0" cy="0"/>
+          <a:chOff x="0" y="0"/>
+          <a:chExt cx="0" cy="0"/>
+        </a:xfrm>
+      </p:grpSpPr>
       <p:sp>
         <p:nvSpPr>
           <p:cNvPr id="2" name="TextBox 1"/>
@@ -9170,7 +9639,7 @@
           </a:fontRef>
         </p:style>
         <p:txBody>
-          <a:bodyPr rtlCol="0" anchor="ctr" wrap="square"/>
+          <a:bodyPr wrap="square" rtlCol="0" anchor="ctr"/>
           <a:lstStyle/>
           <a:p>
             <a:pPr algn="ctr"/>
@@ -9223,7 +9692,7 @@
           </a:fontRef>
         </p:style>
         <p:txBody>
-          <a:bodyPr rtlCol="0" anchor="ctr" wrap="square"/>
+          <a:bodyPr wrap="square" rtlCol="0" anchor="ctr"/>
           <a:lstStyle/>
           <a:p>
             <a:pPr algn="ctr"/>
@@ -9278,6 +9747,7 @@
           <a:lstStyle/>
           <a:p>
             <a:pPr algn="ctr"/>
+            <a:endParaRPr/>
           </a:p>
         </p:txBody>
       </p:sp>
@@ -9319,7 +9789,7 @@
           </a:fontRef>
         </p:style>
         <p:txBody>
-          <a:bodyPr rtlCol="0" anchor="ctr" wrap="square"/>
+          <a:bodyPr wrap="square" rtlCol="0" anchor="ctr"/>
           <a:lstStyle/>
           <a:p>
             <a:pPr algn="ctr"/>
@@ -9375,6 +9845,7 @@
           <a:lstStyle/>
           <a:p>
             <a:pPr algn="ctr"/>
+            <a:endParaRPr/>
           </a:p>
         </p:txBody>
       </p:sp>
@@ -9416,7 +9887,7 @@
           </a:fontRef>
         </p:style>
         <p:txBody>
-          <a:bodyPr rtlCol="0" anchor="ctr" wrap="square"/>
+          <a:bodyPr wrap="square" rtlCol="0" anchor="ctr"/>
           <a:lstStyle/>
           <a:p>
             <a:pPr algn="ctr"/>
@@ -9471,6 +9942,7 @@
           <a:lstStyle/>
           <a:p>
             <a:pPr algn="ctr"/>
+            <a:endParaRPr/>
           </a:p>
         </p:txBody>
       </p:sp>
@@ -9512,7 +9984,7 @@
           </a:fontRef>
         </p:style>
         <p:txBody>
-          <a:bodyPr rtlCol="0" anchor="ctr" wrap="square"/>
+          <a:bodyPr wrap="square" rtlCol="0" anchor="ctr"/>
           <a:lstStyle/>
           <a:p>
             <a:pPr algn="ctr"/>
@@ -9567,6 +10039,7 @@
           <a:lstStyle/>
           <a:p>
             <a:pPr algn="ctr"/>
+            <a:endParaRPr/>
           </a:p>
         </p:txBody>
       </p:sp>
@@ -9627,14 +10100,11 @@
                 <a:spcPts val="800"/>
               </a:spcAft>
             </a:pPr>
-            <a:r>
-              <a:rPr sz="2400">
-                <a:solidFill>
-                  <a:srgbClr val="212121"/>
-                </a:solidFill>
-              </a:rPr>
-              <a:t/>
-            </a:r>
+            <a:endParaRPr sz="2400">
+              <a:solidFill>
+                <a:srgbClr val="212121"/>
+              </a:solidFill>
+            </a:endParaRPr>
           </a:p>
           <a:p>
             <a:pPr>
@@ -9662,7 +10132,7 @@
 </file>
 
 <file path=ppt/slides/slide36.xml><?xml version="1.0" encoding="utf-8"?>
-<p:sld xmlns:a="http://schemas.openxmlformats.org/drawingml/2006/main" xmlns:p="http://schemas.openxmlformats.org/presentationml/2006/main" xmlns:r="http://schemas.openxmlformats.org/officeDocument/2006/relationships">
+<p:sld xmlns:a="http://schemas.openxmlformats.org/drawingml/2006/main" xmlns:r="http://schemas.openxmlformats.org/officeDocument/2006/relationships" xmlns:p="http://schemas.openxmlformats.org/presentationml/2006/main">
   <p:cSld>
     <p:spTree>
       <p:nvGrpSpPr>
@@ -9670,7 +10140,14 @@
         <p:cNvGrpSpPr/>
         <p:nvPr/>
       </p:nvGrpSpPr>
-      <p:grpSpPr/>
+      <p:grpSpPr>
+        <a:xfrm>
+          <a:off x="0" y="0"/>
+          <a:ext cx="0" cy="0"/>
+          <a:chOff x="0" y="0"/>
+          <a:chExt cx="0" cy="0"/>
+        </a:xfrm>
+      </p:grpSpPr>
       <p:sp>
         <p:nvSpPr>
           <p:cNvPr id="2" name="TextBox 1"/>
@@ -9747,13 +10224,26 @@
                 <a:spcPts val="800"/>
               </a:spcAft>
             </a:pPr>
+            <a:endParaRPr sz="2000">
+              <a:solidFill>
+                <a:srgbClr val="212121"/>
+              </a:solidFill>
+              <a:latin typeface="Courier New"/>
+            </a:endParaRPr>
+          </a:p>
+          <a:p>
+            <a:pPr>
+              <a:spcAft>
+                <a:spcPts val="800"/>
+              </a:spcAft>
+            </a:pPr>
             <a:r>
               <a:rPr sz="2400">
                 <a:solidFill>
                   <a:srgbClr val="212121"/>
                 </a:solidFill>
               </a:rPr>
-              <a:t/>
+              <a:t>--unwind k copies the loop body k times, each copy guarded by the loop condition.</a:t>
             </a:r>
           </a:p>
           <a:p>
@@ -9768,21 +10258,6 @@
                   <a:srgbClr val="212121"/>
                 </a:solidFill>
               </a:rPr>
-              <a:t>--unwind k copies the loop body k times, each copy guarded by the loop condition.</a:t>
-            </a:r>
-          </a:p>
-          <a:p>
-            <a:pPr>
-              <a:spcAft>
-                <a:spcPts val="800"/>
-              </a:spcAft>
-            </a:pPr>
-            <a:r>
-              <a:rPr sz="2400">
-                <a:solidFill>
-                  <a:srgbClr val="212121"/>
-                </a:solidFill>
-              </a:rPr>
               <a:t>Then one extra check, the unwinding assertion:</a:t>
             </a:r>
           </a:p>
@@ -9807,14 +10282,11 @@
                 <a:spcPts val="800"/>
               </a:spcAft>
             </a:pPr>
-            <a:r>
-              <a:rPr sz="2400">
-                <a:solidFill>
-                  <a:srgbClr val="212121"/>
-                </a:solidFill>
-              </a:rPr>
-              <a:t/>
-            </a:r>
+            <a:endParaRPr sz="2200">
+              <a:solidFill>
+                <a:srgbClr val="212121"/>
+              </a:solidFill>
+            </a:endParaRPr>
           </a:p>
           <a:p>
             <a:pPr>
@@ -9842,7 +10314,7 @@
 </file>
 
 <file path=ppt/slides/slide37.xml><?xml version="1.0" encoding="utf-8"?>
-<p:sld xmlns:a="http://schemas.openxmlformats.org/drawingml/2006/main" xmlns:p="http://schemas.openxmlformats.org/presentationml/2006/main" xmlns:r="http://schemas.openxmlformats.org/officeDocument/2006/relationships">
+<p:sld xmlns:a="http://schemas.openxmlformats.org/drawingml/2006/main" xmlns:r="http://schemas.openxmlformats.org/officeDocument/2006/relationships" xmlns:p="http://schemas.openxmlformats.org/presentationml/2006/main">
   <p:cSld>
     <p:spTree>
       <p:nvGrpSpPr>
@@ -9850,7 +10322,14 @@
         <p:cNvGrpSpPr/>
         <p:nvPr/>
       </p:nvGrpSpPr>
-      <p:grpSpPr/>
+      <p:grpSpPr>
+        <a:xfrm>
+          <a:off x="0" y="0"/>
+          <a:ext cx="0" cy="0"/>
+          <a:chOff x="0" y="0"/>
+          <a:chExt cx="0" cy="0"/>
+        </a:xfrm>
+      </p:grpSpPr>
       <p:sp>
         <p:nvSpPr>
           <p:cNvPr id="2" name="TextBox 1"/>
@@ -9894,7 +10373,7 @@
         </p:nvGraphicFramePr>
         <p:xfrm>
           <a:off x="731520" y="1554480"/>
-          <a:ext cx="10698480" cy="1463040"/>
+          <a:ext cx="10698480" cy="1889760"/>
         </p:xfrm>
         <a:graphic>
           <a:graphicData uri="http://schemas.openxmlformats.org/drawingml/2006/table">
@@ -9903,8 +10382,20 @@
                 <a:tableStyleId>{5C22544A-7EE6-4342-B048-85BDC9FD1C3A}</a:tableStyleId>
               </a:tblPr>
               <a:tblGrid>
-                <a:gridCol w="4572000"/>
-                <a:gridCol w="6126480"/>
+                <a:gridCol w="4572000">
+                  <a:extLst>
+                    <a:ext uri="{9D8B030D-6E8A-4147-A177-3AD203B41FA5}">
+                      <a16:colId xmlns:a16="http://schemas.microsoft.com/office/drawing/2014/main" val="20000"/>
+                    </a:ext>
+                  </a:extLst>
+                </a:gridCol>
+                <a:gridCol w="6126480">
+                  <a:extLst>
+                    <a:ext uri="{9D8B030D-6E8A-4147-A177-3AD203B41FA5}">
+                      <a16:colId xmlns:a16="http://schemas.microsoft.com/office/drawing/2014/main" val="20001"/>
+                    </a:ext>
+                  </a:extLst>
+                </a:gridCol>
               </a:tblGrid>
               <a:tr h="365760">
                 <a:tc>
@@ -9933,6 +10424,11 @@
                   </a:txBody>
                   <a:tcPr/>
                 </a:tc>
+                <a:extLst>
+                  <a:ext uri="{0D108BD9-81ED-4DB2-BD59-A6C34878D82A}">
+                    <a16:rowId xmlns:a16="http://schemas.microsoft.com/office/drawing/2014/main" val="10000"/>
+                  </a:ext>
+                </a:extLst>
               </a:tr>
               <a:tr h="365760">
                 <a:tc>
@@ -9961,6 +10457,11 @@
                   </a:txBody>
                   <a:tcPr/>
                 </a:tc>
+                <a:extLst>
+                  <a:ext uri="{0D108BD9-81ED-4DB2-BD59-A6C34878D82A}">
+                    <a16:rowId xmlns:a16="http://schemas.microsoft.com/office/drawing/2014/main" val="10001"/>
+                  </a:ext>
+                </a:extLst>
               </a:tr>
               <a:tr h="365760">
                 <a:tc>
@@ -9989,6 +10490,11 @@
                   </a:txBody>
                   <a:tcPr/>
                 </a:tc>
+                <a:extLst>
+                  <a:ext uri="{0D108BD9-81ED-4DB2-BD59-A6C34878D82A}">
+                    <a16:rowId xmlns:a16="http://schemas.microsoft.com/office/drawing/2014/main" val="10002"/>
+                  </a:ext>
+                </a:extLst>
               </a:tr>
               <a:tr h="365760">
                 <a:tc>
@@ -10017,6 +10523,11 @@
                   </a:txBody>
                   <a:tcPr/>
                 </a:tc>
+                <a:extLst>
+                  <a:ext uri="{0D108BD9-81ED-4DB2-BD59-A6C34878D82A}">
+                    <a16:rowId xmlns:a16="http://schemas.microsoft.com/office/drawing/2014/main" val="10003"/>
+                  </a:ext>
+                </a:extLst>
               </a:tr>
             </a:tbl>
           </a:graphicData>
@@ -10084,7 +10595,7 @@
 </file>
 
 <file path=ppt/slides/slide38.xml><?xml version="1.0" encoding="utf-8"?>
-<p:sld xmlns:a="http://schemas.openxmlformats.org/drawingml/2006/main" xmlns:p="http://schemas.openxmlformats.org/presentationml/2006/main" xmlns:r="http://schemas.openxmlformats.org/officeDocument/2006/relationships">
+<p:sld xmlns:a="http://schemas.openxmlformats.org/drawingml/2006/main" xmlns:r="http://schemas.openxmlformats.org/officeDocument/2006/relationships" xmlns:p="http://schemas.openxmlformats.org/presentationml/2006/main">
   <p:cSld>
     <p:spTree>
       <p:nvGrpSpPr>
@@ -10092,7 +10603,14 @@
         <p:cNvGrpSpPr/>
         <p:nvPr/>
       </p:nvGrpSpPr>
-      <p:grpSpPr/>
+      <p:grpSpPr>
+        <a:xfrm>
+          <a:off x="0" y="0"/>
+          <a:ext cx="0" cy="0"/>
+          <a:chOff x="0" y="0"/>
+          <a:chExt cx="0" cy="0"/>
+        </a:xfrm>
+      </p:grpSpPr>
       <p:sp>
         <p:nvSpPr>
           <p:cNvPr id="2" name="TextBox 1"/>
@@ -10201,14 +10719,12 @@
                 <a:spcPts val="800"/>
               </a:spcAft>
             </a:pPr>
-            <a:r>
-              <a:rPr sz="2400">
-                <a:solidFill>
-                  <a:srgbClr val="212121"/>
-                </a:solidFill>
-              </a:rPr>
-              <a:t/>
-            </a:r>
+            <a:endParaRPr sz="2000">
+              <a:solidFill>
+                <a:srgbClr val="212121"/>
+              </a:solidFill>
+              <a:latin typeface="Courier New"/>
+            </a:endParaRPr>
           </a:p>
           <a:p>
             <a:pPr>
@@ -10251,7 +10767,7 @@
 </file>
 
 <file path=ppt/slides/slide39.xml><?xml version="1.0" encoding="utf-8"?>
-<p:sld xmlns:a="http://schemas.openxmlformats.org/drawingml/2006/main" xmlns:p="http://schemas.openxmlformats.org/presentationml/2006/main" xmlns:r="http://schemas.openxmlformats.org/officeDocument/2006/relationships">
+<p:sld xmlns:a="http://schemas.openxmlformats.org/drawingml/2006/main" xmlns:r="http://schemas.openxmlformats.org/officeDocument/2006/relationships" xmlns:p="http://schemas.openxmlformats.org/presentationml/2006/main">
   <p:cSld>
     <p:spTree>
       <p:nvGrpSpPr>
@@ -10259,7 +10775,14 @@
         <p:cNvGrpSpPr/>
         <p:nvPr/>
       </p:nvGrpSpPr>
-      <p:grpSpPr/>
+      <p:grpSpPr>
+        <a:xfrm>
+          <a:off x="0" y="0"/>
+          <a:ext cx="0" cy="0"/>
+          <a:chOff x="0" y="0"/>
+          <a:chExt cx="0" cy="0"/>
+        </a:xfrm>
+      </p:grpSpPr>
       <p:sp>
         <p:nvSpPr>
           <p:cNvPr id="2" name="TextBox 1"/>
@@ -10336,13 +10859,26 @@
                 <a:spcPts val="800"/>
               </a:spcAft>
             </a:pPr>
+            <a:endParaRPr sz="2200">
+              <a:solidFill>
+                <a:srgbClr val="212121"/>
+              </a:solidFill>
+              <a:latin typeface="Courier New"/>
+            </a:endParaRPr>
+          </a:p>
+          <a:p>
+            <a:pPr>
+              <a:spcAft>
+                <a:spcPts val="800"/>
+              </a:spcAft>
+            </a:pPr>
             <a:r>
               <a:rPr sz="2600">
                 <a:solidFill>
                   <a:srgbClr val="212121"/>
                 </a:solidFill>
               </a:rPr>
-              <a:t/>
+              <a:t>sat — the model assigns every input and every choice: replayed in program order, that is the counterexample trace.</a:t>
             </a:r>
           </a:p>
           <a:p>
@@ -10357,21 +10893,6 @@
                   <a:srgbClr val="212121"/>
                 </a:solidFill>
               </a:rPr>
-              <a:t>sat — the model assigns every input and every choice: replayed in program order, that is the counterexample trace.</a:t>
-            </a:r>
-          </a:p>
-          <a:p>
-            <a:pPr>
-              <a:spcAft>
-                <a:spcPts val="800"/>
-              </a:spcAft>
-            </a:pPr>
-            <a:r>
-              <a:rPr sz="2600">
-                <a:solidFill>
-                  <a:srgbClr val="212121"/>
-                </a:solidFill>
-              </a:rPr>
               <a:t>unsat — no execution within the bound violates P.</a:t>
             </a:r>
           </a:p>
@@ -10381,14 +10902,11 @@
                 <a:spcPts val="800"/>
               </a:spcAft>
             </a:pPr>
-            <a:r>
-              <a:rPr sz="2600">
-                <a:solidFill>
-                  <a:srgbClr val="212121"/>
-                </a:solidFill>
-              </a:rPr>
-              <a:t/>
-            </a:r>
+            <a:endParaRPr sz="2600">
+              <a:solidFill>
+                <a:srgbClr val="212121"/>
+              </a:solidFill>
+            </a:endParaRPr>
           </a:p>
           <a:p>
             <a:pPr>
@@ -10416,7 +10934,7 @@
 </file>
 
 <file path=ppt/slides/slide4.xml><?xml version="1.0" encoding="utf-8"?>
-<p:sld xmlns:a="http://schemas.openxmlformats.org/drawingml/2006/main" xmlns:p="http://schemas.openxmlformats.org/presentationml/2006/main" xmlns:r="http://schemas.openxmlformats.org/officeDocument/2006/relationships">
+<p:sld xmlns:a="http://schemas.openxmlformats.org/drawingml/2006/main" xmlns:r="http://schemas.openxmlformats.org/officeDocument/2006/relationships" xmlns:p="http://schemas.openxmlformats.org/presentationml/2006/main">
   <p:cSld>
     <p:spTree>
       <p:nvGrpSpPr>
@@ -10424,7 +10942,14 @@
         <p:cNvGrpSpPr/>
         <p:nvPr/>
       </p:nvGrpSpPr>
-      <p:grpSpPr/>
+      <p:grpSpPr>
+        <a:xfrm>
+          <a:off x="0" y="0"/>
+          <a:ext cx="0" cy="0"/>
+          <a:chOff x="0" y="0"/>
+          <a:chExt cx="0" cy="0"/>
+        </a:xfrm>
+      </p:grpSpPr>
       <p:sp>
         <p:nvSpPr>
           <p:cNvPr id="2" name="TextBox 1"/>
@@ -10575,14 +11100,11 @@
                 <a:spcPts val="800"/>
               </a:spcAft>
             </a:pPr>
-            <a:r>
-              <a:rPr sz="2200">
-                <a:solidFill>
-                  <a:srgbClr val="212121"/>
-                </a:solidFill>
-              </a:rPr>
-              <a:t/>
-            </a:r>
+            <a:endParaRPr sz="2000">
+              <a:solidFill>
+                <a:srgbClr val="212121"/>
+              </a:solidFill>
+            </a:endParaRPr>
           </a:p>
           <a:p>
             <a:pPr>
@@ -10610,7 +11132,7 @@
 </file>
 
 <file path=ppt/slides/slide40.xml><?xml version="1.0" encoding="utf-8"?>
-<p:sld xmlns:a="http://schemas.openxmlformats.org/drawingml/2006/main" xmlns:p="http://schemas.openxmlformats.org/presentationml/2006/main" xmlns:r="http://schemas.openxmlformats.org/officeDocument/2006/relationships">
+<p:sld xmlns:a="http://schemas.openxmlformats.org/drawingml/2006/main" xmlns:r="http://schemas.openxmlformats.org/officeDocument/2006/relationships" xmlns:p="http://schemas.openxmlformats.org/presentationml/2006/main">
   <p:cSld>
     <p:spTree>
       <p:nvGrpSpPr>
@@ -10618,7 +11140,14 @@
         <p:cNvGrpSpPr/>
         <p:nvPr/>
       </p:nvGrpSpPr>
-      <p:grpSpPr/>
+      <p:grpSpPr>
+        <a:xfrm>
+          <a:off x="0" y="0"/>
+          <a:ext cx="0" cy="0"/>
+          <a:chOff x="0" y="0"/>
+          <a:chExt cx="0" cy="0"/>
+        </a:xfrm>
+      </p:grpSpPr>
       <p:sp>
         <p:nvSpPr>
           <p:cNvPr id="2" name="TextBox 1"/>
@@ -10775,14 +11304,12 @@
                 <a:spcPts val="800"/>
               </a:spcAft>
             </a:pPr>
-            <a:r>
-              <a:rPr sz="2200">
-                <a:solidFill>
-                  <a:srgbClr val="212121"/>
-                </a:solidFill>
-              </a:rPr>
-              <a:t/>
-            </a:r>
+            <a:endParaRPr sz="1800">
+              <a:solidFill>
+                <a:srgbClr val="212121"/>
+              </a:solidFill>
+              <a:latin typeface="Courier New"/>
+            </a:endParaRPr>
           </a:p>
           <a:p>
             <a:pPr>
@@ -10825,7 +11352,7 @@
 </file>
 
 <file path=ppt/slides/slide41.xml><?xml version="1.0" encoding="utf-8"?>
-<p:sld xmlns:a="http://schemas.openxmlformats.org/drawingml/2006/main" xmlns:p="http://schemas.openxmlformats.org/presentationml/2006/main" xmlns:r="http://schemas.openxmlformats.org/officeDocument/2006/relationships">
+<p:sld xmlns:a="http://schemas.openxmlformats.org/drawingml/2006/main" xmlns:r="http://schemas.openxmlformats.org/officeDocument/2006/relationships" xmlns:p="http://schemas.openxmlformats.org/presentationml/2006/main">
   <p:cSld>
     <p:spTree>
       <p:nvGrpSpPr>
@@ -10833,7 +11360,14 @@
         <p:cNvGrpSpPr/>
         <p:nvPr/>
       </p:nvGrpSpPr>
-      <p:grpSpPr/>
+      <p:grpSpPr>
+        <a:xfrm>
+          <a:off x="0" y="0"/>
+          <a:ext cx="0" cy="0"/>
+          <a:chOff x="0" y="0"/>
+          <a:chExt cx="0" cy="0"/>
+        </a:xfrm>
+      </p:grpSpPr>
       <p:sp>
         <p:nvSpPr>
           <p:cNvPr id="2" name="TextBox 1"/>
@@ -10990,6 +11524,19 @@
                 <a:spcPts val="0"/>
               </a:spcAft>
             </a:pPr>
+            <a:endParaRPr sz="1800">
+              <a:solidFill>
+                <a:srgbClr val="212121"/>
+              </a:solidFill>
+              <a:latin typeface="Courier New"/>
+            </a:endParaRPr>
+          </a:p>
+          <a:p>
+            <a:pPr>
+              <a:spcAft>
+                <a:spcPts val="0"/>
+              </a:spcAft>
+            </a:pPr>
             <a:r>
               <a:rPr sz="1800">
                 <a:solidFill>
@@ -10997,22 +11544,6 @@
                 </a:solidFill>
                 <a:latin typeface="Courier New"/>
               </a:rPr>
-              <a:t/>
-            </a:r>
-          </a:p>
-          <a:p>
-            <a:pPr>
-              <a:spcAft>
-                <a:spcPts val="0"/>
-              </a:spcAft>
-            </a:pPr>
-            <a:r>
-              <a:rPr sz="1800">
-                <a:solidFill>
-                  <a:srgbClr val="212121"/>
-                </a:solidFill>
-                <a:latin typeface="Courier New"/>
-              </a:rPr>
               <a:t>$ esbmc offbyone.c --unwind 7</a:t>
             </a:r>
           </a:p>
@@ -11022,14 +11553,12 @@
                 <a:spcPts val="800"/>
               </a:spcAft>
             </a:pPr>
-            <a:r>
-              <a:rPr sz="2200">
-                <a:solidFill>
-                  <a:srgbClr val="212121"/>
-                </a:solidFill>
-              </a:rPr>
-              <a:t/>
-            </a:r>
+            <a:endParaRPr sz="1800">
+              <a:solidFill>
+                <a:srgbClr val="212121"/>
+              </a:solidFill>
+              <a:latin typeface="Courier New"/>
+            </a:endParaRPr>
           </a:p>
           <a:p>
             <a:pPr>
@@ -11072,7 +11601,7 @@
 </file>
 
 <file path=ppt/slides/slide42.xml><?xml version="1.0" encoding="utf-8"?>
-<p:sld xmlns:a="http://schemas.openxmlformats.org/drawingml/2006/main" xmlns:p="http://schemas.openxmlformats.org/presentationml/2006/main" xmlns:r="http://schemas.openxmlformats.org/officeDocument/2006/relationships">
+<p:sld xmlns:a="http://schemas.openxmlformats.org/drawingml/2006/main" xmlns:r="http://schemas.openxmlformats.org/officeDocument/2006/relationships" xmlns:p="http://schemas.openxmlformats.org/presentationml/2006/main">
   <p:cSld>
     <p:spTree>
       <p:nvGrpSpPr>
@@ -11080,7 +11609,14 @@
         <p:cNvGrpSpPr/>
         <p:nvPr/>
       </p:nvGrpSpPr>
-      <p:grpSpPr/>
+      <p:grpSpPr>
+        <a:xfrm>
+          <a:off x="0" y="0"/>
+          <a:ext cx="0" cy="0"/>
+          <a:chOff x="0" y="0"/>
+          <a:chExt cx="0" cy="0"/>
+        </a:xfrm>
+      </p:grpSpPr>
       <p:sp>
         <p:nvSpPr>
           <p:cNvPr id="2" name="TextBox 1"/>
@@ -11189,14 +11725,12 @@
                 <a:spcPts val="800"/>
               </a:spcAft>
             </a:pPr>
-            <a:r>
-              <a:rPr sz="2200">
-                <a:solidFill>
-                  <a:srgbClr val="212121"/>
-                </a:solidFill>
-              </a:rPr>
-              <a:t/>
-            </a:r>
+            <a:endParaRPr sz="1800">
+              <a:solidFill>
+                <a:srgbClr val="212121"/>
+              </a:solidFill>
+              <a:latin typeface="Courier New"/>
+            </a:endParaRPr>
           </a:p>
           <a:p>
             <a:pPr>
@@ -11239,7 +11773,7 @@
 </file>
 
 <file path=ppt/slides/slide43.xml><?xml version="1.0" encoding="utf-8"?>
-<p:sld xmlns:a="http://schemas.openxmlformats.org/drawingml/2006/main" xmlns:p="http://schemas.openxmlformats.org/presentationml/2006/main" xmlns:r="http://schemas.openxmlformats.org/officeDocument/2006/relationships">
+<p:sld xmlns:a="http://schemas.openxmlformats.org/drawingml/2006/main" xmlns:r="http://schemas.openxmlformats.org/officeDocument/2006/relationships" xmlns:p="http://schemas.openxmlformats.org/presentationml/2006/main">
   <p:cSld>
     <p:spTree>
       <p:nvGrpSpPr>
@@ -11247,7 +11781,14 @@
         <p:cNvGrpSpPr/>
         <p:nvPr/>
       </p:nvGrpSpPr>
-      <p:grpSpPr/>
+      <p:grpSpPr>
+        <a:xfrm>
+          <a:off x="0" y="0"/>
+          <a:ext cx="0" cy="0"/>
+          <a:chOff x="0" y="0"/>
+          <a:chExt cx="0" cy="0"/>
+        </a:xfrm>
+      </p:grpSpPr>
       <p:sp>
         <p:nvSpPr>
           <p:cNvPr id="2" name="TextBox 1"/>
@@ -11353,14 +11894,11 @@
                 <a:spcPts val="800"/>
               </a:spcAft>
             </a:pPr>
-            <a:r>
-              <a:rPr sz="2400">
-                <a:solidFill>
-                  <a:srgbClr val="212121"/>
-                </a:solidFill>
-              </a:rPr>
-              <a:t/>
-            </a:r>
+            <a:endParaRPr sz="2400">
+              <a:solidFill>
+                <a:srgbClr val="212121"/>
+              </a:solidFill>
+            </a:endParaRPr>
           </a:p>
           <a:p>
             <a:pPr>
@@ -11388,7 +11926,7 @@
 </file>
 
 <file path=ppt/slides/slide44.xml><?xml version="1.0" encoding="utf-8"?>
-<p:sld xmlns:a="http://schemas.openxmlformats.org/drawingml/2006/main" xmlns:p="http://schemas.openxmlformats.org/presentationml/2006/main" xmlns:r="http://schemas.openxmlformats.org/officeDocument/2006/relationships">
+<p:sld xmlns:a="http://schemas.openxmlformats.org/drawingml/2006/main" xmlns:r="http://schemas.openxmlformats.org/officeDocument/2006/relationships" xmlns:p="http://schemas.openxmlformats.org/presentationml/2006/main">
   <p:cSld>
     <p:spTree>
       <p:nvGrpSpPr>
@@ -11396,7 +11934,14 @@
         <p:cNvGrpSpPr/>
         <p:nvPr/>
       </p:nvGrpSpPr>
-      <p:grpSpPr/>
+      <p:grpSpPr>
+        <a:xfrm>
+          <a:off x="0" y="0"/>
+          <a:ext cx="0" cy="0"/>
+          <a:chOff x="0" y="0"/>
+          <a:chExt cx="0" cy="0"/>
+        </a:xfrm>
+      </p:grpSpPr>
       <p:sp>
         <p:nvSpPr>
           <p:cNvPr id="2" name="TextBox 1"/>
@@ -11489,27 +12034,25 @@
                 <a:spcPts val="800"/>
               </a:spcAft>
             </a:pPr>
+            <a:endParaRPr sz="2200">
+              <a:solidFill>
+                <a:srgbClr val="212121"/>
+              </a:solidFill>
+              <a:latin typeface="Courier New"/>
+            </a:endParaRPr>
+          </a:p>
+          <a:p>
+            <a:pPr>
+              <a:spcAft>
+                <a:spcPts val="800"/>
+              </a:spcAft>
+            </a:pPr>
             <a:r>
               <a:rPr sz="2600">
                 <a:solidFill>
                   <a:srgbClr val="212121"/>
                 </a:solidFill>
               </a:rPr>
-              <a:t/>
-            </a:r>
-          </a:p>
-          <a:p>
-            <a:pPr>
-              <a:spcAft>
-                <a:spcPts val="800"/>
-              </a:spcAft>
-            </a:pPr>
-            <a:r>
-              <a:rPr sz="2600">
-                <a:solidFill>
-                  <a:srgbClr val="212121"/>
-                </a:solidFill>
-              </a:rPr>
               <a:t>FAILED or SUCCESSFUL?</a:t>
             </a:r>
           </a:p>
@@ -11519,14 +12062,11 @@
                 <a:spcPts val="800"/>
               </a:spcAft>
             </a:pPr>
-            <a:r>
-              <a:rPr sz="2600">
-                <a:solidFill>
-                  <a:srgbClr val="212121"/>
-                </a:solidFill>
-              </a:rPr>
-              <a:t/>
-            </a:r>
+            <a:endParaRPr sz="2600">
+              <a:solidFill>
+                <a:srgbClr val="212121"/>
+              </a:solidFill>
+            </a:endParaRPr>
           </a:p>
           <a:p>
             <a:pPr>
@@ -11569,7 +12109,7 @@
 </file>
 
 <file path=ppt/slides/slide45.xml><?xml version="1.0" encoding="utf-8"?>
-<p:sld xmlns:a="http://schemas.openxmlformats.org/drawingml/2006/main" xmlns:p="http://schemas.openxmlformats.org/presentationml/2006/main" xmlns:r="http://schemas.openxmlformats.org/officeDocument/2006/relationships">
+<p:sld xmlns:a="http://schemas.openxmlformats.org/drawingml/2006/main" xmlns:r="http://schemas.openxmlformats.org/officeDocument/2006/relationships" xmlns:p="http://schemas.openxmlformats.org/presentationml/2006/main">
   <p:cSld>
     <p:spTree>
       <p:nvGrpSpPr>
@@ -11577,7 +12117,14 @@
         <p:cNvGrpSpPr/>
         <p:nvPr/>
       </p:nvGrpSpPr>
-      <p:grpSpPr/>
+      <p:grpSpPr>
+        <a:xfrm>
+          <a:off x="0" y="0"/>
+          <a:ext cx="0" cy="0"/>
+          <a:chOff x="0" y="0"/>
+          <a:chExt cx="0" cy="0"/>
+        </a:xfrm>
+      </p:grpSpPr>
       <p:sp>
         <p:nvSpPr>
           <p:cNvPr id="2" name="TextBox 1"/>
@@ -11718,7 +12265,7 @@
 </file>
 
 <file path=ppt/slides/slide46.xml><?xml version="1.0" encoding="utf-8"?>
-<p:sld xmlns:a="http://schemas.openxmlformats.org/drawingml/2006/main" xmlns:p="http://schemas.openxmlformats.org/presentationml/2006/main" xmlns:r="http://schemas.openxmlformats.org/officeDocument/2006/relationships">
+<p:sld xmlns:a="http://schemas.openxmlformats.org/drawingml/2006/main" xmlns:r="http://schemas.openxmlformats.org/officeDocument/2006/relationships" xmlns:p="http://schemas.openxmlformats.org/presentationml/2006/main">
   <p:cSld>
     <p:spTree>
       <p:nvGrpSpPr>
@@ -11726,7 +12273,14 @@
         <p:cNvGrpSpPr/>
         <p:nvPr/>
       </p:nvGrpSpPr>
-      <p:grpSpPr/>
+      <p:grpSpPr>
+        <a:xfrm>
+          <a:off x="0" y="0"/>
+          <a:ext cx="0" cy="0"/>
+          <a:chOff x="0" y="0"/>
+          <a:chExt cx="0" cy="0"/>
+        </a:xfrm>
+      </p:grpSpPr>
       <p:sp>
         <p:nvSpPr>
           <p:cNvPr id="2" name="TextBox 1"/>
@@ -11837,7 +12391,7 @@
 </file>
 
 <file path=ppt/slides/slide47.xml><?xml version="1.0" encoding="utf-8"?>
-<p:sld xmlns:a="http://schemas.openxmlformats.org/drawingml/2006/main" xmlns:p="http://schemas.openxmlformats.org/presentationml/2006/main" xmlns:r="http://schemas.openxmlformats.org/officeDocument/2006/relationships">
+<p:sld xmlns:a="http://schemas.openxmlformats.org/drawingml/2006/main" xmlns:r="http://schemas.openxmlformats.org/officeDocument/2006/relationships" xmlns:p="http://schemas.openxmlformats.org/presentationml/2006/main">
   <p:cSld>
     <p:spTree>
       <p:nvGrpSpPr>
@@ -11845,7 +12399,14 @@
         <p:cNvGrpSpPr/>
         <p:nvPr/>
       </p:nvGrpSpPr>
-      <p:grpSpPr/>
+      <p:grpSpPr>
+        <a:xfrm>
+          <a:off x="0" y="0"/>
+          <a:ext cx="0" cy="0"/>
+          <a:chOff x="0" y="0"/>
+          <a:chExt cx="0" cy="0"/>
+        </a:xfrm>
+      </p:grpSpPr>
       <p:sp>
         <p:nvSpPr>
           <p:cNvPr id="2" name="TextBox 1"/>
@@ -11971,7 +12532,7 @@
 </file>
 
 <file path=ppt/slides/slide48.xml><?xml version="1.0" encoding="utf-8"?>
-<p:sld xmlns:a="http://schemas.openxmlformats.org/drawingml/2006/main" xmlns:p="http://schemas.openxmlformats.org/presentationml/2006/main" xmlns:r="http://schemas.openxmlformats.org/officeDocument/2006/relationships">
+<p:sld xmlns:a="http://schemas.openxmlformats.org/drawingml/2006/main" xmlns:r="http://schemas.openxmlformats.org/officeDocument/2006/relationships" xmlns:p="http://schemas.openxmlformats.org/presentationml/2006/main">
   <p:cSld>
     <p:spTree>
       <p:nvGrpSpPr>
@@ -11979,7 +12540,14 @@
         <p:cNvGrpSpPr/>
         <p:nvPr/>
       </p:nvGrpSpPr>
-      <p:grpSpPr/>
+      <p:grpSpPr>
+        <a:xfrm>
+          <a:off x="0" y="0"/>
+          <a:ext cx="0" cy="0"/>
+          <a:chOff x="0" y="0"/>
+          <a:chExt cx="0" cy="0"/>
+        </a:xfrm>
+      </p:grpSpPr>
       <p:sp>
         <p:nvSpPr>
           <p:cNvPr id="2" name="TextBox 1"/>
@@ -12022,7 +12590,7 @@
         <p:spPr>
           <a:xfrm>
             <a:off x="731520" y="1463040"/>
-            <a:ext cx="10789920" cy="5120640"/>
+            <a:ext cx="10789920" cy="4042132"/>
           </a:xfrm>
           <a:prstGeom prst="rect">
             <a:avLst/>
@@ -12041,28 +12609,41 @@
               </a:spcAft>
             </a:pPr>
             <a:r>
-              <a:rPr sz="2000">
-                <a:solidFill>
-                  <a:srgbClr val="212121"/>
-                </a:solidFill>
-              </a:rPr>
-              <a:t>The BMC pipeline you just saw hunts a counterexample (or proves up to a bound). Abstract interpretation proves P the other way — over-approximate every run at once: no inputs, no paths, no bound.</a:t>
-            </a:r>
-          </a:p>
-          <a:p>
-            <a:pPr>
-              <a:spcAft>
-                <a:spcPts val="800"/>
-              </a:spcAft>
-            </a:pPr>
-            <a:r>
-              <a:rPr sz="2000">
-                <a:solidFill>
-                  <a:srgbClr val="212121"/>
-                </a:solidFill>
-              </a:rPr>
-              <a:t/>
-            </a:r>
+              <a:rPr sz="2000" dirty="0">
+                <a:solidFill>
+                  <a:srgbClr val="212121"/>
+                </a:solidFill>
+              </a:rPr>
+              <a:t>The BMC pipeline you just saw hunts a counterexample (or proves up to a bound). Abstract interpretation proves P the other way</a:t>
+            </a:r>
+            <a:r>
+              <a:rPr lang="en-GB" sz="2000" dirty="0">
+                <a:solidFill>
+                  <a:srgbClr val="212121"/>
+                </a:solidFill>
+              </a:rPr>
+              <a:t>;</a:t>
+            </a:r>
+            <a:r>
+              <a:rPr sz="2000" dirty="0">
+                <a:solidFill>
+                  <a:srgbClr val="212121"/>
+                </a:solidFill>
+              </a:rPr>
+              <a:t> over-approximate every run at once: no inputs, no paths, no bound.</a:t>
+            </a:r>
+          </a:p>
+          <a:p>
+            <a:pPr>
+              <a:spcAft>
+                <a:spcPts val="800"/>
+              </a:spcAft>
+            </a:pPr>
+            <a:endParaRPr sz="2000" dirty="0">
+              <a:solidFill>
+                <a:srgbClr val="212121"/>
+              </a:solidFill>
+            </a:endParaRPr>
           </a:p>
           <a:p>
             <a:pPr>
@@ -12071,7 +12652,7 @@
               </a:spcAft>
             </a:pPr>
             <a:r>
-              <a:rPr sz="1600">
+              <a:rPr sz="1600" dirty="0">
                 <a:solidFill>
                   <a:srgbClr val="212121"/>
                 </a:solidFill>
@@ -12087,7 +12668,7 @@
               </a:spcAft>
             </a:pPr>
             <a:r>
-              <a:rPr sz="1600">
+              <a:rPr sz="1600" dirty="0">
                 <a:solidFill>
                   <a:srgbClr val="212121"/>
                 </a:solidFill>
@@ -12103,7 +12684,7 @@
               </a:spcAft>
             </a:pPr>
             <a:r>
-              <a:rPr sz="1600">
+              <a:rPr sz="1600" dirty="0">
                 <a:solidFill>
                   <a:srgbClr val="212121"/>
                 </a:solidFill>
@@ -12119,7 +12700,7 @@
               </a:spcAft>
             </a:pPr>
             <a:r>
-              <a:rPr sz="1600">
+              <a:rPr sz="1600" dirty="0">
                 <a:solidFill>
                   <a:srgbClr val="212121"/>
                 </a:solidFill>
@@ -12135,7 +12716,7 @@
               </a:spcAft>
             </a:pPr>
             <a:r>
-              <a:rPr sz="1600">
+              <a:rPr sz="1600" dirty="0">
                 <a:solidFill>
                   <a:srgbClr val="212121"/>
                 </a:solidFill>
@@ -12150,14 +12731,12 @@
                 <a:spcPts val="800"/>
               </a:spcAft>
             </a:pPr>
-            <a:r>
-              <a:rPr sz="2000">
-                <a:solidFill>
-                  <a:srgbClr val="212121"/>
-                </a:solidFill>
-              </a:rPr>
-              <a:t/>
-            </a:r>
+            <a:endParaRPr sz="1600" dirty="0">
+              <a:solidFill>
+                <a:srgbClr val="212121"/>
+              </a:solidFill>
+              <a:latin typeface="Courier New"/>
+            </a:endParaRPr>
           </a:p>
           <a:p>
             <a:pPr lvl="1">
@@ -12166,12 +12745,28 @@
               </a:spcAft>
             </a:pPr>
             <a:r>
-              <a:rPr sz="1800">
-                <a:solidFill>
-                  <a:srgbClr val="212121"/>
-                </a:solidFill>
-              </a:rPr>
-              <a:t>Compute the tightest fact the loop can't escape (a fixpoint); if it implies P, P holds for every run — no unrolling.</a:t>
+              <a:rPr sz="1800" dirty="0">
+                <a:solidFill>
+                  <a:srgbClr val="212121"/>
+                </a:solidFill>
+              </a:rPr>
+              <a:t>Compute the tightest fact the loop can't escape (a fixpoint); if it implies P, P holds for every run</a:t>
+            </a:r>
+            <a:r>
+              <a:rPr lang="en-GB" sz="1800" dirty="0">
+                <a:solidFill>
+                  <a:srgbClr val="212121"/>
+                </a:solidFill>
+              </a:rPr>
+              <a:t>;</a:t>
+            </a:r>
+            <a:r>
+              <a:rPr sz="1800" dirty="0">
+                <a:solidFill>
+                  <a:srgbClr val="212121"/>
+                </a:solidFill>
+              </a:rPr>
+              <a:t> no unrolling.</a:t>
             </a:r>
           </a:p>
           <a:p>
@@ -12181,12 +12776,28 @@
               </a:spcAft>
             </a:pPr>
             <a:r>
-              <a:rPr sz="1800">
-                <a:solidFill>
-                  <a:srgbClr val="212121"/>
-                </a:solidFill>
-              </a:rPr>
-              <a:t>Sound, not complete: too coarse → a false alarm. (Astrée proved the A340/A380 fly-by-wire this way — next slide.)</a:t>
+              <a:rPr sz="1800" dirty="0">
+                <a:solidFill>
+                  <a:srgbClr val="212121"/>
+                </a:solidFill>
+              </a:rPr>
+              <a:t>Sound, not complete: too coarse → a false alarm. (Astrée proved the A340/A380 fly-by-wire this way</a:t>
+            </a:r>
+            <a:r>
+              <a:rPr lang="en-GB" sz="1800" dirty="0">
+                <a:solidFill>
+                  <a:srgbClr val="212121"/>
+                </a:solidFill>
+              </a:rPr>
+              <a:t>;</a:t>
+            </a:r>
+            <a:r>
+              <a:rPr sz="1800" dirty="0">
+                <a:solidFill>
+                  <a:srgbClr val="212121"/>
+                </a:solidFill>
+              </a:rPr>
+              <a:t> next slide.)</a:t>
             </a:r>
           </a:p>
         </p:txBody>
@@ -12200,7 +12811,7 @@
 </file>
 
 <file path=ppt/slides/slide49.xml><?xml version="1.0" encoding="utf-8"?>
-<p:sld xmlns:a="http://schemas.openxmlformats.org/drawingml/2006/main" xmlns:p="http://schemas.openxmlformats.org/presentationml/2006/main" xmlns:r="http://schemas.openxmlformats.org/officeDocument/2006/relationships">
+<p:sld xmlns:a="http://schemas.openxmlformats.org/drawingml/2006/main" xmlns:r="http://schemas.openxmlformats.org/officeDocument/2006/relationships" xmlns:p="http://schemas.openxmlformats.org/presentationml/2006/main">
   <p:cSld>
     <p:spTree>
       <p:nvGrpSpPr>
@@ -12208,7 +12819,14 @@
         <p:cNvGrpSpPr/>
         <p:nvPr/>
       </p:nvGrpSpPr>
-      <p:grpSpPr/>
+      <p:grpSpPr>
+        <a:xfrm>
+          <a:off x="0" y="0"/>
+          <a:ext cx="0" cy="0"/>
+          <a:chOff x="0" y="0"/>
+          <a:chExt cx="0" cy="0"/>
+        </a:xfrm>
+      </p:grpSpPr>
       <p:sp>
         <p:nvSpPr>
           <p:cNvPr id="2" name="TextBox 1"/>
@@ -12251,7 +12869,7 @@
         <p:spPr>
           <a:xfrm>
             <a:off x="731520" y="1463040"/>
-            <a:ext cx="10789920" cy="5120640"/>
+            <a:ext cx="10789920" cy="4093428"/>
           </a:xfrm>
           <a:prstGeom prst="rect">
             <a:avLst/>
@@ -12270,28 +12888,57 @@
               </a:spcAft>
             </a:pPr>
             <a:r>
-              <a:rPr sz="1800">
-                <a:solidFill>
-                  <a:srgbClr val="212121"/>
-                </a:solidFill>
-              </a:rPr>
-              <a:t>Abstract domain — the facts you track instead of exact values. Intervals x ∈ [a, b]; richer ones add relationships (octagons ±x ±y ≤ c, polyhedra). At a branch you join the two sides — richer domain → more precise, but more costly.</a:t>
-            </a:r>
-          </a:p>
-          <a:p>
-            <a:pPr>
-              <a:spcAft>
-                <a:spcPts val="800"/>
-              </a:spcAft>
-            </a:pPr>
-            <a:r>
-              <a:rPr sz="2000">
-                <a:solidFill>
-                  <a:srgbClr val="212121"/>
-                </a:solidFill>
-              </a:rPr>
-              <a:t/>
-            </a:r>
+              <a:rPr sz="1800" dirty="0">
+                <a:solidFill>
+                  <a:srgbClr val="212121"/>
+                </a:solidFill>
+              </a:rPr>
+              <a:t>Abstract domain — the facts you track instead of exact values. Intervals x ∈ [a, b]; richer ones add relationships (octagons ±x ±y ≤ c, </a:t>
+            </a:r>
+            <a:r>
+              <a:rPr sz="1800" dirty="0" err="1">
+                <a:solidFill>
+                  <a:srgbClr val="212121"/>
+                </a:solidFill>
+              </a:rPr>
+              <a:t>polyhedra</a:t>
+            </a:r>
+            <a:r>
+              <a:rPr sz="1800" dirty="0">
+                <a:solidFill>
+                  <a:srgbClr val="212121"/>
+                </a:solidFill>
+              </a:rPr>
+              <a:t>). At a branch you join the two sides</a:t>
+            </a:r>
+            <a:r>
+              <a:rPr lang="en-GB" sz="1800" dirty="0">
+                <a:solidFill>
+                  <a:srgbClr val="212121"/>
+                </a:solidFill>
+              </a:rPr>
+              <a:t>;</a:t>
+            </a:r>
+            <a:r>
+              <a:rPr sz="1800" dirty="0">
+                <a:solidFill>
+                  <a:srgbClr val="212121"/>
+                </a:solidFill>
+              </a:rPr>
+              <a:t> richer domain → more precise, but more costly.</a:t>
+            </a:r>
+          </a:p>
+          <a:p>
+            <a:pPr>
+              <a:spcAft>
+                <a:spcPts val="800"/>
+              </a:spcAft>
+            </a:pPr>
+            <a:endParaRPr sz="1800" dirty="0">
+              <a:solidFill>
+                <a:srgbClr val="212121"/>
+              </a:solidFill>
+            </a:endParaRPr>
           </a:p>
           <a:p>
             <a:pPr lvl="1">
@@ -12300,7 +12947,7 @@
               </a:spcAft>
             </a:pPr>
             <a:r>
-              <a:rPr sz="1800">
+              <a:rPr sz="1800" dirty="0">
                 <a:solidFill>
                   <a:srgbClr val="212121"/>
                 </a:solidFill>
@@ -12314,14 +12961,11 @@
                 <a:spcPts val="800"/>
               </a:spcAft>
             </a:pPr>
-            <a:r>
-              <a:rPr sz="2000">
-                <a:solidFill>
-                  <a:srgbClr val="212121"/>
-                </a:solidFill>
-              </a:rPr>
-              <a:t/>
-            </a:r>
+            <a:endParaRPr sz="1800" dirty="0">
+              <a:solidFill>
+                <a:srgbClr val="212121"/>
+              </a:solidFill>
+            </a:endParaRPr>
           </a:p>
           <a:p>
             <a:pPr lvl="1">
@@ -12330,42 +12974,71 @@
               </a:spcAft>
             </a:pPr>
             <a:r>
-              <a:rPr sz="1800">
-                <a:solidFill>
-                  <a:srgbClr val="212121"/>
-                </a:solidFill>
-              </a:rPr>
-              <a:t>Narrowing (Δ) — recovers what widening overshot. Re-reading the guard x &lt; 100 pulls [0, +∞) back to [0, 100]: precision restored, still terminating.</a:t>
-            </a:r>
-          </a:p>
-          <a:p>
-            <a:pPr>
-              <a:spcAft>
-                <a:spcPts val="800"/>
-              </a:spcAft>
-            </a:pPr>
-            <a:r>
-              <a:rPr sz="2000">
-                <a:solidFill>
-                  <a:srgbClr val="212121"/>
-                </a:solidFill>
-              </a:rPr>
-              <a:t/>
-            </a:r>
-          </a:p>
-          <a:p>
-            <a:pPr>
-              <a:spcAft>
-                <a:spcPts val="800"/>
-              </a:spcAft>
-            </a:pPr>
-            <a:r>
-              <a:rPr sz="2000">
-                <a:solidFill>
-                  <a:srgbClr val="212121"/>
-                </a:solidFill>
-              </a:rPr>
-              <a:t>ESBMC ships it too — --interval-analysis — and can supply the invariant k-induction needs (Session 2, Lab 3).</a:t>
+              <a:rPr sz="1800" dirty="0">
+                <a:solidFill>
+                  <a:srgbClr val="212121"/>
+                </a:solidFill>
+              </a:rPr>
+              <a:t>Narrowing (</a:t>
+            </a:r>
+            <a:r>
+              <a:rPr sz="1800" dirty="0" err="1">
+                <a:solidFill>
+                  <a:srgbClr val="212121"/>
+                </a:solidFill>
+              </a:rPr>
+              <a:t>Δ</a:t>
+            </a:r>
+            <a:r>
+              <a:rPr sz="1800" dirty="0">
+                <a:solidFill>
+                  <a:srgbClr val="212121"/>
+                </a:solidFill>
+              </a:rPr>
+              <a:t>) — recovers what widening overshot. Re-reading the guard x &lt; 100 pulls [0, +∞) back to [0, 100]: precision restored, still terminating.</a:t>
+            </a:r>
+          </a:p>
+          <a:p>
+            <a:pPr>
+              <a:spcAft>
+                <a:spcPts val="800"/>
+              </a:spcAft>
+            </a:pPr>
+            <a:endParaRPr sz="1800" dirty="0">
+              <a:solidFill>
+                <a:srgbClr val="212121"/>
+              </a:solidFill>
+            </a:endParaRPr>
+          </a:p>
+          <a:p>
+            <a:pPr>
+              <a:spcAft>
+                <a:spcPts val="800"/>
+              </a:spcAft>
+            </a:pPr>
+            <a:r>
+              <a:rPr sz="2000" dirty="0">
+                <a:solidFill>
+                  <a:srgbClr val="212121"/>
+                </a:solidFill>
+              </a:rPr>
+              <a:t>ESBMC ships it too</a:t>
+            </a:r>
+            <a:r>
+              <a:rPr lang="en-GB" sz="2000" dirty="0">
+                <a:solidFill>
+                  <a:srgbClr val="212121"/>
+                </a:solidFill>
+              </a:rPr>
+              <a:t>:</a:t>
+            </a:r>
+            <a:r>
+              <a:rPr sz="2000" dirty="0">
+                <a:solidFill>
+                  <a:srgbClr val="212121"/>
+                </a:solidFill>
+              </a:rPr>
+              <a:t> --interval-analysis — and can supply the invariant k-induction needs (Session 2, Lab 3).</a:t>
             </a:r>
           </a:p>
         </p:txBody>
@@ -12379,7 +13052,7 @@
 </file>
 
 <file path=ppt/slides/slide5.xml><?xml version="1.0" encoding="utf-8"?>
-<p:sld xmlns:a="http://schemas.openxmlformats.org/drawingml/2006/main" xmlns:p="http://schemas.openxmlformats.org/presentationml/2006/main" xmlns:r="http://schemas.openxmlformats.org/officeDocument/2006/relationships">
+<p:sld xmlns:a="http://schemas.openxmlformats.org/drawingml/2006/main" xmlns:r="http://schemas.openxmlformats.org/officeDocument/2006/relationships" xmlns:p="http://schemas.openxmlformats.org/presentationml/2006/main">
   <p:cSld>
     <p:spTree>
       <p:nvGrpSpPr>
@@ -12387,7 +13060,14 @@
         <p:cNvGrpSpPr/>
         <p:nvPr/>
       </p:nvGrpSpPr>
-      <p:grpSpPr/>
+      <p:grpSpPr>
+        <a:xfrm>
+          <a:off x="0" y="0"/>
+          <a:ext cx="0" cy="0"/>
+          <a:chOff x="0" y="0"/>
+          <a:chExt cx="0" cy="0"/>
+        </a:xfrm>
+      </p:grpSpPr>
       <p:sp>
         <p:nvSpPr>
           <p:cNvPr id="2" name="TextBox 1"/>
@@ -12464,6 +13144,19 @@
                 <a:spcPts val="0"/>
               </a:spcAft>
             </a:pPr>
+            <a:endParaRPr sz="2000">
+              <a:solidFill>
+                <a:srgbClr val="212121"/>
+              </a:solidFill>
+              <a:latin typeface="Courier New"/>
+            </a:endParaRPr>
+          </a:p>
+          <a:p>
+            <a:pPr>
+              <a:spcAft>
+                <a:spcPts val="0"/>
+              </a:spcAft>
+            </a:pPr>
             <a:r>
               <a:rPr sz="2000">
                 <a:solidFill>
@@ -12471,7 +13164,7 @@
                 </a:solidFill>
                 <a:latin typeface="Courier New"/>
               </a:rPr>
-              <a:t/>
+              <a:t>int getPassword(void)</a:t>
             </a:r>
           </a:p>
           <a:p>
@@ -12487,7 +13180,7 @@
                 </a:solidFill>
                 <a:latin typeface="Courier New"/>
               </a:rPr>
-              <a:t>int getPassword(void)</a:t>
+              <a:t>{</a:t>
             </a:r>
           </a:p>
           <a:p>
@@ -12503,7 +13196,7 @@
                 </a:solidFill>
                 <a:latin typeface="Courier New"/>
               </a:rPr>
-              <a:t>{</a:t>
+              <a:t>  char buf[4];</a:t>
             </a:r>
           </a:p>
           <a:p>
@@ -12519,7 +13212,7 @@
                 </a:solidFill>
                 <a:latin typeface="Courier New"/>
               </a:rPr>
-              <a:t>  char buf[4];</a:t>
+              <a:t>  gets(buf);</a:t>
             </a:r>
           </a:p>
           <a:p>
@@ -12535,7 +13228,7 @@
                 </a:solidFill>
                 <a:latin typeface="Courier New"/>
               </a:rPr>
-              <a:t>  gets(buf);</a:t>
+              <a:t>  return strcmp(buf, "SMT");</a:t>
             </a:r>
           </a:p>
           <a:p>
@@ -12551,7 +13244,7 @@
                 </a:solidFill>
                 <a:latin typeface="Courier New"/>
               </a:rPr>
-              <a:t>  return strcmp(buf, "SMT");</a:t>
+              <a:t>}</a:t>
             </a:r>
           </a:p>
           <a:p>
@@ -12560,6 +13253,19 @@
                 <a:spcPts val="0"/>
               </a:spcAft>
             </a:pPr>
+            <a:endParaRPr sz="2000">
+              <a:solidFill>
+                <a:srgbClr val="212121"/>
+              </a:solidFill>
+              <a:latin typeface="Courier New"/>
+            </a:endParaRPr>
+          </a:p>
+          <a:p>
+            <a:pPr>
+              <a:spcAft>
+                <a:spcPts val="0"/>
+              </a:spcAft>
+            </a:pPr>
             <a:r>
               <a:rPr sz="2000">
                 <a:solidFill>
@@ -12567,38 +13273,6 @@
                 </a:solidFill>
                 <a:latin typeface="Courier New"/>
               </a:rPr>
-              <a:t>}</a:t>
-            </a:r>
-          </a:p>
-          <a:p>
-            <a:pPr>
-              <a:spcAft>
-                <a:spcPts val="0"/>
-              </a:spcAft>
-            </a:pPr>
-            <a:r>
-              <a:rPr sz="2000">
-                <a:solidFill>
-                  <a:srgbClr val="212121"/>
-                </a:solidFill>
-                <a:latin typeface="Courier New"/>
-              </a:rPr>
-              <a:t/>
-            </a:r>
-          </a:p>
-          <a:p>
-            <a:pPr>
-              <a:spcAft>
-                <a:spcPts val="0"/>
-              </a:spcAft>
-            </a:pPr>
-            <a:r>
-              <a:rPr sz="2000">
-                <a:solidFill>
-                  <a:srgbClr val="212121"/>
-                </a:solidFill>
-                <a:latin typeface="Courier New"/>
-              </a:rPr>
               <a:t>/* main: 0 from getPassword =&gt; "Access Granted" */</a:t>
             </a:r>
           </a:p>
@@ -12608,14 +13282,12 @@
                 <a:spcPts val="800"/>
               </a:spcAft>
             </a:pPr>
-            <a:r>
-              <a:rPr sz="2400">
-                <a:solidFill>
-                  <a:srgbClr val="212121"/>
-                </a:solidFill>
-              </a:rPr>
-              <a:t/>
-            </a:r>
+            <a:endParaRPr sz="2000">
+              <a:solidFill>
+                <a:srgbClr val="212121"/>
+              </a:solidFill>
+              <a:latin typeface="Courier New"/>
+            </a:endParaRPr>
           </a:p>
           <a:p>
             <a:pPr>
@@ -12643,7 +13315,7 @@
 </file>
 
 <file path=ppt/slides/slide50.xml><?xml version="1.0" encoding="utf-8"?>
-<p:sld xmlns:a="http://schemas.openxmlformats.org/drawingml/2006/main" xmlns:p="http://schemas.openxmlformats.org/presentationml/2006/main" xmlns:r="http://schemas.openxmlformats.org/officeDocument/2006/relationships">
+<p:sld xmlns:a="http://schemas.openxmlformats.org/drawingml/2006/main" xmlns:r="http://schemas.openxmlformats.org/officeDocument/2006/relationships" xmlns:p="http://schemas.openxmlformats.org/presentationml/2006/main">
   <p:cSld>
     <p:spTree>
       <p:nvGrpSpPr>
@@ -12651,7 +13323,14 @@
         <p:cNvGrpSpPr/>
         <p:nvPr/>
       </p:nvGrpSpPr>
-      <p:grpSpPr/>
+      <p:grpSpPr>
+        <a:xfrm>
+          <a:off x="0" y="0"/>
+          <a:ext cx="0" cy="0"/>
+          <a:chOff x="0" y="0"/>
+          <a:chExt cx="0" cy="0"/>
+        </a:xfrm>
+      </p:grpSpPr>
       <p:sp>
         <p:nvSpPr>
           <p:cNvPr id="2" name="TextBox 1"/>
@@ -12762,7 +13441,7 @@
 </file>
 
 <file path=ppt/slides/slide51.xml><?xml version="1.0" encoding="utf-8"?>
-<p:sld xmlns:a="http://schemas.openxmlformats.org/drawingml/2006/main" xmlns:p="http://schemas.openxmlformats.org/presentationml/2006/main" xmlns:r="http://schemas.openxmlformats.org/officeDocument/2006/relationships">
+<p:sld xmlns:a="http://schemas.openxmlformats.org/drawingml/2006/main" xmlns:r="http://schemas.openxmlformats.org/officeDocument/2006/relationships" xmlns:p="http://schemas.openxmlformats.org/presentationml/2006/main">
   <p:cSld>
     <p:spTree>
       <p:nvGrpSpPr>
@@ -12770,7 +13449,14 @@
         <p:cNvGrpSpPr/>
         <p:nvPr/>
       </p:nvGrpSpPr>
-      <p:grpSpPr/>
+      <p:grpSpPr>
+        <a:xfrm>
+          <a:off x="0" y="0"/>
+          <a:ext cx="0" cy="0"/>
+          <a:chOff x="0" y="0"/>
+          <a:chExt cx="0" cy="0"/>
+        </a:xfrm>
+      </p:grpSpPr>
       <p:sp>
         <p:nvSpPr>
           <p:cNvPr id="2" name="TextBox 1"/>
@@ -12881,7 +13567,7 @@
 </file>
 
 <file path=ppt/slides/slide52.xml><?xml version="1.0" encoding="utf-8"?>
-<p:sld xmlns:a="http://schemas.openxmlformats.org/drawingml/2006/main" xmlns:p="http://schemas.openxmlformats.org/presentationml/2006/main" xmlns:r="http://schemas.openxmlformats.org/officeDocument/2006/relationships">
+<p:sld xmlns:a="http://schemas.openxmlformats.org/drawingml/2006/main" xmlns:r="http://schemas.openxmlformats.org/officeDocument/2006/relationships" xmlns:p="http://schemas.openxmlformats.org/presentationml/2006/main">
   <p:cSld>
     <p:spTree>
       <p:nvGrpSpPr>
@@ -12889,7 +13575,14 @@
         <p:cNvGrpSpPr/>
         <p:nvPr/>
       </p:nvGrpSpPr>
-      <p:grpSpPr/>
+      <p:grpSpPr>
+        <a:xfrm>
+          <a:off x="0" y="0"/>
+          <a:ext cx="0" cy="0"/>
+          <a:chOff x="0" y="0"/>
+          <a:chExt cx="0" cy="0"/>
+        </a:xfrm>
+      </p:grpSpPr>
       <p:sp>
         <p:nvSpPr>
           <p:cNvPr id="2" name="TextBox 1"/>
@@ -12980,13 +13673,25 @@
                 <a:spcPts val="800"/>
               </a:spcAft>
             </a:pPr>
+            <a:endParaRPr sz="2000">
+              <a:solidFill>
+                <a:srgbClr val="212121"/>
+              </a:solidFill>
+            </a:endParaRPr>
+          </a:p>
+          <a:p>
+            <a:pPr>
+              <a:spcAft>
+                <a:spcPts val="800"/>
+              </a:spcAft>
+            </a:pPr>
             <a:r>
               <a:rPr sz="2200">
                 <a:solidFill>
                   <a:srgbClr val="212121"/>
                 </a:solidFill>
               </a:rPr>
-              <a:t/>
+              <a:t>irep2 is the typed, reference-counted representation everything lowers to and every backend consumes.</a:t>
             </a:r>
           </a:p>
           <a:p>
@@ -13001,21 +13706,6 @@
                   <a:srgbClr val="212121"/>
                 </a:solidFill>
               </a:rPr>
-              <a:t>irep2 is the typed, reference-counted representation everything lowers to and every backend consumes.</a:t>
-            </a:r>
-          </a:p>
-          <a:p>
-            <a:pPr>
-              <a:spcAft>
-                <a:spcPts val="800"/>
-              </a:spcAft>
-            </a:pPr>
-            <a:r>
-              <a:rPr sz="2200">
-                <a:solidFill>
-                  <a:srgbClr val="212121"/>
-                </a:solidFill>
-              </a:rPr>
               <a:t>Want to add a check, a frontend, or a new node type? Start here:</a:t>
             </a:r>
           </a:p>
@@ -13041,14 +13731,12 @@
                 <a:spcPts val="800"/>
               </a:spcAft>
             </a:pPr>
-            <a:r>
-              <a:rPr sz="2200">
-                <a:solidFill>
-                  <a:srgbClr val="212121"/>
-                </a:solidFill>
-              </a:rPr>
-              <a:t/>
-            </a:r>
+            <a:endParaRPr sz="1800">
+              <a:solidFill>
+                <a:srgbClr val="212121"/>
+              </a:solidFill>
+              <a:latin typeface="Courier New"/>
+            </a:endParaRPr>
           </a:p>
           <a:p>
             <a:pPr>
@@ -13115,7 +13803,7 @@
 </file>
 
 <file path=ppt/slides/slide53.xml><?xml version="1.0" encoding="utf-8"?>
-<p:sld xmlns:a="http://schemas.openxmlformats.org/drawingml/2006/main" xmlns:p="http://schemas.openxmlformats.org/presentationml/2006/main" xmlns:r="http://schemas.openxmlformats.org/officeDocument/2006/relationships">
+<p:sld xmlns:a="http://schemas.openxmlformats.org/drawingml/2006/main" xmlns:r="http://schemas.openxmlformats.org/officeDocument/2006/relationships" xmlns:p="http://schemas.openxmlformats.org/presentationml/2006/main">
   <p:cSld>
     <p:spTree>
       <p:nvGrpSpPr>
@@ -13123,7 +13811,14 @@
         <p:cNvGrpSpPr/>
         <p:nvPr/>
       </p:nvGrpSpPr>
-      <p:grpSpPr/>
+      <p:grpSpPr>
+        <a:xfrm>
+          <a:off x="0" y="0"/>
+          <a:ext cx="0" cy="0"/>
+          <a:chOff x="0" y="0"/>
+          <a:chExt cx="0" cy="0"/>
+        </a:xfrm>
+      </p:grpSpPr>
       <p:sp>
         <p:nvSpPr>
           <p:cNvPr id="2" name="TextBox 1"/>
@@ -13264,7 +13959,7 @@
 </file>
 
 <file path=ppt/slides/slide54.xml><?xml version="1.0" encoding="utf-8"?>
-<p:sld xmlns:a="http://schemas.openxmlformats.org/drawingml/2006/main" xmlns:p="http://schemas.openxmlformats.org/presentationml/2006/main" xmlns:r="http://schemas.openxmlformats.org/officeDocument/2006/relationships">
+<p:sld xmlns:a="http://schemas.openxmlformats.org/drawingml/2006/main" xmlns:r="http://schemas.openxmlformats.org/officeDocument/2006/relationships" xmlns:p="http://schemas.openxmlformats.org/presentationml/2006/main">
   <p:cSld>
     <p:spTree>
       <p:nvGrpSpPr>
@@ -13272,7 +13967,14 @@
         <p:cNvGrpSpPr/>
         <p:nvPr/>
       </p:nvGrpSpPr>
-      <p:grpSpPr/>
+      <p:grpSpPr>
+        <a:xfrm>
+          <a:off x="0" y="0"/>
+          <a:ext cx="0" cy="0"/>
+          <a:chOff x="0" y="0"/>
+          <a:chExt cx="0" cy="0"/>
+        </a:xfrm>
+      </p:grpSpPr>
       <p:sp>
         <p:nvSpPr>
           <p:cNvPr id="2" name="TextBox 1"/>
@@ -13432,7 +14134,7 @@
 </file>
 
 <file path=ppt/slides/slide6.xml><?xml version="1.0" encoding="utf-8"?>
-<p:sld xmlns:a="http://schemas.openxmlformats.org/drawingml/2006/main" xmlns:p="http://schemas.openxmlformats.org/presentationml/2006/main" xmlns:r="http://schemas.openxmlformats.org/officeDocument/2006/relationships">
+<p:sld xmlns:a="http://schemas.openxmlformats.org/drawingml/2006/main" xmlns:r="http://schemas.openxmlformats.org/officeDocument/2006/relationships" xmlns:p="http://schemas.openxmlformats.org/presentationml/2006/main">
   <p:cSld>
     <p:spTree>
       <p:nvGrpSpPr>
@@ -13440,7 +14142,14 @@
         <p:cNvGrpSpPr/>
         <p:nvPr/>
       </p:nvGrpSpPr>
-      <p:grpSpPr/>
+      <p:grpSpPr>
+        <a:xfrm>
+          <a:off x="0" y="0"/>
+          <a:ext cx="0" cy="0"/>
+          <a:chOff x="0" y="0"/>
+          <a:chExt cx="0" cy="0"/>
+        </a:xfrm>
+      </p:grpSpPr>
       <p:sp>
         <p:nvSpPr>
           <p:cNvPr id="2" name="TextBox 1"/>
@@ -13484,7 +14193,7 @@
         </p:nvGraphicFramePr>
         <p:xfrm>
           <a:off x="731520" y="1463040"/>
-          <a:ext cx="10698480" cy="1463040"/>
+          <a:ext cx="10698480" cy="1584960"/>
         </p:xfrm>
         <a:graphic>
           <a:graphicData uri="http://schemas.openxmlformats.org/drawingml/2006/table">
@@ -13493,8 +14202,20 @@
                 <a:tableStyleId>{5C22544A-7EE6-4342-B048-85BDC9FD1C3A}</a:tableStyleId>
               </a:tblPr>
               <a:tblGrid>
-                <a:gridCol w="3840480"/>
-                <a:gridCol w="6858000"/>
+                <a:gridCol w="3840480">
+                  <a:extLst>
+                    <a:ext uri="{9D8B030D-6E8A-4147-A177-3AD203B41FA5}">
+                      <a16:colId xmlns:a16="http://schemas.microsoft.com/office/drawing/2014/main" val="20000"/>
+                    </a:ext>
+                  </a:extLst>
+                </a:gridCol>
+                <a:gridCol w="6858000">
+                  <a:extLst>
+                    <a:ext uri="{9D8B030D-6E8A-4147-A177-3AD203B41FA5}">
+                      <a16:colId xmlns:a16="http://schemas.microsoft.com/office/drawing/2014/main" val="20001"/>
+                    </a:ext>
+                  </a:extLst>
+                </a:gridCol>
               </a:tblGrid>
               <a:tr h="365760">
                 <a:tc>
@@ -13514,10 +14235,17 @@
                   <a:txBody>
                     <a:bodyPr/>
                     <a:lstStyle/>
-                    <a:p/>
+                    <a:p>
+                      <a:endParaRPr/>
+                    </a:p>
                   </a:txBody>
                   <a:tcPr/>
                 </a:tc>
+                <a:extLst>
+                  <a:ext uri="{0D108BD9-81ED-4DB2-BD59-A6C34878D82A}">
+                    <a16:rowId xmlns:a16="http://schemas.microsoft.com/office/drawing/2014/main" val="10000"/>
+                  </a:ext>
+                </a:extLst>
               </a:tr>
               <a:tr h="365760">
                 <a:tc>
@@ -13546,6 +14274,11 @@
                   </a:txBody>
                   <a:tcPr/>
                 </a:tc>
+                <a:extLst>
+                  <a:ext uri="{0D108BD9-81ED-4DB2-BD59-A6C34878D82A}">
+                    <a16:rowId xmlns:a16="http://schemas.microsoft.com/office/drawing/2014/main" val="10001"/>
+                  </a:ext>
+                </a:extLst>
               </a:tr>
               <a:tr h="365760">
                 <a:tc>
@@ -13574,6 +14307,11 @@
                   </a:txBody>
                   <a:tcPr/>
                 </a:tc>
+                <a:extLst>
+                  <a:ext uri="{0D108BD9-81ED-4DB2-BD59-A6C34878D82A}">
+                    <a16:rowId xmlns:a16="http://schemas.microsoft.com/office/drawing/2014/main" val="10002"/>
+                  </a:ext>
+                </a:extLst>
               </a:tr>
               <a:tr h="365760">
                 <a:tc>
@@ -13602,6 +14340,11 @@
                   </a:txBody>
                   <a:tcPr/>
                 </a:tc>
+                <a:extLst>
+                  <a:ext uri="{0D108BD9-81ED-4DB2-BD59-A6C34878D82A}">
+                    <a16:rowId xmlns:a16="http://schemas.microsoft.com/office/drawing/2014/main" val="10003"/>
+                  </a:ext>
+                </a:extLst>
               </a:tr>
             </a:tbl>
           </a:graphicData>
@@ -13699,7 +14442,7 @@
 </file>
 
 <file path=ppt/slides/slide7.xml><?xml version="1.0" encoding="utf-8"?>
-<p:sld xmlns:a="http://schemas.openxmlformats.org/drawingml/2006/main" xmlns:p="http://schemas.openxmlformats.org/presentationml/2006/main" xmlns:r="http://schemas.openxmlformats.org/officeDocument/2006/relationships">
+<p:sld xmlns:a="http://schemas.openxmlformats.org/drawingml/2006/main" xmlns:r="http://schemas.openxmlformats.org/officeDocument/2006/relationships" xmlns:p="http://schemas.openxmlformats.org/presentationml/2006/main">
   <p:cSld>
     <p:spTree>
       <p:nvGrpSpPr>
@@ -13707,7 +14450,14 @@
         <p:cNvGrpSpPr/>
         <p:nvPr/>
       </p:nvGrpSpPr>
-      <p:grpSpPr/>
+      <p:grpSpPr>
+        <a:xfrm>
+          <a:off x="0" y="0"/>
+          <a:ext cx="0" cy="0"/>
+          <a:chOff x="0" y="0"/>
+          <a:chExt cx="0" cy="0"/>
+        </a:xfrm>
+      </p:grpSpPr>
       <p:sp>
         <p:nvSpPr>
           <p:cNvPr id="2" name="TextBox 1"/>
@@ -13784,6 +14534,19 @@
                 <a:spcPts val="0"/>
               </a:spcAft>
             </a:pPr>
+            <a:endParaRPr sz="1800">
+              <a:solidFill>
+                <a:srgbClr val="212121"/>
+              </a:solidFill>
+              <a:latin typeface="Courier New"/>
+            </a:endParaRPr>
+          </a:p>
+          <a:p>
+            <a:pPr>
+              <a:spcAft>
+                <a:spcPts val="0"/>
+              </a:spcAft>
+            </a:pPr>
             <a:r>
               <a:rPr sz="1800">
                 <a:solidFill>
@@ -13791,7 +14554,7 @@
                 </a:solidFill>
                 <a:latin typeface="Courier New"/>
               </a:rPr>
-              <a:t/>
+              <a:t>[Counterexample]</a:t>
             </a:r>
           </a:p>
           <a:p>
@@ -13807,7 +14570,7 @@
                 </a:solidFill>
                 <a:latin typeface="Courier New"/>
               </a:rPr>
-              <a:t>[Counterexample]</a:t>
+              <a:t>...</a:t>
             </a:r>
           </a:p>
           <a:p>
@@ -13823,7 +14586,7 @@
                 </a:solidFill>
                 <a:latin typeface="Courier New"/>
               </a:rPr>
-              <a:t>...</a:t>
+              <a:t>Violated property:</a:t>
             </a:r>
           </a:p>
           <a:p>
@@ -13839,7 +14602,7 @@
                 </a:solidFill>
                 <a:latin typeface="Courier New"/>
               </a:rPr>
-              <a:t>Violated property:</a:t>
+              <a:t>  dereference failure: array bounds violated</a:t>
             </a:r>
           </a:p>
           <a:p>
@@ -13855,7 +14618,7 @@
                 </a:solidFill>
                 <a:latin typeface="Courier New"/>
               </a:rPr>
-              <a:t>  dereference failure: array bounds violated</a:t>
+              <a:t>  CWE: CWE-787 (out-of-bounds write)</a:t>
             </a:r>
           </a:p>
           <a:p>
@@ -13864,6 +14627,19 @@
                 <a:spcPts val="0"/>
               </a:spcAft>
             </a:pPr>
+            <a:endParaRPr sz="1800">
+              <a:solidFill>
+                <a:srgbClr val="212121"/>
+              </a:solidFill>
+              <a:latin typeface="Courier New"/>
+            </a:endParaRPr>
+          </a:p>
+          <a:p>
+            <a:pPr>
+              <a:spcAft>
+                <a:spcPts val="0"/>
+              </a:spcAft>
+            </a:pPr>
             <a:r>
               <a:rPr sz="1800">
                 <a:solidFill>
@@ -13871,38 +14647,6 @@
                 </a:solidFill>
                 <a:latin typeface="Courier New"/>
               </a:rPr>
-              <a:t>  CWE: CWE-787 (out-of-bounds write)</a:t>
-            </a:r>
-          </a:p>
-          <a:p>
-            <a:pPr>
-              <a:spcAft>
-                <a:spcPts val="0"/>
-              </a:spcAft>
-            </a:pPr>
-            <a:r>
-              <a:rPr sz="1800">
-                <a:solidFill>
-                  <a:srgbClr val="212121"/>
-                </a:solidFill>
-                <a:latin typeface="Courier New"/>
-              </a:rPr>
-              <a:t/>
-            </a:r>
-          </a:p>
-          <a:p>
-            <a:pPr>
-              <a:spcAft>
-                <a:spcPts val="0"/>
-              </a:spcAft>
-            </a:pPr>
-            <a:r>
-              <a:rPr sz="1800">
-                <a:solidFill>
-                  <a:srgbClr val="212121"/>
-                </a:solidFill>
-                <a:latin typeface="Courier New"/>
-              </a:rPr>
               <a:t>VERIFICATION FAILED</a:t>
             </a:r>
           </a:p>
@@ -13912,14 +14656,12 @@
                 <a:spcPts val="800"/>
               </a:spcAft>
             </a:pPr>
-            <a:r>
-              <a:rPr sz="2200">
-                <a:solidFill>
-                  <a:srgbClr val="212121"/>
-                </a:solidFill>
-              </a:rPr>
-              <a:t/>
-            </a:r>
+            <a:endParaRPr sz="1800">
+              <a:solidFill>
+                <a:srgbClr val="212121"/>
+              </a:solidFill>
+              <a:latin typeface="Courier New"/>
+            </a:endParaRPr>
           </a:p>
           <a:p>
             <a:pPr>
@@ -13947,7 +14689,7 @@
 </file>
 
 <file path=ppt/slides/slide8.xml><?xml version="1.0" encoding="utf-8"?>
-<p:sld xmlns:a="http://schemas.openxmlformats.org/drawingml/2006/main" xmlns:p="http://schemas.openxmlformats.org/presentationml/2006/main" xmlns:r="http://schemas.openxmlformats.org/officeDocument/2006/relationships">
+<p:sld xmlns:a="http://schemas.openxmlformats.org/drawingml/2006/main" xmlns:r="http://schemas.openxmlformats.org/officeDocument/2006/relationships" xmlns:p="http://schemas.openxmlformats.org/presentationml/2006/main">
   <p:cSld>
     <p:spTree>
       <p:nvGrpSpPr>
@@ -13955,7 +14697,14 @@
         <p:cNvGrpSpPr/>
         <p:nvPr/>
       </p:nvGrpSpPr>
-      <p:grpSpPr/>
+      <p:grpSpPr>
+        <a:xfrm>
+          <a:off x="0" y="0"/>
+          <a:ext cx="0" cy="0"/>
+          <a:chOff x="0" y="0"/>
+          <a:chExt cx="0" cy="0"/>
+        </a:xfrm>
+      </p:grpSpPr>
       <p:sp>
         <p:nvSpPr>
           <p:cNvPr id="2" name="TextBox 1"/>
@@ -14111,6 +14860,19 @@
                 <a:spcPts val="0"/>
               </a:spcAft>
             </a:pPr>
+            <a:endParaRPr sz="1600">
+              <a:solidFill>
+                <a:srgbClr val="212121"/>
+              </a:solidFill>
+              <a:latin typeface="Courier New"/>
+            </a:endParaRPr>
+          </a:p>
+          <a:p>
+            <a:pPr>
+              <a:spcAft>
+                <a:spcPts val="0"/>
+              </a:spcAft>
+            </a:pPr>
             <a:r>
               <a:rPr sz="1600">
                 <a:solidFill>
@@ -14118,7 +14880,7 @@
                 </a:solidFill>
                 <a:latin typeface="Courier New"/>
               </a:rPr>
-              <a:t/>
+              <a:t>$ esbmc getpassword.c --unwind 8 --generate-ctest-testcase</a:t>
             </a:r>
           </a:p>
           <a:p>
@@ -14134,7 +14896,7 @@
                 </a:solidFill>
                 <a:latin typeface="Courier New"/>
               </a:rPr>
-              <a:t>$ esbmc getpassword.c --unwind 8 --generate-ctest-testcase</a:t>
+              <a:t>  → Generated CTest test case: test_case.c</a:t>
             </a:r>
           </a:p>
           <a:p>
@@ -14143,6 +14905,19 @@
                 <a:spcPts val="0"/>
               </a:spcAft>
             </a:pPr>
+            <a:endParaRPr sz="1600">
+              <a:solidFill>
+                <a:srgbClr val="212121"/>
+              </a:solidFill>
+              <a:latin typeface="Courier New"/>
+            </a:endParaRPr>
+          </a:p>
+          <a:p>
+            <a:pPr>
+              <a:spcAft>
+                <a:spcPts val="0"/>
+              </a:spcAft>
+            </a:pPr>
             <a:r>
               <a:rPr sz="1600">
                 <a:solidFill>
@@ -14150,7 +14925,7 @@
                 </a:solidFill>
                 <a:latin typeface="Courier New"/>
               </a:rPr>
-              <a:t>  → Generated CTest test case: test_case.c</a:t>
+              <a:t>char nondet_char(void) {            /* test_case.c */</a:t>
             </a:r>
           </a:p>
           <a:p>
@@ -14166,7 +14941,7 @@
                 </a:solidFill>
                 <a:latin typeface="Courier New"/>
               </a:rPr>
-              <a:t/>
+              <a:t>  static const char v[] = { 83, 77, 84 };  /* "SMT" */</a:t>
             </a:r>
           </a:p>
           <a:p>
@@ -14182,7 +14957,7 @@
                 </a:solidFill>
                 <a:latin typeface="Courier New"/>
               </a:rPr>
-              <a:t>char nondet_char(void) {            /* test_case.c */</a:t>
+              <a:t>  static int i = 0; return v[i++];</a:t>
             </a:r>
           </a:p>
           <a:p>
@@ -14198,38 +14973,6 @@
                 </a:solidFill>
                 <a:latin typeface="Courier New"/>
               </a:rPr>
-              <a:t>  static const char v[] = { 83, 77, 84 };  /* "SMT" */</a:t>
-            </a:r>
-          </a:p>
-          <a:p>
-            <a:pPr>
-              <a:spcAft>
-                <a:spcPts val="0"/>
-              </a:spcAft>
-            </a:pPr>
-            <a:r>
-              <a:rPr sz="1600">
-                <a:solidFill>
-                  <a:srgbClr val="212121"/>
-                </a:solidFill>
-                <a:latin typeface="Courier New"/>
-              </a:rPr>
-              <a:t>  static int i = 0; return v[i++];</a:t>
-            </a:r>
-          </a:p>
-          <a:p>
-            <a:pPr>
-              <a:spcAft>
-                <a:spcPts val="0"/>
-              </a:spcAft>
-            </a:pPr>
-            <a:r>
-              <a:rPr sz="1600">
-                <a:solidFill>
-                  <a:srgbClr val="212121"/>
-                </a:solidFill>
-                <a:latin typeface="Courier New"/>
-              </a:rPr>
               <a:t>}</a:t>
             </a:r>
           </a:p>
@@ -14239,14 +14982,12 @@
                 <a:spcPts val="800"/>
               </a:spcAft>
             </a:pPr>
-            <a:r>
-              <a:rPr sz="2000">
-                <a:solidFill>
-                  <a:srgbClr val="212121"/>
-                </a:solidFill>
-              </a:rPr>
-              <a:t/>
-            </a:r>
+            <a:endParaRPr sz="1600">
+              <a:solidFill>
+                <a:srgbClr val="212121"/>
+              </a:solidFill>
+              <a:latin typeface="Courier New"/>
+            </a:endParaRPr>
           </a:p>
           <a:p>
             <a:pPr>
@@ -14313,7 +15054,7 @@
 </file>
 
 <file path=ppt/slides/slide9.xml><?xml version="1.0" encoding="utf-8"?>
-<p:sld xmlns:a="http://schemas.openxmlformats.org/drawingml/2006/main" xmlns:p="http://schemas.openxmlformats.org/presentationml/2006/main" xmlns:r="http://schemas.openxmlformats.org/officeDocument/2006/relationships">
+<p:sld xmlns:a="http://schemas.openxmlformats.org/drawingml/2006/main" xmlns:r="http://schemas.openxmlformats.org/officeDocument/2006/relationships" xmlns:p="http://schemas.openxmlformats.org/presentationml/2006/main">
   <p:cSld>
     <p:spTree>
       <p:nvGrpSpPr>
@@ -14321,7 +15062,14 @@
         <p:cNvGrpSpPr/>
         <p:nvPr/>
       </p:nvGrpSpPr>
-      <p:grpSpPr/>
+      <p:grpSpPr>
+        <a:xfrm>
+          <a:off x="0" y="0"/>
+          <a:ext cx="0" cy="0"/>
+          <a:chOff x="0" y="0"/>
+          <a:chExt cx="0" cy="0"/>
+        </a:xfrm>
+      </p:grpSpPr>
       <p:sp>
         <p:nvSpPr>
           <p:cNvPr id="2" name="TextBox 1"/>
@@ -14445,6 +15193,19 @@
                 <a:spcPts val="0"/>
               </a:spcAft>
             </a:pPr>
+            <a:endParaRPr sz="1600">
+              <a:solidFill>
+                <a:srgbClr val="212121"/>
+              </a:solidFill>
+              <a:latin typeface="Courier New"/>
+            </a:endParaRPr>
+          </a:p>
+          <a:p>
+            <a:pPr>
+              <a:spcAft>
+                <a:spcPts val="0"/>
+              </a:spcAft>
+            </a:pPr>
             <a:r>
               <a:rPr sz="1600">
                 <a:solidFill>
@@ -14452,7 +15213,7 @@
                 </a:solidFill>
                 <a:latin typeface="Courier New"/>
               </a:rPr>
-              <a:t/>
+              <a:t>  if (access_granted(buf) &amp;&amp; strcmp(buf, "SMT") != 0)</a:t>
             </a:r>
           </a:p>
           <a:p>
@@ -14468,7 +15229,7 @@
                 </a:solidFill>
                 <a:latin typeface="Courier New"/>
               </a:rPr>
-              <a:t>  if (access_granted(buf) &amp;&amp; strcmp(buf, "SMT") != 0)</a:t>
+              <a:t>    assert(0);     /* got in WITHOUT the password */</a:t>
             </a:r>
           </a:p>
           <a:p>
@@ -14477,6 +15238,19 @@
                 <a:spcPts val="0"/>
               </a:spcAft>
             </a:pPr>
+            <a:endParaRPr sz="1600">
+              <a:solidFill>
+                <a:srgbClr val="212121"/>
+              </a:solidFill>
+              <a:latin typeface="Courier New"/>
+            </a:endParaRPr>
+          </a:p>
+          <a:p>
+            <a:pPr>
+              <a:spcAft>
+                <a:spcPts val="0"/>
+              </a:spcAft>
+            </a:pPr>
             <a:r>
               <a:rPr sz="1600">
                 <a:solidFill>
@@ -14484,7 +15258,7 @@
                 </a:solidFill>
                 <a:latin typeface="Courier New"/>
               </a:rPr>
-              <a:t>    assert(0);     /* got in WITHOUT the password */</a:t>
+              <a:t>$ esbmc getpassword.c --unwind 8 --generate-ctest-testcase</a:t>
             </a:r>
           </a:p>
           <a:p>
@@ -14500,7 +15274,7 @@
                 </a:solidFill>
                 <a:latin typeface="Courier New"/>
               </a:rPr>
-              <a:t/>
+              <a:t>  buf = { 0, 0, 0 }            → the empty string ""</a:t>
             </a:r>
           </a:p>
           <a:p>
@@ -14516,38 +15290,6 @@
                 </a:solidFill>
                 <a:latin typeface="Courier New"/>
               </a:rPr>
-              <a:t>$ esbmc getpassword.c --unwind 8 --generate-ctest-testcase</a:t>
-            </a:r>
-          </a:p>
-          <a:p>
-            <a:pPr>
-              <a:spcAft>
-                <a:spcPts val="0"/>
-              </a:spcAft>
-            </a:pPr>
-            <a:r>
-              <a:rPr sz="1600">
-                <a:solidFill>
-                  <a:srgbClr val="212121"/>
-                </a:solidFill>
-                <a:latin typeface="Courier New"/>
-              </a:rPr>
-              <a:t>  buf = { 0, 0, 0 }            → the empty string ""</a:t>
-            </a:r>
-          </a:p>
-          <a:p>
-            <a:pPr>
-              <a:spcAft>
-                <a:spcPts val="0"/>
-              </a:spcAft>
-            </a:pPr>
-            <a:r>
-              <a:rPr sz="1600">
-                <a:solidFill>
-                  <a:srgbClr val="212121"/>
-                </a:solidFill>
-                <a:latin typeface="Courier New"/>
-              </a:rPr>
               <a:t>VERIFICATION FAILED</a:t>
             </a:r>
           </a:p>
@@ -14557,14 +15299,12 @@
                 <a:spcPts val="800"/>
               </a:spcAft>
             </a:pPr>
-            <a:r>
-              <a:rPr sz="2000">
-                <a:solidFill>
-                  <a:srgbClr val="212121"/>
-                </a:solidFill>
-              </a:rPr>
-              <a:t/>
-            </a:r>
+            <a:endParaRPr sz="1600">
+              <a:solidFill>
+                <a:srgbClr val="212121"/>
+              </a:solidFill>
+              <a:latin typeface="Courier New"/>
+            </a:endParaRPr>
           </a:p>
           <a:p>
             <a:pPr>

--- a/slides/session1/01-session1-fundamentals.pptx
+++ b/slides/session1/01-session1-fundamentals.pptx
@@ -5,62 +5,62 @@
     <p:sldMasterId id="2147483648" r:id="rId1"/>
   </p:sldMasterIdLst>
   <p:sldIdLst>
-    <p:sldId id="256" r:id="rId2"/>
-    <p:sldId id="257" r:id="rId3"/>
-    <p:sldId id="258" r:id="rId4"/>
-    <p:sldId id="259" r:id="rId5"/>
-    <p:sldId id="260" r:id="rId6"/>
-    <p:sldId id="261" r:id="rId7"/>
-    <p:sldId id="262" r:id="rId8"/>
-    <p:sldId id="263" r:id="rId9"/>
-    <p:sldId id="264" r:id="rId10"/>
-    <p:sldId id="265" r:id="rId11"/>
-    <p:sldId id="266" r:id="rId12"/>
-    <p:sldId id="267" r:id="rId13"/>
-    <p:sldId id="268" r:id="rId14"/>
-    <p:sldId id="269" r:id="rId15"/>
-    <p:sldId id="270" r:id="rId16"/>
-    <p:sldId id="271" r:id="rId17"/>
-    <p:sldId id="272" r:id="rId18"/>
-    <p:sldId id="273" r:id="rId19"/>
-    <p:sldId id="274" r:id="rId20"/>
-    <p:sldId id="275" r:id="rId21"/>
-    <p:sldId id="276" r:id="rId22"/>
-    <p:sldId id="277" r:id="rId23"/>
-    <p:sldId id="278" r:id="rId24"/>
-    <p:sldId id="279" r:id="rId25"/>
-    <p:sldId id="280" r:id="rId26"/>
-    <p:sldId id="281" r:id="rId27"/>
-    <p:sldId id="282" r:id="rId28"/>
-    <p:sldId id="283" r:id="rId29"/>
-    <p:sldId id="284" r:id="rId30"/>
-    <p:sldId id="285" r:id="rId31"/>
-    <p:sldId id="286" r:id="rId32"/>
-    <p:sldId id="287" r:id="rId33"/>
-    <p:sldId id="288" r:id="rId34"/>
-    <p:sldId id="289" r:id="rId35"/>
-    <p:sldId id="290" r:id="rId36"/>
-    <p:sldId id="291" r:id="rId37"/>
-    <p:sldId id="292" r:id="rId38"/>
-    <p:sldId id="293" r:id="rId39"/>
-    <p:sldId id="294" r:id="rId40"/>
-    <p:sldId id="295" r:id="rId41"/>
-    <p:sldId id="296" r:id="rId42"/>
-    <p:sldId id="297" r:id="rId43"/>
-    <p:sldId id="298" r:id="rId44"/>
-    <p:sldId id="299" r:id="rId45"/>
-    <p:sldId id="300" r:id="rId46"/>
-    <p:sldId id="301" r:id="rId47"/>
-    <p:sldId id="302" r:id="rId48"/>
-    <p:sldId id="303" r:id="rId49"/>
-    <p:sldId id="304" r:id="rId50"/>
-    <p:sldId id="305" r:id="rId51"/>
-    <p:sldId id="306" r:id="rId52"/>
-    <p:sldId id="307" r:id="rId53"/>
-    <p:sldId id="308" r:id="rId54"/>
-    <p:sldId id="309" r:id="rId55"/>
+    <p:sldId id="256" r:id="rId7"/>
+    <p:sldId id="257" r:id="rId8"/>
+    <p:sldId id="258" r:id="rId9"/>
+    <p:sldId id="259" r:id="rId10"/>
+    <p:sldId id="260" r:id="rId11"/>
+    <p:sldId id="261" r:id="rId12"/>
+    <p:sldId id="262" r:id="rId13"/>
+    <p:sldId id="263" r:id="rId14"/>
+    <p:sldId id="264" r:id="rId15"/>
+    <p:sldId id="265" r:id="rId16"/>
+    <p:sldId id="266" r:id="rId17"/>
+    <p:sldId id="267" r:id="rId18"/>
+    <p:sldId id="268" r:id="rId19"/>
+    <p:sldId id="269" r:id="rId20"/>
+    <p:sldId id="270" r:id="rId21"/>
+    <p:sldId id="271" r:id="rId22"/>
+    <p:sldId id="272" r:id="rId23"/>
+    <p:sldId id="273" r:id="rId24"/>
+    <p:sldId id="274" r:id="rId25"/>
+    <p:sldId id="275" r:id="rId26"/>
+    <p:sldId id="276" r:id="rId27"/>
+    <p:sldId id="277" r:id="rId28"/>
+    <p:sldId id="278" r:id="rId29"/>
+    <p:sldId id="279" r:id="rId30"/>
+    <p:sldId id="280" r:id="rId31"/>
+    <p:sldId id="281" r:id="rId32"/>
+    <p:sldId id="282" r:id="rId33"/>
+    <p:sldId id="283" r:id="rId34"/>
+    <p:sldId id="284" r:id="rId35"/>
+    <p:sldId id="285" r:id="rId36"/>
+    <p:sldId id="286" r:id="rId37"/>
+    <p:sldId id="287" r:id="rId38"/>
+    <p:sldId id="288" r:id="rId39"/>
+    <p:sldId id="289" r:id="rId40"/>
+    <p:sldId id="290" r:id="rId41"/>
+    <p:sldId id="291" r:id="rId42"/>
+    <p:sldId id="292" r:id="rId43"/>
+    <p:sldId id="293" r:id="rId44"/>
+    <p:sldId id="294" r:id="rId45"/>
+    <p:sldId id="295" r:id="rId46"/>
+    <p:sldId id="296" r:id="rId47"/>
+    <p:sldId id="297" r:id="rId48"/>
+    <p:sldId id="298" r:id="rId49"/>
+    <p:sldId id="299" r:id="rId50"/>
+    <p:sldId id="300" r:id="rId51"/>
+    <p:sldId id="301" r:id="rId52"/>
+    <p:sldId id="302" r:id="rId53"/>
+    <p:sldId id="303" r:id="rId54"/>
+    <p:sldId id="304" r:id="rId55"/>
+    <p:sldId id="305" r:id="rId56"/>
+    <p:sldId id="306" r:id="rId57"/>
+    <p:sldId id="307" r:id="rId58"/>
+    <p:sldId id="308" r:id="rId59"/>
+    <p:sldId id="309" r:id="rId60"/>
   </p:sldIdLst>
-  <p:sldSz cx="12192000" cy="6858000"/>
+  <p:sldSz cx="12191695" cy="6858000" type="screen4x3"/>
   <p:notesSz cx="6858000" cy="9144000"/>
   <p:defaultTextStyle>
     <a:defPPr>
@@ -157,38 +157,15 @@
       </a:defRPr>
     </a:lvl9pPr>
   </p:defaultTextStyle>
-  <p:extLst>
-    <p:ext uri="{EFAFB233-063F-42B5-8137-9DF3F51BA10A}">
-      <p15:sldGuideLst xmlns:p15="http://schemas.microsoft.com/office/powerpoint/2012/main">
-        <p15:guide id="1" orient="horz" pos="2160">
-          <p15:clr>
-            <a:srgbClr val="A4A3A4"/>
-          </p15:clr>
-        </p15:guide>
-        <p15:guide id="2" pos="2880">
-          <p15:clr>
-            <a:srgbClr val="A4A3A4"/>
-          </p15:clr>
-        </p15:guide>
-      </p15:sldGuideLst>
-    </p:ext>
-  </p:extLst>
 </p:presentation>
 </file>
 
 <file path=ppt/charts/chart1.xml><?xml version="1.0" encoding="utf-8"?>
-<c:chartSpace xmlns:c="http://schemas.openxmlformats.org/drawingml/2006/chart" xmlns:a="http://schemas.openxmlformats.org/drawingml/2006/main" xmlns:r="http://schemas.openxmlformats.org/officeDocument/2006/relationships" xmlns:c16r2="http://schemas.microsoft.com/office/drawing/2015/06/chart">
+<c:chartSpace xmlns:c="http://schemas.openxmlformats.org/drawingml/2006/chart" xmlns:a="http://schemas.openxmlformats.org/drawingml/2006/main" xmlns:r="http://schemas.openxmlformats.org/officeDocument/2006/relationships">
   <c:date1904 val="0"/>
-  <c:lang val="en-GB"/>
-  <c:roundedCorners val="1"/>
-  <c:style val="2"/>
   <c:chart>
-    <c:title>
-      <c:overlay val="0"/>
-    </c:title>
     <c:autoTitleDeleted val="0"/>
     <c:plotArea>
-      <c:layout/>
       <c:lineChart>
         <c:grouping val="standard"/>
         <c:varyColors val="0"/>
@@ -284,20 +261,7 @@
             </c:numRef>
           </c:val>
           <c:smooth val="0"/>
-          <c:extLst>
-            <c:ext xmlns:c16="http://schemas.microsoft.com/office/drawing/2014/chart" uri="{C3380CC4-5D6E-409C-BE32-E72D297353CC}">
-              <c16:uniqueId val="{00000000-11F0-1948-BDAE-261F7823F5CE}"/>
-            </c:ext>
-          </c:extLst>
         </c:ser>
-        <c:dLbls>
-          <c:showLegendKey val="0"/>
-          <c:showVal val="0"/>
-          <c:showCatName val="0"/>
-          <c:showSerName val="0"/>
-          <c:showPercent val="0"/>
-          <c:showBubbleSize val="0"/>
-        </c:dLbls>
         <c:marker val="1"/>
         <c:smooth val="0"/>
         <c:axId val="2118791784"/>
@@ -310,7 +274,6 @@
         </c:scaling>
         <c:delete val="0"/>
         <c:axPos val="b"/>
-        <c:numFmt formatCode="General" sourceLinked="0"/>
         <c:majorTickMark val="out"/>
         <c:minorTickMark val="none"/>
         <c:tickLblPos val="nextTo"/>
@@ -321,7 +284,6 @@
             <a:pPr>
               <a:defRPr sz="1200"/>
             </a:pPr>
-            <a:endParaRPr lang="en-US"/>
           </a:p>
         </c:txPr>
         <c:crossAx val="2140495176"/>
@@ -333,13 +295,10 @@
       </c:catAx>
       <c:valAx>
         <c:axId val="2140495176"/>
-        <c:scaling>
-          <c:orientation val="minMax"/>
-        </c:scaling>
+        <c:scaling/>
         <c:delete val="0"/>
         <c:axPos val="l"/>
         <c:majorGridlines/>
-        <c:numFmt formatCode="General" sourceLinked="1"/>
         <c:majorTickMark val="out"/>
         <c:minorTickMark val="none"/>
         <c:tickLblPos val="nextTo"/>
@@ -350,12 +309,10 @@
             <a:pPr>
               <a:defRPr sz="1200"/>
             </a:pPr>
-            <a:endParaRPr lang="en-US"/>
           </a:p>
         </c:txPr>
         <c:crossAx val="2118791784"/>
         <c:crosses val="autoZero"/>
-        <c:crossBetween val="between"/>
       </c:valAx>
     </c:plotArea>
     <c:plotVisOnly val="1"/>
@@ -379,22 +336,14 @@
 </file>
 
 <file path=ppt/charts/chart2.xml><?xml version="1.0" encoding="utf-8"?>
-<c:chartSpace xmlns:c="http://schemas.openxmlformats.org/drawingml/2006/chart" xmlns:a="http://schemas.openxmlformats.org/drawingml/2006/main" xmlns:r="http://schemas.openxmlformats.org/officeDocument/2006/relationships" xmlns:c16r2="http://schemas.microsoft.com/office/drawing/2015/06/chart">
+<c:chartSpace xmlns:c="http://schemas.openxmlformats.org/drawingml/2006/chart" xmlns:a="http://schemas.openxmlformats.org/drawingml/2006/main" xmlns:r="http://schemas.openxmlformats.org/officeDocument/2006/relationships">
   <c:date1904 val="0"/>
-  <c:lang val="en-GB"/>
-  <c:roundedCorners val="1"/>
-  <c:style val="2"/>
   <c:chart>
-    <c:title>
-      <c:overlay val="0"/>
-    </c:title>
     <c:autoTitleDeleted val="0"/>
     <c:plotArea>
-      <c:layout/>
       <c:barChart>
         <c:barDir val="bar"/>
         <c:grouping val="clustered"/>
-        <c:varyColors val="1"/>
         <c:ser>
           <c:idx val="0"/>
           <c:order val="0"/>
@@ -409,7 +358,6 @@
               </c:strCache>
             </c:strRef>
           </c:tx>
-          <c:invertIfNegative val="1"/>
           <c:cat>
             <c:strRef>
               <c:f>Sheet1!$A$2:$A$11</c:f>
@@ -464,7 +412,7 @@
                   <c:v>7.88</c:v>
                 </c:pt>
                 <c:pt idx="3">
-                  <c:v>8.4700000000000006</c:v>
+                  <c:v>8.47</c:v>
                 </c:pt>
                 <c:pt idx="4">
                   <c:v>8.99</c:v>
@@ -487,21 +435,7 @@
               </c:numCache>
             </c:numRef>
           </c:val>
-          <c:extLst>
-            <c:ext xmlns:c16="http://schemas.microsoft.com/office/drawing/2014/chart" uri="{C3380CC4-5D6E-409C-BE32-E72D297353CC}">
-              <c16:uniqueId val="{00000000-3865-8246-B023-CCC09D27C1E9}"/>
-            </c:ext>
-          </c:extLst>
         </c:ser>
-        <c:dLbls>
-          <c:showLegendKey val="0"/>
-          <c:showVal val="0"/>
-          <c:showCatName val="0"/>
-          <c:showSerName val="0"/>
-          <c:showPercent val="0"/>
-          <c:showBubbleSize val="0"/>
-        </c:dLbls>
-        <c:gapWidth val="150"/>
         <c:axId val="-2068027336"/>
         <c:axId val="-2113994440"/>
       </c:barChart>
@@ -512,7 +446,6 @@
         </c:scaling>
         <c:delete val="0"/>
         <c:axPos val="l"/>
-        <c:numFmt formatCode="General" sourceLinked="0"/>
         <c:majorTickMark val="out"/>
         <c:minorTickMark val="none"/>
         <c:tickLblPos val="nextTo"/>
@@ -523,7 +456,6 @@
             <a:pPr>
               <a:defRPr sz="1200"/>
             </a:pPr>
-            <a:endParaRPr lang="en-US"/>
           </a:p>
         </c:txPr>
         <c:crossAx val="-2113994440"/>
@@ -535,13 +467,10 @@
       </c:catAx>
       <c:valAx>
         <c:axId val="-2113994440"/>
-        <c:scaling>
-          <c:orientation val="minMax"/>
-        </c:scaling>
+        <c:scaling/>
         <c:delete val="0"/>
         <c:axPos val="b"/>
         <c:majorGridlines/>
-        <c:numFmt formatCode="General" sourceLinked="1"/>
         <c:majorTickMark val="out"/>
         <c:minorTickMark val="none"/>
         <c:tickLblPos val="nextTo"/>
@@ -552,17 +481,13 @@
             <a:pPr>
               <a:defRPr sz="1200"/>
             </a:pPr>
-            <a:endParaRPr lang="en-US"/>
           </a:p>
         </c:txPr>
         <c:crossAx val="-2068027336"/>
         <c:crosses val="autoZero"/>
-        <c:crossBetween val="between"/>
       </c:valAx>
     </c:plotArea>
-    <c:plotVisOnly val="1"/>
     <c:dispBlanksAs val="gap"/>
-    <c:showDLblsOverMax val="1"/>
   </c:chart>
   <c:txPr>
     <a:bodyPr/>
@@ -618,9 +543,10 @@
           <a:lstStyle/>
           <a:p>
             <a:r>
-              <a:rPr lang="en-US"/>
+              <a:rPr lang="en-US" smtClean="0"/>
               <a:t>Click to edit Master title style</a:t>
             </a:r>
+            <a:endParaRPr lang="en-US"/>
           </a:p>
         </p:txBody>
       </p:sp>
@@ -736,9 +662,10 @@
           </a:lstStyle>
           <a:p>
             <a:r>
-              <a:rPr lang="en-US"/>
+              <a:rPr lang="en-US" smtClean="0"/>
               <a:t>Click to edit Master subtitle style</a:t>
             </a:r>
+            <a:endParaRPr lang="en-US"/>
           </a:p>
         </p:txBody>
       </p:sp>
@@ -759,7 +686,7 @@
           <a:p>
             <a:fld id="{5BCAD085-E8A6-8845-BD4E-CB4CCA059FC4}" type="datetimeFigureOut">
               <a:rPr lang="en-US" smtClean="0"/>
-              <a:t>6/13/26</a:t>
+              <a:t>1/27/13</a:t>
             </a:fld>
             <a:endParaRPr lang="en-US"/>
           </a:p>
@@ -853,9 +780,10 @@
           <a:lstStyle/>
           <a:p>
             <a:r>
-              <a:rPr lang="en-US"/>
+              <a:rPr lang="en-US" smtClean="0"/>
               <a:t>Click to edit Master title style</a:t>
             </a:r>
+            <a:endParaRPr lang="en-US"/>
           </a:p>
         </p:txBody>
       </p:sp>
@@ -876,37 +804,38 @@
           <a:p>
             <a:pPr lvl="0"/>
             <a:r>
-              <a:rPr lang="en-US"/>
+              <a:rPr lang="en-US" smtClean="0"/>
               <a:t>Click to edit Master text styles</a:t>
             </a:r>
           </a:p>
           <a:p>
             <a:pPr lvl="1"/>
             <a:r>
-              <a:rPr lang="en-US"/>
+              <a:rPr lang="en-US" smtClean="0"/>
               <a:t>Second level</a:t>
             </a:r>
           </a:p>
           <a:p>
             <a:pPr lvl="2"/>
             <a:r>
-              <a:rPr lang="en-US"/>
+              <a:rPr lang="en-US" smtClean="0"/>
               <a:t>Third level</a:t>
             </a:r>
           </a:p>
           <a:p>
             <a:pPr lvl="3"/>
             <a:r>
-              <a:rPr lang="en-US"/>
+              <a:rPr lang="en-US" smtClean="0"/>
               <a:t>Fourth level</a:t>
             </a:r>
           </a:p>
           <a:p>
             <a:pPr lvl="4"/>
             <a:r>
-              <a:rPr lang="en-US"/>
+              <a:rPr lang="en-US" smtClean="0"/>
               <a:t>Fifth level</a:t>
             </a:r>
+            <a:endParaRPr lang="en-US"/>
           </a:p>
         </p:txBody>
       </p:sp>
@@ -927,7 +856,7 @@
           <a:p>
             <a:fld id="{5BCAD085-E8A6-8845-BD4E-CB4CCA059FC4}" type="datetimeFigureOut">
               <a:rPr lang="en-US" smtClean="0"/>
-              <a:t>6/13/26</a:t>
+              <a:t>1/27/13</a:t>
             </a:fld>
             <a:endParaRPr lang="en-US"/>
           </a:p>
@@ -1026,9 +955,10 @@
           <a:lstStyle/>
           <a:p>
             <a:r>
-              <a:rPr lang="en-US"/>
+              <a:rPr lang="en-US" smtClean="0"/>
               <a:t>Click to edit Master title style</a:t>
             </a:r>
+            <a:endParaRPr lang="en-US"/>
           </a:p>
         </p:txBody>
       </p:sp>
@@ -1054,37 +984,38 @@
           <a:p>
             <a:pPr lvl="0"/>
             <a:r>
-              <a:rPr lang="en-US"/>
+              <a:rPr lang="en-US" smtClean="0"/>
               <a:t>Click to edit Master text styles</a:t>
             </a:r>
           </a:p>
           <a:p>
             <a:pPr lvl="1"/>
             <a:r>
-              <a:rPr lang="en-US"/>
+              <a:rPr lang="en-US" smtClean="0"/>
               <a:t>Second level</a:t>
             </a:r>
           </a:p>
           <a:p>
             <a:pPr lvl="2"/>
             <a:r>
-              <a:rPr lang="en-US"/>
+              <a:rPr lang="en-US" smtClean="0"/>
               <a:t>Third level</a:t>
             </a:r>
           </a:p>
           <a:p>
             <a:pPr lvl="3"/>
             <a:r>
-              <a:rPr lang="en-US"/>
+              <a:rPr lang="en-US" smtClean="0"/>
               <a:t>Fourth level</a:t>
             </a:r>
           </a:p>
           <a:p>
             <a:pPr lvl="4"/>
             <a:r>
-              <a:rPr lang="en-US"/>
+              <a:rPr lang="en-US" smtClean="0"/>
               <a:t>Fifth level</a:t>
             </a:r>
+            <a:endParaRPr lang="en-US"/>
           </a:p>
         </p:txBody>
       </p:sp>
@@ -1105,7 +1036,7 @@
           <a:p>
             <a:fld id="{5BCAD085-E8A6-8845-BD4E-CB4CCA059FC4}" type="datetimeFigureOut">
               <a:rPr lang="en-US" smtClean="0"/>
-              <a:t>6/13/26</a:t>
+              <a:t>1/27/13</a:t>
             </a:fld>
             <a:endParaRPr lang="en-US"/>
           </a:p>
@@ -1199,9 +1130,10 @@
           <a:lstStyle/>
           <a:p>
             <a:r>
-              <a:rPr lang="en-US"/>
+              <a:rPr lang="en-US" smtClean="0"/>
               <a:t>Click to edit Master title style</a:t>
             </a:r>
+            <a:endParaRPr lang="en-US"/>
           </a:p>
         </p:txBody>
       </p:sp>
@@ -1222,37 +1154,38 @@
           <a:p>
             <a:pPr lvl="0"/>
             <a:r>
-              <a:rPr lang="en-US"/>
+              <a:rPr lang="en-US" smtClean="0"/>
               <a:t>Click to edit Master text styles</a:t>
             </a:r>
           </a:p>
           <a:p>
             <a:pPr lvl="1"/>
             <a:r>
-              <a:rPr lang="en-US"/>
+              <a:rPr lang="en-US" smtClean="0"/>
               <a:t>Second level</a:t>
             </a:r>
           </a:p>
           <a:p>
             <a:pPr lvl="2"/>
             <a:r>
-              <a:rPr lang="en-US"/>
+              <a:rPr lang="en-US" smtClean="0"/>
               <a:t>Third level</a:t>
             </a:r>
           </a:p>
           <a:p>
             <a:pPr lvl="3"/>
             <a:r>
-              <a:rPr lang="en-US"/>
+              <a:rPr lang="en-US" smtClean="0"/>
               <a:t>Fourth level</a:t>
             </a:r>
           </a:p>
           <a:p>
             <a:pPr lvl="4"/>
             <a:r>
-              <a:rPr lang="en-US"/>
+              <a:rPr lang="en-US" smtClean="0"/>
               <a:t>Fifth level</a:t>
             </a:r>
+            <a:endParaRPr lang="en-US"/>
           </a:p>
         </p:txBody>
       </p:sp>
@@ -1273,7 +1206,7 @@
           <a:p>
             <a:fld id="{5BCAD085-E8A6-8845-BD4E-CB4CCA059FC4}" type="datetimeFigureOut">
               <a:rPr lang="en-US" smtClean="0"/>
-              <a:t>6/13/26</a:t>
+              <a:t>1/27/13</a:t>
             </a:fld>
             <a:endParaRPr lang="en-US"/>
           </a:p>
@@ -1376,9 +1309,10 @@
           </a:lstStyle>
           <a:p>
             <a:r>
-              <a:rPr lang="en-US"/>
+              <a:rPr lang="en-US" smtClean="0"/>
               <a:t>Click to edit Master title style</a:t>
             </a:r>
+            <a:endParaRPr lang="en-US"/>
           </a:p>
         </p:txBody>
       </p:sp>
@@ -1495,7 +1429,7 @@
           <a:p>
             <a:pPr lvl="0"/>
             <a:r>
-              <a:rPr lang="en-US"/>
+              <a:rPr lang="en-US" smtClean="0"/>
               <a:t>Click to edit Master text styles</a:t>
             </a:r>
           </a:p>
@@ -1518,7 +1452,7 @@
           <a:p>
             <a:fld id="{5BCAD085-E8A6-8845-BD4E-CB4CCA059FC4}" type="datetimeFigureOut">
               <a:rPr lang="en-US" smtClean="0"/>
-              <a:t>6/13/26</a:t>
+              <a:t>1/27/13</a:t>
             </a:fld>
             <a:endParaRPr lang="en-US"/>
           </a:p>
@@ -1612,9 +1546,10 @@
           <a:lstStyle/>
           <a:p>
             <a:r>
-              <a:rPr lang="en-US"/>
+              <a:rPr lang="en-US" smtClean="0"/>
               <a:t>Click to edit Master title style</a:t>
             </a:r>
+            <a:endParaRPr lang="en-US"/>
           </a:p>
         </p:txBody>
       </p:sp>
@@ -1668,37 +1603,38 @@
           <a:p>
             <a:pPr lvl="0"/>
             <a:r>
-              <a:rPr lang="en-US"/>
+              <a:rPr lang="en-US" smtClean="0"/>
               <a:t>Click to edit Master text styles</a:t>
             </a:r>
           </a:p>
           <a:p>
             <a:pPr lvl="1"/>
             <a:r>
-              <a:rPr lang="en-US"/>
+              <a:rPr lang="en-US" smtClean="0"/>
               <a:t>Second level</a:t>
             </a:r>
           </a:p>
           <a:p>
             <a:pPr lvl="2"/>
             <a:r>
-              <a:rPr lang="en-US"/>
+              <a:rPr lang="en-US" smtClean="0"/>
               <a:t>Third level</a:t>
             </a:r>
           </a:p>
           <a:p>
             <a:pPr lvl="3"/>
             <a:r>
-              <a:rPr lang="en-US"/>
+              <a:rPr lang="en-US" smtClean="0"/>
               <a:t>Fourth level</a:t>
             </a:r>
           </a:p>
           <a:p>
             <a:pPr lvl="4"/>
             <a:r>
-              <a:rPr lang="en-US"/>
+              <a:rPr lang="en-US" smtClean="0"/>
               <a:t>Fifth level</a:t>
             </a:r>
+            <a:endParaRPr lang="en-US"/>
           </a:p>
         </p:txBody>
       </p:sp>
@@ -1752,37 +1688,38 @@
           <a:p>
             <a:pPr lvl="0"/>
             <a:r>
-              <a:rPr lang="en-US"/>
+              <a:rPr lang="en-US" smtClean="0"/>
               <a:t>Click to edit Master text styles</a:t>
             </a:r>
           </a:p>
           <a:p>
             <a:pPr lvl="1"/>
             <a:r>
-              <a:rPr lang="en-US"/>
+              <a:rPr lang="en-US" smtClean="0"/>
               <a:t>Second level</a:t>
             </a:r>
           </a:p>
           <a:p>
             <a:pPr lvl="2"/>
             <a:r>
-              <a:rPr lang="en-US"/>
+              <a:rPr lang="en-US" smtClean="0"/>
               <a:t>Third level</a:t>
             </a:r>
           </a:p>
           <a:p>
             <a:pPr lvl="3"/>
             <a:r>
-              <a:rPr lang="en-US"/>
+              <a:rPr lang="en-US" smtClean="0"/>
               <a:t>Fourth level</a:t>
             </a:r>
           </a:p>
           <a:p>
             <a:pPr lvl="4"/>
             <a:r>
-              <a:rPr lang="en-US"/>
+              <a:rPr lang="en-US" smtClean="0"/>
               <a:t>Fifth level</a:t>
             </a:r>
+            <a:endParaRPr lang="en-US"/>
           </a:p>
         </p:txBody>
       </p:sp>
@@ -1803,7 +1740,7 @@
           <a:p>
             <a:fld id="{5BCAD085-E8A6-8845-BD4E-CB4CCA059FC4}" type="datetimeFigureOut">
               <a:rPr lang="en-US" smtClean="0"/>
-              <a:t>6/13/26</a:t>
+              <a:t>1/27/13</a:t>
             </a:fld>
             <a:endParaRPr lang="en-US"/>
           </a:p>
@@ -1901,9 +1838,10 @@
           </a:lstStyle>
           <a:p>
             <a:r>
-              <a:rPr lang="en-US"/>
+              <a:rPr lang="en-US" smtClean="0"/>
               <a:t>Click to edit Master title style</a:t>
             </a:r>
+            <a:endParaRPr lang="en-US"/>
           </a:p>
         </p:txBody>
       </p:sp>
@@ -1966,7 +1904,7 @@
           <a:p>
             <a:pPr lvl="0"/>
             <a:r>
-              <a:rPr lang="en-US"/>
+              <a:rPr lang="en-US" smtClean="0"/>
               <a:t>Click to edit Master text styles</a:t>
             </a:r>
           </a:p>
@@ -2022,37 +1960,38 @@
           <a:p>
             <a:pPr lvl="0"/>
             <a:r>
-              <a:rPr lang="en-US"/>
+              <a:rPr lang="en-US" smtClean="0"/>
               <a:t>Click to edit Master text styles</a:t>
             </a:r>
           </a:p>
           <a:p>
             <a:pPr lvl="1"/>
             <a:r>
-              <a:rPr lang="en-US"/>
+              <a:rPr lang="en-US" smtClean="0"/>
               <a:t>Second level</a:t>
             </a:r>
           </a:p>
           <a:p>
             <a:pPr lvl="2"/>
             <a:r>
-              <a:rPr lang="en-US"/>
+              <a:rPr lang="en-US" smtClean="0"/>
               <a:t>Third level</a:t>
             </a:r>
           </a:p>
           <a:p>
             <a:pPr lvl="3"/>
             <a:r>
-              <a:rPr lang="en-US"/>
+              <a:rPr lang="en-US" smtClean="0"/>
               <a:t>Fourth level</a:t>
             </a:r>
           </a:p>
           <a:p>
             <a:pPr lvl="4"/>
             <a:r>
-              <a:rPr lang="en-US"/>
+              <a:rPr lang="en-US" smtClean="0"/>
               <a:t>Fifth level</a:t>
             </a:r>
+            <a:endParaRPr lang="en-US"/>
           </a:p>
         </p:txBody>
       </p:sp>
@@ -2115,7 +2054,7 @@
           <a:p>
             <a:pPr lvl="0"/>
             <a:r>
-              <a:rPr lang="en-US"/>
+              <a:rPr lang="en-US" smtClean="0"/>
               <a:t>Click to edit Master text styles</a:t>
             </a:r>
           </a:p>
@@ -2171,37 +2110,38 @@
           <a:p>
             <a:pPr lvl="0"/>
             <a:r>
-              <a:rPr lang="en-US"/>
+              <a:rPr lang="en-US" smtClean="0"/>
               <a:t>Click to edit Master text styles</a:t>
             </a:r>
           </a:p>
           <a:p>
             <a:pPr lvl="1"/>
             <a:r>
-              <a:rPr lang="en-US"/>
+              <a:rPr lang="en-US" smtClean="0"/>
               <a:t>Second level</a:t>
             </a:r>
           </a:p>
           <a:p>
             <a:pPr lvl="2"/>
             <a:r>
-              <a:rPr lang="en-US"/>
+              <a:rPr lang="en-US" smtClean="0"/>
               <a:t>Third level</a:t>
             </a:r>
           </a:p>
           <a:p>
             <a:pPr lvl="3"/>
             <a:r>
-              <a:rPr lang="en-US"/>
+              <a:rPr lang="en-US" smtClean="0"/>
               <a:t>Fourth level</a:t>
             </a:r>
           </a:p>
           <a:p>
             <a:pPr lvl="4"/>
             <a:r>
-              <a:rPr lang="en-US"/>
+              <a:rPr lang="en-US" smtClean="0"/>
               <a:t>Fifth level</a:t>
             </a:r>
+            <a:endParaRPr lang="en-US"/>
           </a:p>
         </p:txBody>
       </p:sp>
@@ -2222,7 +2162,7 @@
           <a:p>
             <a:fld id="{5BCAD085-E8A6-8845-BD4E-CB4CCA059FC4}" type="datetimeFigureOut">
               <a:rPr lang="en-US" smtClean="0"/>
-              <a:t>6/13/26</a:t>
+              <a:t>1/27/13</a:t>
             </a:fld>
             <a:endParaRPr lang="en-US"/>
           </a:p>
@@ -2316,9 +2256,10 @@
           <a:lstStyle/>
           <a:p>
             <a:r>
-              <a:rPr lang="en-US"/>
+              <a:rPr lang="en-US" smtClean="0"/>
               <a:t>Click to edit Master title style</a:t>
             </a:r>
+            <a:endParaRPr lang="en-US"/>
           </a:p>
         </p:txBody>
       </p:sp>
@@ -2339,7 +2280,7 @@
           <a:p>
             <a:fld id="{5BCAD085-E8A6-8845-BD4E-CB4CCA059FC4}" type="datetimeFigureOut">
               <a:rPr lang="en-US" smtClean="0"/>
-              <a:t>6/13/26</a:t>
+              <a:t>1/27/13</a:t>
             </a:fld>
             <a:endParaRPr lang="en-US"/>
           </a:p>
@@ -2434,7 +2375,7 @@
           <a:p>
             <a:fld id="{5BCAD085-E8A6-8845-BD4E-CB4CCA059FC4}" type="datetimeFigureOut">
               <a:rPr lang="en-US" smtClean="0"/>
-              <a:t>6/13/26</a:t>
+              <a:t>1/27/13</a:t>
             </a:fld>
             <a:endParaRPr lang="en-US"/>
           </a:p>
@@ -2537,9 +2478,10 @@
           </a:lstStyle>
           <a:p>
             <a:r>
-              <a:rPr lang="en-US"/>
+              <a:rPr lang="en-US" smtClean="0"/>
               <a:t>Click to edit Master title style</a:t>
             </a:r>
+            <a:endParaRPr lang="en-US"/>
           </a:p>
         </p:txBody>
       </p:sp>
@@ -2593,37 +2535,38 @@
           <a:p>
             <a:pPr lvl="0"/>
             <a:r>
-              <a:rPr lang="en-US"/>
+              <a:rPr lang="en-US" smtClean="0"/>
               <a:t>Click to edit Master text styles</a:t>
             </a:r>
           </a:p>
           <a:p>
             <a:pPr lvl="1"/>
             <a:r>
-              <a:rPr lang="en-US"/>
+              <a:rPr lang="en-US" smtClean="0"/>
               <a:t>Second level</a:t>
             </a:r>
           </a:p>
           <a:p>
             <a:pPr lvl="2"/>
             <a:r>
-              <a:rPr lang="en-US"/>
+              <a:rPr lang="en-US" smtClean="0"/>
               <a:t>Third level</a:t>
             </a:r>
           </a:p>
           <a:p>
             <a:pPr lvl="3"/>
             <a:r>
-              <a:rPr lang="en-US"/>
+              <a:rPr lang="en-US" smtClean="0"/>
               <a:t>Fourth level</a:t>
             </a:r>
           </a:p>
           <a:p>
             <a:pPr lvl="4"/>
             <a:r>
-              <a:rPr lang="en-US"/>
+              <a:rPr lang="en-US" smtClean="0"/>
               <a:t>Fifth level</a:t>
             </a:r>
+            <a:endParaRPr lang="en-US"/>
           </a:p>
         </p:txBody>
       </p:sp>
@@ -2686,7 +2629,7 @@
           <a:p>
             <a:pPr lvl="0"/>
             <a:r>
-              <a:rPr lang="en-US"/>
+              <a:rPr lang="en-US" smtClean="0"/>
               <a:t>Click to edit Master text styles</a:t>
             </a:r>
           </a:p>
@@ -2709,7 +2652,7 @@
           <a:p>
             <a:fld id="{5BCAD085-E8A6-8845-BD4E-CB4CCA059FC4}" type="datetimeFigureOut">
               <a:rPr lang="en-US" smtClean="0"/>
-              <a:t>6/13/26</a:t>
+              <a:t>1/27/13</a:t>
             </a:fld>
             <a:endParaRPr lang="en-US"/>
           </a:p>
@@ -2812,9 +2755,10 @@
           </a:lstStyle>
           <a:p>
             <a:r>
-              <a:rPr lang="en-US"/>
+              <a:rPr lang="en-US" smtClean="0"/>
               <a:t>Click to edit Master title style</a:t>
             </a:r>
+            <a:endParaRPr lang="en-US"/>
           </a:p>
         </p:txBody>
       </p:sp>
@@ -2938,7 +2882,7 @@
           <a:p>
             <a:pPr lvl="0"/>
             <a:r>
-              <a:rPr lang="en-US"/>
+              <a:rPr lang="en-US" smtClean="0"/>
               <a:t>Click to edit Master text styles</a:t>
             </a:r>
           </a:p>
@@ -2961,7 +2905,7 @@
           <a:p>
             <a:fld id="{5BCAD085-E8A6-8845-BD4E-CB4CCA059FC4}" type="datetimeFigureOut">
               <a:rPr lang="en-US" smtClean="0"/>
-              <a:t>6/13/26</a:t>
+              <a:t>1/27/13</a:t>
             </a:fld>
             <a:endParaRPr lang="en-US"/>
           </a:p>
@@ -3070,9 +3014,10 @@
           <a:lstStyle/>
           <a:p>
             <a:r>
-              <a:rPr lang="en-US"/>
+              <a:rPr lang="en-US" smtClean="0"/>
               <a:t>Click to edit Master title style</a:t>
             </a:r>
+            <a:endParaRPr lang="en-US"/>
           </a:p>
         </p:txBody>
       </p:sp>
@@ -3103,37 +3048,38 @@
           <a:p>
             <a:pPr lvl="0"/>
             <a:r>
-              <a:rPr lang="en-US"/>
+              <a:rPr lang="en-US" smtClean="0"/>
               <a:t>Click to edit Master text styles</a:t>
             </a:r>
           </a:p>
           <a:p>
             <a:pPr lvl="1"/>
             <a:r>
-              <a:rPr lang="en-US"/>
+              <a:rPr lang="en-US" smtClean="0"/>
               <a:t>Second level</a:t>
             </a:r>
           </a:p>
           <a:p>
             <a:pPr lvl="2"/>
             <a:r>
-              <a:rPr lang="en-US"/>
+              <a:rPr lang="en-US" smtClean="0"/>
               <a:t>Third level</a:t>
             </a:r>
           </a:p>
           <a:p>
             <a:pPr lvl="3"/>
             <a:r>
-              <a:rPr lang="en-US"/>
+              <a:rPr lang="en-US" smtClean="0"/>
               <a:t>Fourth level</a:t>
             </a:r>
           </a:p>
           <a:p>
             <a:pPr lvl="4"/>
             <a:r>
-              <a:rPr lang="en-US"/>
+              <a:rPr lang="en-US" smtClean="0"/>
               <a:t>Fifth level</a:t>
             </a:r>
+            <a:endParaRPr lang="en-US"/>
           </a:p>
         </p:txBody>
       </p:sp>
@@ -3172,7 +3118,7 @@
           <a:p>
             <a:fld id="{5BCAD085-E8A6-8845-BD4E-CB4CCA059FC4}" type="datetimeFigureOut">
               <a:rPr lang="en-US" smtClean="0"/>
-              <a:t>6/13/26</a:t>
+              <a:t>1/27/13</a:t>
             </a:fld>
             <a:endParaRPr lang="en-US"/>
           </a:p>
@@ -3531,7 +3477,7 @@
 </file>
 
 <file path=ppt/slides/slide1.xml><?xml version="1.0" encoding="utf-8"?>
-<p:sld xmlns:a="http://schemas.openxmlformats.org/drawingml/2006/main" xmlns:r="http://schemas.openxmlformats.org/officeDocument/2006/relationships" xmlns:p="http://schemas.openxmlformats.org/presentationml/2006/main">
+<p:sld xmlns:a="http://schemas.openxmlformats.org/drawingml/2006/main" xmlns:p="http://schemas.openxmlformats.org/presentationml/2006/main" xmlns:r="http://schemas.openxmlformats.org/officeDocument/2006/relationships">
   <p:cSld>
     <p:spTree>
       <p:nvGrpSpPr>
@@ -3539,14 +3485,7 @@
         <p:cNvGrpSpPr/>
         <p:nvPr/>
       </p:nvGrpSpPr>
-      <p:grpSpPr>
-        <a:xfrm>
-          <a:off x="0" y="0"/>
-          <a:ext cx="0" cy="0"/>
-          <a:chOff x="0" y="0"/>
-          <a:chExt cx="0" cy="0"/>
-        </a:xfrm>
-      </p:grpSpPr>
+      <p:grpSpPr/>
       <p:sp>
         <p:nvSpPr>
           <p:cNvPr id="2" name="TextBox 1"/>
@@ -3658,7 +3597,7 @@
 </file>
 
 <file path=ppt/slides/slide10.xml><?xml version="1.0" encoding="utf-8"?>
-<p:sld xmlns:a="http://schemas.openxmlformats.org/drawingml/2006/main" xmlns:r="http://schemas.openxmlformats.org/officeDocument/2006/relationships" xmlns:p="http://schemas.openxmlformats.org/presentationml/2006/main">
+<p:sld xmlns:a="http://schemas.openxmlformats.org/drawingml/2006/main" xmlns:p="http://schemas.openxmlformats.org/presentationml/2006/main" xmlns:r="http://schemas.openxmlformats.org/officeDocument/2006/relationships">
   <p:cSld>
     <p:spTree>
       <p:nvGrpSpPr>
@@ -3666,14 +3605,7 @@
         <p:cNvGrpSpPr/>
         <p:nvPr/>
       </p:nvGrpSpPr>
-      <p:grpSpPr>
-        <a:xfrm>
-          <a:off x="0" y="0"/>
-          <a:ext cx="0" cy="0"/>
-          <a:chOff x="0" y="0"/>
-          <a:chExt cx="0" cy="0"/>
-        </a:xfrm>
-      </p:grpSpPr>
+      <p:grpSpPr/>
       <p:sp>
         <p:nvSpPr>
           <p:cNvPr id="2" name="TextBox 1"/>
@@ -3794,27 +3726,9 @@
                 <a:tableStyleId>{5C22544A-7EE6-4342-B048-85BDC9FD1C3A}</a:tableStyleId>
               </a:tblPr>
               <a:tblGrid>
-                <a:gridCol w="2560320">
-                  <a:extLst>
-                    <a:ext uri="{9D8B030D-6E8A-4147-A177-3AD203B41FA5}">
-                      <a16:colId xmlns:a16="http://schemas.microsoft.com/office/drawing/2014/main" val="20000"/>
-                    </a:ext>
-                  </a:extLst>
-                </a:gridCol>
-                <a:gridCol w="3840480">
-                  <a:extLst>
-                    <a:ext uri="{9D8B030D-6E8A-4147-A177-3AD203B41FA5}">
-                      <a16:colId xmlns:a16="http://schemas.microsoft.com/office/drawing/2014/main" val="20001"/>
-                    </a:ext>
-                  </a:extLst>
-                </a:gridCol>
-                <a:gridCol w="4297680">
-                  <a:extLst>
-                    <a:ext uri="{9D8B030D-6E8A-4147-A177-3AD203B41FA5}">
-                      <a16:colId xmlns:a16="http://schemas.microsoft.com/office/drawing/2014/main" val="20002"/>
-                    </a:ext>
-                  </a:extLst>
-                </a:gridCol>
+                <a:gridCol w="2560320"/>
+                <a:gridCol w="3840480"/>
+                <a:gridCol w="4297680"/>
               </a:tblGrid>
               <a:tr h="365760">
                 <a:tc>
@@ -3856,11 +3770,6 @@
                   </a:txBody>
                   <a:tcPr/>
                 </a:tc>
-                <a:extLst>
-                  <a:ext uri="{0D108BD9-81ED-4DB2-BD59-A6C34878D82A}">
-                    <a16:rowId xmlns:a16="http://schemas.microsoft.com/office/drawing/2014/main" val="10000"/>
-                  </a:ext>
-                </a:extLst>
               </a:tr>
               <a:tr h="365760">
                 <a:tc>
@@ -3902,11 +3811,6 @@
                   </a:txBody>
                   <a:tcPr/>
                 </a:tc>
-                <a:extLst>
-                  <a:ext uri="{0D108BD9-81ED-4DB2-BD59-A6C34878D82A}">
-                    <a16:rowId xmlns:a16="http://schemas.microsoft.com/office/drawing/2014/main" val="10001"/>
-                  </a:ext>
-                </a:extLst>
               </a:tr>
               <a:tr h="365760">
                 <a:tc>
@@ -3948,11 +3852,6 @@
                   </a:txBody>
                   <a:tcPr/>
                 </a:tc>
-                <a:extLst>
-                  <a:ext uri="{0D108BD9-81ED-4DB2-BD59-A6C34878D82A}">
-                    <a16:rowId xmlns:a16="http://schemas.microsoft.com/office/drawing/2014/main" val="10002"/>
-                  </a:ext>
-                </a:extLst>
               </a:tr>
               <a:tr h="365760">
                 <a:tc>
@@ -3994,11 +3893,6 @@
                   </a:txBody>
                   <a:tcPr/>
                 </a:tc>
-                <a:extLst>
-                  <a:ext uri="{0D108BD9-81ED-4DB2-BD59-A6C34878D82A}">
-                    <a16:rowId xmlns:a16="http://schemas.microsoft.com/office/drawing/2014/main" val="10003"/>
-                  </a:ext>
-                </a:extLst>
               </a:tr>
             </a:tbl>
           </a:graphicData>
@@ -4013,7 +3907,7 @@
 </file>
 
 <file path=ppt/slides/slide11.xml><?xml version="1.0" encoding="utf-8"?>
-<p:sld xmlns:a="http://schemas.openxmlformats.org/drawingml/2006/main" xmlns:r="http://schemas.openxmlformats.org/officeDocument/2006/relationships" xmlns:p="http://schemas.openxmlformats.org/presentationml/2006/main">
+<p:sld xmlns:a="http://schemas.openxmlformats.org/drawingml/2006/main" xmlns:p="http://schemas.openxmlformats.org/presentationml/2006/main" xmlns:r="http://schemas.openxmlformats.org/officeDocument/2006/relationships">
   <p:cSld>
     <p:spTree>
       <p:nvGrpSpPr>
@@ -4021,14 +3915,7 @@
         <p:cNvGrpSpPr/>
         <p:nvPr/>
       </p:nvGrpSpPr>
-      <p:grpSpPr>
-        <a:xfrm>
-          <a:off x="0" y="0"/>
-          <a:ext cx="0" cy="0"/>
-          <a:chOff x="0" y="0"/>
-          <a:chExt cx="0" cy="0"/>
-        </a:xfrm>
-      </p:grpSpPr>
+      <p:grpSpPr/>
       <p:sp>
         <p:nvSpPr>
           <p:cNvPr id="2" name="TextBox 1"/>
@@ -4134,11 +4021,14 @@
                 <a:spcPts val="800"/>
               </a:spcAft>
             </a:pPr>
-            <a:endParaRPr sz="2400">
-              <a:solidFill>
-                <a:srgbClr val="212121"/>
-              </a:solidFill>
-            </a:endParaRPr>
+            <a:r>
+              <a:rPr sz="2400">
+                <a:solidFill>
+                  <a:srgbClr val="212121"/>
+                </a:solidFill>
+              </a:rPr>
+              <a:t/>
+            </a:r>
           </a:p>
           <a:p>
             <a:pPr>
@@ -4166,7 +4056,7 @@
 </file>
 
 <file path=ppt/slides/slide12.xml><?xml version="1.0" encoding="utf-8"?>
-<p:sld xmlns:a="http://schemas.openxmlformats.org/drawingml/2006/main" xmlns:r="http://schemas.openxmlformats.org/officeDocument/2006/relationships" xmlns:p="http://schemas.openxmlformats.org/presentationml/2006/main">
+<p:sld xmlns:a="http://schemas.openxmlformats.org/drawingml/2006/main" xmlns:p="http://schemas.openxmlformats.org/presentationml/2006/main" xmlns:r="http://schemas.openxmlformats.org/officeDocument/2006/relationships">
   <p:cSld>
     <p:spTree>
       <p:nvGrpSpPr>
@@ -4174,14 +4064,7 @@
         <p:cNvGrpSpPr/>
         <p:nvPr/>
       </p:nvGrpSpPr>
-      <p:grpSpPr>
-        <a:xfrm>
-          <a:off x="0" y="0"/>
-          <a:ext cx="0" cy="0"/>
-          <a:chOff x="0" y="0"/>
-          <a:chExt cx="0" cy="0"/>
-        </a:xfrm>
-      </p:grpSpPr>
+      <p:grpSpPr/>
       <p:sp>
         <p:nvSpPr>
           <p:cNvPr id="2" name="TextBox 1"/>
@@ -4229,7 +4112,7 @@
         </p:xfrm>
         <a:graphic>
           <a:graphicData uri="http://schemas.openxmlformats.org/drawingml/2006/chart">
-            <c:chart xmlns:c="http://schemas.openxmlformats.org/drawingml/2006/chart" xmlns:r="http://schemas.openxmlformats.org/officeDocument/2006/relationships" r:id="rId2"/>
+            <c:chart xmlns:c="http://schemas.openxmlformats.org/drawingml/2006/chart" r:id="rId2"/>
           </a:graphicData>
         </a:graphic>
       </p:graphicFrame>
@@ -4280,7 +4163,7 @@
 </file>
 
 <file path=ppt/slides/slide13.xml><?xml version="1.0" encoding="utf-8"?>
-<p:sld xmlns:a="http://schemas.openxmlformats.org/drawingml/2006/main" xmlns:r="http://schemas.openxmlformats.org/officeDocument/2006/relationships" xmlns:p="http://schemas.openxmlformats.org/presentationml/2006/main">
+<p:sld xmlns:a="http://schemas.openxmlformats.org/drawingml/2006/main" xmlns:p="http://schemas.openxmlformats.org/presentationml/2006/main" xmlns:r="http://schemas.openxmlformats.org/officeDocument/2006/relationships">
   <p:cSld>
     <p:spTree>
       <p:nvGrpSpPr>
@@ -4288,14 +4171,7 @@
         <p:cNvGrpSpPr/>
         <p:nvPr/>
       </p:nvGrpSpPr>
-      <p:grpSpPr>
-        <a:xfrm>
-          <a:off x="0" y="0"/>
-          <a:ext cx="0" cy="0"/>
-          <a:chOff x="0" y="0"/>
-          <a:chExt cx="0" cy="0"/>
-        </a:xfrm>
-      </p:grpSpPr>
+      <p:grpSpPr/>
       <p:sp>
         <p:nvSpPr>
           <p:cNvPr id="2" name="TextBox 1"/>
@@ -4343,7 +4219,7 @@
         </p:xfrm>
         <a:graphic>
           <a:graphicData uri="http://schemas.openxmlformats.org/drawingml/2006/chart">
-            <c:chart xmlns:c="http://schemas.openxmlformats.org/drawingml/2006/chart" xmlns:r="http://schemas.openxmlformats.org/officeDocument/2006/relationships" r:id="rId2"/>
+            <c:chart xmlns:c="http://schemas.openxmlformats.org/drawingml/2006/chart" r:id="rId2"/>
           </a:graphicData>
         </a:graphic>
       </p:graphicFrame>
@@ -4394,7 +4270,7 @@
 </file>
 
 <file path=ppt/slides/slide14.xml><?xml version="1.0" encoding="utf-8"?>
-<p:sld xmlns:a="http://schemas.openxmlformats.org/drawingml/2006/main" xmlns:r="http://schemas.openxmlformats.org/officeDocument/2006/relationships" xmlns:p="http://schemas.openxmlformats.org/presentationml/2006/main">
+<p:sld xmlns:a="http://schemas.openxmlformats.org/drawingml/2006/main" xmlns:p="http://schemas.openxmlformats.org/presentationml/2006/main" xmlns:r="http://schemas.openxmlformats.org/officeDocument/2006/relationships">
   <p:cSld>
     <p:spTree>
       <p:nvGrpSpPr>
@@ -4402,14 +4278,7 @@
         <p:cNvGrpSpPr/>
         <p:nvPr/>
       </p:nvGrpSpPr>
-      <p:grpSpPr>
-        <a:xfrm>
-          <a:off x="0" y="0"/>
-          <a:ext cx="0" cy="0"/>
-          <a:chOff x="0" y="0"/>
-          <a:chExt cx="0" cy="0"/>
-        </a:xfrm>
-      </p:grpSpPr>
+      <p:grpSpPr/>
       <p:sp>
         <p:nvSpPr>
           <p:cNvPr id="2" name="TextBox 1"/>
@@ -4500,11 +4369,14 @@
                 <a:spcPts val="800"/>
               </a:spcAft>
             </a:pPr>
-            <a:endParaRPr sz="2400">
-              <a:solidFill>
-                <a:srgbClr val="212121"/>
-              </a:solidFill>
-            </a:endParaRPr>
+            <a:r>
+              <a:rPr sz="2400">
+                <a:solidFill>
+                  <a:srgbClr val="212121"/>
+                </a:solidFill>
+              </a:rPr>
+              <a:t/>
+            </a:r>
           </a:p>
           <a:p>
             <a:pPr>
@@ -4562,7 +4434,7 @@
 </file>
 
 <file path=ppt/slides/slide15.xml><?xml version="1.0" encoding="utf-8"?>
-<p:sld xmlns:a="http://schemas.openxmlformats.org/drawingml/2006/main" xmlns:r="http://schemas.openxmlformats.org/officeDocument/2006/relationships" xmlns:p="http://schemas.openxmlformats.org/presentationml/2006/main">
+<p:sld xmlns:a="http://schemas.openxmlformats.org/drawingml/2006/main" xmlns:p="http://schemas.openxmlformats.org/presentationml/2006/main" xmlns:r="http://schemas.openxmlformats.org/officeDocument/2006/relationships">
   <p:cSld>
     <p:spTree>
       <p:nvGrpSpPr>
@@ -4570,14 +4442,7 @@
         <p:cNvGrpSpPr/>
         <p:nvPr/>
       </p:nvGrpSpPr>
-      <p:grpSpPr>
-        <a:xfrm>
-          <a:off x="0" y="0"/>
-          <a:ext cx="0" cy="0"/>
-          <a:chOff x="0" y="0"/>
-          <a:chExt cx="0" cy="0"/>
-        </a:xfrm>
-      </p:grpSpPr>
+      <p:grpSpPr/>
       <p:sp>
         <p:nvSpPr>
           <p:cNvPr id="2" name="TextBox 1"/>
@@ -4800,7 +4665,7 @@
 </file>
 
 <file path=ppt/slides/slide16.xml><?xml version="1.0" encoding="utf-8"?>
-<p:sld xmlns:a="http://schemas.openxmlformats.org/drawingml/2006/main" xmlns:r="http://schemas.openxmlformats.org/officeDocument/2006/relationships" xmlns:p="http://schemas.openxmlformats.org/presentationml/2006/main">
+<p:sld xmlns:a="http://schemas.openxmlformats.org/drawingml/2006/main" xmlns:p="http://schemas.openxmlformats.org/presentationml/2006/main" xmlns:r="http://schemas.openxmlformats.org/officeDocument/2006/relationships">
   <p:cSld>
     <p:spTree>
       <p:nvGrpSpPr>
@@ -4808,14 +4673,7 @@
         <p:cNvGrpSpPr/>
         <p:nvPr/>
       </p:nvGrpSpPr>
-      <p:grpSpPr>
-        <a:xfrm>
-          <a:off x="0" y="0"/>
-          <a:ext cx="0" cy="0"/>
-          <a:chOff x="0" y="0"/>
-          <a:chExt cx="0" cy="0"/>
-        </a:xfrm>
-      </p:grpSpPr>
+      <p:grpSpPr/>
       <p:sp>
         <p:nvSpPr>
           <p:cNvPr id="2" name="TextBox 1"/>
@@ -4906,11 +4764,14 @@
                 <a:spcPts val="800"/>
               </a:spcAft>
             </a:pPr>
-            <a:endParaRPr sz="2600">
-              <a:solidFill>
-                <a:srgbClr val="212121"/>
-              </a:solidFill>
-            </a:endParaRPr>
+            <a:r>
+              <a:rPr sz="2600">
+                <a:solidFill>
+                  <a:srgbClr val="212121"/>
+                </a:solidFill>
+              </a:rPr>
+              <a:t/>
+            </a:r>
           </a:p>
           <a:p>
             <a:pPr>
@@ -4938,7 +4799,7 @@
 </file>
 
 <file path=ppt/slides/slide17.xml><?xml version="1.0" encoding="utf-8"?>
-<p:sld xmlns:a="http://schemas.openxmlformats.org/drawingml/2006/main" xmlns:r="http://schemas.openxmlformats.org/officeDocument/2006/relationships" xmlns:p="http://schemas.openxmlformats.org/presentationml/2006/main">
+<p:sld xmlns:a="http://schemas.openxmlformats.org/drawingml/2006/main" xmlns:p="http://schemas.openxmlformats.org/presentationml/2006/main" xmlns:r="http://schemas.openxmlformats.org/officeDocument/2006/relationships">
   <p:cSld>
     <p:spTree>
       <p:nvGrpSpPr>
@@ -4946,14 +4807,7 @@
         <p:cNvGrpSpPr/>
         <p:nvPr/>
       </p:nvGrpSpPr>
-      <p:grpSpPr>
-        <a:xfrm>
-          <a:off x="0" y="0"/>
-          <a:ext cx="0" cy="0"/>
-          <a:chOff x="0" y="0"/>
-          <a:chExt cx="0" cy="0"/>
-        </a:xfrm>
-      </p:grpSpPr>
+      <p:grpSpPr/>
       <p:sp>
         <p:nvSpPr>
           <p:cNvPr id="2" name="TextBox 1"/>
@@ -5059,24 +4913,27 @@
                 <a:spcPts val="800"/>
               </a:spcAft>
             </a:pPr>
-            <a:endParaRPr sz="2400">
-              <a:solidFill>
-                <a:srgbClr val="212121"/>
-              </a:solidFill>
-            </a:endParaRPr>
-          </a:p>
-          <a:p>
-            <a:pPr>
-              <a:spcAft>
-                <a:spcPts val="800"/>
-              </a:spcAft>
-            </a:pPr>
             <a:r>
               <a:rPr sz="2400">
                 <a:solidFill>
                   <a:srgbClr val="212121"/>
                 </a:solidFill>
               </a:rPr>
+              <a:t/>
+            </a:r>
+          </a:p>
+          <a:p>
+            <a:pPr>
+              <a:spcAft>
+                <a:spcPts val="800"/>
+              </a:spcAft>
+            </a:pPr>
+            <a:r>
+              <a:rPr sz="2400">
+                <a:solidFill>
+                  <a:srgbClr val="212121"/>
+                </a:solidFill>
+              </a:rPr>
               <a:t>“Program testing can be used to show the presence of bugs, but never to show their absence.” — E. W. Dijkstra, 1970</a:t>
             </a:r>
           </a:p>
@@ -5086,11 +4943,14 @@
                 <a:spcPts val="800"/>
               </a:spcAft>
             </a:pPr>
-            <a:endParaRPr sz="2400">
-              <a:solidFill>
-                <a:srgbClr val="212121"/>
-              </a:solidFill>
-            </a:endParaRPr>
+            <a:r>
+              <a:rPr sz="2400">
+                <a:solidFill>
+                  <a:srgbClr val="212121"/>
+                </a:solidFill>
+              </a:rPr>
+              <a:t/>
+            </a:r>
           </a:p>
           <a:p>
             <a:pPr>
@@ -5118,7 +4978,7 @@
 </file>
 
 <file path=ppt/slides/slide18.xml><?xml version="1.0" encoding="utf-8"?>
-<p:sld xmlns:a="http://schemas.openxmlformats.org/drawingml/2006/main" xmlns:r="http://schemas.openxmlformats.org/officeDocument/2006/relationships" xmlns:p="http://schemas.openxmlformats.org/presentationml/2006/main">
+<p:sld xmlns:a="http://schemas.openxmlformats.org/drawingml/2006/main" xmlns:p="http://schemas.openxmlformats.org/presentationml/2006/main" xmlns:r="http://schemas.openxmlformats.org/officeDocument/2006/relationships">
   <p:cSld>
     <p:spTree>
       <p:nvGrpSpPr>
@@ -5126,14 +4986,7 @@
         <p:cNvGrpSpPr/>
         <p:nvPr/>
       </p:nvGrpSpPr>
-      <p:grpSpPr>
-        <a:xfrm>
-          <a:off x="0" y="0"/>
-          <a:ext cx="0" cy="0"/>
-          <a:chOff x="0" y="0"/>
-          <a:chExt cx="0" cy="0"/>
-        </a:xfrm>
-      </p:grpSpPr>
+      <p:grpSpPr/>
       <p:sp>
         <p:nvSpPr>
           <p:cNvPr id="2" name="TextBox 1"/>
@@ -5209,24 +5062,27 @@
                 <a:spcPts val="800"/>
               </a:spcAft>
             </a:pPr>
-            <a:endParaRPr sz="2600">
-              <a:solidFill>
-                <a:srgbClr val="212121"/>
-              </a:solidFill>
-            </a:endParaRPr>
-          </a:p>
-          <a:p>
-            <a:pPr>
-              <a:spcAft>
-                <a:spcPts val="800"/>
-              </a:spcAft>
-            </a:pPr>
             <a:r>
               <a:rPr sz="2600">
                 <a:solidFill>
                   <a:srgbClr val="212121"/>
                 </a:solidFill>
               </a:rPr>
+              <a:t/>
+            </a:r>
+          </a:p>
+          <a:p>
+            <a:pPr>
+              <a:spcAft>
+                <a:spcPts val="800"/>
+              </a:spcAft>
+            </a:pPr>
+            <a:r>
+              <a:rPr sz="2600">
+                <a:solidFill>
+                  <a:srgbClr val="212121"/>
+                </a:solidFill>
+              </a:rPr>
               <a:t>Can the program reach a state where the property fails?</a:t>
             </a:r>
           </a:p>
@@ -5236,11 +5092,14 @@
                 <a:spcPts val="800"/>
               </a:spcAft>
             </a:pPr>
-            <a:endParaRPr sz="2600">
-              <a:solidFill>
-                <a:srgbClr val="212121"/>
-              </a:solidFill>
-            </a:endParaRPr>
+            <a:r>
+              <a:rPr sz="2600">
+                <a:solidFill>
+                  <a:srgbClr val="212121"/>
+                </a:solidFill>
+              </a:rPr>
+              <a:t/>
+            </a:r>
           </a:p>
           <a:p>
             <a:pPr lvl="1">
@@ -5278,11 +5137,14 @@
                 <a:spcPts val="800"/>
               </a:spcAft>
             </a:pPr>
-            <a:endParaRPr sz="2400">
-              <a:solidFill>
-                <a:srgbClr val="212121"/>
-              </a:solidFill>
-            </a:endParaRPr>
+            <a:r>
+              <a:rPr sz="2600">
+                <a:solidFill>
+                  <a:srgbClr val="212121"/>
+                </a:solidFill>
+              </a:rPr>
+              <a:t/>
+            </a:r>
           </a:p>
           <a:p>
             <a:pPr>
@@ -5310,7 +5172,7 @@
 </file>
 
 <file path=ppt/slides/slide19.xml><?xml version="1.0" encoding="utf-8"?>
-<p:sld xmlns:a="http://schemas.openxmlformats.org/drawingml/2006/main" xmlns:r="http://schemas.openxmlformats.org/officeDocument/2006/relationships" xmlns:p="http://schemas.openxmlformats.org/presentationml/2006/main">
+<p:sld xmlns:a="http://schemas.openxmlformats.org/drawingml/2006/main" xmlns:p="http://schemas.openxmlformats.org/presentationml/2006/main" xmlns:r="http://schemas.openxmlformats.org/officeDocument/2006/relationships">
   <p:cSld>
     <p:spTree>
       <p:nvGrpSpPr>
@@ -5318,14 +5180,7 @@
         <p:cNvGrpSpPr/>
         <p:nvPr/>
       </p:nvGrpSpPr>
-      <p:grpSpPr>
-        <a:xfrm>
-          <a:off x="0" y="0"/>
-          <a:ext cx="0" cy="0"/>
-          <a:chOff x="0" y="0"/>
-          <a:chExt cx="0" cy="0"/>
-        </a:xfrm>
-      </p:grpSpPr>
+      <p:grpSpPr/>
       <p:sp>
         <p:nvSpPr>
           <p:cNvPr id="2" name="TextBox 1"/>
@@ -5446,11 +5301,14 @@
                 <a:spcPts val="800"/>
               </a:spcAft>
             </a:pPr>
-            <a:endParaRPr sz="2200">
-              <a:solidFill>
-                <a:srgbClr val="212121"/>
-              </a:solidFill>
-            </a:endParaRPr>
+            <a:r>
+              <a:rPr sz="2400">
+                <a:solidFill>
+                  <a:srgbClr val="212121"/>
+                </a:solidFill>
+              </a:rPr>
+              <a:t/>
+            </a:r>
           </a:p>
           <a:p>
             <a:pPr>
@@ -5508,7 +5366,7 @@
 </file>
 
 <file path=ppt/slides/slide2.xml><?xml version="1.0" encoding="utf-8"?>
-<p:sld xmlns:a="http://schemas.openxmlformats.org/drawingml/2006/main" xmlns:r="http://schemas.openxmlformats.org/officeDocument/2006/relationships" xmlns:p="http://schemas.openxmlformats.org/presentationml/2006/main">
+<p:sld xmlns:a="http://schemas.openxmlformats.org/drawingml/2006/main" xmlns:p="http://schemas.openxmlformats.org/presentationml/2006/main" xmlns:r="http://schemas.openxmlformats.org/officeDocument/2006/relationships">
   <p:cSld>
     <p:spTree>
       <p:nvGrpSpPr>
@@ -5516,14 +5374,7 @@
         <p:cNvGrpSpPr/>
         <p:nvPr/>
       </p:nvGrpSpPr>
-      <p:grpSpPr>
-        <a:xfrm>
-          <a:off x="0" y="0"/>
-          <a:ext cx="0" cy="0"/>
-          <a:chOff x="0" y="0"/>
-          <a:chExt cx="0" cy="0"/>
-        </a:xfrm>
-      </p:grpSpPr>
+      <p:grpSpPr/>
       <p:sp>
         <p:nvSpPr>
           <p:cNvPr id="2" name="TextBox 1"/>
@@ -5567,7 +5418,7 @@
         </p:nvGraphicFramePr>
         <p:xfrm>
           <a:off x="731520" y="1371600"/>
-          <a:ext cx="10698480" cy="3962400"/>
+          <a:ext cx="10698480" cy="3657600"/>
         </p:xfrm>
         <a:graphic>
           <a:graphicData uri="http://schemas.openxmlformats.org/drawingml/2006/table">
@@ -5576,20 +5427,8 @@
                 <a:tableStyleId>{5C22544A-7EE6-4342-B048-85BDC9FD1C3A}</a:tableStyleId>
               </a:tblPr>
               <a:tblGrid>
-                <a:gridCol w="1463040">
-                  <a:extLst>
-                    <a:ext uri="{9D8B030D-6E8A-4147-A177-3AD203B41FA5}">
-                      <a16:colId xmlns:a16="http://schemas.microsoft.com/office/drawing/2014/main" val="20000"/>
-                    </a:ext>
-                  </a:extLst>
-                </a:gridCol>
-                <a:gridCol w="9235440">
-                  <a:extLst>
-                    <a:ext uri="{9D8B030D-6E8A-4147-A177-3AD203B41FA5}">
-                      <a16:colId xmlns:a16="http://schemas.microsoft.com/office/drawing/2014/main" val="20001"/>
-                    </a:ext>
-                  </a:extLst>
-                </a:gridCol>
+                <a:gridCol w="1463040"/>
+                <a:gridCol w="9235440"/>
               </a:tblGrid>
               <a:tr h="365760">
                 <a:tc>
@@ -5618,11 +5457,6 @@
                   </a:txBody>
                   <a:tcPr/>
                 </a:tc>
-                <a:extLst>
-                  <a:ext uri="{0D108BD9-81ED-4DB2-BD59-A6C34878D82A}">
-                    <a16:rowId xmlns:a16="http://schemas.microsoft.com/office/drawing/2014/main" val="10000"/>
-                  </a:ext>
-                </a:extLst>
               </a:tr>
               <a:tr h="365760">
                 <a:tc>
@@ -5651,11 +5485,6 @@
                   </a:txBody>
                   <a:tcPr/>
                 </a:tc>
-                <a:extLst>
-                  <a:ext uri="{0D108BD9-81ED-4DB2-BD59-A6C34878D82A}">
-                    <a16:rowId xmlns:a16="http://schemas.microsoft.com/office/drawing/2014/main" val="10001"/>
-                  </a:ext>
-                </a:extLst>
               </a:tr>
               <a:tr h="365760">
                 <a:tc>
@@ -5684,11 +5513,6 @@
                   </a:txBody>
                   <a:tcPr/>
                 </a:tc>
-                <a:extLst>
-                  <a:ext uri="{0D108BD9-81ED-4DB2-BD59-A6C34878D82A}">
-                    <a16:rowId xmlns:a16="http://schemas.microsoft.com/office/drawing/2014/main" val="10002"/>
-                  </a:ext>
-                </a:extLst>
               </a:tr>
               <a:tr h="365760">
                 <a:tc>
@@ -5717,11 +5541,6 @@
                   </a:txBody>
                   <a:tcPr/>
                 </a:tc>
-                <a:extLst>
-                  <a:ext uri="{0D108BD9-81ED-4DB2-BD59-A6C34878D82A}">
-                    <a16:rowId xmlns:a16="http://schemas.microsoft.com/office/drawing/2014/main" val="10003"/>
-                  </a:ext>
-                </a:extLst>
               </a:tr>
               <a:tr h="365760">
                 <a:tc>
@@ -5750,11 +5569,6 @@
                   </a:txBody>
                   <a:tcPr/>
                 </a:tc>
-                <a:extLst>
-                  <a:ext uri="{0D108BD9-81ED-4DB2-BD59-A6C34878D82A}">
-                    <a16:rowId xmlns:a16="http://schemas.microsoft.com/office/drawing/2014/main" val="10004"/>
-                  </a:ext>
-                </a:extLst>
               </a:tr>
               <a:tr h="365760">
                 <a:tc>
@@ -5783,11 +5597,6 @@
                   </a:txBody>
                   <a:tcPr/>
                 </a:tc>
-                <a:extLst>
-                  <a:ext uri="{0D108BD9-81ED-4DB2-BD59-A6C34878D82A}">
-                    <a16:rowId xmlns:a16="http://schemas.microsoft.com/office/drawing/2014/main" val="10005"/>
-                  </a:ext>
-                </a:extLst>
               </a:tr>
               <a:tr h="365760">
                 <a:tc>
@@ -5816,11 +5625,6 @@
                   </a:txBody>
                   <a:tcPr/>
                 </a:tc>
-                <a:extLst>
-                  <a:ext uri="{0D108BD9-81ED-4DB2-BD59-A6C34878D82A}">
-                    <a16:rowId xmlns:a16="http://schemas.microsoft.com/office/drawing/2014/main" val="10006"/>
-                  </a:ext>
-                </a:extLst>
               </a:tr>
               <a:tr h="365760">
                 <a:tc>
@@ -5849,11 +5653,6 @@
                   </a:txBody>
                   <a:tcPr/>
                 </a:tc>
-                <a:extLst>
-                  <a:ext uri="{0D108BD9-81ED-4DB2-BD59-A6C34878D82A}">
-                    <a16:rowId xmlns:a16="http://schemas.microsoft.com/office/drawing/2014/main" val="10007"/>
-                  </a:ext>
-                </a:extLst>
               </a:tr>
               <a:tr h="365760">
                 <a:tc>
@@ -5882,11 +5681,6 @@
                   </a:txBody>
                   <a:tcPr/>
                 </a:tc>
-                <a:extLst>
-                  <a:ext uri="{0D108BD9-81ED-4DB2-BD59-A6C34878D82A}">
-                    <a16:rowId xmlns:a16="http://schemas.microsoft.com/office/drawing/2014/main" val="10008"/>
-                  </a:ext>
-                </a:extLst>
               </a:tr>
               <a:tr h="365760">
                 <a:tc>
@@ -5915,11 +5709,6 @@
                   </a:txBody>
                   <a:tcPr/>
                 </a:tc>
-                <a:extLst>
-                  <a:ext uri="{0D108BD9-81ED-4DB2-BD59-A6C34878D82A}">
-                    <a16:rowId xmlns:a16="http://schemas.microsoft.com/office/drawing/2014/main" val="10009"/>
-                  </a:ext>
-                </a:extLst>
               </a:tr>
             </a:tbl>
           </a:graphicData>
@@ -5934,7 +5723,7 @@
 </file>
 
 <file path=ppt/slides/slide20.xml><?xml version="1.0" encoding="utf-8"?>
-<p:sld xmlns:a="http://schemas.openxmlformats.org/drawingml/2006/main" xmlns:r="http://schemas.openxmlformats.org/officeDocument/2006/relationships" xmlns:p="http://schemas.openxmlformats.org/presentationml/2006/main">
+<p:sld xmlns:a="http://schemas.openxmlformats.org/drawingml/2006/main" xmlns:p="http://schemas.openxmlformats.org/presentationml/2006/main" xmlns:r="http://schemas.openxmlformats.org/officeDocument/2006/relationships">
   <p:cSld>
     <p:spTree>
       <p:nvGrpSpPr>
@@ -5942,14 +5731,7 @@
         <p:cNvGrpSpPr/>
         <p:nvPr/>
       </p:nvGrpSpPr>
-      <p:grpSpPr>
-        <a:xfrm>
-          <a:off x="0" y="0"/>
-          <a:ext cx="0" cy="0"/>
-          <a:chOff x="0" y="0"/>
-          <a:chExt cx="0" cy="0"/>
-        </a:xfrm>
-      </p:grpSpPr>
+      <p:grpSpPr/>
       <p:sp>
         <p:nvSpPr>
           <p:cNvPr id="2" name="TextBox 1"/>
@@ -5993,7 +5775,7 @@
         </p:nvGraphicFramePr>
         <p:xfrm>
           <a:off x="731520" y="1280160"/>
-          <a:ext cx="10698480" cy="3108960"/>
+          <a:ext cx="10698480" cy="2560320"/>
         </p:xfrm>
         <a:graphic>
           <a:graphicData uri="http://schemas.openxmlformats.org/drawingml/2006/table">
@@ -6002,27 +5784,9 @@
                 <a:tableStyleId>{5C22544A-7EE6-4342-B048-85BDC9FD1C3A}</a:tableStyleId>
               </a:tblPr>
               <a:tblGrid>
-                <a:gridCol w="2468880">
-                  <a:extLst>
-                    <a:ext uri="{9D8B030D-6E8A-4147-A177-3AD203B41FA5}">
-                      <a16:colId xmlns:a16="http://schemas.microsoft.com/office/drawing/2014/main" val="20000"/>
-                    </a:ext>
-                  </a:extLst>
-                </a:gridCol>
-                <a:gridCol w="4206240">
-                  <a:extLst>
-                    <a:ext uri="{9D8B030D-6E8A-4147-A177-3AD203B41FA5}">
-                      <a16:colId xmlns:a16="http://schemas.microsoft.com/office/drawing/2014/main" val="20001"/>
-                    </a:ext>
-                  </a:extLst>
-                </a:gridCol>
-                <a:gridCol w="4023360">
-                  <a:extLst>
-                    <a:ext uri="{9D8B030D-6E8A-4147-A177-3AD203B41FA5}">
-                      <a16:colId xmlns:a16="http://schemas.microsoft.com/office/drawing/2014/main" val="20002"/>
-                    </a:ext>
-                  </a:extLst>
-                </a:gridCol>
+                <a:gridCol w="2468880"/>
+                <a:gridCol w="4206240"/>
+                <a:gridCol w="4023360"/>
               </a:tblGrid>
               <a:tr h="365760">
                 <a:tc>
@@ -6064,11 +5828,6 @@
                   </a:txBody>
                   <a:tcPr/>
                 </a:tc>
-                <a:extLst>
-                  <a:ext uri="{0D108BD9-81ED-4DB2-BD59-A6C34878D82A}">
-                    <a16:rowId xmlns:a16="http://schemas.microsoft.com/office/drawing/2014/main" val="10000"/>
-                  </a:ext>
-                </a:extLst>
               </a:tr>
               <a:tr h="365760">
                 <a:tc>
@@ -6110,11 +5869,6 @@
                   </a:txBody>
                   <a:tcPr/>
                 </a:tc>
-                <a:extLst>
-                  <a:ext uri="{0D108BD9-81ED-4DB2-BD59-A6C34878D82A}">
-                    <a16:rowId xmlns:a16="http://schemas.microsoft.com/office/drawing/2014/main" val="10001"/>
-                  </a:ext>
-                </a:extLst>
               </a:tr>
               <a:tr h="365760">
                 <a:tc>
@@ -6156,11 +5910,6 @@
                   </a:txBody>
                   <a:tcPr/>
                 </a:tc>
-                <a:extLst>
-                  <a:ext uri="{0D108BD9-81ED-4DB2-BD59-A6C34878D82A}">
-                    <a16:rowId xmlns:a16="http://schemas.microsoft.com/office/drawing/2014/main" val="10002"/>
-                  </a:ext>
-                </a:extLst>
               </a:tr>
               <a:tr h="365760">
                 <a:tc>
@@ -6202,11 +5951,6 @@
                   </a:txBody>
                   <a:tcPr/>
                 </a:tc>
-                <a:extLst>
-                  <a:ext uri="{0D108BD9-81ED-4DB2-BD59-A6C34878D82A}">
-                    <a16:rowId xmlns:a16="http://schemas.microsoft.com/office/drawing/2014/main" val="10003"/>
-                  </a:ext>
-                </a:extLst>
               </a:tr>
               <a:tr h="365760">
                 <a:tc>
@@ -6248,11 +5992,6 @@
                   </a:txBody>
                   <a:tcPr/>
                 </a:tc>
-                <a:extLst>
-                  <a:ext uri="{0D108BD9-81ED-4DB2-BD59-A6C34878D82A}">
-                    <a16:rowId xmlns:a16="http://schemas.microsoft.com/office/drawing/2014/main" val="10004"/>
-                  </a:ext>
-                </a:extLst>
               </a:tr>
               <a:tr h="365760">
                 <a:tc>
@@ -6294,11 +6033,6 @@
                   </a:txBody>
                   <a:tcPr/>
                 </a:tc>
-                <a:extLst>
-                  <a:ext uri="{0D108BD9-81ED-4DB2-BD59-A6C34878D82A}">
-                    <a16:rowId xmlns:a16="http://schemas.microsoft.com/office/drawing/2014/main" val="10005"/>
-                  </a:ext>
-                </a:extLst>
               </a:tr>
               <a:tr h="365760">
                 <a:tc>
@@ -6340,11 +6074,6 @@
                   </a:txBody>
                   <a:tcPr/>
                 </a:tc>
-                <a:extLst>
-                  <a:ext uri="{0D108BD9-81ED-4DB2-BD59-A6C34878D82A}">
-                    <a16:rowId xmlns:a16="http://schemas.microsoft.com/office/drawing/2014/main" val="10006"/>
-                  </a:ext>
-                </a:extLst>
               </a:tr>
             </a:tbl>
           </a:graphicData>
@@ -6397,7 +6126,7 @@
 </file>
 
 <file path=ppt/slides/slide21.xml><?xml version="1.0" encoding="utf-8"?>
-<p:sld xmlns:a="http://schemas.openxmlformats.org/drawingml/2006/main" xmlns:r="http://schemas.openxmlformats.org/officeDocument/2006/relationships" xmlns:p="http://schemas.openxmlformats.org/presentationml/2006/main">
+<p:sld xmlns:a="http://schemas.openxmlformats.org/drawingml/2006/main" xmlns:p="http://schemas.openxmlformats.org/presentationml/2006/main" xmlns:r="http://schemas.openxmlformats.org/officeDocument/2006/relationships">
   <p:cSld>
     <p:spTree>
       <p:nvGrpSpPr>
@@ -6405,14 +6134,7 @@
         <p:cNvGrpSpPr/>
         <p:nvPr/>
       </p:nvGrpSpPr>
-      <p:grpSpPr>
-        <a:xfrm>
-          <a:off x="0" y="0"/>
-          <a:ext cx="0" cy="0"/>
-          <a:chOff x="0" y="0"/>
-          <a:chExt cx="0" cy="0"/>
-        </a:xfrm>
-      </p:grpSpPr>
+      <p:grpSpPr/>
       <p:sp>
         <p:nvSpPr>
           <p:cNvPr id="2" name="TextBox 1"/>
@@ -6456,7 +6178,7 @@
         </p:nvGraphicFramePr>
         <p:xfrm>
           <a:off x="731520" y="1554480"/>
-          <a:ext cx="10698480" cy="1188720"/>
+          <a:ext cx="10698480" cy="1097280"/>
         </p:xfrm>
         <a:graphic>
           <a:graphicData uri="http://schemas.openxmlformats.org/drawingml/2006/table">
@@ -6465,36 +6187,16 @@
                 <a:tableStyleId>{5C22544A-7EE6-4342-B048-85BDC9FD1C3A}</a:tableStyleId>
               </a:tblPr>
               <a:tblGrid>
-                <a:gridCol w="3108960">
-                  <a:extLst>
-                    <a:ext uri="{9D8B030D-6E8A-4147-A177-3AD203B41FA5}">
-                      <a16:colId xmlns:a16="http://schemas.microsoft.com/office/drawing/2014/main" val="20000"/>
-                    </a:ext>
-                  </a:extLst>
-                </a:gridCol>
-                <a:gridCol w="4023360">
-                  <a:extLst>
-                    <a:ext uri="{9D8B030D-6E8A-4147-A177-3AD203B41FA5}">
-                      <a16:colId xmlns:a16="http://schemas.microsoft.com/office/drawing/2014/main" val="20001"/>
-                    </a:ext>
-                  </a:extLst>
-                </a:gridCol>
-                <a:gridCol w="3566160">
-                  <a:extLst>
-                    <a:ext uri="{9D8B030D-6E8A-4147-A177-3AD203B41FA5}">
-                      <a16:colId xmlns:a16="http://schemas.microsoft.com/office/drawing/2014/main" val="20002"/>
-                    </a:ext>
-                  </a:extLst>
-                </a:gridCol>
+                <a:gridCol w="3108960"/>
+                <a:gridCol w="4023360"/>
+                <a:gridCol w="3566160"/>
               </a:tblGrid>
               <a:tr h="365760">
                 <a:tc>
                   <a:txBody>
                     <a:bodyPr/>
                     <a:lstStyle/>
-                    <a:p>
-                      <a:endParaRPr/>
-                    </a:p>
+                    <a:p/>
                   </a:txBody>
                   <a:tcPr/>
                 </a:tc>
@@ -6524,11 +6226,6 @@
                   </a:txBody>
                   <a:tcPr/>
                 </a:tc>
-                <a:extLst>
-                  <a:ext uri="{0D108BD9-81ED-4DB2-BD59-A6C34878D82A}">
-                    <a16:rowId xmlns:a16="http://schemas.microsoft.com/office/drawing/2014/main" val="10000"/>
-                  </a:ext>
-                </a:extLst>
               </a:tr>
               <a:tr h="365760">
                 <a:tc>
@@ -6570,11 +6267,6 @@
                   </a:txBody>
                   <a:tcPr/>
                 </a:tc>
-                <a:extLst>
-                  <a:ext uri="{0D108BD9-81ED-4DB2-BD59-A6C34878D82A}">
-                    <a16:rowId xmlns:a16="http://schemas.microsoft.com/office/drawing/2014/main" val="10001"/>
-                  </a:ext>
-                </a:extLst>
               </a:tr>
               <a:tr h="365760">
                 <a:tc>
@@ -6616,11 +6308,6 @@
                   </a:txBody>
                   <a:tcPr/>
                 </a:tc>
-                <a:extLst>
-                  <a:ext uri="{0D108BD9-81ED-4DB2-BD59-A6C34878D82A}">
-                    <a16:rowId xmlns:a16="http://schemas.microsoft.com/office/drawing/2014/main" val="10002"/>
-                  </a:ext>
-                </a:extLst>
               </a:tr>
             </a:tbl>
           </a:graphicData>
@@ -6688,7 +6375,7 @@
 </file>
 
 <file path=ppt/slides/slide22.xml><?xml version="1.0" encoding="utf-8"?>
-<p:sld xmlns:a="http://schemas.openxmlformats.org/drawingml/2006/main" xmlns:r="http://schemas.openxmlformats.org/officeDocument/2006/relationships" xmlns:p="http://schemas.openxmlformats.org/presentationml/2006/main">
+<p:sld xmlns:a="http://schemas.openxmlformats.org/drawingml/2006/main" xmlns:p="http://schemas.openxmlformats.org/presentationml/2006/main" xmlns:r="http://schemas.openxmlformats.org/officeDocument/2006/relationships">
   <p:cSld>
     <p:spTree>
       <p:nvGrpSpPr>
@@ -6696,14 +6383,7 @@
         <p:cNvGrpSpPr/>
         <p:nvPr/>
       </p:nvGrpSpPr>
-      <p:grpSpPr>
-        <a:xfrm>
-          <a:off x="0" y="0"/>
-          <a:ext cx="0" cy="0"/>
-          <a:chOff x="0" y="0"/>
-          <a:chExt cx="0" cy="0"/>
-        </a:xfrm>
-      </p:grpSpPr>
+      <p:grpSpPr/>
       <p:sp>
         <p:nvSpPr>
           <p:cNvPr id="2" name="TextBox 1"/>
@@ -6756,27 +6436,9 @@
                 <a:tableStyleId>{5C22544A-7EE6-4342-B048-85BDC9FD1C3A}</a:tableStyleId>
               </a:tblPr>
               <a:tblGrid>
-                <a:gridCol w="3474720">
-                  <a:extLst>
-                    <a:ext uri="{9D8B030D-6E8A-4147-A177-3AD203B41FA5}">
-                      <a16:colId xmlns:a16="http://schemas.microsoft.com/office/drawing/2014/main" val="20000"/>
-                    </a:ext>
-                  </a:extLst>
-                </a:gridCol>
-                <a:gridCol w="4023360">
-                  <a:extLst>
-                    <a:ext uri="{9D8B030D-6E8A-4147-A177-3AD203B41FA5}">
-                      <a16:colId xmlns:a16="http://schemas.microsoft.com/office/drawing/2014/main" val="20001"/>
-                    </a:ext>
-                  </a:extLst>
-                </a:gridCol>
-                <a:gridCol w="3200400">
-                  <a:extLst>
-                    <a:ext uri="{9D8B030D-6E8A-4147-A177-3AD203B41FA5}">
-                      <a16:colId xmlns:a16="http://schemas.microsoft.com/office/drawing/2014/main" val="20002"/>
-                    </a:ext>
-                  </a:extLst>
-                </a:gridCol>
+                <a:gridCol w="3474720"/>
+                <a:gridCol w="4023360"/>
+                <a:gridCol w="3200400"/>
               </a:tblGrid>
               <a:tr h="365760">
                 <a:tc>
@@ -6818,11 +6480,6 @@
                   </a:txBody>
                   <a:tcPr/>
                 </a:tc>
-                <a:extLst>
-                  <a:ext uri="{0D108BD9-81ED-4DB2-BD59-A6C34878D82A}">
-                    <a16:rowId xmlns:a16="http://schemas.microsoft.com/office/drawing/2014/main" val="10000"/>
-                  </a:ext>
-                </a:extLst>
               </a:tr>
               <a:tr h="365760">
                 <a:tc>
@@ -6864,11 +6521,6 @@
                   </a:txBody>
                   <a:tcPr/>
                 </a:tc>
-                <a:extLst>
-                  <a:ext uri="{0D108BD9-81ED-4DB2-BD59-A6C34878D82A}">
-                    <a16:rowId xmlns:a16="http://schemas.microsoft.com/office/drawing/2014/main" val="10001"/>
-                  </a:ext>
-                </a:extLst>
               </a:tr>
               <a:tr h="365760">
                 <a:tc>
@@ -6910,11 +6562,6 @@
                   </a:txBody>
                   <a:tcPr/>
                 </a:tc>
-                <a:extLst>
-                  <a:ext uri="{0D108BD9-81ED-4DB2-BD59-A6C34878D82A}">
-                    <a16:rowId xmlns:a16="http://schemas.microsoft.com/office/drawing/2014/main" val="10002"/>
-                  </a:ext>
-                </a:extLst>
               </a:tr>
               <a:tr h="365760">
                 <a:tc>
@@ -6956,11 +6603,6 @@
                   </a:txBody>
                   <a:tcPr/>
                 </a:tc>
-                <a:extLst>
-                  <a:ext uri="{0D108BD9-81ED-4DB2-BD59-A6C34878D82A}">
-                    <a16:rowId xmlns:a16="http://schemas.microsoft.com/office/drawing/2014/main" val="10003"/>
-                  </a:ext>
-                </a:extLst>
               </a:tr>
               <a:tr h="365760">
                 <a:tc>
@@ -7002,11 +6644,6 @@
                   </a:txBody>
                   <a:tcPr/>
                 </a:tc>
-                <a:extLst>
-                  <a:ext uri="{0D108BD9-81ED-4DB2-BD59-A6C34878D82A}">
-                    <a16:rowId xmlns:a16="http://schemas.microsoft.com/office/drawing/2014/main" val="10004"/>
-                  </a:ext>
-                </a:extLst>
               </a:tr>
               <a:tr h="365760">
                 <a:tc>
@@ -7048,11 +6685,6 @@
                   </a:txBody>
                   <a:tcPr/>
                 </a:tc>
-                <a:extLst>
-                  <a:ext uri="{0D108BD9-81ED-4DB2-BD59-A6C34878D82A}">
-                    <a16:rowId xmlns:a16="http://schemas.microsoft.com/office/drawing/2014/main" val="10005"/>
-                  </a:ext>
-                </a:extLst>
               </a:tr>
             </a:tbl>
           </a:graphicData>
@@ -7105,7 +6737,7 @@
 </file>
 
 <file path=ppt/slides/slide23.xml><?xml version="1.0" encoding="utf-8"?>
-<p:sld xmlns:a="http://schemas.openxmlformats.org/drawingml/2006/main" xmlns:r="http://schemas.openxmlformats.org/officeDocument/2006/relationships" xmlns:p="http://schemas.openxmlformats.org/presentationml/2006/main">
+<p:sld xmlns:a="http://schemas.openxmlformats.org/drawingml/2006/main" xmlns:p="http://schemas.openxmlformats.org/presentationml/2006/main" xmlns:r="http://schemas.openxmlformats.org/officeDocument/2006/relationships">
   <p:cSld>
     <p:spTree>
       <p:nvGrpSpPr>
@@ -7113,14 +6745,7 @@
         <p:cNvGrpSpPr/>
         <p:nvPr/>
       </p:nvGrpSpPr>
-      <p:grpSpPr>
-        <a:xfrm>
-          <a:off x="0" y="0"/>
-          <a:ext cx="0" cy="0"/>
-          <a:chOff x="0" y="0"/>
-          <a:chExt cx="0" cy="0"/>
-        </a:xfrm>
-      </p:grpSpPr>
+      <p:grpSpPr/>
       <p:sp>
         <p:nvSpPr>
           <p:cNvPr id="2" name="TextBox 1"/>
@@ -7314,7 +6939,7 @@
 </file>
 
 <file path=ppt/slides/slide24.xml><?xml version="1.0" encoding="utf-8"?>
-<p:sld xmlns:a="http://schemas.openxmlformats.org/drawingml/2006/main" xmlns:r="http://schemas.openxmlformats.org/officeDocument/2006/relationships" xmlns:p="http://schemas.openxmlformats.org/presentationml/2006/main">
+<p:sld xmlns:a="http://schemas.openxmlformats.org/drawingml/2006/main" xmlns:p="http://schemas.openxmlformats.org/presentationml/2006/main" xmlns:r="http://schemas.openxmlformats.org/officeDocument/2006/relationships">
   <p:cSld>
     <p:spTree>
       <p:nvGrpSpPr>
@@ -7322,14 +6947,7 @@
         <p:cNvGrpSpPr/>
         <p:nvPr/>
       </p:nvGrpSpPr>
-      <p:grpSpPr>
-        <a:xfrm>
-          <a:off x="0" y="0"/>
-          <a:ext cx="0" cy="0"/>
-          <a:chOff x="0" y="0"/>
-          <a:chExt cx="0" cy="0"/>
-        </a:xfrm>
-      </p:grpSpPr>
+      <p:grpSpPr/>
       <p:sp>
         <p:nvSpPr>
           <p:cNvPr id="2" name="TextBox 1"/>
@@ -7435,24 +7053,27 @@
                 <a:spcPts val="800"/>
               </a:spcAft>
             </a:pPr>
-            <a:endParaRPr sz="2400">
-              <a:solidFill>
-                <a:srgbClr val="212121"/>
-              </a:solidFill>
-            </a:endParaRPr>
-          </a:p>
-          <a:p>
-            <a:pPr>
-              <a:spcAft>
-                <a:spcPts val="800"/>
-              </a:spcAft>
-            </a:pPr>
             <a:r>
               <a:rPr sz="2600">
                 <a:solidFill>
                   <a:srgbClr val="212121"/>
                 </a:solidFill>
               </a:rPr>
+              <a:t/>
+            </a:r>
+          </a:p>
+          <a:p>
+            <a:pPr>
+              <a:spcAft>
+                <a:spcPts val="800"/>
+              </a:spcAft>
+            </a:pPr>
+            <a:r>
+              <a:rPr sz="2600">
+                <a:solidFill>
+                  <a:srgbClr val="212121"/>
+                </a:solidFill>
+              </a:rPr>
               <a:t>Every tool tonight, and every lab in Session 2, is this one move in different costumes.</a:t>
             </a:r>
           </a:p>
@@ -7462,11 +7083,14 @@
                 <a:spcPts val="800"/>
               </a:spcAft>
             </a:pPr>
-            <a:endParaRPr sz="2600">
-              <a:solidFill>
-                <a:srgbClr val="212121"/>
-              </a:solidFill>
-            </a:endParaRPr>
+            <a:r>
+              <a:rPr sz="2600">
+                <a:solidFill>
+                  <a:srgbClr val="212121"/>
+                </a:solidFill>
+              </a:rPr>
+              <a:t/>
+            </a:r>
           </a:p>
           <a:p>
             <a:pPr>
@@ -7494,7 +7118,7 @@
 </file>
 
 <file path=ppt/slides/slide25.xml><?xml version="1.0" encoding="utf-8"?>
-<p:sld xmlns:a="http://schemas.openxmlformats.org/drawingml/2006/main" xmlns:r="http://schemas.openxmlformats.org/officeDocument/2006/relationships" xmlns:p="http://schemas.openxmlformats.org/presentationml/2006/main">
+<p:sld xmlns:a="http://schemas.openxmlformats.org/drawingml/2006/main" xmlns:p="http://schemas.openxmlformats.org/presentationml/2006/main" xmlns:r="http://schemas.openxmlformats.org/officeDocument/2006/relationships">
   <p:cSld>
     <p:spTree>
       <p:nvGrpSpPr>
@@ -7502,14 +7126,7 @@
         <p:cNvGrpSpPr/>
         <p:nvPr/>
       </p:nvGrpSpPr>
-      <p:grpSpPr>
-        <a:xfrm>
-          <a:off x="0" y="0"/>
-          <a:ext cx="0" cy="0"/>
-          <a:chOff x="0" y="0"/>
-          <a:chExt cx="0" cy="0"/>
-        </a:xfrm>
-      </p:grpSpPr>
+      <p:grpSpPr/>
       <p:sp>
         <p:nvSpPr>
           <p:cNvPr id="2" name="TextBox 1"/>
@@ -7552,7 +7169,7 @@
 </file>
 
 <file path=ppt/slides/slide26.xml><?xml version="1.0" encoding="utf-8"?>
-<p:sld xmlns:a="http://schemas.openxmlformats.org/drawingml/2006/main" xmlns:r="http://schemas.openxmlformats.org/officeDocument/2006/relationships" xmlns:p="http://schemas.openxmlformats.org/presentationml/2006/main">
+<p:sld xmlns:a="http://schemas.openxmlformats.org/drawingml/2006/main" xmlns:p="http://schemas.openxmlformats.org/presentationml/2006/main" xmlns:r="http://schemas.openxmlformats.org/officeDocument/2006/relationships">
   <p:cSld>
     <p:spTree>
       <p:nvGrpSpPr>
@@ -7560,14 +7177,7 @@
         <p:cNvGrpSpPr/>
         <p:nvPr/>
       </p:nvGrpSpPr>
-      <p:grpSpPr>
-        <a:xfrm>
-          <a:off x="0" y="0"/>
-          <a:ext cx="0" cy="0"/>
-          <a:chOff x="0" y="0"/>
-          <a:chExt cx="0" cy="0"/>
-        </a:xfrm>
-      </p:grpSpPr>
+      <p:grpSpPr/>
       <p:sp>
         <p:nvSpPr>
           <p:cNvPr id="2" name="TextBox 1"/>
@@ -7644,25 +7254,27 @@
                 <a:spcPts val="800"/>
               </a:spcAft>
             </a:pPr>
-            <a:endParaRPr sz="2000">
-              <a:solidFill>
-                <a:srgbClr val="212121"/>
-              </a:solidFill>
-              <a:latin typeface="Courier New"/>
-            </a:endParaRPr>
-          </a:p>
-          <a:p>
-            <a:pPr>
-              <a:spcAft>
-                <a:spcPts val="800"/>
-              </a:spcAft>
-            </a:pPr>
             <a:r>
               <a:rPr sz="2400">
                 <a:solidFill>
                   <a:srgbClr val="212121"/>
                 </a:solidFill>
               </a:rPr>
+              <a:t/>
+            </a:r>
+          </a:p>
+          <a:p>
+            <a:pPr>
+              <a:spcAft>
+                <a:spcPts val="800"/>
+              </a:spcAft>
+            </a:pPr>
+            <a:r>
+              <a:rPr sz="2400">
+                <a:solidFill>
+                  <a:srgbClr val="212121"/>
+                </a:solidFill>
+              </a:rPr>
               <a:t>Is there a true/false assignment that makes the whole formula true?</a:t>
             </a:r>
           </a:p>
@@ -7672,11 +7284,14 @@
                 <a:spcPts val="800"/>
               </a:spcAft>
             </a:pPr>
-            <a:endParaRPr sz="2400">
-              <a:solidFill>
-                <a:srgbClr val="212121"/>
-              </a:solidFill>
-            </a:endParaRPr>
+            <a:r>
+              <a:rPr sz="2400">
+                <a:solidFill>
+                  <a:srgbClr val="212121"/>
+                </a:solidFill>
+              </a:rPr>
+              <a:t/>
+            </a:r>
           </a:p>
           <a:p>
             <a:pPr>
@@ -7719,7 +7334,7 @@
 </file>
 
 <file path=ppt/slides/slide27.xml><?xml version="1.0" encoding="utf-8"?>
-<p:sld xmlns:a="http://schemas.openxmlformats.org/drawingml/2006/main" xmlns:r="http://schemas.openxmlformats.org/officeDocument/2006/relationships" xmlns:p="http://schemas.openxmlformats.org/presentationml/2006/main">
+<p:sld xmlns:a="http://schemas.openxmlformats.org/drawingml/2006/main" xmlns:p="http://schemas.openxmlformats.org/presentationml/2006/main" xmlns:r="http://schemas.openxmlformats.org/officeDocument/2006/relationships">
   <p:cSld>
     <p:spTree>
       <p:nvGrpSpPr>
@@ -7727,14 +7342,7 @@
         <p:cNvGrpSpPr/>
         <p:nvPr/>
       </p:nvGrpSpPr>
-      <p:grpSpPr>
-        <a:xfrm>
-          <a:off x="0" y="0"/>
-          <a:ext cx="0" cy="0"/>
-          <a:chOff x="0" y="0"/>
-          <a:chExt cx="0" cy="0"/>
-        </a:xfrm>
-      </p:grpSpPr>
+      <p:grpSpPr/>
       <p:sp>
         <p:nvSpPr>
           <p:cNvPr id="2" name="TextBox 1"/>
@@ -7855,11 +7463,14 @@
                 <a:spcPts val="800"/>
               </a:spcAft>
             </a:pPr>
-            <a:endParaRPr sz="2200">
-              <a:solidFill>
-                <a:srgbClr val="212121"/>
-              </a:solidFill>
-            </a:endParaRPr>
+            <a:r>
+              <a:rPr sz="2400">
+                <a:solidFill>
+                  <a:srgbClr val="212121"/>
+                </a:solidFill>
+              </a:rPr>
+              <a:t/>
+            </a:r>
           </a:p>
           <a:p>
             <a:pPr>
@@ -7917,7 +7528,7 @@
 </file>
 
 <file path=ppt/slides/slide28.xml><?xml version="1.0" encoding="utf-8"?>
-<p:sld xmlns:a="http://schemas.openxmlformats.org/drawingml/2006/main" xmlns:r="http://schemas.openxmlformats.org/officeDocument/2006/relationships" xmlns:p="http://schemas.openxmlformats.org/presentationml/2006/main">
+<p:sld xmlns:a="http://schemas.openxmlformats.org/drawingml/2006/main" xmlns:p="http://schemas.openxmlformats.org/presentationml/2006/main" xmlns:r="http://schemas.openxmlformats.org/officeDocument/2006/relationships">
   <p:cSld>
     <p:spTree>
       <p:nvGrpSpPr>
@@ -7925,14 +7536,7 @@
         <p:cNvGrpSpPr/>
         <p:nvPr/>
       </p:nvGrpSpPr>
-      <p:grpSpPr>
-        <a:xfrm>
-          <a:off x="0" y="0"/>
-          <a:ext cx="0" cy="0"/>
-          <a:chOff x="0" y="0"/>
-          <a:chExt cx="0" cy="0"/>
-        </a:xfrm>
-      </p:grpSpPr>
+      <p:grpSpPr/>
       <p:sp>
         <p:nvSpPr>
           <p:cNvPr id="2" name="TextBox 1"/>
@@ -7976,7 +7580,7 @@
         </p:nvGraphicFramePr>
         <p:xfrm>
           <a:off x="731520" y="1554480"/>
-          <a:ext cx="10698480" cy="1981200"/>
+          <a:ext cx="10698480" cy="1828800"/>
         </p:xfrm>
         <a:graphic>
           <a:graphicData uri="http://schemas.openxmlformats.org/drawingml/2006/table">
@@ -7985,20 +7589,8 @@
                 <a:tableStyleId>{5C22544A-7EE6-4342-B048-85BDC9FD1C3A}</a:tableStyleId>
               </a:tblPr>
               <a:tblGrid>
-                <a:gridCol w="4754880">
-                  <a:extLst>
-                    <a:ext uri="{9D8B030D-6E8A-4147-A177-3AD203B41FA5}">
-                      <a16:colId xmlns:a16="http://schemas.microsoft.com/office/drawing/2014/main" val="20000"/>
-                    </a:ext>
-                  </a:extLst>
-                </a:gridCol>
-                <a:gridCol w="5943600">
-                  <a:extLst>
-                    <a:ext uri="{9D8B030D-6E8A-4147-A177-3AD203B41FA5}">
-                      <a16:colId xmlns:a16="http://schemas.microsoft.com/office/drawing/2014/main" val="20001"/>
-                    </a:ext>
-                  </a:extLst>
-                </a:gridCol>
+                <a:gridCol w="4754880"/>
+                <a:gridCol w="5943600"/>
               </a:tblGrid>
               <a:tr h="365760">
                 <a:tc>
@@ -8027,11 +7619,6 @@
                   </a:txBody>
                   <a:tcPr/>
                 </a:tc>
-                <a:extLst>
-                  <a:ext uri="{0D108BD9-81ED-4DB2-BD59-A6C34878D82A}">
-                    <a16:rowId xmlns:a16="http://schemas.microsoft.com/office/drawing/2014/main" val="10000"/>
-                  </a:ext>
-                </a:extLst>
               </a:tr>
               <a:tr h="365760">
                 <a:tc>
@@ -8060,11 +7647,6 @@
                   </a:txBody>
                   <a:tcPr/>
                 </a:tc>
-                <a:extLst>
-                  <a:ext uri="{0D108BD9-81ED-4DB2-BD59-A6C34878D82A}">
-                    <a16:rowId xmlns:a16="http://schemas.microsoft.com/office/drawing/2014/main" val="10001"/>
-                  </a:ext>
-                </a:extLst>
               </a:tr>
               <a:tr h="365760">
                 <a:tc>
@@ -8093,11 +7675,6 @@
                   </a:txBody>
                   <a:tcPr/>
                 </a:tc>
-                <a:extLst>
-                  <a:ext uri="{0D108BD9-81ED-4DB2-BD59-A6C34878D82A}">
-                    <a16:rowId xmlns:a16="http://schemas.microsoft.com/office/drawing/2014/main" val="10002"/>
-                  </a:ext>
-                </a:extLst>
               </a:tr>
               <a:tr h="365760">
                 <a:tc>
@@ -8126,11 +7703,6 @@
                   </a:txBody>
                   <a:tcPr/>
                 </a:tc>
-                <a:extLst>
-                  <a:ext uri="{0D108BD9-81ED-4DB2-BD59-A6C34878D82A}">
-                    <a16:rowId xmlns:a16="http://schemas.microsoft.com/office/drawing/2014/main" val="10003"/>
-                  </a:ext>
-                </a:extLst>
               </a:tr>
               <a:tr h="365760">
                 <a:tc>
@@ -8159,11 +7731,6 @@
                   </a:txBody>
                   <a:tcPr/>
                 </a:tc>
-                <a:extLst>
-                  <a:ext uri="{0D108BD9-81ED-4DB2-BD59-A6C34878D82A}">
-                    <a16:rowId xmlns:a16="http://schemas.microsoft.com/office/drawing/2014/main" val="10004"/>
-                  </a:ext>
-                </a:extLst>
               </a:tr>
             </a:tbl>
           </a:graphicData>
@@ -8216,7 +7783,7 @@
 </file>
 
 <file path=ppt/slides/slide29.xml><?xml version="1.0" encoding="utf-8"?>
-<p:sld xmlns:a="http://schemas.openxmlformats.org/drawingml/2006/main" xmlns:r="http://schemas.openxmlformats.org/officeDocument/2006/relationships" xmlns:p="http://schemas.openxmlformats.org/presentationml/2006/main">
+<p:sld xmlns:a="http://schemas.openxmlformats.org/drawingml/2006/main" xmlns:p="http://schemas.openxmlformats.org/presentationml/2006/main" xmlns:r="http://schemas.openxmlformats.org/officeDocument/2006/relationships">
   <p:cSld>
     <p:spTree>
       <p:nvGrpSpPr>
@@ -8224,14 +7791,7 @@
         <p:cNvGrpSpPr/>
         <p:nvPr/>
       </p:nvGrpSpPr>
-      <p:grpSpPr>
-        <a:xfrm>
-          <a:off x="0" y="0"/>
-          <a:ext cx="0" cy="0"/>
-          <a:chOff x="0" y="0"/>
-          <a:chExt cx="0" cy="0"/>
-        </a:xfrm>
-      </p:grpSpPr>
+      <p:grpSpPr/>
       <p:sp>
         <p:nvSpPr>
           <p:cNvPr id="2" name="TextBox 1"/>
@@ -8324,12 +7884,14 @@
                 <a:spcPts val="800"/>
               </a:spcAft>
             </a:pPr>
-            <a:endParaRPr sz="2000">
-              <a:solidFill>
-                <a:srgbClr val="212121"/>
-              </a:solidFill>
-              <a:latin typeface="Courier New"/>
-            </a:endParaRPr>
+            <a:r>
+              <a:rPr sz="2400">
+                <a:solidFill>
+                  <a:srgbClr val="212121"/>
+                </a:solidFill>
+              </a:rPr>
+              <a:t/>
+            </a:r>
           </a:p>
           <a:p>
             <a:pPr>
@@ -8402,7 +7964,7 @@
 </file>
 
 <file path=ppt/slides/slide3.xml><?xml version="1.0" encoding="utf-8"?>
-<p:sld xmlns:a="http://schemas.openxmlformats.org/drawingml/2006/main" xmlns:r="http://schemas.openxmlformats.org/officeDocument/2006/relationships" xmlns:p="http://schemas.openxmlformats.org/presentationml/2006/main">
+<p:sld xmlns:a="http://schemas.openxmlformats.org/drawingml/2006/main" xmlns:p="http://schemas.openxmlformats.org/presentationml/2006/main" xmlns:r="http://schemas.openxmlformats.org/officeDocument/2006/relationships">
   <p:cSld>
     <p:spTree>
       <p:nvGrpSpPr>
@@ -8410,14 +7972,7 @@
         <p:cNvGrpSpPr/>
         <p:nvPr/>
       </p:nvGrpSpPr>
-      <p:grpSpPr>
-        <a:xfrm>
-          <a:off x="0" y="0"/>
-          <a:ext cx="0" cy="0"/>
-          <a:chOff x="0" y="0"/>
-          <a:chExt cx="0" cy="0"/>
-        </a:xfrm>
-      </p:grpSpPr>
+      <p:grpSpPr/>
       <p:sp>
         <p:nvSpPr>
           <p:cNvPr id="2" name="TextBox 1"/>
@@ -8513,7 +8068,7 @@
 </file>
 
 <file path=ppt/slides/slide30.xml><?xml version="1.0" encoding="utf-8"?>
-<p:sld xmlns:a="http://schemas.openxmlformats.org/drawingml/2006/main" xmlns:r="http://schemas.openxmlformats.org/officeDocument/2006/relationships" xmlns:p="http://schemas.openxmlformats.org/presentationml/2006/main">
+<p:sld xmlns:a="http://schemas.openxmlformats.org/drawingml/2006/main" xmlns:p="http://schemas.openxmlformats.org/presentationml/2006/main" xmlns:r="http://schemas.openxmlformats.org/officeDocument/2006/relationships">
   <p:cSld>
     <p:spTree>
       <p:nvGrpSpPr>
@@ -8521,14 +8076,7 @@
         <p:cNvGrpSpPr/>
         <p:nvPr/>
       </p:nvGrpSpPr>
-      <p:grpSpPr>
-        <a:xfrm>
-          <a:off x="0" y="0"/>
-          <a:ext cx="0" cy="0"/>
-          <a:chOff x="0" y="0"/>
-          <a:chExt cx="0" cy="0"/>
-        </a:xfrm>
-      </p:grpSpPr>
+      <p:grpSpPr/>
       <p:sp>
         <p:nvSpPr>
           <p:cNvPr id="2" name="TextBox 1"/>
@@ -8605,12 +8153,15 @@
                 <a:spcPts val="0"/>
               </a:spcAft>
             </a:pPr>
-            <a:endParaRPr sz="1800">
-              <a:solidFill>
-                <a:srgbClr val="212121"/>
-              </a:solidFill>
-              <a:latin typeface="Courier New"/>
-            </a:endParaRPr>
+            <a:r>
+              <a:rPr sz="1800">
+                <a:solidFill>
+                  <a:srgbClr val="212121"/>
+                </a:solidFill>
+                <a:latin typeface="Courier New"/>
+              </a:rPr>
+              <a:t/>
+            </a:r>
           </a:p>
           <a:p>
             <a:pPr>
@@ -8650,12 +8201,15 @@
                 <a:spcPts val="0"/>
               </a:spcAft>
             </a:pPr>
-            <a:endParaRPr sz="1800">
-              <a:solidFill>
-                <a:srgbClr val="212121"/>
-              </a:solidFill>
-              <a:latin typeface="Courier New"/>
-            </a:endParaRPr>
+            <a:r>
+              <a:rPr sz="1800">
+                <a:solidFill>
+                  <a:srgbClr val="212121"/>
+                </a:solidFill>
+                <a:latin typeface="Courier New"/>
+              </a:rPr>
+              <a:t/>
+            </a:r>
           </a:p>
           <a:p>
             <a:pPr>
@@ -8695,12 +8249,14 @@
                 <a:spcPts val="800"/>
               </a:spcAft>
             </a:pPr>
-            <a:endParaRPr sz="1800">
-              <a:solidFill>
-                <a:srgbClr val="212121"/>
-              </a:solidFill>
-              <a:latin typeface="Courier New"/>
-            </a:endParaRPr>
+            <a:r>
+              <a:rPr sz="2200">
+                <a:solidFill>
+                  <a:srgbClr val="212121"/>
+                </a:solidFill>
+              </a:rPr>
+              <a:t/>
+            </a:r>
           </a:p>
           <a:p>
             <a:pPr>
@@ -8728,7 +8284,7 @@
 </file>
 
 <file path=ppt/slides/slide31.xml><?xml version="1.0" encoding="utf-8"?>
-<p:sld xmlns:a="http://schemas.openxmlformats.org/drawingml/2006/main" xmlns:r="http://schemas.openxmlformats.org/officeDocument/2006/relationships" xmlns:p="http://schemas.openxmlformats.org/presentationml/2006/main">
+<p:sld xmlns:a="http://schemas.openxmlformats.org/drawingml/2006/main" xmlns:p="http://schemas.openxmlformats.org/presentationml/2006/main" xmlns:r="http://schemas.openxmlformats.org/officeDocument/2006/relationships">
   <p:cSld>
     <p:spTree>
       <p:nvGrpSpPr>
@@ -8736,14 +8292,7 @@
         <p:cNvGrpSpPr/>
         <p:nvPr/>
       </p:nvGrpSpPr>
-      <p:grpSpPr>
-        <a:xfrm>
-          <a:off x="0" y="0"/>
-          <a:ext cx="0" cy="0"/>
-          <a:chOff x="0" y="0"/>
-          <a:chExt cx="0" cy="0"/>
-        </a:xfrm>
-      </p:grpSpPr>
+      <p:grpSpPr/>
       <p:sp>
         <p:nvSpPr>
           <p:cNvPr id="2" name="TextBox 1"/>
@@ -8852,12 +8401,14 @@
                 <a:spcPts val="800"/>
               </a:spcAft>
             </a:pPr>
-            <a:endParaRPr sz="1800">
-              <a:solidFill>
-                <a:srgbClr val="212121"/>
-              </a:solidFill>
-              <a:latin typeface="Courier New"/>
-            </a:endParaRPr>
+            <a:r>
+              <a:rPr sz="2200">
+                <a:solidFill>
+                  <a:srgbClr val="212121"/>
+                </a:solidFill>
+              </a:rPr>
+              <a:t/>
+            </a:r>
           </a:p>
           <a:p>
             <a:pPr>
@@ -8913,12 +8464,14 @@
                 <a:spcPts val="800"/>
               </a:spcAft>
             </a:pPr>
-            <a:endParaRPr sz="1800">
-              <a:solidFill>
-                <a:srgbClr val="212121"/>
-              </a:solidFill>
-              <a:latin typeface="Courier New"/>
-            </a:endParaRPr>
+            <a:r>
+              <a:rPr sz="2200">
+                <a:solidFill>
+                  <a:srgbClr val="212121"/>
+                </a:solidFill>
+              </a:rPr>
+              <a:t/>
+            </a:r>
           </a:p>
           <a:p>
             <a:pPr>
@@ -8946,7 +8499,7 @@
 </file>
 
 <file path=ppt/slides/slide32.xml><?xml version="1.0" encoding="utf-8"?>
-<p:sld xmlns:a="http://schemas.openxmlformats.org/drawingml/2006/main" xmlns:r="http://schemas.openxmlformats.org/officeDocument/2006/relationships" xmlns:p="http://schemas.openxmlformats.org/presentationml/2006/main">
+<p:sld xmlns:a="http://schemas.openxmlformats.org/drawingml/2006/main" xmlns:p="http://schemas.openxmlformats.org/presentationml/2006/main" xmlns:r="http://schemas.openxmlformats.org/officeDocument/2006/relationships">
   <p:cSld>
     <p:spTree>
       <p:nvGrpSpPr>
@@ -8954,14 +8507,7 @@
         <p:cNvGrpSpPr/>
         <p:nvPr/>
       </p:nvGrpSpPr>
-      <p:grpSpPr>
-        <a:xfrm>
-          <a:off x="0" y="0"/>
-          <a:ext cx="0" cy="0"/>
-          <a:chOff x="0" y="0"/>
-          <a:chExt cx="0" cy="0"/>
-        </a:xfrm>
-      </p:grpSpPr>
+      <p:grpSpPr/>
       <p:sp>
         <p:nvSpPr>
           <p:cNvPr id="2" name="TextBox 1"/>
@@ -9086,12 +8632,14 @@
                 <a:spcPts val="800"/>
               </a:spcAft>
             </a:pPr>
-            <a:endParaRPr sz="1800">
-              <a:solidFill>
-                <a:srgbClr val="212121"/>
-              </a:solidFill>
-              <a:latin typeface="Courier New"/>
-            </a:endParaRPr>
+            <a:r>
+              <a:rPr sz="2200">
+                <a:solidFill>
+                  <a:srgbClr val="212121"/>
+                </a:solidFill>
+              </a:rPr>
+              <a:t/>
+            </a:r>
           </a:p>
           <a:p>
             <a:pPr>
@@ -9149,7 +8697,7 @@
 </file>
 
 <file path=ppt/slides/slide33.xml><?xml version="1.0" encoding="utf-8"?>
-<p:sld xmlns:a="http://schemas.openxmlformats.org/drawingml/2006/main" xmlns:r="http://schemas.openxmlformats.org/officeDocument/2006/relationships" xmlns:p="http://schemas.openxmlformats.org/presentationml/2006/main">
+<p:sld xmlns:a="http://schemas.openxmlformats.org/drawingml/2006/main" xmlns:p="http://schemas.openxmlformats.org/presentationml/2006/main" xmlns:r="http://schemas.openxmlformats.org/officeDocument/2006/relationships">
   <p:cSld>
     <p:spTree>
       <p:nvGrpSpPr>
@@ -9157,14 +8705,7 @@
         <p:cNvGrpSpPr/>
         <p:nvPr/>
       </p:nvGrpSpPr>
-      <p:grpSpPr>
-        <a:xfrm>
-          <a:off x="0" y="0"/>
-          <a:ext cx="0" cy="0"/>
-          <a:chOff x="0" y="0"/>
-          <a:chExt cx="0" cy="0"/>
-        </a:xfrm>
-      </p:grpSpPr>
+      <p:grpSpPr/>
       <p:sp>
         <p:nvSpPr>
           <p:cNvPr id="2" name="TextBox 1"/>
@@ -9288,12 +8829,14 @@
                 <a:spcPts val="800"/>
               </a:spcAft>
             </a:pPr>
-            <a:endParaRPr sz="1800">
-              <a:solidFill>
-                <a:srgbClr val="212121"/>
-              </a:solidFill>
-              <a:latin typeface="Courier New"/>
-            </a:endParaRPr>
+            <a:r>
+              <a:rPr sz="2200">
+                <a:solidFill>
+                  <a:srgbClr val="212121"/>
+                </a:solidFill>
+              </a:rPr>
+              <a:t/>
+            </a:r>
           </a:p>
           <a:p>
             <a:pPr>
@@ -9351,7 +8894,7 @@
 </file>
 
 <file path=ppt/slides/slide34.xml><?xml version="1.0" encoding="utf-8"?>
-<p:sld xmlns:a="http://schemas.openxmlformats.org/drawingml/2006/main" xmlns:r="http://schemas.openxmlformats.org/officeDocument/2006/relationships" xmlns:p="http://schemas.openxmlformats.org/presentationml/2006/main">
+<p:sld xmlns:a="http://schemas.openxmlformats.org/drawingml/2006/main" xmlns:p="http://schemas.openxmlformats.org/presentationml/2006/main" xmlns:r="http://schemas.openxmlformats.org/officeDocument/2006/relationships">
   <p:cSld>
     <p:spTree>
       <p:nvGrpSpPr>
@@ -9359,14 +8902,7 @@
         <p:cNvGrpSpPr/>
         <p:nvPr/>
       </p:nvGrpSpPr>
-      <p:grpSpPr>
-        <a:xfrm>
-          <a:off x="0" y="0"/>
-          <a:ext cx="0" cy="0"/>
-          <a:chOff x="0" y="0"/>
-          <a:chExt cx="0" cy="0"/>
-        </a:xfrm>
-      </p:grpSpPr>
+      <p:grpSpPr/>
       <p:sp>
         <p:nvSpPr>
           <p:cNvPr id="2" name="TextBox 1"/>
@@ -9504,12 +9040,14 @@
                 <a:spcPts val="800"/>
               </a:spcAft>
             </a:pPr>
-            <a:endParaRPr sz="1800">
-              <a:solidFill>
-                <a:srgbClr val="212121"/>
-              </a:solidFill>
-              <a:latin typeface="Courier New"/>
-            </a:endParaRPr>
+            <a:r>
+              <a:rPr sz="2200">
+                <a:solidFill>
+                  <a:srgbClr val="212121"/>
+                </a:solidFill>
+              </a:rPr>
+              <a:t/>
+            </a:r>
           </a:p>
           <a:p>
             <a:pPr>
@@ -9552,7 +9090,7 @@
 </file>
 
 <file path=ppt/slides/slide35.xml><?xml version="1.0" encoding="utf-8"?>
-<p:sld xmlns:a="http://schemas.openxmlformats.org/drawingml/2006/main" xmlns:r="http://schemas.openxmlformats.org/officeDocument/2006/relationships" xmlns:p="http://schemas.openxmlformats.org/presentationml/2006/main">
+<p:sld xmlns:a="http://schemas.openxmlformats.org/drawingml/2006/main" xmlns:p="http://schemas.openxmlformats.org/presentationml/2006/main" xmlns:r="http://schemas.openxmlformats.org/officeDocument/2006/relationships">
   <p:cSld>
     <p:spTree>
       <p:nvGrpSpPr>
@@ -9560,14 +9098,7 @@
         <p:cNvGrpSpPr/>
         <p:nvPr/>
       </p:nvGrpSpPr>
-      <p:grpSpPr>
-        <a:xfrm>
-          <a:off x="0" y="0"/>
-          <a:ext cx="0" cy="0"/>
-          <a:chOff x="0" y="0"/>
-          <a:chExt cx="0" cy="0"/>
-        </a:xfrm>
-      </p:grpSpPr>
+      <p:grpSpPr/>
       <p:sp>
         <p:nvSpPr>
           <p:cNvPr id="2" name="TextBox 1"/>
@@ -9639,7 +9170,7 @@
           </a:fontRef>
         </p:style>
         <p:txBody>
-          <a:bodyPr wrap="square" rtlCol="0" anchor="ctr"/>
+          <a:bodyPr rtlCol="0" anchor="ctr" wrap="square"/>
           <a:lstStyle/>
           <a:p>
             <a:pPr algn="ctr"/>
@@ -9692,7 +9223,7 @@
           </a:fontRef>
         </p:style>
         <p:txBody>
-          <a:bodyPr wrap="square" rtlCol="0" anchor="ctr"/>
+          <a:bodyPr rtlCol="0" anchor="ctr" wrap="square"/>
           <a:lstStyle/>
           <a:p>
             <a:pPr algn="ctr"/>
@@ -9747,7 +9278,6 @@
           <a:lstStyle/>
           <a:p>
             <a:pPr algn="ctr"/>
-            <a:endParaRPr/>
           </a:p>
         </p:txBody>
       </p:sp>
@@ -9789,7 +9319,7 @@
           </a:fontRef>
         </p:style>
         <p:txBody>
-          <a:bodyPr wrap="square" rtlCol="0" anchor="ctr"/>
+          <a:bodyPr rtlCol="0" anchor="ctr" wrap="square"/>
           <a:lstStyle/>
           <a:p>
             <a:pPr algn="ctr"/>
@@ -9845,7 +9375,6 @@
           <a:lstStyle/>
           <a:p>
             <a:pPr algn="ctr"/>
-            <a:endParaRPr/>
           </a:p>
         </p:txBody>
       </p:sp>
@@ -9887,7 +9416,7 @@
           </a:fontRef>
         </p:style>
         <p:txBody>
-          <a:bodyPr wrap="square" rtlCol="0" anchor="ctr"/>
+          <a:bodyPr rtlCol="0" anchor="ctr" wrap="square"/>
           <a:lstStyle/>
           <a:p>
             <a:pPr algn="ctr"/>
@@ -9942,7 +9471,6 @@
           <a:lstStyle/>
           <a:p>
             <a:pPr algn="ctr"/>
-            <a:endParaRPr/>
           </a:p>
         </p:txBody>
       </p:sp>
@@ -9984,7 +9512,7 @@
           </a:fontRef>
         </p:style>
         <p:txBody>
-          <a:bodyPr wrap="square" rtlCol="0" anchor="ctr"/>
+          <a:bodyPr rtlCol="0" anchor="ctr" wrap="square"/>
           <a:lstStyle/>
           <a:p>
             <a:pPr algn="ctr"/>
@@ -10039,7 +9567,6 @@
           <a:lstStyle/>
           <a:p>
             <a:pPr algn="ctr"/>
-            <a:endParaRPr/>
           </a:p>
         </p:txBody>
       </p:sp>
@@ -10100,11 +9627,14 @@
                 <a:spcPts val="800"/>
               </a:spcAft>
             </a:pPr>
-            <a:endParaRPr sz="2400">
-              <a:solidFill>
-                <a:srgbClr val="212121"/>
-              </a:solidFill>
-            </a:endParaRPr>
+            <a:r>
+              <a:rPr sz="2400">
+                <a:solidFill>
+                  <a:srgbClr val="212121"/>
+                </a:solidFill>
+              </a:rPr>
+              <a:t/>
+            </a:r>
           </a:p>
           <a:p>
             <a:pPr>
@@ -10132,7 +9662,7 @@
 </file>
 
 <file path=ppt/slides/slide36.xml><?xml version="1.0" encoding="utf-8"?>
-<p:sld xmlns:a="http://schemas.openxmlformats.org/drawingml/2006/main" xmlns:r="http://schemas.openxmlformats.org/officeDocument/2006/relationships" xmlns:p="http://schemas.openxmlformats.org/presentationml/2006/main">
+<p:sld xmlns:a="http://schemas.openxmlformats.org/drawingml/2006/main" xmlns:p="http://schemas.openxmlformats.org/presentationml/2006/main" xmlns:r="http://schemas.openxmlformats.org/officeDocument/2006/relationships">
   <p:cSld>
     <p:spTree>
       <p:nvGrpSpPr>
@@ -10140,14 +9670,7 @@
         <p:cNvGrpSpPr/>
         <p:nvPr/>
       </p:nvGrpSpPr>
-      <p:grpSpPr>
-        <a:xfrm>
-          <a:off x="0" y="0"/>
-          <a:ext cx="0" cy="0"/>
-          <a:chOff x="0" y="0"/>
-          <a:chExt cx="0" cy="0"/>
-        </a:xfrm>
-      </p:grpSpPr>
+      <p:grpSpPr/>
       <p:sp>
         <p:nvSpPr>
           <p:cNvPr id="2" name="TextBox 1"/>
@@ -10224,25 +9747,27 @@
                 <a:spcPts val="800"/>
               </a:spcAft>
             </a:pPr>
-            <a:endParaRPr sz="2000">
-              <a:solidFill>
-                <a:srgbClr val="212121"/>
-              </a:solidFill>
-              <a:latin typeface="Courier New"/>
-            </a:endParaRPr>
-          </a:p>
-          <a:p>
-            <a:pPr>
-              <a:spcAft>
-                <a:spcPts val="800"/>
-              </a:spcAft>
-            </a:pPr>
             <a:r>
               <a:rPr sz="2400">
                 <a:solidFill>
                   <a:srgbClr val="212121"/>
                 </a:solidFill>
               </a:rPr>
+              <a:t/>
+            </a:r>
+          </a:p>
+          <a:p>
+            <a:pPr>
+              <a:spcAft>
+                <a:spcPts val="800"/>
+              </a:spcAft>
+            </a:pPr>
+            <a:r>
+              <a:rPr sz="2400">
+                <a:solidFill>
+                  <a:srgbClr val="212121"/>
+                </a:solidFill>
+              </a:rPr>
               <a:t>--unwind k copies the loop body k times, each copy guarded by the loop condition.</a:t>
             </a:r>
           </a:p>
@@ -10282,11 +9807,14 @@
                 <a:spcPts val="800"/>
               </a:spcAft>
             </a:pPr>
-            <a:endParaRPr sz="2200">
-              <a:solidFill>
-                <a:srgbClr val="212121"/>
-              </a:solidFill>
-            </a:endParaRPr>
+            <a:r>
+              <a:rPr sz="2400">
+                <a:solidFill>
+                  <a:srgbClr val="212121"/>
+                </a:solidFill>
+              </a:rPr>
+              <a:t/>
+            </a:r>
           </a:p>
           <a:p>
             <a:pPr>
@@ -10314,7 +9842,7 @@
 </file>
 
 <file path=ppt/slides/slide37.xml><?xml version="1.0" encoding="utf-8"?>
-<p:sld xmlns:a="http://schemas.openxmlformats.org/drawingml/2006/main" xmlns:r="http://schemas.openxmlformats.org/officeDocument/2006/relationships" xmlns:p="http://schemas.openxmlformats.org/presentationml/2006/main">
+<p:sld xmlns:a="http://schemas.openxmlformats.org/drawingml/2006/main" xmlns:p="http://schemas.openxmlformats.org/presentationml/2006/main" xmlns:r="http://schemas.openxmlformats.org/officeDocument/2006/relationships">
   <p:cSld>
     <p:spTree>
       <p:nvGrpSpPr>
@@ -10322,14 +9850,7 @@
         <p:cNvGrpSpPr/>
         <p:nvPr/>
       </p:nvGrpSpPr>
-      <p:grpSpPr>
-        <a:xfrm>
-          <a:off x="0" y="0"/>
-          <a:ext cx="0" cy="0"/>
-          <a:chOff x="0" y="0"/>
-          <a:chExt cx="0" cy="0"/>
-        </a:xfrm>
-      </p:grpSpPr>
+      <p:grpSpPr/>
       <p:sp>
         <p:nvSpPr>
           <p:cNvPr id="2" name="TextBox 1"/>
@@ -10373,7 +9894,7 @@
         </p:nvGraphicFramePr>
         <p:xfrm>
           <a:off x="731520" y="1554480"/>
-          <a:ext cx="10698480" cy="1889760"/>
+          <a:ext cx="10698480" cy="1463040"/>
         </p:xfrm>
         <a:graphic>
           <a:graphicData uri="http://schemas.openxmlformats.org/drawingml/2006/table">
@@ -10382,20 +9903,8 @@
                 <a:tableStyleId>{5C22544A-7EE6-4342-B048-85BDC9FD1C3A}</a:tableStyleId>
               </a:tblPr>
               <a:tblGrid>
-                <a:gridCol w="4572000">
-                  <a:extLst>
-                    <a:ext uri="{9D8B030D-6E8A-4147-A177-3AD203B41FA5}">
-                      <a16:colId xmlns:a16="http://schemas.microsoft.com/office/drawing/2014/main" val="20000"/>
-                    </a:ext>
-                  </a:extLst>
-                </a:gridCol>
-                <a:gridCol w="6126480">
-                  <a:extLst>
-                    <a:ext uri="{9D8B030D-6E8A-4147-A177-3AD203B41FA5}">
-                      <a16:colId xmlns:a16="http://schemas.microsoft.com/office/drawing/2014/main" val="20001"/>
-                    </a:ext>
-                  </a:extLst>
-                </a:gridCol>
+                <a:gridCol w="4572000"/>
+                <a:gridCol w="6126480"/>
               </a:tblGrid>
               <a:tr h="365760">
                 <a:tc>
@@ -10424,11 +9933,6 @@
                   </a:txBody>
                   <a:tcPr/>
                 </a:tc>
-                <a:extLst>
-                  <a:ext uri="{0D108BD9-81ED-4DB2-BD59-A6C34878D82A}">
-                    <a16:rowId xmlns:a16="http://schemas.microsoft.com/office/drawing/2014/main" val="10000"/>
-                  </a:ext>
-                </a:extLst>
               </a:tr>
               <a:tr h="365760">
                 <a:tc>
@@ -10457,11 +9961,6 @@
                   </a:txBody>
                   <a:tcPr/>
                 </a:tc>
-                <a:extLst>
-                  <a:ext uri="{0D108BD9-81ED-4DB2-BD59-A6C34878D82A}">
-                    <a16:rowId xmlns:a16="http://schemas.microsoft.com/office/drawing/2014/main" val="10001"/>
-                  </a:ext>
-                </a:extLst>
               </a:tr>
               <a:tr h="365760">
                 <a:tc>
@@ -10490,11 +9989,6 @@
                   </a:txBody>
                   <a:tcPr/>
                 </a:tc>
-                <a:extLst>
-                  <a:ext uri="{0D108BD9-81ED-4DB2-BD59-A6C34878D82A}">
-                    <a16:rowId xmlns:a16="http://schemas.microsoft.com/office/drawing/2014/main" val="10002"/>
-                  </a:ext>
-                </a:extLst>
               </a:tr>
               <a:tr h="365760">
                 <a:tc>
@@ -10523,11 +10017,6 @@
                   </a:txBody>
                   <a:tcPr/>
                 </a:tc>
-                <a:extLst>
-                  <a:ext uri="{0D108BD9-81ED-4DB2-BD59-A6C34878D82A}">
-                    <a16:rowId xmlns:a16="http://schemas.microsoft.com/office/drawing/2014/main" val="10003"/>
-                  </a:ext>
-                </a:extLst>
               </a:tr>
             </a:tbl>
           </a:graphicData>
@@ -10595,7 +10084,7 @@
 </file>
 
 <file path=ppt/slides/slide38.xml><?xml version="1.0" encoding="utf-8"?>
-<p:sld xmlns:a="http://schemas.openxmlformats.org/drawingml/2006/main" xmlns:r="http://schemas.openxmlformats.org/officeDocument/2006/relationships" xmlns:p="http://schemas.openxmlformats.org/presentationml/2006/main">
+<p:sld xmlns:a="http://schemas.openxmlformats.org/drawingml/2006/main" xmlns:p="http://schemas.openxmlformats.org/presentationml/2006/main" xmlns:r="http://schemas.openxmlformats.org/officeDocument/2006/relationships">
   <p:cSld>
     <p:spTree>
       <p:nvGrpSpPr>
@@ -10603,14 +10092,7 @@
         <p:cNvGrpSpPr/>
         <p:nvPr/>
       </p:nvGrpSpPr>
-      <p:grpSpPr>
-        <a:xfrm>
-          <a:off x="0" y="0"/>
-          <a:ext cx="0" cy="0"/>
-          <a:chOff x="0" y="0"/>
-          <a:chExt cx="0" cy="0"/>
-        </a:xfrm>
-      </p:grpSpPr>
+      <p:grpSpPr/>
       <p:sp>
         <p:nvSpPr>
           <p:cNvPr id="2" name="TextBox 1"/>
@@ -10719,12 +10201,14 @@
                 <a:spcPts val="800"/>
               </a:spcAft>
             </a:pPr>
-            <a:endParaRPr sz="2000">
-              <a:solidFill>
-                <a:srgbClr val="212121"/>
-              </a:solidFill>
-              <a:latin typeface="Courier New"/>
-            </a:endParaRPr>
+            <a:r>
+              <a:rPr sz="2400">
+                <a:solidFill>
+                  <a:srgbClr val="212121"/>
+                </a:solidFill>
+              </a:rPr>
+              <a:t/>
+            </a:r>
           </a:p>
           <a:p>
             <a:pPr>
@@ -10767,7 +10251,7 @@
 </file>
 
 <file path=ppt/slides/slide39.xml><?xml version="1.0" encoding="utf-8"?>
-<p:sld xmlns:a="http://schemas.openxmlformats.org/drawingml/2006/main" xmlns:r="http://schemas.openxmlformats.org/officeDocument/2006/relationships" xmlns:p="http://schemas.openxmlformats.org/presentationml/2006/main">
+<p:sld xmlns:a="http://schemas.openxmlformats.org/drawingml/2006/main" xmlns:p="http://schemas.openxmlformats.org/presentationml/2006/main" xmlns:r="http://schemas.openxmlformats.org/officeDocument/2006/relationships">
   <p:cSld>
     <p:spTree>
       <p:nvGrpSpPr>
@@ -10775,14 +10259,7 @@
         <p:cNvGrpSpPr/>
         <p:nvPr/>
       </p:nvGrpSpPr>
-      <p:grpSpPr>
-        <a:xfrm>
-          <a:off x="0" y="0"/>
-          <a:ext cx="0" cy="0"/>
-          <a:chOff x="0" y="0"/>
-          <a:chExt cx="0" cy="0"/>
-        </a:xfrm>
-      </p:grpSpPr>
+      <p:grpSpPr/>
       <p:sp>
         <p:nvSpPr>
           <p:cNvPr id="2" name="TextBox 1"/>
@@ -10859,25 +10336,27 @@
                 <a:spcPts val="800"/>
               </a:spcAft>
             </a:pPr>
-            <a:endParaRPr sz="2200">
-              <a:solidFill>
-                <a:srgbClr val="212121"/>
-              </a:solidFill>
-              <a:latin typeface="Courier New"/>
-            </a:endParaRPr>
-          </a:p>
-          <a:p>
-            <a:pPr>
-              <a:spcAft>
-                <a:spcPts val="800"/>
-              </a:spcAft>
-            </a:pPr>
             <a:r>
               <a:rPr sz="2600">
                 <a:solidFill>
                   <a:srgbClr val="212121"/>
                 </a:solidFill>
               </a:rPr>
+              <a:t/>
+            </a:r>
+          </a:p>
+          <a:p>
+            <a:pPr>
+              <a:spcAft>
+                <a:spcPts val="800"/>
+              </a:spcAft>
+            </a:pPr>
+            <a:r>
+              <a:rPr sz="2600">
+                <a:solidFill>
+                  <a:srgbClr val="212121"/>
+                </a:solidFill>
+              </a:rPr>
               <a:t>sat — the model assigns every input and every choice: replayed in program order, that is the counterexample trace.</a:t>
             </a:r>
           </a:p>
@@ -10902,11 +10381,14 @@
                 <a:spcPts val="800"/>
               </a:spcAft>
             </a:pPr>
-            <a:endParaRPr sz="2600">
-              <a:solidFill>
-                <a:srgbClr val="212121"/>
-              </a:solidFill>
-            </a:endParaRPr>
+            <a:r>
+              <a:rPr sz="2600">
+                <a:solidFill>
+                  <a:srgbClr val="212121"/>
+                </a:solidFill>
+              </a:rPr>
+              <a:t/>
+            </a:r>
           </a:p>
           <a:p>
             <a:pPr>
@@ -10934,7 +10416,7 @@
 </file>
 
 <file path=ppt/slides/slide4.xml><?xml version="1.0" encoding="utf-8"?>
-<p:sld xmlns:a="http://schemas.openxmlformats.org/drawingml/2006/main" xmlns:r="http://schemas.openxmlformats.org/officeDocument/2006/relationships" xmlns:p="http://schemas.openxmlformats.org/presentationml/2006/main">
+<p:sld xmlns:a="http://schemas.openxmlformats.org/drawingml/2006/main" xmlns:p="http://schemas.openxmlformats.org/presentationml/2006/main" xmlns:r="http://schemas.openxmlformats.org/officeDocument/2006/relationships">
   <p:cSld>
     <p:spTree>
       <p:nvGrpSpPr>
@@ -10942,14 +10424,7 @@
         <p:cNvGrpSpPr/>
         <p:nvPr/>
       </p:nvGrpSpPr>
-      <p:grpSpPr>
-        <a:xfrm>
-          <a:off x="0" y="0"/>
-          <a:ext cx="0" cy="0"/>
-          <a:chOff x="0" y="0"/>
-          <a:chExt cx="0" cy="0"/>
-        </a:xfrm>
-      </p:grpSpPr>
+      <p:grpSpPr/>
       <p:sp>
         <p:nvSpPr>
           <p:cNvPr id="2" name="TextBox 1"/>
@@ -11100,11 +10575,14 @@
                 <a:spcPts val="800"/>
               </a:spcAft>
             </a:pPr>
-            <a:endParaRPr sz="2000">
-              <a:solidFill>
-                <a:srgbClr val="212121"/>
-              </a:solidFill>
-            </a:endParaRPr>
+            <a:r>
+              <a:rPr sz="2200">
+                <a:solidFill>
+                  <a:srgbClr val="212121"/>
+                </a:solidFill>
+              </a:rPr>
+              <a:t/>
+            </a:r>
           </a:p>
           <a:p>
             <a:pPr>
@@ -11132,7 +10610,7 @@
 </file>
 
 <file path=ppt/slides/slide40.xml><?xml version="1.0" encoding="utf-8"?>
-<p:sld xmlns:a="http://schemas.openxmlformats.org/drawingml/2006/main" xmlns:r="http://schemas.openxmlformats.org/officeDocument/2006/relationships" xmlns:p="http://schemas.openxmlformats.org/presentationml/2006/main">
+<p:sld xmlns:a="http://schemas.openxmlformats.org/drawingml/2006/main" xmlns:p="http://schemas.openxmlformats.org/presentationml/2006/main" xmlns:r="http://schemas.openxmlformats.org/officeDocument/2006/relationships">
   <p:cSld>
     <p:spTree>
       <p:nvGrpSpPr>
@@ -11140,14 +10618,7 @@
         <p:cNvGrpSpPr/>
         <p:nvPr/>
       </p:nvGrpSpPr>
-      <p:grpSpPr>
-        <a:xfrm>
-          <a:off x="0" y="0"/>
-          <a:ext cx="0" cy="0"/>
-          <a:chOff x="0" y="0"/>
-          <a:chExt cx="0" cy="0"/>
-        </a:xfrm>
-      </p:grpSpPr>
+      <p:grpSpPr/>
       <p:sp>
         <p:nvSpPr>
           <p:cNvPr id="2" name="TextBox 1"/>
@@ -11304,12 +10775,14 @@
                 <a:spcPts val="800"/>
               </a:spcAft>
             </a:pPr>
-            <a:endParaRPr sz="1800">
-              <a:solidFill>
-                <a:srgbClr val="212121"/>
-              </a:solidFill>
-              <a:latin typeface="Courier New"/>
-            </a:endParaRPr>
+            <a:r>
+              <a:rPr sz="2200">
+                <a:solidFill>
+                  <a:srgbClr val="212121"/>
+                </a:solidFill>
+              </a:rPr>
+              <a:t/>
+            </a:r>
           </a:p>
           <a:p>
             <a:pPr>
@@ -11352,7 +10825,7 @@
 </file>
 
 <file path=ppt/slides/slide41.xml><?xml version="1.0" encoding="utf-8"?>
-<p:sld xmlns:a="http://schemas.openxmlformats.org/drawingml/2006/main" xmlns:r="http://schemas.openxmlformats.org/officeDocument/2006/relationships" xmlns:p="http://schemas.openxmlformats.org/presentationml/2006/main">
+<p:sld xmlns:a="http://schemas.openxmlformats.org/drawingml/2006/main" xmlns:p="http://schemas.openxmlformats.org/presentationml/2006/main" xmlns:r="http://schemas.openxmlformats.org/officeDocument/2006/relationships">
   <p:cSld>
     <p:spTree>
       <p:nvGrpSpPr>
@@ -11360,14 +10833,7 @@
         <p:cNvGrpSpPr/>
         <p:nvPr/>
       </p:nvGrpSpPr>
-      <p:grpSpPr>
-        <a:xfrm>
-          <a:off x="0" y="0"/>
-          <a:ext cx="0" cy="0"/>
-          <a:chOff x="0" y="0"/>
-          <a:chExt cx="0" cy="0"/>
-        </a:xfrm>
-      </p:grpSpPr>
+      <p:grpSpPr/>
       <p:sp>
         <p:nvSpPr>
           <p:cNvPr id="2" name="TextBox 1"/>
@@ -11524,12 +10990,15 @@
                 <a:spcPts val="0"/>
               </a:spcAft>
             </a:pPr>
-            <a:endParaRPr sz="1800">
-              <a:solidFill>
-                <a:srgbClr val="212121"/>
-              </a:solidFill>
-              <a:latin typeface="Courier New"/>
-            </a:endParaRPr>
+            <a:r>
+              <a:rPr sz="1800">
+                <a:solidFill>
+                  <a:srgbClr val="212121"/>
+                </a:solidFill>
+                <a:latin typeface="Courier New"/>
+              </a:rPr>
+              <a:t/>
+            </a:r>
           </a:p>
           <a:p>
             <a:pPr>
@@ -11553,12 +11022,14 @@
                 <a:spcPts val="800"/>
               </a:spcAft>
             </a:pPr>
-            <a:endParaRPr sz="1800">
-              <a:solidFill>
-                <a:srgbClr val="212121"/>
-              </a:solidFill>
-              <a:latin typeface="Courier New"/>
-            </a:endParaRPr>
+            <a:r>
+              <a:rPr sz="2200">
+                <a:solidFill>
+                  <a:srgbClr val="212121"/>
+                </a:solidFill>
+              </a:rPr>
+              <a:t/>
+            </a:r>
           </a:p>
           <a:p>
             <a:pPr>
@@ -11601,7 +11072,7 @@
 </file>
 
 <file path=ppt/slides/slide42.xml><?xml version="1.0" encoding="utf-8"?>
-<p:sld xmlns:a="http://schemas.openxmlformats.org/drawingml/2006/main" xmlns:r="http://schemas.openxmlformats.org/officeDocument/2006/relationships" xmlns:p="http://schemas.openxmlformats.org/presentationml/2006/main">
+<p:sld xmlns:a="http://schemas.openxmlformats.org/drawingml/2006/main" xmlns:p="http://schemas.openxmlformats.org/presentationml/2006/main" xmlns:r="http://schemas.openxmlformats.org/officeDocument/2006/relationships">
   <p:cSld>
     <p:spTree>
       <p:nvGrpSpPr>
@@ -11609,14 +11080,7 @@
         <p:cNvGrpSpPr/>
         <p:nvPr/>
       </p:nvGrpSpPr>
-      <p:grpSpPr>
-        <a:xfrm>
-          <a:off x="0" y="0"/>
-          <a:ext cx="0" cy="0"/>
-          <a:chOff x="0" y="0"/>
-          <a:chExt cx="0" cy="0"/>
-        </a:xfrm>
-      </p:grpSpPr>
+      <p:grpSpPr/>
       <p:sp>
         <p:nvSpPr>
           <p:cNvPr id="2" name="TextBox 1"/>
@@ -11725,12 +11189,14 @@
                 <a:spcPts val="800"/>
               </a:spcAft>
             </a:pPr>
-            <a:endParaRPr sz="1800">
-              <a:solidFill>
-                <a:srgbClr val="212121"/>
-              </a:solidFill>
-              <a:latin typeface="Courier New"/>
-            </a:endParaRPr>
+            <a:r>
+              <a:rPr sz="2200">
+                <a:solidFill>
+                  <a:srgbClr val="212121"/>
+                </a:solidFill>
+              </a:rPr>
+              <a:t/>
+            </a:r>
           </a:p>
           <a:p>
             <a:pPr>
@@ -11773,7 +11239,7 @@
 </file>
 
 <file path=ppt/slides/slide43.xml><?xml version="1.0" encoding="utf-8"?>
-<p:sld xmlns:a="http://schemas.openxmlformats.org/drawingml/2006/main" xmlns:r="http://schemas.openxmlformats.org/officeDocument/2006/relationships" xmlns:p="http://schemas.openxmlformats.org/presentationml/2006/main">
+<p:sld xmlns:a="http://schemas.openxmlformats.org/drawingml/2006/main" xmlns:p="http://schemas.openxmlformats.org/presentationml/2006/main" xmlns:r="http://schemas.openxmlformats.org/officeDocument/2006/relationships">
   <p:cSld>
     <p:spTree>
       <p:nvGrpSpPr>
@@ -11781,14 +11247,7 @@
         <p:cNvGrpSpPr/>
         <p:nvPr/>
       </p:nvGrpSpPr>
-      <p:grpSpPr>
-        <a:xfrm>
-          <a:off x="0" y="0"/>
-          <a:ext cx="0" cy="0"/>
-          <a:chOff x="0" y="0"/>
-          <a:chExt cx="0" cy="0"/>
-        </a:xfrm>
-      </p:grpSpPr>
+      <p:grpSpPr/>
       <p:sp>
         <p:nvSpPr>
           <p:cNvPr id="2" name="TextBox 1"/>
@@ -11894,11 +11353,14 @@
                 <a:spcPts val="800"/>
               </a:spcAft>
             </a:pPr>
-            <a:endParaRPr sz="2400">
-              <a:solidFill>
-                <a:srgbClr val="212121"/>
-              </a:solidFill>
-            </a:endParaRPr>
+            <a:r>
+              <a:rPr sz="2400">
+                <a:solidFill>
+                  <a:srgbClr val="212121"/>
+                </a:solidFill>
+              </a:rPr>
+              <a:t/>
+            </a:r>
           </a:p>
           <a:p>
             <a:pPr>
@@ -11926,7 +11388,7 @@
 </file>
 
 <file path=ppt/slides/slide44.xml><?xml version="1.0" encoding="utf-8"?>
-<p:sld xmlns:a="http://schemas.openxmlformats.org/drawingml/2006/main" xmlns:r="http://schemas.openxmlformats.org/officeDocument/2006/relationships" xmlns:p="http://schemas.openxmlformats.org/presentationml/2006/main">
+<p:sld xmlns:a="http://schemas.openxmlformats.org/drawingml/2006/main" xmlns:p="http://schemas.openxmlformats.org/presentationml/2006/main" xmlns:r="http://schemas.openxmlformats.org/officeDocument/2006/relationships">
   <p:cSld>
     <p:spTree>
       <p:nvGrpSpPr>
@@ -11934,14 +11396,7 @@
         <p:cNvGrpSpPr/>
         <p:nvPr/>
       </p:nvGrpSpPr>
-      <p:grpSpPr>
-        <a:xfrm>
-          <a:off x="0" y="0"/>
-          <a:ext cx="0" cy="0"/>
-          <a:chOff x="0" y="0"/>
-          <a:chExt cx="0" cy="0"/>
-        </a:xfrm>
-      </p:grpSpPr>
+      <p:grpSpPr/>
       <p:sp>
         <p:nvSpPr>
           <p:cNvPr id="2" name="TextBox 1"/>
@@ -12034,25 +11489,27 @@
                 <a:spcPts val="800"/>
               </a:spcAft>
             </a:pPr>
-            <a:endParaRPr sz="2200">
-              <a:solidFill>
-                <a:srgbClr val="212121"/>
-              </a:solidFill>
-              <a:latin typeface="Courier New"/>
-            </a:endParaRPr>
-          </a:p>
-          <a:p>
-            <a:pPr>
-              <a:spcAft>
-                <a:spcPts val="800"/>
-              </a:spcAft>
-            </a:pPr>
             <a:r>
               <a:rPr sz="2600">
                 <a:solidFill>
                   <a:srgbClr val="212121"/>
                 </a:solidFill>
               </a:rPr>
+              <a:t/>
+            </a:r>
+          </a:p>
+          <a:p>
+            <a:pPr>
+              <a:spcAft>
+                <a:spcPts val="800"/>
+              </a:spcAft>
+            </a:pPr>
+            <a:r>
+              <a:rPr sz="2600">
+                <a:solidFill>
+                  <a:srgbClr val="212121"/>
+                </a:solidFill>
+              </a:rPr>
               <a:t>FAILED or SUCCESSFUL?</a:t>
             </a:r>
           </a:p>
@@ -12062,11 +11519,14 @@
                 <a:spcPts val="800"/>
               </a:spcAft>
             </a:pPr>
-            <a:endParaRPr sz="2600">
-              <a:solidFill>
-                <a:srgbClr val="212121"/>
-              </a:solidFill>
-            </a:endParaRPr>
+            <a:r>
+              <a:rPr sz="2600">
+                <a:solidFill>
+                  <a:srgbClr val="212121"/>
+                </a:solidFill>
+              </a:rPr>
+              <a:t/>
+            </a:r>
           </a:p>
           <a:p>
             <a:pPr>
@@ -12109,7 +11569,7 @@
 </file>
 
 <file path=ppt/slides/slide45.xml><?xml version="1.0" encoding="utf-8"?>
-<p:sld xmlns:a="http://schemas.openxmlformats.org/drawingml/2006/main" xmlns:r="http://schemas.openxmlformats.org/officeDocument/2006/relationships" xmlns:p="http://schemas.openxmlformats.org/presentationml/2006/main">
+<p:sld xmlns:a="http://schemas.openxmlformats.org/drawingml/2006/main" xmlns:p="http://schemas.openxmlformats.org/presentationml/2006/main" xmlns:r="http://schemas.openxmlformats.org/officeDocument/2006/relationships">
   <p:cSld>
     <p:spTree>
       <p:nvGrpSpPr>
@@ -12117,14 +11577,7 @@
         <p:cNvGrpSpPr/>
         <p:nvPr/>
       </p:nvGrpSpPr>
-      <p:grpSpPr>
-        <a:xfrm>
-          <a:off x="0" y="0"/>
-          <a:ext cx="0" cy="0"/>
-          <a:chOff x="0" y="0"/>
-          <a:chExt cx="0" cy="0"/>
-        </a:xfrm>
-      </p:grpSpPr>
+      <p:grpSpPr/>
       <p:sp>
         <p:nvSpPr>
           <p:cNvPr id="2" name="TextBox 1"/>
@@ -12265,7 +11718,7 @@
 </file>
 
 <file path=ppt/slides/slide46.xml><?xml version="1.0" encoding="utf-8"?>
-<p:sld xmlns:a="http://schemas.openxmlformats.org/drawingml/2006/main" xmlns:r="http://schemas.openxmlformats.org/officeDocument/2006/relationships" xmlns:p="http://schemas.openxmlformats.org/presentationml/2006/main">
+<p:sld xmlns:a="http://schemas.openxmlformats.org/drawingml/2006/main" xmlns:p="http://schemas.openxmlformats.org/presentationml/2006/main" xmlns:r="http://schemas.openxmlformats.org/officeDocument/2006/relationships">
   <p:cSld>
     <p:spTree>
       <p:nvGrpSpPr>
@@ -12273,14 +11726,7 @@
         <p:cNvGrpSpPr/>
         <p:nvPr/>
       </p:nvGrpSpPr>
-      <p:grpSpPr>
-        <a:xfrm>
-          <a:off x="0" y="0"/>
-          <a:ext cx="0" cy="0"/>
-          <a:chOff x="0" y="0"/>
-          <a:chExt cx="0" cy="0"/>
-        </a:xfrm>
-      </p:grpSpPr>
+      <p:grpSpPr/>
       <p:sp>
         <p:nvSpPr>
           <p:cNvPr id="2" name="TextBox 1"/>
@@ -12391,7 +11837,7 @@
 </file>
 
 <file path=ppt/slides/slide47.xml><?xml version="1.0" encoding="utf-8"?>
-<p:sld xmlns:a="http://schemas.openxmlformats.org/drawingml/2006/main" xmlns:r="http://schemas.openxmlformats.org/officeDocument/2006/relationships" xmlns:p="http://schemas.openxmlformats.org/presentationml/2006/main">
+<p:sld xmlns:a="http://schemas.openxmlformats.org/drawingml/2006/main" xmlns:p="http://schemas.openxmlformats.org/presentationml/2006/main" xmlns:r="http://schemas.openxmlformats.org/officeDocument/2006/relationships">
   <p:cSld>
     <p:spTree>
       <p:nvGrpSpPr>
@@ -12399,14 +11845,7 @@
         <p:cNvGrpSpPr/>
         <p:nvPr/>
       </p:nvGrpSpPr>
-      <p:grpSpPr>
-        <a:xfrm>
-          <a:off x="0" y="0"/>
-          <a:ext cx="0" cy="0"/>
-          <a:chOff x="0" y="0"/>
-          <a:chExt cx="0" cy="0"/>
-        </a:xfrm>
-      </p:grpSpPr>
+      <p:grpSpPr/>
       <p:sp>
         <p:nvSpPr>
           <p:cNvPr id="2" name="TextBox 1"/>
@@ -12532,7 +11971,7 @@
 </file>
 
 <file path=ppt/slides/slide48.xml><?xml version="1.0" encoding="utf-8"?>
-<p:sld xmlns:a="http://schemas.openxmlformats.org/drawingml/2006/main" xmlns:r="http://schemas.openxmlformats.org/officeDocument/2006/relationships" xmlns:p="http://schemas.openxmlformats.org/presentationml/2006/main">
+<p:sld xmlns:a="http://schemas.openxmlformats.org/drawingml/2006/main" xmlns:p="http://schemas.openxmlformats.org/presentationml/2006/main" xmlns:r="http://schemas.openxmlformats.org/officeDocument/2006/relationships">
   <p:cSld>
     <p:spTree>
       <p:nvGrpSpPr>
@@ -12540,14 +11979,7 @@
         <p:cNvGrpSpPr/>
         <p:nvPr/>
       </p:nvGrpSpPr>
-      <p:grpSpPr>
-        <a:xfrm>
-          <a:off x="0" y="0"/>
-          <a:ext cx="0" cy="0"/>
-          <a:chOff x="0" y="0"/>
-          <a:chExt cx="0" cy="0"/>
-        </a:xfrm>
-      </p:grpSpPr>
+      <p:grpSpPr/>
       <p:sp>
         <p:nvSpPr>
           <p:cNvPr id="2" name="TextBox 1"/>
@@ -12590,7 +12022,7 @@
         <p:spPr>
           <a:xfrm>
             <a:off x="731520" y="1463040"/>
-            <a:ext cx="10789920" cy="4042132"/>
+            <a:ext cx="10789920" cy="5120640"/>
           </a:xfrm>
           <a:prstGeom prst="rect">
             <a:avLst/>
@@ -12609,41 +12041,28 @@
               </a:spcAft>
             </a:pPr>
             <a:r>
-              <a:rPr sz="2000" dirty="0">
-                <a:solidFill>
-                  <a:srgbClr val="212121"/>
-                </a:solidFill>
-              </a:rPr>
-              <a:t>The BMC pipeline you just saw hunts a counterexample (or proves up to a bound). Abstract interpretation proves P the other way</a:t>
-            </a:r>
-            <a:r>
-              <a:rPr lang="en-GB" sz="2000" dirty="0">
-                <a:solidFill>
-                  <a:srgbClr val="212121"/>
-                </a:solidFill>
-              </a:rPr>
-              <a:t>;</a:t>
-            </a:r>
-            <a:r>
-              <a:rPr sz="2000" dirty="0">
-                <a:solidFill>
-                  <a:srgbClr val="212121"/>
-                </a:solidFill>
-              </a:rPr>
-              <a:t> over-approximate every run at once: no inputs, no paths, no bound.</a:t>
-            </a:r>
-          </a:p>
-          <a:p>
-            <a:pPr>
-              <a:spcAft>
-                <a:spcPts val="800"/>
-              </a:spcAft>
-            </a:pPr>
-            <a:endParaRPr sz="2000" dirty="0">
-              <a:solidFill>
-                <a:srgbClr val="212121"/>
-              </a:solidFill>
-            </a:endParaRPr>
+              <a:rPr sz="2000">
+                <a:solidFill>
+                  <a:srgbClr val="212121"/>
+                </a:solidFill>
+              </a:rPr>
+              <a:t>The BMC pipeline you just saw hunts a counterexample (or proves up to a bound). Abstract interpretation proves P the other way — over-approximate every run at once: no inputs, no paths, no bound.</a:t>
+            </a:r>
+          </a:p>
+          <a:p>
+            <a:pPr>
+              <a:spcAft>
+                <a:spcPts val="800"/>
+              </a:spcAft>
+            </a:pPr>
+            <a:r>
+              <a:rPr sz="2000">
+                <a:solidFill>
+                  <a:srgbClr val="212121"/>
+                </a:solidFill>
+              </a:rPr>
+              <a:t/>
+            </a:r>
           </a:p>
           <a:p>
             <a:pPr>
@@ -12652,7 +12071,7 @@
               </a:spcAft>
             </a:pPr>
             <a:r>
-              <a:rPr sz="1600" dirty="0">
+              <a:rPr sz="1600">
                 <a:solidFill>
                   <a:srgbClr val="212121"/>
                 </a:solidFill>
@@ -12668,7 +12087,7 @@
               </a:spcAft>
             </a:pPr>
             <a:r>
-              <a:rPr sz="1600" dirty="0">
+              <a:rPr sz="1600">
                 <a:solidFill>
                   <a:srgbClr val="212121"/>
                 </a:solidFill>
@@ -12684,7 +12103,7 @@
               </a:spcAft>
             </a:pPr>
             <a:r>
-              <a:rPr sz="1600" dirty="0">
+              <a:rPr sz="1600">
                 <a:solidFill>
                   <a:srgbClr val="212121"/>
                 </a:solidFill>
@@ -12700,7 +12119,7 @@
               </a:spcAft>
             </a:pPr>
             <a:r>
-              <a:rPr sz="1600" dirty="0">
+              <a:rPr sz="1600">
                 <a:solidFill>
                   <a:srgbClr val="212121"/>
                 </a:solidFill>
@@ -12716,7 +12135,7 @@
               </a:spcAft>
             </a:pPr>
             <a:r>
-              <a:rPr sz="1600" dirty="0">
+              <a:rPr sz="1600">
                 <a:solidFill>
                   <a:srgbClr val="212121"/>
                 </a:solidFill>
@@ -12731,12 +12150,14 @@
                 <a:spcPts val="800"/>
               </a:spcAft>
             </a:pPr>
-            <a:endParaRPr sz="1600" dirty="0">
-              <a:solidFill>
-                <a:srgbClr val="212121"/>
-              </a:solidFill>
-              <a:latin typeface="Courier New"/>
-            </a:endParaRPr>
+            <a:r>
+              <a:rPr sz="2000">
+                <a:solidFill>
+                  <a:srgbClr val="212121"/>
+                </a:solidFill>
+              </a:rPr>
+              <a:t/>
+            </a:r>
           </a:p>
           <a:p>
             <a:pPr lvl="1">
@@ -12745,28 +12166,12 @@
               </a:spcAft>
             </a:pPr>
             <a:r>
-              <a:rPr sz="1800" dirty="0">
-                <a:solidFill>
-                  <a:srgbClr val="212121"/>
-                </a:solidFill>
-              </a:rPr>
-              <a:t>Compute the tightest fact the loop can't escape (a fixpoint); if it implies P, P holds for every run</a:t>
-            </a:r>
-            <a:r>
-              <a:rPr lang="en-GB" sz="1800" dirty="0">
-                <a:solidFill>
-                  <a:srgbClr val="212121"/>
-                </a:solidFill>
-              </a:rPr>
-              <a:t>;</a:t>
-            </a:r>
-            <a:r>
-              <a:rPr sz="1800" dirty="0">
-                <a:solidFill>
-                  <a:srgbClr val="212121"/>
-                </a:solidFill>
-              </a:rPr>
-              <a:t> no unrolling.</a:t>
+              <a:rPr sz="1800">
+                <a:solidFill>
+                  <a:srgbClr val="212121"/>
+                </a:solidFill>
+              </a:rPr>
+              <a:t>Compute the tightest fact the loop can't escape (a fixpoint); if it implies P, P holds for every run — no unrolling.</a:t>
             </a:r>
           </a:p>
           <a:p>
@@ -12776,28 +12181,50 @@
               </a:spcAft>
             </a:pPr>
             <a:r>
-              <a:rPr sz="1800" dirty="0">
-                <a:solidFill>
-                  <a:srgbClr val="212121"/>
-                </a:solidFill>
-              </a:rPr>
-              <a:t>Sound, not complete: too coarse → a false alarm. (Astrée proved the A340/A380 fly-by-wire this way</a:t>
-            </a:r>
-            <a:r>
-              <a:rPr lang="en-GB" sz="1800" dirty="0">
-                <a:solidFill>
-                  <a:srgbClr val="212121"/>
-                </a:solidFill>
-              </a:rPr>
-              <a:t>;</a:t>
-            </a:r>
-            <a:r>
-              <a:rPr sz="1800" dirty="0">
-                <a:solidFill>
-                  <a:srgbClr val="212121"/>
-                </a:solidFill>
-              </a:rPr>
-              <a:t> next slide.)</a:t>
+              <a:rPr sz="1800">
+                <a:solidFill>
+                  <a:srgbClr val="212121"/>
+                </a:solidFill>
+              </a:rPr>
+              <a:t>Sound, not complete: too coarse → a false alarm. (Astrée proved the A340/A380 fly-by-wire this way — next slide.)</a:t>
+            </a:r>
+          </a:p>
+        </p:txBody>
+      </p:sp>
+      <p:sp>
+        <p:nvSpPr>
+          <p:cNvPr id="4" name="TextBox 3"/>
+          <p:cNvSpPr txBox="1"/>
+          <p:nvPr/>
+        </p:nvSpPr>
+        <p:spPr>
+          <a:xfrm>
+            <a:off x="731520" y="6400800"/>
+            <a:ext cx="10789920" cy="182880"/>
+          </a:xfrm>
+          <a:prstGeom prst="rect">
+            <a:avLst/>
+          </a:prstGeom>
+          <a:noFill/>
+        </p:spPr>
+        <p:txBody>
+          <a:bodyPr wrap="square">
+            <a:spAutoFit/>
+          </a:bodyPr>
+          <a:lstStyle/>
+          <a:p>
+            <a:pPr>
+              <a:spcAft>
+                <a:spcPts val="800"/>
+              </a:spcAft>
+            </a:pPr>
+            <a:r>
+              <a:rPr sz="1400">
+                <a:solidFill>
+                  <a:srgbClr val="212121"/>
+                </a:solidFill>
+              </a:rPr>
+              <a:t>Sound over-approximation: Cousot &amp; Cousot, POPL 1977 (doi:10.1145/512950.512973)</a:t>
             </a:r>
           </a:p>
         </p:txBody>
@@ -12811,7 +12238,7 @@
 </file>
 
 <file path=ppt/slides/slide49.xml><?xml version="1.0" encoding="utf-8"?>
-<p:sld xmlns:a="http://schemas.openxmlformats.org/drawingml/2006/main" xmlns:r="http://schemas.openxmlformats.org/officeDocument/2006/relationships" xmlns:p="http://schemas.openxmlformats.org/presentationml/2006/main">
+<p:sld xmlns:a="http://schemas.openxmlformats.org/drawingml/2006/main" xmlns:p="http://schemas.openxmlformats.org/presentationml/2006/main" xmlns:r="http://schemas.openxmlformats.org/officeDocument/2006/relationships">
   <p:cSld>
     <p:spTree>
       <p:nvGrpSpPr>
@@ -12819,14 +12246,7 @@
         <p:cNvGrpSpPr/>
         <p:nvPr/>
       </p:nvGrpSpPr>
-      <p:grpSpPr>
-        <a:xfrm>
-          <a:off x="0" y="0"/>
-          <a:ext cx="0" cy="0"/>
-          <a:chOff x="0" y="0"/>
-          <a:chExt cx="0" cy="0"/>
-        </a:xfrm>
-      </p:grpSpPr>
+      <p:grpSpPr/>
       <p:sp>
         <p:nvSpPr>
           <p:cNvPr id="2" name="TextBox 1"/>
@@ -12869,7 +12289,7 @@
         <p:spPr>
           <a:xfrm>
             <a:off x="731520" y="1463040"/>
-            <a:ext cx="10789920" cy="4093428"/>
+            <a:ext cx="10789920" cy="5120640"/>
           </a:xfrm>
           <a:prstGeom prst="rect">
             <a:avLst/>
@@ -12888,57 +12308,28 @@
               </a:spcAft>
             </a:pPr>
             <a:r>
-              <a:rPr sz="1800" dirty="0">
-                <a:solidFill>
-                  <a:srgbClr val="212121"/>
-                </a:solidFill>
-              </a:rPr>
-              <a:t>Abstract domain — the facts you track instead of exact values. Intervals x ∈ [a, b]; richer ones add relationships (octagons ±x ±y ≤ c, </a:t>
-            </a:r>
-            <a:r>
-              <a:rPr sz="1800" dirty="0" err="1">
-                <a:solidFill>
-                  <a:srgbClr val="212121"/>
-                </a:solidFill>
-              </a:rPr>
-              <a:t>polyhedra</a:t>
-            </a:r>
-            <a:r>
-              <a:rPr sz="1800" dirty="0">
-                <a:solidFill>
-                  <a:srgbClr val="212121"/>
-                </a:solidFill>
-              </a:rPr>
-              <a:t>). At a branch you join the two sides</a:t>
-            </a:r>
-            <a:r>
-              <a:rPr lang="en-GB" sz="1800" dirty="0">
-                <a:solidFill>
-                  <a:srgbClr val="212121"/>
-                </a:solidFill>
-              </a:rPr>
-              <a:t>;</a:t>
-            </a:r>
-            <a:r>
-              <a:rPr sz="1800" dirty="0">
-                <a:solidFill>
-                  <a:srgbClr val="212121"/>
-                </a:solidFill>
-              </a:rPr>
-              <a:t> richer domain → more precise, but more costly.</a:t>
-            </a:r>
-          </a:p>
-          <a:p>
-            <a:pPr>
-              <a:spcAft>
-                <a:spcPts val="800"/>
-              </a:spcAft>
-            </a:pPr>
-            <a:endParaRPr sz="1800" dirty="0">
-              <a:solidFill>
-                <a:srgbClr val="212121"/>
-              </a:solidFill>
-            </a:endParaRPr>
+              <a:rPr sz="1800">
+                <a:solidFill>
+                  <a:srgbClr val="212121"/>
+                </a:solidFill>
+              </a:rPr>
+              <a:t>Abstract domain — the facts you track instead of exact values. Intervals x ∈ [a, b]; richer ones add relationships (octagons ±x ±y ≤ c, polyhedra). At a branch you join the two sides — richer domain → more precise, but more costly.</a:t>
+            </a:r>
+          </a:p>
+          <a:p>
+            <a:pPr>
+              <a:spcAft>
+                <a:spcPts val="800"/>
+              </a:spcAft>
+            </a:pPr>
+            <a:r>
+              <a:rPr sz="2000">
+                <a:solidFill>
+                  <a:srgbClr val="212121"/>
+                </a:solidFill>
+              </a:rPr>
+              <a:t/>
+            </a:r>
           </a:p>
           <a:p>
             <a:pPr lvl="1">
@@ -12947,7 +12338,7 @@
               </a:spcAft>
             </a:pPr>
             <a:r>
-              <a:rPr sz="1800" dirty="0">
+              <a:rPr sz="1800">
                 <a:solidFill>
                   <a:srgbClr val="212121"/>
                 </a:solidFill>
@@ -12961,11 +12352,14 @@
                 <a:spcPts val="800"/>
               </a:spcAft>
             </a:pPr>
-            <a:endParaRPr sz="1800" dirty="0">
-              <a:solidFill>
-                <a:srgbClr val="212121"/>
-              </a:solidFill>
-            </a:endParaRPr>
+            <a:r>
+              <a:rPr sz="2000">
+                <a:solidFill>
+                  <a:srgbClr val="212121"/>
+                </a:solidFill>
+              </a:rPr>
+              <a:t/>
+            </a:r>
           </a:p>
           <a:p>
             <a:pPr lvl="1">
@@ -12974,71 +12368,42 @@
               </a:spcAft>
             </a:pPr>
             <a:r>
-              <a:rPr sz="1800" dirty="0">
-                <a:solidFill>
-                  <a:srgbClr val="212121"/>
-                </a:solidFill>
-              </a:rPr>
-              <a:t>Narrowing (</a:t>
-            </a:r>
-            <a:r>
-              <a:rPr sz="1800" dirty="0" err="1">
-                <a:solidFill>
-                  <a:srgbClr val="212121"/>
-                </a:solidFill>
-              </a:rPr>
-              <a:t>Δ</a:t>
-            </a:r>
-            <a:r>
-              <a:rPr sz="1800" dirty="0">
-                <a:solidFill>
-                  <a:srgbClr val="212121"/>
-                </a:solidFill>
-              </a:rPr>
-              <a:t>) — recovers what widening overshot. Re-reading the guard x &lt; 100 pulls [0, +∞) back to [0, 100]: precision restored, still terminating.</a:t>
-            </a:r>
-          </a:p>
-          <a:p>
-            <a:pPr>
-              <a:spcAft>
-                <a:spcPts val="800"/>
-              </a:spcAft>
-            </a:pPr>
-            <a:endParaRPr sz="1800" dirty="0">
-              <a:solidFill>
-                <a:srgbClr val="212121"/>
-              </a:solidFill>
-            </a:endParaRPr>
-          </a:p>
-          <a:p>
-            <a:pPr>
-              <a:spcAft>
-                <a:spcPts val="800"/>
-              </a:spcAft>
-            </a:pPr>
-            <a:r>
-              <a:rPr sz="2000" dirty="0">
-                <a:solidFill>
-                  <a:srgbClr val="212121"/>
-                </a:solidFill>
-              </a:rPr>
-              <a:t>ESBMC ships it too</a:t>
-            </a:r>
-            <a:r>
-              <a:rPr lang="en-GB" sz="2000" dirty="0">
-                <a:solidFill>
-                  <a:srgbClr val="212121"/>
-                </a:solidFill>
-              </a:rPr>
-              <a:t>:</a:t>
-            </a:r>
-            <a:r>
-              <a:rPr sz="2000" dirty="0">
-                <a:solidFill>
-                  <a:srgbClr val="212121"/>
-                </a:solidFill>
-              </a:rPr>
-              <a:t> --interval-analysis — and can supply the invariant k-induction needs (Session 2, Lab 3).</a:t>
+              <a:rPr sz="1800">
+                <a:solidFill>
+                  <a:srgbClr val="212121"/>
+                </a:solidFill>
+              </a:rPr>
+              <a:t>Narrowing (Δ) — recovers what widening overshot. Re-reading the guard x &lt; 100 pulls [0, +∞) back to [0, 100]: precision restored, still terminating.</a:t>
+            </a:r>
+          </a:p>
+          <a:p>
+            <a:pPr>
+              <a:spcAft>
+                <a:spcPts val="800"/>
+              </a:spcAft>
+            </a:pPr>
+            <a:r>
+              <a:rPr sz="2000">
+                <a:solidFill>
+                  <a:srgbClr val="212121"/>
+                </a:solidFill>
+              </a:rPr>
+              <a:t/>
+            </a:r>
+          </a:p>
+          <a:p>
+            <a:pPr>
+              <a:spcAft>
+                <a:spcPts val="800"/>
+              </a:spcAft>
+            </a:pPr>
+            <a:r>
+              <a:rPr sz="2000">
+                <a:solidFill>
+                  <a:srgbClr val="212121"/>
+                </a:solidFill>
+              </a:rPr>
+              <a:t>ESBMC ships it too — --interval-analysis — and can supply the invariant k-induction needs (Session 2, Lab 3).</a:t>
             </a:r>
           </a:p>
         </p:txBody>
@@ -13052,7 +12417,7 @@
 </file>
 
 <file path=ppt/slides/slide5.xml><?xml version="1.0" encoding="utf-8"?>
-<p:sld xmlns:a="http://schemas.openxmlformats.org/drawingml/2006/main" xmlns:r="http://schemas.openxmlformats.org/officeDocument/2006/relationships" xmlns:p="http://schemas.openxmlformats.org/presentationml/2006/main">
+<p:sld xmlns:a="http://schemas.openxmlformats.org/drawingml/2006/main" xmlns:p="http://schemas.openxmlformats.org/presentationml/2006/main" xmlns:r="http://schemas.openxmlformats.org/officeDocument/2006/relationships">
   <p:cSld>
     <p:spTree>
       <p:nvGrpSpPr>
@@ -13060,14 +12425,7 @@
         <p:cNvGrpSpPr/>
         <p:nvPr/>
       </p:nvGrpSpPr>
-      <p:grpSpPr>
-        <a:xfrm>
-          <a:off x="0" y="0"/>
-          <a:ext cx="0" cy="0"/>
-          <a:chOff x="0" y="0"/>
-          <a:chExt cx="0" cy="0"/>
-        </a:xfrm>
-      </p:grpSpPr>
+      <p:grpSpPr/>
       <p:sp>
         <p:nvSpPr>
           <p:cNvPr id="2" name="TextBox 1"/>
@@ -13144,12 +12502,15 @@
                 <a:spcPts val="0"/>
               </a:spcAft>
             </a:pPr>
-            <a:endParaRPr sz="2000">
-              <a:solidFill>
-                <a:srgbClr val="212121"/>
-              </a:solidFill>
-              <a:latin typeface="Courier New"/>
-            </a:endParaRPr>
+            <a:r>
+              <a:rPr sz="2000">
+                <a:solidFill>
+                  <a:srgbClr val="212121"/>
+                </a:solidFill>
+                <a:latin typeface="Courier New"/>
+              </a:rPr>
+              <a:t/>
+            </a:r>
           </a:p>
           <a:p>
             <a:pPr>
@@ -13253,12 +12614,15 @@
                 <a:spcPts val="0"/>
               </a:spcAft>
             </a:pPr>
-            <a:endParaRPr sz="2000">
-              <a:solidFill>
-                <a:srgbClr val="212121"/>
-              </a:solidFill>
-              <a:latin typeface="Courier New"/>
-            </a:endParaRPr>
+            <a:r>
+              <a:rPr sz="2000">
+                <a:solidFill>
+                  <a:srgbClr val="212121"/>
+                </a:solidFill>
+                <a:latin typeface="Courier New"/>
+              </a:rPr>
+              <a:t/>
+            </a:r>
           </a:p>
           <a:p>
             <a:pPr>
@@ -13282,12 +12646,14 @@
                 <a:spcPts val="800"/>
               </a:spcAft>
             </a:pPr>
-            <a:endParaRPr sz="2000">
-              <a:solidFill>
-                <a:srgbClr val="212121"/>
-              </a:solidFill>
-              <a:latin typeface="Courier New"/>
-            </a:endParaRPr>
+            <a:r>
+              <a:rPr sz="2400">
+                <a:solidFill>
+                  <a:srgbClr val="212121"/>
+                </a:solidFill>
+              </a:rPr>
+              <a:t/>
+            </a:r>
           </a:p>
           <a:p>
             <a:pPr>
@@ -13315,7 +12681,7 @@
 </file>
 
 <file path=ppt/slides/slide50.xml><?xml version="1.0" encoding="utf-8"?>
-<p:sld xmlns:a="http://schemas.openxmlformats.org/drawingml/2006/main" xmlns:r="http://schemas.openxmlformats.org/officeDocument/2006/relationships" xmlns:p="http://schemas.openxmlformats.org/presentationml/2006/main">
+<p:sld xmlns:a="http://schemas.openxmlformats.org/drawingml/2006/main" xmlns:p="http://schemas.openxmlformats.org/presentationml/2006/main" xmlns:r="http://schemas.openxmlformats.org/officeDocument/2006/relationships">
   <p:cSld>
     <p:spTree>
       <p:nvGrpSpPr>
@@ -13323,14 +12689,7 @@
         <p:cNvGrpSpPr/>
         <p:nvPr/>
       </p:nvGrpSpPr>
-      <p:grpSpPr>
-        <a:xfrm>
-          <a:off x="0" y="0"/>
-          <a:ext cx="0" cy="0"/>
-          <a:chOff x="0" y="0"/>
-          <a:chExt cx="0" cy="0"/>
-        </a:xfrm>
-      </p:grpSpPr>
+      <p:grpSpPr/>
       <p:sp>
         <p:nvSpPr>
           <p:cNvPr id="2" name="TextBox 1"/>
@@ -13441,7 +12800,7 @@
 </file>
 
 <file path=ppt/slides/slide51.xml><?xml version="1.0" encoding="utf-8"?>
-<p:sld xmlns:a="http://schemas.openxmlformats.org/drawingml/2006/main" xmlns:r="http://schemas.openxmlformats.org/officeDocument/2006/relationships" xmlns:p="http://schemas.openxmlformats.org/presentationml/2006/main">
+<p:sld xmlns:a="http://schemas.openxmlformats.org/drawingml/2006/main" xmlns:p="http://schemas.openxmlformats.org/presentationml/2006/main" xmlns:r="http://schemas.openxmlformats.org/officeDocument/2006/relationships">
   <p:cSld>
     <p:spTree>
       <p:nvGrpSpPr>
@@ -13449,14 +12808,7 @@
         <p:cNvGrpSpPr/>
         <p:nvPr/>
       </p:nvGrpSpPr>
-      <p:grpSpPr>
-        <a:xfrm>
-          <a:off x="0" y="0"/>
-          <a:ext cx="0" cy="0"/>
-          <a:chOff x="0" y="0"/>
-          <a:chExt cx="0" cy="0"/>
-        </a:xfrm>
-      </p:grpSpPr>
+      <p:grpSpPr/>
       <p:sp>
         <p:nvSpPr>
           <p:cNvPr id="2" name="TextBox 1"/>
@@ -13567,7 +12919,7 @@
 </file>
 
 <file path=ppt/slides/slide52.xml><?xml version="1.0" encoding="utf-8"?>
-<p:sld xmlns:a="http://schemas.openxmlformats.org/drawingml/2006/main" xmlns:r="http://schemas.openxmlformats.org/officeDocument/2006/relationships" xmlns:p="http://schemas.openxmlformats.org/presentationml/2006/main">
+<p:sld xmlns:a="http://schemas.openxmlformats.org/drawingml/2006/main" xmlns:p="http://schemas.openxmlformats.org/presentationml/2006/main" xmlns:r="http://schemas.openxmlformats.org/officeDocument/2006/relationships">
   <p:cSld>
     <p:spTree>
       <p:nvGrpSpPr>
@@ -13575,14 +12927,7 @@
         <p:cNvGrpSpPr/>
         <p:nvPr/>
       </p:nvGrpSpPr>
-      <p:grpSpPr>
-        <a:xfrm>
-          <a:off x="0" y="0"/>
-          <a:ext cx="0" cy="0"/>
-          <a:chOff x="0" y="0"/>
-          <a:chExt cx="0" cy="0"/>
-        </a:xfrm>
-      </p:grpSpPr>
+      <p:grpSpPr/>
       <p:sp>
         <p:nvSpPr>
           <p:cNvPr id="2" name="TextBox 1"/>
@@ -13673,24 +13018,27 @@
                 <a:spcPts val="800"/>
               </a:spcAft>
             </a:pPr>
-            <a:endParaRPr sz="2000">
-              <a:solidFill>
-                <a:srgbClr val="212121"/>
-              </a:solidFill>
-            </a:endParaRPr>
-          </a:p>
-          <a:p>
-            <a:pPr>
-              <a:spcAft>
-                <a:spcPts val="800"/>
-              </a:spcAft>
-            </a:pPr>
             <a:r>
               <a:rPr sz="2200">
                 <a:solidFill>
                   <a:srgbClr val="212121"/>
                 </a:solidFill>
               </a:rPr>
+              <a:t/>
+            </a:r>
+          </a:p>
+          <a:p>
+            <a:pPr>
+              <a:spcAft>
+                <a:spcPts val="800"/>
+              </a:spcAft>
+            </a:pPr>
+            <a:r>
+              <a:rPr sz="2200">
+                <a:solidFill>
+                  <a:srgbClr val="212121"/>
+                </a:solidFill>
+              </a:rPr>
               <a:t>irep2 is the typed, reference-counted representation everything lowers to and every backend consumes.</a:t>
             </a:r>
           </a:p>
@@ -13731,12 +13079,14 @@
                 <a:spcPts val="800"/>
               </a:spcAft>
             </a:pPr>
-            <a:endParaRPr sz="1800">
-              <a:solidFill>
-                <a:srgbClr val="212121"/>
-              </a:solidFill>
-              <a:latin typeface="Courier New"/>
-            </a:endParaRPr>
+            <a:r>
+              <a:rPr sz="2200">
+                <a:solidFill>
+                  <a:srgbClr val="212121"/>
+                </a:solidFill>
+              </a:rPr>
+              <a:t/>
+            </a:r>
           </a:p>
           <a:p>
             <a:pPr>
@@ -13803,7 +13153,7 @@
 </file>
 
 <file path=ppt/slides/slide53.xml><?xml version="1.0" encoding="utf-8"?>
-<p:sld xmlns:a="http://schemas.openxmlformats.org/drawingml/2006/main" xmlns:r="http://schemas.openxmlformats.org/officeDocument/2006/relationships" xmlns:p="http://schemas.openxmlformats.org/presentationml/2006/main">
+<p:sld xmlns:a="http://schemas.openxmlformats.org/drawingml/2006/main" xmlns:p="http://schemas.openxmlformats.org/presentationml/2006/main" xmlns:r="http://schemas.openxmlformats.org/officeDocument/2006/relationships">
   <p:cSld>
     <p:spTree>
       <p:nvGrpSpPr>
@@ -13811,14 +13161,7 @@
         <p:cNvGrpSpPr/>
         <p:nvPr/>
       </p:nvGrpSpPr>
-      <p:grpSpPr>
-        <a:xfrm>
-          <a:off x="0" y="0"/>
-          <a:ext cx="0" cy="0"/>
-          <a:chOff x="0" y="0"/>
-          <a:chExt cx="0" cy="0"/>
-        </a:xfrm>
-      </p:grpSpPr>
+      <p:grpSpPr/>
       <p:sp>
         <p:nvSpPr>
           <p:cNvPr id="2" name="TextBox 1"/>
@@ -13959,7 +13302,7 @@
 </file>
 
 <file path=ppt/slides/slide54.xml><?xml version="1.0" encoding="utf-8"?>
-<p:sld xmlns:a="http://schemas.openxmlformats.org/drawingml/2006/main" xmlns:r="http://schemas.openxmlformats.org/officeDocument/2006/relationships" xmlns:p="http://schemas.openxmlformats.org/presentationml/2006/main">
+<p:sld xmlns:a="http://schemas.openxmlformats.org/drawingml/2006/main" xmlns:p="http://schemas.openxmlformats.org/presentationml/2006/main" xmlns:r="http://schemas.openxmlformats.org/officeDocument/2006/relationships">
   <p:cSld>
     <p:spTree>
       <p:nvGrpSpPr>
@@ -13967,14 +13310,7 @@
         <p:cNvGrpSpPr/>
         <p:nvPr/>
       </p:nvGrpSpPr>
-      <p:grpSpPr>
-        <a:xfrm>
-          <a:off x="0" y="0"/>
-          <a:ext cx="0" cy="0"/>
-          <a:chOff x="0" y="0"/>
-          <a:chExt cx="0" cy="0"/>
-        </a:xfrm>
-      </p:grpSpPr>
+      <p:grpSpPr/>
       <p:sp>
         <p:nvSpPr>
           <p:cNvPr id="2" name="TextBox 1"/>
@@ -14134,7 +13470,7 @@
 </file>
 
 <file path=ppt/slides/slide6.xml><?xml version="1.0" encoding="utf-8"?>
-<p:sld xmlns:a="http://schemas.openxmlformats.org/drawingml/2006/main" xmlns:r="http://schemas.openxmlformats.org/officeDocument/2006/relationships" xmlns:p="http://schemas.openxmlformats.org/presentationml/2006/main">
+<p:sld xmlns:a="http://schemas.openxmlformats.org/drawingml/2006/main" xmlns:p="http://schemas.openxmlformats.org/presentationml/2006/main" xmlns:r="http://schemas.openxmlformats.org/officeDocument/2006/relationships">
   <p:cSld>
     <p:spTree>
       <p:nvGrpSpPr>
@@ -14142,14 +13478,7 @@
         <p:cNvGrpSpPr/>
         <p:nvPr/>
       </p:nvGrpSpPr>
-      <p:grpSpPr>
-        <a:xfrm>
-          <a:off x="0" y="0"/>
-          <a:ext cx="0" cy="0"/>
-          <a:chOff x="0" y="0"/>
-          <a:chExt cx="0" cy="0"/>
-        </a:xfrm>
-      </p:grpSpPr>
+      <p:grpSpPr/>
       <p:sp>
         <p:nvSpPr>
           <p:cNvPr id="2" name="TextBox 1"/>
@@ -14193,7 +13522,7 @@
         </p:nvGraphicFramePr>
         <p:xfrm>
           <a:off x="731520" y="1463040"/>
-          <a:ext cx="10698480" cy="1584960"/>
+          <a:ext cx="10698480" cy="1463040"/>
         </p:xfrm>
         <a:graphic>
           <a:graphicData uri="http://schemas.openxmlformats.org/drawingml/2006/table">
@@ -14202,20 +13531,8 @@
                 <a:tableStyleId>{5C22544A-7EE6-4342-B048-85BDC9FD1C3A}</a:tableStyleId>
               </a:tblPr>
               <a:tblGrid>
-                <a:gridCol w="3840480">
-                  <a:extLst>
-                    <a:ext uri="{9D8B030D-6E8A-4147-A177-3AD203B41FA5}">
-                      <a16:colId xmlns:a16="http://schemas.microsoft.com/office/drawing/2014/main" val="20000"/>
-                    </a:ext>
-                  </a:extLst>
-                </a:gridCol>
-                <a:gridCol w="6858000">
-                  <a:extLst>
-                    <a:ext uri="{9D8B030D-6E8A-4147-A177-3AD203B41FA5}">
-                      <a16:colId xmlns:a16="http://schemas.microsoft.com/office/drawing/2014/main" val="20001"/>
-                    </a:ext>
-                  </a:extLst>
-                </a:gridCol>
+                <a:gridCol w="3840480"/>
+                <a:gridCol w="6858000"/>
               </a:tblGrid>
               <a:tr h="365760">
                 <a:tc>
@@ -14235,17 +13552,10 @@
                   <a:txBody>
                     <a:bodyPr/>
                     <a:lstStyle/>
-                    <a:p>
-                      <a:endParaRPr/>
-                    </a:p>
+                    <a:p/>
                   </a:txBody>
                   <a:tcPr/>
                 </a:tc>
-                <a:extLst>
-                  <a:ext uri="{0D108BD9-81ED-4DB2-BD59-A6C34878D82A}">
-                    <a16:rowId xmlns:a16="http://schemas.microsoft.com/office/drawing/2014/main" val="10000"/>
-                  </a:ext>
-                </a:extLst>
               </a:tr>
               <a:tr h="365760">
                 <a:tc>
@@ -14274,11 +13584,6 @@
                   </a:txBody>
                   <a:tcPr/>
                 </a:tc>
-                <a:extLst>
-                  <a:ext uri="{0D108BD9-81ED-4DB2-BD59-A6C34878D82A}">
-                    <a16:rowId xmlns:a16="http://schemas.microsoft.com/office/drawing/2014/main" val="10001"/>
-                  </a:ext>
-                </a:extLst>
               </a:tr>
               <a:tr h="365760">
                 <a:tc>
@@ -14307,11 +13612,6 @@
                   </a:txBody>
                   <a:tcPr/>
                 </a:tc>
-                <a:extLst>
-                  <a:ext uri="{0D108BD9-81ED-4DB2-BD59-A6C34878D82A}">
-                    <a16:rowId xmlns:a16="http://schemas.microsoft.com/office/drawing/2014/main" val="10002"/>
-                  </a:ext>
-                </a:extLst>
               </a:tr>
               <a:tr h="365760">
                 <a:tc>
@@ -14340,11 +13640,6 @@
                   </a:txBody>
                   <a:tcPr/>
                 </a:tc>
-                <a:extLst>
-                  <a:ext uri="{0D108BD9-81ED-4DB2-BD59-A6C34878D82A}">
-                    <a16:rowId xmlns:a16="http://schemas.microsoft.com/office/drawing/2014/main" val="10003"/>
-                  </a:ext>
-                </a:extLst>
               </a:tr>
             </a:tbl>
           </a:graphicData>
@@ -14442,7 +13737,7 @@
 </file>
 
 <file path=ppt/slides/slide7.xml><?xml version="1.0" encoding="utf-8"?>
-<p:sld xmlns:a="http://schemas.openxmlformats.org/drawingml/2006/main" xmlns:r="http://schemas.openxmlformats.org/officeDocument/2006/relationships" xmlns:p="http://schemas.openxmlformats.org/presentationml/2006/main">
+<p:sld xmlns:a="http://schemas.openxmlformats.org/drawingml/2006/main" xmlns:p="http://schemas.openxmlformats.org/presentationml/2006/main" xmlns:r="http://schemas.openxmlformats.org/officeDocument/2006/relationships">
   <p:cSld>
     <p:spTree>
       <p:nvGrpSpPr>
@@ -14450,14 +13745,7 @@
         <p:cNvGrpSpPr/>
         <p:nvPr/>
       </p:nvGrpSpPr>
-      <p:grpSpPr>
-        <a:xfrm>
-          <a:off x="0" y="0"/>
-          <a:ext cx="0" cy="0"/>
-          <a:chOff x="0" y="0"/>
-          <a:chExt cx="0" cy="0"/>
-        </a:xfrm>
-      </p:grpSpPr>
+      <p:grpSpPr/>
       <p:sp>
         <p:nvSpPr>
           <p:cNvPr id="2" name="TextBox 1"/>
@@ -14534,12 +13822,15 @@
                 <a:spcPts val="0"/>
               </a:spcAft>
             </a:pPr>
-            <a:endParaRPr sz="1800">
-              <a:solidFill>
-                <a:srgbClr val="212121"/>
-              </a:solidFill>
-              <a:latin typeface="Courier New"/>
-            </a:endParaRPr>
+            <a:r>
+              <a:rPr sz="1800">
+                <a:solidFill>
+                  <a:srgbClr val="212121"/>
+                </a:solidFill>
+                <a:latin typeface="Courier New"/>
+              </a:rPr>
+              <a:t/>
+            </a:r>
           </a:p>
           <a:p>
             <a:pPr>
@@ -14627,12 +13918,15 @@
                 <a:spcPts val="0"/>
               </a:spcAft>
             </a:pPr>
-            <a:endParaRPr sz="1800">
-              <a:solidFill>
-                <a:srgbClr val="212121"/>
-              </a:solidFill>
-              <a:latin typeface="Courier New"/>
-            </a:endParaRPr>
+            <a:r>
+              <a:rPr sz="1800">
+                <a:solidFill>
+                  <a:srgbClr val="212121"/>
+                </a:solidFill>
+                <a:latin typeface="Courier New"/>
+              </a:rPr>
+              <a:t/>
+            </a:r>
           </a:p>
           <a:p>
             <a:pPr>
@@ -14656,12 +13950,14 @@
                 <a:spcPts val="800"/>
               </a:spcAft>
             </a:pPr>
-            <a:endParaRPr sz="1800">
-              <a:solidFill>
-                <a:srgbClr val="212121"/>
-              </a:solidFill>
-              <a:latin typeface="Courier New"/>
-            </a:endParaRPr>
+            <a:r>
+              <a:rPr sz="2200">
+                <a:solidFill>
+                  <a:srgbClr val="212121"/>
+                </a:solidFill>
+              </a:rPr>
+              <a:t/>
+            </a:r>
           </a:p>
           <a:p>
             <a:pPr>
@@ -14689,7 +13985,7 @@
 </file>
 
 <file path=ppt/slides/slide8.xml><?xml version="1.0" encoding="utf-8"?>
-<p:sld xmlns:a="http://schemas.openxmlformats.org/drawingml/2006/main" xmlns:r="http://schemas.openxmlformats.org/officeDocument/2006/relationships" xmlns:p="http://schemas.openxmlformats.org/presentationml/2006/main">
+<p:sld xmlns:a="http://schemas.openxmlformats.org/drawingml/2006/main" xmlns:p="http://schemas.openxmlformats.org/presentationml/2006/main" xmlns:r="http://schemas.openxmlformats.org/officeDocument/2006/relationships">
   <p:cSld>
     <p:spTree>
       <p:nvGrpSpPr>
@@ -14697,14 +13993,7 @@
         <p:cNvGrpSpPr/>
         <p:nvPr/>
       </p:nvGrpSpPr>
-      <p:grpSpPr>
-        <a:xfrm>
-          <a:off x="0" y="0"/>
-          <a:ext cx="0" cy="0"/>
-          <a:chOff x="0" y="0"/>
-          <a:chExt cx="0" cy="0"/>
-        </a:xfrm>
-      </p:grpSpPr>
+      <p:grpSpPr/>
       <p:sp>
         <p:nvSpPr>
           <p:cNvPr id="2" name="TextBox 1"/>
@@ -14860,12 +14149,15 @@
                 <a:spcPts val="0"/>
               </a:spcAft>
             </a:pPr>
-            <a:endParaRPr sz="1600">
-              <a:solidFill>
-                <a:srgbClr val="212121"/>
-              </a:solidFill>
-              <a:latin typeface="Courier New"/>
-            </a:endParaRPr>
+            <a:r>
+              <a:rPr sz="1600">
+                <a:solidFill>
+                  <a:srgbClr val="212121"/>
+                </a:solidFill>
+                <a:latin typeface="Courier New"/>
+              </a:rPr>
+              <a:t/>
+            </a:r>
           </a:p>
           <a:p>
             <a:pPr>
@@ -14905,12 +14197,15 @@
                 <a:spcPts val="0"/>
               </a:spcAft>
             </a:pPr>
-            <a:endParaRPr sz="1600">
-              <a:solidFill>
-                <a:srgbClr val="212121"/>
-              </a:solidFill>
-              <a:latin typeface="Courier New"/>
-            </a:endParaRPr>
+            <a:r>
+              <a:rPr sz="1600">
+                <a:solidFill>
+                  <a:srgbClr val="212121"/>
+                </a:solidFill>
+                <a:latin typeface="Courier New"/>
+              </a:rPr>
+              <a:t/>
+            </a:r>
           </a:p>
           <a:p>
             <a:pPr>
@@ -14982,12 +14277,14 @@
                 <a:spcPts val="800"/>
               </a:spcAft>
             </a:pPr>
-            <a:endParaRPr sz="1600">
-              <a:solidFill>
-                <a:srgbClr val="212121"/>
-              </a:solidFill>
-              <a:latin typeface="Courier New"/>
-            </a:endParaRPr>
+            <a:r>
+              <a:rPr sz="2000">
+                <a:solidFill>
+                  <a:srgbClr val="212121"/>
+                </a:solidFill>
+              </a:rPr>
+              <a:t/>
+            </a:r>
           </a:p>
           <a:p>
             <a:pPr>
@@ -15054,7 +14351,7 @@
 </file>
 
 <file path=ppt/slides/slide9.xml><?xml version="1.0" encoding="utf-8"?>
-<p:sld xmlns:a="http://schemas.openxmlformats.org/drawingml/2006/main" xmlns:r="http://schemas.openxmlformats.org/officeDocument/2006/relationships" xmlns:p="http://schemas.openxmlformats.org/presentationml/2006/main">
+<p:sld xmlns:a="http://schemas.openxmlformats.org/drawingml/2006/main" xmlns:p="http://schemas.openxmlformats.org/presentationml/2006/main" xmlns:r="http://schemas.openxmlformats.org/officeDocument/2006/relationships">
   <p:cSld>
     <p:spTree>
       <p:nvGrpSpPr>
@@ -15062,14 +14359,7 @@
         <p:cNvGrpSpPr/>
         <p:nvPr/>
       </p:nvGrpSpPr>
-      <p:grpSpPr>
-        <a:xfrm>
-          <a:off x="0" y="0"/>
-          <a:ext cx="0" cy="0"/>
-          <a:chOff x="0" y="0"/>
-          <a:chExt cx="0" cy="0"/>
-        </a:xfrm>
-      </p:grpSpPr>
+      <p:grpSpPr/>
       <p:sp>
         <p:nvSpPr>
           <p:cNvPr id="2" name="TextBox 1"/>
@@ -15193,12 +14483,15 @@
                 <a:spcPts val="0"/>
               </a:spcAft>
             </a:pPr>
-            <a:endParaRPr sz="1600">
-              <a:solidFill>
-                <a:srgbClr val="212121"/>
-              </a:solidFill>
-              <a:latin typeface="Courier New"/>
-            </a:endParaRPr>
+            <a:r>
+              <a:rPr sz="1600">
+                <a:solidFill>
+                  <a:srgbClr val="212121"/>
+                </a:solidFill>
+                <a:latin typeface="Courier New"/>
+              </a:rPr>
+              <a:t/>
+            </a:r>
           </a:p>
           <a:p>
             <a:pPr>
@@ -15238,12 +14531,15 @@
                 <a:spcPts val="0"/>
               </a:spcAft>
             </a:pPr>
-            <a:endParaRPr sz="1600">
-              <a:solidFill>
-                <a:srgbClr val="212121"/>
-              </a:solidFill>
-              <a:latin typeface="Courier New"/>
-            </a:endParaRPr>
+            <a:r>
+              <a:rPr sz="1600">
+                <a:solidFill>
+                  <a:srgbClr val="212121"/>
+                </a:solidFill>
+                <a:latin typeface="Courier New"/>
+              </a:rPr>
+              <a:t/>
+            </a:r>
           </a:p>
           <a:p>
             <a:pPr>
@@ -15299,12 +14595,14 @@
                 <a:spcPts val="800"/>
               </a:spcAft>
             </a:pPr>
-            <a:endParaRPr sz="1600">
-              <a:solidFill>
-                <a:srgbClr val="212121"/>
-              </a:solidFill>
-              <a:latin typeface="Courier New"/>
-            </a:endParaRPr>
+            <a:r>
+              <a:rPr sz="2000">
+                <a:solidFill>
+                  <a:srgbClr val="212121"/>
+                </a:solidFill>
+              </a:rPr>
+              <a:t/>
+            </a:r>
           </a:p>
           <a:p>
             <a:pPr>

--- a/slides/session1/01-session1-fundamentals.pptx
+++ b/slides/session1/01-session1-fundamentals.pptx
@@ -59,6 +59,7 @@
     <p:sldId id="307" r:id="rId58"/>
     <p:sldId id="308" r:id="rId59"/>
     <p:sldId id="309" r:id="rId60"/>
+    <p:sldId id="310" r:id="rId61"/>
   </p:sldIdLst>
   <p:sldSz cx="12191695" cy="6858000" type="screen4x3"/>
   <p:notesSz cx="6858000" cy="9144000"/>
@@ -11276,7 +11277,7 @@
                   <a:srgbClr val="5A0A7A"/>
                 </a:solidFill>
               </a:rPr>
-              <a:t>Beyond one thread</a:t>
+              <a:t>Specifying functions: contracts (pre/post)</a:t>
             </a:r>
           </a:p>
         </p:txBody>
@@ -11289,8 +11290,8 @@
         </p:nvSpPr>
         <p:spPr>
           <a:xfrm>
-            <a:off x="731520" y="1645920"/>
-            <a:ext cx="10789920" cy="4937760"/>
+            <a:off x="731520" y="1463040"/>
+            <a:ext cx="10789920" cy="5120640"/>
           </a:xfrm>
           <a:prstGeom prst="rect">
             <a:avLst/>
@@ -11309,52 +11310,52 @@
               </a:spcAft>
             </a:pPr>
             <a:r>
-              <a:rPr sz="2400">
-                <a:solidFill>
-                  <a:srgbClr val="212121"/>
-                </a:solidFill>
-              </a:rPr>
-              <a:t>Two threads of two and one statements already have three interleavings. Real code has billions.</a:t>
-            </a:r>
-          </a:p>
-          <a:p>
-            <a:pPr>
-              <a:spcAft>
-                <a:spcPts val="800"/>
-              </a:spcAft>
-            </a:pPr>
-            <a:r>
-              <a:rPr sz="2400">
-                <a:solidFill>
-                  <a:srgbClr val="212121"/>
-                </a:solidFill>
-              </a:rPr>
-              <a:t>Run the program a million times and the bad interleaving may never show up — Therac-25's bug hid exactly this way.</a:t>
-            </a:r>
-          </a:p>
-          <a:p>
-            <a:pPr>
-              <a:spcAft>
-                <a:spcPts val="800"/>
-              </a:spcAft>
-            </a:pPr>
-            <a:r>
-              <a:rPr sz="2400">
-                <a:solidFill>
-                  <a:srgbClr val="212121"/>
-                </a:solidFill>
-              </a:rPr>
-              <a:t>A model checker enumerates every interleaving up to a bound, including the one that kills your assertion.</a:t>
-            </a:r>
-          </a:p>
-          <a:p>
-            <a:pPr>
-              <a:spcAft>
-                <a:spcPts val="800"/>
-              </a:spcAft>
-            </a:pPr>
-            <a:r>
-              <a:rPr sz="2400">
+              <a:rPr sz="2000">
+                <a:solidFill>
+                  <a:srgbClr val="212121"/>
+                </a:solidFill>
+              </a:rPr>
+              <a:t>A Hoare triple {P} S {Q}: if precondition P holds before S, postcondition Q holds after. Design-by-contract splits the duty:</a:t>
+            </a:r>
+          </a:p>
+          <a:p>
+            <a:pPr lvl="1">
+              <a:spcAft>
+                <a:spcPts val="800"/>
+              </a:spcAft>
+            </a:pPr>
+            <a:r>
+              <a:rPr sz="1800">
+                <a:solidFill>
+                  <a:srgbClr val="212121"/>
+                </a:solidFill>
+              </a:rPr>
+              <a:t>requires (precondition) — the caller's duty before the call.</a:t>
+            </a:r>
+          </a:p>
+          <a:p>
+            <a:pPr lvl="1">
+              <a:spcAft>
+                <a:spcPts val="800"/>
+              </a:spcAft>
+            </a:pPr>
+            <a:r>
+              <a:rPr sz="1800">
+                <a:solidFill>
+                  <a:srgbClr val="212121"/>
+                </a:solidFill>
+              </a:rPr>
+              <a:t>ensures (postcondition) — the function's promise on return.</a:t>
+            </a:r>
+          </a:p>
+          <a:p>
+            <a:pPr>
+              <a:spcAft>
+                <a:spcPts val="800"/>
+              </a:spcAft>
+            </a:pPr>
+            <a:r>
+              <a:rPr sz="2000">
                 <a:solidFill>
                   <a:srgbClr val="212121"/>
                 </a:solidFill>
@@ -11369,12 +11370,80 @@
               </a:spcAft>
             </a:pPr>
             <a:r>
-              <a:rPr sz="2400">
-                <a:solidFill>
-                  <a:srgbClr val="212121"/>
-                </a:solidFill>
-              </a:rPr>
-              <a:t>Session 2, Lab 4: you write down the killer interleaving before the tool finds it.</a:t>
+              <a:rPr sz="2000">
+                <a:solidFill>
+                  <a:srgbClr val="212121"/>
+                </a:solidFill>
+              </a:rPr>
+              <a:t>Why it matters: verify each function once against its contract, then callers trust the contract — not the body. That is modular (assume-guarantee) verification, and it is how proof scales.</a:t>
+            </a:r>
+          </a:p>
+          <a:p>
+            <a:pPr>
+              <a:spcAft>
+                <a:spcPts val="800"/>
+              </a:spcAft>
+            </a:pPr>
+            <a:r>
+              <a:rPr sz="2000">
+                <a:solidFill>
+                  <a:srgbClr val="212121"/>
+                </a:solidFill>
+              </a:rPr>
+              <a:t/>
+            </a:r>
+          </a:p>
+          <a:p>
+            <a:pPr>
+              <a:spcAft>
+                <a:spcPts val="800"/>
+              </a:spcAft>
+            </a:pPr>
+            <a:r>
+              <a:rPr sz="2000">
+                <a:solidFill>
+                  <a:srgbClr val="212121"/>
+                </a:solidFill>
+              </a:rPr>
+              <a:t>The engine of the deductive-verification row (Dafny, Frama-C/WP, SPARK). ESBMC has it too: __ESBMC_requires / __ESBMC_ensures, with --enforce-contract vs --replace-call-with-contract (Session 2, Lab 3).</a:t>
+            </a:r>
+          </a:p>
+        </p:txBody>
+      </p:sp>
+      <p:sp>
+        <p:nvSpPr>
+          <p:cNvPr id="4" name="TextBox 3"/>
+          <p:cNvSpPr txBox="1"/>
+          <p:nvPr/>
+        </p:nvSpPr>
+        <p:spPr>
+          <a:xfrm>
+            <a:off x="731520" y="6400800"/>
+            <a:ext cx="10789920" cy="182880"/>
+          </a:xfrm>
+          <a:prstGeom prst="rect">
+            <a:avLst/>
+          </a:prstGeom>
+          <a:noFill/>
+        </p:spPr>
+        <p:txBody>
+          <a:bodyPr wrap="square">
+            <a:spAutoFit/>
+          </a:bodyPr>
+          <a:lstStyle/>
+          <a:p>
+            <a:pPr>
+              <a:spcAft>
+                <a:spcPts val="800"/>
+              </a:spcAft>
+            </a:pPr>
+            <a:r>
+              <a:rPr sz="1400">
+                <a:solidFill>
+                  <a:srgbClr val="212121"/>
+                </a:solidFill>
+              </a:rPr>
+              <a:t>Hoare, CACM 1969 (doi:10.1145/363235.363259) · Meyer, IEEE Computer 1992 (doi:10.1109/2.161279)</a:t>
             </a:r>
           </a:p>
         </p:txBody>
@@ -11425,7 +11494,7 @@
                   <a:srgbClr val="5A0A7A"/>
                 </a:solidFill>
               </a:rPr>
-              <a:t>Homework for your intuition</a:t>
+              <a:t>Beyond one thread</a:t>
             </a:r>
           </a:p>
         </p:txBody>
@@ -11438,8 +11507,8 @@
         </p:nvSpPr>
         <p:spPr>
           <a:xfrm>
-            <a:off x="731520" y="1828800"/>
-            <a:ext cx="10789920" cy="4754880"/>
+            <a:off x="731520" y="1645920"/>
+            <a:ext cx="10789920" cy="4937760"/>
           </a:xfrm>
           <a:prstGeom prst="rect">
             <a:avLst/>
@@ -11454,43 +11523,56 @@
           <a:p>
             <a:pPr>
               <a:spcAft>
-                <a:spcPts val="0"/>
-              </a:spcAft>
-            </a:pPr>
-            <a:r>
-              <a:rPr sz="2200">
-                <a:solidFill>
-                  <a:srgbClr val="212121"/>
-                </a:solidFill>
-                <a:latin typeface="Courier New"/>
-              </a:rPr>
-              <a:t>double w = 0.1 + 0.2;</a:t>
-            </a:r>
-          </a:p>
-          <a:p>
-            <a:pPr>
-              <a:spcAft>
-                <a:spcPts val="0"/>
-              </a:spcAft>
-            </a:pPr>
-            <a:r>
-              <a:rPr sz="2200">
-                <a:solidFill>
-                  <a:srgbClr val="212121"/>
-                </a:solidFill>
-                <a:latin typeface="Courier New"/>
-              </a:rPr>
-              <a:t>assert(w == 0.3);</a:t>
-            </a:r>
-          </a:p>
-          <a:p>
-            <a:pPr>
-              <a:spcAft>
-                <a:spcPts val="800"/>
-              </a:spcAft>
-            </a:pPr>
-            <a:r>
-              <a:rPr sz="2600">
+                <a:spcPts val="800"/>
+              </a:spcAft>
+            </a:pPr>
+            <a:r>
+              <a:rPr sz="2400">
+                <a:solidFill>
+                  <a:srgbClr val="212121"/>
+                </a:solidFill>
+              </a:rPr>
+              <a:t>Two threads of two and one statements already have three interleavings. Real code has billions.</a:t>
+            </a:r>
+          </a:p>
+          <a:p>
+            <a:pPr>
+              <a:spcAft>
+                <a:spcPts val="800"/>
+              </a:spcAft>
+            </a:pPr>
+            <a:r>
+              <a:rPr sz="2400">
+                <a:solidFill>
+                  <a:srgbClr val="212121"/>
+                </a:solidFill>
+              </a:rPr>
+              <a:t>Run the program a million times and the bad interleaving may never show up — Therac-25's bug hid exactly this way.</a:t>
+            </a:r>
+          </a:p>
+          <a:p>
+            <a:pPr>
+              <a:spcAft>
+                <a:spcPts val="800"/>
+              </a:spcAft>
+            </a:pPr>
+            <a:r>
+              <a:rPr sz="2400">
+                <a:solidFill>
+                  <a:srgbClr val="212121"/>
+                </a:solidFill>
+              </a:rPr>
+              <a:t>A model checker enumerates every interleaving up to a bound, including the one that kills your assertion.</a:t>
+            </a:r>
+          </a:p>
+          <a:p>
+            <a:pPr>
+              <a:spcAft>
+                <a:spcPts val="800"/>
+              </a:spcAft>
+            </a:pPr>
+            <a:r>
+              <a:rPr sz="2400">
                 <a:solidFill>
                   <a:srgbClr val="212121"/>
                 </a:solidFill>
@@ -11505,57 +11587,12 @@
               </a:spcAft>
             </a:pPr>
             <a:r>
-              <a:rPr sz="2600">
-                <a:solidFill>
-                  <a:srgbClr val="212121"/>
-                </a:solidFill>
-              </a:rPr>
-              <a:t>FAILED or SUCCESSFUL?</a:t>
-            </a:r>
-          </a:p>
-          <a:p>
-            <a:pPr>
-              <a:spcAft>
-                <a:spcPts val="800"/>
-              </a:spcAft>
-            </a:pPr>
-            <a:r>
-              <a:rPr sz="2600">
-                <a:solidFill>
-                  <a:srgbClr val="212121"/>
-                </a:solidFill>
-              </a:rPr>
-              <a:t/>
-            </a:r>
-          </a:p>
-          <a:p>
-            <a:pPr>
-              <a:spcAft>
-                <a:spcPts val="800"/>
-              </a:spcAft>
-            </a:pPr>
-            <a:r>
-              <a:rPr sz="2600">
-                <a:solidFill>
-                  <a:srgbClr val="212121"/>
-                </a:solidFill>
-              </a:rPr>
-              <a:t>Bring your answer to Session 2 — Lab 4 settles it with a solver that does exact IEEE-754 arithmetic.</a:t>
-            </a:r>
-          </a:p>
-          <a:p>
-            <a:pPr lvl="1">
-              <a:spcAft>
-                <a:spcPts val="800"/>
-              </a:spcAft>
-            </a:pPr>
-            <a:r>
               <a:rPr sz="2400">
                 <a:solidFill>
                   <a:srgbClr val="212121"/>
                 </a:solidFill>
               </a:rPr>
-              <a:t>Hint: 0.1 in binary is like 1/3 in decimal.</a:t>
+              <a:t>Session 2, Lab 4: you write down the killer interleaving before the tool finds it.</a:t>
             </a:r>
           </a:p>
         </p:txBody>
@@ -11606,7 +11643,7 @@
                   <a:srgbClr val="5A0A7A"/>
                 </a:solidFill>
               </a:rPr>
-              <a:t>Exercise 2 — Predict the Verdict (15 min)</a:t>
+              <a:t>Homework for your intuition</a:t>
             </a:r>
           </a:p>
         </p:txBody>
@@ -11619,8 +11656,8 @@
         </p:nvSpPr>
         <p:spPr>
           <a:xfrm>
-            <a:off x="731520" y="1463040"/>
-            <a:ext cx="10789920" cy="5120640"/>
+            <a:off x="731520" y="1828800"/>
+            <a:ext cx="10789920" cy="4754880"/>
           </a:xfrm>
           <a:prstGeom prst="rect">
             <a:avLst/>
@@ -11635,7 +11672,7 @@
           <a:p>
             <a:pPr>
               <a:spcAft>
-                <a:spcPts val="800"/>
+                <a:spcPts val="0"/>
               </a:spcAft>
             </a:pPr>
             <a:r>
@@ -11643,14 +11680,15 @@
                 <a:solidFill>
                   <a:srgbClr val="212121"/>
                 </a:solidFill>
-              </a:rPr>
-              <a:t>Groups of 3–4. Three short C programs on the handout (predict1.c, predict2.c, predict3.c).</a:t>
-            </a:r>
-          </a:p>
-          <a:p>
-            <a:pPr>
-              <a:spcAft>
-                <a:spcPts val="800"/>
+                <a:latin typeface="Courier New"/>
+              </a:rPr>
+              <a:t>double w = 0.1 + 0.2;</a:t>
+            </a:r>
+          </a:p>
+          <a:p>
+            <a:pPr>
+              <a:spcAft>
+                <a:spcPts val="0"/>
               </a:spcAft>
             </a:pPr>
             <a:r>
@@ -11658,8 +11696,69 @@
                 <a:solidFill>
                   <a:srgbClr val="212121"/>
                 </a:solidFill>
-              </a:rPr>
-              <a:t>For each program, write down BEFORE we run anything:</a:t>
+                <a:latin typeface="Courier New"/>
+              </a:rPr>
+              <a:t>assert(w == 0.3);</a:t>
+            </a:r>
+          </a:p>
+          <a:p>
+            <a:pPr>
+              <a:spcAft>
+                <a:spcPts val="800"/>
+              </a:spcAft>
+            </a:pPr>
+            <a:r>
+              <a:rPr sz="2600">
+                <a:solidFill>
+                  <a:srgbClr val="212121"/>
+                </a:solidFill>
+              </a:rPr>
+              <a:t/>
+            </a:r>
+          </a:p>
+          <a:p>
+            <a:pPr>
+              <a:spcAft>
+                <a:spcPts val="800"/>
+              </a:spcAft>
+            </a:pPr>
+            <a:r>
+              <a:rPr sz="2600">
+                <a:solidFill>
+                  <a:srgbClr val="212121"/>
+                </a:solidFill>
+              </a:rPr>
+              <a:t>FAILED or SUCCESSFUL?</a:t>
+            </a:r>
+          </a:p>
+          <a:p>
+            <a:pPr>
+              <a:spcAft>
+                <a:spcPts val="800"/>
+              </a:spcAft>
+            </a:pPr>
+            <a:r>
+              <a:rPr sz="2600">
+                <a:solidFill>
+                  <a:srgbClr val="212121"/>
+                </a:solidFill>
+              </a:rPr>
+              <a:t/>
+            </a:r>
+          </a:p>
+          <a:p>
+            <a:pPr>
+              <a:spcAft>
+                <a:spcPts val="800"/>
+              </a:spcAft>
+            </a:pPr>
+            <a:r>
+              <a:rPr sz="2600">
+                <a:solidFill>
+                  <a:srgbClr val="212121"/>
+                </a:solidFill>
+              </a:rPr>
+              <a:t>Bring your answer to Session 2 — Lab 4 settles it with a solver that does exact IEEE-754 arithmetic.</a:t>
             </a:r>
           </a:p>
           <a:p>
@@ -11669,42 +11768,12 @@
               </a:spcAft>
             </a:pPr>
             <a:r>
-              <a:rPr sz="2000">
-                <a:solidFill>
-                  <a:srgbClr val="212121"/>
-                </a:solidFill>
-              </a:rPr>
-              <a:t>Will the model checker say VERIFICATION FAILED or SUCCESSFUL?</a:t>
-            </a:r>
-          </a:p>
-          <a:p>
-            <a:pPr lvl="1">
-              <a:spcAft>
-                <a:spcPts val="800"/>
-              </a:spcAft>
-            </a:pPr>
-            <a:r>
-              <a:rPr sz="2000">
-                <a:solidFill>
-                  <a:srgbClr val="212121"/>
-                </a:solidFill>
-              </a:rPr>
-              <a:t>If FAILED — which line is the culprit?</a:t>
-            </a:r>
-          </a:p>
-          <a:p>
-            <a:pPr>
-              <a:spcAft>
-                <a:spcPts val="800"/>
-              </a:spcAft>
-            </a:pPr>
-            <a:r>
-              <a:rPr sz="2200">
-                <a:solidFill>
-                  <a:srgbClr val="212121"/>
-                </a:solidFill>
-              </a:rPr>
-              <a:t>Then we run ESBMC live and settle every bet.</a:t>
+              <a:rPr sz="2400">
+                <a:solidFill>
+                  <a:srgbClr val="212121"/>
+                </a:solidFill>
+              </a:rPr>
+              <a:t>Hint: 0.1 in binary is like 1/3 in decimal.</a:t>
             </a:r>
           </a:p>
         </p:txBody>
@@ -11755,7 +11824,7 @@
                   <a:srgbClr val="5A0A7A"/>
                 </a:solidFill>
               </a:rPr>
-              <a:t>Who uses this? — Model checking</a:t>
+              <a:t>Exercise 2 — Predict the Verdict (15 min)</a:t>
             </a:r>
           </a:p>
         </p:txBody>
@@ -11793,7 +11862,7 @@
                   <a:srgbClr val="212121"/>
                 </a:solidFill>
               </a:rPr>
-              <a:t>Amazon Web Services — CBMC proves memory safety of the TLS library s2n; bounded proofs run in CI on every commit</a:t>
+              <a:t>Groups of 3–4. Three short C programs on the handout (predict1.c, predict2.c, predict3.c).</a:t>
             </a:r>
           </a:p>
           <a:p>
@@ -11808,7 +11877,37 @@
                   <a:srgbClr val="212121"/>
                 </a:solidFill>
               </a:rPr>
-              <a:t>ESBMC / CBMC — the tools from tonight's demos; compete yearly in SV-COMP on tens of thousands of benchmarks</a:t>
+              <a:t>For each program, write down BEFORE we run anything:</a:t>
+            </a:r>
+          </a:p>
+          <a:p>
+            <a:pPr lvl="1">
+              <a:spcAft>
+                <a:spcPts val="800"/>
+              </a:spcAft>
+            </a:pPr>
+            <a:r>
+              <a:rPr sz="2000">
+                <a:solidFill>
+                  <a:srgbClr val="212121"/>
+                </a:solidFill>
+              </a:rPr>
+              <a:t>Will the model checker say VERIFICATION FAILED or SUCCESSFUL?</a:t>
+            </a:r>
+          </a:p>
+          <a:p>
+            <a:pPr lvl="1">
+              <a:spcAft>
+                <a:spcPts val="800"/>
+              </a:spcAft>
+            </a:pPr>
+            <a:r>
+              <a:rPr sz="2000">
+                <a:solidFill>
+                  <a:srgbClr val="212121"/>
+                </a:solidFill>
+              </a:rPr>
+              <a:t>If FAILED — which line is the culprit?</a:t>
             </a:r>
           </a:p>
           <a:p>
@@ -11823,7 +11922,7 @@
                   <a:srgbClr val="212121"/>
                 </a:solidFill>
               </a:rPr>
-              <a:t>The counterexample you saw for getpassword.c is the same artefact AWS engineers read when a proof fails</a:t>
+              <a:t>Then we run ESBMC live and settle every bet.</a:t>
             </a:r>
           </a:p>
         </p:txBody>
@@ -11874,7 +11973,7 @@
                   <a:srgbClr val="5A0A7A"/>
                 </a:solidFill>
               </a:rPr>
-              <a:t>Who uses this? — Symbolic execution &amp; fuzzing</a:t>
+              <a:t>Who uses this? — Model checking</a:t>
             </a:r>
           </a:p>
         </p:txBody>
@@ -11912,7 +12011,7 @@
                   <a:srgbClr val="212121"/>
                 </a:solidFill>
               </a:rPr>
-              <a:t>KLEE found 56 serious bugs in coreutils, busybox and Minix — including three in coreutils that had survived 15 years of testing</a:t>
+              <a:t>Amazon Web Services — CBMC proves memory safety of the TLS library s2n; bounded proofs run in CI on every commit</a:t>
             </a:r>
           </a:p>
           <a:p>
@@ -11927,7 +12026,7 @@
                   <a:srgbClr val="212121"/>
                 </a:solidFill>
               </a:rPr>
-              <a:t>Microsoft SAGE fuzzed Windows file parsers with symbolic execution; it found ~1/3 of all bugs caught by file fuzzing during Windows 7 development — running last, after every other tool</a:t>
+              <a:t>ESBMC / CBMC — the tools from tonight's demos; compete yearly in SV-COMP on tens of thousands of benchmarks</a:t>
             </a:r>
           </a:p>
           <a:p>
@@ -11942,22 +12041,7 @@
                   <a:srgbClr val="212121"/>
                 </a:solidFill>
               </a:rPr>
-              <a:t>AFL / OSS-Fuzz — Google fuzzes ~1,000 open-source projects continuously; tens of thousands of bugs found</a:t>
-            </a:r>
-          </a:p>
-          <a:p>
-            <a:pPr>
-              <a:spcAft>
-                <a:spcPts val="800"/>
-              </a:spcAft>
-            </a:pPr>
-            <a:r>
-              <a:rPr sz="2200">
-                <a:solidFill>
-                  <a:srgbClr val="212121"/>
-                </a:solidFill>
-              </a:rPr>
-              <a:t>The pragmatic cousin of verification: no proofs, ruthless effectiveness</a:t>
+              <a:t>The counterexample you saw for getpassword.c is the same artefact AWS engineers read when a proof fails</a:t>
             </a:r>
           </a:p>
         </p:txBody>
@@ -12008,7 +12092,7 @@
                   <a:srgbClr val="5A0A7A"/>
                 </a:solidFill>
               </a:rPr>
-              <a:t>Another route to a proof: abstract interpretation</a:t>
+              <a:t>Who uses this? — Symbolic execution &amp; fuzzing</a:t>
             </a:r>
           </a:p>
         </p:txBody>
@@ -12041,190 +12125,57 @@
               </a:spcAft>
             </a:pPr>
             <a:r>
-              <a:rPr sz="2000">
-                <a:solidFill>
-                  <a:srgbClr val="212121"/>
-                </a:solidFill>
-              </a:rPr>
-              <a:t>The BMC pipeline you just saw hunts a counterexample (or proves up to a bound). Abstract interpretation proves P the other way — over-approximate every run at once: no inputs, no paths, no bound.</a:t>
-            </a:r>
-          </a:p>
-          <a:p>
-            <a:pPr>
-              <a:spcAft>
-                <a:spcPts val="800"/>
-              </a:spcAft>
-            </a:pPr>
-            <a:r>
-              <a:rPr sz="2000">
-                <a:solidFill>
-                  <a:srgbClr val="212121"/>
-                </a:solidFill>
-              </a:rPr>
-              <a:t/>
-            </a:r>
-          </a:p>
-          <a:p>
-            <a:pPr>
-              <a:spcAft>
-                <a:spcPts val="0"/>
-              </a:spcAft>
-            </a:pPr>
-            <a:r>
-              <a:rPr sz="1600">
-                <a:solidFill>
-                  <a:srgbClr val="212121"/>
-                </a:solidFill>
-                <a:latin typeface="Courier New"/>
-              </a:rPr>
-              <a:t>x = 0                 # x ∈ [0, 0]</a:t>
-            </a:r>
-          </a:p>
-          <a:p>
-            <a:pPr>
-              <a:spcAft>
-                <a:spcPts val="0"/>
-              </a:spcAft>
-            </a:pPr>
-            <a:r>
-              <a:rPr sz="1600">
-                <a:solidFill>
-                  <a:srgbClr val="212121"/>
-                </a:solidFill>
-                <a:latin typeface="Courier New"/>
-              </a:rPr>
-              <a:t>while x &lt; 100:</a:t>
-            </a:r>
-          </a:p>
-          <a:p>
-            <a:pPr>
-              <a:spcAft>
-                <a:spcPts val="0"/>
-              </a:spcAft>
-            </a:pPr>
-            <a:r>
-              <a:rPr sz="1600">
-                <a:solidFill>
-                  <a:srgbClr val="212121"/>
-                </a:solidFill>
-                <a:latin typeface="Courier New"/>
-              </a:rPr>
-              <a:t>    x = x + 1         # x ∈ [1, 100]</a:t>
-            </a:r>
-          </a:p>
-          <a:p>
-            <a:pPr>
-              <a:spcAft>
-                <a:spcPts val="0"/>
-              </a:spcAft>
-            </a:pPr>
-            <a:r>
-              <a:rPr sz="1600">
-                <a:solidFill>
-                  <a:srgbClr val="212121"/>
-                </a:solidFill>
-                <a:latin typeface="Courier New"/>
-              </a:rPr>
-              <a:t># fixpoint invariant:  x ∈ [0, 100]</a:t>
-            </a:r>
-          </a:p>
-          <a:p>
-            <a:pPr>
-              <a:spcAft>
-                <a:spcPts val="0"/>
-              </a:spcAft>
-            </a:pPr>
-            <a:r>
-              <a:rPr sz="1600">
-                <a:solidFill>
-                  <a:srgbClr val="212121"/>
-                </a:solidFill>
-                <a:latin typeface="Courier New"/>
-              </a:rPr>
-              <a:t>assert 0 &lt;= x &lt;= 100  # implied by the invariant → PROVED</a:t>
-            </a:r>
-          </a:p>
-          <a:p>
-            <a:pPr>
-              <a:spcAft>
-                <a:spcPts val="800"/>
-              </a:spcAft>
-            </a:pPr>
-            <a:r>
-              <a:rPr sz="2000">
-                <a:solidFill>
-                  <a:srgbClr val="212121"/>
-                </a:solidFill>
-              </a:rPr>
-              <a:t/>
-            </a:r>
-          </a:p>
-          <a:p>
-            <a:pPr lvl="1">
-              <a:spcAft>
-                <a:spcPts val="800"/>
-              </a:spcAft>
-            </a:pPr>
-            <a:r>
-              <a:rPr sz="1800">
-                <a:solidFill>
-                  <a:srgbClr val="212121"/>
-                </a:solidFill>
-              </a:rPr>
-              <a:t>Compute the tightest fact the loop can't escape (a fixpoint); if it implies P, P holds for every run — no unrolling.</a:t>
-            </a:r>
-          </a:p>
-          <a:p>
-            <a:pPr lvl="1">
-              <a:spcAft>
-                <a:spcPts val="800"/>
-              </a:spcAft>
-            </a:pPr>
-            <a:r>
-              <a:rPr sz="1800">
-                <a:solidFill>
-                  <a:srgbClr val="212121"/>
-                </a:solidFill>
-              </a:rPr>
-              <a:t>Sound, not complete: too coarse → a false alarm. (Astrée proved the A340/A380 fly-by-wire this way — next slide.)</a:t>
-            </a:r>
-          </a:p>
-        </p:txBody>
-      </p:sp>
-      <p:sp>
-        <p:nvSpPr>
-          <p:cNvPr id="4" name="TextBox 3"/>
-          <p:cNvSpPr txBox="1"/>
-          <p:nvPr/>
-        </p:nvSpPr>
-        <p:spPr>
-          <a:xfrm>
-            <a:off x="731520" y="6400800"/>
-            <a:ext cx="10789920" cy="182880"/>
-          </a:xfrm>
-          <a:prstGeom prst="rect">
-            <a:avLst/>
-          </a:prstGeom>
-          <a:noFill/>
-        </p:spPr>
-        <p:txBody>
-          <a:bodyPr wrap="square">
-            <a:spAutoFit/>
-          </a:bodyPr>
-          <a:lstStyle/>
-          <a:p>
-            <a:pPr>
-              <a:spcAft>
-                <a:spcPts val="800"/>
-              </a:spcAft>
-            </a:pPr>
-            <a:r>
-              <a:rPr sz="1400">
-                <a:solidFill>
-                  <a:srgbClr val="212121"/>
-                </a:solidFill>
-              </a:rPr>
-              <a:t>Sound over-approximation: Cousot &amp; Cousot, POPL 1977 (doi:10.1145/512950.512973)</a:t>
+              <a:rPr sz="2200">
+                <a:solidFill>
+                  <a:srgbClr val="212121"/>
+                </a:solidFill>
+              </a:rPr>
+              <a:t>KLEE found 56 serious bugs in coreutils, busybox and Minix — including three in coreutils that had survived 15 years of testing</a:t>
+            </a:r>
+          </a:p>
+          <a:p>
+            <a:pPr>
+              <a:spcAft>
+                <a:spcPts val="800"/>
+              </a:spcAft>
+            </a:pPr>
+            <a:r>
+              <a:rPr sz="2200">
+                <a:solidFill>
+                  <a:srgbClr val="212121"/>
+                </a:solidFill>
+              </a:rPr>
+              <a:t>Microsoft SAGE fuzzed Windows file parsers with symbolic execution; it found ~1/3 of all bugs caught by file fuzzing during Windows 7 development — running last, after every other tool</a:t>
+            </a:r>
+          </a:p>
+          <a:p>
+            <a:pPr>
+              <a:spcAft>
+                <a:spcPts val="800"/>
+              </a:spcAft>
+            </a:pPr>
+            <a:r>
+              <a:rPr sz="2200">
+                <a:solidFill>
+                  <a:srgbClr val="212121"/>
+                </a:solidFill>
+              </a:rPr>
+              <a:t>AFL / OSS-Fuzz — Google fuzzes ~1,000 open-source projects continuously; tens of thousands of bugs found</a:t>
+            </a:r>
+          </a:p>
+          <a:p>
+            <a:pPr>
+              <a:spcAft>
+                <a:spcPts val="800"/>
+              </a:spcAft>
+            </a:pPr>
+            <a:r>
+              <a:rPr sz="2200">
+                <a:solidFill>
+                  <a:srgbClr val="212121"/>
+                </a:solidFill>
+              </a:rPr>
+              <a:t>The pragmatic cousin of verification: no proofs, ruthless effectiveness</a:t>
             </a:r>
           </a:p>
         </p:txBody>
@@ -12275,7 +12226,7 @@
                   <a:srgbClr val="5A0A7A"/>
                 </a:solidFill>
               </a:rPr>
-              <a:t>Abstract interpretation: domain, widening, narrowing</a:t>
+              <a:t>Another route to a proof: abstract interpretation</a:t>
             </a:r>
           </a:p>
         </p:txBody>
@@ -12302,6 +12253,131 @@
           </a:bodyPr>
           <a:lstStyle/>
           <a:p>
+            <a:pPr>
+              <a:spcAft>
+                <a:spcPts val="800"/>
+              </a:spcAft>
+            </a:pPr>
+            <a:r>
+              <a:rPr sz="2000">
+                <a:solidFill>
+                  <a:srgbClr val="212121"/>
+                </a:solidFill>
+              </a:rPr>
+              <a:t>The BMC pipeline you just saw hunts a counterexample (or proves up to a bound). Abstract interpretation proves P the other way — over-approximate every run at once: no inputs, no paths, no bound.</a:t>
+            </a:r>
+          </a:p>
+          <a:p>
+            <a:pPr>
+              <a:spcAft>
+                <a:spcPts val="800"/>
+              </a:spcAft>
+            </a:pPr>
+            <a:r>
+              <a:rPr sz="2000">
+                <a:solidFill>
+                  <a:srgbClr val="212121"/>
+                </a:solidFill>
+              </a:rPr>
+              <a:t/>
+            </a:r>
+          </a:p>
+          <a:p>
+            <a:pPr>
+              <a:spcAft>
+                <a:spcPts val="0"/>
+              </a:spcAft>
+            </a:pPr>
+            <a:r>
+              <a:rPr sz="1600">
+                <a:solidFill>
+                  <a:srgbClr val="212121"/>
+                </a:solidFill>
+                <a:latin typeface="Courier New"/>
+              </a:rPr>
+              <a:t>x = 0                 # x ∈ [0, 0]</a:t>
+            </a:r>
+          </a:p>
+          <a:p>
+            <a:pPr>
+              <a:spcAft>
+                <a:spcPts val="0"/>
+              </a:spcAft>
+            </a:pPr>
+            <a:r>
+              <a:rPr sz="1600">
+                <a:solidFill>
+                  <a:srgbClr val="212121"/>
+                </a:solidFill>
+                <a:latin typeface="Courier New"/>
+              </a:rPr>
+              <a:t>while x &lt; 100:</a:t>
+            </a:r>
+          </a:p>
+          <a:p>
+            <a:pPr>
+              <a:spcAft>
+                <a:spcPts val="0"/>
+              </a:spcAft>
+            </a:pPr>
+            <a:r>
+              <a:rPr sz="1600">
+                <a:solidFill>
+                  <a:srgbClr val="212121"/>
+                </a:solidFill>
+                <a:latin typeface="Courier New"/>
+              </a:rPr>
+              <a:t>    x = x + 1         # x ∈ [1, 100]</a:t>
+            </a:r>
+          </a:p>
+          <a:p>
+            <a:pPr>
+              <a:spcAft>
+                <a:spcPts val="0"/>
+              </a:spcAft>
+            </a:pPr>
+            <a:r>
+              <a:rPr sz="1600">
+                <a:solidFill>
+                  <a:srgbClr val="212121"/>
+                </a:solidFill>
+                <a:latin typeface="Courier New"/>
+              </a:rPr>
+              <a:t># fixpoint invariant:  x ∈ [0, 100]</a:t>
+            </a:r>
+          </a:p>
+          <a:p>
+            <a:pPr>
+              <a:spcAft>
+                <a:spcPts val="0"/>
+              </a:spcAft>
+            </a:pPr>
+            <a:r>
+              <a:rPr sz="1600">
+                <a:solidFill>
+                  <a:srgbClr val="212121"/>
+                </a:solidFill>
+                <a:latin typeface="Courier New"/>
+              </a:rPr>
+              <a:t>assert 0 &lt;= x &lt;= 100  # implied by the invariant → PROVED</a:t>
+            </a:r>
+          </a:p>
+          <a:p>
+            <a:pPr>
+              <a:spcAft>
+                <a:spcPts val="800"/>
+              </a:spcAft>
+            </a:pPr>
+            <a:r>
+              <a:rPr sz="2000">
+                <a:solidFill>
+                  <a:srgbClr val="212121"/>
+                </a:solidFill>
+              </a:rPr>
+              <a:t/>
+            </a:r>
+          </a:p>
+          <a:p>
             <a:pPr lvl="1">
               <a:spcAft>
                 <a:spcPts val="800"/>
@@ -12313,22 +12389,7 @@
                   <a:srgbClr val="212121"/>
                 </a:solidFill>
               </a:rPr>
-              <a:t>Abstract domain — the facts you track instead of exact values. Intervals x ∈ [a, b]; richer ones add relationships (octagons ±x ±y ≤ c, polyhedra). At a branch you join the two sides — richer domain → more precise, but more costly.</a:t>
-            </a:r>
-          </a:p>
-          <a:p>
-            <a:pPr>
-              <a:spcAft>
-                <a:spcPts val="800"/>
-              </a:spcAft>
-            </a:pPr>
-            <a:r>
-              <a:rPr sz="2000">
-                <a:solidFill>
-                  <a:srgbClr val="212121"/>
-                </a:solidFill>
-              </a:rPr>
-              <a:t/>
+              <a:t>Compute the tightest fact the loop can't escape (a fixpoint); if it implies P, P holds for every run — no unrolling.</a:t>
             </a:r>
           </a:p>
           <a:p>
@@ -12343,67 +12404,45 @@
                   <a:srgbClr val="212121"/>
                 </a:solidFill>
               </a:rPr>
-              <a:t>Widening (∇) — forces loops to converge. The loop ascends [0,0] → [0,1] → [0,2] → … and may never stop; widening sees the bound climbing and extrapolates it to [0, +∞). Termination, at the cost of precision.</a:t>
-            </a:r>
-          </a:p>
-          <a:p>
-            <a:pPr>
-              <a:spcAft>
-                <a:spcPts val="800"/>
-              </a:spcAft>
-            </a:pPr>
-            <a:r>
-              <a:rPr sz="2000">
-                <a:solidFill>
-                  <a:srgbClr val="212121"/>
-                </a:solidFill>
-              </a:rPr>
-              <a:t/>
-            </a:r>
-          </a:p>
-          <a:p>
-            <a:pPr lvl="1">
-              <a:spcAft>
-                <a:spcPts val="800"/>
-              </a:spcAft>
-            </a:pPr>
-            <a:r>
-              <a:rPr sz="1800">
-                <a:solidFill>
-                  <a:srgbClr val="212121"/>
-                </a:solidFill>
-              </a:rPr>
-              <a:t>Narrowing (Δ) — recovers what widening overshot. Re-reading the guard x &lt; 100 pulls [0, +∞) back to [0, 100]: precision restored, still terminating.</a:t>
-            </a:r>
-          </a:p>
-          <a:p>
-            <a:pPr>
-              <a:spcAft>
-                <a:spcPts val="800"/>
-              </a:spcAft>
-            </a:pPr>
-            <a:r>
-              <a:rPr sz="2000">
-                <a:solidFill>
-                  <a:srgbClr val="212121"/>
-                </a:solidFill>
-              </a:rPr>
-              <a:t/>
-            </a:r>
-          </a:p>
-          <a:p>
-            <a:pPr>
-              <a:spcAft>
-                <a:spcPts val="800"/>
-              </a:spcAft>
-            </a:pPr>
-            <a:r>
-              <a:rPr sz="2000">
-                <a:solidFill>
-                  <a:srgbClr val="212121"/>
-                </a:solidFill>
-              </a:rPr>
-              <a:t>ESBMC ships it too — --interval-analysis — and can supply the invariant k-induction needs (Session 2, Lab 3).</a:t>
+              <a:t>Sound, not complete: too coarse → a false alarm. (Astrée proved the A340/A380 fly-by-wire this way — next slide.)</a:t>
+            </a:r>
+          </a:p>
+        </p:txBody>
+      </p:sp>
+      <p:sp>
+        <p:nvSpPr>
+          <p:cNvPr id="4" name="TextBox 3"/>
+          <p:cNvSpPr txBox="1"/>
+          <p:nvPr/>
+        </p:nvSpPr>
+        <p:spPr>
+          <a:xfrm>
+            <a:off x="731520" y="6400800"/>
+            <a:ext cx="10789920" cy="182880"/>
+          </a:xfrm>
+          <a:prstGeom prst="rect">
+            <a:avLst/>
+          </a:prstGeom>
+          <a:noFill/>
+        </p:spPr>
+        <p:txBody>
+          <a:bodyPr wrap="square">
+            <a:spAutoFit/>
+          </a:bodyPr>
+          <a:lstStyle/>
+          <a:p>
+            <a:pPr>
+              <a:spcAft>
+                <a:spcPts val="800"/>
+              </a:spcAft>
+            </a:pPr>
+            <a:r>
+              <a:rPr sz="1400">
+                <a:solidFill>
+                  <a:srgbClr val="212121"/>
+                </a:solidFill>
+              </a:rPr>
+              <a:t>Sound over-approximation: Cousot &amp; Cousot, POPL 1977 (doi:10.1145/512950.512973)</a:t>
             </a:r>
           </a:p>
         </p:txBody>
@@ -12718,7 +12757,7 @@
                   <a:srgbClr val="5A0A7A"/>
                 </a:solidFill>
               </a:rPr>
-              <a:t>Who uses this? — Proofs all the way up</a:t>
+              <a:t>Abstract interpretation: domain, widening, narrowing</a:t>
             </a:r>
           </a:p>
         </p:txBody>
@@ -12745,48 +12784,108 @@
           </a:bodyPr>
           <a:lstStyle/>
           <a:p>
-            <a:pPr>
-              <a:spcAft>
-                <a:spcPts val="800"/>
-              </a:spcAft>
-            </a:pPr>
-            <a:r>
-              <a:rPr sz="2200">
-                <a:solidFill>
-                  <a:srgbClr val="212121"/>
-                </a:solidFill>
-              </a:rPr>
-              <a:t>Astrée (abstract interpretation) proved absence of runtime errors in the Airbus A340 fly-by-wire code — 132,000 lines of C — and was then applied to the A380</a:t>
-            </a:r>
-          </a:p>
-          <a:p>
-            <a:pPr>
-              <a:spcAft>
-                <a:spcPts val="800"/>
-              </a:spcAft>
-            </a:pPr>
-            <a:r>
-              <a:rPr sz="2200">
-                <a:solidFill>
-                  <a:srgbClr val="212121"/>
-                </a:solidFill>
-              </a:rPr>
-              <a:t>seL4 — an OS microkernel with a machine-checked proof of functional correctness</a:t>
-            </a:r>
-          </a:p>
-          <a:p>
-            <a:pPr>
-              <a:spcAft>
-                <a:spcPts val="800"/>
-              </a:spcAft>
-            </a:pPr>
-            <a:r>
-              <a:rPr sz="2200">
-                <a:solidFill>
-                  <a:srgbClr val="212121"/>
-                </a:solidFill>
-              </a:rPr>
-              <a:t>CompCert — a C compiler with a proof that compilation preserves semantics; six CPU-years of fuzzing found no wrong-code bugs in its verified core, while every other compiler tested failed</a:t>
+            <a:pPr lvl="1">
+              <a:spcAft>
+                <a:spcPts val="800"/>
+              </a:spcAft>
+            </a:pPr>
+            <a:r>
+              <a:rPr sz="1800">
+                <a:solidFill>
+                  <a:srgbClr val="212121"/>
+                </a:solidFill>
+              </a:rPr>
+              <a:t>Abstract domain — the facts you track instead of exact values. Intervals x ∈ [a, b]; richer ones add relationships (octagons ±x ±y ≤ c, polyhedra). At a branch you join the two sides — richer domain → more precise, but more costly.</a:t>
+            </a:r>
+          </a:p>
+          <a:p>
+            <a:pPr>
+              <a:spcAft>
+                <a:spcPts val="800"/>
+              </a:spcAft>
+            </a:pPr>
+            <a:r>
+              <a:rPr sz="2000">
+                <a:solidFill>
+                  <a:srgbClr val="212121"/>
+                </a:solidFill>
+              </a:rPr>
+              <a:t/>
+            </a:r>
+          </a:p>
+          <a:p>
+            <a:pPr lvl="1">
+              <a:spcAft>
+                <a:spcPts val="800"/>
+              </a:spcAft>
+            </a:pPr>
+            <a:r>
+              <a:rPr sz="1800">
+                <a:solidFill>
+                  <a:srgbClr val="212121"/>
+                </a:solidFill>
+              </a:rPr>
+              <a:t>Widening (∇) — forces loops to converge. The loop ascends [0,0] → [0,1] → [0,2] → … and may never stop; widening sees the bound climbing and extrapolates it to [0, +∞). Termination, at the cost of precision.</a:t>
+            </a:r>
+          </a:p>
+          <a:p>
+            <a:pPr>
+              <a:spcAft>
+                <a:spcPts val="800"/>
+              </a:spcAft>
+            </a:pPr>
+            <a:r>
+              <a:rPr sz="2000">
+                <a:solidFill>
+                  <a:srgbClr val="212121"/>
+                </a:solidFill>
+              </a:rPr>
+              <a:t/>
+            </a:r>
+          </a:p>
+          <a:p>
+            <a:pPr lvl="1">
+              <a:spcAft>
+                <a:spcPts val="800"/>
+              </a:spcAft>
+            </a:pPr>
+            <a:r>
+              <a:rPr sz="1800">
+                <a:solidFill>
+                  <a:srgbClr val="212121"/>
+                </a:solidFill>
+              </a:rPr>
+              <a:t>Narrowing (Δ) — recovers what widening overshot. Re-reading the guard x &lt; 100 pulls [0, +∞) back to [0, 100]: precision restored, still terminating.</a:t>
+            </a:r>
+          </a:p>
+          <a:p>
+            <a:pPr>
+              <a:spcAft>
+                <a:spcPts val="800"/>
+              </a:spcAft>
+            </a:pPr>
+            <a:r>
+              <a:rPr sz="2000">
+                <a:solidFill>
+                  <a:srgbClr val="212121"/>
+                </a:solidFill>
+              </a:rPr>
+              <a:t/>
+            </a:r>
+          </a:p>
+          <a:p>
+            <a:pPr>
+              <a:spcAft>
+                <a:spcPts val="800"/>
+              </a:spcAft>
+            </a:pPr>
+            <a:r>
+              <a:rPr sz="2000">
+                <a:solidFill>
+                  <a:srgbClr val="212121"/>
+                </a:solidFill>
+              </a:rPr>
+              <a:t>ESBMC ships it too — --interval-analysis — and can supply the invariant k-induction needs (Session 2, Lab 3).</a:t>
             </a:r>
           </a:p>
         </p:txBody>
@@ -12837,7 +12936,7 @@
                   <a:srgbClr val="5A0A7A"/>
                 </a:solidFill>
               </a:rPr>
-              <a:t>Discussion</a:t>
+              <a:t>Who uses this? — Proofs all the way up</a:t>
             </a:r>
           </a:p>
         </p:txBody>
@@ -12850,8 +12949,8 @@
         </p:nvSpPr>
         <p:spPr>
           <a:xfrm>
-            <a:off x="731520" y="2194560"/>
-            <a:ext cx="10789920" cy="4389120"/>
+            <a:off x="731520" y="1463040"/>
+            <a:ext cx="10789920" cy="5120640"/>
           </a:xfrm>
           <a:prstGeom prst="rect">
             <a:avLst/>
@@ -12870,42 +12969,42 @@
               </a:spcAft>
             </a:pPr>
             <a:r>
-              <a:rPr sz="2800">
-                <a:solidFill>
-                  <a:srgbClr val="212121"/>
-                </a:solidFill>
-              </a:rPr>
-              <a:t>If verification can prove the absence of bugs…</a:t>
-            </a:r>
-          </a:p>
-          <a:p>
-            <a:pPr>
-              <a:spcAft>
-                <a:spcPts val="800"/>
-              </a:spcAft>
-            </a:pPr>
-            <a:r>
-              <a:rPr sz="2800">
-                <a:solidFill>
-                  <a:srgbClr val="212121"/>
-                </a:solidFill>
-              </a:rPr>
-              <a:t>why isn't all software verified?</a:t>
-            </a:r>
-          </a:p>
-          <a:p>
-            <a:pPr>
-              <a:spcAft>
-                <a:spcPts val="800"/>
-              </a:spcAft>
-            </a:pPr>
-            <a:r>
-              <a:rPr sz="2800">
-                <a:solidFill>
-                  <a:srgbClr val="212121"/>
-                </a:solidFill>
-              </a:rPr>
-              <a:t>(Let's collect reasons — then I'll tell you which ones the industry actually cites.)</a:t>
+              <a:rPr sz="2200">
+                <a:solidFill>
+                  <a:srgbClr val="212121"/>
+                </a:solidFill>
+              </a:rPr>
+              <a:t>Astrée (abstract interpretation) proved absence of runtime errors in the Airbus A340 fly-by-wire code — 132,000 lines of C — and was then applied to the A380</a:t>
+            </a:r>
+          </a:p>
+          <a:p>
+            <a:pPr>
+              <a:spcAft>
+                <a:spcPts val="800"/>
+              </a:spcAft>
+            </a:pPr>
+            <a:r>
+              <a:rPr sz="2200">
+                <a:solidFill>
+                  <a:srgbClr val="212121"/>
+                </a:solidFill>
+              </a:rPr>
+              <a:t>seL4 — an OS microkernel with a machine-checked proof of functional correctness</a:t>
+            </a:r>
+          </a:p>
+          <a:p>
+            <a:pPr>
+              <a:spcAft>
+                <a:spcPts val="800"/>
+              </a:spcAft>
+            </a:pPr>
+            <a:r>
+              <a:rPr sz="2200">
+                <a:solidFill>
+                  <a:srgbClr val="212121"/>
+                </a:solidFill>
+              </a:rPr>
+              <a:t>CompCert — a C compiler with a proof that compilation preserves semantics; six CPU-years of fuzzing found no wrong-code bugs in its verified core, while every other compiler tested failed</a:t>
             </a:r>
           </a:p>
         </p:txBody>
@@ -12956,7 +13055,7 @@
                   <a:srgbClr val="5A0A7A"/>
                 </a:solidFill>
               </a:rPr>
-              <a:t>Under the hood — and how to hack on it</a:t>
+              <a:t>Discussion</a:t>
             </a:r>
           </a:p>
         </p:txBody>
@@ -12969,8 +13068,8 @@
         </p:nvSpPr>
         <p:spPr>
           <a:xfrm>
-            <a:off x="731520" y="1463040"/>
-            <a:ext cx="10789920" cy="5120640"/>
+            <a:off x="731520" y="2194560"/>
+            <a:ext cx="10789920" cy="4389120"/>
           </a:xfrm>
           <a:prstGeom prst="rect">
             <a:avLst/>
@@ -12989,157 +13088,42 @@
               </a:spcAft>
             </a:pPr>
             <a:r>
-              <a:rPr sz="2200">
-                <a:solidFill>
-                  <a:srgbClr val="212121"/>
-                </a:solidFill>
-              </a:rPr>
-              <a:t>Tonight's pipeline was the conceptual one. ESBMC's real pipeline:</a:t>
-            </a:r>
-          </a:p>
-          <a:p>
-            <a:pPr lvl="1">
-              <a:spcAft>
-                <a:spcPts val="800"/>
-              </a:spcAft>
-            </a:pPr>
-            <a:r>
-              <a:rPr sz="2000">
-                <a:solidFill>
-                  <a:srgbClr val="212121"/>
-                </a:solidFill>
-              </a:rPr>
-              <a:t>Clang frontend → irep2 (typed IR) → GOTO program → symbolic execution (unwind, SSA) → SMT backends (Z3, Bitwuzla, cvc5)</a:t>
-            </a:r>
-          </a:p>
-          <a:p>
-            <a:pPr>
-              <a:spcAft>
-                <a:spcPts val="800"/>
-              </a:spcAft>
-            </a:pPr>
-            <a:r>
-              <a:rPr sz="2200">
-                <a:solidFill>
-                  <a:srgbClr val="212121"/>
-                </a:solidFill>
-              </a:rPr>
-              <a:t/>
-            </a:r>
-          </a:p>
-          <a:p>
-            <a:pPr>
-              <a:spcAft>
-                <a:spcPts val="800"/>
-              </a:spcAft>
-            </a:pPr>
-            <a:r>
-              <a:rPr sz="2200">
-                <a:solidFill>
-                  <a:srgbClr val="212121"/>
-                </a:solidFill>
-              </a:rPr>
-              <a:t>irep2 is the typed, reference-counted representation everything lowers to and every backend consumes.</a:t>
-            </a:r>
-          </a:p>
-          <a:p>
-            <a:pPr>
-              <a:spcAft>
-                <a:spcPts val="800"/>
-              </a:spcAft>
-            </a:pPr>
-            <a:r>
-              <a:rPr sz="2200">
-                <a:solidFill>
-                  <a:srgbClr val="212121"/>
-                </a:solidFill>
-              </a:rPr>
-              <a:t>Want to add a check, a frontend, or a new node type? Start here:</a:t>
-            </a:r>
-          </a:p>
-          <a:p>
-            <a:pPr lvl="1">
-              <a:spcAft>
-                <a:spcPts val="0"/>
-              </a:spcAft>
-            </a:pPr>
-            <a:r>
-              <a:rPr sz="1800">
-                <a:solidFill>
-                  <a:srgbClr val="212121"/>
-                </a:solidFill>
-                <a:latin typeface="Courier New"/>
-              </a:rPr>
-              <a:t>github.com/esbmc/esbmc  →  src/irep2/README.md</a:t>
-            </a:r>
-          </a:p>
-          <a:p>
-            <a:pPr>
-              <a:spcAft>
-                <a:spcPts val="800"/>
-              </a:spcAft>
-            </a:pPr>
-            <a:r>
-              <a:rPr sz="2200">
-                <a:solidFill>
-                  <a:srgbClr val="212121"/>
-                </a:solidFill>
-              </a:rPr>
-              <a:t/>
-            </a:r>
-          </a:p>
-          <a:p>
-            <a:pPr>
-              <a:spcAft>
-                <a:spcPts val="800"/>
-              </a:spcAft>
-            </a:pPr>
-            <a:r>
-              <a:rPr sz="2200">
-                <a:solidFill>
-                  <a:srgbClr val="212121"/>
-                </a:solidFill>
-              </a:rPr>
-              <a:t>For the curious — and anyone who wants to contribute.</a:t>
-            </a:r>
-          </a:p>
-        </p:txBody>
-      </p:sp>
-      <p:sp>
-        <p:nvSpPr>
-          <p:cNvPr id="4" name="TextBox 3"/>
-          <p:cNvSpPr txBox="1"/>
-          <p:nvPr/>
-        </p:nvSpPr>
-        <p:spPr>
-          <a:xfrm>
-            <a:off x="731520" y="6400800"/>
-            <a:ext cx="10789920" cy="182880"/>
-          </a:xfrm>
-          <a:prstGeom prst="rect">
-            <a:avLst/>
-          </a:prstGeom>
-          <a:noFill/>
-        </p:spPr>
-        <p:txBody>
-          <a:bodyPr wrap="square">
-            <a:spAutoFit/>
-          </a:bodyPr>
-          <a:lstStyle/>
-          <a:p>
-            <a:pPr>
-              <a:spcAft>
-                <a:spcPts val="800"/>
-              </a:spcAft>
-            </a:pPr>
-            <a:r>
-              <a:rPr sz="1400">
-                <a:solidFill>
-                  <a:srgbClr val="212121"/>
-                </a:solidFill>
-                <a:hlinkClick r:id="rId2"/>
-              </a:rPr>
-              <a:t>src/irep2/README.md</a:t>
+              <a:rPr sz="2800">
+                <a:solidFill>
+                  <a:srgbClr val="212121"/>
+                </a:solidFill>
+              </a:rPr>
+              <a:t>If verification can prove the absence of bugs…</a:t>
+            </a:r>
+          </a:p>
+          <a:p>
+            <a:pPr>
+              <a:spcAft>
+                <a:spcPts val="800"/>
+              </a:spcAft>
+            </a:pPr>
+            <a:r>
+              <a:rPr sz="2800">
+                <a:solidFill>
+                  <a:srgbClr val="212121"/>
+                </a:solidFill>
+              </a:rPr>
+              <a:t>why isn't all software verified?</a:t>
+            </a:r>
+          </a:p>
+          <a:p>
+            <a:pPr>
+              <a:spcAft>
+                <a:spcPts val="800"/>
+              </a:spcAft>
+            </a:pPr>
+            <a:r>
+              <a:rPr sz="2800">
+                <a:solidFill>
+                  <a:srgbClr val="212121"/>
+                </a:solidFill>
+              </a:rPr>
+              <a:t>(Let's collect reasons — then I'll tell you which ones the industry actually cites.)</a:t>
             </a:r>
           </a:p>
         </p:txBody>
@@ -13190,7 +13174,7 @@
                   <a:srgbClr val="5A0A7A"/>
                 </a:solidFill>
               </a:rPr>
-              <a:t>Closing quiz</a:t>
+              <a:t>Under the hood — and how to hack on it</a:t>
             </a:r>
           </a:p>
         </p:txBody>
@@ -13223,72 +13207,157 @@
               </a:spcAft>
             </a:pPr>
             <a:r>
-              <a:rPr sz="2400">
-                <a:solidFill>
-                  <a:srgbClr val="212121"/>
-                </a:solidFill>
-              </a:rPr>
-              <a:t>1. A tool that never raises a false alarm is called …?</a:t>
-            </a:r>
-          </a:p>
-          <a:p>
-            <a:pPr>
-              <a:spcAft>
-                <a:spcPts val="800"/>
-              </a:spcAft>
-            </a:pPr>
-            <a:r>
-              <a:rPr sz="2400">
-                <a:solidFill>
-                  <a:srgbClr val="212121"/>
-                </a:solidFill>
-              </a:rPr>
-              <a:t>2. ESBMC returns UNSAT for C ∧ ¬P at --unwind 10. What do we know?</a:t>
-            </a:r>
-          </a:p>
-          <a:p>
-            <a:pPr>
-              <a:spcAft>
-                <a:spcPts val="800"/>
-              </a:spcAft>
-            </a:pPr>
-            <a:r>
-              <a:rPr sz="2400">
-                <a:solidFill>
-                  <a:srgbClr val="212121"/>
-                </a:solidFill>
-              </a:rPr>
-              <a:t>3. What's inside a counterexample?</a:t>
-            </a:r>
-          </a:p>
-          <a:p>
-            <a:pPr>
-              <a:spcAft>
-                <a:spcPts val="800"/>
-              </a:spcAft>
-            </a:pPr>
-            <a:r>
-              <a:rPr sz="2400">
-                <a:solidFill>
-                  <a:srgbClr val="212121"/>
-                </a:solidFill>
-              </a:rPr>
-              <a:t>4. Which technique proved the A340 flight-control code free of runtime errors?</a:t>
-            </a:r>
-          </a:p>
-          <a:p>
-            <a:pPr>
-              <a:spcAft>
-                <a:spcPts val="800"/>
-              </a:spcAft>
-            </a:pPr>
-            <a:r>
-              <a:rPr sz="2400">
-                <a:solidFill>
-                  <a:srgbClr val="212121"/>
-                </a:solidFill>
-              </a:rPr>
-              <a:t>5. Why can't testing prove the getPassword program safe?</a:t>
+              <a:rPr sz="2200">
+                <a:solidFill>
+                  <a:srgbClr val="212121"/>
+                </a:solidFill>
+              </a:rPr>
+              <a:t>Tonight's pipeline was the conceptual one. ESBMC's real pipeline:</a:t>
+            </a:r>
+          </a:p>
+          <a:p>
+            <a:pPr lvl="1">
+              <a:spcAft>
+                <a:spcPts val="800"/>
+              </a:spcAft>
+            </a:pPr>
+            <a:r>
+              <a:rPr sz="2000">
+                <a:solidFill>
+                  <a:srgbClr val="212121"/>
+                </a:solidFill>
+              </a:rPr>
+              <a:t>Clang frontend → irep2 (typed IR) → GOTO program → symbolic execution (unwind, SSA) → SMT backends (Z3, Bitwuzla, cvc5)</a:t>
+            </a:r>
+          </a:p>
+          <a:p>
+            <a:pPr>
+              <a:spcAft>
+                <a:spcPts val="800"/>
+              </a:spcAft>
+            </a:pPr>
+            <a:r>
+              <a:rPr sz="2200">
+                <a:solidFill>
+                  <a:srgbClr val="212121"/>
+                </a:solidFill>
+              </a:rPr>
+              <a:t/>
+            </a:r>
+          </a:p>
+          <a:p>
+            <a:pPr>
+              <a:spcAft>
+                <a:spcPts val="800"/>
+              </a:spcAft>
+            </a:pPr>
+            <a:r>
+              <a:rPr sz="2200">
+                <a:solidFill>
+                  <a:srgbClr val="212121"/>
+                </a:solidFill>
+              </a:rPr>
+              <a:t>irep2 is the typed, reference-counted representation everything lowers to and every backend consumes.</a:t>
+            </a:r>
+          </a:p>
+          <a:p>
+            <a:pPr>
+              <a:spcAft>
+                <a:spcPts val="800"/>
+              </a:spcAft>
+            </a:pPr>
+            <a:r>
+              <a:rPr sz="2200">
+                <a:solidFill>
+                  <a:srgbClr val="212121"/>
+                </a:solidFill>
+              </a:rPr>
+              <a:t>Want to add a check, a frontend, or a new node type? Start here:</a:t>
+            </a:r>
+          </a:p>
+          <a:p>
+            <a:pPr lvl="1">
+              <a:spcAft>
+                <a:spcPts val="0"/>
+              </a:spcAft>
+            </a:pPr>
+            <a:r>
+              <a:rPr sz="1800">
+                <a:solidFill>
+                  <a:srgbClr val="212121"/>
+                </a:solidFill>
+                <a:latin typeface="Courier New"/>
+              </a:rPr>
+              <a:t>github.com/esbmc/esbmc  →  src/irep2/README.md</a:t>
+            </a:r>
+          </a:p>
+          <a:p>
+            <a:pPr>
+              <a:spcAft>
+                <a:spcPts val="800"/>
+              </a:spcAft>
+            </a:pPr>
+            <a:r>
+              <a:rPr sz="2200">
+                <a:solidFill>
+                  <a:srgbClr val="212121"/>
+                </a:solidFill>
+              </a:rPr>
+              <a:t/>
+            </a:r>
+          </a:p>
+          <a:p>
+            <a:pPr>
+              <a:spcAft>
+                <a:spcPts val="800"/>
+              </a:spcAft>
+            </a:pPr>
+            <a:r>
+              <a:rPr sz="2200">
+                <a:solidFill>
+                  <a:srgbClr val="212121"/>
+                </a:solidFill>
+              </a:rPr>
+              <a:t>For the curious — and anyone who wants to contribute.</a:t>
+            </a:r>
+          </a:p>
+        </p:txBody>
+      </p:sp>
+      <p:sp>
+        <p:nvSpPr>
+          <p:cNvPr id="4" name="TextBox 3"/>
+          <p:cNvSpPr txBox="1"/>
+          <p:nvPr/>
+        </p:nvSpPr>
+        <p:spPr>
+          <a:xfrm>
+            <a:off x="731520" y="6400800"/>
+            <a:ext cx="10789920" cy="182880"/>
+          </a:xfrm>
+          <a:prstGeom prst="rect">
+            <a:avLst/>
+          </a:prstGeom>
+          <a:noFill/>
+        </p:spPr>
+        <p:txBody>
+          <a:bodyPr wrap="square">
+            <a:spAutoFit/>
+          </a:bodyPr>
+          <a:lstStyle/>
+          <a:p>
+            <a:pPr>
+              <a:spcAft>
+                <a:spcPts val="800"/>
+              </a:spcAft>
+            </a:pPr>
+            <a:r>
+              <a:rPr sz="1400">
+                <a:solidFill>
+                  <a:srgbClr val="212121"/>
+                </a:solidFill>
+                <a:hlinkClick r:id="rId2"/>
+              </a:rPr>
+              <a:t>src/irep2/README.md</a:t>
             </a:r>
           </a:p>
         </p:txBody>
@@ -13302,6 +13371,155 @@
 </file>
 
 <file path=ppt/slides/slide54.xml><?xml version="1.0" encoding="utf-8"?>
+<p:sld xmlns:a="http://schemas.openxmlformats.org/drawingml/2006/main" xmlns:p="http://schemas.openxmlformats.org/presentationml/2006/main" xmlns:r="http://schemas.openxmlformats.org/officeDocument/2006/relationships">
+  <p:cSld>
+    <p:spTree>
+      <p:nvGrpSpPr>
+        <p:cNvPr id="1" name=""/>
+        <p:cNvGrpSpPr/>
+        <p:nvPr/>
+      </p:nvGrpSpPr>
+      <p:grpSpPr/>
+      <p:sp>
+        <p:nvSpPr>
+          <p:cNvPr id="2" name="TextBox 1"/>
+          <p:cNvSpPr txBox="1"/>
+          <p:nvPr/>
+        </p:nvSpPr>
+        <p:spPr>
+          <a:xfrm>
+            <a:off x="548640" y="365760"/>
+            <a:ext cx="11064240" cy="1005840"/>
+          </a:xfrm>
+          <a:prstGeom prst="rect">
+            <a:avLst/>
+          </a:prstGeom>
+          <a:noFill/>
+        </p:spPr>
+        <p:txBody>
+          <a:bodyPr wrap="square">
+            <a:spAutoFit/>
+          </a:bodyPr>
+          <a:lstStyle/>
+          <a:p>
+            <a:r>
+              <a:rPr sz="3600" b="1">
+                <a:solidFill>
+                  <a:srgbClr val="5A0A7A"/>
+                </a:solidFill>
+              </a:rPr>
+              <a:t>Closing quiz</a:t>
+            </a:r>
+          </a:p>
+        </p:txBody>
+      </p:sp>
+      <p:sp>
+        <p:nvSpPr>
+          <p:cNvPr id="3" name="TextBox 2"/>
+          <p:cNvSpPr txBox="1"/>
+          <p:nvPr/>
+        </p:nvSpPr>
+        <p:spPr>
+          <a:xfrm>
+            <a:off x="731520" y="1463040"/>
+            <a:ext cx="10789920" cy="5120640"/>
+          </a:xfrm>
+          <a:prstGeom prst="rect">
+            <a:avLst/>
+          </a:prstGeom>
+          <a:noFill/>
+        </p:spPr>
+        <p:txBody>
+          <a:bodyPr wrap="square">
+            <a:spAutoFit/>
+          </a:bodyPr>
+          <a:lstStyle/>
+          <a:p>
+            <a:pPr>
+              <a:spcAft>
+                <a:spcPts val="800"/>
+              </a:spcAft>
+            </a:pPr>
+            <a:r>
+              <a:rPr sz="2400">
+                <a:solidFill>
+                  <a:srgbClr val="212121"/>
+                </a:solidFill>
+              </a:rPr>
+              <a:t>1. A tool that never raises a false alarm is called …?</a:t>
+            </a:r>
+          </a:p>
+          <a:p>
+            <a:pPr>
+              <a:spcAft>
+                <a:spcPts val="800"/>
+              </a:spcAft>
+            </a:pPr>
+            <a:r>
+              <a:rPr sz="2400">
+                <a:solidFill>
+                  <a:srgbClr val="212121"/>
+                </a:solidFill>
+              </a:rPr>
+              <a:t>2. ESBMC returns UNSAT for C ∧ ¬P at --unwind 10. What do we know?</a:t>
+            </a:r>
+          </a:p>
+          <a:p>
+            <a:pPr>
+              <a:spcAft>
+                <a:spcPts val="800"/>
+              </a:spcAft>
+            </a:pPr>
+            <a:r>
+              <a:rPr sz="2400">
+                <a:solidFill>
+                  <a:srgbClr val="212121"/>
+                </a:solidFill>
+              </a:rPr>
+              <a:t>3. What's inside a counterexample?</a:t>
+            </a:r>
+          </a:p>
+          <a:p>
+            <a:pPr>
+              <a:spcAft>
+                <a:spcPts val="800"/>
+              </a:spcAft>
+            </a:pPr>
+            <a:r>
+              <a:rPr sz="2400">
+                <a:solidFill>
+                  <a:srgbClr val="212121"/>
+                </a:solidFill>
+              </a:rPr>
+              <a:t>4. Which technique proved the A340 flight-control code free of runtime errors?</a:t>
+            </a:r>
+          </a:p>
+          <a:p>
+            <a:pPr>
+              <a:spcAft>
+                <a:spcPts val="800"/>
+              </a:spcAft>
+            </a:pPr>
+            <a:r>
+              <a:rPr sz="2400">
+                <a:solidFill>
+                  <a:srgbClr val="212121"/>
+                </a:solidFill>
+              </a:rPr>
+              <a:t>5. Why can't testing prove the getPassword program safe?</a:t>
+            </a:r>
+          </a:p>
+        </p:txBody>
+      </p:sp>
+    </p:spTree>
+  </p:cSld>
+  <p:clrMapOvr>
+    <a:masterClrMapping/>
+  </p:clrMapOvr>
+</p:sld>
+</file>
+
+<file path=ppt/slides/slide55.xml><?xml version="1.0" encoding="utf-8"?>
 <p:sld xmlns:a="http://schemas.openxmlformats.org/drawingml/2006/main" xmlns:p="http://schemas.openxmlformats.org/presentationml/2006/main" xmlns:r="http://schemas.openxmlformats.org/officeDocument/2006/relationships">
   <p:cSld>
     <p:spTree>
